--- a/docs/Blueprint Books Pitch Deck - Raves.pptx
+++ b/docs/Blueprint Books Pitch Deck - Raves.pptx
@@ -2,20 +2,22 @@
 <file path=ppt/presentation.xml><?xml version="1.0" encoding="utf-8"?>
 <p:presentation xmlns:p="http://schemas.openxmlformats.org/presentationml/2006/main">
   <p:sldMasterIdLst>
-    <p:sldMasterId xmlns:r="http://schemas.openxmlformats.org/officeDocument/2006/relationships" id="2147483648" r:id="R0cd7c1cf701b40e1"/>
+    <p:sldMasterId xmlns:r="http://schemas.openxmlformats.org/officeDocument/2006/relationships" id="2147483648" r:id="Rf14e05ef57b24e9c"/>
   </p:sldMasterIdLst>
   <p:notesMasterIdLst>
-    <p:notesMasterId xmlns:r="http://schemas.openxmlformats.org/officeDocument/2006/relationships" r:id="R34509a59db284d2b"/>
+    <p:notesMasterId xmlns:r="http://schemas.openxmlformats.org/officeDocument/2006/relationships" r:id="R317b44486bf04c72"/>
   </p:notesMasterIdLst>
   <p:sldIdLst>
-    <p:sldId xmlns:r="http://schemas.openxmlformats.org/officeDocument/2006/relationships" id="256" r:id="R0613717b404a4307"/>
-    <p:sldId xmlns:r="http://schemas.openxmlformats.org/officeDocument/2006/relationships" id="257" r:id="R6c28ecc827d94c07"/>
-    <p:sldId xmlns:r="http://schemas.openxmlformats.org/officeDocument/2006/relationships" id="258" r:id="Re8751f3d3c76480c"/>
-    <p:sldId xmlns:r="http://schemas.openxmlformats.org/officeDocument/2006/relationships" id="259" r:id="R067281ac54c0471d"/>
-    <p:sldId xmlns:r="http://schemas.openxmlformats.org/officeDocument/2006/relationships" id="260" r:id="R3ddff4d447fd41a7"/>
-    <p:sldId xmlns:r="http://schemas.openxmlformats.org/officeDocument/2006/relationships" id="261" r:id="R66320dd557944bec"/>
-    <p:sldId xmlns:r="http://schemas.openxmlformats.org/officeDocument/2006/relationships" id="262" r:id="Rebb1eff327664350"/>
-    <p:sldId xmlns:r="http://schemas.openxmlformats.org/officeDocument/2006/relationships" id="263" r:id="R4ff9329bb7694837"/>
+    <p:sldId xmlns:r="http://schemas.openxmlformats.org/officeDocument/2006/relationships" id="256" r:id="Raaedf9bd2e694423"/>
+    <p:sldId xmlns:r="http://schemas.openxmlformats.org/officeDocument/2006/relationships" id="257" r:id="R9d1d038ce5844c80"/>
+    <p:sldId xmlns:r="http://schemas.openxmlformats.org/officeDocument/2006/relationships" id="258" r:id="Rc2733e4a7d7949a5"/>
+    <p:sldId xmlns:r="http://schemas.openxmlformats.org/officeDocument/2006/relationships" id="259" r:id="R0f1c4cef95ea4960"/>
+    <p:sldId xmlns:r="http://schemas.openxmlformats.org/officeDocument/2006/relationships" id="260" r:id="R346ef0355caa42e1"/>
+    <p:sldId xmlns:r="http://schemas.openxmlformats.org/officeDocument/2006/relationships" id="261" r:id="R284466f0c2364cc7"/>
+    <p:sldId xmlns:r="http://schemas.openxmlformats.org/officeDocument/2006/relationships" id="262" r:id="R46c88fd8ff7b4916"/>
+    <p:sldId xmlns:r="http://schemas.openxmlformats.org/officeDocument/2006/relationships" id="263" r:id="R2fa291400b4f4e3c"/>
+    <p:sldId xmlns:r="http://schemas.openxmlformats.org/officeDocument/2006/relationships" id="264" r:id="R69943f9468484923"/>
+    <p:sldId xmlns:r="http://schemas.openxmlformats.org/officeDocument/2006/relationships" id="265" r:id="R878ed77bdc024aa6"/>
   </p:sldIdLst>
   <p:sldSz cx="12192000" cy="6858000"/>
   <p:notesSz cx="6858000" cy="9144000"/>
@@ -524,6 +526,72 @@
 </p:notes>
 </file>
 
+<file path=ppt/notesSlides/notesSlide10.xml><?xml version="1.0" encoding="utf-8"?>
+<p:notes xmlns:p="http://schemas.openxmlformats.org/presentationml/2006/main">
+  <p:cSld>
+    <p:spTree>
+      <p:nvGrpSpPr>
+        <p:cNvPr id="1" name=""/>
+        <p:cNvGrpSpPr/>
+        <p:nvPr/>
+      </p:nvGrpSpPr>
+      <p:grpSpPr>
+        <a:xfrm xmlns:a="http://schemas.openxmlformats.org/drawingml/2006/main"/>
+      </p:grpSpPr>
+      <p:sp>
+        <p:nvSpPr>
+          <p:cNvPr id="2" name="Slide Image Placeholder 1"/>
+          <p:cNvSpPr>
+            <a:spLocks xmlns:a="http://schemas.openxmlformats.org/drawingml/2006/main" noGrp="1"/>
+          </p:cNvSpPr>
+          <p:nvPr>
+            <p:ph type="sldImg" idx="0"/>
+          </p:nvPr>
+        </p:nvSpPr>
+        <p:spPr/>
+      </p:sp>
+      <p:sp>
+        <p:nvSpPr>
+          <p:cNvPr id="3" name="Notes Placeholder 2"/>
+          <p:cNvSpPr>
+            <a:spLocks xmlns:a="http://schemas.openxmlformats.org/drawingml/2006/main" noGrp="1"/>
+          </p:cNvSpPr>
+          <p:nvPr>
+            <p:ph type="body" idx="1"/>
+          </p:nvPr>
+        </p:nvSpPr>
+        <p:spPr/>
+        <p:txBody>
+          <a:bodyPr xmlns:a="http://schemas.openxmlformats.org/drawingml/2006/main"/>
+          <a:lstStyle xmlns:a="http://schemas.openxmlformats.org/drawingml/2006/main"/>
+          <a:p xmlns:a="http://schemas.openxmlformats.org/drawingml/2006/main"/>
+        </p:txBody>
+      </p:sp>
+      <p:sp>
+        <p:nvSpPr>
+          <p:cNvPr id="4" name="Slide Number Placeholder 3"/>
+          <p:cNvSpPr>
+            <a:spLocks xmlns:a="http://schemas.openxmlformats.org/drawingml/2006/main" noGrp="1"/>
+          </p:cNvSpPr>
+          <p:nvPr>
+            <p:ph type="sldNum" idx="5"/>
+          </p:nvPr>
+        </p:nvSpPr>
+        <p:spPr/>
+        <p:txBody>
+          <a:bodyPr xmlns:a="http://schemas.openxmlformats.org/drawingml/2006/main"/>
+          <a:lstStyle xmlns:a="http://schemas.openxmlformats.org/drawingml/2006/main"/>
+          <a:p xmlns:a="http://schemas.openxmlformats.org/drawingml/2006/main"/>
+        </p:txBody>
+      </p:sp>
+    </p:spTree>
+  </p:cSld>
+  <p:clrMapOvr>
+    <a:masterClrMapping xmlns:a="http://schemas.openxmlformats.org/drawingml/2006/main"/>
+  </p:clrMapOvr>
+</p:notes>
+</file>
+
 <file path=ppt/notesSlides/notesSlide2.xml><?xml version="1.0" encoding="utf-8"?>
 <p:notes xmlns:p="http://schemas.openxmlformats.org/presentationml/2006/main">
   <p:cSld>
@@ -921,6 +989,72 @@
 </file>
 
 <file path=ppt/notesSlides/notesSlide8.xml><?xml version="1.0" encoding="utf-8"?>
+<p:notes xmlns:p="http://schemas.openxmlformats.org/presentationml/2006/main">
+  <p:cSld>
+    <p:spTree>
+      <p:nvGrpSpPr>
+        <p:cNvPr id="1" name=""/>
+        <p:cNvGrpSpPr/>
+        <p:nvPr/>
+      </p:nvGrpSpPr>
+      <p:grpSpPr>
+        <a:xfrm xmlns:a="http://schemas.openxmlformats.org/drawingml/2006/main"/>
+      </p:grpSpPr>
+      <p:sp>
+        <p:nvSpPr>
+          <p:cNvPr id="2" name="Slide Image Placeholder 1"/>
+          <p:cNvSpPr>
+            <a:spLocks xmlns:a="http://schemas.openxmlformats.org/drawingml/2006/main" noGrp="1"/>
+          </p:cNvSpPr>
+          <p:nvPr>
+            <p:ph type="sldImg" idx="0"/>
+          </p:nvPr>
+        </p:nvSpPr>
+        <p:spPr/>
+      </p:sp>
+      <p:sp>
+        <p:nvSpPr>
+          <p:cNvPr id="3" name="Notes Placeholder 2"/>
+          <p:cNvSpPr>
+            <a:spLocks xmlns:a="http://schemas.openxmlformats.org/drawingml/2006/main" noGrp="1"/>
+          </p:cNvSpPr>
+          <p:nvPr>
+            <p:ph type="body" idx="1"/>
+          </p:nvPr>
+        </p:nvSpPr>
+        <p:spPr/>
+        <p:txBody>
+          <a:bodyPr xmlns:a="http://schemas.openxmlformats.org/drawingml/2006/main"/>
+          <a:lstStyle xmlns:a="http://schemas.openxmlformats.org/drawingml/2006/main"/>
+          <a:p xmlns:a="http://schemas.openxmlformats.org/drawingml/2006/main"/>
+        </p:txBody>
+      </p:sp>
+      <p:sp>
+        <p:nvSpPr>
+          <p:cNvPr id="4" name="Slide Number Placeholder 3"/>
+          <p:cNvSpPr>
+            <a:spLocks xmlns:a="http://schemas.openxmlformats.org/drawingml/2006/main" noGrp="1"/>
+          </p:cNvSpPr>
+          <p:nvPr>
+            <p:ph type="sldNum" idx="5"/>
+          </p:nvPr>
+        </p:nvSpPr>
+        <p:spPr/>
+        <p:txBody>
+          <a:bodyPr xmlns:a="http://schemas.openxmlformats.org/drawingml/2006/main"/>
+          <a:lstStyle xmlns:a="http://schemas.openxmlformats.org/drawingml/2006/main"/>
+          <a:p xmlns:a="http://schemas.openxmlformats.org/drawingml/2006/main"/>
+        </p:txBody>
+      </p:sp>
+    </p:spTree>
+  </p:cSld>
+  <p:clrMapOvr>
+    <a:masterClrMapping xmlns:a="http://schemas.openxmlformats.org/drawingml/2006/main"/>
+  </p:clrMapOvr>
+</p:notes>
+</file>
+
+<file path=ppt/notesSlides/notesSlide9.xml><?xml version="1.0" encoding="utf-8"?>
 <p:notes xmlns:p="http://schemas.openxmlformats.org/presentationml/2006/main">
   <p:cSld>
     <p:spTree>
@@ -1024,7 +1158,7 @@
   </p:cSld>
   <p:clrMap bg1="lt1" tx1="dk1" bg2="lt2" tx2="dk2" accent1="accent1" accent2="accent2" accent3="accent3" accent4="accent4" accent5="accent5" accent6="accent6" hlink="hlink" folHlink="folHlink"/>
   <p:sldLayoutIdLst>
-    <p:sldLayoutId xmlns:r="http://schemas.openxmlformats.org/officeDocument/2006/relationships" id="2147483649" r:id="Rd679ddfa08f7437c"/>
+    <p:sldLayoutId xmlns:r="http://schemas.openxmlformats.org/officeDocument/2006/relationships" id="2147483649" r:id="R54f0412992c249d9"/>
   </p:sldLayoutIdLst>
   <p:txStyles>
     <p:titleStyle>
@@ -1522,7 +1656,7 @@
           <p:cNvPr id="1" name="">
             <a:extLst xmlns:a="http://schemas.openxmlformats.org/drawingml/2006/main">
               <a:ext uri="{FF2B5EF4-FFF2-40B4-BE49-F238E27FC236}">
-                <a16:creationId xmlns:a16="http://schemas.microsoft.com/office/drawing/2014/main" id="{ABA7893B-E063-4737-816F-CF57963BED2B}"/>
+                <a16:creationId xmlns:a16="http://schemas.microsoft.com/office/drawing/2014/main" id="{3B9F8291-6C4D-4F42-8DFA-A7575E06C5DA}"/>
               </a:ext>
             </a:extLst>
           </p:cNvPr>
@@ -1555,7 +1689,7 @@
           <p:cNvPr id="2" name="">
             <a:extLst xmlns:a="http://schemas.openxmlformats.org/drawingml/2006/main">
               <a:ext uri="{FF2B5EF4-FFF2-40B4-BE49-F238E27FC236}">
-                <a16:creationId xmlns:a16="http://schemas.microsoft.com/office/drawing/2014/main" id="{CA8A6C01-5287-4131-B83F-390DCB6C0F66}"/>
+                <a16:creationId xmlns:a16="http://schemas.microsoft.com/office/drawing/2014/main" id="{D13F3B9B-4EC5-4FC3-9162-1C7AB97C9CE2}"/>
               </a:ext>
             </a:extLst>
           </p:cNvPr>
@@ -1588,7 +1722,7 @@
           <p:cNvPr id="3" name="">
             <a:extLst xmlns:a="http://schemas.openxmlformats.org/drawingml/2006/main">
               <a:ext uri="{FF2B5EF4-FFF2-40B4-BE49-F238E27FC236}">
-                <a16:creationId xmlns:a16="http://schemas.microsoft.com/office/drawing/2014/main" id="{002D0893-8DA4-4A4F-9065-E150ABC383A1}"/>
+                <a16:creationId xmlns:a16="http://schemas.microsoft.com/office/drawing/2014/main" id="{F275A4B9-3FE2-43E5-A2DC-C3C05D25A552}"/>
               </a:ext>
             </a:extLst>
           </p:cNvPr>
@@ -1639,7 +1773,7 @@
           <p:cNvPr id="4" name="">
             <a:extLst xmlns:a="http://schemas.openxmlformats.org/drawingml/2006/main">
               <a:ext uri="{FF2B5EF4-FFF2-40B4-BE49-F238E27FC236}">
-                <a16:creationId xmlns:a16="http://schemas.microsoft.com/office/drawing/2014/main" id="{1837820D-AF81-4BA2-9847-86120ECFE56F}"/>
+                <a16:creationId xmlns:a16="http://schemas.microsoft.com/office/drawing/2014/main" id="{F220A291-98B0-4B15-9E16-952EFE1B35C3}"/>
               </a:ext>
             </a:extLst>
           </p:cNvPr>
@@ -1690,7 +1824,7 @@
           <p:cNvPr id="5" name="">
             <a:extLst xmlns:a="http://schemas.openxmlformats.org/drawingml/2006/main">
               <a:ext uri="{FF2B5EF4-FFF2-40B4-BE49-F238E27FC236}">
-                <a16:creationId xmlns:a16="http://schemas.microsoft.com/office/drawing/2014/main" id="{D2E838FF-C853-4C63-9C4E-289B20C3A1ED}"/>
+                <a16:creationId xmlns:a16="http://schemas.microsoft.com/office/drawing/2014/main" id="{8192E29E-2922-4662-BBD6-7A9203DDED46}"/>
               </a:ext>
             </a:extLst>
           </p:cNvPr>
@@ -1741,7 +1875,7 @@
           <p:cNvPr id="6" name="">
             <a:extLst xmlns:a="http://schemas.openxmlformats.org/drawingml/2006/main">
               <a:ext uri="{FF2B5EF4-FFF2-40B4-BE49-F238E27FC236}">
-                <a16:creationId xmlns:a16="http://schemas.microsoft.com/office/drawing/2014/main" id="{05F5F13C-2728-4137-B018-3DA876754D03}"/>
+                <a16:creationId xmlns:a16="http://schemas.microsoft.com/office/drawing/2014/main" id="{223F0F60-DCCF-40F0-BD75-C948D5CE31A2}"/>
               </a:ext>
             </a:extLst>
           </p:cNvPr>
@@ -1792,7 +1926,7 @@
           <p:cNvPr id="7" name="">
             <a:extLst xmlns:a="http://schemas.openxmlformats.org/drawingml/2006/main">
               <a:ext uri="{FF2B5EF4-FFF2-40B4-BE49-F238E27FC236}">
-                <a16:creationId xmlns:a16="http://schemas.microsoft.com/office/drawing/2014/main" id="{8E6C9E5B-CAEF-408B-8768-D1418E5BC110}"/>
+                <a16:creationId xmlns:a16="http://schemas.microsoft.com/office/drawing/2014/main" id="{C3E76F3B-7285-43CC-A1E4-64A5430443DC}"/>
               </a:ext>
             </a:extLst>
           </p:cNvPr>
@@ -1843,7 +1977,7 @@
           <p:cNvPr id="8" name="">
             <a:extLst xmlns:a="http://schemas.openxmlformats.org/drawingml/2006/main">
               <a:ext uri="{FF2B5EF4-FFF2-40B4-BE49-F238E27FC236}">
-                <a16:creationId xmlns:a16="http://schemas.microsoft.com/office/drawing/2014/main" id="{33A1C71F-5A10-44E2-9F8F-C1189CFA1095}"/>
+                <a16:creationId xmlns:a16="http://schemas.microsoft.com/office/drawing/2014/main" id="{51964169-3356-4BA4-AC30-D72912C74EF9}"/>
               </a:ext>
             </a:extLst>
           </p:cNvPr>
@@ -1894,7 +2028,7 @@
           <p:cNvPr id="9" name="">
             <a:extLst xmlns:a="http://schemas.openxmlformats.org/drawingml/2006/main">
               <a:ext uri="{FF2B5EF4-FFF2-40B4-BE49-F238E27FC236}">
-                <a16:creationId xmlns:a16="http://schemas.microsoft.com/office/drawing/2014/main" id="{F52EACB1-8D59-4A71-BDEB-2B3CA47F36BA}"/>
+                <a16:creationId xmlns:a16="http://schemas.microsoft.com/office/drawing/2014/main" id="{0E83E2E7-5A0C-4C2D-B0E8-A5F3A8B565B0}"/>
               </a:ext>
             </a:extLst>
           </p:cNvPr>
@@ -1927,7 +2061,7 @@
           <p:cNvPr id="10" name="">
             <a:extLst xmlns:a="http://schemas.openxmlformats.org/drawingml/2006/main">
               <a:ext uri="{FF2B5EF4-FFF2-40B4-BE49-F238E27FC236}">
-                <a16:creationId xmlns:a16="http://schemas.microsoft.com/office/drawing/2014/main" id="{75760E0F-9E46-493A-9AF4-87CD235EC413}"/>
+                <a16:creationId xmlns:a16="http://schemas.microsoft.com/office/drawing/2014/main" id="{F059EF2C-5304-4CDF-8FE2-B664732ED4D3}"/>
               </a:ext>
             </a:extLst>
           </p:cNvPr>
@@ -1978,7 +2112,7 @@
           <p:cNvPr id="11" name="">
             <a:extLst xmlns:a="http://schemas.openxmlformats.org/drawingml/2006/main">
               <a:ext uri="{FF2B5EF4-FFF2-40B4-BE49-F238E27FC236}">
-                <a16:creationId xmlns:a16="http://schemas.microsoft.com/office/drawing/2014/main" id="{04C5783D-2EFE-43E6-B8AD-9ACF22D08E68}"/>
+                <a16:creationId xmlns:a16="http://schemas.microsoft.com/office/drawing/2014/main" id="{D610AC3D-87E9-472B-8B1F-0FE7CA4AB185}"/>
               </a:ext>
             </a:extLst>
           </p:cNvPr>
@@ -2046,7 +2180,7 @@
           <p:cNvPr id="12" name="">
             <a:extLst xmlns:a="http://schemas.openxmlformats.org/drawingml/2006/main">
               <a:ext uri="{FF2B5EF4-FFF2-40B4-BE49-F238E27FC236}">
-                <a16:creationId xmlns:a16="http://schemas.microsoft.com/office/drawing/2014/main" id="{283A764F-4102-492E-A226-E8F6F3F976EE}"/>
+                <a16:creationId xmlns:a16="http://schemas.microsoft.com/office/drawing/2014/main" id="{D9A253BF-89CA-4CD5-A318-B99355CB9587}"/>
               </a:ext>
             </a:extLst>
           </p:cNvPr>
@@ -2097,7 +2231,7 @@
           <p:cNvPr id="13" name="">
             <a:extLst xmlns:a="http://schemas.openxmlformats.org/drawingml/2006/main">
               <a:ext uri="{FF2B5EF4-FFF2-40B4-BE49-F238E27FC236}">
-                <a16:creationId xmlns:a16="http://schemas.microsoft.com/office/drawing/2014/main" id="{FACB1EAF-2DA5-439A-AB57-D38773FAE742}"/>
+                <a16:creationId xmlns:a16="http://schemas.microsoft.com/office/drawing/2014/main" id="{6B7BDD24-D21B-4D47-937B-5402193CCB4E}"/>
               </a:ext>
             </a:extLst>
           </p:cNvPr>
@@ -2146,7 +2280,1142 @@
     </p:spTree>
     <p:extLst>
       <p:ext uri="{BB962C8B-B14F-4D97-AF65-F5344CB8AC3E}">
-        <p14:creationId xmlns:p14="http://schemas.microsoft.com/office/powerpoint/2010/main" val="945254173"/>
+        <p14:creationId xmlns:p14="http://schemas.microsoft.com/office/powerpoint/2010/main" val="1338770391"/>
+      </p:ext>
+    </p:extLst>
+  </p:cSld>
+</p:sld>
+</file>
+
+<file path=ppt/slides/slide10.xml><?xml version="1.0" encoding="utf-8"?>
+<p:sld xmlns:p="http://schemas.openxmlformats.org/presentationml/2006/main">
+  <p:cSld>
+    <p:spTree>
+      <p:nvGrpSpPr>
+        <p:cNvPr id="1" name=""/>
+        <p:cNvGrpSpPr/>
+        <p:nvPr/>
+      </p:nvGrpSpPr>
+      <p:grpSpPr>
+        <a:xfrm xmlns:a="http://schemas.openxmlformats.org/drawingml/2006/main"/>
+      </p:grpSpPr>
+      <p:sp>
+        <p:nvSpPr>
+          <p:cNvPr id="1" name="">
+            <a:extLst xmlns:a="http://schemas.openxmlformats.org/drawingml/2006/main">
+              <a:ext uri="{FF2B5EF4-FFF2-40B4-BE49-F238E27FC236}">
+                <a16:creationId xmlns:a16="http://schemas.microsoft.com/office/drawing/2014/main" id="{C5F884DE-79B9-4747-B690-4BA111EB178E}"/>
+              </a:ext>
+            </a:extLst>
+          </p:cNvPr>
+          <p:cNvSpPr>
+            <a:spLocks xmlns:a="http://schemas.openxmlformats.org/drawingml/2006/main" noGrp="1"/>
+          </p:cNvSpPr>
+          <p:nvPr/>
+        </p:nvSpPr>
+        <p:spPr>
+          <a:xfrm xmlns:a="http://schemas.openxmlformats.org/drawingml/2006/main">
+            <a:off x="0" y="0"/>
+            <a:ext cx="12192000" cy="6858000"/>
+          </a:xfrm>
+          <a:prstGeom xmlns:a="http://schemas.openxmlformats.org/drawingml/2006/main" prst="rect">
+            <a:avLst/>
+          </a:prstGeom>
+          <a:solidFill xmlns:a="http://schemas.openxmlformats.org/drawingml/2006/main">
+            <a:srgbClr val="0B1F33"/>
+          </a:solidFill>
+          <a:ln xmlns:a="http://schemas.openxmlformats.org/drawingml/2006/main" w="0">
+            <a:solidFill>
+              <a:srgbClr val="0B1F33"/>
+            </a:solidFill>
+            <a:prstDash val="solid"/>
+          </a:ln>
+        </p:spPr>
+      </p:sp>
+      <p:sp>
+        <p:nvSpPr>
+          <p:cNvPr id="2" name="">
+            <a:extLst xmlns:a="http://schemas.openxmlformats.org/drawingml/2006/main">
+              <a:ext uri="{FF2B5EF4-FFF2-40B4-BE49-F238E27FC236}">
+                <a16:creationId xmlns:a16="http://schemas.microsoft.com/office/drawing/2014/main" id="{34FD4A92-2298-494A-ABDE-5C194BEE5A31}"/>
+              </a:ext>
+            </a:extLst>
+          </p:cNvPr>
+          <p:cNvSpPr>
+            <a:spLocks xmlns:a="http://schemas.openxmlformats.org/drawingml/2006/main" noGrp="1"/>
+          </p:cNvSpPr>
+          <p:nvPr/>
+        </p:nvSpPr>
+        <p:spPr>
+          <a:xfrm xmlns:a="http://schemas.openxmlformats.org/drawingml/2006/main">
+            <a:off x="0" y="0"/>
+            <a:ext cx="12192000" cy="114300"/>
+          </a:xfrm>
+          <a:prstGeom xmlns:a="http://schemas.openxmlformats.org/drawingml/2006/main" prst="rect">
+            <a:avLst/>
+          </a:prstGeom>
+          <a:solidFill xmlns:a="http://schemas.openxmlformats.org/drawingml/2006/main">
+            <a:srgbClr val="1D7F5F"/>
+          </a:solidFill>
+          <a:ln xmlns:a="http://schemas.openxmlformats.org/drawingml/2006/main" w="0">
+            <a:solidFill>
+              <a:srgbClr val="1D7F5F"/>
+            </a:solidFill>
+            <a:prstDash val="solid"/>
+          </a:ln>
+        </p:spPr>
+      </p:sp>
+      <p:sp>
+        <p:nvSpPr>
+          <p:cNvPr id="3" name="">
+            <a:extLst xmlns:a="http://schemas.openxmlformats.org/drawingml/2006/main">
+              <a:ext uri="{FF2B5EF4-FFF2-40B4-BE49-F238E27FC236}">
+                <a16:creationId xmlns:a16="http://schemas.microsoft.com/office/drawing/2014/main" id="{79EDB8AC-2D3B-4707-B5E5-1F14A59711C1}"/>
+              </a:ext>
+            </a:extLst>
+          </p:cNvPr>
+          <p:cNvSpPr>
+            <a:spLocks xmlns:a="http://schemas.openxmlformats.org/drawingml/2006/main" noGrp="1"/>
+          </p:cNvSpPr>
+          <p:nvPr/>
+        </p:nvSpPr>
+        <p:spPr>
+          <a:xfrm xmlns:a="http://schemas.openxmlformats.org/drawingml/2006/main">
+            <a:off x="9696450" y="495300"/>
+            <a:ext cx="1600200" cy="266700"/>
+          </a:xfrm>
+          <a:prstGeom xmlns:a="http://schemas.openxmlformats.org/drawingml/2006/main" prst="rect">
+            <a:avLst/>
+          </a:prstGeom>
+          <a:ln xmlns:a="http://schemas.openxmlformats.org/drawingml/2006/main" w="0">
+            <a:solidFill>
+              <a:srgbClr val="FFFFFF"/>
+            </a:solidFill>
+            <a:prstDash val="solid"/>
+          </a:ln>
+        </p:spPr>
+        <p:txBody>
+          <a:bodyPr xmlns:a="http://schemas.openxmlformats.org/drawingml/2006/main" anchor="t"/>
+          <a:lstStyle xmlns:a="http://schemas.openxmlformats.org/drawingml/2006/main"/>
+          <a:p xmlns:a="http://schemas.openxmlformats.org/drawingml/2006/main">
+            <a:pPr algn="r">
+              <a:defRPr sz="1650" b="1">
+                <a:solidFill>
+                  <a:srgbClr val="FFFFFF"/>
+                </a:solidFill>
+              </a:defRPr>
+            </a:pPr>
+            <a:r>
+              <a:rPr sz="1650" b="1">
+                <a:solidFill>
+                  <a:srgbClr val="FFFFFF"/>
+                </a:solidFill>
+              </a:rPr>
+              <a:t>RAVES</a:t>
+            </a:r>
+          </a:p>
+        </p:txBody>
+      </p:sp>
+      <p:sp>
+        <p:nvSpPr>
+          <p:cNvPr id="4" name="">
+            <a:extLst xmlns:a="http://schemas.openxmlformats.org/drawingml/2006/main">
+              <a:ext uri="{FF2B5EF4-FFF2-40B4-BE49-F238E27FC236}">
+                <a16:creationId xmlns:a16="http://schemas.microsoft.com/office/drawing/2014/main" id="{CBE19E4F-6F1D-4DA2-B99F-A6154FB2E3F0}"/>
+              </a:ext>
+            </a:extLst>
+          </p:cNvPr>
+          <p:cNvSpPr>
+            <a:spLocks xmlns:a="http://schemas.openxmlformats.org/drawingml/2006/main" noGrp="1"/>
+          </p:cNvSpPr>
+          <p:nvPr/>
+        </p:nvSpPr>
+        <p:spPr>
+          <a:xfrm xmlns:a="http://schemas.openxmlformats.org/drawingml/2006/main">
+            <a:off x="9696450" y="781050"/>
+            <a:ext cx="1600200" cy="228600"/>
+          </a:xfrm>
+          <a:prstGeom xmlns:a="http://schemas.openxmlformats.org/drawingml/2006/main" prst="rect">
+            <a:avLst/>
+          </a:prstGeom>
+          <a:ln xmlns:a="http://schemas.openxmlformats.org/drawingml/2006/main" w="0">
+            <a:solidFill>
+              <a:srgbClr val="FFFFFF"/>
+            </a:solidFill>
+            <a:prstDash val="solid"/>
+          </a:ln>
+        </p:spPr>
+        <p:txBody>
+          <a:bodyPr xmlns:a="http://schemas.openxmlformats.org/drawingml/2006/main" anchor="t"/>
+          <a:lstStyle xmlns:a="http://schemas.openxmlformats.org/drawingml/2006/main"/>
+          <a:p xmlns:a="http://schemas.openxmlformats.org/drawingml/2006/main">
+            <a:pPr algn="r">
+              <a:defRPr sz="975" b="0">
+                <a:solidFill>
+                  <a:srgbClr val="9FB9D2"/>
+                </a:solidFill>
+              </a:defRPr>
+            </a:pPr>
+            <a:r>
+              <a:rPr sz="975" b="0">
+                <a:solidFill>
+                  <a:srgbClr val="9FB9D2"/>
+                </a:solidFill>
+              </a:rPr>
+              <a:t>Blueprint</a:t>
+            </a:r>
+          </a:p>
+        </p:txBody>
+      </p:sp>
+      <p:sp>
+        <p:nvSpPr>
+          <p:cNvPr id="5" name="">
+            <a:extLst xmlns:a="http://schemas.openxmlformats.org/drawingml/2006/main">
+              <a:ext uri="{FF2B5EF4-FFF2-40B4-BE49-F238E27FC236}">
+                <a16:creationId xmlns:a16="http://schemas.microsoft.com/office/drawing/2014/main" id="{52DE887E-8959-4B5E-835A-02CC2CC02912}"/>
+              </a:ext>
+            </a:extLst>
+          </p:cNvPr>
+          <p:cNvSpPr>
+            <a:spLocks xmlns:a="http://schemas.openxmlformats.org/drawingml/2006/main" noGrp="1"/>
+          </p:cNvSpPr>
+          <p:nvPr/>
+        </p:nvSpPr>
+        <p:spPr>
+          <a:xfrm xmlns:a="http://schemas.openxmlformats.org/drawingml/2006/main">
+            <a:off x="685800" y="457200"/>
+            <a:ext cx="7048500" cy="285750"/>
+          </a:xfrm>
+          <a:prstGeom xmlns:a="http://schemas.openxmlformats.org/drawingml/2006/main" prst="rect">
+            <a:avLst/>
+          </a:prstGeom>
+          <a:ln xmlns:a="http://schemas.openxmlformats.org/drawingml/2006/main" w="0">
+            <a:solidFill>
+              <a:srgbClr val="FFFFFF"/>
+            </a:solidFill>
+            <a:prstDash val="solid"/>
+          </a:ln>
+        </p:spPr>
+        <p:txBody>
+          <a:bodyPr xmlns:a="http://schemas.openxmlformats.org/drawingml/2006/main" anchor="t"/>
+          <a:lstStyle xmlns:a="http://schemas.openxmlformats.org/drawingml/2006/main"/>
+          <a:p xmlns:a="http://schemas.openxmlformats.org/drawingml/2006/main">
+            <a:pPr algn="l">
+              <a:defRPr sz="1050" b="1">
+                <a:solidFill>
+                  <a:srgbClr val="BFD6EA"/>
+                </a:solidFill>
+              </a:defRPr>
+            </a:pPr>
+            <a:r>
+              <a:rPr sz="1050" b="1">
+                <a:solidFill>
+                  <a:srgbClr val="BFD6EA"/>
+                </a:solidFill>
+              </a:rPr>
+              <a:t>DECISION</a:t>
+            </a:r>
+          </a:p>
+        </p:txBody>
+      </p:sp>
+      <p:sp>
+        <p:nvSpPr>
+          <p:cNvPr id="6" name="">
+            <a:extLst xmlns:a="http://schemas.openxmlformats.org/drawingml/2006/main">
+              <a:ext uri="{FF2B5EF4-FFF2-40B4-BE49-F238E27FC236}">
+                <a16:creationId xmlns:a16="http://schemas.microsoft.com/office/drawing/2014/main" id="{2DEB8F97-F4E4-4103-B5A9-6A62CA2A4F63}"/>
+              </a:ext>
+            </a:extLst>
+          </p:cNvPr>
+          <p:cNvSpPr>
+            <a:spLocks xmlns:a="http://schemas.openxmlformats.org/drawingml/2006/main" noGrp="1"/>
+          </p:cNvSpPr>
+          <p:nvPr/>
+        </p:nvSpPr>
+        <p:spPr>
+          <a:xfrm xmlns:a="http://schemas.openxmlformats.org/drawingml/2006/main">
+            <a:off x="685800" y="819150"/>
+            <a:ext cx="8953500" cy="876300"/>
+          </a:xfrm>
+          <a:prstGeom xmlns:a="http://schemas.openxmlformats.org/drawingml/2006/main" prst="rect">
+            <a:avLst/>
+          </a:prstGeom>
+          <a:ln xmlns:a="http://schemas.openxmlformats.org/drawingml/2006/main" w="0">
+            <a:solidFill>
+              <a:srgbClr val="FFFFFF"/>
+            </a:solidFill>
+            <a:prstDash val="solid"/>
+          </a:ln>
+        </p:spPr>
+        <p:txBody>
+          <a:bodyPr xmlns:a="http://schemas.openxmlformats.org/drawingml/2006/main" anchor="t"/>
+          <a:lstStyle xmlns:a="http://schemas.openxmlformats.org/drawingml/2006/main"/>
+          <a:p xmlns:a="http://schemas.openxmlformats.org/drawingml/2006/main">
+            <a:pPr algn="l">
+              <a:defRPr sz="2700" b="1">
+                <a:solidFill>
+                  <a:srgbClr val="FFFFFF"/>
+                </a:solidFill>
+              </a:defRPr>
+            </a:pPr>
+            <a:r>
+              <a:rPr sz="2700" b="1">
+                <a:solidFill>
+                  <a:srgbClr val="FFFFFF"/>
+                </a:solidFill>
+              </a:rPr>
+              <a:t>Approve Blueprint Books as the next funded phase.</a:t>
+            </a:r>
+          </a:p>
+        </p:txBody>
+      </p:sp>
+      <p:sp>
+        <p:nvSpPr>
+          <p:cNvPr id="7" name="">
+            <a:extLst xmlns:a="http://schemas.openxmlformats.org/drawingml/2006/main">
+              <a:ext uri="{FF2B5EF4-FFF2-40B4-BE49-F238E27FC236}">
+                <a16:creationId xmlns:a16="http://schemas.microsoft.com/office/drawing/2014/main" id="{512C91B8-13B6-4969-AEDA-91E2C4727E62}"/>
+              </a:ext>
+            </a:extLst>
+          </p:cNvPr>
+          <p:cNvSpPr>
+            <a:spLocks xmlns:a="http://schemas.openxmlformats.org/drawingml/2006/main" noGrp="1"/>
+          </p:cNvSpPr>
+          <p:nvPr/>
+        </p:nvSpPr>
+        <p:spPr>
+          <a:xfrm xmlns:a="http://schemas.openxmlformats.org/drawingml/2006/main">
+            <a:off x="685800" y="1628775"/>
+            <a:ext cx="8953500" cy="495300"/>
+          </a:xfrm>
+          <a:prstGeom xmlns:a="http://schemas.openxmlformats.org/drawingml/2006/main" prst="rect">
+            <a:avLst/>
+          </a:prstGeom>
+          <a:ln xmlns:a="http://schemas.openxmlformats.org/drawingml/2006/main" w="0">
+            <a:solidFill>
+              <a:srgbClr val="FFFFFF"/>
+            </a:solidFill>
+            <a:prstDash val="solid"/>
+          </a:ln>
+        </p:spPr>
+        <p:txBody>
+          <a:bodyPr xmlns:a="http://schemas.openxmlformats.org/drawingml/2006/main" anchor="t"/>
+          <a:lstStyle xmlns:a="http://schemas.openxmlformats.org/drawingml/2006/main"/>
+          <a:p xmlns:a="http://schemas.openxmlformats.org/drawingml/2006/main">
+            <a:pPr algn="l">
+              <a:defRPr sz="1425" b="0">
+                <a:solidFill>
+                  <a:srgbClr val="BFD6EA"/>
+                </a:solidFill>
+              </a:defRPr>
+            </a:pPr>
+            <a:r>
+              <a:rPr sz="1425" b="0">
+                <a:solidFill>
+                  <a:srgbClr val="BFD6EA"/>
+                </a:solidFill>
+              </a:rPr>
+              <a:t>Leave with one owner, one date, and the opening-balance source.</a:t>
+            </a:r>
+          </a:p>
+        </p:txBody>
+      </p:sp>
+      <p:sp>
+        <p:nvSpPr>
+          <p:cNvPr id="8" name="">
+            <a:extLst xmlns:a="http://schemas.openxmlformats.org/drawingml/2006/main">
+              <a:ext uri="{FF2B5EF4-FFF2-40B4-BE49-F238E27FC236}">
+                <a16:creationId xmlns:a16="http://schemas.microsoft.com/office/drawing/2014/main" id="{088E076B-23E0-48B8-AB40-57654FD16978}"/>
+              </a:ext>
+            </a:extLst>
+          </p:cNvPr>
+          <p:cNvSpPr>
+            <a:spLocks xmlns:a="http://schemas.openxmlformats.org/drawingml/2006/main" noGrp="1"/>
+          </p:cNvSpPr>
+          <p:nvPr/>
+        </p:nvSpPr>
+        <p:spPr>
+          <a:xfrm xmlns:a="http://schemas.openxmlformats.org/drawingml/2006/main">
+            <a:off x="857250" y="2705100"/>
+            <a:ext cx="10477500" cy="1752600"/>
+          </a:xfrm>
+          <a:prstGeom xmlns:a="http://schemas.openxmlformats.org/drawingml/2006/main" prst="rect">
+            <a:avLst/>
+          </a:prstGeom>
+          <a:solidFill xmlns:a="http://schemas.openxmlformats.org/drawingml/2006/main">
+            <a:srgbClr val="123A5B"/>
+          </a:solidFill>
+          <a:ln xmlns:a="http://schemas.openxmlformats.org/drawingml/2006/main" w="0">
+            <a:solidFill>
+              <a:srgbClr val="123A5B"/>
+            </a:solidFill>
+            <a:prstDash val="solid"/>
+          </a:ln>
+        </p:spPr>
+      </p:sp>
+      <p:sp>
+        <p:nvSpPr>
+          <p:cNvPr id="9" name="">
+            <a:extLst xmlns:a="http://schemas.openxmlformats.org/drawingml/2006/main">
+              <a:ext uri="{FF2B5EF4-FFF2-40B4-BE49-F238E27FC236}">
+                <a16:creationId xmlns:a16="http://schemas.microsoft.com/office/drawing/2014/main" id="{7409451B-69DD-4A5F-A4C8-F7478618F8A5}"/>
+              </a:ext>
+            </a:extLst>
+          </p:cNvPr>
+          <p:cNvSpPr>
+            <a:spLocks xmlns:a="http://schemas.openxmlformats.org/drawingml/2006/main" noGrp="1"/>
+          </p:cNvSpPr>
+          <p:nvPr/>
+        </p:nvSpPr>
+        <p:spPr>
+          <a:xfrm xmlns:a="http://schemas.openxmlformats.org/drawingml/2006/main">
+            <a:off x="1200150" y="2990850"/>
+            <a:ext cx="1524000" cy="342900"/>
+          </a:xfrm>
+          <a:prstGeom xmlns:a="http://schemas.openxmlformats.org/drawingml/2006/main" prst="rect">
+            <a:avLst/>
+          </a:prstGeom>
+          <a:ln xmlns:a="http://schemas.openxmlformats.org/drawingml/2006/main" w="0">
+            <a:solidFill>
+              <a:srgbClr val="FFFFFF"/>
+            </a:solidFill>
+            <a:prstDash val="solid"/>
+          </a:ln>
+        </p:spPr>
+        <p:txBody>
+          <a:bodyPr xmlns:a="http://schemas.openxmlformats.org/drawingml/2006/main" anchor="t"/>
+          <a:lstStyle xmlns:a="http://schemas.openxmlformats.org/drawingml/2006/main"/>
+          <a:p xmlns:a="http://schemas.openxmlformats.org/drawingml/2006/main">
+            <a:pPr algn="l">
+              <a:defRPr sz="1500" b="1">
+                <a:solidFill>
+                  <a:srgbClr val="9FE0C8"/>
+                </a:solidFill>
+              </a:defRPr>
+            </a:pPr>
+            <a:r>
+              <a:rPr sz="1500" b="1">
+                <a:solidFill>
+                  <a:srgbClr val="9FE0C8"/>
+                </a:solidFill>
+              </a:rPr>
+              <a:t>Ask</a:t>
+            </a:r>
+          </a:p>
+        </p:txBody>
+      </p:sp>
+      <p:sp>
+        <p:nvSpPr>
+          <p:cNvPr id="10" name="">
+            <a:extLst xmlns:a="http://schemas.openxmlformats.org/drawingml/2006/main">
+              <a:ext uri="{FF2B5EF4-FFF2-40B4-BE49-F238E27FC236}">
+                <a16:creationId xmlns:a16="http://schemas.microsoft.com/office/drawing/2014/main" id="{E0F3A97E-D313-48C9-B2CB-1B80F698096C}"/>
+              </a:ext>
+            </a:extLst>
+          </p:cNvPr>
+          <p:cNvSpPr>
+            <a:spLocks xmlns:a="http://schemas.openxmlformats.org/drawingml/2006/main" noGrp="1"/>
+          </p:cNvSpPr>
+          <p:nvPr/>
+        </p:nvSpPr>
+        <p:spPr>
+          <a:xfrm xmlns:a="http://schemas.openxmlformats.org/drawingml/2006/main">
+            <a:off x="1200150" y="3390900"/>
+            <a:ext cx="8763000" cy="552450"/>
+          </a:xfrm>
+          <a:prstGeom xmlns:a="http://schemas.openxmlformats.org/drawingml/2006/main" prst="rect">
+            <a:avLst/>
+          </a:prstGeom>
+          <a:ln xmlns:a="http://schemas.openxmlformats.org/drawingml/2006/main" w="0">
+            <a:solidFill>
+              <a:srgbClr val="FFFFFF"/>
+            </a:solidFill>
+            <a:prstDash val="solid"/>
+          </a:ln>
+        </p:spPr>
+        <p:txBody>
+          <a:bodyPr xmlns:a="http://schemas.openxmlformats.org/drawingml/2006/main" anchor="t"/>
+          <a:lstStyle xmlns:a="http://schemas.openxmlformats.org/drawingml/2006/main"/>
+          <a:p xmlns:a="http://schemas.openxmlformats.org/drawingml/2006/main">
+            <a:pPr algn="l">
+              <a:defRPr sz="2250" b="1">
+                <a:solidFill>
+                  <a:srgbClr val="FFFFFF"/>
+                </a:solidFill>
+              </a:defRPr>
+            </a:pPr>
+            <a:r>
+              <a:rPr sz="2250" b="1">
+                <a:solidFill>
+                  <a:srgbClr val="FFFFFF"/>
+                </a:solidFill>
+              </a:rPr>
+              <a:t>Approve the Books Foundation build at $18,500 fixed fee.</a:t>
+            </a:r>
+          </a:p>
+        </p:txBody>
+      </p:sp>
+      <p:sp>
+        <p:nvSpPr>
+          <p:cNvPr id="11" name="">
+            <a:extLst xmlns:a="http://schemas.openxmlformats.org/drawingml/2006/main">
+              <a:ext uri="{FF2B5EF4-FFF2-40B4-BE49-F238E27FC236}">
+                <a16:creationId xmlns:a16="http://schemas.microsoft.com/office/drawing/2014/main" id="{979FB83D-FA42-4EBF-A4AC-264A3051B252}"/>
+              </a:ext>
+            </a:extLst>
+          </p:cNvPr>
+          <p:cNvSpPr>
+            <a:spLocks xmlns:a="http://schemas.openxmlformats.org/drawingml/2006/main" noGrp="1"/>
+          </p:cNvSpPr>
+          <p:nvPr/>
+        </p:nvSpPr>
+        <p:spPr>
+          <a:xfrm xmlns:a="http://schemas.openxmlformats.org/drawingml/2006/main">
+            <a:off x="1200150" y="4038600"/>
+            <a:ext cx="9048750" cy="457200"/>
+          </a:xfrm>
+          <a:prstGeom xmlns:a="http://schemas.openxmlformats.org/drawingml/2006/main" prst="rect">
+            <a:avLst/>
+          </a:prstGeom>
+          <a:ln xmlns:a="http://schemas.openxmlformats.org/drawingml/2006/main" w="0">
+            <a:solidFill>
+              <a:srgbClr val="FFFFFF"/>
+            </a:solidFill>
+            <a:prstDash val="solid"/>
+          </a:ln>
+        </p:spPr>
+        <p:txBody>
+          <a:bodyPr xmlns:a="http://schemas.openxmlformats.org/drawingml/2006/main" anchor="t"/>
+          <a:lstStyle xmlns:a="http://schemas.openxmlformats.org/drawingml/2006/main"/>
+          <a:p xmlns:a="http://schemas.openxmlformats.org/drawingml/2006/main">
+            <a:pPr algn="l">
+              <a:defRPr sz="1350" b="0">
+                <a:solidFill>
+                  <a:srgbClr val="D9EAF8"/>
+                </a:solidFill>
+              </a:defRPr>
+            </a:pPr>
+            <a:r>
+              <a:rPr sz="1350" b="0">
+                <a:solidFill>
+                  <a:srgbClr val="D9EAF8"/>
+                </a:solidFill>
+              </a:rPr>
+              <a:t>Then confirm the approver, target decision date, the accounting owner, and where opening balances and the chart of accounts come from.</a:t>
+            </a:r>
+          </a:p>
+        </p:txBody>
+      </p:sp>
+      <p:sp>
+        <p:nvSpPr>
+          <p:cNvPr id="12" name="">
+            <a:extLst xmlns:a="http://schemas.openxmlformats.org/drawingml/2006/main">
+              <a:ext uri="{FF2B5EF4-FFF2-40B4-BE49-F238E27FC236}">
+                <a16:creationId xmlns:a16="http://schemas.microsoft.com/office/drawing/2014/main" id="{BA5E9BF4-3935-489A-A57D-D6D1D6E72BFB}"/>
+              </a:ext>
+            </a:extLst>
+          </p:cNvPr>
+          <p:cNvSpPr>
+            <a:spLocks xmlns:a="http://schemas.openxmlformats.org/drawingml/2006/main" noGrp="1"/>
+          </p:cNvSpPr>
+          <p:nvPr/>
+        </p:nvSpPr>
+        <p:spPr>
+          <a:xfrm xmlns:a="http://schemas.openxmlformats.org/drawingml/2006/main">
+            <a:off x="1524000" y="5067300"/>
+            <a:ext cx="2667000" cy="914400"/>
+          </a:xfrm>
+          <a:prstGeom xmlns:a="http://schemas.openxmlformats.org/drawingml/2006/main" prst="rect">
+            <a:avLst/>
+          </a:prstGeom>
+          <a:solidFill xmlns:a="http://schemas.openxmlformats.org/drawingml/2006/main">
+            <a:srgbClr val="FFFFFF"/>
+          </a:solidFill>
+          <a:ln xmlns:a="http://schemas.openxmlformats.org/drawingml/2006/main" w="0">
+            <a:solidFill>
+              <a:srgbClr val="D8E2ED"/>
+            </a:solidFill>
+            <a:prstDash val="solid"/>
+          </a:ln>
+        </p:spPr>
+      </p:sp>
+      <p:sp>
+        <p:nvSpPr>
+          <p:cNvPr id="13" name="">
+            <a:extLst xmlns:a="http://schemas.openxmlformats.org/drawingml/2006/main">
+              <a:ext uri="{FF2B5EF4-FFF2-40B4-BE49-F238E27FC236}">
+                <a16:creationId xmlns:a16="http://schemas.microsoft.com/office/drawing/2014/main" id="{AC0B83DD-177C-41BB-BCE3-C2E270209B7D}"/>
+              </a:ext>
+            </a:extLst>
+          </p:cNvPr>
+          <p:cNvSpPr>
+            <a:spLocks xmlns:a="http://schemas.openxmlformats.org/drawingml/2006/main" noGrp="1"/>
+          </p:cNvSpPr>
+          <p:nvPr/>
+        </p:nvSpPr>
+        <p:spPr>
+          <a:xfrm xmlns:a="http://schemas.openxmlformats.org/drawingml/2006/main">
+            <a:off x="1524000" y="5067300"/>
+            <a:ext cx="57150" cy="914400"/>
+          </a:xfrm>
+          <a:prstGeom xmlns:a="http://schemas.openxmlformats.org/drawingml/2006/main" prst="rect">
+            <a:avLst/>
+          </a:prstGeom>
+          <a:solidFill xmlns:a="http://schemas.openxmlformats.org/drawingml/2006/main">
+            <a:srgbClr val="1D7F5F"/>
+          </a:solidFill>
+          <a:ln xmlns:a="http://schemas.openxmlformats.org/drawingml/2006/main" w="0">
+            <a:solidFill>
+              <a:srgbClr val="1D7F5F"/>
+            </a:solidFill>
+            <a:prstDash val="solid"/>
+          </a:ln>
+        </p:spPr>
+      </p:sp>
+      <p:sp>
+        <p:nvSpPr>
+          <p:cNvPr id="14" name="">
+            <a:extLst xmlns:a="http://schemas.openxmlformats.org/drawingml/2006/main">
+              <a:ext uri="{FF2B5EF4-FFF2-40B4-BE49-F238E27FC236}">
+                <a16:creationId xmlns:a16="http://schemas.microsoft.com/office/drawing/2014/main" id="{9CFBFF05-1AF2-4D59-AEC5-3C1FA3E6576A}"/>
+              </a:ext>
+            </a:extLst>
+          </p:cNvPr>
+          <p:cNvSpPr>
+            <a:spLocks xmlns:a="http://schemas.openxmlformats.org/drawingml/2006/main" noGrp="1"/>
+          </p:cNvSpPr>
+          <p:nvPr/>
+        </p:nvSpPr>
+        <p:spPr>
+          <a:xfrm xmlns:a="http://schemas.openxmlformats.org/drawingml/2006/main">
+            <a:off x="1752600" y="5257800"/>
+            <a:ext cx="2286000" cy="285750"/>
+          </a:xfrm>
+          <a:prstGeom xmlns:a="http://schemas.openxmlformats.org/drawingml/2006/main" prst="rect">
+            <a:avLst/>
+          </a:prstGeom>
+          <a:ln xmlns:a="http://schemas.openxmlformats.org/drawingml/2006/main" w="0">
+            <a:solidFill>
+              <a:srgbClr val="FFFFFF"/>
+            </a:solidFill>
+            <a:prstDash val="solid"/>
+          </a:ln>
+        </p:spPr>
+        <p:txBody>
+          <a:bodyPr xmlns:a="http://schemas.openxmlformats.org/drawingml/2006/main" anchor="t"/>
+          <a:lstStyle xmlns:a="http://schemas.openxmlformats.org/drawingml/2006/main"/>
+          <a:p xmlns:a="http://schemas.openxmlformats.org/drawingml/2006/main">
+            <a:pPr algn="l">
+              <a:defRPr sz="1350" b="1">
+                <a:solidFill>
+                  <a:srgbClr val="172033"/>
+                </a:solidFill>
+              </a:defRPr>
+            </a:pPr>
+            <a:r>
+              <a:rPr sz="1350" b="1">
+                <a:solidFill>
+                  <a:srgbClr val="172033"/>
+                </a:solidFill>
+              </a:rPr>
+              <a:t>Next artifact</a:t>
+            </a:r>
+          </a:p>
+        </p:txBody>
+      </p:sp>
+      <p:sp>
+        <p:nvSpPr>
+          <p:cNvPr id="15" name="">
+            <a:extLst xmlns:a="http://schemas.openxmlformats.org/drawingml/2006/main">
+              <a:ext uri="{FF2B5EF4-FFF2-40B4-BE49-F238E27FC236}">
+                <a16:creationId xmlns:a16="http://schemas.microsoft.com/office/drawing/2014/main" id="{E1120EDC-33EA-4EA6-B681-10BA402E6CA3}"/>
+              </a:ext>
+            </a:extLst>
+          </p:cNvPr>
+          <p:cNvSpPr>
+            <a:spLocks xmlns:a="http://schemas.openxmlformats.org/drawingml/2006/main" noGrp="1"/>
+          </p:cNvSpPr>
+          <p:nvPr/>
+        </p:nvSpPr>
+        <p:spPr>
+          <a:xfrm xmlns:a="http://schemas.openxmlformats.org/drawingml/2006/main">
+            <a:off x="1752600" y="5619750"/>
+            <a:ext cx="2266950" cy="228600"/>
+          </a:xfrm>
+          <a:prstGeom xmlns:a="http://schemas.openxmlformats.org/drawingml/2006/main" prst="rect">
+            <a:avLst/>
+          </a:prstGeom>
+          <a:ln xmlns:a="http://schemas.openxmlformats.org/drawingml/2006/main" w="0">
+            <a:solidFill>
+              <a:srgbClr val="FFFFFF"/>
+            </a:solidFill>
+            <a:prstDash val="solid"/>
+          </a:ln>
+        </p:spPr>
+        <p:txBody>
+          <a:bodyPr xmlns:a="http://schemas.openxmlformats.org/drawingml/2006/main" anchor="t"/>
+          <a:lstStyle xmlns:a="http://schemas.openxmlformats.org/drawingml/2006/main"/>
+          <a:p xmlns:a="http://schemas.openxmlformats.org/drawingml/2006/main">
+            <a:pPr algn="l">
+              <a:defRPr sz="1050" b="0">
+                <a:solidFill>
+                  <a:srgbClr val="5F6F86"/>
+                </a:solidFill>
+              </a:defRPr>
+            </a:pPr>
+            <a:r>
+              <a:rPr sz="1050" b="0">
+                <a:solidFill>
+                  <a:srgbClr val="5F6F86"/>
+                </a:solidFill>
+              </a:rPr>
+              <a:t>One-page Books SOW and opening-balance checklist.</a:t>
+            </a:r>
+          </a:p>
+        </p:txBody>
+      </p:sp>
+      <p:sp>
+        <p:nvSpPr>
+          <p:cNvPr id="16" name="">
+            <a:extLst xmlns:a="http://schemas.openxmlformats.org/drawingml/2006/main">
+              <a:ext uri="{FF2B5EF4-FFF2-40B4-BE49-F238E27FC236}">
+                <a16:creationId xmlns:a16="http://schemas.microsoft.com/office/drawing/2014/main" id="{A7F0C7C6-C1B2-4648-9E60-AA4D2E14B26C}"/>
+              </a:ext>
+            </a:extLst>
+          </p:cNvPr>
+          <p:cNvSpPr>
+            <a:spLocks xmlns:a="http://schemas.openxmlformats.org/drawingml/2006/main" noGrp="1"/>
+          </p:cNvSpPr>
+          <p:nvPr/>
+        </p:nvSpPr>
+        <p:spPr>
+          <a:xfrm xmlns:a="http://schemas.openxmlformats.org/drawingml/2006/main">
+            <a:off x="4762500" y="5067300"/>
+            <a:ext cx="2667000" cy="914400"/>
+          </a:xfrm>
+          <a:prstGeom xmlns:a="http://schemas.openxmlformats.org/drawingml/2006/main" prst="rect">
+            <a:avLst/>
+          </a:prstGeom>
+          <a:solidFill xmlns:a="http://schemas.openxmlformats.org/drawingml/2006/main">
+            <a:srgbClr val="FFFFFF"/>
+          </a:solidFill>
+          <a:ln xmlns:a="http://schemas.openxmlformats.org/drawingml/2006/main" w="0">
+            <a:solidFill>
+              <a:srgbClr val="D8E2ED"/>
+            </a:solidFill>
+            <a:prstDash val="solid"/>
+          </a:ln>
+        </p:spPr>
+      </p:sp>
+      <p:sp>
+        <p:nvSpPr>
+          <p:cNvPr id="17" name="">
+            <a:extLst xmlns:a="http://schemas.openxmlformats.org/drawingml/2006/main">
+              <a:ext uri="{FF2B5EF4-FFF2-40B4-BE49-F238E27FC236}">
+                <a16:creationId xmlns:a16="http://schemas.microsoft.com/office/drawing/2014/main" id="{7A71AD7E-2A9A-47B8-9966-20AC56EE583D}"/>
+              </a:ext>
+            </a:extLst>
+          </p:cNvPr>
+          <p:cNvSpPr>
+            <a:spLocks xmlns:a="http://schemas.openxmlformats.org/drawingml/2006/main" noGrp="1"/>
+          </p:cNvSpPr>
+          <p:nvPr/>
+        </p:nvSpPr>
+        <p:spPr>
+          <a:xfrm xmlns:a="http://schemas.openxmlformats.org/drawingml/2006/main">
+            <a:off x="4762500" y="5067300"/>
+            <a:ext cx="57150" cy="914400"/>
+          </a:xfrm>
+          <a:prstGeom xmlns:a="http://schemas.openxmlformats.org/drawingml/2006/main" prst="rect">
+            <a:avLst/>
+          </a:prstGeom>
+          <a:solidFill xmlns:a="http://schemas.openxmlformats.org/drawingml/2006/main">
+            <a:srgbClr val="23A6D5"/>
+          </a:solidFill>
+          <a:ln xmlns:a="http://schemas.openxmlformats.org/drawingml/2006/main" w="0">
+            <a:solidFill>
+              <a:srgbClr val="23A6D5"/>
+            </a:solidFill>
+            <a:prstDash val="solid"/>
+          </a:ln>
+        </p:spPr>
+      </p:sp>
+      <p:sp>
+        <p:nvSpPr>
+          <p:cNvPr id="18" name="">
+            <a:extLst xmlns:a="http://schemas.openxmlformats.org/drawingml/2006/main">
+              <a:ext uri="{FF2B5EF4-FFF2-40B4-BE49-F238E27FC236}">
+                <a16:creationId xmlns:a16="http://schemas.microsoft.com/office/drawing/2014/main" id="{8C191600-C041-4909-BFBC-CD56A1C42471}"/>
+              </a:ext>
+            </a:extLst>
+          </p:cNvPr>
+          <p:cNvSpPr>
+            <a:spLocks xmlns:a="http://schemas.openxmlformats.org/drawingml/2006/main" noGrp="1"/>
+          </p:cNvSpPr>
+          <p:nvPr/>
+        </p:nvSpPr>
+        <p:spPr>
+          <a:xfrm xmlns:a="http://schemas.openxmlformats.org/drawingml/2006/main">
+            <a:off x="4991100" y="5257800"/>
+            <a:ext cx="2286000" cy="285750"/>
+          </a:xfrm>
+          <a:prstGeom xmlns:a="http://schemas.openxmlformats.org/drawingml/2006/main" prst="rect">
+            <a:avLst/>
+          </a:prstGeom>
+          <a:ln xmlns:a="http://schemas.openxmlformats.org/drawingml/2006/main" w="0">
+            <a:solidFill>
+              <a:srgbClr val="FFFFFF"/>
+            </a:solidFill>
+            <a:prstDash val="solid"/>
+          </a:ln>
+        </p:spPr>
+        <p:txBody>
+          <a:bodyPr xmlns:a="http://schemas.openxmlformats.org/drawingml/2006/main" anchor="t"/>
+          <a:lstStyle xmlns:a="http://schemas.openxmlformats.org/drawingml/2006/main"/>
+          <a:p xmlns:a="http://schemas.openxmlformats.org/drawingml/2006/main">
+            <a:pPr algn="l">
+              <a:defRPr sz="1350" b="1">
+                <a:solidFill>
+                  <a:srgbClr val="172033"/>
+                </a:solidFill>
+              </a:defRPr>
+            </a:pPr>
+            <a:r>
+              <a:rPr sz="1350" b="1">
+                <a:solidFill>
+                  <a:srgbClr val="172033"/>
+                </a:solidFill>
+              </a:rPr>
+              <a:t>Next meeting</a:t>
+            </a:r>
+          </a:p>
+        </p:txBody>
+      </p:sp>
+      <p:sp>
+        <p:nvSpPr>
+          <p:cNvPr id="19" name="">
+            <a:extLst xmlns:a="http://schemas.openxmlformats.org/drawingml/2006/main">
+              <a:ext uri="{FF2B5EF4-FFF2-40B4-BE49-F238E27FC236}">
+                <a16:creationId xmlns:a16="http://schemas.microsoft.com/office/drawing/2014/main" id="{70CC1913-88BB-4EAA-B647-1BE5BAAF851C}"/>
+              </a:ext>
+            </a:extLst>
+          </p:cNvPr>
+          <p:cNvSpPr>
+            <a:spLocks xmlns:a="http://schemas.openxmlformats.org/drawingml/2006/main" noGrp="1"/>
+          </p:cNvSpPr>
+          <p:nvPr/>
+        </p:nvSpPr>
+        <p:spPr>
+          <a:xfrm xmlns:a="http://schemas.openxmlformats.org/drawingml/2006/main">
+            <a:off x="4991100" y="5619750"/>
+            <a:ext cx="2266950" cy="228600"/>
+          </a:xfrm>
+          <a:prstGeom xmlns:a="http://schemas.openxmlformats.org/drawingml/2006/main" prst="rect">
+            <a:avLst/>
+          </a:prstGeom>
+          <a:ln xmlns:a="http://schemas.openxmlformats.org/drawingml/2006/main" w="0">
+            <a:solidFill>
+              <a:srgbClr val="FFFFFF"/>
+            </a:solidFill>
+            <a:prstDash val="solid"/>
+          </a:ln>
+        </p:spPr>
+        <p:txBody>
+          <a:bodyPr xmlns:a="http://schemas.openxmlformats.org/drawingml/2006/main" anchor="t"/>
+          <a:lstStyle xmlns:a="http://schemas.openxmlformats.org/drawingml/2006/main"/>
+          <a:p xmlns:a="http://schemas.openxmlformats.org/drawingml/2006/main">
+            <a:pPr algn="l">
+              <a:defRPr sz="1050" b="0">
+                <a:solidFill>
+                  <a:srgbClr val="5F6F86"/>
+                </a:solidFill>
+              </a:defRPr>
+            </a:pPr>
+            <a:r>
+              <a:rPr sz="1050" b="0">
+                <a:solidFill>
+                  <a:srgbClr val="5F6F86"/>
+                </a:solidFill>
+              </a:rPr>
+              <a:t>Kickoff once opening balances are confirmed.</a:t>
+            </a:r>
+          </a:p>
+        </p:txBody>
+      </p:sp>
+      <p:sp>
+        <p:nvSpPr>
+          <p:cNvPr id="20" name="">
+            <a:extLst xmlns:a="http://schemas.openxmlformats.org/drawingml/2006/main">
+              <a:ext uri="{FF2B5EF4-FFF2-40B4-BE49-F238E27FC236}">
+                <a16:creationId xmlns:a16="http://schemas.microsoft.com/office/drawing/2014/main" id="{DEBF0815-5A7F-4B83-87CD-728DBCD1E8BD}"/>
+              </a:ext>
+            </a:extLst>
+          </p:cNvPr>
+          <p:cNvSpPr>
+            <a:spLocks xmlns:a="http://schemas.openxmlformats.org/drawingml/2006/main" noGrp="1"/>
+          </p:cNvSpPr>
+          <p:nvPr/>
+        </p:nvSpPr>
+        <p:spPr>
+          <a:xfrm xmlns:a="http://schemas.openxmlformats.org/drawingml/2006/main">
+            <a:off x="8001000" y="5067300"/>
+            <a:ext cx="2667000" cy="914400"/>
+          </a:xfrm>
+          <a:prstGeom xmlns:a="http://schemas.openxmlformats.org/drawingml/2006/main" prst="rect">
+            <a:avLst/>
+          </a:prstGeom>
+          <a:solidFill xmlns:a="http://schemas.openxmlformats.org/drawingml/2006/main">
+            <a:srgbClr val="FFFFFF"/>
+          </a:solidFill>
+          <a:ln xmlns:a="http://schemas.openxmlformats.org/drawingml/2006/main" w="0">
+            <a:solidFill>
+              <a:srgbClr val="D8E2ED"/>
+            </a:solidFill>
+            <a:prstDash val="solid"/>
+          </a:ln>
+        </p:spPr>
+      </p:sp>
+      <p:sp>
+        <p:nvSpPr>
+          <p:cNvPr id="21" name="">
+            <a:extLst xmlns:a="http://schemas.openxmlformats.org/drawingml/2006/main">
+              <a:ext uri="{FF2B5EF4-FFF2-40B4-BE49-F238E27FC236}">
+                <a16:creationId xmlns:a16="http://schemas.microsoft.com/office/drawing/2014/main" id="{47384406-D587-4D9E-B97B-365A3BEFADBE}"/>
+              </a:ext>
+            </a:extLst>
+          </p:cNvPr>
+          <p:cNvSpPr>
+            <a:spLocks xmlns:a="http://schemas.openxmlformats.org/drawingml/2006/main" noGrp="1"/>
+          </p:cNvSpPr>
+          <p:nvPr/>
+        </p:nvSpPr>
+        <p:spPr>
+          <a:xfrm xmlns:a="http://schemas.openxmlformats.org/drawingml/2006/main">
+            <a:off x="8001000" y="5067300"/>
+            <a:ext cx="57150" cy="914400"/>
+          </a:xfrm>
+          <a:prstGeom xmlns:a="http://schemas.openxmlformats.org/drawingml/2006/main" prst="rect">
+            <a:avLst/>
+          </a:prstGeom>
+          <a:solidFill xmlns:a="http://schemas.openxmlformats.org/drawingml/2006/main">
+            <a:srgbClr val="D98C16"/>
+          </a:solidFill>
+          <a:ln xmlns:a="http://schemas.openxmlformats.org/drawingml/2006/main" w="0">
+            <a:solidFill>
+              <a:srgbClr val="D98C16"/>
+            </a:solidFill>
+            <a:prstDash val="solid"/>
+          </a:ln>
+        </p:spPr>
+      </p:sp>
+      <p:sp>
+        <p:nvSpPr>
+          <p:cNvPr id="22" name="">
+            <a:extLst xmlns:a="http://schemas.openxmlformats.org/drawingml/2006/main">
+              <a:ext uri="{FF2B5EF4-FFF2-40B4-BE49-F238E27FC236}">
+                <a16:creationId xmlns:a16="http://schemas.microsoft.com/office/drawing/2014/main" id="{F966A9FA-C38C-4D2E-A7F8-557BBBB7794E}"/>
+              </a:ext>
+            </a:extLst>
+          </p:cNvPr>
+          <p:cNvSpPr>
+            <a:spLocks xmlns:a="http://schemas.openxmlformats.org/drawingml/2006/main" noGrp="1"/>
+          </p:cNvSpPr>
+          <p:nvPr/>
+        </p:nvSpPr>
+        <p:spPr>
+          <a:xfrm xmlns:a="http://schemas.openxmlformats.org/drawingml/2006/main">
+            <a:off x="8229600" y="5257800"/>
+            <a:ext cx="2286000" cy="285750"/>
+          </a:xfrm>
+          <a:prstGeom xmlns:a="http://schemas.openxmlformats.org/drawingml/2006/main" prst="rect">
+            <a:avLst/>
+          </a:prstGeom>
+          <a:ln xmlns:a="http://schemas.openxmlformats.org/drawingml/2006/main" w="0">
+            <a:solidFill>
+              <a:srgbClr val="FFFFFF"/>
+            </a:solidFill>
+            <a:prstDash val="solid"/>
+          </a:ln>
+        </p:spPr>
+        <p:txBody>
+          <a:bodyPr xmlns:a="http://schemas.openxmlformats.org/drawingml/2006/main" anchor="t"/>
+          <a:lstStyle xmlns:a="http://schemas.openxmlformats.org/drawingml/2006/main"/>
+          <a:p xmlns:a="http://schemas.openxmlformats.org/drawingml/2006/main">
+            <a:pPr algn="l">
+              <a:defRPr sz="1350" b="1">
+                <a:solidFill>
+                  <a:srgbClr val="172033"/>
+                </a:solidFill>
+              </a:defRPr>
+            </a:pPr>
+            <a:r>
+              <a:rPr sz="1350" b="1">
+                <a:solidFill>
+                  <a:srgbClr val="172033"/>
+                </a:solidFill>
+              </a:rPr>
+              <a:t>Next offer</a:t>
+            </a:r>
+          </a:p>
+        </p:txBody>
+      </p:sp>
+      <p:sp>
+        <p:nvSpPr>
+          <p:cNvPr id="23" name="">
+            <a:extLst xmlns:a="http://schemas.openxmlformats.org/drawingml/2006/main">
+              <a:ext uri="{FF2B5EF4-FFF2-40B4-BE49-F238E27FC236}">
+                <a16:creationId xmlns:a16="http://schemas.microsoft.com/office/drawing/2014/main" id="{0B13731B-5B4E-476E-971A-FA3FFF176135}"/>
+              </a:ext>
+            </a:extLst>
+          </p:cNvPr>
+          <p:cNvSpPr>
+            <a:spLocks xmlns:a="http://schemas.openxmlformats.org/drawingml/2006/main" noGrp="1"/>
+          </p:cNvSpPr>
+          <p:nvPr/>
+        </p:nvSpPr>
+        <p:spPr>
+          <a:xfrm xmlns:a="http://schemas.openxmlformats.org/drawingml/2006/main">
+            <a:off x="8229600" y="5619750"/>
+            <a:ext cx="2266950" cy="228600"/>
+          </a:xfrm>
+          <a:prstGeom xmlns:a="http://schemas.openxmlformats.org/drawingml/2006/main" prst="rect">
+            <a:avLst/>
+          </a:prstGeom>
+          <a:ln xmlns:a="http://schemas.openxmlformats.org/drawingml/2006/main" w="0">
+            <a:solidFill>
+              <a:srgbClr val="FFFFFF"/>
+            </a:solidFill>
+            <a:prstDash val="solid"/>
+          </a:ln>
+        </p:spPr>
+        <p:txBody>
+          <a:bodyPr xmlns:a="http://schemas.openxmlformats.org/drawingml/2006/main" anchor="t"/>
+          <a:lstStyle xmlns:a="http://schemas.openxmlformats.org/drawingml/2006/main"/>
+          <a:p xmlns:a="http://schemas.openxmlformats.org/drawingml/2006/main">
+            <a:pPr algn="l">
+              <a:defRPr sz="1050" b="0">
+                <a:solidFill>
+                  <a:srgbClr val="5F6F86"/>
+                </a:solidFill>
+              </a:defRPr>
+            </a:pPr>
+            <a:r>
+              <a:rPr sz="1050" b="0">
+                <a:solidFill>
+                  <a:srgbClr val="5F6F86"/>
+                </a:solidFill>
+              </a:rPr>
+              <a:t>Books Care after go-live for monthly close support.</a:t>
+            </a:r>
+          </a:p>
+        </p:txBody>
+      </p:sp>
+      <p:sp>
+        <p:nvSpPr>
+          <p:cNvPr id="24" name="">
+            <a:extLst xmlns:a="http://schemas.openxmlformats.org/drawingml/2006/main">
+              <a:ext uri="{FF2B5EF4-FFF2-40B4-BE49-F238E27FC236}">
+                <a16:creationId xmlns:a16="http://schemas.microsoft.com/office/drawing/2014/main" id="{49AF833E-83E5-4B56-BF8D-204145D80AF3}"/>
+              </a:ext>
+            </a:extLst>
+          </p:cNvPr>
+          <p:cNvSpPr>
+            <a:spLocks xmlns:a="http://schemas.openxmlformats.org/drawingml/2006/main" noGrp="1"/>
+          </p:cNvSpPr>
+          <p:nvPr/>
+        </p:nvSpPr>
+        <p:spPr>
+          <a:xfrm xmlns:a="http://schemas.openxmlformats.org/drawingml/2006/main">
+            <a:off x="685800" y="6400800"/>
+            <a:ext cx="4000500" cy="228600"/>
+          </a:xfrm>
+          <a:prstGeom xmlns:a="http://schemas.openxmlformats.org/drawingml/2006/main" prst="rect">
+            <a:avLst/>
+          </a:prstGeom>
+          <a:ln xmlns:a="http://schemas.openxmlformats.org/drawingml/2006/main" w="0">
+            <a:solidFill>
+              <a:srgbClr val="FFFFFF"/>
+            </a:solidFill>
+            <a:prstDash val="solid"/>
+          </a:ln>
+        </p:spPr>
+        <p:txBody>
+          <a:bodyPr xmlns:a="http://schemas.openxmlformats.org/drawingml/2006/main" anchor="t"/>
+          <a:lstStyle xmlns:a="http://schemas.openxmlformats.org/drawingml/2006/main"/>
+          <a:p xmlns:a="http://schemas.openxmlformats.org/drawingml/2006/main">
+            <a:pPr algn="l">
+              <a:defRPr sz="900" b="0">
+                <a:solidFill>
+                  <a:srgbClr val="9FB9D2"/>
+                </a:solidFill>
+              </a:defRPr>
+            </a:pPr>
+            <a:r>
+              <a:rPr sz="900" b="0">
+                <a:solidFill>
+                  <a:srgbClr val="9FB9D2"/>
+                </a:solidFill>
+              </a:rPr>
+              <a:t>Blueprint Books for Raves</a:t>
+            </a:r>
+          </a:p>
+        </p:txBody>
+      </p:sp>
+      <p:sp>
+        <p:nvSpPr>
+          <p:cNvPr id="25" name="">
+            <a:extLst xmlns:a="http://schemas.openxmlformats.org/drawingml/2006/main">
+              <a:ext uri="{FF2B5EF4-FFF2-40B4-BE49-F238E27FC236}">
+                <a16:creationId xmlns:a16="http://schemas.microsoft.com/office/drawing/2014/main" id="{FAE09CF1-7E17-4915-BF38-49D1DB83F36E}"/>
+              </a:ext>
+            </a:extLst>
+          </p:cNvPr>
+          <p:cNvSpPr>
+            <a:spLocks xmlns:a="http://schemas.openxmlformats.org/drawingml/2006/main" noGrp="1"/>
+          </p:cNvSpPr>
+          <p:nvPr/>
+        </p:nvSpPr>
+        <p:spPr>
+          <a:xfrm xmlns:a="http://schemas.openxmlformats.org/drawingml/2006/main">
+            <a:off x="11049000" y="6400800"/>
+            <a:ext cx="457200" cy="228600"/>
+          </a:xfrm>
+          <a:prstGeom xmlns:a="http://schemas.openxmlformats.org/drawingml/2006/main" prst="rect">
+            <a:avLst/>
+          </a:prstGeom>
+          <a:ln xmlns:a="http://schemas.openxmlformats.org/drawingml/2006/main" w="0">
+            <a:solidFill>
+              <a:srgbClr val="FFFFFF"/>
+            </a:solidFill>
+            <a:prstDash val="solid"/>
+          </a:ln>
+        </p:spPr>
+        <p:txBody>
+          <a:bodyPr xmlns:a="http://schemas.openxmlformats.org/drawingml/2006/main" anchor="t"/>
+          <a:lstStyle xmlns:a="http://schemas.openxmlformats.org/drawingml/2006/main"/>
+          <a:p xmlns:a="http://schemas.openxmlformats.org/drawingml/2006/main">
+            <a:pPr algn="r">
+              <a:defRPr sz="900" b="0">
+                <a:solidFill>
+                  <a:srgbClr val="9FB9D2"/>
+                </a:solidFill>
+              </a:defRPr>
+            </a:pPr>
+            <a:r>
+              <a:rPr sz="900" b="0">
+                <a:solidFill>
+                  <a:srgbClr val="9FB9D2"/>
+                </a:solidFill>
+              </a:rPr>
+              <a:t>10</a:t>
+            </a:r>
+          </a:p>
+        </p:txBody>
+      </p:sp>
+    </p:spTree>
+    <p:extLst>
+      <p:ext uri="{BB962C8B-B14F-4D97-AF65-F5344CB8AC3E}">
+        <p14:creationId xmlns:p14="http://schemas.microsoft.com/office/powerpoint/2010/main" val="832855993"/>
       </p:ext>
     </p:extLst>
   </p:cSld>
@@ -2170,7 +3439,7 @@
           <p:cNvPr id="1" name="">
             <a:extLst xmlns:a="http://schemas.openxmlformats.org/drawingml/2006/main">
               <a:ext uri="{FF2B5EF4-FFF2-40B4-BE49-F238E27FC236}">
-                <a16:creationId xmlns:a16="http://schemas.microsoft.com/office/drawing/2014/main" id="{EFBDC7D1-7118-402B-8A1E-18225841BD16}"/>
+                <a16:creationId xmlns:a16="http://schemas.microsoft.com/office/drawing/2014/main" id="{C538E926-9373-4B64-A339-A4885B08074F}"/>
               </a:ext>
             </a:extLst>
           </p:cNvPr>
@@ -2203,7 +3472,7 @@
           <p:cNvPr id="2" name="">
             <a:extLst xmlns:a="http://schemas.openxmlformats.org/drawingml/2006/main">
               <a:ext uri="{FF2B5EF4-FFF2-40B4-BE49-F238E27FC236}">
-                <a16:creationId xmlns:a16="http://schemas.microsoft.com/office/drawing/2014/main" id="{7824C178-0352-483C-A34B-20784FD0F65E}"/>
+                <a16:creationId xmlns:a16="http://schemas.microsoft.com/office/drawing/2014/main" id="{C44D54BD-046E-4BEA-9271-FA7166B6E175}"/>
               </a:ext>
             </a:extLst>
           </p:cNvPr>
@@ -2254,7 +3523,7 @@
           <p:cNvPr id="3" name="">
             <a:extLst xmlns:a="http://schemas.openxmlformats.org/drawingml/2006/main">
               <a:ext uri="{FF2B5EF4-FFF2-40B4-BE49-F238E27FC236}">
-                <a16:creationId xmlns:a16="http://schemas.microsoft.com/office/drawing/2014/main" id="{121CAC90-0D04-47DE-9046-7F7206ADAA14}"/>
+                <a16:creationId xmlns:a16="http://schemas.microsoft.com/office/drawing/2014/main" id="{39EAB817-5E38-4608-8F52-4FAC01D3DA59}"/>
               </a:ext>
             </a:extLst>
           </p:cNvPr>
@@ -2305,7 +3574,7 @@
           <p:cNvPr id="4" name="">
             <a:extLst xmlns:a="http://schemas.openxmlformats.org/drawingml/2006/main">
               <a:ext uri="{FF2B5EF4-FFF2-40B4-BE49-F238E27FC236}">
-                <a16:creationId xmlns:a16="http://schemas.microsoft.com/office/drawing/2014/main" id="{3AE87BAB-A6C6-4FC7-B4C4-925C0F9590DD}"/>
+                <a16:creationId xmlns:a16="http://schemas.microsoft.com/office/drawing/2014/main" id="{CC90A54A-05C7-4E72-8990-27BE19E5E9D9}"/>
               </a:ext>
             </a:extLst>
           </p:cNvPr>
@@ -2356,7 +3625,7 @@
           <p:cNvPr id="5" name="">
             <a:extLst xmlns:a="http://schemas.openxmlformats.org/drawingml/2006/main">
               <a:ext uri="{FF2B5EF4-FFF2-40B4-BE49-F238E27FC236}">
-                <a16:creationId xmlns:a16="http://schemas.microsoft.com/office/drawing/2014/main" id="{084DA229-49F3-44C2-B1F0-E0B9020371F3}"/>
+                <a16:creationId xmlns:a16="http://schemas.microsoft.com/office/drawing/2014/main" id="{F038B968-DF13-42FE-A2EC-A8CAC096082A}"/>
               </a:ext>
             </a:extLst>
           </p:cNvPr>
@@ -2389,7 +3658,7 @@
           <p:cNvPr id="6" name="">
             <a:extLst xmlns:a="http://schemas.openxmlformats.org/drawingml/2006/main">
               <a:ext uri="{FF2B5EF4-FFF2-40B4-BE49-F238E27FC236}">
-                <a16:creationId xmlns:a16="http://schemas.microsoft.com/office/drawing/2014/main" id="{B4D6CE60-17A4-4C33-938D-CE8CAC494787}"/>
+                <a16:creationId xmlns:a16="http://schemas.microsoft.com/office/drawing/2014/main" id="{7B55D82E-14F7-4430-A182-4EACEED267F7}"/>
               </a:ext>
             </a:extLst>
           </p:cNvPr>
@@ -2422,7 +3691,7 @@
           <p:cNvPr id="7" name="">
             <a:extLst xmlns:a="http://schemas.openxmlformats.org/drawingml/2006/main">
               <a:ext uri="{FF2B5EF4-FFF2-40B4-BE49-F238E27FC236}">
-                <a16:creationId xmlns:a16="http://schemas.microsoft.com/office/drawing/2014/main" id="{2375F70D-BBE0-44A8-8503-924F19F4FC1F}"/>
+                <a16:creationId xmlns:a16="http://schemas.microsoft.com/office/drawing/2014/main" id="{0B160EC5-5B1B-464F-B4F4-6460B8C78437}"/>
               </a:ext>
             </a:extLst>
           </p:cNvPr>
@@ -2473,7 +3742,7 @@
           <p:cNvPr id="8" name="">
             <a:extLst xmlns:a="http://schemas.openxmlformats.org/drawingml/2006/main">
               <a:ext uri="{FF2B5EF4-FFF2-40B4-BE49-F238E27FC236}">
-                <a16:creationId xmlns:a16="http://schemas.microsoft.com/office/drawing/2014/main" id="{02D63744-8D33-4708-A3DF-90BD5070F7B5}"/>
+                <a16:creationId xmlns:a16="http://schemas.microsoft.com/office/drawing/2014/main" id="{7F987930-1306-4113-ACF6-34D88928915C}"/>
               </a:ext>
             </a:extLst>
           </p:cNvPr>
@@ -2524,7 +3793,7 @@
           <p:cNvPr id="9" name="">
             <a:extLst xmlns:a="http://schemas.openxmlformats.org/drawingml/2006/main">
               <a:ext uri="{FF2B5EF4-FFF2-40B4-BE49-F238E27FC236}">
-                <a16:creationId xmlns:a16="http://schemas.microsoft.com/office/drawing/2014/main" id="{AA4BF910-358B-4E4F-8633-E5A69D385A92}"/>
+                <a16:creationId xmlns:a16="http://schemas.microsoft.com/office/drawing/2014/main" id="{F236AD03-DA30-4E70-9E15-3B1506DE663A}"/>
               </a:ext>
             </a:extLst>
           </p:cNvPr>
@@ -2557,7 +3826,7 @@
           <p:cNvPr id="10" name="">
             <a:extLst xmlns:a="http://schemas.openxmlformats.org/drawingml/2006/main">
               <a:ext uri="{FF2B5EF4-FFF2-40B4-BE49-F238E27FC236}">
-                <a16:creationId xmlns:a16="http://schemas.microsoft.com/office/drawing/2014/main" id="{3BCEB0D8-7E9E-4567-A028-1E845D77DC65}"/>
+                <a16:creationId xmlns:a16="http://schemas.microsoft.com/office/drawing/2014/main" id="{3A914DC3-B4B8-4D0E-8844-F329266BAD6D}"/>
               </a:ext>
             </a:extLst>
           </p:cNvPr>
@@ -2590,7 +3859,7 @@
           <p:cNvPr id="11" name="">
             <a:extLst xmlns:a="http://schemas.openxmlformats.org/drawingml/2006/main">
               <a:ext uri="{FF2B5EF4-FFF2-40B4-BE49-F238E27FC236}">
-                <a16:creationId xmlns:a16="http://schemas.microsoft.com/office/drawing/2014/main" id="{D3536CDE-6506-4114-AE5D-48D19F2DB9AF}"/>
+                <a16:creationId xmlns:a16="http://schemas.microsoft.com/office/drawing/2014/main" id="{A511F0E7-CFA1-48CE-98BA-F267443C9B08}"/>
               </a:ext>
             </a:extLst>
           </p:cNvPr>
@@ -2641,7 +3910,7 @@
           <p:cNvPr id="12" name="">
             <a:extLst xmlns:a="http://schemas.openxmlformats.org/drawingml/2006/main">
               <a:ext uri="{FF2B5EF4-FFF2-40B4-BE49-F238E27FC236}">
-                <a16:creationId xmlns:a16="http://schemas.microsoft.com/office/drawing/2014/main" id="{76F5AF6B-AEE4-492E-9697-936BD8FF7D6B}"/>
+                <a16:creationId xmlns:a16="http://schemas.microsoft.com/office/drawing/2014/main" id="{C976AF39-4791-4FDF-B601-94F4990800F7}"/>
               </a:ext>
             </a:extLst>
           </p:cNvPr>
@@ -2692,7 +3961,7 @@
           <p:cNvPr id="13" name="">
             <a:extLst xmlns:a="http://schemas.openxmlformats.org/drawingml/2006/main">
               <a:ext uri="{FF2B5EF4-FFF2-40B4-BE49-F238E27FC236}">
-                <a16:creationId xmlns:a16="http://schemas.microsoft.com/office/drawing/2014/main" id="{376C8FC2-58DB-4551-8BAA-E8F1CECD8B14}"/>
+                <a16:creationId xmlns:a16="http://schemas.microsoft.com/office/drawing/2014/main" id="{04454C4D-E123-4CA6-AE54-D4B8BD5CDAAE}"/>
               </a:ext>
             </a:extLst>
           </p:cNvPr>
@@ -2725,7 +3994,7 @@
           <p:cNvPr id="14" name="">
             <a:extLst xmlns:a="http://schemas.openxmlformats.org/drawingml/2006/main">
               <a:ext uri="{FF2B5EF4-FFF2-40B4-BE49-F238E27FC236}">
-                <a16:creationId xmlns:a16="http://schemas.microsoft.com/office/drawing/2014/main" id="{D7A21E65-7D7B-4E82-BA47-A74207875FD9}"/>
+                <a16:creationId xmlns:a16="http://schemas.microsoft.com/office/drawing/2014/main" id="{C4FF563F-8B7C-46DD-82FD-5C4E92D89BA9}"/>
               </a:ext>
             </a:extLst>
           </p:cNvPr>
@@ -2758,7 +4027,7 @@
           <p:cNvPr id="15" name="">
             <a:extLst xmlns:a="http://schemas.openxmlformats.org/drawingml/2006/main">
               <a:ext uri="{FF2B5EF4-FFF2-40B4-BE49-F238E27FC236}">
-                <a16:creationId xmlns:a16="http://schemas.microsoft.com/office/drawing/2014/main" id="{21593147-AC9D-4F8F-AA29-303EA019106A}"/>
+                <a16:creationId xmlns:a16="http://schemas.microsoft.com/office/drawing/2014/main" id="{E8C133EE-416E-42A4-9C86-BDD9CC121386}"/>
               </a:ext>
             </a:extLst>
           </p:cNvPr>
@@ -2809,7 +4078,7 @@
           <p:cNvPr id="16" name="">
             <a:extLst xmlns:a="http://schemas.openxmlformats.org/drawingml/2006/main">
               <a:ext uri="{FF2B5EF4-FFF2-40B4-BE49-F238E27FC236}">
-                <a16:creationId xmlns:a16="http://schemas.microsoft.com/office/drawing/2014/main" id="{545B4822-8214-4118-AE37-C426547576BB}"/>
+                <a16:creationId xmlns:a16="http://schemas.microsoft.com/office/drawing/2014/main" id="{ADBF3DD7-564F-4E1E-8384-27DFB20FC5E6}"/>
               </a:ext>
             </a:extLst>
           </p:cNvPr>
@@ -2860,7 +4129,7 @@
           <p:cNvPr id="17" name="">
             <a:extLst xmlns:a="http://schemas.openxmlformats.org/drawingml/2006/main">
               <a:ext uri="{FF2B5EF4-FFF2-40B4-BE49-F238E27FC236}">
-                <a16:creationId xmlns:a16="http://schemas.microsoft.com/office/drawing/2014/main" id="{121C4F26-8891-4575-90FB-1CC00D1A6CDB}"/>
+                <a16:creationId xmlns:a16="http://schemas.microsoft.com/office/drawing/2014/main" id="{24A00BC3-4EE1-4828-998A-1C17DE9DBA2B}"/>
               </a:ext>
             </a:extLst>
           </p:cNvPr>
@@ -2893,7 +4162,7 @@
           <p:cNvPr id="18" name="">
             <a:extLst xmlns:a="http://schemas.openxmlformats.org/drawingml/2006/main">
               <a:ext uri="{FF2B5EF4-FFF2-40B4-BE49-F238E27FC236}">
-                <a16:creationId xmlns:a16="http://schemas.microsoft.com/office/drawing/2014/main" id="{1C715788-6975-489C-83AF-6074506FBA5B}"/>
+                <a16:creationId xmlns:a16="http://schemas.microsoft.com/office/drawing/2014/main" id="{C0EC290D-34D2-4F30-B239-E54344FE9F94}"/>
               </a:ext>
             </a:extLst>
           </p:cNvPr>
@@ -2926,7 +4195,7 @@
           <p:cNvPr id="19" name="">
             <a:extLst xmlns:a="http://schemas.openxmlformats.org/drawingml/2006/main">
               <a:ext uri="{FF2B5EF4-FFF2-40B4-BE49-F238E27FC236}">
-                <a16:creationId xmlns:a16="http://schemas.microsoft.com/office/drawing/2014/main" id="{39911C8E-4A94-4668-AA5A-E17EDAEA2BA2}"/>
+                <a16:creationId xmlns:a16="http://schemas.microsoft.com/office/drawing/2014/main" id="{743475C0-4951-4683-BDB7-5932C3D32E0A}"/>
               </a:ext>
             </a:extLst>
           </p:cNvPr>
@@ -2977,7 +4246,7 @@
           <p:cNvPr id="20" name="">
             <a:extLst xmlns:a="http://schemas.openxmlformats.org/drawingml/2006/main">
               <a:ext uri="{FF2B5EF4-FFF2-40B4-BE49-F238E27FC236}">
-                <a16:creationId xmlns:a16="http://schemas.microsoft.com/office/drawing/2014/main" id="{30A1ABE1-E362-4E28-B302-6A49C2C746D5}"/>
+                <a16:creationId xmlns:a16="http://schemas.microsoft.com/office/drawing/2014/main" id="{A713B8D9-D525-486F-A24C-333A3CC631DB}"/>
               </a:ext>
             </a:extLst>
           </p:cNvPr>
@@ -3028,7 +4297,7 @@
           <p:cNvPr id="21" name="">
             <a:extLst xmlns:a="http://schemas.openxmlformats.org/drawingml/2006/main">
               <a:ext uri="{FF2B5EF4-FFF2-40B4-BE49-F238E27FC236}">
-                <a16:creationId xmlns:a16="http://schemas.microsoft.com/office/drawing/2014/main" id="{0CED86B8-BCD0-4A21-8404-8939F196B8AB}"/>
+                <a16:creationId xmlns:a16="http://schemas.microsoft.com/office/drawing/2014/main" id="{1595BF01-89AD-427A-BF69-4A7C0A0D8B89}"/>
               </a:ext>
             </a:extLst>
           </p:cNvPr>
@@ -3061,7 +4330,7 @@
           <p:cNvPr id="22" name="">
             <a:extLst xmlns:a="http://schemas.openxmlformats.org/drawingml/2006/main">
               <a:ext uri="{FF2B5EF4-FFF2-40B4-BE49-F238E27FC236}">
-                <a16:creationId xmlns:a16="http://schemas.microsoft.com/office/drawing/2014/main" id="{C54C9D0C-8BDF-48EC-9C59-D1B72DFA9223}"/>
+                <a16:creationId xmlns:a16="http://schemas.microsoft.com/office/drawing/2014/main" id="{D57462EA-0A45-4A77-B518-4E6B9BCB5C7D}"/>
               </a:ext>
             </a:extLst>
           </p:cNvPr>
@@ -3094,7 +4363,7 @@
           <p:cNvPr id="23" name="">
             <a:extLst xmlns:a="http://schemas.openxmlformats.org/drawingml/2006/main">
               <a:ext uri="{FF2B5EF4-FFF2-40B4-BE49-F238E27FC236}">
-                <a16:creationId xmlns:a16="http://schemas.microsoft.com/office/drawing/2014/main" id="{2A2BDC26-83E3-4ED7-A147-ADC2DA47F2FA}"/>
+                <a16:creationId xmlns:a16="http://schemas.microsoft.com/office/drawing/2014/main" id="{418CDA4B-164D-4320-B8C2-D48C2C1E5F15}"/>
               </a:ext>
             </a:extLst>
           </p:cNvPr>
@@ -3145,7 +4414,7 @@
           <p:cNvPr id="24" name="">
             <a:extLst xmlns:a="http://schemas.openxmlformats.org/drawingml/2006/main">
               <a:ext uri="{FF2B5EF4-FFF2-40B4-BE49-F238E27FC236}">
-                <a16:creationId xmlns:a16="http://schemas.microsoft.com/office/drawing/2014/main" id="{F092EC04-0D70-4B21-A3DA-56B52DF13EA3}"/>
+                <a16:creationId xmlns:a16="http://schemas.microsoft.com/office/drawing/2014/main" id="{9B3B35AA-FDC8-4401-9881-0F567BBC369C}"/>
               </a:ext>
             </a:extLst>
           </p:cNvPr>
@@ -3196,7 +4465,7 @@
           <p:cNvPr id="25" name="">
             <a:extLst xmlns:a="http://schemas.openxmlformats.org/drawingml/2006/main">
               <a:ext uri="{FF2B5EF4-FFF2-40B4-BE49-F238E27FC236}">
-                <a16:creationId xmlns:a16="http://schemas.microsoft.com/office/drawing/2014/main" id="{0638EFF4-6CF0-497E-80E7-2632BF4BEEB3}"/>
+                <a16:creationId xmlns:a16="http://schemas.microsoft.com/office/drawing/2014/main" id="{DBF5206C-660C-4E24-9311-2A02451512F9}"/>
               </a:ext>
             </a:extLst>
           </p:cNvPr>
@@ -3229,7 +4498,7 @@
           <p:cNvPr id="26" name="">
             <a:extLst xmlns:a="http://schemas.openxmlformats.org/drawingml/2006/main">
               <a:ext uri="{FF2B5EF4-FFF2-40B4-BE49-F238E27FC236}">
-                <a16:creationId xmlns:a16="http://schemas.microsoft.com/office/drawing/2014/main" id="{5E2D628A-6C13-47AB-97F5-3B1DD34E44E5}"/>
+                <a16:creationId xmlns:a16="http://schemas.microsoft.com/office/drawing/2014/main" id="{E44E8A4F-5386-4C56-A170-62ADFA490B74}"/>
               </a:ext>
             </a:extLst>
           </p:cNvPr>
@@ -3262,7 +4531,7 @@
           <p:cNvPr id="27" name="">
             <a:extLst xmlns:a="http://schemas.openxmlformats.org/drawingml/2006/main">
               <a:ext uri="{FF2B5EF4-FFF2-40B4-BE49-F238E27FC236}">
-                <a16:creationId xmlns:a16="http://schemas.microsoft.com/office/drawing/2014/main" id="{C8D9C93E-3142-49B0-B517-06FAFDD26A86}"/>
+                <a16:creationId xmlns:a16="http://schemas.microsoft.com/office/drawing/2014/main" id="{800B3BD5-06E8-4C27-A2A8-74977161216E}"/>
               </a:ext>
             </a:extLst>
           </p:cNvPr>
@@ -3313,7 +4582,7 @@
           <p:cNvPr id="28" name="">
             <a:extLst xmlns:a="http://schemas.openxmlformats.org/drawingml/2006/main">
               <a:ext uri="{FF2B5EF4-FFF2-40B4-BE49-F238E27FC236}">
-                <a16:creationId xmlns:a16="http://schemas.microsoft.com/office/drawing/2014/main" id="{D3DD0142-7A3A-4F30-825B-D877659A46E0}"/>
+                <a16:creationId xmlns:a16="http://schemas.microsoft.com/office/drawing/2014/main" id="{33A6677E-BDA3-459A-9929-75117A6ABE66}"/>
               </a:ext>
             </a:extLst>
           </p:cNvPr>
@@ -3364,7 +4633,7 @@
           <p:cNvPr id="29" name="">
             <a:extLst xmlns:a="http://schemas.openxmlformats.org/drawingml/2006/main">
               <a:ext uri="{FF2B5EF4-FFF2-40B4-BE49-F238E27FC236}">
-                <a16:creationId xmlns:a16="http://schemas.microsoft.com/office/drawing/2014/main" id="{A66E6BF0-A4B5-4FE5-933E-CC9307FBA58E}"/>
+                <a16:creationId xmlns:a16="http://schemas.microsoft.com/office/drawing/2014/main" id="{C7893E77-D0EF-49E1-915F-1EC67FC7A484}"/>
               </a:ext>
             </a:extLst>
           </p:cNvPr>
@@ -3397,7 +4666,7 @@
           <p:cNvPr id="30" name="">
             <a:extLst xmlns:a="http://schemas.openxmlformats.org/drawingml/2006/main">
               <a:ext uri="{FF2B5EF4-FFF2-40B4-BE49-F238E27FC236}">
-                <a16:creationId xmlns:a16="http://schemas.microsoft.com/office/drawing/2014/main" id="{98AA793A-CE63-46CF-9EE3-DBAF217193DD}"/>
+                <a16:creationId xmlns:a16="http://schemas.microsoft.com/office/drawing/2014/main" id="{C642A4C4-3961-413F-AEBC-780E1C02D90F}"/>
               </a:ext>
             </a:extLst>
           </p:cNvPr>
@@ -3430,7 +4699,7 @@
           <p:cNvPr id="31" name="">
             <a:extLst xmlns:a="http://schemas.openxmlformats.org/drawingml/2006/main">
               <a:ext uri="{FF2B5EF4-FFF2-40B4-BE49-F238E27FC236}">
-                <a16:creationId xmlns:a16="http://schemas.microsoft.com/office/drawing/2014/main" id="{78425C65-D3F1-4F09-AD7E-9CCA415586F6}"/>
+                <a16:creationId xmlns:a16="http://schemas.microsoft.com/office/drawing/2014/main" id="{A1A6B12B-30E7-4A98-8126-4481003808EE}"/>
               </a:ext>
             </a:extLst>
           </p:cNvPr>
@@ -3481,7 +4750,7 @@
           <p:cNvPr id="32" name="">
             <a:extLst xmlns:a="http://schemas.openxmlformats.org/drawingml/2006/main">
               <a:ext uri="{FF2B5EF4-FFF2-40B4-BE49-F238E27FC236}">
-                <a16:creationId xmlns:a16="http://schemas.microsoft.com/office/drawing/2014/main" id="{14B04816-6377-4939-91A2-D1501F9C9A0A}"/>
+                <a16:creationId xmlns:a16="http://schemas.microsoft.com/office/drawing/2014/main" id="{E1346287-FDF7-4872-9E00-BA8142B60C56}"/>
               </a:ext>
             </a:extLst>
           </p:cNvPr>
@@ -3532,7 +4801,7 @@
           <p:cNvPr id="33" name="">
             <a:extLst xmlns:a="http://schemas.openxmlformats.org/drawingml/2006/main">
               <a:ext uri="{FF2B5EF4-FFF2-40B4-BE49-F238E27FC236}">
-                <a16:creationId xmlns:a16="http://schemas.microsoft.com/office/drawing/2014/main" id="{4849BD1B-7DC3-4547-8C62-65E6DCBDA946}"/>
+                <a16:creationId xmlns:a16="http://schemas.microsoft.com/office/drawing/2014/main" id="{C534D3D1-34E9-4B8F-8A67-12F9390A709F}"/>
               </a:ext>
             </a:extLst>
           </p:cNvPr>
@@ -3583,7 +4852,7 @@
           <p:cNvPr id="34" name="">
             <a:extLst xmlns:a="http://schemas.openxmlformats.org/drawingml/2006/main">
               <a:ext uri="{FF2B5EF4-FFF2-40B4-BE49-F238E27FC236}">
-                <a16:creationId xmlns:a16="http://schemas.microsoft.com/office/drawing/2014/main" id="{690CE404-AE30-48D7-B379-584BA24BEDD5}"/>
+                <a16:creationId xmlns:a16="http://schemas.microsoft.com/office/drawing/2014/main" id="{DE8DB04D-A4E8-45D8-8D92-9F13A471727A}"/>
               </a:ext>
             </a:extLst>
           </p:cNvPr>
@@ -3632,7 +4901,7 @@
     </p:spTree>
     <p:extLst>
       <p:ext uri="{BB962C8B-B14F-4D97-AF65-F5344CB8AC3E}">
-        <p14:creationId xmlns:p14="http://schemas.microsoft.com/office/powerpoint/2010/main" val="660277312"/>
+        <p14:creationId xmlns:p14="http://schemas.microsoft.com/office/powerpoint/2010/main" val="919630498"/>
       </p:ext>
     </p:extLst>
   </p:cSld>
@@ -3656,7 +4925,7 @@
           <p:cNvPr id="1" name="">
             <a:extLst xmlns:a="http://schemas.openxmlformats.org/drawingml/2006/main">
               <a:ext uri="{FF2B5EF4-FFF2-40B4-BE49-F238E27FC236}">
-                <a16:creationId xmlns:a16="http://schemas.microsoft.com/office/drawing/2014/main" id="{E337E7FB-79AB-4FF5-8DC7-BA75655D9F23}"/>
+                <a16:creationId xmlns:a16="http://schemas.microsoft.com/office/drawing/2014/main" id="{590884CC-74D7-4F19-A91D-B90CDD9AC749}"/>
               </a:ext>
             </a:extLst>
           </p:cNvPr>
@@ -3689,7 +4958,7 @@
           <p:cNvPr id="2" name="">
             <a:extLst xmlns:a="http://schemas.openxmlformats.org/drawingml/2006/main">
               <a:ext uri="{FF2B5EF4-FFF2-40B4-BE49-F238E27FC236}">
-                <a16:creationId xmlns:a16="http://schemas.microsoft.com/office/drawing/2014/main" id="{A6E497D0-80CB-4C04-A383-CA16555AB786}"/>
+                <a16:creationId xmlns:a16="http://schemas.microsoft.com/office/drawing/2014/main" id="{F8B9CDE6-833D-4CC5-83F4-79446360D39B}"/>
               </a:ext>
             </a:extLst>
           </p:cNvPr>
@@ -3740,7 +5009,7 @@
           <p:cNvPr id="3" name="">
             <a:extLst xmlns:a="http://schemas.openxmlformats.org/drawingml/2006/main">
               <a:ext uri="{FF2B5EF4-FFF2-40B4-BE49-F238E27FC236}">
-                <a16:creationId xmlns:a16="http://schemas.microsoft.com/office/drawing/2014/main" id="{F79ECE3E-13B0-4923-B3D1-AFFAB676B1F4}"/>
+                <a16:creationId xmlns:a16="http://schemas.microsoft.com/office/drawing/2014/main" id="{C122A254-926B-4C7F-9504-DAAEE98023C1}"/>
               </a:ext>
             </a:extLst>
           </p:cNvPr>
@@ -3791,7 +5060,7 @@
           <p:cNvPr id="4" name="">
             <a:extLst xmlns:a="http://schemas.openxmlformats.org/drawingml/2006/main">
               <a:ext uri="{FF2B5EF4-FFF2-40B4-BE49-F238E27FC236}">
-                <a16:creationId xmlns:a16="http://schemas.microsoft.com/office/drawing/2014/main" id="{C43F2798-EE40-4C2E-A248-E32A01E0F98F}"/>
+                <a16:creationId xmlns:a16="http://schemas.microsoft.com/office/drawing/2014/main" id="{D71BB061-59A3-4192-B867-8382157E7F36}"/>
               </a:ext>
             </a:extLst>
           </p:cNvPr>
@@ -3824,7 +5093,7 @@
           <p:cNvPr id="5" name="">
             <a:extLst xmlns:a="http://schemas.openxmlformats.org/drawingml/2006/main">
               <a:ext uri="{FF2B5EF4-FFF2-40B4-BE49-F238E27FC236}">
-                <a16:creationId xmlns:a16="http://schemas.microsoft.com/office/drawing/2014/main" id="{A5730AC7-69C2-4481-8FA8-ED6121CA635B}"/>
+                <a16:creationId xmlns:a16="http://schemas.microsoft.com/office/drawing/2014/main" id="{8ADBA5DF-F5F2-4737-BB2C-1098E294E703}"/>
               </a:ext>
             </a:extLst>
           </p:cNvPr>
@@ -3857,7 +5126,7 @@
           <p:cNvPr id="6" name="">
             <a:extLst xmlns:a="http://schemas.openxmlformats.org/drawingml/2006/main">
               <a:ext uri="{FF2B5EF4-FFF2-40B4-BE49-F238E27FC236}">
-                <a16:creationId xmlns:a16="http://schemas.microsoft.com/office/drawing/2014/main" id="{E6B6C23F-1A92-4972-98D8-9EECD31C50EB}"/>
+                <a16:creationId xmlns:a16="http://schemas.microsoft.com/office/drawing/2014/main" id="{DD361976-5E32-4201-8C54-87AF29EC95AA}"/>
               </a:ext>
             </a:extLst>
           </p:cNvPr>
@@ -3908,7 +5177,7 @@
           <p:cNvPr id="7" name="">
             <a:extLst xmlns:a="http://schemas.openxmlformats.org/drawingml/2006/main">
               <a:ext uri="{FF2B5EF4-FFF2-40B4-BE49-F238E27FC236}">
-                <a16:creationId xmlns:a16="http://schemas.microsoft.com/office/drawing/2014/main" id="{CE36003E-FBAD-4249-AA36-2D78AFF2DEC7}"/>
+                <a16:creationId xmlns:a16="http://schemas.microsoft.com/office/drawing/2014/main" id="{BC972587-5F3F-48FE-8C8F-728F870F57B8}"/>
               </a:ext>
             </a:extLst>
           </p:cNvPr>
@@ -3941,7 +5210,7 @@
           <p:cNvPr id="8" name="">
             <a:extLst xmlns:a="http://schemas.openxmlformats.org/drawingml/2006/main">
               <a:ext uri="{FF2B5EF4-FFF2-40B4-BE49-F238E27FC236}">
-                <a16:creationId xmlns:a16="http://schemas.microsoft.com/office/drawing/2014/main" id="{44B8F446-0011-44C6-8313-73D3B7E42C9F}"/>
+                <a16:creationId xmlns:a16="http://schemas.microsoft.com/office/drawing/2014/main" id="{53450CE3-1EDE-4407-A14B-89C9815035ED}"/>
               </a:ext>
             </a:extLst>
           </p:cNvPr>
@@ -3992,7 +5261,7 @@
           <p:cNvPr id="9" name="">
             <a:extLst xmlns:a="http://schemas.openxmlformats.org/drawingml/2006/main">
               <a:ext uri="{FF2B5EF4-FFF2-40B4-BE49-F238E27FC236}">
-                <a16:creationId xmlns:a16="http://schemas.microsoft.com/office/drawing/2014/main" id="{95AE7252-A99B-410C-B861-932A404F2606}"/>
+                <a16:creationId xmlns:a16="http://schemas.microsoft.com/office/drawing/2014/main" id="{9191C8E3-DDE9-4ACE-9A57-541E9093F63D}"/>
               </a:ext>
             </a:extLst>
           </p:cNvPr>
@@ -4025,7 +5294,7 @@
           <p:cNvPr id="10" name="">
             <a:extLst xmlns:a="http://schemas.openxmlformats.org/drawingml/2006/main">
               <a:ext uri="{FF2B5EF4-FFF2-40B4-BE49-F238E27FC236}">
-                <a16:creationId xmlns:a16="http://schemas.microsoft.com/office/drawing/2014/main" id="{A68EF777-2BF6-4CC8-BDDB-31252D9E2938}"/>
+                <a16:creationId xmlns:a16="http://schemas.microsoft.com/office/drawing/2014/main" id="{A20BEF64-B675-48DD-A99B-7F8545F88427}"/>
               </a:ext>
             </a:extLst>
           </p:cNvPr>
@@ -4076,7 +5345,7 @@
           <p:cNvPr id="11" name="">
             <a:extLst xmlns:a="http://schemas.openxmlformats.org/drawingml/2006/main">
               <a:ext uri="{FF2B5EF4-FFF2-40B4-BE49-F238E27FC236}">
-                <a16:creationId xmlns:a16="http://schemas.microsoft.com/office/drawing/2014/main" id="{CF31ADFA-E65B-4FC2-A4F3-CF753B38D251}"/>
+                <a16:creationId xmlns:a16="http://schemas.microsoft.com/office/drawing/2014/main" id="{AEBBC36F-4843-4DB6-95F3-0AF0E2047B73}"/>
               </a:ext>
             </a:extLst>
           </p:cNvPr>
@@ -4109,7 +5378,7 @@
           <p:cNvPr id="12" name="">
             <a:extLst xmlns:a="http://schemas.openxmlformats.org/drawingml/2006/main">
               <a:ext uri="{FF2B5EF4-FFF2-40B4-BE49-F238E27FC236}">
-                <a16:creationId xmlns:a16="http://schemas.microsoft.com/office/drawing/2014/main" id="{9874C102-C702-4FED-9663-1C3341047D16}"/>
+                <a16:creationId xmlns:a16="http://schemas.microsoft.com/office/drawing/2014/main" id="{5D13408D-8A1A-419A-9B84-54B655848038}"/>
               </a:ext>
             </a:extLst>
           </p:cNvPr>
@@ -4160,7 +5429,7 @@
           <p:cNvPr id="13" name="">
             <a:extLst xmlns:a="http://schemas.openxmlformats.org/drawingml/2006/main">
               <a:ext uri="{FF2B5EF4-FFF2-40B4-BE49-F238E27FC236}">
-                <a16:creationId xmlns:a16="http://schemas.microsoft.com/office/drawing/2014/main" id="{7FE910E2-10B9-4C88-B566-D59F935720CB}"/>
+                <a16:creationId xmlns:a16="http://schemas.microsoft.com/office/drawing/2014/main" id="{DA8B5B44-86C0-4B52-B27B-C5FC76291DED}"/>
               </a:ext>
             </a:extLst>
           </p:cNvPr>
@@ -4193,7 +5462,7 @@
           <p:cNvPr id="14" name="">
             <a:extLst xmlns:a="http://schemas.openxmlformats.org/drawingml/2006/main">
               <a:ext uri="{FF2B5EF4-FFF2-40B4-BE49-F238E27FC236}">
-                <a16:creationId xmlns:a16="http://schemas.microsoft.com/office/drawing/2014/main" id="{34B2AABE-D720-4183-BF9B-E11004AA413C}"/>
+                <a16:creationId xmlns:a16="http://schemas.microsoft.com/office/drawing/2014/main" id="{46FAE7F5-8645-4C3A-8AE8-BC7A6554F26B}"/>
               </a:ext>
             </a:extLst>
           </p:cNvPr>
@@ -4244,7 +5513,7 @@
           <p:cNvPr id="15" name="">
             <a:extLst xmlns:a="http://schemas.openxmlformats.org/drawingml/2006/main">
               <a:ext uri="{FF2B5EF4-FFF2-40B4-BE49-F238E27FC236}">
-                <a16:creationId xmlns:a16="http://schemas.microsoft.com/office/drawing/2014/main" id="{3F495664-12DA-4B82-A3BF-FBD33F4EEC82}"/>
+                <a16:creationId xmlns:a16="http://schemas.microsoft.com/office/drawing/2014/main" id="{FEB03D7A-FCD4-4D50-90AB-73B0F4F27D54}"/>
               </a:ext>
             </a:extLst>
           </p:cNvPr>
@@ -4277,7 +5546,7 @@
           <p:cNvPr id="16" name="">
             <a:extLst xmlns:a="http://schemas.openxmlformats.org/drawingml/2006/main">
               <a:ext uri="{FF2B5EF4-FFF2-40B4-BE49-F238E27FC236}">
-                <a16:creationId xmlns:a16="http://schemas.microsoft.com/office/drawing/2014/main" id="{0AC2EFE9-44DC-49AF-9320-2A6A4DF7F50A}"/>
+                <a16:creationId xmlns:a16="http://schemas.microsoft.com/office/drawing/2014/main" id="{3CED3258-D290-4F8D-95CD-AE3A0D914AB6}"/>
               </a:ext>
             </a:extLst>
           </p:cNvPr>
@@ -4310,7 +5579,7 @@
           <p:cNvPr id="17" name="">
             <a:extLst xmlns:a="http://schemas.openxmlformats.org/drawingml/2006/main">
               <a:ext uri="{FF2B5EF4-FFF2-40B4-BE49-F238E27FC236}">
-                <a16:creationId xmlns:a16="http://schemas.microsoft.com/office/drawing/2014/main" id="{B456A757-0636-4720-AA00-A4746C401BA8}"/>
+                <a16:creationId xmlns:a16="http://schemas.microsoft.com/office/drawing/2014/main" id="{3D3B77A1-4834-4308-A8E4-4EADECD3441D}"/>
               </a:ext>
             </a:extLst>
           </p:cNvPr>
@@ -4361,7 +5630,7 @@
           <p:cNvPr id="18" name="">
             <a:extLst xmlns:a="http://schemas.openxmlformats.org/drawingml/2006/main">
               <a:ext uri="{FF2B5EF4-FFF2-40B4-BE49-F238E27FC236}">
-                <a16:creationId xmlns:a16="http://schemas.microsoft.com/office/drawing/2014/main" id="{9250E760-DB45-4F76-BF05-EC9A88998BF6}"/>
+                <a16:creationId xmlns:a16="http://schemas.microsoft.com/office/drawing/2014/main" id="{2AACC19C-3897-4B39-A0D1-74CBE6D3E166}"/>
               </a:ext>
             </a:extLst>
           </p:cNvPr>
@@ -4394,7 +5663,7 @@
           <p:cNvPr id="19" name="">
             <a:extLst xmlns:a="http://schemas.openxmlformats.org/drawingml/2006/main">
               <a:ext uri="{FF2B5EF4-FFF2-40B4-BE49-F238E27FC236}">
-                <a16:creationId xmlns:a16="http://schemas.microsoft.com/office/drawing/2014/main" id="{EAFC610F-EC4E-4677-BCD4-C20E0E69BB96}"/>
+                <a16:creationId xmlns:a16="http://schemas.microsoft.com/office/drawing/2014/main" id="{C1AC2BEB-04CC-41CC-A37C-526EEB58A9B8}"/>
               </a:ext>
             </a:extLst>
           </p:cNvPr>
@@ -4445,7 +5714,7 @@
           <p:cNvPr id="20" name="">
             <a:extLst xmlns:a="http://schemas.openxmlformats.org/drawingml/2006/main">
               <a:ext uri="{FF2B5EF4-FFF2-40B4-BE49-F238E27FC236}">
-                <a16:creationId xmlns:a16="http://schemas.microsoft.com/office/drawing/2014/main" id="{59B8F3AA-9CA0-4112-B1ED-276AB7A32416}"/>
+                <a16:creationId xmlns:a16="http://schemas.microsoft.com/office/drawing/2014/main" id="{0C014D61-1979-42D8-B5C8-BFDAAF816C60}"/>
               </a:ext>
             </a:extLst>
           </p:cNvPr>
@@ -4478,7 +5747,7 @@
           <p:cNvPr id="21" name="">
             <a:extLst xmlns:a="http://schemas.openxmlformats.org/drawingml/2006/main">
               <a:ext uri="{FF2B5EF4-FFF2-40B4-BE49-F238E27FC236}">
-                <a16:creationId xmlns:a16="http://schemas.microsoft.com/office/drawing/2014/main" id="{AD91A97C-C4D3-45AA-A425-D2FB5FA1D595}"/>
+                <a16:creationId xmlns:a16="http://schemas.microsoft.com/office/drawing/2014/main" id="{BFAF72FC-290A-4F7C-8493-313A6123BBD5}"/>
               </a:ext>
             </a:extLst>
           </p:cNvPr>
@@ -4529,7 +5798,7 @@
           <p:cNvPr id="22" name="">
             <a:extLst xmlns:a="http://schemas.openxmlformats.org/drawingml/2006/main">
               <a:ext uri="{FF2B5EF4-FFF2-40B4-BE49-F238E27FC236}">
-                <a16:creationId xmlns:a16="http://schemas.microsoft.com/office/drawing/2014/main" id="{86ECC6BE-7447-4FB2-971F-74D374B68E05}"/>
+                <a16:creationId xmlns:a16="http://schemas.microsoft.com/office/drawing/2014/main" id="{4FFEB58C-FFDC-4F39-875A-DD10974E3E72}"/>
               </a:ext>
             </a:extLst>
           </p:cNvPr>
@@ -4562,7 +5831,7 @@
           <p:cNvPr id="23" name="">
             <a:extLst xmlns:a="http://schemas.openxmlformats.org/drawingml/2006/main">
               <a:ext uri="{FF2B5EF4-FFF2-40B4-BE49-F238E27FC236}">
-                <a16:creationId xmlns:a16="http://schemas.microsoft.com/office/drawing/2014/main" id="{95EA8BEC-228B-4732-84CA-DAE5A6BD9390}"/>
+                <a16:creationId xmlns:a16="http://schemas.microsoft.com/office/drawing/2014/main" id="{F7127438-0E20-4083-BA93-C678950A013D}"/>
               </a:ext>
             </a:extLst>
           </p:cNvPr>
@@ -4613,7 +5882,7 @@
           <p:cNvPr id="24" name="">
             <a:extLst xmlns:a="http://schemas.openxmlformats.org/drawingml/2006/main">
               <a:ext uri="{FF2B5EF4-FFF2-40B4-BE49-F238E27FC236}">
-                <a16:creationId xmlns:a16="http://schemas.microsoft.com/office/drawing/2014/main" id="{C8254F6F-F897-42ED-8712-B00B2BFC0393}"/>
+                <a16:creationId xmlns:a16="http://schemas.microsoft.com/office/drawing/2014/main" id="{E0BD7957-5470-4676-A27E-CB3D1F1C3294}"/>
               </a:ext>
             </a:extLst>
           </p:cNvPr>
@@ -4646,7 +5915,7 @@
           <p:cNvPr id="25" name="">
             <a:extLst xmlns:a="http://schemas.openxmlformats.org/drawingml/2006/main">
               <a:ext uri="{FF2B5EF4-FFF2-40B4-BE49-F238E27FC236}">
-                <a16:creationId xmlns:a16="http://schemas.microsoft.com/office/drawing/2014/main" id="{5A80FD60-300E-469D-AA05-1D4C9744FEEC}"/>
+                <a16:creationId xmlns:a16="http://schemas.microsoft.com/office/drawing/2014/main" id="{816F7F71-C9C5-472A-9989-66AA31D22EE8}"/>
               </a:ext>
             </a:extLst>
           </p:cNvPr>
@@ -4697,7 +5966,7 @@
           <p:cNvPr id="26" name="">
             <a:extLst xmlns:a="http://schemas.openxmlformats.org/drawingml/2006/main">
               <a:ext uri="{FF2B5EF4-FFF2-40B4-BE49-F238E27FC236}">
-                <a16:creationId xmlns:a16="http://schemas.microsoft.com/office/drawing/2014/main" id="{F2BB9617-9476-46AC-A7FE-509A15819249}"/>
+                <a16:creationId xmlns:a16="http://schemas.microsoft.com/office/drawing/2014/main" id="{B6C377F0-D76B-4CF5-B5F7-41A270BDE296}"/>
               </a:ext>
             </a:extLst>
           </p:cNvPr>
@@ -4730,7 +5999,7 @@
           <p:cNvPr id="27" name="">
             <a:extLst xmlns:a="http://schemas.openxmlformats.org/drawingml/2006/main">
               <a:ext uri="{FF2B5EF4-FFF2-40B4-BE49-F238E27FC236}">
-                <a16:creationId xmlns:a16="http://schemas.microsoft.com/office/drawing/2014/main" id="{81BDC31A-14B8-42D7-99DC-AFEE50F6F3D5}"/>
+                <a16:creationId xmlns:a16="http://schemas.microsoft.com/office/drawing/2014/main" id="{BC5303FE-BC73-406D-B605-354B75A7055D}"/>
               </a:ext>
             </a:extLst>
           </p:cNvPr>
@@ -4763,7 +6032,7 @@
           <p:cNvPr id="28" name="">
             <a:extLst xmlns:a="http://schemas.openxmlformats.org/drawingml/2006/main">
               <a:ext uri="{FF2B5EF4-FFF2-40B4-BE49-F238E27FC236}">
-                <a16:creationId xmlns:a16="http://schemas.microsoft.com/office/drawing/2014/main" id="{736D768B-939C-40EE-A4F3-2AFECD379645}"/>
+                <a16:creationId xmlns:a16="http://schemas.microsoft.com/office/drawing/2014/main" id="{3DD9B710-C5BF-4223-A922-16CD4539D7E4}"/>
               </a:ext>
             </a:extLst>
           </p:cNvPr>
@@ -4814,7 +6083,7 @@
           <p:cNvPr id="29" name="">
             <a:extLst xmlns:a="http://schemas.openxmlformats.org/drawingml/2006/main">
               <a:ext uri="{FF2B5EF4-FFF2-40B4-BE49-F238E27FC236}">
-                <a16:creationId xmlns:a16="http://schemas.microsoft.com/office/drawing/2014/main" id="{1D1B4B51-33CF-46AF-8777-3612DE98978E}"/>
+                <a16:creationId xmlns:a16="http://schemas.microsoft.com/office/drawing/2014/main" id="{5946F591-2BB8-4206-BDD4-AC4FF490A4D6}"/>
               </a:ext>
             </a:extLst>
           </p:cNvPr>
@@ -4847,7 +6116,7 @@
           <p:cNvPr id="30" name="">
             <a:extLst xmlns:a="http://schemas.openxmlformats.org/drawingml/2006/main">
               <a:ext uri="{FF2B5EF4-FFF2-40B4-BE49-F238E27FC236}">
-                <a16:creationId xmlns:a16="http://schemas.microsoft.com/office/drawing/2014/main" id="{970EA738-F76C-401C-AF0D-AD533A678C1E}"/>
+                <a16:creationId xmlns:a16="http://schemas.microsoft.com/office/drawing/2014/main" id="{8B4DE1D9-B2D6-4382-91FC-5079BF7C5D86}"/>
               </a:ext>
             </a:extLst>
           </p:cNvPr>
@@ -4898,7 +6167,7 @@
           <p:cNvPr id="31" name="">
             <a:extLst xmlns:a="http://schemas.openxmlformats.org/drawingml/2006/main">
               <a:ext uri="{FF2B5EF4-FFF2-40B4-BE49-F238E27FC236}">
-                <a16:creationId xmlns:a16="http://schemas.microsoft.com/office/drawing/2014/main" id="{6CCBF9FB-DEB8-4858-955B-5C78F7D69DC7}"/>
+                <a16:creationId xmlns:a16="http://schemas.microsoft.com/office/drawing/2014/main" id="{A6115A44-57D2-4A9D-B4A4-F406E9CF8130}"/>
               </a:ext>
             </a:extLst>
           </p:cNvPr>
@@ -4931,7 +6200,7 @@
           <p:cNvPr id="32" name="">
             <a:extLst xmlns:a="http://schemas.openxmlformats.org/drawingml/2006/main">
               <a:ext uri="{FF2B5EF4-FFF2-40B4-BE49-F238E27FC236}">
-                <a16:creationId xmlns:a16="http://schemas.microsoft.com/office/drawing/2014/main" id="{C9F5F00E-1E2C-48CF-BB2F-21EFF3D928C9}"/>
+                <a16:creationId xmlns:a16="http://schemas.microsoft.com/office/drawing/2014/main" id="{8F02AC95-D41E-47AD-8673-62EDBEA25499}"/>
               </a:ext>
             </a:extLst>
           </p:cNvPr>
@@ -4982,7 +6251,7 @@
           <p:cNvPr id="33" name="">
             <a:extLst xmlns:a="http://schemas.openxmlformats.org/drawingml/2006/main">
               <a:ext uri="{FF2B5EF4-FFF2-40B4-BE49-F238E27FC236}">
-                <a16:creationId xmlns:a16="http://schemas.microsoft.com/office/drawing/2014/main" id="{5801C685-6EA9-4340-A078-C7ED061EE681}"/>
+                <a16:creationId xmlns:a16="http://schemas.microsoft.com/office/drawing/2014/main" id="{E01B059D-BFE6-4542-AE9F-9AC1B1E00208}"/>
               </a:ext>
             </a:extLst>
           </p:cNvPr>
@@ -5015,7 +6284,7 @@
           <p:cNvPr id="34" name="">
             <a:extLst xmlns:a="http://schemas.openxmlformats.org/drawingml/2006/main">
               <a:ext uri="{FF2B5EF4-FFF2-40B4-BE49-F238E27FC236}">
-                <a16:creationId xmlns:a16="http://schemas.microsoft.com/office/drawing/2014/main" id="{53F58303-B949-4A47-8D5E-1D7C7E164881}"/>
+                <a16:creationId xmlns:a16="http://schemas.microsoft.com/office/drawing/2014/main" id="{7FAE16E1-8DCE-4BE6-933D-EF6A6059BC27}"/>
               </a:ext>
             </a:extLst>
           </p:cNvPr>
@@ -5066,7 +6335,7 @@
           <p:cNvPr id="35" name="">
             <a:extLst xmlns:a="http://schemas.openxmlformats.org/drawingml/2006/main">
               <a:ext uri="{FF2B5EF4-FFF2-40B4-BE49-F238E27FC236}">
-                <a16:creationId xmlns:a16="http://schemas.microsoft.com/office/drawing/2014/main" id="{FAE52FA4-074A-4FC7-987D-560D070806BB}"/>
+                <a16:creationId xmlns:a16="http://schemas.microsoft.com/office/drawing/2014/main" id="{708E6A91-3508-4135-B12A-F27836821455}"/>
               </a:ext>
             </a:extLst>
           </p:cNvPr>
@@ -5099,7 +6368,7 @@
           <p:cNvPr id="36" name="">
             <a:extLst xmlns:a="http://schemas.openxmlformats.org/drawingml/2006/main">
               <a:ext uri="{FF2B5EF4-FFF2-40B4-BE49-F238E27FC236}">
-                <a16:creationId xmlns:a16="http://schemas.microsoft.com/office/drawing/2014/main" id="{F851C789-A25A-424D-ABD6-CE463E323FE5}"/>
+                <a16:creationId xmlns:a16="http://schemas.microsoft.com/office/drawing/2014/main" id="{7DDF4405-B528-486B-B39B-B787D78C4C01}"/>
               </a:ext>
             </a:extLst>
           </p:cNvPr>
@@ -5150,7 +6419,7 @@
           <p:cNvPr id="37" name="">
             <a:extLst xmlns:a="http://schemas.openxmlformats.org/drawingml/2006/main">
               <a:ext uri="{FF2B5EF4-FFF2-40B4-BE49-F238E27FC236}">
-                <a16:creationId xmlns:a16="http://schemas.microsoft.com/office/drawing/2014/main" id="{159C48C4-8E68-4306-B4B9-BDF46F4205DC}"/>
+                <a16:creationId xmlns:a16="http://schemas.microsoft.com/office/drawing/2014/main" id="{CACE6CBC-A1E5-4E25-A920-63DE4E1BC22C}"/>
               </a:ext>
             </a:extLst>
           </p:cNvPr>
@@ -5201,7 +6470,7 @@
           <p:cNvPr id="38" name="">
             <a:extLst xmlns:a="http://schemas.openxmlformats.org/drawingml/2006/main">
               <a:ext uri="{FF2B5EF4-FFF2-40B4-BE49-F238E27FC236}">
-                <a16:creationId xmlns:a16="http://schemas.microsoft.com/office/drawing/2014/main" id="{56EB88D7-41AC-487B-B7C8-56F40CF57604}"/>
+                <a16:creationId xmlns:a16="http://schemas.microsoft.com/office/drawing/2014/main" id="{7BB177AF-5190-4F24-9809-19957B73DF9E}"/>
               </a:ext>
             </a:extLst>
           </p:cNvPr>
@@ -5252,7 +6521,7 @@
           <p:cNvPr id="39" name="">
             <a:extLst xmlns:a="http://schemas.openxmlformats.org/drawingml/2006/main">
               <a:ext uri="{FF2B5EF4-FFF2-40B4-BE49-F238E27FC236}">
-                <a16:creationId xmlns:a16="http://schemas.microsoft.com/office/drawing/2014/main" id="{83A6431E-665A-4217-9858-F3C6BF9DF660}"/>
+                <a16:creationId xmlns:a16="http://schemas.microsoft.com/office/drawing/2014/main" id="{54E55854-7B33-4C2E-B635-FF892119502C}"/>
               </a:ext>
             </a:extLst>
           </p:cNvPr>
@@ -5303,7 +6572,7 @@
           <p:cNvPr id="40" name="">
             <a:extLst xmlns:a="http://schemas.openxmlformats.org/drawingml/2006/main">
               <a:ext uri="{FF2B5EF4-FFF2-40B4-BE49-F238E27FC236}">
-                <a16:creationId xmlns:a16="http://schemas.microsoft.com/office/drawing/2014/main" id="{DD97D715-A424-456C-9A3F-808ADCB1E237}"/>
+                <a16:creationId xmlns:a16="http://schemas.microsoft.com/office/drawing/2014/main" id="{9D858B98-EB1A-4891-9FBF-5AAB9A40BACF}"/>
               </a:ext>
             </a:extLst>
           </p:cNvPr>
@@ -5352,7 +6621,7 @@
     </p:spTree>
     <p:extLst>
       <p:ext uri="{BB962C8B-B14F-4D97-AF65-F5344CB8AC3E}">
-        <p14:creationId xmlns:p14="http://schemas.microsoft.com/office/powerpoint/2010/main" val="130595187"/>
+        <p14:creationId xmlns:p14="http://schemas.microsoft.com/office/powerpoint/2010/main" val="181684823"/>
       </p:ext>
     </p:extLst>
   </p:cSld>
@@ -5376,7 +6645,7 @@
           <p:cNvPr id="1" name="">
             <a:extLst xmlns:a="http://schemas.openxmlformats.org/drawingml/2006/main">
               <a:ext uri="{FF2B5EF4-FFF2-40B4-BE49-F238E27FC236}">
-                <a16:creationId xmlns:a16="http://schemas.microsoft.com/office/drawing/2014/main" id="{11D6C3C6-5B8F-4384-B776-263C99132BF2}"/>
+                <a16:creationId xmlns:a16="http://schemas.microsoft.com/office/drawing/2014/main" id="{FDEEFF3F-3B4F-4B6E-98BC-E2702A097F6E}"/>
               </a:ext>
             </a:extLst>
           </p:cNvPr>
@@ -5409,7 +6678,7 @@
           <p:cNvPr id="2" name="">
             <a:extLst xmlns:a="http://schemas.openxmlformats.org/drawingml/2006/main">
               <a:ext uri="{FF2B5EF4-FFF2-40B4-BE49-F238E27FC236}">
-                <a16:creationId xmlns:a16="http://schemas.microsoft.com/office/drawing/2014/main" id="{9E54F15C-257A-47E6-BB79-0D674F15C334}"/>
+                <a16:creationId xmlns:a16="http://schemas.microsoft.com/office/drawing/2014/main" id="{03B19494-10B4-4F89-AE91-F094BD5B7C8A}"/>
               </a:ext>
             </a:extLst>
           </p:cNvPr>
@@ -5460,7 +6729,7 @@
           <p:cNvPr id="3" name="">
             <a:extLst xmlns:a="http://schemas.openxmlformats.org/drawingml/2006/main">
               <a:ext uri="{FF2B5EF4-FFF2-40B4-BE49-F238E27FC236}">
-                <a16:creationId xmlns:a16="http://schemas.microsoft.com/office/drawing/2014/main" id="{B815F19F-9274-4FE6-A431-024748FB59A3}"/>
+                <a16:creationId xmlns:a16="http://schemas.microsoft.com/office/drawing/2014/main" id="{95A9FDC5-9F1F-4877-A369-16CFE1B8B763}"/>
               </a:ext>
             </a:extLst>
           </p:cNvPr>
@@ -5511,7 +6780,7 @@
           <p:cNvPr id="4" name="">
             <a:extLst xmlns:a="http://schemas.openxmlformats.org/drawingml/2006/main">
               <a:ext uri="{FF2B5EF4-FFF2-40B4-BE49-F238E27FC236}">
-                <a16:creationId xmlns:a16="http://schemas.microsoft.com/office/drawing/2014/main" id="{62A91B29-9D06-4295-9D62-25559B55BB9A}"/>
+                <a16:creationId xmlns:a16="http://schemas.microsoft.com/office/drawing/2014/main" id="{5118F54A-9265-43FC-9E44-FFDA801D5D71}"/>
               </a:ext>
             </a:extLst>
           </p:cNvPr>
@@ -5562,7 +6831,7 @@
           <p:cNvPr id="5" name="">
             <a:extLst xmlns:a="http://schemas.openxmlformats.org/drawingml/2006/main">
               <a:ext uri="{FF2B5EF4-FFF2-40B4-BE49-F238E27FC236}">
-                <a16:creationId xmlns:a16="http://schemas.microsoft.com/office/drawing/2014/main" id="{E510B260-6B15-4B41-8E65-1941DDEAED6E}"/>
+                <a16:creationId xmlns:a16="http://schemas.microsoft.com/office/drawing/2014/main" id="{2442BCA9-C6CF-4350-BB21-6A82889A5EFD}"/>
               </a:ext>
             </a:extLst>
           </p:cNvPr>
@@ -5613,7 +6882,7 @@
           <p:cNvPr id="6" name="">
             <a:extLst xmlns:a="http://schemas.openxmlformats.org/drawingml/2006/main">
               <a:ext uri="{FF2B5EF4-FFF2-40B4-BE49-F238E27FC236}">
-                <a16:creationId xmlns:a16="http://schemas.microsoft.com/office/drawing/2014/main" id="{A833ABC0-57C1-43E8-A652-3CD2EBC78488}"/>
+                <a16:creationId xmlns:a16="http://schemas.microsoft.com/office/drawing/2014/main" id="{4BFD43B9-29E6-43F8-864A-8F2FDEDFB178}"/>
               </a:ext>
             </a:extLst>
           </p:cNvPr>
@@ -5664,7 +6933,7 @@
           <p:cNvPr id="7" name="">
             <a:extLst xmlns:a="http://schemas.openxmlformats.org/drawingml/2006/main">
               <a:ext uri="{FF2B5EF4-FFF2-40B4-BE49-F238E27FC236}">
-                <a16:creationId xmlns:a16="http://schemas.microsoft.com/office/drawing/2014/main" id="{996B0EEA-3C36-402C-8114-145EC9125C83}"/>
+                <a16:creationId xmlns:a16="http://schemas.microsoft.com/office/drawing/2014/main" id="{234A90F4-4BB8-495B-8A17-652E4FF62C5F}"/>
               </a:ext>
             </a:extLst>
           </p:cNvPr>
@@ -5697,7 +6966,7 @@
           <p:cNvPr id="8" name="">
             <a:extLst xmlns:a="http://schemas.openxmlformats.org/drawingml/2006/main">
               <a:ext uri="{FF2B5EF4-FFF2-40B4-BE49-F238E27FC236}">
-                <a16:creationId xmlns:a16="http://schemas.microsoft.com/office/drawing/2014/main" id="{F4BC8F6D-9DA6-42C9-8F47-C5B861998D50}"/>
+                <a16:creationId xmlns:a16="http://schemas.microsoft.com/office/drawing/2014/main" id="{B3D1F52D-97FB-4897-A2A8-672F6B481933}"/>
               </a:ext>
             </a:extLst>
           </p:cNvPr>
@@ -5730,7 +6999,7 @@
           <p:cNvPr id="9" name="">
             <a:extLst xmlns:a="http://schemas.openxmlformats.org/drawingml/2006/main">
               <a:ext uri="{FF2B5EF4-FFF2-40B4-BE49-F238E27FC236}">
-                <a16:creationId xmlns:a16="http://schemas.microsoft.com/office/drawing/2014/main" id="{8D51F92E-72C3-40FE-A6B3-502EE3758E17}"/>
+                <a16:creationId xmlns:a16="http://schemas.microsoft.com/office/drawing/2014/main" id="{5142882E-4F00-4650-9BF7-7579ED49D17B}"/>
               </a:ext>
             </a:extLst>
           </p:cNvPr>
@@ -5781,7 +7050,7 @@
           <p:cNvPr id="10" name="">
             <a:extLst xmlns:a="http://schemas.openxmlformats.org/drawingml/2006/main">
               <a:ext uri="{FF2B5EF4-FFF2-40B4-BE49-F238E27FC236}">
-                <a16:creationId xmlns:a16="http://schemas.microsoft.com/office/drawing/2014/main" id="{1D24F170-5E21-4E95-8ECC-9E7EE144613E}"/>
+                <a16:creationId xmlns:a16="http://schemas.microsoft.com/office/drawing/2014/main" id="{CC1744A8-3EA9-4C12-8658-2FB4A82AE5E3}"/>
               </a:ext>
             </a:extLst>
           </p:cNvPr>
@@ -5832,7 +7101,7 @@
           <p:cNvPr id="11" name="">
             <a:extLst xmlns:a="http://schemas.openxmlformats.org/drawingml/2006/main">
               <a:ext uri="{FF2B5EF4-FFF2-40B4-BE49-F238E27FC236}">
-                <a16:creationId xmlns:a16="http://schemas.microsoft.com/office/drawing/2014/main" id="{713EA310-A6B0-4A53-9789-B2E71DBFB9BB}"/>
+                <a16:creationId xmlns:a16="http://schemas.microsoft.com/office/drawing/2014/main" id="{4E252041-F894-4093-B3A0-6256FA05CA93}"/>
               </a:ext>
             </a:extLst>
           </p:cNvPr>
@@ -5865,7 +7134,7 @@
           <p:cNvPr id="12" name="">
             <a:extLst xmlns:a="http://schemas.openxmlformats.org/drawingml/2006/main">
               <a:ext uri="{FF2B5EF4-FFF2-40B4-BE49-F238E27FC236}">
-                <a16:creationId xmlns:a16="http://schemas.microsoft.com/office/drawing/2014/main" id="{E76C8C7C-AD8B-43C3-83D9-69B7E399E13A}"/>
+                <a16:creationId xmlns:a16="http://schemas.microsoft.com/office/drawing/2014/main" id="{C9523310-72C4-4290-BFA2-13F98D56D373}"/>
               </a:ext>
             </a:extLst>
           </p:cNvPr>
@@ -5898,7 +7167,7 @@
           <p:cNvPr id="13" name="">
             <a:extLst xmlns:a="http://schemas.openxmlformats.org/drawingml/2006/main">
               <a:ext uri="{FF2B5EF4-FFF2-40B4-BE49-F238E27FC236}">
-                <a16:creationId xmlns:a16="http://schemas.microsoft.com/office/drawing/2014/main" id="{076F71C4-15C6-4483-A984-B782302E12C2}"/>
+                <a16:creationId xmlns:a16="http://schemas.microsoft.com/office/drawing/2014/main" id="{5555F0A9-B008-42A7-94D4-BFEAE60F0716}"/>
               </a:ext>
             </a:extLst>
           </p:cNvPr>
@@ -5949,7 +7218,7 @@
           <p:cNvPr id="14" name="">
             <a:extLst xmlns:a="http://schemas.openxmlformats.org/drawingml/2006/main">
               <a:ext uri="{FF2B5EF4-FFF2-40B4-BE49-F238E27FC236}">
-                <a16:creationId xmlns:a16="http://schemas.microsoft.com/office/drawing/2014/main" id="{13C31C37-CB9D-4624-8BCE-9427E00600A7}"/>
+                <a16:creationId xmlns:a16="http://schemas.microsoft.com/office/drawing/2014/main" id="{36207B53-FEE1-4CB2-A4E3-CD82D10407B0}"/>
               </a:ext>
             </a:extLst>
           </p:cNvPr>
@@ -6000,7 +7269,7 @@
           <p:cNvPr id="15" name="">
             <a:extLst xmlns:a="http://schemas.openxmlformats.org/drawingml/2006/main">
               <a:ext uri="{FF2B5EF4-FFF2-40B4-BE49-F238E27FC236}">
-                <a16:creationId xmlns:a16="http://schemas.microsoft.com/office/drawing/2014/main" id="{DC3589B3-9F59-4EA0-84EE-EB19796979BE}"/>
+                <a16:creationId xmlns:a16="http://schemas.microsoft.com/office/drawing/2014/main" id="{A5D83149-F2F9-406C-BB8E-09AD11410C9B}"/>
               </a:ext>
             </a:extLst>
           </p:cNvPr>
@@ -6033,7 +7302,7 @@
           <p:cNvPr id="16" name="">
             <a:extLst xmlns:a="http://schemas.openxmlformats.org/drawingml/2006/main">
               <a:ext uri="{FF2B5EF4-FFF2-40B4-BE49-F238E27FC236}">
-                <a16:creationId xmlns:a16="http://schemas.microsoft.com/office/drawing/2014/main" id="{7852958F-DF6F-4F25-AE3C-735A584AB48C}"/>
+                <a16:creationId xmlns:a16="http://schemas.microsoft.com/office/drawing/2014/main" id="{D9924BB8-9A50-4E98-A9AC-D6937644B8D8}"/>
               </a:ext>
             </a:extLst>
           </p:cNvPr>
@@ -6066,7 +7335,7 @@
           <p:cNvPr id="17" name="">
             <a:extLst xmlns:a="http://schemas.openxmlformats.org/drawingml/2006/main">
               <a:ext uri="{FF2B5EF4-FFF2-40B4-BE49-F238E27FC236}">
-                <a16:creationId xmlns:a16="http://schemas.microsoft.com/office/drawing/2014/main" id="{778C808C-F858-45F1-B459-F3FD80D4F3D6}"/>
+                <a16:creationId xmlns:a16="http://schemas.microsoft.com/office/drawing/2014/main" id="{98AE9770-38DD-479C-9E77-FD520CB80150}"/>
               </a:ext>
             </a:extLst>
           </p:cNvPr>
@@ -6117,7 +7386,7 @@
           <p:cNvPr id="18" name="">
             <a:extLst xmlns:a="http://schemas.openxmlformats.org/drawingml/2006/main">
               <a:ext uri="{FF2B5EF4-FFF2-40B4-BE49-F238E27FC236}">
-                <a16:creationId xmlns:a16="http://schemas.microsoft.com/office/drawing/2014/main" id="{F9D009B7-D9DD-481A-A0F7-30EE4E827CD8}"/>
+                <a16:creationId xmlns:a16="http://schemas.microsoft.com/office/drawing/2014/main" id="{1837DBB5-4619-49FE-AD5E-396BE1612D43}"/>
               </a:ext>
             </a:extLst>
           </p:cNvPr>
@@ -6168,7 +7437,7 @@
           <p:cNvPr id="19" name="">
             <a:extLst xmlns:a="http://schemas.openxmlformats.org/drawingml/2006/main">
               <a:ext uri="{FF2B5EF4-FFF2-40B4-BE49-F238E27FC236}">
-                <a16:creationId xmlns:a16="http://schemas.microsoft.com/office/drawing/2014/main" id="{268640D3-B375-44A8-BE80-60CA55176538}"/>
+                <a16:creationId xmlns:a16="http://schemas.microsoft.com/office/drawing/2014/main" id="{3F261665-DEF7-466F-9C08-565CB6D0F692}"/>
               </a:ext>
             </a:extLst>
           </p:cNvPr>
@@ -6201,7 +7470,7 @@
           <p:cNvPr id="20" name="">
             <a:extLst xmlns:a="http://schemas.openxmlformats.org/drawingml/2006/main">
               <a:ext uri="{FF2B5EF4-FFF2-40B4-BE49-F238E27FC236}">
-                <a16:creationId xmlns:a16="http://schemas.microsoft.com/office/drawing/2014/main" id="{50783C3E-6A43-433C-91A3-BC71FDC32B06}"/>
+                <a16:creationId xmlns:a16="http://schemas.microsoft.com/office/drawing/2014/main" id="{F0AD0B22-7CEE-49B4-8C7C-D5834A144B6F}"/>
               </a:ext>
             </a:extLst>
           </p:cNvPr>
@@ -6234,7 +7503,7 @@
           <p:cNvPr id="21" name="">
             <a:extLst xmlns:a="http://schemas.openxmlformats.org/drawingml/2006/main">
               <a:ext uri="{FF2B5EF4-FFF2-40B4-BE49-F238E27FC236}">
-                <a16:creationId xmlns:a16="http://schemas.microsoft.com/office/drawing/2014/main" id="{1994830D-BDBA-4BD1-9A28-EA5F226CAD26}"/>
+                <a16:creationId xmlns:a16="http://schemas.microsoft.com/office/drawing/2014/main" id="{85027DCE-B3ED-49AD-9DDC-BC2665128BC6}"/>
               </a:ext>
             </a:extLst>
           </p:cNvPr>
@@ -6285,7 +7554,7 @@
           <p:cNvPr id="22" name="">
             <a:extLst xmlns:a="http://schemas.openxmlformats.org/drawingml/2006/main">
               <a:ext uri="{FF2B5EF4-FFF2-40B4-BE49-F238E27FC236}">
-                <a16:creationId xmlns:a16="http://schemas.microsoft.com/office/drawing/2014/main" id="{5339CC57-0B95-4748-AFB2-5B35BD368FA3}"/>
+                <a16:creationId xmlns:a16="http://schemas.microsoft.com/office/drawing/2014/main" id="{F8059EC8-214E-428C-9D46-B89E7FEE68BB}"/>
               </a:ext>
             </a:extLst>
           </p:cNvPr>
@@ -6336,7 +7605,7 @@
           <p:cNvPr id="23" name="">
             <a:extLst xmlns:a="http://schemas.openxmlformats.org/drawingml/2006/main">
               <a:ext uri="{FF2B5EF4-FFF2-40B4-BE49-F238E27FC236}">
-                <a16:creationId xmlns:a16="http://schemas.microsoft.com/office/drawing/2014/main" id="{EACF64E7-DA0E-43EE-B2D3-F4DFF9D5FE21}"/>
+                <a16:creationId xmlns:a16="http://schemas.microsoft.com/office/drawing/2014/main" id="{F9F7498D-DB44-41AE-941C-87D2CA1FF8F6}"/>
               </a:ext>
             </a:extLst>
           </p:cNvPr>
@@ -6387,7 +7656,7 @@
           <p:cNvPr id="24" name="">
             <a:extLst xmlns:a="http://schemas.openxmlformats.org/drawingml/2006/main">
               <a:ext uri="{FF2B5EF4-FFF2-40B4-BE49-F238E27FC236}">
-                <a16:creationId xmlns:a16="http://schemas.microsoft.com/office/drawing/2014/main" id="{AD5D385E-B33A-4968-994F-7F557924E361}"/>
+                <a16:creationId xmlns:a16="http://schemas.microsoft.com/office/drawing/2014/main" id="{D33CC3A6-AB7E-40E1-99C5-29C2C275CCFE}"/>
               </a:ext>
             </a:extLst>
           </p:cNvPr>
@@ -6438,7 +7707,7 @@
           <p:cNvPr id="25" name="">
             <a:extLst xmlns:a="http://schemas.openxmlformats.org/drawingml/2006/main">
               <a:ext uri="{FF2B5EF4-FFF2-40B4-BE49-F238E27FC236}">
-                <a16:creationId xmlns:a16="http://schemas.microsoft.com/office/drawing/2014/main" id="{A58873BB-DE4C-4638-A43A-2A6978D85B16}"/>
+                <a16:creationId xmlns:a16="http://schemas.microsoft.com/office/drawing/2014/main" id="{F22671B8-89EB-407B-9951-3D5B176D9019}"/>
               </a:ext>
             </a:extLst>
           </p:cNvPr>
@@ -6487,7 +7756,7 @@
     </p:spTree>
     <p:extLst>
       <p:ext uri="{BB962C8B-B14F-4D97-AF65-F5344CB8AC3E}">
-        <p14:creationId xmlns:p14="http://schemas.microsoft.com/office/powerpoint/2010/main" val="1444697910"/>
+        <p14:creationId xmlns:p14="http://schemas.microsoft.com/office/powerpoint/2010/main" val="2103248818"/>
       </p:ext>
     </p:extLst>
   </p:cSld>
@@ -6511,7 +7780,7 @@
           <p:cNvPr id="1" name="">
             <a:extLst xmlns:a="http://schemas.openxmlformats.org/drawingml/2006/main">
               <a:ext uri="{FF2B5EF4-FFF2-40B4-BE49-F238E27FC236}">
-                <a16:creationId xmlns:a16="http://schemas.microsoft.com/office/drawing/2014/main" id="{C4DAC983-BF32-4B4C-898E-3AE1085849FE}"/>
+                <a16:creationId xmlns:a16="http://schemas.microsoft.com/office/drawing/2014/main" id="{FC18075D-02F8-4380-B40E-CF9FF4D900DD}"/>
               </a:ext>
             </a:extLst>
           </p:cNvPr>
@@ -6544,7 +7813,7 @@
           <p:cNvPr id="2" name="">
             <a:extLst xmlns:a="http://schemas.openxmlformats.org/drawingml/2006/main">
               <a:ext uri="{FF2B5EF4-FFF2-40B4-BE49-F238E27FC236}">
-                <a16:creationId xmlns:a16="http://schemas.microsoft.com/office/drawing/2014/main" id="{EB3B783C-7BC2-4CB8-A95E-D0E4DAE2EA90}"/>
+                <a16:creationId xmlns:a16="http://schemas.microsoft.com/office/drawing/2014/main" id="{3262EBE4-C4ED-4D7D-86B4-6336C39E2E64}"/>
               </a:ext>
             </a:extLst>
           </p:cNvPr>
@@ -6595,7 +7864,7 @@
           <p:cNvPr id="3" name="">
             <a:extLst xmlns:a="http://schemas.openxmlformats.org/drawingml/2006/main">
               <a:ext uri="{FF2B5EF4-FFF2-40B4-BE49-F238E27FC236}">
-                <a16:creationId xmlns:a16="http://schemas.microsoft.com/office/drawing/2014/main" id="{6CE5E229-0DEC-4245-821C-E3916EB678DF}"/>
+                <a16:creationId xmlns:a16="http://schemas.microsoft.com/office/drawing/2014/main" id="{C1890C85-28FC-41C6-B225-687286DD14ED}"/>
               </a:ext>
             </a:extLst>
           </p:cNvPr>
@@ -6646,7 +7915,7 @@
           <p:cNvPr id="4" name="">
             <a:extLst xmlns:a="http://schemas.openxmlformats.org/drawingml/2006/main">
               <a:ext uri="{FF2B5EF4-FFF2-40B4-BE49-F238E27FC236}">
-                <a16:creationId xmlns:a16="http://schemas.microsoft.com/office/drawing/2014/main" id="{63B027C6-89BD-4DA2-8537-7988484370B0}"/>
+                <a16:creationId xmlns:a16="http://schemas.microsoft.com/office/drawing/2014/main" id="{2EBCA1BC-BD5A-4714-A8CA-7394D60C9CA4}"/>
               </a:ext>
             </a:extLst>
           </p:cNvPr>
@@ -6679,7 +7948,7 @@
           <p:cNvPr id="5" name="">
             <a:extLst xmlns:a="http://schemas.openxmlformats.org/drawingml/2006/main">
               <a:ext uri="{FF2B5EF4-FFF2-40B4-BE49-F238E27FC236}">
-                <a16:creationId xmlns:a16="http://schemas.microsoft.com/office/drawing/2014/main" id="{F4A52360-9BBC-4C21-B78D-0506487F1C8F}"/>
+                <a16:creationId xmlns:a16="http://schemas.microsoft.com/office/drawing/2014/main" id="{36FAFB7D-8184-4003-9AC0-16BAE3F95AA8}"/>
               </a:ext>
             </a:extLst>
           </p:cNvPr>
@@ -6712,7 +7981,7 @@
           <p:cNvPr id="6" name="">
             <a:extLst xmlns:a="http://schemas.openxmlformats.org/drawingml/2006/main">
               <a:ext uri="{FF2B5EF4-FFF2-40B4-BE49-F238E27FC236}">
-                <a16:creationId xmlns:a16="http://schemas.microsoft.com/office/drawing/2014/main" id="{9F50817E-6C20-41B0-AB3E-D8E0C64A94CA}"/>
+                <a16:creationId xmlns:a16="http://schemas.microsoft.com/office/drawing/2014/main" id="{E12EC5CA-DF8C-4A5F-BDE3-4863F0351F4A}"/>
               </a:ext>
             </a:extLst>
           </p:cNvPr>
@@ -6763,7 +8032,7 @@
           <p:cNvPr id="7" name="">
             <a:extLst xmlns:a="http://schemas.openxmlformats.org/drawingml/2006/main">
               <a:ext uri="{FF2B5EF4-FFF2-40B4-BE49-F238E27FC236}">
-                <a16:creationId xmlns:a16="http://schemas.microsoft.com/office/drawing/2014/main" id="{AD61F9F4-1537-4711-98DC-CDD947189C3D}"/>
+                <a16:creationId xmlns:a16="http://schemas.microsoft.com/office/drawing/2014/main" id="{FE85D634-26D9-482A-BF74-A11E6E06E0A1}"/>
               </a:ext>
             </a:extLst>
           </p:cNvPr>
@@ -6814,7 +8083,7 @@
           <p:cNvPr id="8" name="">
             <a:extLst xmlns:a="http://schemas.openxmlformats.org/drawingml/2006/main">
               <a:ext uri="{FF2B5EF4-FFF2-40B4-BE49-F238E27FC236}">
-                <a16:creationId xmlns:a16="http://schemas.microsoft.com/office/drawing/2014/main" id="{1E1A3116-B1C1-43F2-B302-104261A40E4F}"/>
+                <a16:creationId xmlns:a16="http://schemas.microsoft.com/office/drawing/2014/main" id="{56D5BE23-E4F4-42C3-8EF4-31087749E4DD}"/>
               </a:ext>
             </a:extLst>
           </p:cNvPr>
@@ -6847,7 +8116,7 @@
           <p:cNvPr id="9" name="">
             <a:extLst xmlns:a="http://schemas.openxmlformats.org/drawingml/2006/main">
               <a:ext uri="{FF2B5EF4-FFF2-40B4-BE49-F238E27FC236}">
-                <a16:creationId xmlns:a16="http://schemas.microsoft.com/office/drawing/2014/main" id="{E19C9AF4-758E-4D97-97BF-CF3F82DD0A11}"/>
+                <a16:creationId xmlns:a16="http://schemas.microsoft.com/office/drawing/2014/main" id="{036AA0E6-CA3E-49C5-9813-B8835794982B}"/>
               </a:ext>
             </a:extLst>
           </p:cNvPr>
@@ -6880,7 +8149,7 @@
           <p:cNvPr id="10" name="">
             <a:extLst xmlns:a="http://schemas.openxmlformats.org/drawingml/2006/main">
               <a:ext uri="{FF2B5EF4-FFF2-40B4-BE49-F238E27FC236}">
-                <a16:creationId xmlns:a16="http://schemas.microsoft.com/office/drawing/2014/main" id="{28BBF5B6-2362-41A5-97B4-03A237440313}"/>
+                <a16:creationId xmlns:a16="http://schemas.microsoft.com/office/drawing/2014/main" id="{5C140769-CB3E-4FD5-B6A6-C9AE493A8B5E}"/>
               </a:ext>
             </a:extLst>
           </p:cNvPr>
@@ -6931,7 +8200,7 @@
           <p:cNvPr id="11" name="">
             <a:extLst xmlns:a="http://schemas.openxmlformats.org/drawingml/2006/main">
               <a:ext uri="{FF2B5EF4-FFF2-40B4-BE49-F238E27FC236}">
-                <a16:creationId xmlns:a16="http://schemas.microsoft.com/office/drawing/2014/main" id="{D21BE95D-D58A-49AC-8527-C256F39166BA}"/>
+                <a16:creationId xmlns:a16="http://schemas.microsoft.com/office/drawing/2014/main" id="{64BB9251-00D2-45D0-B5AC-4EA1C396E051}"/>
               </a:ext>
             </a:extLst>
           </p:cNvPr>
@@ -6982,7 +8251,7 @@
           <p:cNvPr id="12" name="">
             <a:extLst xmlns:a="http://schemas.openxmlformats.org/drawingml/2006/main">
               <a:ext uri="{FF2B5EF4-FFF2-40B4-BE49-F238E27FC236}">
-                <a16:creationId xmlns:a16="http://schemas.microsoft.com/office/drawing/2014/main" id="{00FE90C4-3BC3-4712-A11A-579536783E0C}"/>
+                <a16:creationId xmlns:a16="http://schemas.microsoft.com/office/drawing/2014/main" id="{C1E23BFF-6B03-47C7-9018-F7CDAB50162B}"/>
               </a:ext>
             </a:extLst>
           </p:cNvPr>
@@ -7015,7 +8284,7 @@
           <p:cNvPr id="13" name="">
             <a:extLst xmlns:a="http://schemas.openxmlformats.org/drawingml/2006/main">
               <a:ext uri="{FF2B5EF4-FFF2-40B4-BE49-F238E27FC236}">
-                <a16:creationId xmlns:a16="http://schemas.microsoft.com/office/drawing/2014/main" id="{F48DC384-BBF2-448C-8453-C3347F05EC91}"/>
+                <a16:creationId xmlns:a16="http://schemas.microsoft.com/office/drawing/2014/main" id="{1ED03AF1-9D7B-4B2C-8EA8-B14EA2B76132}"/>
               </a:ext>
             </a:extLst>
           </p:cNvPr>
@@ -7048,7 +8317,7 @@
           <p:cNvPr id="14" name="">
             <a:extLst xmlns:a="http://schemas.openxmlformats.org/drawingml/2006/main">
               <a:ext uri="{FF2B5EF4-FFF2-40B4-BE49-F238E27FC236}">
-                <a16:creationId xmlns:a16="http://schemas.microsoft.com/office/drawing/2014/main" id="{92F36BDF-B311-408E-8F3E-F43762C4532E}"/>
+                <a16:creationId xmlns:a16="http://schemas.microsoft.com/office/drawing/2014/main" id="{125945A9-E59B-4523-8E13-6408439B82D2}"/>
               </a:ext>
             </a:extLst>
           </p:cNvPr>
@@ -7099,7 +8368,7 @@
           <p:cNvPr id="15" name="">
             <a:extLst xmlns:a="http://schemas.openxmlformats.org/drawingml/2006/main">
               <a:ext uri="{FF2B5EF4-FFF2-40B4-BE49-F238E27FC236}">
-                <a16:creationId xmlns:a16="http://schemas.microsoft.com/office/drawing/2014/main" id="{4CA3E976-5FA0-471C-BBAF-C713193F0431}"/>
+                <a16:creationId xmlns:a16="http://schemas.microsoft.com/office/drawing/2014/main" id="{B3C1ED65-D1BB-455E-984F-C6F14838E7EE}"/>
               </a:ext>
             </a:extLst>
           </p:cNvPr>
@@ -7150,7 +8419,7 @@
           <p:cNvPr id="16" name="">
             <a:extLst xmlns:a="http://schemas.openxmlformats.org/drawingml/2006/main">
               <a:ext uri="{FF2B5EF4-FFF2-40B4-BE49-F238E27FC236}">
-                <a16:creationId xmlns:a16="http://schemas.microsoft.com/office/drawing/2014/main" id="{8B7587FC-CC78-4E92-AFCD-C402424DE231}"/>
+                <a16:creationId xmlns:a16="http://schemas.microsoft.com/office/drawing/2014/main" id="{3776FE09-5B35-4B4A-BF19-6C1654B3DC00}"/>
               </a:ext>
             </a:extLst>
           </p:cNvPr>
@@ -7183,7 +8452,7 @@
           <p:cNvPr id="17" name="">
             <a:extLst xmlns:a="http://schemas.openxmlformats.org/drawingml/2006/main">
               <a:ext uri="{FF2B5EF4-FFF2-40B4-BE49-F238E27FC236}">
-                <a16:creationId xmlns:a16="http://schemas.microsoft.com/office/drawing/2014/main" id="{215872EE-84A1-4C6B-AF77-A635E1EB8E9F}"/>
+                <a16:creationId xmlns:a16="http://schemas.microsoft.com/office/drawing/2014/main" id="{C52399F8-7B0D-4121-A5B8-F69B6914CB89}"/>
               </a:ext>
             </a:extLst>
           </p:cNvPr>
@@ -7216,7 +8485,7 @@
           <p:cNvPr id="18" name="">
             <a:extLst xmlns:a="http://schemas.openxmlformats.org/drawingml/2006/main">
               <a:ext uri="{FF2B5EF4-FFF2-40B4-BE49-F238E27FC236}">
-                <a16:creationId xmlns:a16="http://schemas.microsoft.com/office/drawing/2014/main" id="{A2DCB86D-C48E-447C-978E-0B1F38380CB0}"/>
+                <a16:creationId xmlns:a16="http://schemas.microsoft.com/office/drawing/2014/main" id="{024EFC3E-F498-49C6-9BD5-58A2FCE22372}"/>
               </a:ext>
             </a:extLst>
           </p:cNvPr>
@@ -7267,7 +8536,7 @@
           <p:cNvPr id="19" name="">
             <a:extLst xmlns:a="http://schemas.openxmlformats.org/drawingml/2006/main">
               <a:ext uri="{FF2B5EF4-FFF2-40B4-BE49-F238E27FC236}">
-                <a16:creationId xmlns:a16="http://schemas.microsoft.com/office/drawing/2014/main" id="{EA0A3D26-CBB0-44E9-B962-5514F0E69A65}"/>
+                <a16:creationId xmlns:a16="http://schemas.microsoft.com/office/drawing/2014/main" id="{B08AC107-3146-4B99-A582-2CD030B5DA5B}"/>
               </a:ext>
             </a:extLst>
           </p:cNvPr>
@@ -7318,7 +8587,7 @@
           <p:cNvPr id="20" name="">
             <a:extLst xmlns:a="http://schemas.openxmlformats.org/drawingml/2006/main">
               <a:ext uri="{FF2B5EF4-FFF2-40B4-BE49-F238E27FC236}">
-                <a16:creationId xmlns:a16="http://schemas.microsoft.com/office/drawing/2014/main" id="{60828EF8-698A-4E0B-8312-FCCC5D62AE3A}"/>
+                <a16:creationId xmlns:a16="http://schemas.microsoft.com/office/drawing/2014/main" id="{12AFEA6E-6CA4-4243-BF1A-EB213E9062B2}"/>
               </a:ext>
             </a:extLst>
           </p:cNvPr>
@@ -7351,7 +8620,7 @@
           <p:cNvPr id="21" name="">
             <a:extLst xmlns:a="http://schemas.openxmlformats.org/drawingml/2006/main">
               <a:ext uri="{FF2B5EF4-FFF2-40B4-BE49-F238E27FC236}">
-                <a16:creationId xmlns:a16="http://schemas.microsoft.com/office/drawing/2014/main" id="{6B0CB44C-F091-4334-99E8-D481EECA4847}"/>
+                <a16:creationId xmlns:a16="http://schemas.microsoft.com/office/drawing/2014/main" id="{3C4FC478-B722-48E8-8B66-4E209F511261}"/>
               </a:ext>
             </a:extLst>
           </p:cNvPr>
@@ -7384,7 +8653,7 @@
           <p:cNvPr id="22" name="">
             <a:extLst xmlns:a="http://schemas.openxmlformats.org/drawingml/2006/main">
               <a:ext uri="{FF2B5EF4-FFF2-40B4-BE49-F238E27FC236}">
-                <a16:creationId xmlns:a16="http://schemas.microsoft.com/office/drawing/2014/main" id="{DC98A007-9365-4DE6-9839-0977F7959719}"/>
+                <a16:creationId xmlns:a16="http://schemas.microsoft.com/office/drawing/2014/main" id="{460DA44A-F0B6-42D8-A0C9-28088C5C1E2D}"/>
               </a:ext>
             </a:extLst>
           </p:cNvPr>
@@ -7435,7 +8704,7 @@
           <p:cNvPr id="23" name="">
             <a:extLst xmlns:a="http://schemas.openxmlformats.org/drawingml/2006/main">
               <a:ext uri="{FF2B5EF4-FFF2-40B4-BE49-F238E27FC236}">
-                <a16:creationId xmlns:a16="http://schemas.microsoft.com/office/drawing/2014/main" id="{3D6220BF-AB0A-4EF7-A848-BB13CD12CC51}"/>
+                <a16:creationId xmlns:a16="http://schemas.microsoft.com/office/drawing/2014/main" id="{9B345C2A-2971-40AB-AF38-8127F5C5EA43}"/>
               </a:ext>
             </a:extLst>
           </p:cNvPr>
@@ -7486,7 +8755,7 @@
           <p:cNvPr id="24" name="">
             <a:extLst xmlns:a="http://schemas.openxmlformats.org/drawingml/2006/main">
               <a:ext uri="{FF2B5EF4-FFF2-40B4-BE49-F238E27FC236}">
-                <a16:creationId xmlns:a16="http://schemas.microsoft.com/office/drawing/2014/main" id="{6E40B84B-4B70-48F2-A69D-C763EB950632}"/>
+                <a16:creationId xmlns:a16="http://schemas.microsoft.com/office/drawing/2014/main" id="{AEB25C1B-8503-4A08-9AE9-856B3EC74667}"/>
               </a:ext>
             </a:extLst>
           </p:cNvPr>
@@ -7519,7 +8788,7 @@
           <p:cNvPr id="25" name="">
             <a:extLst xmlns:a="http://schemas.openxmlformats.org/drawingml/2006/main">
               <a:ext uri="{FF2B5EF4-FFF2-40B4-BE49-F238E27FC236}">
-                <a16:creationId xmlns:a16="http://schemas.microsoft.com/office/drawing/2014/main" id="{BACA8C11-2BA0-4B6F-93D3-F68F971C16FD}"/>
+                <a16:creationId xmlns:a16="http://schemas.microsoft.com/office/drawing/2014/main" id="{6358FD8C-055A-4BAD-B5A6-842CA633701B}"/>
               </a:ext>
             </a:extLst>
           </p:cNvPr>
@@ -7552,7 +8821,7 @@
           <p:cNvPr id="26" name="">
             <a:extLst xmlns:a="http://schemas.openxmlformats.org/drawingml/2006/main">
               <a:ext uri="{FF2B5EF4-FFF2-40B4-BE49-F238E27FC236}">
-                <a16:creationId xmlns:a16="http://schemas.microsoft.com/office/drawing/2014/main" id="{D00217CB-9790-4C22-B3F5-5B6C29772561}"/>
+                <a16:creationId xmlns:a16="http://schemas.microsoft.com/office/drawing/2014/main" id="{E980C319-8635-46C5-A426-60DDE4EE9E3C}"/>
               </a:ext>
             </a:extLst>
           </p:cNvPr>
@@ -7603,7 +8872,7 @@
           <p:cNvPr id="27" name="">
             <a:extLst xmlns:a="http://schemas.openxmlformats.org/drawingml/2006/main">
               <a:ext uri="{FF2B5EF4-FFF2-40B4-BE49-F238E27FC236}">
-                <a16:creationId xmlns:a16="http://schemas.microsoft.com/office/drawing/2014/main" id="{392383C8-B40D-45D1-83E8-736F506BB143}"/>
+                <a16:creationId xmlns:a16="http://schemas.microsoft.com/office/drawing/2014/main" id="{4533ECCF-0DCB-491B-820D-BD9BC5F78702}"/>
               </a:ext>
             </a:extLst>
           </p:cNvPr>
@@ -7654,7 +8923,7 @@
           <p:cNvPr id="28" name="">
             <a:extLst xmlns:a="http://schemas.openxmlformats.org/drawingml/2006/main">
               <a:ext uri="{FF2B5EF4-FFF2-40B4-BE49-F238E27FC236}">
-                <a16:creationId xmlns:a16="http://schemas.microsoft.com/office/drawing/2014/main" id="{0FFE49D6-AFC4-4C37-BFC9-17B3C7A59FDD}"/>
+                <a16:creationId xmlns:a16="http://schemas.microsoft.com/office/drawing/2014/main" id="{B8F3F145-494F-468B-B8E2-DFA401203E43}"/>
               </a:ext>
             </a:extLst>
           </p:cNvPr>
@@ -7705,7 +8974,7 @@
           <p:cNvPr id="29" name="">
             <a:extLst xmlns:a="http://schemas.openxmlformats.org/drawingml/2006/main">
               <a:ext uri="{FF2B5EF4-FFF2-40B4-BE49-F238E27FC236}">
-                <a16:creationId xmlns:a16="http://schemas.microsoft.com/office/drawing/2014/main" id="{863ABC36-A024-4296-8658-5602446F8E68}"/>
+                <a16:creationId xmlns:a16="http://schemas.microsoft.com/office/drawing/2014/main" id="{6B259483-FCDE-428A-9C0C-BC8FE09714BE}"/>
               </a:ext>
             </a:extLst>
           </p:cNvPr>
@@ -7754,7 +9023,7 @@
     </p:spTree>
     <p:extLst>
       <p:ext uri="{BB962C8B-B14F-4D97-AF65-F5344CB8AC3E}">
-        <p14:creationId xmlns:p14="http://schemas.microsoft.com/office/powerpoint/2010/main" val="10469988"/>
+        <p14:creationId xmlns:p14="http://schemas.microsoft.com/office/powerpoint/2010/main" val="1542553388"/>
       </p:ext>
     </p:extLst>
   </p:cSld>
@@ -7778,7 +9047,7 @@
           <p:cNvPr id="1" name="">
             <a:extLst xmlns:a="http://schemas.openxmlformats.org/drawingml/2006/main">
               <a:ext uri="{FF2B5EF4-FFF2-40B4-BE49-F238E27FC236}">
-                <a16:creationId xmlns:a16="http://schemas.microsoft.com/office/drawing/2014/main" id="{3BB94C60-2846-4F58-B96C-C374CC1C6F94}"/>
+                <a16:creationId xmlns:a16="http://schemas.microsoft.com/office/drawing/2014/main" id="{539FE15F-1E35-43F8-A43D-7CEA40CEE423}"/>
               </a:ext>
             </a:extLst>
           </p:cNvPr>
@@ -7811,7 +9080,62 @@
           <p:cNvPr id="2" name="">
             <a:extLst xmlns:a="http://schemas.openxmlformats.org/drawingml/2006/main">
               <a:ext uri="{FF2B5EF4-FFF2-40B4-BE49-F238E27FC236}">
-                <a16:creationId xmlns:a16="http://schemas.microsoft.com/office/drawing/2014/main" id="{1ACA2518-5FED-4D0B-93E0-4EA493E0D1FA}"/>
+                <a16:creationId xmlns:a16="http://schemas.microsoft.com/office/drawing/2014/main" id="{F61958BC-8D5A-4F60-A839-27E6E86AB7EE}"/>
+              </a:ext>
+            </a:extLst>
+          </p:cNvPr>
+          <p:cNvSpPr>
+            <a:spLocks xmlns:a="http://schemas.openxmlformats.org/drawingml/2006/main" noGrp="1"/>
+          </p:cNvSpPr>
+          <p:nvPr/>
+        </p:nvSpPr>
+        <p:spPr>
+          <a:xfrm xmlns:a="http://schemas.openxmlformats.org/drawingml/2006/main">
+            <a:off x="666750" y="1924050"/>
+            <a:ext cx="6896100" cy="4381500"/>
+          </a:xfrm>
+          <a:prstGeom xmlns:a="http://schemas.openxmlformats.org/drawingml/2006/main" prst="rect">
+            <a:avLst/>
+          </a:prstGeom>
+          <a:solidFill xmlns:a="http://schemas.openxmlformats.org/drawingml/2006/main">
+            <a:srgbClr val="D8E2ED"/>
+          </a:solidFill>
+          <a:ln xmlns:a="http://schemas.openxmlformats.org/drawingml/2006/main" w="0">
+            <a:solidFill>
+              <a:srgbClr val="D8E2ED"/>
+            </a:solidFill>
+            <a:prstDash val="solid"/>
+          </a:ln>
+        </p:spPr>
+      </p:sp>
+      <p:pic>
+        <p:nvPicPr>
+          <p:cNvPr id="3" name=""/>
+          <p:cNvPicPr>
+            <a:picLocks xmlns:a="http://schemas.openxmlformats.org/drawingml/2006/main" noChangeAspect="1"/>
+          </p:cNvPicPr>
+          <p:nvPr/>
+        </p:nvPicPr>
+        <p:blipFill>
+          <a:blip xmlns:r="http://schemas.openxmlformats.org/officeDocument/2006/relationships" xmlns:a="http://schemas.openxmlformats.org/drawingml/2006/main" r:embed="Re1f126493bdb4c12"/>
+          <a:stretch xmlns:a="http://schemas.openxmlformats.org/drawingml/2006/main"/>
+        </p:blipFill>
+        <p:spPr>
+          <a:xfrm xmlns:a="http://schemas.openxmlformats.org/drawingml/2006/main">
+            <a:off x="685800" y="1943100"/>
+            <a:ext cx="6858000" cy="4343400"/>
+          </a:xfrm>
+          <a:prstGeom xmlns:a="http://schemas.openxmlformats.org/drawingml/2006/main" prst="rect">
+            <a:avLst/>
+          </a:prstGeom>
+        </p:spPr>
+      </p:pic>
+      <p:sp>
+        <p:nvSpPr>
+          <p:cNvPr id="4" name="">
+            <a:extLst xmlns:a="http://schemas.openxmlformats.org/drawingml/2006/main">
+              <a:ext uri="{FF2B5EF4-FFF2-40B4-BE49-F238E27FC236}">
+                <a16:creationId xmlns:a16="http://schemas.microsoft.com/office/drawing/2014/main" id="{7B4B6046-5B41-4BDB-B682-613298D7C107}"/>
               </a:ext>
             </a:extLst>
           </p:cNvPr>
@@ -7852,17 +9176,17 @@
                   <a:srgbClr val="5F6F86"/>
                 </a:solidFill>
               </a:rPr>
-              <a:t>COMMERCIAL PATH</a:t>
-            </a:r>
-          </a:p>
-        </p:txBody>
-      </p:sp>
-      <p:sp>
-        <p:nvSpPr>
-          <p:cNvPr id="3" name="">
-            <a:extLst xmlns:a="http://schemas.openxmlformats.org/drawingml/2006/main">
-              <a:ext uri="{FF2B5EF4-FFF2-40B4-BE49-F238E27FC236}">
-                <a16:creationId xmlns:a16="http://schemas.microsoft.com/office/drawing/2014/main" id="{990C2D44-ACB2-4816-8D82-5D5085488944}"/>
+              <a:t>PRODUCT WALKTHROUGH</a:t>
+            </a:r>
+          </a:p>
+        </p:txBody>
+      </p:sp>
+      <p:sp>
+        <p:nvSpPr>
+          <p:cNvPr id="5" name="">
+            <a:extLst xmlns:a="http://schemas.openxmlformats.org/drawingml/2006/main">
+              <a:ext uri="{FF2B5EF4-FFF2-40B4-BE49-F238E27FC236}">
+                <a16:creationId xmlns:a16="http://schemas.microsoft.com/office/drawing/2014/main" id="{B773E7D5-650C-4392-98CA-150BAA066751}"/>
               </a:ext>
             </a:extLst>
           </p:cNvPr>
@@ -7903,62 +9227,29 @@
                   <a:srgbClr val="172033"/>
                 </a:solidFill>
               </a:rPr>
-              <a:t>One clean foundation build, then an optional close-support lane.</a:t>
-            </a:r>
-          </a:p>
-        </p:txBody>
-      </p:sp>
-      <p:sp>
-        <p:nvSpPr>
-          <p:cNvPr id="4" name="">
-            <a:extLst xmlns:a="http://schemas.openxmlformats.org/drawingml/2006/main">
-              <a:ext uri="{FF2B5EF4-FFF2-40B4-BE49-F238E27FC236}">
-                <a16:creationId xmlns:a16="http://schemas.microsoft.com/office/drawing/2014/main" id="{EC8FCFDF-3AC9-439D-BEC6-D5407A9F314F}"/>
-              </a:ext>
-            </a:extLst>
-          </p:cNvPr>
-          <p:cNvSpPr>
-            <a:spLocks xmlns:a="http://schemas.openxmlformats.org/drawingml/2006/main" noGrp="1"/>
-          </p:cNvSpPr>
-          <p:nvPr/>
-        </p:nvSpPr>
-        <p:spPr>
-          <a:xfrm xmlns:a="http://schemas.openxmlformats.org/drawingml/2006/main">
-            <a:off x="685800" y="2343150"/>
-            <a:ext cx="4876800" cy="2705100"/>
-          </a:xfrm>
-          <a:prstGeom xmlns:a="http://schemas.openxmlformats.org/drawingml/2006/main" prst="rect">
-            <a:avLst/>
-          </a:prstGeom>
-          <a:solidFill xmlns:a="http://schemas.openxmlformats.org/drawingml/2006/main">
-            <a:srgbClr val="0B1F33"/>
-          </a:solidFill>
-          <a:ln xmlns:a="http://schemas.openxmlformats.org/drawingml/2006/main" w="0">
-            <a:solidFill>
-              <a:srgbClr val="0B1F33"/>
-            </a:solidFill>
-            <a:prstDash val="solid"/>
-          </a:ln>
-        </p:spPr>
-      </p:sp>
-      <p:sp>
-        <p:nvSpPr>
-          <p:cNvPr id="5" name="">
-            <a:extLst xmlns:a="http://schemas.openxmlformats.org/drawingml/2006/main">
-              <a:ext uri="{FF2B5EF4-FFF2-40B4-BE49-F238E27FC236}">
-                <a16:creationId xmlns:a16="http://schemas.microsoft.com/office/drawing/2014/main" id="{2FFE063A-A4C6-4178-BD7C-5043B281F08C}"/>
-              </a:ext>
-            </a:extLst>
-          </p:cNvPr>
-          <p:cNvSpPr>
-            <a:spLocks xmlns:a="http://schemas.openxmlformats.org/drawingml/2006/main" noGrp="1"/>
-          </p:cNvSpPr>
-          <p:nvPr/>
-        </p:nvSpPr>
-        <p:spPr>
-          <a:xfrm xmlns:a="http://schemas.openxmlformats.org/drawingml/2006/main">
-            <a:off x="1047750" y="2724150"/>
-            <a:ext cx="4095750" cy="533400"/>
+              <a:t>Already built — this is the live product, not a mockup.</a:t>
+            </a:r>
+          </a:p>
+        </p:txBody>
+      </p:sp>
+      <p:sp>
+        <p:nvSpPr>
+          <p:cNvPr id="6" name="">
+            <a:extLst xmlns:a="http://schemas.openxmlformats.org/drawingml/2006/main">
+              <a:ext uri="{FF2B5EF4-FFF2-40B4-BE49-F238E27FC236}">
+                <a16:creationId xmlns:a16="http://schemas.microsoft.com/office/drawing/2014/main" id="{3F3516E7-1133-4325-93AD-B3C02AAA3816}"/>
+              </a:ext>
+            </a:extLst>
+          </p:cNvPr>
+          <p:cNvSpPr>
+            <a:spLocks xmlns:a="http://schemas.openxmlformats.org/drawingml/2006/main" noGrp="1"/>
+          </p:cNvSpPr>
+          <p:nvPr/>
+        </p:nvSpPr>
+        <p:spPr>
+          <a:xfrm xmlns:a="http://schemas.openxmlformats.org/drawingml/2006/main">
+            <a:off x="685800" y="1628775"/>
+            <a:ext cx="8953500" cy="495300"/>
           </a:xfrm>
           <a:prstGeom xmlns:a="http://schemas.openxmlformats.org/drawingml/2006/main" prst="rect">
             <a:avLst/>
@@ -7975,70 +9266,19 @@
           <a:lstStyle xmlns:a="http://schemas.openxmlformats.org/drawingml/2006/main"/>
           <a:p xmlns:a="http://schemas.openxmlformats.org/drawingml/2006/main">
             <a:pPr algn="l">
-              <a:defRPr sz="1800" b="1">
-                <a:solidFill>
-                  <a:srgbClr val="FFFFFF"/>
-                </a:solidFill>
-              </a:defRPr>
-            </a:pPr>
-            <a:r>
-              <a:rPr sz="1800" b="1">
-                <a:solidFill>
-                  <a:srgbClr val="FFFFFF"/>
-                </a:solidFill>
-              </a:rPr>
-              <a:t>Blueprint Books Foundation</a:t>
-            </a:r>
-          </a:p>
-        </p:txBody>
-      </p:sp>
-      <p:sp>
-        <p:nvSpPr>
-          <p:cNvPr id="6" name="">
-            <a:extLst xmlns:a="http://schemas.openxmlformats.org/drawingml/2006/main">
-              <a:ext uri="{FF2B5EF4-FFF2-40B4-BE49-F238E27FC236}">
-                <a16:creationId xmlns:a16="http://schemas.microsoft.com/office/drawing/2014/main" id="{6830E489-E0A3-4CCF-AA1B-403A5920198B}"/>
-              </a:ext>
-            </a:extLst>
-          </p:cNvPr>
-          <p:cNvSpPr>
-            <a:spLocks xmlns:a="http://schemas.openxmlformats.org/drawingml/2006/main" noGrp="1"/>
-          </p:cNvSpPr>
-          <p:nvPr/>
-        </p:nvSpPr>
-        <p:spPr>
-          <a:xfrm xmlns:a="http://schemas.openxmlformats.org/drawingml/2006/main">
-            <a:off x="1047750" y="3390900"/>
-            <a:ext cx="4000500" cy="514350"/>
-          </a:xfrm>
-          <a:prstGeom xmlns:a="http://schemas.openxmlformats.org/drawingml/2006/main" prst="rect">
-            <a:avLst/>
-          </a:prstGeom>
-          <a:ln xmlns:a="http://schemas.openxmlformats.org/drawingml/2006/main" w="0">
-            <a:solidFill>
-              <a:srgbClr val="FFFFFF"/>
-            </a:solidFill>
-            <a:prstDash val="solid"/>
-          </a:ln>
-        </p:spPr>
-        <p:txBody>
-          <a:bodyPr xmlns:a="http://schemas.openxmlformats.org/drawingml/2006/main" anchor="t"/>
-          <a:lstStyle xmlns:a="http://schemas.openxmlformats.org/drawingml/2006/main"/>
-          <a:p xmlns:a="http://schemas.openxmlformats.org/drawingml/2006/main">
-            <a:pPr algn="l">
-              <a:defRPr sz="2850" b="1">
-                <a:solidFill>
-                  <a:srgbClr val="9FE0C8"/>
-                </a:solidFill>
-              </a:defRPr>
-            </a:pPr>
-            <a:r>
-              <a:rPr sz="2850" b="1">
-                <a:solidFill>
-                  <a:srgbClr val="9FE0C8"/>
-                </a:solidFill>
-              </a:rPr>
-              <a:t>$18,500 fixed fee</a:t>
+              <a:defRPr sz="1425" b="0">
+                <a:solidFill>
+                  <a:srgbClr val="5F6F86"/>
+                </a:solidFill>
+              </a:defRPr>
+            </a:pPr>
+            <a:r>
+              <a:rPr sz="1425" b="0">
+                <a:solidFill>
+                  <a:srgbClr val="5F6F86"/>
+                </a:solidFill>
+              </a:rPr>
+              <a:t>Screenshots from the deployed module with demo books loaded; every figure ties out.</a:t>
             </a:r>
           </a:p>
         </p:txBody>
@@ -8048,87 +9288,19 @@
           <p:cNvPr id="7" name="">
             <a:extLst xmlns:a="http://schemas.openxmlformats.org/drawingml/2006/main">
               <a:ext uri="{FF2B5EF4-FFF2-40B4-BE49-F238E27FC236}">
-                <a16:creationId xmlns:a16="http://schemas.microsoft.com/office/drawing/2014/main" id="{970F2EC3-6A11-4A5F-8AA8-3B35519F63F9}"/>
-              </a:ext>
-            </a:extLst>
-          </p:cNvPr>
-          <p:cNvSpPr>
-            <a:spLocks xmlns:a="http://schemas.openxmlformats.org/drawingml/2006/main" noGrp="1"/>
-          </p:cNvSpPr>
-          <p:nvPr/>
-        </p:nvSpPr>
-        <p:spPr>
-          <a:xfrm xmlns:a="http://schemas.openxmlformats.org/drawingml/2006/main">
-            <a:off x="1066800" y="4038600"/>
-            <a:ext cx="3905250" cy="628650"/>
-          </a:xfrm>
-          <a:prstGeom xmlns:a="http://schemas.openxmlformats.org/drawingml/2006/main" prst="rect">
-            <a:avLst/>
-          </a:prstGeom>
-          <a:ln xmlns:a="http://schemas.openxmlformats.org/drawingml/2006/main" w="0">
-            <a:solidFill>
-              <a:srgbClr val="FFFFFF"/>
-            </a:solidFill>
-            <a:prstDash val="solid"/>
-          </a:ln>
-        </p:spPr>
-        <p:txBody>
-          <a:bodyPr xmlns:a="http://schemas.openxmlformats.org/drawingml/2006/main" anchor="t"/>
-          <a:lstStyle xmlns:a="http://schemas.openxmlformats.org/drawingml/2006/main"/>
-          <a:p xmlns:a="http://schemas.openxmlformats.org/drawingml/2006/main">
-            <a:pPr algn="l">
-              <a:defRPr sz="1350" b="0">
-                <a:solidFill>
-                  <a:srgbClr val="D9EAF8"/>
-                </a:solidFill>
-              </a:defRPr>
-            </a:pPr>
-            <a:r>
-              <a:rPr sz="1350" b="0">
-                <a:solidFill>
-                  <a:srgbClr val="D9EAF8"/>
-                </a:solidFill>
-              </a:rPr>
-              <a:t>50% start / 50% closeout</a:t>
-            </a:r>
-          </a:p>
-          <a:p xmlns:a="http://schemas.openxmlformats.org/drawingml/2006/main">
-            <a:pPr algn="l">
-              <a:defRPr sz="1350" b="0">
-                <a:solidFill>
-                  <a:srgbClr val="D9EAF8"/>
-                </a:solidFill>
-              </a:defRPr>
-            </a:pPr>
-            <a:r>
-              <a:rPr sz="1350" b="0">
-                <a:solidFill>
-                  <a:srgbClr val="D9EAF8"/>
-                </a:solidFill>
-              </a:rPr>
-              <a:t>4-5 weeks from opening-balance readiness</a:t>
-            </a:r>
-          </a:p>
-        </p:txBody>
-      </p:sp>
-      <p:sp>
-        <p:nvSpPr>
-          <p:cNvPr id="8" name="">
-            <a:extLst xmlns:a="http://schemas.openxmlformats.org/drawingml/2006/main">
-              <a:ext uri="{FF2B5EF4-FFF2-40B4-BE49-F238E27FC236}">
-                <a16:creationId xmlns:a16="http://schemas.microsoft.com/office/drawing/2014/main" id="{EA2178DD-B684-4E35-8704-C2C38FE02D9A}"/>
-              </a:ext>
-            </a:extLst>
-          </p:cNvPr>
-          <p:cNvSpPr>
-            <a:spLocks xmlns:a="http://schemas.openxmlformats.org/drawingml/2006/main" noGrp="1"/>
-          </p:cNvSpPr>
-          <p:nvPr/>
-        </p:nvSpPr>
-        <p:spPr>
-          <a:xfrm xmlns:a="http://schemas.openxmlformats.org/drawingml/2006/main">
-            <a:off x="6153150" y="2343150"/>
-            <a:ext cx="2381250" cy="1638300"/>
+                <a16:creationId xmlns:a16="http://schemas.microsoft.com/office/drawing/2014/main" id="{EEFE2C49-0202-4A8B-88D5-05929B6E7877}"/>
+              </a:ext>
+            </a:extLst>
+          </p:cNvPr>
+          <p:cNvSpPr>
+            <a:spLocks xmlns:a="http://schemas.openxmlformats.org/drawingml/2006/main" noGrp="1"/>
+          </p:cNvSpPr>
+          <p:nvPr/>
+        </p:nvSpPr>
+        <p:spPr>
+          <a:xfrm xmlns:a="http://schemas.openxmlformats.org/drawingml/2006/main">
+            <a:off x="8191500" y="1943100"/>
+            <a:ext cx="3314700" cy="1143000"/>
           </a:xfrm>
           <a:prstGeom xmlns:a="http://schemas.openxmlformats.org/drawingml/2006/main" prst="rect">
             <a:avLst/>
@@ -8146,22 +9318,358 @@
       </p:sp>
       <p:sp>
         <p:nvSpPr>
+          <p:cNvPr id="8" name="">
+            <a:extLst xmlns:a="http://schemas.openxmlformats.org/drawingml/2006/main">
+              <a:ext uri="{FF2B5EF4-FFF2-40B4-BE49-F238E27FC236}">
+                <a16:creationId xmlns:a16="http://schemas.microsoft.com/office/drawing/2014/main" id="{48736093-24C5-450C-8032-CA978CAABC31}"/>
+              </a:ext>
+            </a:extLst>
+          </p:cNvPr>
+          <p:cNvSpPr>
+            <a:spLocks xmlns:a="http://schemas.openxmlformats.org/drawingml/2006/main" noGrp="1"/>
+          </p:cNvSpPr>
+          <p:nvPr/>
+        </p:nvSpPr>
+        <p:spPr>
+          <a:xfrm xmlns:a="http://schemas.openxmlformats.org/drawingml/2006/main">
+            <a:off x="8191500" y="1943100"/>
+            <a:ext cx="57150" cy="1143000"/>
+          </a:xfrm>
+          <a:prstGeom xmlns:a="http://schemas.openxmlformats.org/drawingml/2006/main" prst="rect">
+            <a:avLst/>
+          </a:prstGeom>
+          <a:solidFill xmlns:a="http://schemas.openxmlformats.org/drawingml/2006/main">
+            <a:srgbClr val="1D7F5F"/>
+          </a:solidFill>
+          <a:ln xmlns:a="http://schemas.openxmlformats.org/drawingml/2006/main" w="0">
+            <a:solidFill>
+              <a:srgbClr val="1D7F5F"/>
+            </a:solidFill>
+            <a:prstDash val="solid"/>
+          </a:ln>
+        </p:spPr>
+      </p:sp>
+      <p:sp>
+        <p:nvSpPr>
           <p:cNvPr id="9" name="">
             <a:extLst xmlns:a="http://schemas.openxmlformats.org/drawingml/2006/main">
               <a:ext uri="{FF2B5EF4-FFF2-40B4-BE49-F238E27FC236}">
-                <a16:creationId xmlns:a16="http://schemas.microsoft.com/office/drawing/2014/main" id="{F25D80F3-3A2B-4739-8ED5-DB368DA365E8}"/>
-              </a:ext>
-            </a:extLst>
-          </p:cNvPr>
-          <p:cNvSpPr>
-            <a:spLocks xmlns:a="http://schemas.openxmlformats.org/drawingml/2006/main" noGrp="1"/>
-          </p:cNvSpPr>
-          <p:nvPr/>
-        </p:nvSpPr>
-        <p:spPr>
-          <a:xfrm xmlns:a="http://schemas.openxmlformats.org/drawingml/2006/main">
-            <a:off x="6153150" y="2343150"/>
-            <a:ext cx="57150" cy="1638300"/>
+                <a16:creationId xmlns:a16="http://schemas.microsoft.com/office/drawing/2014/main" id="{5EB1E862-094D-41E7-8EC4-9326F2527506}"/>
+              </a:ext>
+            </a:extLst>
+          </p:cNvPr>
+          <p:cNvSpPr>
+            <a:spLocks xmlns:a="http://schemas.openxmlformats.org/drawingml/2006/main" noGrp="1"/>
+          </p:cNvSpPr>
+          <p:nvPr/>
+        </p:nvSpPr>
+        <p:spPr>
+          <a:xfrm xmlns:a="http://schemas.openxmlformats.org/drawingml/2006/main">
+            <a:off x="8420100" y="2133600"/>
+            <a:ext cx="2933700" cy="285750"/>
+          </a:xfrm>
+          <a:prstGeom xmlns:a="http://schemas.openxmlformats.org/drawingml/2006/main" prst="rect">
+            <a:avLst/>
+          </a:prstGeom>
+          <a:ln xmlns:a="http://schemas.openxmlformats.org/drawingml/2006/main" w="0">
+            <a:solidFill>
+              <a:srgbClr val="FFFFFF"/>
+            </a:solidFill>
+            <a:prstDash val="solid"/>
+          </a:ln>
+        </p:spPr>
+        <p:txBody>
+          <a:bodyPr xmlns:a="http://schemas.openxmlformats.org/drawingml/2006/main" anchor="t"/>
+          <a:lstStyle xmlns:a="http://schemas.openxmlformats.org/drawingml/2006/main"/>
+          <a:p xmlns:a="http://schemas.openxmlformats.org/drawingml/2006/main">
+            <a:pPr algn="l">
+              <a:defRPr sz="1350" b="1">
+                <a:solidFill>
+                  <a:srgbClr val="172033"/>
+                </a:solidFill>
+              </a:defRPr>
+            </a:pPr>
+            <a:r>
+              <a:rPr sz="1350" b="1">
+                <a:solidFill>
+                  <a:srgbClr val="172033"/>
+                </a:solidFill>
+              </a:rPr>
+              <a:t>Money at a glance</a:t>
+            </a:r>
+          </a:p>
+        </p:txBody>
+      </p:sp>
+      <p:sp>
+        <p:nvSpPr>
+          <p:cNvPr id="10" name="">
+            <a:extLst xmlns:a="http://schemas.openxmlformats.org/drawingml/2006/main">
+              <a:ext uri="{FF2B5EF4-FFF2-40B4-BE49-F238E27FC236}">
+                <a16:creationId xmlns:a16="http://schemas.microsoft.com/office/drawing/2014/main" id="{EDF17C03-2771-4B5F-8884-97E65A0AB7F4}"/>
+              </a:ext>
+            </a:extLst>
+          </p:cNvPr>
+          <p:cNvSpPr>
+            <a:spLocks xmlns:a="http://schemas.openxmlformats.org/drawingml/2006/main" noGrp="1"/>
+          </p:cNvSpPr>
+          <p:nvPr/>
+        </p:nvSpPr>
+        <p:spPr>
+          <a:xfrm xmlns:a="http://schemas.openxmlformats.org/drawingml/2006/main">
+            <a:off x="8420100" y="2495550"/>
+            <a:ext cx="2914650" cy="457200"/>
+          </a:xfrm>
+          <a:prstGeom xmlns:a="http://schemas.openxmlformats.org/drawingml/2006/main" prst="rect">
+            <a:avLst/>
+          </a:prstGeom>
+          <a:ln xmlns:a="http://schemas.openxmlformats.org/drawingml/2006/main" w="0">
+            <a:solidFill>
+              <a:srgbClr val="FFFFFF"/>
+            </a:solidFill>
+            <a:prstDash val="solid"/>
+          </a:ln>
+        </p:spPr>
+        <p:txBody>
+          <a:bodyPr xmlns:a="http://schemas.openxmlformats.org/drawingml/2006/main" anchor="t"/>
+          <a:lstStyle xmlns:a="http://schemas.openxmlformats.org/drawingml/2006/main"/>
+          <a:p xmlns:a="http://schemas.openxmlformats.org/drawingml/2006/main">
+            <a:pPr algn="l">
+              <a:defRPr sz="1050" b="0">
+                <a:solidFill>
+                  <a:srgbClr val="5F6F86"/>
+                </a:solidFill>
+              </a:defRPr>
+            </a:pPr>
+            <a:r>
+              <a:rPr sz="1050" b="0">
+                <a:solidFill>
+                  <a:srgbClr val="5F6F86"/>
+                </a:solidFill>
+              </a:rPr>
+              <a:t>Cash, A/R, A/P, and profit — each with month-over-month direction.</a:t>
+            </a:r>
+          </a:p>
+        </p:txBody>
+      </p:sp>
+      <p:sp>
+        <p:nvSpPr>
+          <p:cNvPr id="11" name="">
+            <a:extLst xmlns:a="http://schemas.openxmlformats.org/drawingml/2006/main">
+              <a:ext uri="{FF2B5EF4-FFF2-40B4-BE49-F238E27FC236}">
+                <a16:creationId xmlns:a16="http://schemas.microsoft.com/office/drawing/2014/main" id="{B3AFFA96-319D-4149-9017-9198CFB1FA38}"/>
+              </a:ext>
+            </a:extLst>
+          </p:cNvPr>
+          <p:cNvSpPr>
+            <a:spLocks xmlns:a="http://schemas.openxmlformats.org/drawingml/2006/main" noGrp="1"/>
+          </p:cNvSpPr>
+          <p:nvPr/>
+        </p:nvSpPr>
+        <p:spPr>
+          <a:xfrm xmlns:a="http://schemas.openxmlformats.org/drawingml/2006/main">
+            <a:off x="8191500" y="3238500"/>
+            <a:ext cx="3314700" cy="1143000"/>
+          </a:xfrm>
+          <a:prstGeom xmlns:a="http://schemas.openxmlformats.org/drawingml/2006/main" prst="rect">
+            <a:avLst/>
+          </a:prstGeom>
+          <a:solidFill xmlns:a="http://schemas.openxmlformats.org/drawingml/2006/main">
+            <a:srgbClr val="FFFFFF"/>
+          </a:solidFill>
+          <a:ln xmlns:a="http://schemas.openxmlformats.org/drawingml/2006/main" w="0">
+            <a:solidFill>
+              <a:srgbClr val="D8E2ED"/>
+            </a:solidFill>
+            <a:prstDash val="solid"/>
+          </a:ln>
+        </p:spPr>
+      </p:sp>
+      <p:sp>
+        <p:nvSpPr>
+          <p:cNvPr id="12" name="">
+            <a:extLst xmlns:a="http://schemas.openxmlformats.org/drawingml/2006/main">
+              <a:ext uri="{FF2B5EF4-FFF2-40B4-BE49-F238E27FC236}">
+                <a16:creationId xmlns:a16="http://schemas.microsoft.com/office/drawing/2014/main" id="{002D5784-0AB1-4351-87B9-FDB792687E39}"/>
+              </a:ext>
+            </a:extLst>
+          </p:cNvPr>
+          <p:cNvSpPr>
+            <a:spLocks xmlns:a="http://schemas.openxmlformats.org/drawingml/2006/main" noGrp="1"/>
+          </p:cNvSpPr>
+          <p:nvPr/>
+        </p:nvSpPr>
+        <p:spPr>
+          <a:xfrm xmlns:a="http://schemas.openxmlformats.org/drawingml/2006/main">
+            <a:off x="8191500" y="3238500"/>
+            <a:ext cx="57150" cy="1143000"/>
+          </a:xfrm>
+          <a:prstGeom xmlns:a="http://schemas.openxmlformats.org/drawingml/2006/main" prst="rect">
+            <a:avLst/>
+          </a:prstGeom>
+          <a:solidFill xmlns:a="http://schemas.openxmlformats.org/drawingml/2006/main">
+            <a:srgbClr val="23A6D5"/>
+          </a:solidFill>
+          <a:ln xmlns:a="http://schemas.openxmlformats.org/drawingml/2006/main" w="0">
+            <a:solidFill>
+              <a:srgbClr val="23A6D5"/>
+            </a:solidFill>
+            <a:prstDash val="solid"/>
+          </a:ln>
+        </p:spPr>
+      </p:sp>
+      <p:sp>
+        <p:nvSpPr>
+          <p:cNvPr id="13" name="">
+            <a:extLst xmlns:a="http://schemas.openxmlformats.org/drawingml/2006/main">
+              <a:ext uri="{FF2B5EF4-FFF2-40B4-BE49-F238E27FC236}">
+                <a16:creationId xmlns:a16="http://schemas.microsoft.com/office/drawing/2014/main" id="{D0941BA1-FECE-4496-A3B2-4523C008D980}"/>
+              </a:ext>
+            </a:extLst>
+          </p:cNvPr>
+          <p:cNvSpPr>
+            <a:spLocks xmlns:a="http://schemas.openxmlformats.org/drawingml/2006/main" noGrp="1"/>
+          </p:cNvSpPr>
+          <p:nvPr/>
+        </p:nvSpPr>
+        <p:spPr>
+          <a:xfrm xmlns:a="http://schemas.openxmlformats.org/drawingml/2006/main">
+            <a:off x="8420100" y="3429000"/>
+            <a:ext cx="2933700" cy="285750"/>
+          </a:xfrm>
+          <a:prstGeom xmlns:a="http://schemas.openxmlformats.org/drawingml/2006/main" prst="rect">
+            <a:avLst/>
+          </a:prstGeom>
+          <a:ln xmlns:a="http://schemas.openxmlformats.org/drawingml/2006/main" w="0">
+            <a:solidFill>
+              <a:srgbClr val="FFFFFF"/>
+            </a:solidFill>
+            <a:prstDash val="solid"/>
+          </a:ln>
+        </p:spPr>
+        <p:txBody>
+          <a:bodyPr xmlns:a="http://schemas.openxmlformats.org/drawingml/2006/main" anchor="t"/>
+          <a:lstStyle xmlns:a="http://schemas.openxmlformats.org/drawingml/2006/main"/>
+          <a:p xmlns:a="http://schemas.openxmlformats.org/drawingml/2006/main">
+            <a:pPr algn="l">
+              <a:defRPr sz="1350" b="1">
+                <a:solidFill>
+                  <a:srgbClr val="172033"/>
+                </a:solidFill>
+              </a:defRPr>
+            </a:pPr>
+            <a:r>
+              <a:rPr sz="1350" b="1">
+                <a:solidFill>
+                  <a:srgbClr val="172033"/>
+                </a:solidFill>
+              </a:rPr>
+              <a:t>Trend, not guesswork</a:t>
+            </a:r>
+          </a:p>
+        </p:txBody>
+      </p:sp>
+      <p:sp>
+        <p:nvSpPr>
+          <p:cNvPr id="14" name="">
+            <a:extLst xmlns:a="http://schemas.openxmlformats.org/drawingml/2006/main">
+              <a:ext uri="{FF2B5EF4-FFF2-40B4-BE49-F238E27FC236}">
+                <a16:creationId xmlns:a16="http://schemas.microsoft.com/office/drawing/2014/main" id="{1CA8DBC8-8455-4ED3-9E02-5FB4078B7E78}"/>
+              </a:ext>
+            </a:extLst>
+          </p:cNvPr>
+          <p:cNvSpPr>
+            <a:spLocks xmlns:a="http://schemas.openxmlformats.org/drawingml/2006/main" noGrp="1"/>
+          </p:cNvSpPr>
+          <p:nvPr/>
+        </p:nvSpPr>
+        <p:spPr>
+          <a:xfrm xmlns:a="http://schemas.openxmlformats.org/drawingml/2006/main">
+            <a:off x="8420100" y="3790950"/>
+            <a:ext cx="2914650" cy="457200"/>
+          </a:xfrm>
+          <a:prstGeom xmlns:a="http://schemas.openxmlformats.org/drawingml/2006/main" prst="rect">
+            <a:avLst/>
+          </a:prstGeom>
+          <a:ln xmlns:a="http://schemas.openxmlformats.org/drawingml/2006/main" w="0">
+            <a:solidFill>
+              <a:srgbClr val="FFFFFF"/>
+            </a:solidFill>
+            <a:prstDash val="solid"/>
+          </a:ln>
+        </p:spPr>
+        <p:txBody>
+          <a:bodyPr xmlns:a="http://schemas.openxmlformats.org/drawingml/2006/main" anchor="t"/>
+          <a:lstStyle xmlns:a="http://schemas.openxmlformats.org/drawingml/2006/main"/>
+          <a:p xmlns:a="http://schemas.openxmlformats.org/drawingml/2006/main">
+            <a:pPr algn="l">
+              <a:defRPr sz="1050" b="0">
+                <a:solidFill>
+                  <a:srgbClr val="5F6F86"/>
+                </a:solidFill>
+              </a:defRPr>
+            </a:pPr>
+            <a:r>
+              <a:rPr sz="1050" b="0">
+                <a:solidFill>
+                  <a:srgbClr val="5F6F86"/>
+                </a:solidFill>
+              </a:rPr>
+              <a:t>Six months of revenue vs expenses, with net income per month.</a:t>
+            </a:r>
+          </a:p>
+        </p:txBody>
+      </p:sp>
+      <p:sp>
+        <p:nvSpPr>
+          <p:cNvPr id="15" name="">
+            <a:extLst xmlns:a="http://schemas.openxmlformats.org/drawingml/2006/main">
+              <a:ext uri="{FF2B5EF4-FFF2-40B4-BE49-F238E27FC236}">
+                <a16:creationId xmlns:a16="http://schemas.microsoft.com/office/drawing/2014/main" id="{F6AECF66-BD09-4042-9EAF-B887ABE07E01}"/>
+              </a:ext>
+            </a:extLst>
+          </p:cNvPr>
+          <p:cNvSpPr>
+            <a:spLocks xmlns:a="http://schemas.openxmlformats.org/drawingml/2006/main" noGrp="1"/>
+          </p:cNvSpPr>
+          <p:nvPr/>
+        </p:nvSpPr>
+        <p:spPr>
+          <a:xfrm xmlns:a="http://schemas.openxmlformats.org/drawingml/2006/main">
+            <a:off x="8191500" y="4533900"/>
+            <a:ext cx="3314700" cy="1143000"/>
+          </a:xfrm>
+          <a:prstGeom xmlns:a="http://schemas.openxmlformats.org/drawingml/2006/main" prst="rect">
+            <a:avLst/>
+          </a:prstGeom>
+          <a:solidFill xmlns:a="http://schemas.openxmlformats.org/drawingml/2006/main">
+            <a:srgbClr val="FFFFFF"/>
+          </a:solidFill>
+          <a:ln xmlns:a="http://schemas.openxmlformats.org/drawingml/2006/main" w="0">
+            <a:solidFill>
+              <a:srgbClr val="D8E2ED"/>
+            </a:solidFill>
+            <a:prstDash val="solid"/>
+          </a:ln>
+        </p:spPr>
+      </p:sp>
+      <p:sp>
+        <p:nvSpPr>
+          <p:cNvPr id="16" name="">
+            <a:extLst xmlns:a="http://schemas.openxmlformats.org/drawingml/2006/main">
+              <a:ext uri="{FF2B5EF4-FFF2-40B4-BE49-F238E27FC236}">
+                <a16:creationId xmlns:a16="http://schemas.microsoft.com/office/drawing/2014/main" id="{6C90044E-B82B-46D4-B29C-31E9D986FE1F}"/>
+              </a:ext>
+            </a:extLst>
+          </p:cNvPr>
+          <p:cNvSpPr>
+            <a:spLocks xmlns:a="http://schemas.openxmlformats.org/drawingml/2006/main" noGrp="1"/>
+          </p:cNvSpPr>
+          <p:nvPr/>
+        </p:nvSpPr>
+        <p:spPr>
+          <a:xfrm xmlns:a="http://schemas.openxmlformats.org/drawingml/2006/main">
+            <a:off x="8191500" y="4533900"/>
+            <a:ext cx="57150" cy="1143000"/>
           </a:xfrm>
           <a:prstGeom xmlns:a="http://schemas.openxmlformats.org/drawingml/2006/main" prst="rect">
             <a:avLst/>
@@ -8179,22 +9687,22 @@
       </p:sp>
       <p:sp>
         <p:nvSpPr>
-          <p:cNvPr id="10" name="">
-            <a:extLst xmlns:a="http://schemas.openxmlformats.org/drawingml/2006/main">
-              <a:ext uri="{FF2B5EF4-FFF2-40B4-BE49-F238E27FC236}">
-                <a16:creationId xmlns:a16="http://schemas.microsoft.com/office/drawing/2014/main" id="{F9A9E2AB-7FBF-4802-8A39-E87487BCD3CA}"/>
-              </a:ext>
-            </a:extLst>
-          </p:cNvPr>
-          <p:cNvSpPr>
-            <a:spLocks xmlns:a="http://schemas.openxmlformats.org/drawingml/2006/main" noGrp="1"/>
-          </p:cNvSpPr>
-          <p:nvPr/>
-        </p:nvSpPr>
-        <p:spPr>
-          <a:xfrm xmlns:a="http://schemas.openxmlformats.org/drawingml/2006/main">
-            <a:off x="6381750" y="2533650"/>
-            <a:ext cx="2000250" cy="285750"/>
+          <p:cNvPr id="17" name="">
+            <a:extLst xmlns:a="http://schemas.openxmlformats.org/drawingml/2006/main">
+              <a:ext uri="{FF2B5EF4-FFF2-40B4-BE49-F238E27FC236}">
+                <a16:creationId xmlns:a16="http://schemas.microsoft.com/office/drawing/2014/main" id="{FA3183F1-C7DD-4890-9B82-258D0A2E57CC}"/>
+              </a:ext>
+            </a:extLst>
+          </p:cNvPr>
+          <p:cNvSpPr>
+            <a:spLocks xmlns:a="http://schemas.openxmlformats.org/drawingml/2006/main" noGrp="1"/>
+          </p:cNvSpPr>
+          <p:nvPr/>
+        </p:nvSpPr>
+        <p:spPr>
+          <a:xfrm xmlns:a="http://schemas.openxmlformats.org/drawingml/2006/main">
+            <a:off x="8420100" y="4724400"/>
+            <a:ext cx="2933700" cy="285750"/>
           </a:xfrm>
           <a:prstGeom xmlns:a="http://schemas.openxmlformats.org/drawingml/2006/main" prst="rect">
             <a:avLst/>
@@ -8223,29 +9731,29 @@
                   <a:srgbClr val="172033"/>
                 </a:solidFill>
               </a:rPr>
-              <a:t>Books Complete</a:t>
-            </a:r>
-          </a:p>
-        </p:txBody>
-      </p:sp>
-      <p:sp>
-        <p:nvSpPr>
-          <p:cNvPr id="11" name="">
-            <a:extLst xmlns:a="http://schemas.openxmlformats.org/drawingml/2006/main">
-              <a:ext uri="{FF2B5EF4-FFF2-40B4-BE49-F238E27FC236}">
-                <a16:creationId xmlns:a16="http://schemas.microsoft.com/office/drawing/2014/main" id="{0BD8EED0-E9F5-4C4C-92A4-F1747825C194}"/>
-              </a:ext>
-            </a:extLst>
-          </p:cNvPr>
-          <p:cNvSpPr>
-            <a:spLocks xmlns:a="http://schemas.openxmlformats.org/drawingml/2006/main" noGrp="1"/>
-          </p:cNvSpPr>
-          <p:nvPr/>
-        </p:nvSpPr>
-        <p:spPr>
-          <a:xfrm xmlns:a="http://schemas.openxmlformats.org/drawingml/2006/main">
-            <a:off x="6381750" y="2895600"/>
-            <a:ext cx="1981200" cy="952500"/>
+              <a:t>Urgency built in</a:t>
+            </a:r>
+          </a:p>
+        </p:txBody>
+      </p:sp>
+      <p:sp>
+        <p:nvSpPr>
+          <p:cNvPr id="18" name="">
+            <a:extLst xmlns:a="http://schemas.openxmlformats.org/drawingml/2006/main">
+              <a:ext uri="{FF2B5EF4-FFF2-40B4-BE49-F238E27FC236}">
+                <a16:creationId xmlns:a16="http://schemas.microsoft.com/office/drawing/2014/main" id="{5E96C5FB-A5B6-431A-A9DE-1671E1EC5AC9}"/>
+              </a:ext>
+            </a:extLst>
+          </p:cNvPr>
+          <p:cNvSpPr>
+            <a:spLocks xmlns:a="http://schemas.openxmlformats.org/drawingml/2006/main" noGrp="1"/>
+          </p:cNvSpPr>
+          <p:nvPr/>
+        </p:nvSpPr>
+        <p:spPr>
+          <a:xfrm xmlns:a="http://schemas.openxmlformats.org/drawingml/2006/main">
+            <a:off x="8420100" y="5086350"/>
+            <a:ext cx="2914650" cy="457200"/>
           </a:xfrm>
           <a:prstGeom xmlns:a="http://schemas.openxmlformats.org/drawingml/2006/main" prst="rect">
             <a:avLst/>
@@ -8274,292 +9782,7 @@
                   <a:srgbClr val="5F6F86"/>
                 </a:solidFill>
               </a:rPr>
-              <a:t>$28,000 adds bank reconciliation, cash-flow statement, data migration from current books, and 30-day hypercare.</a:t>
-            </a:r>
-          </a:p>
-        </p:txBody>
-      </p:sp>
-      <p:sp>
-        <p:nvSpPr>
-          <p:cNvPr id="12" name="">
-            <a:extLst xmlns:a="http://schemas.openxmlformats.org/drawingml/2006/main">
-              <a:ext uri="{FF2B5EF4-FFF2-40B4-BE49-F238E27FC236}">
-                <a16:creationId xmlns:a16="http://schemas.microsoft.com/office/drawing/2014/main" id="{48D8C914-E283-49F1-9819-467F3F7C896E}"/>
-              </a:ext>
-            </a:extLst>
-          </p:cNvPr>
-          <p:cNvSpPr>
-            <a:spLocks xmlns:a="http://schemas.openxmlformats.org/drawingml/2006/main" noGrp="1"/>
-          </p:cNvSpPr>
-          <p:nvPr/>
-        </p:nvSpPr>
-        <p:spPr>
-          <a:xfrm xmlns:a="http://schemas.openxmlformats.org/drawingml/2006/main">
-            <a:off x="8858250" y="2343150"/>
-            <a:ext cx="2381250" cy="1638300"/>
-          </a:xfrm>
-          <a:prstGeom xmlns:a="http://schemas.openxmlformats.org/drawingml/2006/main" prst="rect">
-            <a:avLst/>
-          </a:prstGeom>
-          <a:solidFill xmlns:a="http://schemas.openxmlformats.org/drawingml/2006/main">
-            <a:srgbClr val="FFFFFF"/>
-          </a:solidFill>
-          <a:ln xmlns:a="http://schemas.openxmlformats.org/drawingml/2006/main" w="0">
-            <a:solidFill>
-              <a:srgbClr val="D8E2ED"/>
-            </a:solidFill>
-            <a:prstDash val="solid"/>
-          </a:ln>
-        </p:spPr>
-      </p:sp>
-      <p:sp>
-        <p:nvSpPr>
-          <p:cNvPr id="13" name="">
-            <a:extLst xmlns:a="http://schemas.openxmlformats.org/drawingml/2006/main">
-              <a:ext uri="{FF2B5EF4-FFF2-40B4-BE49-F238E27FC236}">
-                <a16:creationId xmlns:a16="http://schemas.microsoft.com/office/drawing/2014/main" id="{A1323D72-AC62-4460-B4F3-B7E015A3B2C2}"/>
-              </a:ext>
-            </a:extLst>
-          </p:cNvPr>
-          <p:cNvSpPr>
-            <a:spLocks xmlns:a="http://schemas.openxmlformats.org/drawingml/2006/main" noGrp="1"/>
-          </p:cNvSpPr>
-          <p:nvPr/>
-        </p:nvSpPr>
-        <p:spPr>
-          <a:xfrm xmlns:a="http://schemas.openxmlformats.org/drawingml/2006/main">
-            <a:off x="8858250" y="2343150"/>
-            <a:ext cx="57150" cy="1638300"/>
-          </a:xfrm>
-          <a:prstGeom xmlns:a="http://schemas.openxmlformats.org/drawingml/2006/main" prst="rect">
-            <a:avLst/>
-          </a:prstGeom>
-          <a:solidFill xmlns:a="http://schemas.openxmlformats.org/drawingml/2006/main">
-            <a:srgbClr val="1D7F5F"/>
-          </a:solidFill>
-          <a:ln xmlns:a="http://schemas.openxmlformats.org/drawingml/2006/main" w="0">
-            <a:solidFill>
-              <a:srgbClr val="1D7F5F"/>
-            </a:solidFill>
-            <a:prstDash val="solid"/>
-          </a:ln>
-        </p:spPr>
-      </p:sp>
-      <p:sp>
-        <p:nvSpPr>
-          <p:cNvPr id="14" name="">
-            <a:extLst xmlns:a="http://schemas.openxmlformats.org/drawingml/2006/main">
-              <a:ext uri="{FF2B5EF4-FFF2-40B4-BE49-F238E27FC236}">
-                <a16:creationId xmlns:a16="http://schemas.microsoft.com/office/drawing/2014/main" id="{DD93C933-AEE3-4BF3-AD1D-E6773DC34B61}"/>
-              </a:ext>
-            </a:extLst>
-          </p:cNvPr>
-          <p:cNvSpPr>
-            <a:spLocks xmlns:a="http://schemas.openxmlformats.org/drawingml/2006/main" noGrp="1"/>
-          </p:cNvSpPr>
-          <p:nvPr/>
-        </p:nvSpPr>
-        <p:spPr>
-          <a:xfrm xmlns:a="http://schemas.openxmlformats.org/drawingml/2006/main">
-            <a:off x="9086850" y="2533650"/>
-            <a:ext cx="2000250" cy="285750"/>
-          </a:xfrm>
-          <a:prstGeom xmlns:a="http://schemas.openxmlformats.org/drawingml/2006/main" prst="rect">
-            <a:avLst/>
-          </a:prstGeom>
-          <a:ln xmlns:a="http://schemas.openxmlformats.org/drawingml/2006/main" w="0">
-            <a:solidFill>
-              <a:srgbClr val="FFFFFF"/>
-            </a:solidFill>
-            <a:prstDash val="solid"/>
-          </a:ln>
-        </p:spPr>
-        <p:txBody>
-          <a:bodyPr xmlns:a="http://schemas.openxmlformats.org/drawingml/2006/main" anchor="t"/>
-          <a:lstStyle xmlns:a="http://schemas.openxmlformats.org/drawingml/2006/main"/>
-          <a:p xmlns:a="http://schemas.openxmlformats.org/drawingml/2006/main">
-            <a:pPr algn="l">
-              <a:defRPr sz="1350" b="1">
-                <a:solidFill>
-                  <a:srgbClr val="172033"/>
-                </a:solidFill>
-              </a:defRPr>
-            </a:pPr>
-            <a:r>
-              <a:rPr sz="1350" b="1">
-                <a:solidFill>
-                  <a:srgbClr val="172033"/>
-                </a:solidFill>
-              </a:rPr>
-              <a:t>Books Care</a:t>
-            </a:r>
-          </a:p>
-        </p:txBody>
-      </p:sp>
-      <p:sp>
-        <p:nvSpPr>
-          <p:cNvPr id="15" name="">
-            <a:extLst xmlns:a="http://schemas.openxmlformats.org/drawingml/2006/main">
-              <a:ext uri="{FF2B5EF4-FFF2-40B4-BE49-F238E27FC236}">
-                <a16:creationId xmlns:a16="http://schemas.microsoft.com/office/drawing/2014/main" id="{3781FD7F-460B-4459-B615-4AEB5ACDA58E}"/>
-              </a:ext>
-            </a:extLst>
-          </p:cNvPr>
-          <p:cNvSpPr>
-            <a:spLocks xmlns:a="http://schemas.openxmlformats.org/drawingml/2006/main" noGrp="1"/>
-          </p:cNvSpPr>
-          <p:nvPr/>
-        </p:nvSpPr>
-        <p:spPr>
-          <a:xfrm xmlns:a="http://schemas.openxmlformats.org/drawingml/2006/main">
-            <a:off x="9086850" y="2895600"/>
-            <a:ext cx="1981200" cy="952500"/>
-          </a:xfrm>
-          <a:prstGeom xmlns:a="http://schemas.openxmlformats.org/drawingml/2006/main" prst="rect">
-            <a:avLst/>
-          </a:prstGeom>
-          <a:ln xmlns:a="http://schemas.openxmlformats.org/drawingml/2006/main" w="0">
-            <a:solidFill>
-              <a:srgbClr val="FFFFFF"/>
-            </a:solidFill>
-            <a:prstDash val="solid"/>
-          </a:ln>
-        </p:spPr>
-        <p:txBody>
-          <a:bodyPr xmlns:a="http://schemas.openxmlformats.org/drawingml/2006/main" anchor="t"/>
-          <a:lstStyle xmlns:a="http://schemas.openxmlformats.org/drawingml/2006/main"/>
-          <a:p xmlns:a="http://schemas.openxmlformats.org/drawingml/2006/main">
-            <a:pPr algn="l">
-              <a:defRPr sz="1050" b="0">
-                <a:solidFill>
-                  <a:srgbClr val="5F6F86"/>
-                </a:solidFill>
-              </a:defRPr>
-            </a:pPr>
-            <a:r>
-              <a:rPr sz="1050" b="0">
-                <a:solidFill>
-                  <a:srgbClr val="5F6F86"/>
-                </a:solidFill>
-              </a:rPr>
-              <a:t>Optional monthly lane for month-end review, reconciliation checks, and small accounting changes.</a:t>
-            </a:r>
-          </a:p>
-        </p:txBody>
-      </p:sp>
-      <p:sp>
-        <p:nvSpPr>
-          <p:cNvPr id="16" name="">
-            <a:extLst xmlns:a="http://schemas.openxmlformats.org/drawingml/2006/main">
-              <a:ext uri="{FF2B5EF4-FFF2-40B4-BE49-F238E27FC236}">
-                <a16:creationId xmlns:a16="http://schemas.microsoft.com/office/drawing/2014/main" id="{F3FB046D-5880-4DBF-AD53-BF0138024855}"/>
-              </a:ext>
-            </a:extLst>
-          </p:cNvPr>
-          <p:cNvSpPr>
-            <a:spLocks xmlns:a="http://schemas.openxmlformats.org/drawingml/2006/main" noGrp="1"/>
-          </p:cNvSpPr>
-          <p:nvPr/>
-        </p:nvSpPr>
-        <p:spPr>
-          <a:xfrm xmlns:a="http://schemas.openxmlformats.org/drawingml/2006/main">
-            <a:off x="6153150" y="4343400"/>
-            <a:ext cx="5086350" cy="1143000"/>
-          </a:xfrm>
-          <a:prstGeom xmlns:a="http://schemas.openxmlformats.org/drawingml/2006/main" prst="rect">
-            <a:avLst/>
-          </a:prstGeom>
-          <a:solidFill xmlns:a="http://schemas.openxmlformats.org/drawingml/2006/main">
-            <a:srgbClr val="FFFFFF"/>
-          </a:solidFill>
-          <a:ln xmlns:a="http://schemas.openxmlformats.org/drawingml/2006/main" w="0">
-            <a:solidFill>
-              <a:srgbClr val="D8E2ED"/>
-            </a:solidFill>
-            <a:prstDash val="solid"/>
-          </a:ln>
-        </p:spPr>
-      </p:sp>
-      <p:sp>
-        <p:nvSpPr>
-          <p:cNvPr id="17" name="">
-            <a:extLst xmlns:a="http://schemas.openxmlformats.org/drawingml/2006/main">
-              <a:ext uri="{FF2B5EF4-FFF2-40B4-BE49-F238E27FC236}">
-                <a16:creationId xmlns:a16="http://schemas.microsoft.com/office/drawing/2014/main" id="{EF735742-12BE-4366-A800-2567BADC152D}"/>
-              </a:ext>
-            </a:extLst>
-          </p:cNvPr>
-          <p:cNvSpPr>
-            <a:spLocks xmlns:a="http://schemas.openxmlformats.org/drawingml/2006/main" noGrp="1"/>
-          </p:cNvSpPr>
-          <p:nvPr/>
-        </p:nvSpPr>
-        <p:spPr>
-          <a:xfrm xmlns:a="http://schemas.openxmlformats.org/drawingml/2006/main">
-            <a:off x="6153150" y="4343400"/>
-            <a:ext cx="57150" cy="1143000"/>
-          </a:xfrm>
-          <a:prstGeom xmlns:a="http://schemas.openxmlformats.org/drawingml/2006/main" prst="rect">
-            <a:avLst/>
-          </a:prstGeom>
-          <a:solidFill xmlns:a="http://schemas.openxmlformats.org/drawingml/2006/main">
-            <a:srgbClr val="145DA0"/>
-          </a:solidFill>
-          <a:ln xmlns:a="http://schemas.openxmlformats.org/drawingml/2006/main" w="0">
-            <a:solidFill>
-              <a:srgbClr val="145DA0"/>
-            </a:solidFill>
-            <a:prstDash val="solid"/>
-          </a:ln>
-        </p:spPr>
-      </p:sp>
-      <p:sp>
-        <p:nvSpPr>
-          <p:cNvPr id="18" name="">
-            <a:extLst xmlns:a="http://schemas.openxmlformats.org/drawingml/2006/main">
-              <a:ext uri="{FF2B5EF4-FFF2-40B4-BE49-F238E27FC236}">
-                <a16:creationId xmlns:a16="http://schemas.microsoft.com/office/drawing/2014/main" id="{738F14AA-06B3-4A77-AEE0-415E490E9D54}"/>
-              </a:ext>
-            </a:extLst>
-          </p:cNvPr>
-          <p:cNvSpPr>
-            <a:spLocks xmlns:a="http://schemas.openxmlformats.org/drawingml/2006/main" noGrp="1"/>
-          </p:cNvSpPr>
-          <p:nvPr/>
-        </p:nvSpPr>
-        <p:spPr>
-          <a:xfrm xmlns:a="http://schemas.openxmlformats.org/drawingml/2006/main">
-            <a:off x="6381750" y="4533900"/>
-            <a:ext cx="4705350" cy="285750"/>
-          </a:xfrm>
-          <a:prstGeom xmlns:a="http://schemas.openxmlformats.org/drawingml/2006/main" prst="rect">
-            <a:avLst/>
-          </a:prstGeom>
-          <a:ln xmlns:a="http://schemas.openxmlformats.org/drawingml/2006/main" w="0">
-            <a:solidFill>
-              <a:srgbClr val="FFFFFF"/>
-            </a:solidFill>
-            <a:prstDash val="solid"/>
-          </a:ln>
-        </p:spPr>
-        <p:txBody>
-          <a:bodyPr xmlns:a="http://schemas.openxmlformats.org/drawingml/2006/main" anchor="t"/>
-          <a:lstStyle xmlns:a="http://schemas.openxmlformats.org/drawingml/2006/main"/>
-          <a:p xmlns:a="http://schemas.openxmlformats.org/drawingml/2006/main">
-            <a:pPr algn="l">
-              <a:defRPr sz="1350" b="1">
-                <a:solidFill>
-                  <a:srgbClr val="172033"/>
-                </a:solidFill>
-              </a:defRPr>
-            </a:pPr>
-            <a:r>
-              <a:rPr sz="1350" b="1">
-                <a:solidFill>
-                  <a:srgbClr val="172033"/>
-                </a:solidFill>
-              </a:rPr>
-              <a:t>Builds on what is shipped</a:t>
+              <a:t>Overdue invoices and bills due this week surface themselves.</a:t>
             </a:r>
           </a:p>
         </p:txBody>
@@ -8569,58 +9792,7 @@
           <p:cNvPr id="19" name="">
             <a:extLst xmlns:a="http://schemas.openxmlformats.org/drawingml/2006/main">
               <a:ext uri="{FF2B5EF4-FFF2-40B4-BE49-F238E27FC236}">
-                <a16:creationId xmlns:a16="http://schemas.microsoft.com/office/drawing/2014/main" id="{F3C478BE-A0F9-44AA-BD61-450F3BDF6782}"/>
-              </a:ext>
-            </a:extLst>
-          </p:cNvPr>
-          <p:cNvSpPr>
-            <a:spLocks xmlns:a="http://schemas.openxmlformats.org/drawingml/2006/main" noGrp="1"/>
-          </p:cNvSpPr>
-          <p:nvPr/>
-        </p:nvSpPr>
-        <p:spPr>
-          <a:xfrm xmlns:a="http://schemas.openxmlformats.org/drawingml/2006/main">
-            <a:off x="6381750" y="4895850"/>
-            <a:ext cx="4686300" cy="457200"/>
-          </a:xfrm>
-          <a:prstGeom xmlns:a="http://schemas.openxmlformats.org/drawingml/2006/main" prst="rect">
-            <a:avLst/>
-          </a:prstGeom>
-          <a:ln xmlns:a="http://schemas.openxmlformats.org/drawingml/2006/main" w="0">
-            <a:solidFill>
-              <a:srgbClr val="FFFFFF"/>
-            </a:solidFill>
-            <a:prstDash val="solid"/>
-          </a:ln>
-        </p:spPr>
-        <p:txBody>
-          <a:bodyPr xmlns:a="http://schemas.openxmlformats.org/drawingml/2006/main" anchor="t"/>
-          <a:lstStyle xmlns:a="http://schemas.openxmlformats.org/drawingml/2006/main"/>
-          <a:p xmlns:a="http://schemas.openxmlformats.org/drawingml/2006/main">
-            <a:pPr algn="l">
-              <a:defRPr sz="1050" b="0">
-                <a:solidFill>
-                  <a:srgbClr val="5F6F86"/>
-                </a:solidFill>
-              </a:defRPr>
-            </a:pPr>
-            <a:r>
-              <a:rPr sz="1050" b="0">
-                <a:solidFill>
-                  <a:srgbClr val="5F6F86"/>
-                </a:solidFill>
-              </a:rPr>
-              <a:t>The ledger, A/R, A/P, statements, period close, and invoice/bill PDFs are already built. This phase tailors and rolls them out for Raves.</a:t>
-            </a:r>
-          </a:p>
-        </p:txBody>
-      </p:sp>
-      <p:sp>
-        <p:nvSpPr>
-          <p:cNvPr id="20" name="">
-            <a:extLst xmlns:a="http://schemas.openxmlformats.org/drawingml/2006/main">
-              <a:ext uri="{FF2B5EF4-FFF2-40B4-BE49-F238E27FC236}">
-                <a16:creationId xmlns:a16="http://schemas.microsoft.com/office/drawing/2014/main" id="{E100C9A4-CF7C-4CC5-9A92-C5F1C265866E}"/>
+                <a16:creationId xmlns:a16="http://schemas.microsoft.com/office/drawing/2014/main" id="{059FE730-E0CF-4273-8578-D53F85EE3FA7}"/>
               </a:ext>
             </a:extLst>
           </p:cNvPr>
@@ -8668,10 +9840,10 @@
       </p:sp>
       <p:sp>
         <p:nvSpPr>
-          <p:cNvPr id="21" name="">
-            <a:extLst xmlns:a="http://schemas.openxmlformats.org/drawingml/2006/main">
-              <a:ext uri="{FF2B5EF4-FFF2-40B4-BE49-F238E27FC236}">
-                <a16:creationId xmlns:a16="http://schemas.microsoft.com/office/drawing/2014/main" id="{24EE223D-B550-49A9-ADC7-95982363E92B}"/>
+          <p:cNvPr id="20" name="">
+            <a:extLst xmlns:a="http://schemas.openxmlformats.org/drawingml/2006/main">
+              <a:ext uri="{FF2B5EF4-FFF2-40B4-BE49-F238E27FC236}">
+                <a16:creationId xmlns:a16="http://schemas.microsoft.com/office/drawing/2014/main" id="{76AA797C-2AFE-4473-9449-48425B327947}"/>
               </a:ext>
             </a:extLst>
           </p:cNvPr>
@@ -8720,7 +9892,7 @@
     </p:spTree>
     <p:extLst>
       <p:ext uri="{BB962C8B-B14F-4D97-AF65-F5344CB8AC3E}">
-        <p14:creationId xmlns:p14="http://schemas.microsoft.com/office/powerpoint/2010/main" val="437172766"/>
+        <p14:creationId xmlns:p14="http://schemas.microsoft.com/office/powerpoint/2010/main" val="1802258453"/>
       </p:ext>
     </p:extLst>
   </p:cSld>
@@ -8744,7 +9916,7 @@
           <p:cNvPr id="1" name="">
             <a:extLst xmlns:a="http://schemas.openxmlformats.org/drawingml/2006/main">
               <a:ext uri="{FF2B5EF4-FFF2-40B4-BE49-F238E27FC236}">
-                <a16:creationId xmlns:a16="http://schemas.microsoft.com/office/drawing/2014/main" id="{F36A6D2B-B21C-449F-94E7-AB083697E4E1}"/>
+                <a16:creationId xmlns:a16="http://schemas.microsoft.com/office/drawing/2014/main" id="{A7B35657-09DA-49D2-95C2-ACEB8BC75382}"/>
               </a:ext>
             </a:extLst>
           </p:cNvPr>
@@ -8777,7 +9949,7 @@
           <p:cNvPr id="2" name="">
             <a:extLst xmlns:a="http://schemas.openxmlformats.org/drawingml/2006/main">
               <a:ext uri="{FF2B5EF4-FFF2-40B4-BE49-F238E27FC236}">
-                <a16:creationId xmlns:a16="http://schemas.microsoft.com/office/drawing/2014/main" id="{4C68B8E8-607E-41FE-83BF-5DB13F1C77EC}"/>
+                <a16:creationId xmlns:a16="http://schemas.microsoft.com/office/drawing/2014/main" id="{914B8A21-3BF4-4EE4-8432-88D8345C7FCE}"/>
               </a:ext>
             </a:extLst>
           </p:cNvPr>
@@ -8818,7 +9990,7 @@
                   <a:srgbClr val="5F6F86"/>
                 </a:solidFill>
               </a:rPr>
-              <a:t>MUTUAL ACTION PLAN</a:t>
+              <a:t>PRODUCT WALKTHROUGH</a:t>
             </a:r>
           </a:p>
         </p:txBody>
@@ -8828,7 +10000,7 @@
           <p:cNvPr id="3" name="">
             <a:extLst xmlns:a="http://schemas.openxmlformats.org/drawingml/2006/main">
               <a:ext uri="{FF2B5EF4-FFF2-40B4-BE49-F238E27FC236}">
-                <a16:creationId xmlns:a16="http://schemas.microsoft.com/office/drawing/2014/main" id="{926A3F36-2782-4064-A9CA-FE71731E81EA}"/>
+                <a16:creationId xmlns:a16="http://schemas.microsoft.com/office/drawing/2014/main" id="{332E31AC-04C8-4BC8-BA1A-B0CB9B6B1990}"/>
               </a:ext>
             </a:extLst>
           </p:cNvPr>
@@ -8869,7 +10041,7 @@
                   <a:srgbClr val="172033"/>
                 </a:solidFill>
               </a:rPr>
-              <a:t>A simple path from decision to first clean month-end.</a:t>
+              <a:t>From invoice to clean statements.</a:t>
             </a:r>
           </a:p>
         </p:txBody>
@@ -8879,19 +10051,346 @@
           <p:cNvPr id="4" name="">
             <a:extLst xmlns:a="http://schemas.openxmlformats.org/drawingml/2006/main">
               <a:ext uri="{FF2B5EF4-FFF2-40B4-BE49-F238E27FC236}">
-                <a16:creationId xmlns:a16="http://schemas.microsoft.com/office/drawing/2014/main" id="{A5C4EC31-080F-4C5A-88BC-C69974774DFD}"/>
-              </a:ext>
-            </a:extLst>
-          </p:cNvPr>
-          <p:cNvSpPr>
-            <a:spLocks xmlns:a="http://schemas.openxmlformats.org/drawingml/2006/main" noGrp="1"/>
-          </p:cNvSpPr>
-          <p:nvPr/>
-        </p:nvSpPr>
-        <p:spPr>
-          <a:xfrm xmlns:a="http://schemas.openxmlformats.org/drawingml/2006/main">
-            <a:off x="685800" y="2667000"/>
-            <a:ext cx="1676400" cy="1676400"/>
+                <a16:creationId xmlns:a16="http://schemas.microsoft.com/office/drawing/2014/main" id="{5909E10B-A199-4105-BC31-782A47DDE62D}"/>
+              </a:ext>
+            </a:extLst>
+          </p:cNvPr>
+          <p:cNvSpPr>
+            <a:spLocks xmlns:a="http://schemas.openxmlformats.org/drawingml/2006/main" noGrp="1"/>
+          </p:cNvSpPr>
+          <p:nvPr/>
+        </p:nvSpPr>
+        <p:spPr>
+          <a:xfrm xmlns:a="http://schemas.openxmlformats.org/drawingml/2006/main">
+            <a:off x="666750" y="1943100"/>
+            <a:ext cx="3543300" cy="2257425"/>
+          </a:xfrm>
+          <a:prstGeom xmlns:a="http://schemas.openxmlformats.org/drawingml/2006/main" prst="rect">
+            <a:avLst/>
+          </a:prstGeom>
+          <a:solidFill xmlns:a="http://schemas.openxmlformats.org/drawingml/2006/main">
+            <a:srgbClr val="D8E2ED"/>
+          </a:solidFill>
+          <a:ln xmlns:a="http://schemas.openxmlformats.org/drawingml/2006/main" w="0">
+            <a:solidFill>
+              <a:srgbClr val="D8E2ED"/>
+            </a:solidFill>
+            <a:prstDash val="solid"/>
+          </a:ln>
+        </p:spPr>
+      </p:sp>
+      <p:pic>
+        <p:nvPicPr>
+          <p:cNvPr id="5" name=""/>
+          <p:cNvPicPr>
+            <a:picLocks xmlns:a="http://schemas.openxmlformats.org/drawingml/2006/main" noChangeAspect="1"/>
+          </p:cNvPicPr>
+          <p:nvPr/>
+        </p:nvPicPr>
+        <p:blipFill>
+          <a:blip xmlns:r="http://schemas.openxmlformats.org/officeDocument/2006/relationships" xmlns:a="http://schemas.openxmlformats.org/drawingml/2006/main" r:embed="R37031a7b70e64830"/>
+          <a:stretch xmlns:a="http://schemas.openxmlformats.org/drawingml/2006/main"/>
+        </p:blipFill>
+        <p:spPr>
+          <a:xfrm xmlns:a="http://schemas.openxmlformats.org/drawingml/2006/main">
+            <a:off x="685800" y="1962150"/>
+            <a:ext cx="3505200" cy="2219325"/>
+          </a:xfrm>
+          <a:prstGeom xmlns:a="http://schemas.openxmlformats.org/drawingml/2006/main" prst="rect">
+            <a:avLst/>
+          </a:prstGeom>
+        </p:spPr>
+      </p:pic>
+      <p:sp>
+        <p:nvSpPr>
+          <p:cNvPr id="6" name="">
+            <a:extLst xmlns:a="http://schemas.openxmlformats.org/drawingml/2006/main">
+              <a:ext uri="{FF2B5EF4-FFF2-40B4-BE49-F238E27FC236}">
+                <a16:creationId xmlns:a16="http://schemas.microsoft.com/office/drawing/2014/main" id="{2C6703D0-6A0C-47BF-AFA9-B3C768DAAF91}"/>
+              </a:ext>
+            </a:extLst>
+          </p:cNvPr>
+          <p:cNvSpPr>
+            <a:spLocks xmlns:a="http://schemas.openxmlformats.org/drawingml/2006/main" noGrp="1"/>
+          </p:cNvSpPr>
+          <p:nvPr/>
+        </p:nvSpPr>
+        <p:spPr>
+          <a:xfrm xmlns:a="http://schemas.openxmlformats.org/drawingml/2006/main">
+            <a:off x="685800" y="4276725"/>
+            <a:ext cx="3695700" cy="381000"/>
+          </a:xfrm>
+          <a:prstGeom xmlns:a="http://schemas.openxmlformats.org/drawingml/2006/main" prst="rect">
+            <a:avLst/>
+          </a:prstGeom>
+          <a:solidFill xmlns:a="http://schemas.openxmlformats.org/drawingml/2006/main">
+            <a:srgbClr val="F5F8FC"/>
+          </a:solidFill>
+          <a:ln xmlns:a="http://schemas.openxmlformats.org/drawingml/2006/main" w="0">
+            <a:solidFill>
+              <a:srgbClr val="F5F8FC"/>
+            </a:solidFill>
+            <a:prstDash val="solid"/>
+          </a:ln>
+        </p:spPr>
+        <p:txBody>
+          <a:bodyPr xmlns:a="http://schemas.openxmlformats.org/drawingml/2006/main" anchor="t"/>
+          <a:lstStyle xmlns:a="http://schemas.openxmlformats.org/drawingml/2006/main"/>
+          <a:p xmlns:a="http://schemas.openxmlformats.org/drawingml/2006/main">
+            <a:pPr algn="l">
+              <a:defRPr sz="975" b="0">
+                <a:solidFill>
+                  <a:srgbClr val="5F6F86"/>
+                </a:solidFill>
+              </a:defRPr>
+            </a:pPr>
+            <a:r>
+              <a:rPr sz="975" b="0">
+                <a:solidFill>
+                  <a:srgbClr val="5F6F86"/>
+                </a:solidFill>
+              </a:rPr>
+              <a:t>Invoices: status filters, overdue flags, payment progress</a:t>
+            </a:r>
+          </a:p>
+        </p:txBody>
+      </p:sp>
+      <p:sp>
+        <p:nvSpPr>
+          <p:cNvPr id="7" name="">
+            <a:extLst xmlns:a="http://schemas.openxmlformats.org/drawingml/2006/main">
+              <a:ext uri="{FF2B5EF4-FFF2-40B4-BE49-F238E27FC236}">
+                <a16:creationId xmlns:a16="http://schemas.microsoft.com/office/drawing/2014/main" id="{D33233FE-2506-4D39-8C69-7B7E61C23D7F}"/>
+              </a:ext>
+            </a:extLst>
+          </p:cNvPr>
+          <p:cNvSpPr>
+            <a:spLocks xmlns:a="http://schemas.openxmlformats.org/drawingml/2006/main" noGrp="1"/>
+          </p:cNvSpPr>
+          <p:nvPr/>
+        </p:nvSpPr>
+        <p:spPr>
+          <a:xfrm xmlns:a="http://schemas.openxmlformats.org/drawingml/2006/main">
+            <a:off x="4324350" y="1943100"/>
+            <a:ext cx="3543300" cy="2257425"/>
+          </a:xfrm>
+          <a:prstGeom xmlns:a="http://schemas.openxmlformats.org/drawingml/2006/main" prst="rect">
+            <a:avLst/>
+          </a:prstGeom>
+          <a:solidFill xmlns:a="http://schemas.openxmlformats.org/drawingml/2006/main">
+            <a:srgbClr val="D8E2ED"/>
+          </a:solidFill>
+          <a:ln xmlns:a="http://schemas.openxmlformats.org/drawingml/2006/main" w="0">
+            <a:solidFill>
+              <a:srgbClr val="D8E2ED"/>
+            </a:solidFill>
+            <a:prstDash val="solid"/>
+          </a:ln>
+        </p:spPr>
+      </p:sp>
+      <p:pic>
+        <p:nvPicPr>
+          <p:cNvPr id="8" name=""/>
+          <p:cNvPicPr>
+            <a:picLocks xmlns:a="http://schemas.openxmlformats.org/drawingml/2006/main" noChangeAspect="1"/>
+          </p:cNvPicPr>
+          <p:nvPr/>
+        </p:nvPicPr>
+        <p:blipFill>
+          <a:blip xmlns:r="http://schemas.openxmlformats.org/officeDocument/2006/relationships" xmlns:a="http://schemas.openxmlformats.org/drawingml/2006/main" r:embed="Racd619ffdbcf42c4"/>
+          <a:stretch xmlns:a="http://schemas.openxmlformats.org/drawingml/2006/main"/>
+        </p:blipFill>
+        <p:spPr>
+          <a:xfrm xmlns:a="http://schemas.openxmlformats.org/drawingml/2006/main">
+            <a:off x="4343400" y="1962150"/>
+            <a:ext cx="3505200" cy="2219325"/>
+          </a:xfrm>
+          <a:prstGeom xmlns:a="http://schemas.openxmlformats.org/drawingml/2006/main" prst="rect">
+            <a:avLst/>
+          </a:prstGeom>
+        </p:spPr>
+      </p:pic>
+      <p:sp>
+        <p:nvSpPr>
+          <p:cNvPr id="9" name="">
+            <a:extLst xmlns:a="http://schemas.openxmlformats.org/drawingml/2006/main">
+              <a:ext uri="{FF2B5EF4-FFF2-40B4-BE49-F238E27FC236}">
+                <a16:creationId xmlns:a16="http://schemas.microsoft.com/office/drawing/2014/main" id="{659ED447-C11A-49FE-AFFE-12501469A488}"/>
+              </a:ext>
+            </a:extLst>
+          </p:cNvPr>
+          <p:cNvSpPr>
+            <a:spLocks xmlns:a="http://schemas.openxmlformats.org/drawingml/2006/main" noGrp="1"/>
+          </p:cNvSpPr>
+          <p:nvPr/>
+        </p:nvSpPr>
+        <p:spPr>
+          <a:xfrm xmlns:a="http://schemas.openxmlformats.org/drawingml/2006/main">
+            <a:off x="4343400" y="4276725"/>
+            <a:ext cx="3695700" cy="381000"/>
+          </a:xfrm>
+          <a:prstGeom xmlns:a="http://schemas.openxmlformats.org/drawingml/2006/main" prst="rect">
+            <a:avLst/>
+          </a:prstGeom>
+          <a:solidFill xmlns:a="http://schemas.openxmlformats.org/drawingml/2006/main">
+            <a:srgbClr val="F5F8FC"/>
+          </a:solidFill>
+          <a:ln xmlns:a="http://schemas.openxmlformats.org/drawingml/2006/main" w="0">
+            <a:solidFill>
+              <a:srgbClr val="F5F8FC"/>
+            </a:solidFill>
+            <a:prstDash val="solid"/>
+          </a:ln>
+        </p:spPr>
+        <p:txBody>
+          <a:bodyPr xmlns:a="http://schemas.openxmlformats.org/drawingml/2006/main" anchor="t"/>
+          <a:lstStyle xmlns:a="http://schemas.openxmlformats.org/drawingml/2006/main"/>
+          <a:p xmlns:a="http://schemas.openxmlformats.org/drawingml/2006/main">
+            <a:pPr algn="l">
+              <a:defRPr sz="975" b="0">
+                <a:solidFill>
+                  <a:srgbClr val="5F6F86"/>
+                </a:solidFill>
+              </a:defRPr>
+            </a:pPr>
+            <a:r>
+              <a:rPr sz="975" b="0">
+                <a:solidFill>
+                  <a:srgbClr val="5F6F86"/>
+                </a:solidFill>
+              </a:rPr>
+              <a:t>Income statement: one-click periods, print for the bank</a:t>
+            </a:r>
+          </a:p>
+        </p:txBody>
+      </p:sp>
+      <p:sp>
+        <p:nvSpPr>
+          <p:cNvPr id="10" name="">
+            <a:extLst xmlns:a="http://schemas.openxmlformats.org/drawingml/2006/main">
+              <a:ext uri="{FF2B5EF4-FFF2-40B4-BE49-F238E27FC236}">
+                <a16:creationId xmlns:a16="http://schemas.microsoft.com/office/drawing/2014/main" id="{FF51C620-9618-4605-925B-DD2A56FC1241}"/>
+              </a:ext>
+            </a:extLst>
+          </p:cNvPr>
+          <p:cNvSpPr>
+            <a:spLocks xmlns:a="http://schemas.openxmlformats.org/drawingml/2006/main" noGrp="1"/>
+          </p:cNvSpPr>
+          <p:nvPr/>
+        </p:nvSpPr>
+        <p:spPr>
+          <a:xfrm xmlns:a="http://schemas.openxmlformats.org/drawingml/2006/main">
+            <a:off x="7981950" y="1943100"/>
+            <a:ext cx="3543300" cy="2257425"/>
+          </a:xfrm>
+          <a:prstGeom xmlns:a="http://schemas.openxmlformats.org/drawingml/2006/main" prst="rect">
+            <a:avLst/>
+          </a:prstGeom>
+          <a:solidFill xmlns:a="http://schemas.openxmlformats.org/drawingml/2006/main">
+            <a:srgbClr val="D8E2ED"/>
+          </a:solidFill>
+          <a:ln xmlns:a="http://schemas.openxmlformats.org/drawingml/2006/main" w="0">
+            <a:solidFill>
+              <a:srgbClr val="D8E2ED"/>
+            </a:solidFill>
+            <a:prstDash val="solid"/>
+          </a:ln>
+        </p:spPr>
+      </p:sp>
+      <p:pic>
+        <p:nvPicPr>
+          <p:cNvPr id="11" name=""/>
+          <p:cNvPicPr>
+            <a:picLocks xmlns:a="http://schemas.openxmlformats.org/drawingml/2006/main" noChangeAspect="1"/>
+          </p:cNvPicPr>
+          <p:nvPr/>
+        </p:nvPicPr>
+        <p:blipFill>
+          <a:blip xmlns:r="http://schemas.openxmlformats.org/officeDocument/2006/relationships" xmlns:a="http://schemas.openxmlformats.org/drawingml/2006/main" r:embed="R583e19868e5449bb"/>
+          <a:stretch xmlns:a="http://schemas.openxmlformats.org/drawingml/2006/main"/>
+        </p:blipFill>
+        <p:spPr>
+          <a:xfrm xmlns:a="http://schemas.openxmlformats.org/drawingml/2006/main">
+            <a:off x="8001000" y="1962150"/>
+            <a:ext cx="3505200" cy="2219325"/>
+          </a:xfrm>
+          <a:prstGeom xmlns:a="http://schemas.openxmlformats.org/drawingml/2006/main" prst="rect">
+            <a:avLst/>
+          </a:prstGeom>
+        </p:spPr>
+      </p:pic>
+      <p:sp>
+        <p:nvSpPr>
+          <p:cNvPr id="12" name="">
+            <a:extLst xmlns:a="http://schemas.openxmlformats.org/drawingml/2006/main">
+              <a:ext uri="{FF2B5EF4-FFF2-40B4-BE49-F238E27FC236}">
+                <a16:creationId xmlns:a16="http://schemas.microsoft.com/office/drawing/2014/main" id="{ADDC34C4-DF4B-4D4C-8281-9992E4A44B02}"/>
+              </a:ext>
+            </a:extLst>
+          </p:cNvPr>
+          <p:cNvSpPr>
+            <a:spLocks xmlns:a="http://schemas.openxmlformats.org/drawingml/2006/main" noGrp="1"/>
+          </p:cNvSpPr>
+          <p:nvPr/>
+        </p:nvSpPr>
+        <p:spPr>
+          <a:xfrm xmlns:a="http://schemas.openxmlformats.org/drawingml/2006/main">
+            <a:off x="8001000" y="4276725"/>
+            <a:ext cx="3695700" cy="381000"/>
+          </a:xfrm>
+          <a:prstGeom xmlns:a="http://schemas.openxmlformats.org/drawingml/2006/main" prst="rect">
+            <a:avLst/>
+          </a:prstGeom>
+          <a:solidFill xmlns:a="http://schemas.openxmlformats.org/drawingml/2006/main">
+            <a:srgbClr val="F5F8FC"/>
+          </a:solidFill>
+          <a:ln xmlns:a="http://schemas.openxmlformats.org/drawingml/2006/main" w="0">
+            <a:solidFill>
+              <a:srgbClr val="F5F8FC"/>
+            </a:solidFill>
+            <a:prstDash val="solid"/>
+          </a:ln>
+        </p:spPr>
+        <p:txBody>
+          <a:bodyPr xmlns:a="http://schemas.openxmlformats.org/drawingml/2006/main" anchor="t"/>
+          <a:lstStyle xmlns:a="http://schemas.openxmlformats.org/drawingml/2006/main"/>
+          <a:p xmlns:a="http://schemas.openxmlformats.org/drawingml/2006/main">
+            <a:pPr algn="l">
+              <a:defRPr sz="975" b="0">
+                <a:solidFill>
+                  <a:srgbClr val="5F6F86"/>
+                </a:solidFill>
+              </a:defRPr>
+            </a:pPr>
+            <a:r>
+              <a:rPr sz="975" b="0">
+                <a:solidFill>
+                  <a:srgbClr val="5F6F86"/>
+                </a:solidFill>
+              </a:rPr>
+              <a:t>Bank reconciliation: tick to zero, CSV auto-match</a:t>
+            </a:r>
+          </a:p>
+        </p:txBody>
+      </p:sp>
+      <p:sp>
+        <p:nvSpPr>
+          <p:cNvPr id="13" name="">
+            <a:extLst xmlns:a="http://schemas.openxmlformats.org/drawingml/2006/main">
+              <a:ext uri="{FF2B5EF4-FFF2-40B4-BE49-F238E27FC236}">
+                <a16:creationId xmlns:a16="http://schemas.microsoft.com/office/drawing/2014/main" id="{D84DA3D8-7C14-4D3D-98EE-50114F42198C}"/>
+              </a:ext>
+            </a:extLst>
+          </p:cNvPr>
+          <p:cNvSpPr>
+            <a:spLocks xmlns:a="http://schemas.openxmlformats.org/drawingml/2006/main" noGrp="1"/>
+          </p:cNvSpPr>
+          <p:nvPr/>
+        </p:nvSpPr>
+        <p:spPr>
+          <a:xfrm xmlns:a="http://schemas.openxmlformats.org/drawingml/2006/main">
+            <a:off x="685800" y="4876800"/>
+            <a:ext cx="10820400" cy="1047750"/>
           </a:xfrm>
           <a:prstGeom xmlns:a="http://schemas.openxmlformats.org/drawingml/2006/main" prst="rect">
             <a:avLst/>
@@ -8909,292 +10408,22 @@
       </p:sp>
       <p:sp>
         <p:nvSpPr>
-          <p:cNvPr id="5" name="">
-            <a:extLst xmlns:a="http://schemas.openxmlformats.org/drawingml/2006/main">
-              <a:ext uri="{FF2B5EF4-FFF2-40B4-BE49-F238E27FC236}">
-                <a16:creationId xmlns:a16="http://schemas.microsoft.com/office/drawing/2014/main" id="{0C5F0CB2-1B03-411F-818C-D4B93A049BDB}"/>
-              </a:ext>
-            </a:extLst>
-          </p:cNvPr>
-          <p:cNvSpPr>
-            <a:spLocks xmlns:a="http://schemas.openxmlformats.org/drawingml/2006/main" noGrp="1"/>
-          </p:cNvSpPr>
-          <p:nvPr/>
-        </p:nvSpPr>
-        <p:spPr>
-          <a:xfrm xmlns:a="http://schemas.openxmlformats.org/drawingml/2006/main">
-            <a:off x="857250" y="2895600"/>
-            <a:ext cx="419100" cy="419100"/>
-          </a:xfrm>
-          <a:prstGeom xmlns:a="http://schemas.openxmlformats.org/drawingml/2006/main" prst="rect">
-            <a:avLst/>
-          </a:prstGeom>
-          <a:solidFill xmlns:a="http://schemas.openxmlformats.org/drawingml/2006/main">
-            <a:srgbClr val="1D7F5F"/>
-          </a:solidFill>
-          <a:ln xmlns:a="http://schemas.openxmlformats.org/drawingml/2006/main" w="0">
-            <a:solidFill>
-              <a:srgbClr val="1D7F5F"/>
-            </a:solidFill>
-            <a:prstDash val="solid"/>
-          </a:ln>
-        </p:spPr>
-      </p:sp>
-      <p:sp>
-        <p:nvSpPr>
-          <p:cNvPr id="6" name="">
-            <a:extLst xmlns:a="http://schemas.openxmlformats.org/drawingml/2006/main">
-              <a:ext uri="{FF2B5EF4-FFF2-40B4-BE49-F238E27FC236}">
-                <a16:creationId xmlns:a16="http://schemas.microsoft.com/office/drawing/2014/main" id="{25CC2314-9098-4C14-BB5C-F50A32F797C0}"/>
-              </a:ext>
-            </a:extLst>
-          </p:cNvPr>
-          <p:cNvSpPr>
-            <a:spLocks xmlns:a="http://schemas.openxmlformats.org/drawingml/2006/main" noGrp="1"/>
-          </p:cNvSpPr>
-          <p:nvPr/>
-        </p:nvSpPr>
-        <p:spPr>
-          <a:xfrm xmlns:a="http://schemas.openxmlformats.org/drawingml/2006/main">
-            <a:off x="857250" y="2962275"/>
-            <a:ext cx="419100" cy="285750"/>
-          </a:xfrm>
-          <a:prstGeom xmlns:a="http://schemas.openxmlformats.org/drawingml/2006/main" prst="rect">
-            <a:avLst/>
-          </a:prstGeom>
-          <a:ln xmlns:a="http://schemas.openxmlformats.org/drawingml/2006/main" w="0">
-            <a:solidFill>
-              <a:srgbClr val="FFFFFF"/>
-            </a:solidFill>
-            <a:prstDash val="solid"/>
-          </a:ln>
-        </p:spPr>
-        <p:txBody>
-          <a:bodyPr xmlns:a="http://schemas.openxmlformats.org/drawingml/2006/main" anchor="t"/>
-          <a:lstStyle xmlns:a="http://schemas.openxmlformats.org/drawingml/2006/main"/>
-          <a:p xmlns:a="http://schemas.openxmlformats.org/drawingml/2006/main">
-            <a:pPr algn="ctr">
-              <a:defRPr sz="1500" b="1">
-                <a:solidFill>
-                  <a:srgbClr val="FFFFFF"/>
-                </a:solidFill>
-              </a:defRPr>
-            </a:pPr>
-            <a:r>
-              <a:rPr sz="1500" b="1">
-                <a:solidFill>
-                  <a:srgbClr val="FFFFFF"/>
-                </a:solidFill>
-              </a:rPr>
-              <a:t>1</a:t>
-            </a:r>
-          </a:p>
-        </p:txBody>
-      </p:sp>
-      <p:sp>
-        <p:nvSpPr>
-          <p:cNvPr id="7" name="">
-            <a:extLst xmlns:a="http://schemas.openxmlformats.org/drawingml/2006/main">
-              <a:ext uri="{FF2B5EF4-FFF2-40B4-BE49-F238E27FC236}">
-                <a16:creationId xmlns:a16="http://schemas.microsoft.com/office/drawing/2014/main" id="{83D6D3C0-6417-42CC-AF1C-5E6438CEC5D6}"/>
-              </a:ext>
-            </a:extLst>
-          </p:cNvPr>
-          <p:cNvSpPr>
-            <a:spLocks xmlns:a="http://schemas.openxmlformats.org/drawingml/2006/main" noGrp="1"/>
-          </p:cNvSpPr>
-          <p:nvPr/>
-        </p:nvSpPr>
-        <p:spPr>
-          <a:xfrm xmlns:a="http://schemas.openxmlformats.org/drawingml/2006/main">
-            <a:off x="857250" y="3524250"/>
-            <a:ext cx="1295400" cy="304800"/>
-          </a:xfrm>
-          <a:prstGeom xmlns:a="http://schemas.openxmlformats.org/drawingml/2006/main" prst="rect">
-            <a:avLst/>
-          </a:prstGeom>
-          <a:ln xmlns:a="http://schemas.openxmlformats.org/drawingml/2006/main" w="0">
-            <a:solidFill>
-              <a:srgbClr val="FFFFFF"/>
-            </a:solidFill>
-            <a:prstDash val="solid"/>
-          </a:ln>
-        </p:spPr>
-        <p:txBody>
-          <a:bodyPr xmlns:a="http://schemas.openxmlformats.org/drawingml/2006/main" anchor="t"/>
-          <a:lstStyle xmlns:a="http://schemas.openxmlformats.org/drawingml/2006/main"/>
-          <a:p xmlns:a="http://schemas.openxmlformats.org/drawingml/2006/main">
-            <a:pPr algn="l">
-              <a:defRPr sz="1275" b="1">
-                <a:solidFill>
-                  <a:srgbClr val="172033"/>
-                </a:solidFill>
-              </a:defRPr>
-            </a:pPr>
-            <a:r>
-              <a:rPr sz="1275" b="1">
-                <a:solidFill>
-                  <a:srgbClr val="172033"/>
-                </a:solidFill>
-              </a:rPr>
-              <a:t>Select package</a:t>
-            </a:r>
-          </a:p>
-        </p:txBody>
-      </p:sp>
-      <p:sp>
-        <p:nvSpPr>
-          <p:cNvPr id="8" name="">
-            <a:extLst xmlns:a="http://schemas.openxmlformats.org/drawingml/2006/main">
-              <a:ext uri="{FF2B5EF4-FFF2-40B4-BE49-F238E27FC236}">
-                <a16:creationId xmlns:a16="http://schemas.microsoft.com/office/drawing/2014/main" id="{754B152A-B23C-4C61-B310-FCB436F01EC5}"/>
-              </a:ext>
-            </a:extLst>
-          </p:cNvPr>
-          <p:cNvSpPr>
-            <a:spLocks xmlns:a="http://schemas.openxmlformats.org/drawingml/2006/main" noGrp="1"/>
-          </p:cNvSpPr>
-          <p:nvPr/>
-        </p:nvSpPr>
-        <p:spPr>
-          <a:xfrm xmlns:a="http://schemas.openxmlformats.org/drawingml/2006/main">
-            <a:off x="857250" y="3905250"/>
-            <a:ext cx="1295400" cy="742950"/>
-          </a:xfrm>
-          <a:prstGeom xmlns:a="http://schemas.openxmlformats.org/drawingml/2006/main" prst="rect">
-            <a:avLst/>
-          </a:prstGeom>
-          <a:ln xmlns:a="http://schemas.openxmlformats.org/drawingml/2006/main" w="0">
-            <a:solidFill>
-              <a:srgbClr val="FFFFFF"/>
-            </a:solidFill>
-            <a:prstDash val="solid"/>
-          </a:ln>
-        </p:spPr>
-        <p:txBody>
-          <a:bodyPr xmlns:a="http://schemas.openxmlformats.org/drawingml/2006/main" anchor="t"/>
-          <a:lstStyle xmlns:a="http://schemas.openxmlformats.org/drawingml/2006/main"/>
-          <a:p xmlns:a="http://schemas.openxmlformats.org/drawingml/2006/main">
-            <a:pPr algn="l">
-              <a:defRPr sz="900" b="0">
-                <a:solidFill>
-                  <a:srgbClr val="5F6F86"/>
-                </a:solidFill>
-              </a:defRPr>
-            </a:pPr>
-            <a:r>
-              <a:rPr sz="900" b="0">
-                <a:solidFill>
-                  <a:srgbClr val="5F6F86"/>
-                </a:solidFill>
-              </a:rPr>
-              <a:t>Confirm Books Foundation or the expanded Books Complete scope.</a:t>
-            </a:r>
-          </a:p>
-        </p:txBody>
-      </p:sp>
-      <p:sp>
-        <p:nvSpPr>
-          <p:cNvPr id="9" name="">
-            <a:extLst xmlns:a="http://schemas.openxmlformats.org/drawingml/2006/main">
-              <a:ext uri="{FF2B5EF4-FFF2-40B4-BE49-F238E27FC236}">
-                <a16:creationId xmlns:a16="http://schemas.microsoft.com/office/drawing/2014/main" id="{F2750400-E5BF-40B4-A798-65C5D3BEB201}"/>
-              </a:ext>
-            </a:extLst>
-          </p:cNvPr>
-          <p:cNvSpPr>
-            <a:spLocks xmlns:a="http://schemas.openxmlformats.org/drawingml/2006/main" noGrp="1"/>
-          </p:cNvSpPr>
-          <p:nvPr/>
-        </p:nvSpPr>
-        <p:spPr>
-          <a:xfrm xmlns:a="http://schemas.openxmlformats.org/drawingml/2006/main">
-            <a:off x="2438400" y="3314700"/>
-            <a:ext cx="323850" cy="323850"/>
-          </a:xfrm>
-          <a:prstGeom xmlns:a="http://schemas.openxmlformats.org/drawingml/2006/main" prst="rect">
-            <a:avLst/>
-          </a:prstGeom>
-          <a:ln xmlns:a="http://schemas.openxmlformats.org/drawingml/2006/main" w="0">
-            <a:solidFill>
-              <a:srgbClr val="FFFFFF"/>
-            </a:solidFill>
-            <a:prstDash val="solid"/>
-          </a:ln>
-        </p:spPr>
-        <p:txBody>
-          <a:bodyPr xmlns:a="http://schemas.openxmlformats.org/drawingml/2006/main" anchor="ctr"/>
-          <a:lstStyle xmlns:a="http://schemas.openxmlformats.org/drawingml/2006/main"/>
-          <a:p xmlns:a="http://schemas.openxmlformats.org/drawingml/2006/main">
-            <a:pPr algn="ctr">
-              <a:defRPr sz="1650" b="1">
-                <a:solidFill>
-                  <a:srgbClr val="145DA0"/>
-                </a:solidFill>
-              </a:defRPr>
-            </a:pPr>
-            <a:r>
-              <a:rPr sz="1650" b="1">
-                <a:solidFill>
-                  <a:srgbClr val="145DA0"/>
-                </a:solidFill>
-              </a:rPr>
-              <a:t>-&gt;</a:t>
-            </a:r>
-          </a:p>
-        </p:txBody>
-      </p:sp>
-      <p:sp>
-        <p:nvSpPr>
-          <p:cNvPr id="10" name="">
-            <a:extLst xmlns:a="http://schemas.openxmlformats.org/drawingml/2006/main">
-              <a:ext uri="{FF2B5EF4-FFF2-40B4-BE49-F238E27FC236}">
-                <a16:creationId xmlns:a16="http://schemas.microsoft.com/office/drawing/2014/main" id="{90AE3365-585C-4CBC-9E48-A5CC0126A258}"/>
-              </a:ext>
-            </a:extLst>
-          </p:cNvPr>
-          <p:cNvSpPr>
-            <a:spLocks xmlns:a="http://schemas.openxmlformats.org/drawingml/2006/main" noGrp="1"/>
-          </p:cNvSpPr>
-          <p:nvPr/>
-        </p:nvSpPr>
-        <p:spPr>
-          <a:xfrm xmlns:a="http://schemas.openxmlformats.org/drawingml/2006/main">
-            <a:off x="2895600" y="2667000"/>
-            <a:ext cx="1676400" cy="1676400"/>
-          </a:xfrm>
-          <a:prstGeom xmlns:a="http://schemas.openxmlformats.org/drawingml/2006/main" prst="rect">
-            <a:avLst/>
-          </a:prstGeom>
-          <a:solidFill xmlns:a="http://schemas.openxmlformats.org/drawingml/2006/main">
-            <a:srgbClr val="FFFFFF"/>
-          </a:solidFill>
-          <a:ln xmlns:a="http://schemas.openxmlformats.org/drawingml/2006/main" w="0">
-            <a:solidFill>
-              <a:srgbClr val="D8E2ED"/>
-            </a:solidFill>
-            <a:prstDash val="solid"/>
-          </a:ln>
-        </p:spPr>
-      </p:sp>
-      <p:sp>
-        <p:nvSpPr>
-          <p:cNvPr id="11" name="">
-            <a:extLst xmlns:a="http://schemas.openxmlformats.org/drawingml/2006/main">
-              <a:ext uri="{FF2B5EF4-FFF2-40B4-BE49-F238E27FC236}">
-                <a16:creationId xmlns:a16="http://schemas.microsoft.com/office/drawing/2014/main" id="{5DDB1777-F213-46DB-89A8-C382865C8A50}"/>
-              </a:ext>
-            </a:extLst>
-          </p:cNvPr>
-          <p:cNvSpPr>
-            <a:spLocks xmlns:a="http://schemas.openxmlformats.org/drawingml/2006/main" noGrp="1"/>
-          </p:cNvSpPr>
-          <p:nvPr/>
-        </p:nvSpPr>
-        <p:spPr>
-          <a:xfrm xmlns:a="http://schemas.openxmlformats.org/drawingml/2006/main">
-            <a:off x="3067050" y="2895600"/>
-            <a:ext cx="419100" cy="419100"/>
+          <p:cNvPr id="14" name="">
+            <a:extLst xmlns:a="http://schemas.openxmlformats.org/drawingml/2006/main">
+              <a:ext uri="{FF2B5EF4-FFF2-40B4-BE49-F238E27FC236}">
+                <a16:creationId xmlns:a16="http://schemas.microsoft.com/office/drawing/2014/main" id="{062F1090-3535-4A05-83FF-F05FE3D0FE45}"/>
+              </a:ext>
+            </a:extLst>
+          </p:cNvPr>
+          <p:cNvSpPr>
+            <a:spLocks xmlns:a="http://schemas.openxmlformats.org/drawingml/2006/main" noGrp="1"/>
+          </p:cNvSpPr>
+          <p:nvPr/>
+        </p:nvSpPr>
+        <p:spPr>
+          <a:xfrm xmlns:a="http://schemas.openxmlformats.org/drawingml/2006/main">
+            <a:off x="685800" y="4876800"/>
+            <a:ext cx="57150" cy="1047750"/>
           </a:xfrm>
           <a:prstGeom xmlns:a="http://schemas.openxmlformats.org/drawingml/2006/main" prst="rect">
             <a:avLst/>
@@ -9212,73 +10441,22 @@
       </p:sp>
       <p:sp>
         <p:nvSpPr>
-          <p:cNvPr id="12" name="">
-            <a:extLst xmlns:a="http://schemas.openxmlformats.org/drawingml/2006/main">
-              <a:ext uri="{FF2B5EF4-FFF2-40B4-BE49-F238E27FC236}">
-                <a16:creationId xmlns:a16="http://schemas.microsoft.com/office/drawing/2014/main" id="{4A53FEC5-E103-411A-B2B7-DA9485350E51}"/>
-              </a:ext>
-            </a:extLst>
-          </p:cNvPr>
-          <p:cNvSpPr>
-            <a:spLocks xmlns:a="http://schemas.openxmlformats.org/drawingml/2006/main" noGrp="1"/>
-          </p:cNvSpPr>
-          <p:nvPr/>
-        </p:nvSpPr>
-        <p:spPr>
-          <a:xfrm xmlns:a="http://schemas.openxmlformats.org/drawingml/2006/main">
-            <a:off x="3067050" y="2962275"/>
-            <a:ext cx="419100" cy="285750"/>
-          </a:xfrm>
-          <a:prstGeom xmlns:a="http://schemas.openxmlformats.org/drawingml/2006/main" prst="rect">
-            <a:avLst/>
-          </a:prstGeom>
-          <a:ln xmlns:a="http://schemas.openxmlformats.org/drawingml/2006/main" w="0">
-            <a:solidFill>
-              <a:srgbClr val="FFFFFF"/>
-            </a:solidFill>
-            <a:prstDash val="solid"/>
-          </a:ln>
-        </p:spPr>
-        <p:txBody>
-          <a:bodyPr xmlns:a="http://schemas.openxmlformats.org/drawingml/2006/main" anchor="t"/>
-          <a:lstStyle xmlns:a="http://schemas.openxmlformats.org/drawingml/2006/main"/>
-          <a:p xmlns:a="http://schemas.openxmlformats.org/drawingml/2006/main">
-            <a:pPr algn="ctr">
-              <a:defRPr sz="1500" b="1">
-                <a:solidFill>
-                  <a:srgbClr val="FFFFFF"/>
-                </a:solidFill>
-              </a:defRPr>
-            </a:pPr>
-            <a:r>
-              <a:rPr sz="1500" b="1">
-                <a:solidFill>
-                  <a:srgbClr val="FFFFFF"/>
-                </a:solidFill>
-              </a:rPr>
-              <a:t>2</a:t>
-            </a:r>
-          </a:p>
-        </p:txBody>
-      </p:sp>
-      <p:sp>
-        <p:nvSpPr>
-          <p:cNvPr id="13" name="">
-            <a:extLst xmlns:a="http://schemas.openxmlformats.org/drawingml/2006/main">
-              <a:ext uri="{FF2B5EF4-FFF2-40B4-BE49-F238E27FC236}">
-                <a16:creationId xmlns:a16="http://schemas.microsoft.com/office/drawing/2014/main" id="{210A2E50-46A9-4E17-BF48-7ED1B5C994C6}"/>
-              </a:ext>
-            </a:extLst>
-          </p:cNvPr>
-          <p:cNvSpPr>
-            <a:spLocks xmlns:a="http://schemas.openxmlformats.org/drawingml/2006/main" noGrp="1"/>
-          </p:cNvSpPr>
-          <p:nvPr/>
-        </p:nvSpPr>
-        <p:spPr>
-          <a:xfrm xmlns:a="http://schemas.openxmlformats.org/drawingml/2006/main">
-            <a:off x="3067050" y="3524250"/>
-            <a:ext cx="1295400" cy="304800"/>
+          <p:cNvPr id="15" name="">
+            <a:extLst xmlns:a="http://schemas.openxmlformats.org/drawingml/2006/main">
+              <a:ext uri="{FF2B5EF4-FFF2-40B4-BE49-F238E27FC236}">
+                <a16:creationId xmlns:a16="http://schemas.microsoft.com/office/drawing/2014/main" id="{56B88FD0-E55B-4072-ACB2-5E8DDBA3D601}"/>
+              </a:ext>
+            </a:extLst>
+          </p:cNvPr>
+          <p:cNvSpPr>
+            <a:spLocks xmlns:a="http://schemas.openxmlformats.org/drawingml/2006/main" noGrp="1"/>
+          </p:cNvSpPr>
+          <p:nvPr/>
+        </p:nvSpPr>
+        <p:spPr>
+          <a:xfrm xmlns:a="http://schemas.openxmlformats.org/drawingml/2006/main">
+            <a:off x="914400" y="5067300"/>
+            <a:ext cx="10439400" cy="285750"/>
           </a:xfrm>
           <a:prstGeom xmlns:a="http://schemas.openxmlformats.org/drawingml/2006/main" prst="rect">
             <a:avLst/>
@@ -9295,41 +10473,92 @@
           <a:lstStyle xmlns:a="http://schemas.openxmlformats.org/drawingml/2006/main"/>
           <a:p xmlns:a="http://schemas.openxmlformats.org/drawingml/2006/main">
             <a:pPr algn="l">
-              <a:defRPr sz="1275" b="1">
+              <a:defRPr sz="1350" b="1">
                 <a:solidFill>
                   <a:srgbClr val="172033"/>
                 </a:solidFill>
               </a:defRPr>
             </a:pPr>
             <a:r>
-              <a:rPr sz="1275" b="1">
+              <a:rPr sz="1350" b="1">
                 <a:solidFill>
                   <a:srgbClr val="172033"/>
                 </a:solidFill>
               </a:rPr>
-              <a:t>Approve SOW</a:t>
-            </a:r>
-          </a:p>
-        </p:txBody>
-      </p:sp>
-      <p:sp>
-        <p:nvSpPr>
-          <p:cNvPr id="14" name="">
-            <a:extLst xmlns:a="http://schemas.openxmlformats.org/drawingml/2006/main">
-              <a:ext uri="{FF2B5EF4-FFF2-40B4-BE49-F238E27FC236}">
-                <a16:creationId xmlns:a16="http://schemas.microsoft.com/office/drawing/2014/main" id="{BB41EFDA-9662-4466-AE8F-243FCDC7183D}"/>
-              </a:ext>
-            </a:extLst>
-          </p:cNvPr>
-          <p:cNvSpPr>
-            <a:spLocks xmlns:a="http://schemas.openxmlformats.org/drawingml/2006/main" noGrp="1"/>
-          </p:cNvSpPr>
-          <p:nvPr/>
-        </p:nvSpPr>
-        <p:spPr>
-          <a:xfrm xmlns:a="http://schemas.openxmlformats.org/drawingml/2006/main">
-            <a:off x="3067050" y="3905250"/>
-            <a:ext cx="1295400" cy="742950"/>
+              <a:t>Also in the product</a:t>
+            </a:r>
+          </a:p>
+        </p:txBody>
+      </p:sp>
+      <p:sp>
+        <p:nvSpPr>
+          <p:cNvPr id="16" name="">
+            <a:extLst xmlns:a="http://schemas.openxmlformats.org/drawingml/2006/main">
+              <a:ext uri="{FF2B5EF4-FFF2-40B4-BE49-F238E27FC236}">
+                <a16:creationId xmlns:a16="http://schemas.microsoft.com/office/drawing/2014/main" id="{27D89E78-6C89-4F1F-B73F-FD2A7EA27D4E}"/>
+              </a:ext>
+            </a:extLst>
+          </p:cNvPr>
+          <p:cNvSpPr>
+            <a:spLocks xmlns:a="http://schemas.openxmlformats.org/drawingml/2006/main" noGrp="1"/>
+          </p:cNvSpPr>
+          <p:nvPr/>
+        </p:nvSpPr>
+        <p:spPr>
+          <a:xfrm xmlns:a="http://schemas.openxmlformats.org/drawingml/2006/main">
+            <a:off x="914400" y="5429250"/>
+            <a:ext cx="10420350" cy="361950"/>
+          </a:xfrm>
+          <a:prstGeom xmlns:a="http://schemas.openxmlformats.org/drawingml/2006/main" prst="rect">
+            <a:avLst/>
+          </a:prstGeom>
+          <a:ln xmlns:a="http://schemas.openxmlformats.org/drawingml/2006/main" w="0">
+            <a:solidFill>
+              <a:srgbClr val="FFFFFF"/>
+            </a:solidFill>
+            <a:prstDash val="solid"/>
+          </a:ln>
+        </p:spPr>
+        <p:txBody>
+          <a:bodyPr xmlns:a="http://schemas.openxmlformats.org/drawingml/2006/main" anchor="t"/>
+          <a:lstStyle xmlns:a="http://schemas.openxmlformats.org/drawingml/2006/main"/>
+          <a:p xmlns:a="http://schemas.openxmlformats.org/drawingml/2006/main">
+            <a:pPr algn="l">
+              <a:defRPr sz="1050" b="0">
+                <a:solidFill>
+                  <a:srgbClr val="5F6F86"/>
+                </a:solidFill>
+              </a:defRPr>
+            </a:pPr>
+            <a:r>
+              <a:rPr sz="1050" b="0">
+                <a:solidFill>
+                  <a:srgbClr val="5F6F86"/>
+                </a:solidFill>
+              </a:rPr>
+              <a:t>Vendor bills and A/P, customer and vendor directories, A/R + A/P aging, balance sheet, cash flow, journal and trial balance, period close, invoice/bill PDFs, dark mode.</a:t>
+            </a:r>
+          </a:p>
+        </p:txBody>
+      </p:sp>
+      <p:sp>
+        <p:nvSpPr>
+          <p:cNvPr id="17" name="">
+            <a:extLst xmlns:a="http://schemas.openxmlformats.org/drawingml/2006/main">
+              <a:ext uri="{FF2B5EF4-FFF2-40B4-BE49-F238E27FC236}">
+                <a16:creationId xmlns:a16="http://schemas.microsoft.com/office/drawing/2014/main" id="{22F17EB6-D532-49EA-93C5-E75AD9A35620}"/>
+              </a:ext>
+            </a:extLst>
+          </p:cNvPr>
+          <p:cNvSpPr>
+            <a:spLocks xmlns:a="http://schemas.openxmlformats.org/drawingml/2006/main" noGrp="1"/>
+          </p:cNvSpPr>
+          <p:nvPr/>
+        </p:nvSpPr>
+        <p:spPr>
+          <a:xfrm xmlns:a="http://schemas.openxmlformats.org/drawingml/2006/main">
+            <a:off x="685800" y="6400800"/>
+            <a:ext cx="4000500" cy="228600"/>
           </a:xfrm>
           <a:prstGeom xmlns:a="http://schemas.openxmlformats.org/drawingml/2006/main" prst="rect">
             <a:avLst/>
@@ -9348,888 +10577,27 @@
             <a:pPr algn="l">
               <a:defRPr sz="900" b="0">
                 <a:solidFill>
-                  <a:srgbClr val="5F6F86"/>
+                  <a:srgbClr val="7B8798"/>
                 </a:solidFill>
               </a:defRPr>
             </a:pPr>
             <a:r>
               <a:rPr sz="900" b="0">
                 <a:solidFill>
-                  <a:srgbClr val="5F6F86"/>
-                </a:solidFill>
-              </a:rPr>
-              <a:t>Name the approval owner and target decision date.</a:t>
-            </a:r>
-          </a:p>
-        </p:txBody>
-      </p:sp>
-      <p:sp>
-        <p:nvSpPr>
-          <p:cNvPr id="15" name="">
-            <a:extLst xmlns:a="http://schemas.openxmlformats.org/drawingml/2006/main">
-              <a:ext uri="{FF2B5EF4-FFF2-40B4-BE49-F238E27FC236}">
-                <a16:creationId xmlns:a16="http://schemas.microsoft.com/office/drawing/2014/main" id="{7617AD14-D47E-4F88-82FF-8A5E86314AF1}"/>
-              </a:ext>
-            </a:extLst>
-          </p:cNvPr>
-          <p:cNvSpPr>
-            <a:spLocks xmlns:a="http://schemas.openxmlformats.org/drawingml/2006/main" noGrp="1"/>
-          </p:cNvSpPr>
-          <p:nvPr/>
-        </p:nvSpPr>
-        <p:spPr>
-          <a:xfrm xmlns:a="http://schemas.openxmlformats.org/drawingml/2006/main">
-            <a:off x="4648200" y="3314700"/>
-            <a:ext cx="323850" cy="323850"/>
-          </a:xfrm>
-          <a:prstGeom xmlns:a="http://schemas.openxmlformats.org/drawingml/2006/main" prst="rect">
-            <a:avLst/>
-          </a:prstGeom>
-          <a:ln xmlns:a="http://schemas.openxmlformats.org/drawingml/2006/main" w="0">
-            <a:solidFill>
-              <a:srgbClr val="FFFFFF"/>
-            </a:solidFill>
-            <a:prstDash val="solid"/>
-          </a:ln>
-        </p:spPr>
-        <p:txBody>
-          <a:bodyPr xmlns:a="http://schemas.openxmlformats.org/drawingml/2006/main" anchor="ctr"/>
-          <a:lstStyle xmlns:a="http://schemas.openxmlformats.org/drawingml/2006/main"/>
-          <a:p xmlns:a="http://schemas.openxmlformats.org/drawingml/2006/main">
-            <a:pPr algn="ctr">
-              <a:defRPr sz="1650" b="1">
-                <a:solidFill>
-                  <a:srgbClr val="145DA0"/>
-                </a:solidFill>
-              </a:defRPr>
-            </a:pPr>
-            <a:r>
-              <a:rPr sz="1650" b="1">
-                <a:solidFill>
-                  <a:srgbClr val="145DA0"/>
-                </a:solidFill>
-              </a:rPr>
-              <a:t>-&gt;</a:t>
-            </a:r>
-          </a:p>
-        </p:txBody>
-      </p:sp>
-      <p:sp>
-        <p:nvSpPr>
-          <p:cNvPr id="16" name="">
-            <a:extLst xmlns:a="http://schemas.openxmlformats.org/drawingml/2006/main">
-              <a:ext uri="{FF2B5EF4-FFF2-40B4-BE49-F238E27FC236}">
-                <a16:creationId xmlns:a16="http://schemas.microsoft.com/office/drawing/2014/main" id="{494A4E22-CD49-4362-8EDC-3A87A0EDCDDC}"/>
-              </a:ext>
-            </a:extLst>
-          </p:cNvPr>
-          <p:cNvSpPr>
-            <a:spLocks xmlns:a="http://schemas.openxmlformats.org/drawingml/2006/main" noGrp="1"/>
-          </p:cNvSpPr>
-          <p:nvPr/>
-        </p:nvSpPr>
-        <p:spPr>
-          <a:xfrm xmlns:a="http://schemas.openxmlformats.org/drawingml/2006/main">
-            <a:off x="5105400" y="2667000"/>
-            <a:ext cx="1676400" cy="1676400"/>
-          </a:xfrm>
-          <a:prstGeom xmlns:a="http://schemas.openxmlformats.org/drawingml/2006/main" prst="rect">
-            <a:avLst/>
-          </a:prstGeom>
-          <a:solidFill xmlns:a="http://schemas.openxmlformats.org/drawingml/2006/main">
-            <a:srgbClr val="FFFFFF"/>
-          </a:solidFill>
-          <a:ln xmlns:a="http://schemas.openxmlformats.org/drawingml/2006/main" w="0">
-            <a:solidFill>
-              <a:srgbClr val="D8E2ED"/>
-            </a:solidFill>
-            <a:prstDash val="solid"/>
-          </a:ln>
-        </p:spPr>
-      </p:sp>
-      <p:sp>
-        <p:nvSpPr>
-          <p:cNvPr id="17" name="">
-            <a:extLst xmlns:a="http://schemas.openxmlformats.org/drawingml/2006/main">
-              <a:ext uri="{FF2B5EF4-FFF2-40B4-BE49-F238E27FC236}">
-                <a16:creationId xmlns:a16="http://schemas.microsoft.com/office/drawing/2014/main" id="{B0D329D8-854C-4EF6-AF36-3459ADF187AD}"/>
-              </a:ext>
-            </a:extLst>
-          </p:cNvPr>
-          <p:cNvSpPr>
-            <a:spLocks xmlns:a="http://schemas.openxmlformats.org/drawingml/2006/main" noGrp="1"/>
-          </p:cNvSpPr>
-          <p:nvPr/>
-        </p:nvSpPr>
-        <p:spPr>
-          <a:xfrm xmlns:a="http://schemas.openxmlformats.org/drawingml/2006/main">
-            <a:off x="5276850" y="2895600"/>
-            <a:ext cx="419100" cy="419100"/>
-          </a:xfrm>
-          <a:prstGeom xmlns:a="http://schemas.openxmlformats.org/drawingml/2006/main" prst="rect">
-            <a:avLst/>
-          </a:prstGeom>
-          <a:solidFill xmlns:a="http://schemas.openxmlformats.org/drawingml/2006/main">
-            <a:srgbClr val="D98C16"/>
-          </a:solidFill>
-          <a:ln xmlns:a="http://schemas.openxmlformats.org/drawingml/2006/main" w="0">
-            <a:solidFill>
-              <a:srgbClr val="D98C16"/>
-            </a:solidFill>
-            <a:prstDash val="solid"/>
-          </a:ln>
-        </p:spPr>
+                  <a:srgbClr val="7B8798"/>
+                </a:solidFill>
+              </a:rPr>
+              <a:t>Blueprint Books for Raves</a:t>
+            </a:r>
+          </a:p>
+        </p:txBody>
       </p:sp>
       <p:sp>
         <p:nvSpPr>
           <p:cNvPr id="18" name="">
             <a:extLst xmlns:a="http://schemas.openxmlformats.org/drawingml/2006/main">
               <a:ext uri="{FF2B5EF4-FFF2-40B4-BE49-F238E27FC236}">
-                <a16:creationId xmlns:a16="http://schemas.microsoft.com/office/drawing/2014/main" id="{315C2873-C70B-4A18-A316-57F7CE7DA828}"/>
-              </a:ext>
-            </a:extLst>
-          </p:cNvPr>
-          <p:cNvSpPr>
-            <a:spLocks xmlns:a="http://schemas.openxmlformats.org/drawingml/2006/main" noGrp="1"/>
-          </p:cNvSpPr>
-          <p:nvPr/>
-        </p:nvSpPr>
-        <p:spPr>
-          <a:xfrm xmlns:a="http://schemas.openxmlformats.org/drawingml/2006/main">
-            <a:off x="5276850" y="2962275"/>
-            <a:ext cx="419100" cy="285750"/>
-          </a:xfrm>
-          <a:prstGeom xmlns:a="http://schemas.openxmlformats.org/drawingml/2006/main" prst="rect">
-            <a:avLst/>
-          </a:prstGeom>
-          <a:ln xmlns:a="http://schemas.openxmlformats.org/drawingml/2006/main" w="0">
-            <a:solidFill>
-              <a:srgbClr val="FFFFFF"/>
-            </a:solidFill>
-            <a:prstDash val="solid"/>
-          </a:ln>
-        </p:spPr>
-        <p:txBody>
-          <a:bodyPr xmlns:a="http://schemas.openxmlformats.org/drawingml/2006/main" anchor="t"/>
-          <a:lstStyle xmlns:a="http://schemas.openxmlformats.org/drawingml/2006/main"/>
-          <a:p xmlns:a="http://schemas.openxmlformats.org/drawingml/2006/main">
-            <a:pPr algn="ctr">
-              <a:defRPr sz="1500" b="1">
-                <a:solidFill>
-                  <a:srgbClr val="FFFFFF"/>
-                </a:solidFill>
-              </a:defRPr>
-            </a:pPr>
-            <a:r>
-              <a:rPr sz="1500" b="1">
-                <a:solidFill>
-                  <a:srgbClr val="FFFFFF"/>
-                </a:solidFill>
-              </a:rPr>
-              <a:t>3</a:t>
-            </a:r>
-          </a:p>
-        </p:txBody>
-      </p:sp>
-      <p:sp>
-        <p:nvSpPr>
-          <p:cNvPr id="19" name="">
-            <a:extLst xmlns:a="http://schemas.openxmlformats.org/drawingml/2006/main">
-              <a:ext uri="{FF2B5EF4-FFF2-40B4-BE49-F238E27FC236}">
-                <a16:creationId xmlns:a16="http://schemas.microsoft.com/office/drawing/2014/main" id="{48935C07-3DC0-4839-A15F-CEB67CC04FA1}"/>
-              </a:ext>
-            </a:extLst>
-          </p:cNvPr>
-          <p:cNvSpPr>
-            <a:spLocks xmlns:a="http://schemas.openxmlformats.org/drawingml/2006/main" noGrp="1"/>
-          </p:cNvSpPr>
-          <p:nvPr/>
-        </p:nvSpPr>
-        <p:spPr>
-          <a:xfrm xmlns:a="http://schemas.openxmlformats.org/drawingml/2006/main">
-            <a:off x="5276850" y="3524250"/>
-            <a:ext cx="1295400" cy="304800"/>
-          </a:xfrm>
-          <a:prstGeom xmlns:a="http://schemas.openxmlformats.org/drawingml/2006/main" prst="rect">
-            <a:avLst/>
-          </a:prstGeom>
-          <a:ln xmlns:a="http://schemas.openxmlformats.org/drawingml/2006/main" w="0">
-            <a:solidFill>
-              <a:srgbClr val="FFFFFF"/>
-            </a:solidFill>
-            <a:prstDash val="solid"/>
-          </a:ln>
-        </p:spPr>
-        <p:txBody>
-          <a:bodyPr xmlns:a="http://schemas.openxmlformats.org/drawingml/2006/main" anchor="t"/>
-          <a:lstStyle xmlns:a="http://schemas.openxmlformats.org/drawingml/2006/main"/>
-          <a:p xmlns:a="http://schemas.openxmlformats.org/drawingml/2006/main">
-            <a:pPr algn="l">
-              <a:defRPr sz="1275" b="1">
-                <a:solidFill>
-                  <a:srgbClr val="172033"/>
-                </a:solidFill>
-              </a:defRPr>
-            </a:pPr>
-            <a:r>
-              <a:rPr sz="1275" b="1">
-                <a:solidFill>
-                  <a:srgbClr val="172033"/>
-                </a:solidFill>
-              </a:rPr>
-              <a:t>Confirm inputs</a:t>
-            </a:r>
-          </a:p>
-        </p:txBody>
-      </p:sp>
-      <p:sp>
-        <p:nvSpPr>
-          <p:cNvPr id="20" name="">
-            <a:extLst xmlns:a="http://schemas.openxmlformats.org/drawingml/2006/main">
-              <a:ext uri="{FF2B5EF4-FFF2-40B4-BE49-F238E27FC236}">
-                <a16:creationId xmlns:a16="http://schemas.microsoft.com/office/drawing/2014/main" id="{FFE87362-C655-4F6C-A01E-E69F8E4A4FE3}"/>
-              </a:ext>
-            </a:extLst>
-          </p:cNvPr>
-          <p:cNvSpPr>
-            <a:spLocks xmlns:a="http://schemas.openxmlformats.org/drawingml/2006/main" noGrp="1"/>
-          </p:cNvSpPr>
-          <p:nvPr/>
-        </p:nvSpPr>
-        <p:spPr>
-          <a:xfrm xmlns:a="http://schemas.openxmlformats.org/drawingml/2006/main">
-            <a:off x="5276850" y="3905250"/>
-            <a:ext cx="1295400" cy="742950"/>
-          </a:xfrm>
-          <a:prstGeom xmlns:a="http://schemas.openxmlformats.org/drawingml/2006/main" prst="rect">
-            <a:avLst/>
-          </a:prstGeom>
-          <a:ln xmlns:a="http://schemas.openxmlformats.org/drawingml/2006/main" w="0">
-            <a:solidFill>
-              <a:srgbClr val="FFFFFF"/>
-            </a:solidFill>
-            <a:prstDash val="solid"/>
-          </a:ln>
-        </p:spPr>
-        <p:txBody>
-          <a:bodyPr xmlns:a="http://schemas.openxmlformats.org/drawingml/2006/main" anchor="t"/>
-          <a:lstStyle xmlns:a="http://schemas.openxmlformats.org/drawingml/2006/main"/>
-          <a:p xmlns:a="http://schemas.openxmlformats.org/drawingml/2006/main">
-            <a:pPr algn="l">
-              <a:defRPr sz="900" b="0">
-                <a:solidFill>
-                  <a:srgbClr val="5F6F86"/>
-                </a:solidFill>
-              </a:defRPr>
-            </a:pPr>
-            <a:r>
-              <a:rPr sz="900" b="0">
-                <a:solidFill>
-                  <a:srgbClr val="5F6F86"/>
-                </a:solidFill>
-              </a:rPr>
-              <a:t>Accounting owner, opening balances, chart-of-accounts review, and tax/entity basics.</a:t>
-            </a:r>
-          </a:p>
-        </p:txBody>
-      </p:sp>
-      <p:sp>
-        <p:nvSpPr>
-          <p:cNvPr id="21" name="">
-            <a:extLst xmlns:a="http://schemas.openxmlformats.org/drawingml/2006/main">
-              <a:ext uri="{FF2B5EF4-FFF2-40B4-BE49-F238E27FC236}">
-                <a16:creationId xmlns:a16="http://schemas.microsoft.com/office/drawing/2014/main" id="{1B67F3B6-E6C8-4ADE-A2CA-18F96700A6FB}"/>
-              </a:ext>
-            </a:extLst>
-          </p:cNvPr>
-          <p:cNvSpPr>
-            <a:spLocks xmlns:a="http://schemas.openxmlformats.org/drawingml/2006/main" noGrp="1"/>
-          </p:cNvSpPr>
-          <p:nvPr/>
-        </p:nvSpPr>
-        <p:spPr>
-          <a:xfrm xmlns:a="http://schemas.openxmlformats.org/drawingml/2006/main">
-            <a:off x="6858000" y="3314700"/>
-            <a:ext cx="323850" cy="323850"/>
-          </a:xfrm>
-          <a:prstGeom xmlns:a="http://schemas.openxmlformats.org/drawingml/2006/main" prst="rect">
-            <a:avLst/>
-          </a:prstGeom>
-          <a:ln xmlns:a="http://schemas.openxmlformats.org/drawingml/2006/main" w="0">
-            <a:solidFill>
-              <a:srgbClr val="FFFFFF"/>
-            </a:solidFill>
-            <a:prstDash val="solid"/>
-          </a:ln>
-        </p:spPr>
-        <p:txBody>
-          <a:bodyPr xmlns:a="http://schemas.openxmlformats.org/drawingml/2006/main" anchor="ctr"/>
-          <a:lstStyle xmlns:a="http://schemas.openxmlformats.org/drawingml/2006/main"/>
-          <a:p xmlns:a="http://schemas.openxmlformats.org/drawingml/2006/main">
-            <a:pPr algn="ctr">
-              <a:defRPr sz="1650" b="1">
-                <a:solidFill>
-                  <a:srgbClr val="145DA0"/>
-                </a:solidFill>
-              </a:defRPr>
-            </a:pPr>
-            <a:r>
-              <a:rPr sz="1650" b="1">
-                <a:solidFill>
-                  <a:srgbClr val="145DA0"/>
-                </a:solidFill>
-              </a:rPr>
-              <a:t>-&gt;</a:t>
-            </a:r>
-          </a:p>
-        </p:txBody>
-      </p:sp>
-      <p:sp>
-        <p:nvSpPr>
-          <p:cNvPr id="22" name="">
-            <a:extLst xmlns:a="http://schemas.openxmlformats.org/drawingml/2006/main">
-              <a:ext uri="{FF2B5EF4-FFF2-40B4-BE49-F238E27FC236}">
-                <a16:creationId xmlns:a16="http://schemas.microsoft.com/office/drawing/2014/main" id="{656A2267-8991-473D-817C-DAFD4D4CB305}"/>
-              </a:ext>
-            </a:extLst>
-          </p:cNvPr>
-          <p:cNvSpPr>
-            <a:spLocks xmlns:a="http://schemas.openxmlformats.org/drawingml/2006/main" noGrp="1"/>
-          </p:cNvSpPr>
-          <p:nvPr/>
-        </p:nvSpPr>
-        <p:spPr>
-          <a:xfrm xmlns:a="http://schemas.openxmlformats.org/drawingml/2006/main">
-            <a:off x="7315200" y="2667000"/>
-            <a:ext cx="1676400" cy="1676400"/>
-          </a:xfrm>
-          <a:prstGeom xmlns:a="http://schemas.openxmlformats.org/drawingml/2006/main" prst="rect">
-            <a:avLst/>
-          </a:prstGeom>
-          <a:solidFill xmlns:a="http://schemas.openxmlformats.org/drawingml/2006/main">
-            <a:srgbClr val="FFFFFF"/>
-          </a:solidFill>
-          <a:ln xmlns:a="http://schemas.openxmlformats.org/drawingml/2006/main" w="0">
-            <a:solidFill>
-              <a:srgbClr val="D8E2ED"/>
-            </a:solidFill>
-            <a:prstDash val="solid"/>
-          </a:ln>
-        </p:spPr>
-      </p:sp>
-      <p:sp>
-        <p:nvSpPr>
-          <p:cNvPr id="23" name="">
-            <a:extLst xmlns:a="http://schemas.openxmlformats.org/drawingml/2006/main">
-              <a:ext uri="{FF2B5EF4-FFF2-40B4-BE49-F238E27FC236}">
-                <a16:creationId xmlns:a16="http://schemas.microsoft.com/office/drawing/2014/main" id="{45FF0EDE-14EB-4176-9752-876BCE6A82A5}"/>
-              </a:ext>
-            </a:extLst>
-          </p:cNvPr>
-          <p:cNvSpPr>
-            <a:spLocks xmlns:a="http://schemas.openxmlformats.org/drawingml/2006/main" noGrp="1"/>
-          </p:cNvSpPr>
-          <p:nvPr/>
-        </p:nvSpPr>
-        <p:spPr>
-          <a:xfrm xmlns:a="http://schemas.openxmlformats.org/drawingml/2006/main">
-            <a:off x="7486650" y="2895600"/>
-            <a:ext cx="419100" cy="419100"/>
-          </a:xfrm>
-          <a:prstGeom xmlns:a="http://schemas.openxmlformats.org/drawingml/2006/main" prst="rect">
-            <a:avLst/>
-          </a:prstGeom>
-          <a:solidFill xmlns:a="http://schemas.openxmlformats.org/drawingml/2006/main">
-            <a:srgbClr val="23A6D5"/>
-          </a:solidFill>
-          <a:ln xmlns:a="http://schemas.openxmlformats.org/drawingml/2006/main" w="0">
-            <a:solidFill>
-              <a:srgbClr val="23A6D5"/>
-            </a:solidFill>
-            <a:prstDash val="solid"/>
-          </a:ln>
-        </p:spPr>
-      </p:sp>
-      <p:sp>
-        <p:nvSpPr>
-          <p:cNvPr id="24" name="">
-            <a:extLst xmlns:a="http://schemas.openxmlformats.org/drawingml/2006/main">
-              <a:ext uri="{FF2B5EF4-FFF2-40B4-BE49-F238E27FC236}">
-                <a16:creationId xmlns:a16="http://schemas.microsoft.com/office/drawing/2014/main" id="{72C54F7A-20E8-4346-BD77-A21E6EADE684}"/>
-              </a:ext>
-            </a:extLst>
-          </p:cNvPr>
-          <p:cNvSpPr>
-            <a:spLocks xmlns:a="http://schemas.openxmlformats.org/drawingml/2006/main" noGrp="1"/>
-          </p:cNvSpPr>
-          <p:nvPr/>
-        </p:nvSpPr>
-        <p:spPr>
-          <a:xfrm xmlns:a="http://schemas.openxmlformats.org/drawingml/2006/main">
-            <a:off x="7486650" y="2962275"/>
-            <a:ext cx="419100" cy="285750"/>
-          </a:xfrm>
-          <a:prstGeom xmlns:a="http://schemas.openxmlformats.org/drawingml/2006/main" prst="rect">
-            <a:avLst/>
-          </a:prstGeom>
-          <a:ln xmlns:a="http://schemas.openxmlformats.org/drawingml/2006/main" w="0">
-            <a:solidFill>
-              <a:srgbClr val="FFFFFF"/>
-            </a:solidFill>
-            <a:prstDash val="solid"/>
-          </a:ln>
-        </p:spPr>
-        <p:txBody>
-          <a:bodyPr xmlns:a="http://schemas.openxmlformats.org/drawingml/2006/main" anchor="t"/>
-          <a:lstStyle xmlns:a="http://schemas.openxmlformats.org/drawingml/2006/main"/>
-          <a:p xmlns:a="http://schemas.openxmlformats.org/drawingml/2006/main">
-            <a:pPr algn="ctr">
-              <a:defRPr sz="1500" b="1">
-                <a:solidFill>
-                  <a:srgbClr val="FFFFFF"/>
-                </a:solidFill>
-              </a:defRPr>
-            </a:pPr>
-            <a:r>
-              <a:rPr sz="1500" b="1">
-                <a:solidFill>
-                  <a:srgbClr val="FFFFFF"/>
-                </a:solidFill>
-              </a:rPr>
-              <a:t>4</a:t>
-            </a:r>
-          </a:p>
-        </p:txBody>
-      </p:sp>
-      <p:sp>
-        <p:nvSpPr>
-          <p:cNvPr id="25" name="">
-            <a:extLst xmlns:a="http://schemas.openxmlformats.org/drawingml/2006/main">
-              <a:ext uri="{FF2B5EF4-FFF2-40B4-BE49-F238E27FC236}">
-                <a16:creationId xmlns:a16="http://schemas.microsoft.com/office/drawing/2014/main" id="{F83A5393-A83B-4F98-AACA-EBE2D9E7BE38}"/>
-              </a:ext>
-            </a:extLst>
-          </p:cNvPr>
-          <p:cNvSpPr>
-            <a:spLocks xmlns:a="http://schemas.openxmlformats.org/drawingml/2006/main" noGrp="1"/>
-          </p:cNvSpPr>
-          <p:nvPr/>
-        </p:nvSpPr>
-        <p:spPr>
-          <a:xfrm xmlns:a="http://schemas.openxmlformats.org/drawingml/2006/main">
-            <a:off x="7486650" y="3524250"/>
-            <a:ext cx="1295400" cy="304800"/>
-          </a:xfrm>
-          <a:prstGeom xmlns:a="http://schemas.openxmlformats.org/drawingml/2006/main" prst="rect">
-            <a:avLst/>
-          </a:prstGeom>
-          <a:ln xmlns:a="http://schemas.openxmlformats.org/drawingml/2006/main" w="0">
-            <a:solidFill>
-              <a:srgbClr val="FFFFFF"/>
-            </a:solidFill>
-            <a:prstDash val="solid"/>
-          </a:ln>
-        </p:spPr>
-        <p:txBody>
-          <a:bodyPr xmlns:a="http://schemas.openxmlformats.org/drawingml/2006/main" anchor="t"/>
-          <a:lstStyle xmlns:a="http://schemas.openxmlformats.org/drawingml/2006/main"/>
-          <a:p xmlns:a="http://schemas.openxmlformats.org/drawingml/2006/main">
-            <a:pPr algn="l">
-              <a:defRPr sz="1275" b="1">
-                <a:solidFill>
-                  <a:srgbClr val="172033"/>
-                </a:solidFill>
-              </a:defRPr>
-            </a:pPr>
-            <a:r>
-              <a:rPr sz="1275" b="1">
-                <a:solidFill>
-                  <a:srgbClr val="172033"/>
-                </a:solidFill>
-              </a:rPr>
-              <a:t>Implement</a:t>
-            </a:r>
-          </a:p>
-        </p:txBody>
-      </p:sp>
-      <p:sp>
-        <p:nvSpPr>
-          <p:cNvPr id="26" name="">
-            <a:extLst xmlns:a="http://schemas.openxmlformats.org/drawingml/2006/main">
-              <a:ext uri="{FF2B5EF4-FFF2-40B4-BE49-F238E27FC236}">
-                <a16:creationId xmlns:a16="http://schemas.microsoft.com/office/drawing/2014/main" id="{E7C90377-4FCA-4F0F-8BC0-02D4D6774C3E}"/>
-              </a:ext>
-            </a:extLst>
-          </p:cNvPr>
-          <p:cNvSpPr>
-            <a:spLocks xmlns:a="http://schemas.openxmlformats.org/drawingml/2006/main" noGrp="1"/>
-          </p:cNvSpPr>
-          <p:nvPr/>
-        </p:nvSpPr>
-        <p:spPr>
-          <a:xfrm xmlns:a="http://schemas.openxmlformats.org/drawingml/2006/main">
-            <a:off x="7486650" y="3905250"/>
-            <a:ext cx="1295400" cy="742950"/>
-          </a:xfrm>
-          <a:prstGeom xmlns:a="http://schemas.openxmlformats.org/drawingml/2006/main" prst="rect">
-            <a:avLst/>
-          </a:prstGeom>
-          <a:ln xmlns:a="http://schemas.openxmlformats.org/drawingml/2006/main" w="0">
-            <a:solidFill>
-              <a:srgbClr val="FFFFFF"/>
-            </a:solidFill>
-            <a:prstDash val="solid"/>
-          </a:ln>
-        </p:spPr>
-        <p:txBody>
-          <a:bodyPr xmlns:a="http://schemas.openxmlformats.org/drawingml/2006/main" anchor="t"/>
-          <a:lstStyle xmlns:a="http://schemas.openxmlformats.org/drawingml/2006/main"/>
-          <a:p xmlns:a="http://schemas.openxmlformats.org/drawingml/2006/main">
-            <a:pPr algn="l">
-              <a:defRPr sz="900" b="0">
-                <a:solidFill>
-                  <a:srgbClr val="5F6F86"/>
-                </a:solidFill>
-              </a:defRPr>
-            </a:pPr>
-            <a:r>
-              <a:rPr sz="900" b="0">
-                <a:solidFill>
-                  <a:srgbClr val="5F6F86"/>
-                </a:solidFill>
-              </a:rPr>
-              <a:t>Tailor the books, load opening balances, wire A/R and A/P, and train the team.</a:t>
-            </a:r>
-          </a:p>
-        </p:txBody>
-      </p:sp>
-      <p:sp>
-        <p:nvSpPr>
-          <p:cNvPr id="27" name="">
-            <a:extLst xmlns:a="http://schemas.openxmlformats.org/drawingml/2006/main">
-              <a:ext uri="{FF2B5EF4-FFF2-40B4-BE49-F238E27FC236}">
-                <a16:creationId xmlns:a16="http://schemas.microsoft.com/office/drawing/2014/main" id="{4B0DC221-DD03-46CE-AC48-0D0CF70C7ADC}"/>
-              </a:ext>
-            </a:extLst>
-          </p:cNvPr>
-          <p:cNvSpPr>
-            <a:spLocks xmlns:a="http://schemas.openxmlformats.org/drawingml/2006/main" noGrp="1"/>
-          </p:cNvSpPr>
-          <p:nvPr/>
-        </p:nvSpPr>
-        <p:spPr>
-          <a:xfrm xmlns:a="http://schemas.openxmlformats.org/drawingml/2006/main">
-            <a:off x="9067800" y="3314700"/>
-            <a:ext cx="323850" cy="323850"/>
-          </a:xfrm>
-          <a:prstGeom xmlns:a="http://schemas.openxmlformats.org/drawingml/2006/main" prst="rect">
-            <a:avLst/>
-          </a:prstGeom>
-          <a:ln xmlns:a="http://schemas.openxmlformats.org/drawingml/2006/main" w="0">
-            <a:solidFill>
-              <a:srgbClr val="FFFFFF"/>
-            </a:solidFill>
-            <a:prstDash val="solid"/>
-          </a:ln>
-        </p:spPr>
-        <p:txBody>
-          <a:bodyPr xmlns:a="http://schemas.openxmlformats.org/drawingml/2006/main" anchor="ctr"/>
-          <a:lstStyle xmlns:a="http://schemas.openxmlformats.org/drawingml/2006/main"/>
-          <a:p xmlns:a="http://schemas.openxmlformats.org/drawingml/2006/main">
-            <a:pPr algn="ctr">
-              <a:defRPr sz="1650" b="1">
-                <a:solidFill>
-                  <a:srgbClr val="145DA0"/>
-                </a:solidFill>
-              </a:defRPr>
-            </a:pPr>
-            <a:r>
-              <a:rPr sz="1650" b="1">
-                <a:solidFill>
-                  <a:srgbClr val="145DA0"/>
-                </a:solidFill>
-              </a:rPr>
-              <a:t>-&gt;</a:t>
-            </a:r>
-          </a:p>
-        </p:txBody>
-      </p:sp>
-      <p:sp>
-        <p:nvSpPr>
-          <p:cNvPr id="28" name="">
-            <a:extLst xmlns:a="http://schemas.openxmlformats.org/drawingml/2006/main">
-              <a:ext uri="{FF2B5EF4-FFF2-40B4-BE49-F238E27FC236}">
-                <a16:creationId xmlns:a16="http://schemas.microsoft.com/office/drawing/2014/main" id="{BE95BE77-403B-43CA-A97C-CA4BBD75F2CC}"/>
-              </a:ext>
-            </a:extLst>
-          </p:cNvPr>
-          <p:cNvSpPr>
-            <a:spLocks xmlns:a="http://schemas.openxmlformats.org/drawingml/2006/main" noGrp="1"/>
-          </p:cNvSpPr>
-          <p:nvPr/>
-        </p:nvSpPr>
-        <p:spPr>
-          <a:xfrm xmlns:a="http://schemas.openxmlformats.org/drawingml/2006/main">
-            <a:off x="9525000" y="2667000"/>
-            <a:ext cx="1676400" cy="1676400"/>
-          </a:xfrm>
-          <a:prstGeom xmlns:a="http://schemas.openxmlformats.org/drawingml/2006/main" prst="rect">
-            <a:avLst/>
-          </a:prstGeom>
-          <a:solidFill xmlns:a="http://schemas.openxmlformats.org/drawingml/2006/main">
-            <a:srgbClr val="FFFFFF"/>
-          </a:solidFill>
-          <a:ln xmlns:a="http://schemas.openxmlformats.org/drawingml/2006/main" w="0">
-            <a:solidFill>
-              <a:srgbClr val="D8E2ED"/>
-            </a:solidFill>
-            <a:prstDash val="solid"/>
-          </a:ln>
-        </p:spPr>
-      </p:sp>
-      <p:sp>
-        <p:nvSpPr>
-          <p:cNvPr id="29" name="">
-            <a:extLst xmlns:a="http://schemas.openxmlformats.org/drawingml/2006/main">
-              <a:ext uri="{FF2B5EF4-FFF2-40B4-BE49-F238E27FC236}">
-                <a16:creationId xmlns:a16="http://schemas.microsoft.com/office/drawing/2014/main" id="{31D66969-7142-4597-ABAD-43FC1396D0BD}"/>
-              </a:ext>
-            </a:extLst>
-          </p:cNvPr>
-          <p:cNvSpPr>
-            <a:spLocks xmlns:a="http://schemas.openxmlformats.org/drawingml/2006/main" noGrp="1"/>
-          </p:cNvSpPr>
-          <p:nvPr/>
-        </p:nvSpPr>
-        <p:spPr>
-          <a:xfrm xmlns:a="http://schemas.openxmlformats.org/drawingml/2006/main">
-            <a:off x="9696450" y="2895600"/>
-            <a:ext cx="419100" cy="419100"/>
-          </a:xfrm>
-          <a:prstGeom xmlns:a="http://schemas.openxmlformats.org/drawingml/2006/main" prst="rect">
-            <a:avLst/>
-          </a:prstGeom>
-          <a:solidFill xmlns:a="http://schemas.openxmlformats.org/drawingml/2006/main">
-            <a:srgbClr val="1D7F5F"/>
-          </a:solidFill>
-          <a:ln xmlns:a="http://schemas.openxmlformats.org/drawingml/2006/main" w="0">
-            <a:solidFill>
-              <a:srgbClr val="1D7F5F"/>
-            </a:solidFill>
-            <a:prstDash val="solid"/>
-          </a:ln>
-        </p:spPr>
-      </p:sp>
-      <p:sp>
-        <p:nvSpPr>
-          <p:cNvPr id="30" name="">
-            <a:extLst xmlns:a="http://schemas.openxmlformats.org/drawingml/2006/main">
-              <a:ext uri="{FF2B5EF4-FFF2-40B4-BE49-F238E27FC236}">
-                <a16:creationId xmlns:a16="http://schemas.microsoft.com/office/drawing/2014/main" id="{99F8709C-4A2C-4955-9BF4-2A2012A71588}"/>
-              </a:ext>
-            </a:extLst>
-          </p:cNvPr>
-          <p:cNvSpPr>
-            <a:spLocks xmlns:a="http://schemas.openxmlformats.org/drawingml/2006/main" noGrp="1"/>
-          </p:cNvSpPr>
-          <p:nvPr/>
-        </p:nvSpPr>
-        <p:spPr>
-          <a:xfrm xmlns:a="http://schemas.openxmlformats.org/drawingml/2006/main">
-            <a:off x="9696450" y="2962275"/>
-            <a:ext cx="419100" cy="285750"/>
-          </a:xfrm>
-          <a:prstGeom xmlns:a="http://schemas.openxmlformats.org/drawingml/2006/main" prst="rect">
-            <a:avLst/>
-          </a:prstGeom>
-          <a:ln xmlns:a="http://schemas.openxmlformats.org/drawingml/2006/main" w="0">
-            <a:solidFill>
-              <a:srgbClr val="FFFFFF"/>
-            </a:solidFill>
-            <a:prstDash val="solid"/>
-          </a:ln>
-        </p:spPr>
-        <p:txBody>
-          <a:bodyPr xmlns:a="http://schemas.openxmlformats.org/drawingml/2006/main" anchor="t"/>
-          <a:lstStyle xmlns:a="http://schemas.openxmlformats.org/drawingml/2006/main"/>
-          <a:p xmlns:a="http://schemas.openxmlformats.org/drawingml/2006/main">
-            <a:pPr algn="ctr">
-              <a:defRPr sz="1500" b="1">
-                <a:solidFill>
-                  <a:srgbClr val="FFFFFF"/>
-                </a:solidFill>
-              </a:defRPr>
-            </a:pPr>
-            <a:r>
-              <a:rPr sz="1500" b="1">
-                <a:solidFill>
-                  <a:srgbClr val="FFFFFF"/>
-                </a:solidFill>
-              </a:rPr>
-              <a:t>5</a:t>
-            </a:r>
-          </a:p>
-        </p:txBody>
-      </p:sp>
-      <p:sp>
-        <p:nvSpPr>
-          <p:cNvPr id="31" name="">
-            <a:extLst xmlns:a="http://schemas.openxmlformats.org/drawingml/2006/main">
-              <a:ext uri="{FF2B5EF4-FFF2-40B4-BE49-F238E27FC236}">
-                <a16:creationId xmlns:a16="http://schemas.microsoft.com/office/drawing/2014/main" id="{9A2256C3-E74C-4DC2-B1E1-DE67E7ACAED3}"/>
-              </a:ext>
-            </a:extLst>
-          </p:cNvPr>
-          <p:cNvSpPr>
-            <a:spLocks xmlns:a="http://schemas.openxmlformats.org/drawingml/2006/main" noGrp="1"/>
-          </p:cNvSpPr>
-          <p:nvPr/>
-        </p:nvSpPr>
-        <p:spPr>
-          <a:xfrm xmlns:a="http://schemas.openxmlformats.org/drawingml/2006/main">
-            <a:off x="9696450" y="3524250"/>
-            <a:ext cx="1295400" cy="304800"/>
-          </a:xfrm>
-          <a:prstGeom xmlns:a="http://schemas.openxmlformats.org/drawingml/2006/main" prst="rect">
-            <a:avLst/>
-          </a:prstGeom>
-          <a:ln xmlns:a="http://schemas.openxmlformats.org/drawingml/2006/main" w="0">
-            <a:solidFill>
-              <a:srgbClr val="FFFFFF"/>
-            </a:solidFill>
-            <a:prstDash val="solid"/>
-          </a:ln>
-        </p:spPr>
-        <p:txBody>
-          <a:bodyPr xmlns:a="http://schemas.openxmlformats.org/drawingml/2006/main" anchor="t"/>
-          <a:lstStyle xmlns:a="http://schemas.openxmlformats.org/drawingml/2006/main"/>
-          <a:p xmlns:a="http://schemas.openxmlformats.org/drawingml/2006/main">
-            <a:pPr algn="l">
-              <a:defRPr sz="1275" b="1">
-                <a:solidFill>
-                  <a:srgbClr val="172033"/>
-                </a:solidFill>
-              </a:defRPr>
-            </a:pPr>
-            <a:r>
-              <a:rPr sz="1275" b="1">
-                <a:solidFill>
-                  <a:srgbClr val="172033"/>
-                </a:solidFill>
-              </a:rPr>
-              <a:t>First close</a:t>
-            </a:r>
-          </a:p>
-        </p:txBody>
-      </p:sp>
-      <p:sp>
-        <p:nvSpPr>
-          <p:cNvPr id="32" name="">
-            <a:extLst xmlns:a="http://schemas.openxmlformats.org/drawingml/2006/main">
-              <a:ext uri="{FF2B5EF4-FFF2-40B4-BE49-F238E27FC236}">
-                <a16:creationId xmlns:a16="http://schemas.microsoft.com/office/drawing/2014/main" id="{C223226E-E442-4985-91F5-0338C41F751F}"/>
-              </a:ext>
-            </a:extLst>
-          </p:cNvPr>
-          <p:cNvSpPr>
-            <a:spLocks xmlns:a="http://schemas.openxmlformats.org/drawingml/2006/main" noGrp="1"/>
-          </p:cNvSpPr>
-          <p:nvPr/>
-        </p:nvSpPr>
-        <p:spPr>
-          <a:xfrm xmlns:a="http://schemas.openxmlformats.org/drawingml/2006/main">
-            <a:off x="9696450" y="3905250"/>
-            <a:ext cx="1295400" cy="742950"/>
-          </a:xfrm>
-          <a:prstGeom xmlns:a="http://schemas.openxmlformats.org/drawingml/2006/main" prst="rect">
-            <a:avLst/>
-          </a:prstGeom>
-          <a:ln xmlns:a="http://schemas.openxmlformats.org/drawingml/2006/main" w="0">
-            <a:solidFill>
-              <a:srgbClr val="FFFFFF"/>
-            </a:solidFill>
-            <a:prstDash val="solid"/>
-          </a:ln>
-        </p:spPr>
-        <p:txBody>
-          <a:bodyPr xmlns:a="http://schemas.openxmlformats.org/drawingml/2006/main" anchor="t"/>
-          <a:lstStyle xmlns:a="http://schemas.openxmlformats.org/drawingml/2006/main"/>
-          <a:p xmlns:a="http://schemas.openxmlformats.org/drawingml/2006/main">
-            <a:pPr algn="l">
-              <a:defRPr sz="900" b="0">
-                <a:solidFill>
-                  <a:srgbClr val="5F6F86"/>
-                </a:solidFill>
-              </a:defRPr>
-            </a:pPr>
-            <a:r>
-              <a:rPr sz="900" b="0">
-                <a:solidFill>
-                  <a:srgbClr val="5F6F86"/>
-                </a:solidFill>
-              </a:rPr>
-              <a:t>Run the first month-end in Blueprint and lock the period.</a:t>
-            </a:r>
-          </a:p>
-        </p:txBody>
-      </p:sp>
-      <p:sp>
-        <p:nvSpPr>
-          <p:cNvPr id="33" name="">
-            <a:extLst xmlns:a="http://schemas.openxmlformats.org/drawingml/2006/main">
-              <a:ext uri="{FF2B5EF4-FFF2-40B4-BE49-F238E27FC236}">
-                <a16:creationId xmlns:a16="http://schemas.microsoft.com/office/drawing/2014/main" id="{B21545E4-348C-47BB-816F-3C4135891E3F}"/>
-              </a:ext>
-            </a:extLst>
-          </p:cNvPr>
-          <p:cNvSpPr>
-            <a:spLocks xmlns:a="http://schemas.openxmlformats.org/drawingml/2006/main" noGrp="1"/>
-          </p:cNvSpPr>
-          <p:nvPr/>
-        </p:nvSpPr>
-        <p:spPr>
-          <a:xfrm xmlns:a="http://schemas.openxmlformats.org/drawingml/2006/main">
-            <a:off x="685800" y="6400800"/>
-            <a:ext cx="4000500" cy="228600"/>
-          </a:xfrm>
-          <a:prstGeom xmlns:a="http://schemas.openxmlformats.org/drawingml/2006/main" prst="rect">
-            <a:avLst/>
-          </a:prstGeom>
-          <a:ln xmlns:a="http://schemas.openxmlformats.org/drawingml/2006/main" w="0">
-            <a:solidFill>
-              <a:srgbClr val="FFFFFF"/>
-            </a:solidFill>
-            <a:prstDash val="solid"/>
-          </a:ln>
-        </p:spPr>
-        <p:txBody>
-          <a:bodyPr xmlns:a="http://schemas.openxmlformats.org/drawingml/2006/main" anchor="t"/>
-          <a:lstStyle xmlns:a="http://schemas.openxmlformats.org/drawingml/2006/main"/>
-          <a:p xmlns:a="http://schemas.openxmlformats.org/drawingml/2006/main">
-            <a:pPr algn="l">
-              <a:defRPr sz="900" b="0">
-                <a:solidFill>
-                  <a:srgbClr val="7B8798"/>
-                </a:solidFill>
-              </a:defRPr>
-            </a:pPr>
-            <a:r>
-              <a:rPr sz="900" b="0">
-                <a:solidFill>
-                  <a:srgbClr val="7B8798"/>
-                </a:solidFill>
-              </a:rPr>
-              <a:t>Blueprint Books for Raves</a:t>
-            </a:r>
-          </a:p>
-        </p:txBody>
-      </p:sp>
-      <p:sp>
-        <p:nvSpPr>
-          <p:cNvPr id="34" name="">
-            <a:extLst xmlns:a="http://schemas.openxmlformats.org/drawingml/2006/main">
-              <a:ext uri="{FF2B5EF4-FFF2-40B4-BE49-F238E27FC236}">
-                <a16:creationId xmlns:a16="http://schemas.microsoft.com/office/drawing/2014/main" id="{8ADCAA2C-B943-42CA-8715-071DE0D3550E}"/>
+                <a16:creationId xmlns:a16="http://schemas.microsoft.com/office/drawing/2014/main" id="{82C2CDA1-BD2E-4596-8E99-AD26C4201A9C}"/>
               </a:ext>
             </a:extLst>
           </p:cNvPr>
@@ -10278,7 +10646,7 @@
     </p:spTree>
     <p:extLst>
       <p:ext uri="{BB962C8B-B14F-4D97-AF65-F5344CB8AC3E}">
-        <p14:creationId xmlns:p14="http://schemas.microsoft.com/office/powerpoint/2010/main" val="1799665651"/>
+        <p14:creationId xmlns:p14="http://schemas.microsoft.com/office/powerpoint/2010/main" val="1508716678"/>
       </p:ext>
     </p:extLst>
   </p:cSld>
@@ -10302,7 +10670,7 @@
           <p:cNvPr id="1" name="">
             <a:extLst xmlns:a="http://schemas.openxmlformats.org/drawingml/2006/main">
               <a:ext uri="{FF2B5EF4-FFF2-40B4-BE49-F238E27FC236}">
-                <a16:creationId xmlns:a16="http://schemas.microsoft.com/office/drawing/2014/main" id="{3B0DB517-4795-44DD-8124-488FBDCBFF5C}"/>
+                <a16:creationId xmlns:a16="http://schemas.microsoft.com/office/drawing/2014/main" id="{2562BB7A-2950-4834-995B-81DA4F5F849F}"/>
               </a:ext>
             </a:extLst>
           </p:cNvPr>
@@ -10315,6 +10683,141 @@
           <a:xfrm xmlns:a="http://schemas.openxmlformats.org/drawingml/2006/main">
             <a:off x="0" y="0"/>
             <a:ext cx="12192000" cy="6858000"/>
+          </a:xfrm>
+          <a:prstGeom xmlns:a="http://schemas.openxmlformats.org/drawingml/2006/main" prst="rect">
+            <a:avLst/>
+          </a:prstGeom>
+          <a:solidFill xmlns:a="http://schemas.openxmlformats.org/drawingml/2006/main">
+            <a:srgbClr val="F5F8FC"/>
+          </a:solidFill>
+          <a:ln xmlns:a="http://schemas.openxmlformats.org/drawingml/2006/main" w="0">
+            <a:solidFill>
+              <a:srgbClr val="F5F8FC"/>
+            </a:solidFill>
+            <a:prstDash val="solid"/>
+          </a:ln>
+        </p:spPr>
+      </p:sp>
+      <p:sp>
+        <p:nvSpPr>
+          <p:cNvPr id="2" name="">
+            <a:extLst xmlns:a="http://schemas.openxmlformats.org/drawingml/2006/main">
+              <a:ext uri="{FF2B5EF4-FFF2-40B4-BE49-F238E27FC236}">
+                <a16:creationId xmlns:a16="http://schemas.microsoft.com/office/drawing/2014/main" id="{EFEF30BC-6262-4C66-BBBA-549DA1F7510F}"/>
+              </a:ext>
+            </a:extLst>
+          </p:cNvPr>
+          <p:cNvSpPr>
+            <a:spLocks xmlns:a="http://schemas.openxmlformats.org/drawingml/2006/main" noGrp="1"/>
+          </p:cNvSpPr>
+          <p:nvPr/>
+        </p:nvSpPr>
+        <p:spPr>
+          <a:xfrm xmlns:a="http://schemas.openxmlformats.org/drawingml/2006/main">
+            <a:off x="685800" y="457200"/>
+            <a:ext cx="7048500" cy="285750"/>
+          </a:xfrm>
+          <a:prstGeom xmlns:a="http://schemas.openxmlformats.org/drawingml/2006/main" prst="rect">
+            <a:avLst/>
+          </a:prstGeom>
+          <a:ln xmlns:a="http://schemas.openxmlformats.org/drawingml/2006/main" w="0">
+            <a:solidFill>
+              <a:srgbClr val="FFFFFF"/>
+            </a:solidFill>
+            <a:prstDash val="solid"/>
+          </a:ln>
+        </p:spPr>
+        <p:txBody>
+          <a:bodyPr xmlns:a="http://schemas.openxmlformats.org/drawingml/2006/main" anchor="t"/>
+          <a:lstStyle xmlns:a="http://schemas.openxmlformats.org/drawingml/2006/main"/>
+          <a:p xmlns:a="http://schemas.openxmlformats.org/drawingml/2006/main">
+            <a:pPr algn="l">
+              <a:defRPr sz="1050" b="1">
+                <a:solidFill>
+                  <a:srgbClr val="5F6F86"/>
+                </a:solidFill>
+              </a:defRPr>
+            </a:pPr>
+            <a:r>
+              <a:rPr sz="1050" b="1">
+                <a:solidFill>
+                  <a:srgbClr val="5F6F86"/>
+                </a:solidFill>
+              </a:rPr>
+              <a:t>COMMERCIAL PATH</a:t>
+            </a:r>
+          </a:p>
+        </p:txBody>
+      </p:sp>
+      <p:sp>
+        <p:nvSpPr>
+          <p:cNvPr id="3" name="">
+            <a:extLst xmlns:a="http://schemas.openxmlformats.org/drawingml/2006/main">
+              <a:ext uri="{FF2B5EF4-FFF2-40B4-BE49-F238E27FC236}">
+                <a16:creationId xmlns:a16="http://schemas.microsoft.com/office/drawing/2014/main" id="{01CFFBD0-9458-4533-8EBB-2C5871664EEF}"/>
+              </a:ext>
+            </a:extLst>
+          </p:cNvPr>
+          <p:cNvSpPr>
+            <a:spLocks xmlns:a="http://schemas.openxmlformats.org/drawingml/2006/main" noGrp="1"/>
+          </p:cNvSpPr>
+          <p:nvPr/>
+        </p:nvSpPr>
+        <p:spPr>
+          <a:xfrm xmlns:a="http://schemas.openxmlformats.org/drawingml/2006/main">
+            <a:off x="685800" y="819150"/>
+            <a:ext cx="8953500" cy="876300"/>
+          </a:xfrm>
+          <a:prstGeom xmlns:a="http://schemas.openxmlformats.org/drawingml/2006/main" prst="rect">
+            <a:avLst/>
+          </a:prstGeom>
+          <a:ln xmlns:a="http://schemas.openxmlformats.org/drawingml/2006/main" w="0">
+            <a:solidFill>
+              <a:srgbClr val="FFFFFF"/>
+            </a:solidFill>
+            <a:prstDash val="solid"/>
+          </a:ln>
+        </p:spPr>
+        <p:txBody>
+          <a:bodyPr xmlns:a="http://schemas.openxmlformats.org/drawingml/2006/main" anchor="t"/>
+          <a:lstStyle xmlns:a="http://schemas.openxmlformats.org/drawingml/2006/main"/>
+          <a:p xmlns:a="http://schemas.openxmlformats.org/drawingml/2006/main">
+            <a:pPr algn="l">
+              <a:defRPr sz="2700" b="1">
+                <a:solidFill>
+                  <a:srgbClr val="172033"/>
+                </a:solidFill>
+              </a:defRPr>
+            </a:pPr>
+            <a:r>
+              <a:rPr sz="2700" b="1">
+                <a:solidFill>
+                  <a:srgbClr val="172033"/>
+                </a:solidFill>
+              </a:rPr>
+              <a:t>One clean foundation build, then an optional close-support lane.</a:t>
+            </a:r>
+          </a:p>
+        </p:txBody>
+      </p:sp>
+      <p:sp>
+        <p:nvSpPr>
+          <p:cNvPr id="4" name="">
+            <a:extLst xmlns:a="http://schemas.openxmlformats.org/drawingml/2006/main">
+              <a:ext uri="{FF2B5EF4-FFF2-40B4-BE49-F238E27FC236}">
+                <a16:creationId xmlns:a16="http://schemas.microsoft.com/office/drawing/2014/main" id="{FEF00793-D948-4B7F-847E-B03ABD025290}"/>
+              </a:ext>
+            </a:extLst>
+          </p:cNvPr>
+          <p:cNvSpPr>
+            <a:spLocks xmlns:a="http://schemas.openxmlformats.org/drawingml/2006/main" noGrp="1"/>
+          </p:cNvSpPr>
+          <p:nvPr/>
+        </p:nvSpPr>
+        <p:spPr>
+          <a:xfrm xmlns:a="http://schemas.openxmlformats.org/drawingml/2006/main">
+            <a:off x="685800" y="2343150"/>
+            <a:ext cx="4876800" cy="2705100"/>
           </a:xfrm>
           <a:prstGeom xmlns:a="http://schemas.openxmlformats.org/drawingml/2006/main" prst="rect">
             <a:avLst/>
@@ -10332,22 +10835,393 @@
       </p:sp>
       <p:sp>
         <p:nvSpPr>
-          <p:cNvPr id="2" name="">
-            <a:extLst xmlns:a="http://schemas.openxmlformats.org/drawingml/2006/main">
-              <a:ext uri="{FF2B5EF4-FFF2-40B4-BE49-F238E27FC236}">
-                <a16:creationId xmlns:a16="http://schemas.microsoft.com/office/drawing/2014/main" id="{4E7BA575-F069-45FC-9C29-4767EF664AD4}"/>
-              </a:ext>
-            </a:extLst>
-          </p:cNvPr>
-          <p:cNvSpPr>
-            <a:spLocks xmlns:a="http://schemas.openxmlformats.org/drawingml/2006/main" noGrp="1"/>
-          </p:cNvSpPr>
-          <p:nvPr/>
-        </p:nvSpPr>
-        <p:spPr>
-          <a:xfrm xmlns:a="http://schemas.openxmlformats.org/drawingml/2006/main">
-            <a:off x="0" y="0"/>
-            <a:ext cx="12192000" cy="114300"/>
+          <p:cNvPr id="5" name="">
+            <a:extLst xmlns:a="http://schemas.openxmlformats.org/drawingml/2006/main">
+              <a:ext uri="{FF2B5EF4-FFF2-40B4-BE49-F238E27FC236}">
+                <a16:creationId xmlns:a16="http://schemas.microsoft.com/office/drawing/2014/main" id="{A038046A-E3B9-4E36-97F0-650D90A615E1}"/>
+              </a:ext>
+            </a:extLst>
+          </p:cNvPr>
+          <p:cNvSpPr>
+            <a:spLocks xmlns:a="http://schemas.openxmlformats.org/drawingml/2006/main" noGrp="1"/>
+          </p:cNvSpPr>
+          <p:nvPr/>
+        </p:nvSpPr>
+        <p:spPr>
+          <a:xfrm xmlns:a="http://schemas.openxmlformats.org/drawingml/2006/main">
+            <a:off x="1047750" y="2724150"/>
+            <a:ext cx="4095750" cy="533400"/>
+          </a:xfrm>
+          <a:prstGeom xmlns:a="http://schemas.openxmlformats.org/drawingml/2006/main" prst="rect">
+            <a:avLst/>
+          </a:prstGeom>
+          <a:ln xmlns:a="http://schemas.openxmlformats.org/drawingml/2006/main" w="0">
+            <a:solidFill>
+              <a:srgbClr val="FFFFFF"/>
+            </a:solidFill>
+            <a:prstDash val="solid"/>
+          </a:ln>
+        </p:spPr>
+        <p:txBody>
+          <a:bodyPr xmlns:a="http://schemas.openxmlformats.org/drawingml/2006/main" anchor="t"/>
+          <a:lstStyle xmlns:a="http://schemas.openxmlformats.org/drawingml/2006/main"/>
+          <a:p xmlns:a="http://schemas.openxmlformats.org/drawingml/2006/main">
+            <a:pPr algn="l">
+              <a:defRPr sz="1800" b="1">
+                <a:solidFill>
+                  <a:srgbClr val="FFFFFF"/>
+                </a:solidFill>
+              </a:defRPr>
+            </a:pPr>
+            <a:r>
+              <a:rPr sz="1800" b="1">
+                <a:solidFill>
+                  <a:srgbClr val="FFFFFF"/>
+                </a:solidFill>
+              </a:rPr>
+              <a:t>Blueprint Books Foundation</a:t>
+            </a:r>
+          </a:p>
+        </p:txBody>
+      </p:sp>
+      <p:sp>
+        <p:nvSpPr>
+          <p:cNvPr id="6" name="">
+            <a:extLst xmlns:a="http://schemas.openxmlformats.org/drawingml/2006/main">
+              <a:ext uri="{FF2B5EF4-FFF2-40B4-BE49-F238E27FC236}">
+                <a16:creationId xmlns:a16="http://schemas.microsoft.com/office/drawing/2014/main" id="{21A084E2-8B3D-49F8-A856-47709CC312CE}"/>
+              </a:ext>
+            </a:extLst>
+          </p:cNvPr>
+          <p:cNvSpPr>
+            <a:spLocks xmlns:a="http://schemas.openxmlformats.org/drawingml/2006/main" noGrp="1"/>
+          </p:cNvSpPr>
+          <p:nvPr/>
+        </p:nvSpPr>
+        <p:spPr>
+          <a:xfrm xmlns:a="http://schemas.openxmlformats.org/drawingml/2006/main">
+            <a:off x="1047750" y="3390900"/>
+            <a:ext cx="4000500" cy="514350"/>
+          </a:xfrm>
+          <a:prstGeom xmlns:a="http://schemas.openxmlformats.org/drawingml/2006/main" prst="rect">
+            <a:avLst/>
+          </a:prstGeom>
+          <a:ln xmlns:a="http://schemas.openxmlformats.org/drawingml/2006/main" w="0">
+            <a:solidFill>
+              <a:srgbClr val="FFFFFF"/>
+            </a:solidFill>
+            <a:prstDash val="solid"/>
+          </a:ln>
+        </p:spPr>
+        <p:txBody>
+          <a:bodyPr xmlns:a="http://schemas.openxmlformats.org/drawingml/2006/main" anchor="t"/>
+          <a:lstStyle xmlns:a="http://schemas.openxmlformats.org/drawingml/2006/main"/>
+          <a:p xmlns:a="http://schemas.openxmlformats.org/drawingml/2006/main">
+            <a:pPr algn="l">
+              <a:defRPr sz="2850" b="1">
+                <a:solidFill>
+                  <a:srgbClr val="9FE0C8"/>
+                </a:solidFill>
+              </a:defRPr>
+            </a:pPr>
+            <a:r>
+              <a:rPr sz="2850" b="1">
+                <a:solidFill>
+                  <a:srgbClr val="9FE0C8"/>
+                </a:solidFill>
+              </a:rPr>
+              <a:t>$18,500 fixed fee</a:t>
+            </a:r>
+          </a:p>
+        </p:txBody>
+      </p:sp>
+      <p:sp>
+        <p:nvSpPr>
+          <p:cNvPr id="7" name="">
+            <a:extLst xmlns:a="http://schemas.openxmlformats.org/drawingml/2006/main">
+              <a:ext uri="{FF2B5EF4-FFF2-40B4-BE49-F238E27FC236}">
+                <a16:creationId xmlns:a16="http://schemas.microsoft.com/office/drawing/2014/main" id="{9D2C96C7-3844-4FE2-A69C-24394AEAB291}"/>
+              </a:ext>
+            </a:extLst>
+          </p:cNvPr>
+          <p:cNvSpPr>
+            <a:spLocks xmlns:a="http://schemas.openxmlformats.org/drawingml/2006/main" noGrp="1"/>
+          </p:cNvSpPr>
+          <p:nvPr/>
+        </p:nvSpPr>
+        <p:spPr>
+          <a:xfrm xmlns:a="http://schemas.openxmlformats.org/drawingml/2006/main">
+            <a:off x="1066800" y="4038600"/>
+            <a:ext cx="3905250" cy="628650"/>
+          </a:xfrm>
+          <a:prstGeom xmlns:a="http://schemas.openxmlformats.org/drawingml/2006/main" prst="rect">
+            <a:avLst/>
+          </a:prstGeom>
+          <a:ln xmlns:a="http://schemas.openxmlformats.org/drawingml/2006/main" w="0">
+            <a:solidFill>
+              <a:srgbClr val="FFFFFF"/>
+            </a:solidFill>
+            <a:prstDash val="solid"/>
+          </a:ln>
+        </p:spPr>
+        <p:txBody>
+          <a:bodyPr xmlns:a="http://schemas.openxmlformats.org/drawingml/2006/main" anchor="t"/>
+          <a:lstStyle xmlns:a="http://schemas.openxmlformats.org/drawingml/2006/main"/>
+          <a:p xmlns:a="http://schemas.openxmlformats.org/drawingml/2006/main">
+            <a:pPr algn="l">
+              <a:defRPr sz="1350" b="0">
+                <a:solidFill>
+                  <a:srgbClr val="D9EAF8"/>
+                </a:solidFill>
+              </a:defRPr>
+            </a:pPr>
+            <a:r>
+              <a:rPr sz="1350" b="0">
+                <a:solidFill>
+                  <a:srgbClr val="D9EAF8"/>
+                </a:solidFill>
+              </a:rPr>
+              <a:t>50% start / 50% closeout</a:t>
+            </a:r>
+          </a:p>
+          <a:p xmlns:a="http://schemas.openxmlformats.org/drawingml/2006/main">
+            <a:pPr algn="l">
+              <a:defRPr sz="1350" b="0">
+                <a:solidFill>
+                  <a:srgbClr val="D9EAF8"/>
+                </a:solidFill>
+              </a:defRPr>
+            </a:pPr>
+            <a:r>
+              <a:rPr sz="1350" b="0">
+                <a:solidFill>
+                  <a:srgbClr val="D9EAF8"/>
+                </a:solidFill>
+              </a:rPr>
+              <a:t>4-5 weeks from opening-balance readiness</a:t>
+            </a:r>
+          </a:p>
+        </p:txBody>
+      </p:sp>
+      <p:sp>
+        <p:nvSpPr>
+          <p:cNvPr id="8" name="">
+            <a:extLst xmlns:a="http://schemas.openxmlformats.org/drawingml/2006/main">
+              <a:ext uri="{FF2B5EF4-FFF2-40B4-BE49-F238E27FC236}">
+                <a16:creationId xmlns:a16="http://schemas.microsoft.com/office/drawing/2014/main" id="{F35CE544-00C7-4E2A-B5FB-9DD8E957128E}"/>
+              </a:ext>
+            </a:extLst>
+          </p:cNvPr>
+          <p:cNvSpPr>
+            <a:spLocks xmlns:a="http://schemas.openxmlformats.org/drawingml/2006/main" noGrp="1"/>
+          </p:cNvSpPr>
+          <p:nvPr/>
+        </p:nvSpPr>
+        <p:spPr>
+          <a:xfrm xmlns:a="http://schemas.openxmlformats.org/drawingml/2006/main">
+            <a:off x="6153150" y="2343150"/>
+            <a:ext cx="2381250" cy="1638300"/>
+          </a:xfrm>
+          <a:prstGeom xmlns:a="http://schemas.openxmlformats.org/drawingml/2006/main" prst="rect">
+            <a:avLst/>
+          </a:prstGeom>
+          <a:solidFill xmlns:a="http://schemas.openxmlformats.org/drawingml/2006/main">
+            <a:srgbClr val="FFFFFF"/>
+          </a:solidFill>
+          <a:ln xmlns:a="http://schemas.openxmlformats.org/drawingml/2006/main" w="0">
+            <a:solidFill>
+              <a:srgbClr val="D8E2ED"/>
+            </a:solidFill>
+            <a:prstDash val="solid"/>
+          </a:ln>
+        </p:spPr>
+      </p:sp>
+      <p:sp>
+        <p:nvSpPr>
+          <p:cNvPr id="9" name="">
+            <a:extLst xmlns:a="http://schemas.openxmlformats.org/drawingml/2006/main">
+              <a:ext uri="{FF2B5EF4-FFF2-40B4-BE49-F238E27FC236}">
+                <a16:creationId xmlns:a16="http://schemas.microsoft.com/office/drawing/2014/main" id="{E22CA8DB-225E-43BB-84AD-E1599F2C7EEB}"/>
+              </a:ext>
+            </a:extLst>
+          </p:cNvPr>
+          <p:cNvSpPr>
+            <a:spLocks xmlns:a="http://schemas.openxmlformats.org/drawingml/2006/main" noGrp="1"/>
+          </p:cNvSpPr>
+          <p:nvPr/>
+        </p:nvSpPr>
+        <p:spPr>
+          <a:xfrm xmlns:a="http://schemas.openxmlformats.org/drawingml/2006/main">
+            <a:off x="6153150" y="2343150"/>
+            <a:ext cx="57150" cy="1638300"/>
+          </a:xfrm>
+          <a:prstGeom xmlns:a="http://schemas.openxmlformats.org/drawingml/2006/main" prst="rect">
+            <a:avLst/>
+          </a:prstGeom>
+          <a:solidFill xmlns:a="http://schemas.openxmlformats.org/drawingml/2006/main">
+            <a:srgbClr val="D98C16"/>
+          </a:solidFill>
+          <a:ln xmlns:a="http://schemas.openxmlformats.org/drawingml/2006/main" w="0">
+            <a:solidFill>
+              <a:srgbClr val="D98C16"/>
+            </a:solidFill>
+            <a:prstDash val="solid"/>
+          </a:ln>
+        </p:spPr>
+      </p:sp>
+      <p:sp>
+        <p:nvSpPr>
+          <p:cNvPr id="10" name="">
+            <a:extLst xmlns:a="http://schemas.openxmlformats.org/drawingml/2006/main">
+              <a:ext uri="{FF2B5EF4-FFF2-40B4-BE49-F238E27FC236}">
+                <a16:creationId xmlns:a16="http://schemas.microsoft.com/office/drawing/2014/main" id="{541C56B5-4B89-45D7-B09A-77D0C5A0D6E0}"/>
+              </a:ext>
+            </a:extLst>
+          </p:cNvPr>
+          <p:cNvSpPr>
+            <a:spLocks xmlns:a="http://schemas.openxmlformats.org/drawingml/2006/main" noGrp="1"/>
+          </p:cNvSpPr>
+          <p:nvPr/>
+        </p:nvSpPr>
+        <p:spPr>
+          <a:xfrm xmlns:a="http://schemas.openxmlformats.org/drawingml/2006/main">
+            <a:off x="6381750" y="2533650"/>
+            <a:ext cx="2000250" cy="285750"/>
+          </a:xfrm>
+          <a:prstGeom xmlns:a="http://schemas.openxmlformats.org/drawingml/2006/main" prst="rect">
+            <a:avLst/>
+          </a:prstGeom>
+          <a:ln xmlns:a="http://schemas.openxmlformats.org/drawingml/2006/main" w="0">
+            <a:solidFill>
+              <a:srgbClr val="FFFFFF"/>
+            </a:solidFill>
+            <a:prstDash val="solid"/>
+          </a:ln>
+        </p:spPr>
+        <p:txBody>
+          <a:bodyPr xmlns:a="http://schemas.openxmlformats.org/drawingml/2006/main" anchor="t"/>
+          <a:lstStyle xmlns:a="http://schemas.openxmlformats.org/drawingml/2006/main"/>
+          <a:p xmlns:a="http://schemas.openxmlformats.org/drawingml/2006/main">
+            <a:pPr algn="l">
+              <a:defRPr sz="1350" b="1">
+                <a:solidFill>
+                  <a:srgbClr val="172033"/>
+                </a:solidFill>
+              </a:defRPr>
+            </a:pPr>
+            <a:r>
+              <a:rPr sz="1350" b="1">
+                <a:solidFill>
+                  <a:srgbClr val="172033"/>
+                </a:solidFill>
+              </a:rPr>
+              <a:t>Books Complete</a:t>
+            </a:r>
+          </a:p>
+        </p:txBody>
+      </p:sp>
+      <p:sp>
+        <p:nvSpPr>
+          <p:cNvPr id="11" name="">
+            <a:extLst xmlns:a="http://schemas.openxmlformats.org/drawingml/2006/main">
+              <a:ext uri="{FF2B5EF4-FFF2-40B4-BE49-F238E27FC236}">
+                <a16:creationId xmlns:a16="http://schemas.microsoft.com/office/drawing/2014/main" id="{4A45CBEC-168D-40B4-B42E-9F839B2BFF0F}"/>
+              </a:ext>
+            </a:extLst>
+          </p:cNvPr>
+          <p:cNvSpPr>
+            <a:spLocks xmlns:a="http://schemas.openxmlformats.org/drawingml/2006/main" noGrp="1"/>
+          </p:cNvSpPr>
+          <p:nvPr/>
+        </p:nvSpPr>
+        <p:spPr>
+          <a:xfrm xmlns:a="http://schemas.openxmlformats.org/drawingml/2006/main">
+            <a:off x="6381750" y="2895600"/>
+            <a:ext cx="1981200" cy="952500"/>
+          </a:xfrm>
+          <a:prstGeom xmlns:a="http://schemas.openxmlformats.org/drawingml/2006/main" prst="rect">
+            <a:avLst/>
+          </a:prstGeom>
+          <a:ln xmlns:a="http://schemas.openxmlformats.org/drawingml/2006/main" w="0">
+            <a:solidFill>
+              <a:srgbClr val="FFFFFF"/>
+            </a:solidFill>
+            <a:prstDash val="solid"/>
+          </a:ln>
+        </p:spPr>
+        <p:txBody>
+          <a:bodyPr xmlns:a="http://schemas.openxmlformats.org/drawingml/2006/main" anchor="t"/>
+          <a:lstStyle xmlns:a="http://schemas.openxmlformats.org/drawingml/2006/main"/>
+          <a:p xmlns:a="http://schemas.openxmlformats.org/drawingml/2006/main">
+            <a:pPr algn="l">
+              <a:defRPr sz="1050" b="0">
+                <a:solidFill>
+                  <a:srgbClr val="5F6F86"/>
+                </a:solidFill>
+              </a:defRPr>
+            </a:pPr>
+            <a:r>
+              <a:rPr sz="1050" b="0">
+                <a:solidFill>
+                  <a:srgbClr val="5F6F86"/>
+                </a:solidFill>
+              </a:rPr>
+              <a:t>$28,000 adds bank reconciliation, cash-flow statement, data migration from current books, and 30-day hypercare.</a:t>
+            </a:r>
+          </a:p>
+        </p:txBody>
+      </p:sp>
+      <p:sp>
+        <p:nvSpPr>
+          <p:cNvPr id="12" name="">
+            <a:extLst xmlns:a="http://schemas.openxmlformats.org/drawingml/2006/main">
+              <a:ext uri="{FF2B5EF4-FFF2-40B4-BE49-F238E27FC236}">
+                <a16:creationId xmlns:a16="http://schemas.microsoft.com/office/drawing/2014/main" id="{4A90BCDB-6464-4B82-AE39-5AEE4265E202}"/>
+              </a:ext>
+            </a:extLst>
+          </p:cNvPr>
+          <p:cNvSpPr>
+            <a:spLocks xmlns:a="http://schemas.openxmlformats.org/drawingml/2006/main" noGrp="1"/>
+          </p:cNvSpPr>
+          <p:nvPr/>
+        </p:nvSpPr>
+        <p:spPr>
+          <a:xfrm xmlns:a="http://schemas.openxmlformats.org/drawingml/2006/main">
+            <a:off x="8858250" y="2343150"/>
+            <a:ext cx="2381250" cy="1638300"/>
+          </a:xfrm>
+          <a:prstGeom xmlns:a="http://schemas.openxmlformats.org/drawingml/2006/main" prst="rect">
+            <a:avLst/>
+          </a:prstGeom>
+          <a:solidFill xmlns:a="http://schemas.openxmlformats.org/drawingml/2006/main">
+            <a:srgbClr val="FFFFFF"/>
+          </a:solidFill>
+          <a:ln xmlns:a="http://schemas.openxmlformats.org/drawingml/2006/main" w="0">
+            <a:solidFill>
+              <a:srgbClr val="D8E2ED"/>
+            </a:solidFill>
+            <a:prstDash val="solid"/>
+          </a:ln>
+        </p:spPr>
+      </p:sp>
+      <p:sp>
+        <p:nvSpPr>
+          <p:cNvPr id="13" name="">
+            <a:extLst xmlns:a="http://schemas.openxmlformats.org/drawingml/2006/main">
+              <a:ext uri="{FF2B5EF4-FFF2-40B4-BE49-F238E27FC236}">
+                <a16:creationId xmlns:a16="http://schemas.microsoft.com/office/drawing/2014/main" id="{80A4E665-28C2-4F01-8547-4CF042D399BE}"/>
+              </a:ext>
+            </a:extLst>
+          </p:cNvPr>
+          <p:cNvSpPr>
+            <a:spLocks xmlns:a="http://schemas.openxmlformats.org/drawingml/2006/main" noGrp="1"/>
+          </p:cNvSpPr>
+          <p:nvPr/>
+        </p:nvSpPr>
+        <p:spPr>
+          <a:xfrm xmlns:a="http://schemas.openxmlformats.org/drawingml/2006/main">
+            <a:off x="8858250" y="2343150"/>
+            <a:ext cx="57150" cy="1638300"/>
           </a:xfrm>
           <a:prstGeom xmlns:a="http://schemas.openxmlformats.org/drawingml/2006/main" prst="rect">
             <a:avLst/>
@@ -10365,124 +11239,22 @@
       </p:sp>
       <p:sp>
         <p:nvSpPr>
-          <p:cNvPr id="3" name="">
-            <a:extLst xmlns:a="http://schemas.openxmlformats.org/drawingml/2006/main">
-              <a:ext uri="{FF2B5EF4-FFF2-40B4-BE49-F238E27FC236}">
-                <a16:creationId xmlns:a16="http://schemas.microsoft.com/office/drawing/2014/main" id="{CC969549-37F4-46E4-85C3-CE484BB99CE2}"/>
-              </a:ext>
-            </a:extLst>
-          </p:cNvPr>
-          <p:cNvSpPr>
-            <a:spLocks xmlns:a="http://schemas.openxmlformats.org/drawingml/2006/main" noGrp="1"/>
-          </p:cNvSpPr>
-          <p:nvPr/>
-        </p:nvSpPr>
-        <p:spPr>
-          <a:xfrm xmlns:a="http://schemas.openxmlformats.org/drawingml/2006/main">
-            <a:off x="9696450" y="495300"/>
-            <a:ext cx="1600200" cy="266700"/>
-          </a:xfrm>
-          <a:prstGeom xmlns:a="http://schemas.openxmlformats.org/drawingml/2006/main" prst="rect">
-            <a:avLst/>
-          </a:prstGeom>
-          <a:ln xmlns:a="http://schemas.openxmlformats.org/drawingml/2006/main" w="0">
-            <a:solidFill>
-              <a:srgbClr val="FFFFFF"/>
-            </a:solidFill>
-            <a:prstDash val="solid"/>
-          </a:ln>
-        </p:spPr>
-        <p:txBody>
-          <a:bodyPr xmlns:a="http://schemas.openxmlformats.org/drawingml/2006/main" anchor="t"/>
-          <a:lstStyle xmlns:a="http://schemas.openxmlformats.org/drawingml/2006/main"/>
-          <a:p xmlns:a="http://schemas.openxmlformats.org/drawingml/2006/main">
-            <a:pPr algn="r">
-              <a:defRPr sz="1650" b="1">
-                <a:solidFill>
-                  <a:srgbClr val="FFFFFF"/>
-                </a:solidFill>
-              </a:defRPr>
-            </a:pPr>
-            <a:r>
-              <a:rPr sz="1650" b="1">
-                <a:solidFill>
-                  <a:srgbClr val="FFFFFF"/>
-                </a:solidFill>
-              </a:rPr>
-              <a:t>RAVES</a:t>
-            </a:r>
-          </a:p>
-        </p:txBody>
-      </p:sp>
-      <p:sp>
-        <p:nvSpPr>
-          <p:cNvPr id="4" name="">
-            <a:extLst xmlns:a="http://schemas.openxmlformats.org/drawingml/2006/main">
-              <a:ext uri="{FF2B5EF4-FFF2-40B4-BE49-F238E27FC236}">
-                <a16:creationId xmlns:a16="http://schemas.microsoft.com/office/drawing/2014/main" id="{C16E2E55-84A3-48B4-8D56-C1D7E897BC9A}"/>
-              </a:ext>
-            </a:extLst>
-          </p:cNvPr>
-          <p:cNvSpPr>
-            <a:spLocks xmlns:a="http://schemas.openxmlformats.org/drawingml/2006/main" noGrp="1"/>
-          </p:cNvSpPr>
-          <p:nvPr/>
-        </p:nvSpPr>
-        <p:spPr>
-          <a:xfrm xmlns:a="http://schemas.openxmlformats.org/drawingml/2006/main">
-            <a:off x="9696450" y="781050"/>
-            <a:ext cx="1600200" cy="228600"/>
-          </a:xfrm>
-          <a:prstGeom xmlns:a="http://schemas.openxmlformats.org/drawingml/2006/main" prst="rect">
-            <a:avLst/>
-          </a:prstGeom>
-          <a:ln xmlns:a="http://schemas.openxmlformats.org/drawingml/2006/main" w="0">
-            <a:solidFill>
-              <a:srgbClr val="FFFFFF"/>
-            </a:solidFill>
-            <a:prstDash val="solid"/>
-          </a:ln>
-        </p:spPr>
-        <p:txBody>
-          <a:bodyPr xmlns:a="http://schemas.openxmlformats.org/drawingml/2006/main" anchor="t"/>
-          <a:lstStyle xmlns:a="http://schemas.openxmlformats.org/drawingml/2006/main"/>
-          <a:p xmlns:a="http://schemas.openxmlformats.org/drawingml/2006/main">
-            <a:pPr algn="r">
-              <a:defRPr sz="975" b="0">
-                <a:solidFill>
-                  <a:srgbClr val="9FB9D2"/>
-                </a:solidFill>
-              </a:defRPr>
-            </a:pPr>
-            <a:r>
-              <a:rPr sz="975" b="0">
-                <a:solidFill>
-                  <a:srgbClr val="9FB9D2"/>
-                </a:solidFill>
-              </a:rPr>
-              <a:t>Blueprint</a:t>
-            </a:r>
-          </a:p>
-        </p:txBody>
-      </p:sp>
-      <p:sp>
-        <p:nvSpPr>
-          <p:cNvPr id="5" name="">
-            <a:extLst xmlns:a="http://schemas.openxmlformats.org/drawingml/2006/main">
-              <a:ext uri="{FF2B5EF4-FFF2-40B4-BE49-F238E27FC236}">
-                <a16:creationId xmlns:a16="http://schemas.microsoft.com/office/drawing/2014/main" id="{9DB620E0-5FB7-4ED0-BDD6-60BF96C60DA4}"/>
-              </a:ext>
-            </a:extLst>
-          </p:cNvPr>
-          <p:cNvSpPr>
-            <a:spLocks xmlns:a="http://schemas.openxmlformats.org/drawingml/2006/main" noGrp="1"/>
-          </p:cNvSpPr>
-          <p:nvPr/>
-        </p:nvSpPr>
-        <p:spPr>
-          <a:xfrm xmlns:a="http://schemas.openxmlformats.org/drawingml/2006/main">
-            <a:off x="685800" y="457200"/>
-            <a:ext cx="7048500" cy="285750"/>
+          <p:cNvPr id="14" name="">
+            <a:extLst xmlns:a="http://schemas.openxmlformats.org/drawingml/2006/main">
+              <a:ext uri="{FF2B5EF4-FFF2-40B4-BE49-F238E27FC236}">
+                <a16:creationId xmlns:a16="http://schemas.microsoft.com/office/drawing/2014/main" id="{CFF9D4AE-D08C-40C3-83F2-356DB3E6372D}"/>
+              </a:ext>
+            </a:extLst>
+          </p:cNvPr>
+          <p:cNvSpPr>
+            <a:spLocks xmlns:a="http://schemas.openxmlformats.org/drawingml/2006/main" noGrp="1"/>
+          </p:cNvSpPr>
+          <p:nvPr/>
+        </p:nvSpPr>
+        <p:spPr>
+          <a:xfrm xmlns:a="http://schemas.openxmlformats.org/drawingml/2006/main">
+            <a:off x="9086850" y="2533650"/>
+            <a:ext cx="2000250" cy="285750"/>
           </a:xfrm>
           <a:prstGeom xmlns:a="http://schemas.openxmlformats.org/drawingml/2006/main" prst="rect">
             <a:avLst/>
@@ -10499,41 +11271,41 @@
           <a:lstStyle xmlns:a="http://schemas.openxmlformats.org/drawingml/2006/main"/>
           <a:p xmlns:a="http://schemas.openxmlformats.org/drawingml/2006/main">
             <a:pPr algn="l">
-              <a:defRPr sz="1050" b="1">
-                <a:solidFill>
-                  <a:srgbClr val="BFD6EA"/>
-                </a:solidFill>
-              </a:defRPr>
-            </a:pPr>
-            <a:r>
-              <a:rPr sz="1050" b="1">
-                <a:solidFill>
-                  <a:srgbClr val="BFD6EA"/>
-                </a:solidFill>
-              </a:rPr>
-              <a:t>DECISION</a:t>
-            </a:r>
-          </a:p>
-        </p:txBody>
-      </p:sp>
-      <p:sp>
-        <p:nvSpPr>
-          <p:cNvPr id="6" name="">
-            <a:extLst xmlns:a="http://schemas.openxmlformats.org/drawingml/2006/main">
-              <a:ext uri="{FF2B5EF4-FFF2-40B4-BE49-F238E27FC236}">
-                <a16:creationId xmlns:a16="http://schemas.microsoft.com/office/drawing/2014/main" id="{C279FCDD-34B5-4293-8CA4-4D2EDA68F703}"/>
-              </a:ext>
-            </a:extLst>
-          </p:cNvPr>
-          <p:cNvSpPr>
-            <a:spLocks xmlns:a="http://schemas.openxmlformats.org/drawingml/2006/main" noGrp="1"/>
-          </p:cNvSpPr>
-          <p:nvPr/>
-        </p:nvSpPr>
-        <p:spPr>
-          <a:xfrm xmlns:a="http://schemas.openxmlformats.org/drawingml/2006/main">
-            <a:off x="685800" y="819150"/>
-            <a:ext cx="8953500" cy="876300"/>
+              <a:defRPr sz="1350" b="1">
+                <a:solidFill>
+                  <a:srgbClr val="172033"/>
+                </a:solidFill>
+              </a:defRPr>
+            </a:pPr>
+            <a:r>
+              <a:rPr sz="1350" b="1">
+                <a:solidFill>
+                  <a:srgbClr val="172033"/>
+                </a:solidFill>
+              </a:rPr>
+              <a:t>Books Care</a:t>
+            </a:r>
+          </a:p>
+        </p:txBody>
+      </p:sp>
+      <p:sp>
+        <p:nvSpPr>
+          <p:cNvPr id="15" name="">
+            <a:extLst xmlns:a="http://schemas.openxmlformats.org/drawingml/2006/main">
+              <a:ext uri="{FF2B5EF4-FFF2-40B4-BE49-F238E27FC236}">
+                <a16:creationId xmlns:a16="http://schemas.microsoft.com/office/drawing/2014/main" id="{F126733A-EC19-4083-9ABA-705C27287DEC}"/>
+              </a:ext>
+            </a:extLst>
+          </p:cNvPr>
+          <p:cNvSpPr>
+            <a:spLocks xmlns:a="http://schemas.openxmlformats.org/drawingml/2006/main" noGrp="1"/>
+          </p:cNvSpPr>
+          <p:nvPr/>
+        </p:nvSpPr>
+        <p:spPr>
+          <a:xfrm xmlns:a="http://schemas.openxmlformats.org/drawingml/2006/main">
+            <a:off x="9086850" y="2895600"/>
+            <a:ext cx="1981200" cy="952500"/>
           </a:xfrm>
           <a:prstGeom xmlns:a="http://schemas.openxmlformats.org/drawingml/2006/main" prst="rect">
             <a:avLst/>
@@ -10550,278 +11322,41 @@
           <a:lstStyle xmlns:a="http://schemas.openxmlformats.org/drawingml/2006/main"/>
           <a:p xmlns:a="http://schemas.openxmlformats.org/drawingml/2006/main">
             <a:pPr algn="l">
-              <a:defRPr sz="2700" b="1">
-                <a:solidFill>
-                  <a:srgbClr val="FFFFFF"/>
-                </a:solidFill>
-              </a:defRPr>
-            </a:pPr>
-            <a:r>
-              <a:rPr sz="2700" b="1">
-                <a:solidFill>
-                  <a:srgbClr val="FFFFFF"/>
-                </a:solidFill>
-              </a:rPr>
-              <a:t>Approve Blueprint Books as the next funded phase.</a:t>
-            </a:r>
-          </a:p>
-        </p:txBody>
-      </p:sp>
-      <p:sp>
-        <p:nvSpPr>
-          <p:cNvPr id="7" name="">
-            <a:extLst xmlns:a="http://schemas.openxmlformats.org/drawingml/2006/main">
-              <a:ext uri="{FF2B5EF4-FFF2-40B4-BE49-F238E27FC236}">
-                <a16:creationId xmlns:a16="http://schemas.microsoft.com/office/drawing/2014/main" id="{D7F3C97E-3732-454B-9917-3ADD75C395A7}"/>
-              </a:ext>
-            </a:extLst>
-          </p:cNvPr>
-          <p:cNvSpPr>
-            <a:spLocks xmlns:a="http://schemas.openxmlformats.org/drawingml/2006/main" noGrp="1"/>
-          </p:cNvSpPr>
-          <p:nvPr/>
-        </p:nvSpPr>
-        <p:spPr>
-          <a:xfrm xmlns:a="http://schemas.openxmlformats.org/drawingml/2006/main">
-            <a:off x="685800" y="1628775"/>
-            <a:ext cx="8953500" cy="495300"/>
-          </a:xfrm>
-          <a:prstGeom xmlns:a="http://schemas.openxmlformats.org/drawingml/2006/main" prst="rect">
-            <a:avLst/>
-          </a:prstGeom>
-          <a:ln xmlns:a="http://schemas.openxmlformats.org/drawingml/2006/main" w="0">
-            <a:solidFill>
-              <a:srgbClr val="FFFFFF"/>
-            </a:solidFill>
-            <a:prstDash val="solid"/>
-          </a:ln>
-        </p:spPr>
-        <p:txBody>
-          <a:bodyPr xmlns:a="http://schemas.openxmlformats.org/drawingml/2006/main" anchor="t"/>
-          <a:lstStyle xmlns:a="http://schemas.openxmlformats.org/drawingml/2006/main"/>
-          <a:p xmlns:a="http://schemas.openxmlformats.org/drawingml/2006/main">
-            <a:pPr algn="l">
-              <a:defRPr sz="1425" b="0">
-                <a:solidFill>
-                  <a:srgbClr val="BFD6EA"/>
-                </a:solidFill>
-              </a:defRPr>
-            </a:pPr>
-            <a:r>
-              <a:rPr sz="1425" b="0">
-                <a:solidFill>
-                  <a:srgbClr val="BFD6EA"/>
-                </a:solidFill>
-              </a:rPr>
-              <a:t>Leave with one owner, one date, and the opening-balance source.</a:t>
-            </a:r>
-          </a:p>
-        </p:txBody>
-      </p:sp>
-      <p:sp>
-        <p:nvSpPr>
-          <p:cNvPr id="8" name="">
-            <a:extLst xmlns:a="http://schemas.openxmlformats.org/drawingml/2006/main">
-              <a:ext uri="{FF2B5EF4-FFF2-40B4-BE49-F238E27FC236}">
-                <a16:creationId xmlns:a16="http://schemas.microsoft.com/office/drawing/2014/main" id="{52578646-9AE0-4646-9907-36C4610351C1}"/>
-              </a:ext>
-            </a:extLst>
-          </p:cNvPr>
-          <p:cNvSpPr>
-            <a:spLocks xmlns:a="http://schemas.openxmlformats.org/drawingml/2006/main" noGrp="1"/>
-          </p:cNvSpPr>
-          <p:nvPr/>
-        </p:nvSpPr>
-        <p:spPr>
-          <a:xfrm xmlns:a="http://schemas.openxmlformats.org/drawingml/2006/main">
-            <a:off x="857250" y="2705100"/>
-            <a:ext cx="10477500" cy="1752600"/>
-          </a:xfrm>
-          <a:prstGeom xmlns:a="http://schemas.openxmlformats.org/drawingml/2006/main" prst="rect">
-            <a:avLst/>
-          </a:prstGeom>
-          <a:solidFill xmlns:a="http://schemas.openxmlformats.org/drawingml/2006/main">
-            <a:srgbClr val="123A5B"/>
-          </a:solidFill>
-          <a:ln xmlns:a="http://schemas.openxmlformats.org/drawingml/2006/main" w="0">
-            <a:solidFill>
-              <a:srgbClr val="123A5B"/>
-            </a:solidFill>
-            <a:prstDash val="solid"/>
-          </a:ln>
-        </p:spPr>
-      </p:sp>
-      <p:sp>
-        <p:nvSpPr>
-          <p:cNvPr id="9" name="">
-            <a:extLst xmlns:a="http://schemas.openxmlformats.org/drawingml/2006/main">
-              <a:ext uri="{FF2B5EF4-FFF2-40B4-BE49-F238E27FC236}">
-                <a16:creationId xmlns:a16="http://schemas.microsoft.com/office/drawing/2014/main" id="{98DBD502-9AE1-47D9-B6BA-A09B1EBCCB2D}"/>
-              </a:ext>
-            </a:extLst>
-          </p:cNvPr>
-          <p:cNvSpPr>
-            <a:spLocks xmlns:a="http://schemas.openxmlformats.org/drawingml/2006/main" noGrp="1"/>
-          </p:cNvSpPr>
-          <p:nvPr/>
-        </p:nvSpPr>
-        <p:spPr>
-          <a:xfrm xmlns:a="http://schemas.openxmlformats.org/drawingml/2006/main">
-            <a:off x="1200150" y="2990850"/>
-            <a:ext cx="1524000" cy="342900"/>
-          </a:xfrm>
-          <a:prstGeom xmlns:a="http://schemas.openxmlformats.org/drawingml/2006/main" prst="rect">
-            <a:avLst/>
-          </a:prstGeom>
-          <a:ln xmlns:a="http://schemas.openxmlformats.org/drawingml/2006/main" w="0">
-            <a:solidFill>
-              <a:srgbClr val="FFFFFF"/>
-            </a:solidFill>
-            <a:prstDash val="solid"/>
-          </a:ln>
-        </p:spPr>
-        <p:txBody>
-          <a:bodyPr xmlns:a="http://schemas.openxmlformats.org/drawingml/2006/main" anchor="t"/>
-          <a:lstStyle xmlns:a="http://schemas.openxmlformats.org/drawingml/2006/main"/>
-          <a:p xmlns:a="http://schemas.openxmlformats.org/drawingml/2006/main">
-            <a:pPr algn="l">
-              <a:defRPr sz="1500" b="1">
-                <a:solidFill>
-                  <a:srgbClr val="9FE0C8"/>
-                </a:solidFill>
-              </a:defRPr>
-            </a:pPr>
-            <a:r>
-              <a:rPr sz="1500" b="1">
-                <a:solidFill>
-                  <a:srgbClr val="9FE0C8"/>
-                </a:solidFill>
-              </a:rPr>
-              <a:t>Ask</a:t>
-            </a:r>
-          </a:p>
-        </p:txBody>
-      </p:sp>
-      <p:sp>
-        <p:nvSpPr>
-          <p:cNvPr id="10" name="">
-            <a:extLst xmlns:a="http://schemas.openxmlformats.org/drawingml/2006/main">
-              <a:ext uri="{FF2B5EF4-FFF2-40B4-BE49-F238E27FC236}">
-                <a16:creationId xmlns:a16="http://schemas.microsoft.com/office/drawing/2014/main" id="{FBDE4881-679E-4746-96EE-5AB9189B72D2}"/>
-              </a:ext>
-            </a:extLst>
-          </p:cNvPr>
-          <p:cNvSpPr>
-            <a:spLocks xmlns:a="http://schemas.openxmlformats.org/drawingml/2006/main" noGrp="1"/>
-          </p:cNvSpPr>
-          <p:nvPr/>
-        </p:nvSpPr>
-        <p:spPr>
-          <a:xfrm xmlns:a="http://schemas.openxmlformats.org/drawingml/2006/main">
-            <a:off x="1200150" y="3390900"/>
-            <a:ext cx="8763000" cy="552450"/>
-          </a:xfrm>
-          <a:prstGeom xmlns:a="http://schemas.openxmlformats.org/drawingml/2006/main" prst="rect">
-            <a:avLst/>
-          </a:prstGeom>
-          <a:ln xmlns:a="http://schemas.openxmlformats.org/drawingml/2006/main" w="0">
-            <a:solidFill>
-              <a:srgbClr val="FFFFFF"/>
-            </a:solidFill>
-            <a:prstDash val="solid"/>
-          </a:ln>
-        </p:spPr>
-        <p:txBody>
-          <a:bodyPr xmlns:a="http://schemas.openxmlformats.org/drawingml/2006/main" anchor="t"/>
-          <a:lstStyle xmlns:a="http://schemas.openxmlformats.org/drawingml/2006/main"/>
-          <a:p xmlns:a="http://schemas.openxmlformats.org/drawingml/2006/main">
-            <a:pPr algn="l">
-              <a:defRPr sz="2250" b="1">
-                <a:solidFill>
-                  <a:srgbClr val="FFFFFF"/>
-                </a:solidFill>
-              </a:defRPr>
-            </a:pPr>
-            <a:r>
-              <a:rPr sz="2250" b="1">
-                <a:solidFill>
-                  <a:srgbClr val="FFFFFF"/>
-                </a:solidFill>
-              </a:rPr>
-              <a:t>Approve the Books Foundation build at $18,500 fixed fee.</a:t>
-            </a:r>
-          </a:p>
-        </p:txBody>
-      </p:sp>
-      <p:sp>
-        <p:nvSpPr>
-          <p:cNvPr id="11" name="">
-            <a:extLst xmlns:a="http://schemas.openxmlformats.org/drawingml/2006/main">
-              <a:ext uri="{FF2B5EF4-FFF2-40B4-BE49-F238E27FC236}">
-                <a16:creationId xmlns:a16="http://schemas.microsoft.com/office/drawing/2014/main" id="{934C7A4A-91D1-4AC2-B204-CA8765675475}"/>
-              </a:ext>
-            </a:extLst>
-          </p:cNvPr>
-          <p:cNvSpPr>
-            <a:spLocks xmlns:a="http://schemas.openxmlformats.org/drawingml/2006/main" noGrp="1"/>
-          </p:cNvSpPr>
-          <p:nvPr/>
-        </p:nvSpPr>
-        <p:spPr>
-          <a:xfrm xmlns:a="http://schemas.openxmlformats.org/drawingml/2006/main">
-            <a:off x="1200150" y="4038600"/>
-            <a:ext cx="9048750" cy="457200"/>
-          </a:xfrm>
-          <a:prstGeom xmlns:a="http://schemas.openxmlformats.org/drawingml/2006/main" prst="rect">
-            <a:avLst/>
-          </a:prstGeom>
-          <a:ln xmlns:a="http://schemas.openxmlformats.org/drawingml/2006/main" w="0">
-            <a:solidFill>
-              <a:srgbClr val="FFFFFF"/>
-            </a:solidFill>
-            <a:prstDash val="solid"/>
-          </a:ln>
-        </p:spPr>
-        <p:txBody>
-          <a:bodyPr xmlns:a="http://schemas.openxmlformats.org/drawingml/2006/main" anchor="t"/>
-          <a:lstStyle xmlns:a="http://schemas.openxmlformats.org/drawingml/2006/main"/>
-          <a:p xmlns:a="http://schemas.openxmlformats.org/drawingml/2006/main">
-            <a:pPr algn="l">
-              <a:defRPr sz="1350" b="0">
-                <a:solidFill>
-                  <a:srgbClr val="D9EAF8"/>
-                </a:solidFill>
-              </a:defRPr>
-            </a:pPr>
-            <a:r>
-              <a:rPr sz="1350" b="0">
-                <a:solidFill>
-                  <a:srgbClr val="D9EAF8"/>
-                </a:solidFill>
-              </a:rPr>
-              <a:t>Then confirm the approver, target decision date, the accounting owner, and where opening balances and the chart of accounts come from.</a:t>
-            </a:r>
-          </a:p>
-        </p:txBody>
-      </p:sp>
-      <p:sp>
-        <p:nvSpPr>
-          <p:cNvPr id="12" name="">
-            <a:extLst xmlns:a="http://schemas.openxmlformats.org/drawingml/2006/main">
-              <a:ext uri="{FF2B5EF4-FFF2-40B4-BE49-F238E27FC236}">
-                <a16:creationId xmlns:a16="http://schemas.microsoft.com/office/drawing/2014/main" id="{95AE985C-6F8F-421E-AA19-C939451C7432}"/>
-              </a:ext>
-            </a:extLst>
-          </p:cNvPr>
-          <p:cNvSpPr>
-            <a:spLocks xmlns:a="http://schemas.openxmlformats.org/drawingml/2006/main" noGrp="1"/>
-          </p:cNvSpPr>
-          <p:nvPr/>
-        </p:nvSpPr>
-        <p:spPr>
-          <a:xfrm xmlns:a="http://schemas.openxmlformats.org/drawingml/2006/main">
-            <a:off x="1524000" y="5067300"/>
-            <a:ext cx="2667000" cy="914400"/>
+              <a:defRPr sz="1050" b="0">
+                <a:solidFill>
+                  <a:srgbClr val="5F6F86"/>
+                </a:solidFill>
+              </a:defRPr>
+            </a:pPr>
+            <a:r>
+              <a:rPr sz="1050" b="0">
+                <a:solidFill>
+                  <a:srgbClr val="5F6F86"/>
+                </a:solidFill>
+              </a:rPr>
+              <a:t>Optional monthly lane for month-end review, reconciliation checks, and small accounting changes.</a:t>
+            </a:r>
+          </a:p>
+        </p:txBody>
+      </p:sp>
+      <p:sp>
+        <p:nvSpPr>
+          <p:cNvPr id="16" name="">
+            <a:extLst xmlns:a="http://schemas.openxmlformats.org/drawingml/2006/main">
+              <a:ext uri="{FF2B5EF4-FFF2-40B4-BE49-F238E27FC236}">
+                <a16:creationId xmlns:a16="http://schemas.microsoft.com/office/drawing/2014/main" id="{9D18E898-C0E7-4EFB-9D89-6D6905DFD093}"/>
+              </a:ext>
+            </a:extLst>
+          </p:cNvPr>
+          <p:cNvSpPr>
+            <a:spLocks xmlns:a="http://schemas.openxmlformats.org/drawingml/2006/main" noGrp="1"/>
+          </p:cNvSpPr>
+          <p:nvPr/>
+        </p:nvSpPr>
+        <p:spPr>
+          <a:xfrm xmlns:a="http://schemas.openxmlformats.org/drawingml/2006/main">
+            <a:off x="6153150" y="4343400"/>
+            <a:ext cx="5086350" cy="1143000"/>
           </a:xfrm>
           <a:prstGeom xmlns:a="http://schemas.openxmlformats.org/drawingml/2006/main" prst="rect">
             <a:avLst/>
@@ -10839,22 +11374,449 @@
       </p:sp>
       <p:sp>
         <p:nvSpPr>
-          <p:cNvPr id="13" name="">
-            <a:extLst xmlns:a="http://schemas.openxmlformats.org/drawingml/2006/main">
-              <a:ext uri="{FF2B5EF4-FFF2-40B4-BE49-F238E27FC236}">
-                <a16:creationId xmlns:a16="http://schemas.microsoft.com/office/drawing/2014/main" id="{7DC9B545-8745-4D47-958F-A23173D519A7}"/>
-              </a:ext>
-            </a:extLst>
-          </p:cNvPr>
-          <p:cNvSpPr>
-            <a:spLocks xmlns:a="http://schemas.openxmlformats.org/drawingml/2006/main" noGrp="1"/>
-          </p:cNvSpPr>
-          <p:nvPr/>
-        </p:nvSpPr>
-        <p:spPr>
-          <a:xfrm xmlns:a="http://schemas.openxmlformats.org/drawingml/2006/main">
-            <a:off x="1524000" y="5067300"/>
-            <a:ext cx="57150" cy="914400"/>
+          <p:cNvPr id="17" name="">
+            <a:extLst xmlns:a="http://schemas.openxmlformats.org/drawingml/2006/main">
+              <a:ext uri="{FF2B5EF4-FFF2-40B4-BE49-F238E27FC236}">
+                <a16:creationId xmlns:a16="http://schemas.microsoft.com/office/drawing/2014/main" id="{D1460619-F5FE-4A5A-8E2F-4A865EBDE4C4}"/>
+              </a:ext>
+            </a:extLst>
+          </p:cNvPr>
+          <p:cNvSpPr>
+            <a:spLocks xmlns:a="http://schemas.openxmlformats.org/drawingml/2006/main" noGrp="1"/>
+          </p:cNvSpPr>
+          <p:nvPr/>
+        </p:nvSpPr>
+        <p:spPr>
+          <a:xfrm xmlns:a="http://schemas.openxmlformats.org/drawingml/2006/main">
+            <a:off x="6153150" y="4343400"/>
+            <a:ext cx="57150" cy="1143000"/>
+          </a:xfrm>
+          <a:prstGeom xmlns:a="http://schemas.openxmlformats.org/drawingml/2006/main" prst="rect">
+            <a:avLst/>
+          </a:prstGeom>
+          <a:solidFill xmlns:a="http://schemas.openxmlformats.org/drawingml/2006/main">
+            <a:srgbClr val="145DA0"/>
+          </a:solidFill>
+          <a:ln xmlns:a="http://schemas.openxmlformats.org/drawingml/2006/main" w="0">
+            <a:solidFill>
+              <a:srgbClr val="145DA0"/>
+            </a:solidFill>
+            <a:prstDash val="solid"/>
+          </a:ln>
+        </p:spPr>
+      </p:sp>
+      <p:sp>
+        <p:nvSpPr>
+          <p:cNvPr id="18" name="">
+            <a:extLst xmlns:a="http://schemas.openxmlformats.org/drawingml/2006/main">
+              <a:ext uri="{FF2B5EF4-FFF2-40B4-BE49-F238E27FC236}">
+                <a16:creationId xmlns:a16="http://schemas.microsoft.com/office/drawing/2014/main" id="{44DDC60E-270D-4213-8272-41A7E780F7C5}"/>
+              </a:ext>
+            </a:extLst>
+          </p:cNvPr>
+          <p:cNvSpPr>
+            <a:spLocks xmlns:a="http://schemas.openxmlformats.org/drawingml/2006/main" noGrp="1"/>
+          </p:cNvSpPr>
+          <p:nvPr/>
+        </p:nvSpPr>
+        <p:spPr>
+          <a:xfrm xmlns:a="http://schemas.openxmlformats.org/drawingml/2006/main">
+            <a:off x="6381750" y="4533900"/>
+            <a:ext cx="4705350" cy="285750"/>
+          </a:xfrm>
+          <a:prstGeom xmlns:a="http://schemas.openxmlformats.org/drawingml/2006/main" prst="rect">
+            <a:avLst/>
+          </a:prstGeom>
+          <a:ln xmlns:a="http://schemas.openxmlformats.org/drawingml/2006/main" w="0">
+            <a:solidFill>
+              <a:srgbClr val="FFFFFF"/>
+            </a:solidFill>
+            <a:prstDash val="solid"/>
+          </a:ln>
+        </p:spPr>
+        <p:txBody>
+          <a:bodyPr xmlns:a="http://schemas.openxmlformats.org/drawingml/2006/main" anchor="t"/>
+          <a:lstStyle xmlns:a="http://schemas.openxmlformats.org/drawingml/2006/main"/>
+          <a:p xmlns:a="http://schemas.openxmlformats.org/drawingml/2006/main">
+            <a:pPr algn="l">
+              <a:defRPr sz="1350" b="1">
+                <a:solidFill>
+                  <a:srgbClr val="172033"/>
+                </a:solidFill>
+              </a:defRPr>
+            </a:pPr>
+            <a:r>
+              <a:rPr sz="1350" b="1">
+                <a:solidFill>
+                  <a:srgbClr val="172033"/>
+                </a:solidFill>
+              </a:rPr>
+              <a:t>Builds on what is shipped</a:t>
+            </a:r>
+          </a:p>
+        </p:txBody>
+      </p:sp>
+      <p:sp>
+        <p:nvSpPr>
+          <p:cNvPr id="19" name="">
+            <a:extLst xmlns:a="http://schemas.openxmlformats.org/drawingml/2006/main">
+              <a:ext uri="{FF2B5EF4-FFF2-40B4-BE49-F238E27FC236}">
+                <a16:creationId xmlns:a16="http://schemas.microsoft.com/office/drawing/2014/main" id="{659BF877-1333-44F2-8DF6-B8EA6342D37C}"/>
+              </a:ext>
+            </a:extLst>
+          </p:cNvPr>
+          <p:cNvSpPr>
+            <a:spLocks xmlns:a="http://schemas.openxmlformats.org/drawingml/2006/main" noGrp="1"/>
+          </p:cNvSpPr>
+          <p:nvPr/>
+        </p:nvSpPr>
+        <p:spPr>
+          <a:xfrm xmlns:a="http://schemas.openxmlformats.org/drawingml/2006/main">
+            <a:off x="6381750" y="4895850"/>
+            <a:ext cx="4686300" cy="457200"/>
+          </a:xfrm>
+          <a:prstGeom xmlns:a="http://schemas.openxmlformats.org/drawingml/2006/main" prst="rect">
+            <a:avLst/>
+          </a:prstGeom>
+          <a:ln xmlns:a="http://schemas.openxmlformats.org/drawingml/2006/main" w="0">
+            <a:solidFill>
+              <a:srgbClr val="FFFFFF"/>
+            </a:solidFill>
+            <a:prstDash val="solid"/>
+          </a:ln>
+        </p:spPr>
+        <p:txBody>
+          <a:bodyPr xmlns:a="http://schemas.openxmlformats.org/drawingml/2006/main" anchor="t"/>
+          <a:lstStyle xmlns:a="http://schemas.openxmlformats.org/drawingml/2006/main"/>
+          <a:p xmlns:a="http://schemas.openxmlformats.org/drawingml/2006/main">
+            <a:pPr algn="l">
+              <a:defRPr sz="1050" b="0">
+                <a:solidFill>
+                  <a:srgbClr val="5F6F86"/>
+                </a:solidFill>
+              </a:defRPr>
+            </a:pPr>
+            <a:r>
+              <a:rPr sz="1050" b="0">
+                <a:solidFill>
+                  <a:srgbClr val="5F6F86"/>
+                </a:solidFill>
+              </a:rPr>
+              <a:t>The ledger, A/R, A/P, statements, period close, and invoice/bill PDFs are already built. This phase tailors and rolls them out for Raves.</a:t>
+            </a:r>
+          </a:p>
+        </p:txBody>
+      </p:sp>
+      <p:sp>
+        <p:nvSpPr>
+          <p:cNvPr id="20" name="">
+            <a:extLst xmlns:a="http://schemas.openxmlformats.org/drawingml/2006/main">
+              <a:ext uri="{FF2B5EF4-FFF2-40B4-BE49-F238E27FC236}">
+                <a16:creationId xmlns:a16="http://schemas.microsoft.com/office/drawing/2014/main" id="{183FB585-6F48-48AE-8B55-C03543F5EA38}"/>
+              </a:ext>
+            </a:extLst>
+          </p:cNvPr>
+          <p:cNvSpPr>
+            <a:spLocks xmlns:a="http://schemas.openxmlformats.org/drawingml/2006/main" noGrp="1"/>
+          </p:cNvSpPr>
+          <p:nvPr/>
+        </p:nvSpPr>
+        <p:spPr>
+          <a:xfrm xmlns:a="http://schemas.openxmlformats.org/drawingml/2006/main">
+            <a:off x="685800" y="6400800"/>
+            <a:ext cx="4000500" cy="228600"/>
+          </a:xfrm>
+          <a:prstGeom xmlns:a="http://schemas.openxmlformats.org/drawingml/2006/main" prst="rect">
+            <a:avLst/>
+          </a:prstGeom>
+          <a:ln xmlns:a="http://schemas.openxmlformats.org/drawingml/2006/main" w="0">
+            <a:solidFill>
+              <a:srgbClr val="FFFFFF"/>
+            </a:solidFill>
+            <a:prstDash val="solid"/>
+          </a:ln>
+        </p:spPr>
+        <p:txBody>
+          <a:bodyPr xmlns:a="http://schemas.openxmlformats.org/drawingml/2006/main" anchor="t"/>
+          <a:lstStyle xmlns:a="http://schemas.openxmlformats.org/drawingml/2006/main"/>
+          <a:p xmlns:a="http://schemas.openxmlformats.org/drawingml/2006/main">
+            <a:pPr algn="l">
+              <a:defRPr sz="900" b="0">
+                <a:solidFill>
+                  <a:srgbClr val="7B8798"/>
+                </a:solidFill>
+              </a:defRPr>
+            </a:pPr>
+            <a:r>
+              <a:rPr sz="900" b="0">
+                <a:solidFill>
+                  <a:srgbClr val="7B8798"/>
+                </a:solidFill>
+              </a:rPr>
+              <a:t>Blueprint Books for Raves</a:t>
+            </a:r>
+          </a:p>
+        </p:txBody>
+      </p:sp>
+      <p:sp>
+        <p:nvSpPr>
+          <p:cNvPr id="21" name="">
+            <a:extLst xmlns:a="http://schemas.openxmlformats.org/drawingml/2006/main">
+              <a:ext uri="{FF2B5EF4-FFF2-40B4-BE49-F238E27FC236}">
+                <a16:creationId xmlns:a16="http://schemas.microsoft.com/office/drawing/2014/main" id="{6CFF6698-99F1-48D2-9F2C-DB6DB78B2483}"/>
+              </a:ext>
+            </a:extLst>
+          </p:cNvPr>
+          <p:cNvSpPr>
+            <a:spLocks xmlns:a="http://schemas.openxmlformats.org/drawingml/2006/main" noGrp="1"/>
+          </p:cNvSpPr>
+          <p:nvPr/>
+        </p:nvSpPr>
+        <p:spPr>
+          <a:xfrm xmlns:a="http://schemas.openxmlformats.org/drawingml/2006/main">
+            <a:off x="11049000" y="6400800"/>
+            <a:ext cx="457200" cy="228600"/>
+          </a:xfrm>
+          <a:prstGeom xmlns:a="http://schemas.openxmlformats.org/drawingml/2006/main" prst="rect">
+            <a:avLst/>
+          </a:prstGeom>
+          <a:ln xmlns:a="http://schemas.openxmlformats.org/drawingml/2006/main" w="0">
+            <a:solidFill>
+              <a:srgbClr val="FFFFFF"/>
+            </a:solidFill>
+            <a:prstDash val="solid"/>
+          </a:ln>
+        </p:spPr>
+        <p:txBody>
+          <a:bodyPr xmlns:a="http://schemas.openxmlformats.org/drawingml/2006/main" anchor="t"/>
+          <a:lstStyle xmlns:a="http://schemas.openxmlformats.org/drawingml/2006/main"/>
+          <a:p xmlns:a="http://schemas.openxmlformats.org/drawingml/2006/main">
+            <a:pPr algn="r">
+              <a:defRPr sz="900" b="0">
+                <a:solidFill>
+                  <a:srgbClr val="7B8798"/>
+                </a:solidFill>
+              </a:defRPr>
+            </a:pPr>
+            <a:r>
+              <a:rPr sz="900" b="0">
+                <a:solidFill>
+                  <a:srgbClr val="7B8798"/>
+                </a:solidFill>
+              </a:rPr>
+              <a:t>08</a:t>
+            </a:r>
+          </a:p>
+        </p:txBody>
+      </p:sp>
+    </p:spTree>
+    <p:extLst>
+      <p:ext uri="{BB962C8B-B14F-4D97-AF65-F5344CB8AC3E}">
+        <p14:creationId xmlns:p14="http://schemas.microsoft.com/office/powerpoint/2010/main" val="930396045"/>
+      </p:ext>
+    </p:extLst>
+  </p:cSld>
+</p:sld>
+</file>
+
+<file path=ppt/slides/slide9.xml><?xml version="1.0" encoding="utf-8"?>
+<p:sld xmlns:p="http://schemas.openxmlformats.org/presentationml/2006/main">
+  <p:cSld>
+    <p:spTree>
+      <p:nvGrpSpPr>
+        <p:cNvPr id="1" name=""/>
+        <p:cNvGrpSpPr/>
+        <p:nvPr/>
+      </p:nvGrpSpPr>
+      <p:grpSpPr>
+        <a:xfrm xmlns:a="http://schemas.openxmlformats.org/drawingml/2006/main"/>
+      </p:grpSpPr>
+      <p:sp>
+        <p:nvSpPr>
+          <p:cNvPr id="1" name="">
+            <a:extLst xmlns:a="http://schemas.openxmlformats.org/drawingml/2006/main">
+              <a:ext uri="{FF2B5EF4-FFF2-40B4-BE49-F238E27FC236}">
+                <a16:creationId xmlns:a16="http://schemas.microsoft.com/office/drawing/2014/main" id="{61B051F0-84F3-4EC1-8F81-AEEDA36CBFA9}"/>
+              </a:ext>
+            </a:extLst>
+          </p:cNvPr>
+          <p:cNvSpPr>
+            <a:spLocks xmlns:a="http://schemas.openxmlformats.org/drawingml/2006/main" noGrp="1"/>
+          </p:cNvSpPr>
+          <p:nvPr/>
+        </p:nvSpPr>
+        <p:spPr>
+          <a:xfrm xmlns:a="http://schemas.openxmlformats.org/drawingml/2006/main">
+            <a:off x="0" y="0"/>
+            <a:ext cx="12192000" cy="6858000"/>
+          </a:xfrm>
+          <a:prstGeom xmlns:a="http://schemas.openxmlformats.org/drawingml/2006/main" prst="rect">
+            <a:avLst/>
+          </a:prstGeom>
+          <a:solidFill xmlns:a="http://schemas.openxmlformats.org/drawingml/2006/main">
+            <a:srgbClr val="F5F8FC"/>
+          </a:solidFill>
+          <a:ln xmlns:a="http://schemas.openxmlformats.org/drawingml/2006/main" w="0">
+            <a:solidFill>
+              <a:srgbClr val="F5F8FC"/>
+            </a:solidFill>
+            <a:prstDash val="solid"/>
+          </a:ln>
+        </p:spPr>
+      </p:sp>
+      <p:sp>
+        <p:nvSpPr>
+          <p:cNvPr id="2" name="">
+            <a:extLst xmlns:a="http://schemas.openxmlformats.org/drawingml/2006/main">
+              <a:ext uri="{FF2B5EF4-FFF2-40B4-BE49-F238E27FC236}">
+                <a16:creationId xmlns:a16="http://schemas.microsoft.com/office/drawing/2014/main" id="{0786228F-E109-4E84-A06A-BF505A1D6E03}"/>
+              </a:ext>
+            </a:extLst>
+          </p:cNvPr>
+          <p:cNvSpPr>
+            <a:spLocks xmlns:a="http://schemas.openxmlformats.org/drawingml/2006/main" noGrp="1"/>
+          </p:cNvSpPr>
+          <p:nvPr/>
+        </p:nvSpPr>
+        <p:spPr>
+          <a:xfrm xmlns:a="http://schemas.openxmlformats.org/drawingml/2006/main">
+            <a:off x="685800" y="457200"/>
+            <a:ext cx="7048500" cy="285750"/>
+          </a:xfrm>
+          <a:prstGeom xmlns:a="http://schemas.openxmlformats.org/drawingml/2006/main" prst="rect">
+            <a:avLst/>
+          </a:prstGeom>
+          <a:ln xmlns:a="http://schemas.openxmlformats.org/drawingml/2006/main" w="0">
+            <a:solidFill>
+              <a:srgbClr val="FFFFFF"/>
+            </a:solidFill>
+            <a:prstDash val="solid"/>
+          </a:ln>
+        </p:spPr>
+        <p:txBody>
+          <a:bodyPr xmlns:a="http://schemas.openxmlformats.org/drawingml/2006/main" anchor="t"/>
+          <a:lstStyle xmlns:a="http://schemas.openxmlformats.org/drawingml/2006/main"/>
+          <a:p xmlns:a="http://schemas.openxmlformats.org/drawingml/2006/main">
+            <a:pPr algn="l">
+              <a:defRPr sz="1050" b="1">
+                <a:solidFill>
+                  <a:srgbClr val="5F6F86"/>
+                </a:solidFill>
+              </a:defRPr>
+            </a:pPr>
+            <a:r>
+              <a:rPr sz="1050" b="1">
+                <a:solidFill>
+                  <a:srgbClr val="5F6F86"/>
+                </a:solidFill>
+              </a:rPr>
+              <a:t>MUTUAL ACTION PLAN</a:t>
+            </a:r>
+          </a:p>
+        </p:txBody>
+      </p:sp>
+      <p:sp>
+        <p:nvSpPr>
+          <p:cNvPr id="3" name="">
+            <a:extLst xmlns:a="http://schemas.openxmlformats.org/drawingml/2006/main">
+              <a:ext uri="{FF2B5EF4-FFF2-40B4-BE49-F238E27FC236}">
+                <a16:creationId xmlns:a16="http://schemas.microsoft.com/office/drawing/2014/main" id="{2B57EFAE-7866-471C-9A33-78E06310B7D6}"/>
+              </a:ext>
+            </a:extLst>
+          </p:cNvPr>
+          <p:cNvSpPr>
+            <a:spLocks xmlns:a="http://schemas.openxmlformats.org/drawingml/2006/main" noGrp="1"/>
+          </p:cNvSpPr>
+          <p:nvPr/>
+        </p:nvSpPr>
+        <p:spPr>
+          <a:xfrm xmlns:a="http://schemas.openxmlformats.org/drawingml/2006/main">
+            <a:off x="685800" y="819150"/>
+            <a:ext cx="8953500" cy="876300"/>
+          </a:xfrm>
+          <a:prstGeom xmlns:a="http://schemas.openxmlformats.org/drawingml/2006/main" prst="rect">
+            <a:avLst/>
+          </a:prstGeom>
+          <a:ln xmlns:a="http://schemas.openxmlformats.org/drawingml/2006/main" w="0">
+            <a:solidFill>
+              <a:srgbClr val="FFFFFF"/>
+            </a:solidFill>
+            <a:prstDash val="solid"/>
+          </a:ln>
+        </p:spPr>
+        <p:txBody>
+          <a:bodyPr xmlns:a="http://schemas.openxmlformats.org/drawingml/2006/main" anchor="t"/>
+          <a:lstStyle xmlns:a="http://schemas.openxmlformats.org/drawingml/2006/main"/>
+          <a:p xmlns:a="http://schemas.openxmlformats.org/drawingml/2006/main">
+            <a:pPr algn="l">
+              <a:defRPr sz="2700" b="1">
+                <a:solidFill>
+                  <a:srgbClr val="172033"/>
+                </a:solidFill>
+              </a:defRPr>
+            </a:pPr>
+            <a:r>
+              <a:rPr sz="2700" b="1">
+                <a:solidFill>
+                  <a:srgbClr val="172033"/>
+                </a:solidFill>
+              </a:rPr>
+              <a:t>A simple path from decision to first clean month-end.</a:t>
+            </a:r>
+          </a:p>
+        </p:txBody>
+      </p:sp>
+      <p:sp>
+        <p:nvSpPr>
+          <p:cNvPr id="4" name="">
+            <a:extLst xmlns:a="http://schemas.openxmlformats.org/drawingml/2006/main">
+              <a:ext uri="{FF2B5EF4-FFF2-40B4-BE49-F238E27FC236}">
+                <a16:creationId xmlns:a16="http://schemas.microsoft.com/office/drawing/2014/main" id="{8A203550-88A3-44B9-B661-94F22AD63E28}"/>
+              </a:ext>
+            </a:extLst>
+          </p:cNvPr>
+          <p:cNvSpPr>
+            <a:spLocks xmlns:a="http://schemas.openxmlformats.org/drawingml/2006/main" noGrp="1"/>
+          </p:cNvSpPr>
+          <p:nvPr/>
+        </p:nvSpPr>
+        <p:spPr>
+          <a:xfrm xmlns:a="http://schemas.openxmlformats.org/drawingml/2006/main">
+            <a:off x="685800" y="2667000"/>
+            <a:ext cx="1676400" cy="1676400"/>
+          </a:xfrm>
+          <a:prstGeom xmlns:a="http://schemas.openxmlformats.org/drawingml/2006/main" prst="rect">
+            <a:avLst/>
+          </a:prstGeom>
+          <a:solidFill xmlns:a="http://schemas.openxmlformats.org/drawingml/2006/main">
+            <a:srgbClr val="FFFFFF"/>
+          </a:solidFill>
+          <a:ln xmlns:a="http://schemas.openxmlformats.org/drawingml/2006/main" w="0">
+            <a:solidFill>
+              <a:srgbClr val="D8E2ED"/>
+            </a:solidFill>
+            <a:prstDash val="solid"/>
+          </a:ln>
+        </p:spPr>
+      </p:sp>
+      <p:sp>
+        <p:nvSpPr>
+          <p:cNvPr id="5" name="">
+            <a:extLst xmlns:a="http://schemas.openxmlformats.org/drawingml/2006/main">
+              <a:ext uri="{FF2B5EF4-FFF2-40B4-BE49-F238E27FC236}">
+                <a16:creationId xmlns:a16="http://schemas.microsoft.com/office/drawing/2014/main" id="{18B00CC6-0139-4523-8E7A-A5466E058F99}"/>
+              </a:ext>
+            </a:extLst>
+          </p:cNvPr>
+          <p:cNvSpPr>
+            <a:spLocks xmlns:a="http://schemas.openxmlformats.org/drawingml/2006/main" noGrp="1"/>
+          </p:cNvSpPr>
+          <p:nvPr/>
+        </p:nvSpPr>
+        <p:spPr>
+          <a:xfrm xmlns:a="http://schemas.openxmlformats.org/drawingml/2006/main">
+            <a:off x="857250" y="2895600"/>
+            <a:ext cx="419100" cy="419100"/>
           </a:xfrm>
           <a:prstGeom xmlns:a="http://schemas.openxmlformats.org/drawingml/2006/main" prst="rect">
             <a:avLst/>
@@ -10872,22 +11834,73 @@
       </p:sp>
       <p:sp>
         <p:nvSpPr>
-          <p:cNvPr id="14" name="">
-            <a:extLst xmlns:a="http://schemas.openxmlformats.org/drawingml/2006/main">
-              <a:ext uri="{FF2B5EF4-FFF2-40B4-BE49-F238E27FC236}">
-                <a16:creationId xmlns:a16="http://schemas.microsoft.com/office/drawing/2014/main" id="{8DCF2E46-F217-45B7-9067-0FBB1317FB49}"/>
-              </a:ext>
-            </a:extLst>
-          </p:cNvPr>
-          <p:cNvSpPr>
-            <a:spLocks xmlns:a="http://schemas.openxmlformats.org/drawingml/2006/main" noGrp="1"/>
-          </p:cNvSpPr>
-          <p:nvPr/>
-        </p:nvSpPr>
-        <p:spPr>
-          <a:xfrm xmlns:a="http://schemas.openxmlformats.org/drawingml/2006/main">
-            <a:off x="1752600" y="5257800"/>
-            <a:ext cx="2286000" cy="285750"/>
+          <p:cNvPr id="6" name="">
+            <a:extLst xmlns:a="http://schemas.openxmlformats.org/drawingml/2006/main">
+              <a:ext uri="{FF2B5EF4-FFF2-40B4-BE49-F238E27FC236}">
+                <a16:creationId xmlns:a16="http://schemas.microsoft.com/office/drawing/2014/main" id="{5C044C1A-994F-4016-84DA-48878C3BEA1A}"/>
+              </a:ext>
+            </a:extLst>
+          </p:cNvPr>
+          <p:cNvSpPr>
+            <a:spLocks xmlns:a="http://schemas.openxmlformats.org/drawingml/2006/main" noGrp="1"/>
+          </p:cNvSpPr>
+          <p:nvPr/>
+        </p:nvSpPr>
+        <p:spPr>
+          <a:xfrm xmlns:a="http://schemas.openxmlformats.org/drawingml/2006/main">
+            <a:off x="857250" y="2962275"/>
+            <a:ext cx="419100" cy="285750"/>
+          </a:xfrm>
+          <a:prstGeom xmlns:a="http://schemas.openxmlformats.org/drawingml/2006/main" prst="rect">
+            <a:avLst/>
+          </a:prstGeom>
+          <a:ln xmlns:a="http://schemas.openxmlformats.org/drawingml/2006/main" w="0">
+            <a:solidFill>
+              <a:srgbClr val="FFFFFF"/>
+            </a:solidFill>
+            <a:prstDash val="solid"/>
+          </a:ln>
+        </p:spPr>
+        <p:txBody>
+          <a:bodyPr xmlns:a="http://schemas.openxmlformats.org/drawingml/2006/main" anchor="t"/>
+          <a:lstStyle xmlns:a="http://schemas.openxmlformats.org/drawingml/2006/main"/>
+          <a:p xmlns:a="http://schemas.openxmlformats.org/drawingml/2006/main">
+            <a:pPr algn="ctr">
+              <a:defRPr sz="1500" b="1">
+                <a:solidFill>
+                  <a:srgbClr val="FFFFFF"/>
+                </a:solidFill>
+              </a:defRPr>
+            </a:pPr>
+            <a:r>
+              <a:rPr sz="1500" b="1">
+                <a:solidFill>
+                  <a:srgbClr val="FFFFFF"/>
+                </a:solidFill>
+              </a:rPr>
+              <a:t>1</a:t>
+            </a:r>
+          </a:p>
+        </p:txBody>
+      </p:sp>
+      <p:sp>
+        <p:nvSpPr>
+          <p:cNvPr id="7" name="">
+            <a:extLst xmlns:a="http://schemas.openxmlformats.org/drawingml/2006/main">
+              <a:ext uri="{FF2B5EF4-FFF2-40B4-BE49-F238E27FC236}">
+                <a16:creationId xmlns:a16="http://schemas.microsoft.com/office/drawing/2014/main" id="{8BE8F063-52B9-4270-A47A-E235F9C87804}"/>
+              </a:ext>
+            </a:extLst>
+          </p:cNvPr>
+          <p:cNvSpPr>
+            <a:spLocks xmlns:a="http://schemas.openxmlformats.org/drawingml/2006/main" noGrp="1"/>
+          </p:cNvSpPr>
+          <p:nvPr/>
+        </p:nvSpPr>
+        <p:spPr>
+          <a:xfrm xmlns:a="http://schemas.openxmlformats.org/drawingml/2006/main">
+            <a:off x="857250" y="3524250"/>
+            <a:ext cx="1295400" cy="304800"/>
           </a:xfrm>
           <a:prstGeom xmlns:a="http://schemas.openxmlformats.org/drawingml/2006/main" prst="rect">
             <a:avLst/>
@@ -10904,41 +11917,41 @@
           <a:lstStyle xmlns:a="http://schemas.openxmlformats.org/drawingml/2006/main"/>
           <a:p xmlns:a="http://schemas.openxmlformats.org/drawingml/2006/main">
             <a:pPr algn="l">
-              <a:defRPr sz="1350" b="1">
+              <a:defRPr sz="1275" b="1">
                 <a:solidFill>
                   <a:srgbClr val="172033"/>
                 </a:solidFill>
               </a:defRPr>
             </a:pPr>
             <a:r>
-              <a:rPr sz="1350" b="1">
+              <a:rPr sz="1275" b="1">
                 <a:solidFill>
                   <a:srgbClr val="172033"/>
                 </a:solidFill>
               </a:rPr>
-              <a:t>Next artifact</a:t>
-            </a:r>
-          </a:p>
-        </p:txBody>
-      </p:sp>
-      <p:sp>
-        <p:nvSpPr>
-          <p:cNvPr id="15" name="">
-            <a:extLst xmlns:a="http://schemas.openxmlformats.org/drawingml/2006/main">
-              <a:ext uri="{FF2B5EF4-FFF2-40B4-BE49-F238E27FC236}">
-                <a16:creationId xmlns:a16="http://schemas.microsoft.com/office/drawing/2014/main" id="{679D4A08-64F6-498E-BEFC-184BA2E5033F}"/>
-              </a:ext>
-            </a:extLst>
-          </p:cNvPr>
-          <p:cNvSpPr>
-            <a:spLocks xmlns:a="http://schemas.openxmlformats.org/drawingml/2006/main" noGrp="1"/>
-          </p:cNvSpPr>
-          <p:nvPr/>
-        </p:nvSpPr>
-        <p:spPr>
-          <a:xfrm xmlns:a="http://schemas.openxmlformats.org/drawingml/2006/main">
-            <a:off x="1752600" y="5619750"/>
-            <a:ext cx="2266950" cy="228600"/>
+              <a:t>Select package</a:t>
+            </a:r>
+          </a:p>
+        </p:txBody>
+      </p:sp>
+      <p:sp>
+        <p:nvSpPr>
+          <p:cNvPr id="8" name="">
+            <a:extLst xmlns:a="http://schemas.openxmlformats.org/drawingml/2006/main">
+              <a:ext uri="{FF2B5EF4-FFF2-40B4-BE49-F238E27FC236}">
+                <a16:creationId xmlns:a16="http://schemas.microsoft.com/office/drawing/2014/main" id="{8783B6A4-2C03-4917-ACAB-559F86BE765C}"/>
+              </a:ext>
+            </a:extLst>
+          </p:cNvPr>
+          <p:cNvSpPr>
+            <a:spLocks xmlns:a="http://schemas.openxmlformats.org/drawingml/2006/main" noGrp="1"/>
+          </p:cNvSpPr>
+          <p:nvPr/>
+        </p:nvSpPr>
+        <p:spPr>
+          <a:xfrm xmlns:a="http://schemas.openxmlformats.org/drawingml/2006/main">
+            <a:off x="857250" y="3905250"/>
+            <a:ext cx="1295400" cy="742950"/>
           </a:xfrm>
           <a:prstGeom xmlns:a="http://schemas.openxmlformats.org/drawingml/2006/main" prst="rect">
             <a:avLst/>
@@ -10955,41 +11968,92 @@
           <a:lstStyle xmlns:a="http://schemas.openxmlformats.org/drawingml/2006/main"/>
           <a:p xmlns:a="http://schemas.openxmlformats.org/drawingml/2006/main">
             <a:pPr algn="l">
-              <a:defRPr sz="1050" b="0">
+              <a:defRPr sz="900" b="0">
                 <a:solidFill>
                   <a:srgbClr val="5F6F86"/>
                 </a:solidFill>
               </a:defRPr>
             </a:pPr>
             <a:r>
-              <a:rPr sz="1050" b="0">
+              <a:rPr sz="900" b="0">
                 <a:solidFill>
                   <a:srgbClr val="5F6F86"/>
                 </a:solidFill>
               </a:rPr>
-              <a:t>One-page Books SOW and opening-balance checklist.</a:t>
-            </a:r>
-          </a:p>
-        </p:txBody>
-      </p:sp>
-      <p:sp>
-        <p:nvSpPr>
-          <p:cNvPr id="16" name="">
-            <a:extLst xmlns:a="http://schemas.openxmlformats.org/drawingml/2006/main">
-              <a:ext uri="{FF2B5EF4-FFF2-40B4-BE49-F238E27FC236}">
-                <a16:creationId xmlns:a16="http://schemas.microsoft.com/office/drawing/2014/main" id="{C88002BF-4A2F-458B-AC47-46CA07FB53AF}"/>
-              </a:ext>
-            </a:extLst>
-          </p:cNvPr>
-          <p:cNvSpPr>
-            <a:spLocks xmlns:a="http://schemas.openxmlformats.org/drawingml/2006/main" noGrp="1"/>
-          </p:cNvSpPr>
-          <p:nvPr/>
-        </p:nvSpPr>
-        <p:spPr>
-          <a:xfrm xmlns:a="http://schemas.openxmlformats.org/drawingml/2006/main">
-            <a:off x="4762500" y="5067300"/>
-            <a:ext cx="2667000" cy="914400"/>
+              <a:t>Confirm Books Foundation or the expanded Books Complete scope.</a:t>
+            </a:r>
+          </a:p>
+        </p:txBody>
+      </p:sp>
+      <p:sp>
+        <p:nvSpPr>
+          <p:cNvPr id="9" name="">
+            <a:extLst xmlns:a="http://schemas.openxmlformats.org/drawingml/2006/main">
+              <a:ext uri="{FF2B5EF4-FFF2-40B4-BE49-F238E27FC236}">
+                <a16:creationId xmlns:a16="http://schemas.microsoft.com/office/drawing/2014/main" id="{8120AAFF-14BE-48C2-88E5-7770535EF968}"/>
+              </a:ext>
+            </a:extLst>
+          </p:cNvPr>
+          <p:cNvSpPr>
+            <a:spLocks xmlns:a="http://schemas.openxmlformats.org/drawingml/2006/main" noGrp="1"/>
+          </p:cNvSpPr>
+          <p:nvPr/>
+        </p:nvSpPr>
+        <p:spPr>
+          <a:xfrm xmlns:a="http://schemas.openxmlformats.org/drawingml/2006/main">
+            <a:off x="2438400" y="3314700"/>
+            <a:ext cx="323850" cy="323850"/>
+          </a:xfrm>
+          <a:prstGeom xmlns:a="http://schemas.openxmlformats.org/drawingml/2006/main" prst="rect">
+            <a:avLst/>
+          </a:prstGeom>
+          <a:ln xmlns:a="http://schemas.openxmlformats.org/drawingml/2006/main" w="0">
+            <a:solidFill>
+              <a:srgbClr val="FFFFFF"/>
+            </a:solidFill>
+            <a:prstDash val="solid"/>
+          </a:ln>
+        </p:spPr>
+        <p:txBody>
+          <a:bodyPr xmlns:a="http://schemas.openxmlformats.org/drawingml/2006/main" anchor="ctr"/>
+          <a:lstStyle xmlns:a="http://schemas.openxmlformats.org/drawingml/2006/main"/>
+          <a:p xmlns:a="http://schemas.openxmlformats.org/drawingml/2006/main">
+            <a:pPr algn="ctr">
+              <a:defRPr sz="1650" b="1">
+                <a:solidFill>
+                  <a:srgbClr val="145DA0"/>
+                </a:solidFill>
+              </a:defRPr>
+            </a:pPr>
+            <a:r>
+              <a:rPr sz="1650" b="1">
+                <a:solidFill>
+                  <a:srgbClr val="145DA0"/>
+                </a:solidFill>
+              </a:rPr>
+              <a:t>-&gt;</a:t>
+            </a:r>
+          </a:p>
+        </p:txBody>
+      </p:sp>
+      <p:sp>
+        <p:nvSpPr>
+          <p:cNvPr id="10" name="">
+            <a:extLst xmlns:a="http://schemas.openxmlformats.org/drawingml/2006/main">
+              <a:ext uri="{FF2B5EF4-FFF2-40B4-BE49-F238E27FC236}">
+                <a16:creationId xmlns:a16="http://schemas.microsoft.com/office/drawing/2014/main" id="{274E7210-6B4B-4DA5-90BA-0495887793C8}"/>
+              </a:ext>
+            </a:extLst>
+          </p:cNvPr>
+          <p:cNvSpPr>
+            <a:spLocks xmlns:a="http://schemas.openxmlformats.org/drawingml/2006/main" noGrp="1"/>
+          </p:cNvSpPr>
+          <p:nvPr/>
+        </p:nvSpPr>
+        <p:spPr>
+          <a:xfrm xmlns:a="http://schemas.openxmlformats.org/drawingml/2006/main">
+            <a:off x="2895600" y="2667000"/>
+            <a:ext cx="1676400" cy="1676400"/>
           </a:xfrm>
           <a:prstGeom xmlns:a="http://schemas.openxmlformats.org/drawingml/2006/main" prst="rect">
             <a:avLst/>
@@ -11007,22 +12071,562 @@
       </p:sp>
       <p:sp>
         <p:nvSpPr>
+          <p:cNvPr id="11" name="">
+            <a:extLst xmlns:a="http://schemas.openxmlformats.org/drawingml/2006/main">
+              <a:ext uri="{FF2B5EF4-FFF2-40B4-BE49-F238E27FC236}">
+                <a16:creationId xmlns:a16="http://schemas.microsoft.com/office/drawing/2014/main" id="{DC5259C2-C559-40ED-A8B4-6E5EECB8FD47}"/>
+              </a:ext>
+            </a:extLst>
+          </p:cNvPr>
+          <p:cNvSpPr>
+            <a:spLocks xmlns:a="http://schemas.openxmlformats.org/drawingml/2006/main" noGrp="1"/>
+          </p:cNvSpPr>
+          <p:nvPr/>
+        </p:nvSpPr>
+        <p:spPr>
+          <a:xfrm xmlns:a="http://schemas.openxmlformats.org/drawingml/2006/main">
+            <a:off x="3067050" y="2895600"/>
+            <a:ext cx="419100" cy="419100"/>
+          </a:xfrm>
+          <a:prstGeom xmlns:a="http://schemas.openxmlformats.org/drawingml/2006/main" prst="rect">
+            <a:avLst/>
+          </a:prstGeom>
+          <a:solidFill xmlns:a="http://schemas.openxmlformats.org/drawingml/2006/main">
+            <a:srgbClr val="145DA0"/>
+          </a:solidFill>
+          <a:ln xmlns:a="http://schemas.openxmlformats.org/drawingml/2006/main" w="0">
+            <a:solidFill>
+              <a:srgbClr val="145DA0"/>
+            </a:solidFill>
+            <a:prstDash val="solid"/>
+          </a:ln>
+        </p:spPr>
+      </p:sp>
+      <p:sp>
+        <p:nvSpPr>
+          <p:cNvPr id="12" name="">
+            <a:extLst xmlns:a="http://schemas.openxmlformats.org/drawingml/2006/main">
+              <a:ext uri="{FF2B5EF4-FFF2-40B4-BE49-F238E27FC236}">
+                <a16:creationId xmlns:a16="http://schemas.microsoft.com/office/drawing/2014/main" id="{F164FBFC-89C6-4D5A-8139-2C79CEAD1FA2}"/>
+              </a:ext>
+            </a:extLst>
+          </p:cNvPr>
+          <p:cNvSpPr>
+            <a:spLocks xmlns:a="http://schemas.openxmlformats.org/drawingml/2006/main" noGrp="1"/>
+          </p:cNvSpPr>
+          <p:nvPr/>
+        </p:nvSpPr>
+        <p:spPr>
+          <a:xfrm xmlns:a="http://schemas.openxmlformats.org/drawingml/2006/main">
+            <a:off x="3067050" y="2962275"/>
+            <a:ext cx="419100" cy="285750"/>
+          </a:xfrm>
+          <a:prstGeom xmlns:a="http://schemas.openxmlformats.org/drawingml/2006/main" prst="rect">
+            <a:avLst/>
+          </a:prstGeom>
+          <a:ln xmlns:a="http://schemas.openxmlformats.org/drawingml/2006/main" w="0">
+            <a:solidFill>
+              <a:srgbClr val="FFFFFF"/>
+            </a:solidFill>
+            <a:prstDash val="solid"/>
+          </a:ln>
+        </p:spPr>
+        <p:txBody>
+          <a:bodyPr xmlns:a="http://schemas.openxmlformats.org/drawingml/2006/main" anchor="t"/>
+          <a:lstStyle xmlns:a="http://schemas.openxmlformats.org/drawingml/2006/main"/>
+          <a:p xmlns:a="http://schemas.openxmlformats.org/drawingml/2006/main">
+            <a:pPr algn="ctr">
+              <a:defRPr sz="1500" b="1">
+                <a:solidFill>
+                  <a:srgbClr val="FFFFFF"/>
+                </a:solidFill>
+              </a:defRPr>
+            </a:pPr>
+            <a:r>
+              <a:rPr sz="1500" b="1">
+                <a:solidFill>
+                  <a:srgbClr val="FFFFFF"/>
+                </a:solidFill>
+              </a:rPr>
+              <a:t>2</a:t>
+            </a:r>
+          </a:p>
+        </p:txBody>
+      </p:sp>
+      <p:sp>
+        <p:nvSpPr>
+          <p:cNvPr id="13" name="">
+            <a:extLst xmlns:a="http://schemas.openxmlformats.org/drawingml/2006/main">
+              <a:ext uri="{FF2B5EF4-FFF2-40B4-BE49-F238E27FC236}">
+                <a16:creationId xmlns:a16="http://schemas.microsoft.com/office/drawing/2014/main" id="{9F7D7ADB-C31B-4266-BCFD-609101DDC9D7}"/>
+              </a:ext>
+            </a:extLst>
+          </p:cNvPr>
+          <p:cNvSpPr>
+            <a:spLocks xmlns:a="http://schemas.openxmlformats.org/drawingml/2006/main" noGrp="1"/>
+          </p:cNvSpPr>
+          <p:nvPr/>
+        </p:nvSpPr>
+        <p:spPr>
+          <a:xfrm xmlns:a="http://schemas.openxmlformats.org/drawingml/2006/main">
+            <a:off x="3067050" y="3524250"/>
+            <a:ext cx="1295400" cy="304800"/>
+          </a:xfrm>
+          <a:prstGeom xmlns:a="http://schemas.openxmlformats.org/drawingml/2006/main" prst="rect">
+            <a:avLst/>
+          </a:prstGeom>
+          <a:ln xmlns:a="http://schemas.openxmlformats.org/drawingml/2006/main" w="0">
+            <a:solidFill>
+              <a:srgbClr val="FFFFFF"/>
+            </a:solidFill>
+            <a:prstDash val="solid"/>
+          </a:ln>
+        </p:spPr>
+        <p:txBody>
+          <a:bodyPr xmlns:a="http://schemas.openxmlformats.org/drawingml/2006/main" anchor="t"/>
+          <a:lstStyle xmlns:a="http://schemas.openxmlformats.org/drawingml/2006/main"/>
+          <a:p xmlns:a="http://schemas.openxmlformats.org/drawingml/2006/main">
+            <a:pPr algn="l">
+              <a:defRPr sz="1275" b="1">
+                <a:solidFill>
+                  <a:srgbClr val="172033"/>
+                </a:solidFill>
+              </a:defRPr>
+            </a:pPr>
+            <a:r>
+              <a:rPr sz="1275" b="1">
+                <a:solidFill>
+                  <a:srgbClr val="172033"/>
+                </a:solidFill>
+              </a:rPr>
+              <a:t>Approve SOW</a:t>
+            </a:r>
+          </a:p>
+        </p:txBody>
+      </p:sp>
+      <p:sp>
+        <p:nvSpPr>
+          <p:cNvPr id="14" name="">
+            <a:extLst xmlns:a="http://schemas.openxmlformats.org/drawingml/2006/main">
+              <a:ext uri="{FF2B5EF4-FFF2-40B4-BE49-F238E27FC236}">
+                <a16:creationId xmlns:a16="http://schemas.microsoft.com/office/drawing/2014/main" id="{46C20AA3-1FCA-4662-ADEA-6BF68CD65279}"/>
+              </a:ext>
+            </a:extLst>
+          </p:cNvPr>
+          <p:cNvSpPr>
+            <a:spLocks xmlns:a="http://schemas.openxmlformats.org/drawingml/2006/main" noGrp="1"/>
+          </p:cNvSpPr>
+          <p:nvPr/>
+        </p:nvSpPr>
+        <p:spPr>
+          <a:xfrm xmlns:a="http://schemas.openxmlformats.org/drawingml/2006/main">
+            <a:off x="3067050" y="3905250"/>
+            <a:ext cx="1295400" cy="742950"/>
+          </a:xfrm>
+          <a:prstGeom xmlns:a="http://schemas.openxmlformats.org/drawingml/2006/main" prst="rect">
+            <a:avLst/>
+          </a:prstGeom>
+          <a:ln xmlns:a="http://schemas.openxmlformats.org/drawingml/2006/main" w="0">
+            <a:solidFill>
+              <a:srgbClr val="FFFFFF"/>
+            </a:solidFill>
+            <a:prstDash val="solid"/>
+          </a:ln>
+        </p:spPr>
+        <p:txBody>
+          <a:bodyPr xmlns:a="http://schemas.openxmlformats.org/drawingml/2006/main" anchor="t"/>
+          <a:lstStyle xmlns:a="http://schemas.openxmlformats.org/drawingml/2006/main"/>
+          <a:p xmlns:a="http://schemas.openxmlformats.org/drawingml/2006/main">
+            <a:pPr algn="l">
+              <a:defRPr sz="900" b="0">
+                <a:solidFill>
+                  <a:srgbClr val="5F6F86"/>
+                </a:solidFill>
+              </a:defRPr>
+            </a:pPr>
+            <a:r>
+              <a:rPr sz="900" b="0">
+                <a:solidFill>
+                  <a:srgbClr val="5F6F86"/>
+                </a:solidFill>
+              </a:rPr>
+              <a:t>Name the approval owner and target decision date.</a:t>
+            </a:r>
+          </a:p>
+        </p:txBody>
+      </p:sp>
+      <p:sp>
+        <p:nvSpPr>
+          <p:cNvPr id="15" name="">
+            <a:extLst xmlns:a="http://schemas.openxmlformats.org/drawingml/2006/main">
+              <a:ext uri="{FF2B5EF4-FFF2-40B4-BE49-F238E27FC236}">
+                <a16:creationId xmlns:a16="http://schemas.microsoft.com/office/drawing/2014/main" id="{A8FAA5DB-2EC9-4C33-BA05-608F5D94B713}"/>
+              </a:ext>
+            </a:extLst>
+          </p:cNvPr>
+          <p:cNvSpPr>
+            <a:spLocks xmlns:a="http://schemas.openxmlformats.org/drawingml/2006/main" noGrp="1"/>
+          </p:cNvSpPr>
+          <p:nvPr/>
+        </p:nvSpPr>
+        <p:spPr>
+          <a:xfrm xmlns:a="http://schemas.openxmlformats.org/drawingml/2006/main">
+            <a:off x="4648200" y="3314700"/>
+            <a:ext cx="323850" cy="323850"/>
+          </a:xfrm>
+          <a:prstGeom xmlns:a="http://schemas.openxmlformats.org/drawingml/2006/main" prst="rect">
+            <a:avLst/>
+          </a:prstGeom>
+          <a:ln xmlns:a="http://schemas.openxmlformats.org/drawingml/2006/main" w="0">
+            <a:solidFill>
+              <a:srgbClr val="FFFFFF"/>
+            </a:solidFill>
+            <a:prstDash val="solid"/>
+          </a:ln>
+        </p:spPr>
+        <p:txBody>
+          <a:bodyPr xmlns:a="http://schemas.openxmlformats.org/drawingml/2006/main" anchor="ctr"/>
+          <a:lstStyle xmlns:a="http://schemas.openxmlformats.org/drawingml/2006/main"/>
+          <a:p xmlns:a="http://schemas.openxmlformats.org/drawingml/2006/main">
+            <a:pPr algn="ctr">
+              <a:defRPr sz="1650" b="1">
+                <a:solidFill>
+                  <a:srgbClr val="145DA0"/>
+                </a:solidFill>
+              </a:defRPr>
+            </a:pPr>
+            <a:r>
+              <a:rPr sz="1650" b="1">
+                <a:solidFill>
+                  <a:srgbClr val="145DA0"/>
+                </a:solidFill>
+              </a:rPr>
+              <a:t>-&gt;</a:t>
+            </a:r>
+          </a:p>
+        </p:txBody>
+      </p:sp>
+      <p:sp>
+        <p:nvSpPr>
+          <p:cNvPr id="16" name="">
+            <a:extLst xmlns:a="http://schemas.openxmlformats.org/drawingml/2006/main">
+              <a:ext uri="{FF2B5EF4-FFF2-40B4-BE49-F238E27FC236}">
+                <a16:creationId xmlns:a16="http://schemas.microsoft.com/office/drawing/2014/main" id="{B5FE538E-D5EE-46B3-8DAF-9661FA5FAD47}"/>
+              </a:ext>
+            </a:extLst>
+          </p:cNvPr>
+          <p:cNvSpPr>
+            <a:spLocks xmlns:a="http://schemas.openxmlformats.org/drawingml/2006/main" noGrp="1"/>
+          </p:cNvSpPr>
+          <p:nvPr/>
+        </p:nvSpPr>
+        <p:spPr>
+          <a:xfrm xmlns:a="http://schemas.openxmlformats.org/drawingml/2006/main">
+            <a:off x="5105400" y="2667000"/>
+            <a:ext cx="1676400" cy="1676400"/>
+          </a:xfrm>
+          <a:prstGeom xmlns:a="http://schemas.openxmlformats.org/drawingml/2006/main" prst="rect">
+            <a:avLst/>
+          </a:prstGeom>
+          <a:solidFill xmlns:a="http://schemas.openxmlformats.org/drawingml/2006/main">
+            <a:srgbClr val="FFFFFF"/>
+          </a:solidFill>
+          <a:ln xmlns:a="http://schemas.openxmlformats.org/drawingml/2006/main" w="0">
+            <a:solidFill>
+              <a:srgbClr val="D8E2ED"/>
+            </a:solidFill>
+            <a:prstDash val="solid"/>
+          </a:ln>
+        </p:spPr>
+      </p:sp>
+      <p:sp>
+        <p:nvSpPr>
           <p:cNvPr id="17" name="">
             <a:extLst xmlns:a="http://schemas.openxmlformats.org/drawingml/2006/main">
               <a:ext uri="{FF2B5EF4-FFF2-40B4-BE49-F238E27FC236}">
-                <a16:creationId xmlns:a16="http://schemas.microsoft.com/office/drawing/2014/main" id="{303F41E0-1614-442F-BF75-5091CE0346DE}"/>
-              </a:ext>
-            </a:extLst>
-          </p:cNvPr>
-          <p:cNvSpPr>
-            <a:spLocks xmlns:a="http://schemas.openxmlformats.org/drawingml/2006/main" noGrp="1"/>
-          </p:cNvSpPr>
-          <p:nvPr/>
-        </p:nvSpPr>
-        <p:spPr>
-          <a:xfrm xmlns:a="http://schemas.openxmlformats.org/drawingml/2006/main">
-            <a:off x="4762500" y="5067300"/>
-            <a:ext cx="57150" cy="914400"/>
+                <a16:creationId xmlns:a16="http://schemas.microsoft.com/office/drawing/2014/main" id="{F22D529D-C089-471B-BE90-AD1CE3CA8799}"/>
+              </a:ext>
+            </a:extLst>
+          </p:cNvPr>
+          <p:cNvSpPr>
+            <a:spLocks xmlns:a="http://schemas.openxmlformats.org/drawingml/2006/main" noGrp="1"/>
+          </p:cNvSpPr>
+          <p:nvPr/>
+        </p:nvSpPr>
+        <p:spPr>
+          <a:xfrm xmlns:a="http://schemas.openxmlformats.org/drawingml/2006/main">
+            <a:off x="5276850" y="2895600"/>
+            <a:ext cx="419100" cy="419100"/>
+          </a:xfrm>
+          <a:prstGeom xmlns:a="http://schemas.openxmlformats.org/drawingml/2006/main" prst="rect">
+            <a:avLst/>
+          </a:prstGeom>
+          <a:solidFill xmlns:a="http://schemas.openxmlformats.org/drawingml/2006/main">
+            <a:srgbClr val="D98C16"/>
+          </a:solidFill>
+          <a:ln xmlns:a="http://schemas.openxmlformats.org/drawingml/2006/main" w="0">
+            <a:solidFill>
+              <a:srgbClr val="D98C16"/>
+            </a:solidFill>
+            <a:prstDash val="solid"/>
+          </a:ln>
+        </p:spPr>
+      </p:sp>
+      <p:sp>
+        <p:nvSpPr>
+          <p:cNvPr id="18" name="">
+            <a:extLst xmlns:a="http://schemas.openxmlformats.org/drawingml/2006/main">
+              <a:ext uri="{FF2B5EF4-FFF2-40B4-BE49-F238E27FC236}">
+                <a16:creationId xmlns:a16="http://schemas.microsoft.com/office/drawing/2014/main" id="{2FBAAE6A-FF83-486E-BA65-371B7FB91995}"/>
+              </a:ext>
+            </a:extLst>
+          </p:cNvPr>
+          <p:cNvSpPr>
+            <a:spLocks xmlns:a="http://schemas.openxmlformats.org/drawingml/2006/main" noGrp="1"/>
+          </p:cNvSpPr>
+          <p:nvPr/>
+        </p:nvSpPr>
+        <p:spPr>
+          <a:xfrm xmlns:a="http://schemas.openxmlformats.org/drawingml/2006/main">
+            <a:off x="5276850" y="2962275"/>
+            <a:ext cx="419100" cy="285750"/>
+          </a:xfrm>
+          <a:prstGeom xmlns:a="http://schemas.openxmlformats.org/drawingml/2006/main" prst="rect">
+            <a:avLst/>
+          </a:prstGeom>
+          <a:ln xmlns:a="http://schemas.openxmlformats.org/drawingml/2006/main" w="0">
+            <a:solidFill>
+              <a:srgbClr val="FFFFFF"/>
+            </a:solidFill>
+            <a:prstDash val="solid"/>
+          </a:ln>
+        </p:spPr>
+        <p:txBody>
+          <a:bodyPr xmlns:a="http://schemas.openxmlformats.org/drawingml/2006/main" anchor="t"/>
+          <a:lstStyle xmlns:a="http://schemas.openxmlformats.org/drawingml/2006/main"/>
+          <a:p xmlns:a="http://schemas.openxmlformats.org/drawingml/2006/main">
+            <a:pPr algn="ctr">
+              <a:defRPr sz="1500" b="1">
+                <a:solidFill>
+                  <a:srgbClr val="FFFFFF"/>
+                </a:solidFill>
+              </a:defRPr>
+            </a:pPr>
+            <a:r>
+              <a:rPr sz="1500" b="1">
+                <a:solidFill>
+                  <a:srgbClr val="FFFFFF"/>
+                </a:solidFill>
+              </a:rPr>
+              <a:t>3</a:t>
+            </a:r>
+          </a:p>
+        </p:txBody>
+      </p:sp>
+      <p:sp>
+        <p:nvSpPr>
+          <p:cNvPr id="19" name="">
+            <a:extLst xmlns:a="http://schemas.openxmlformats.org/drawingml/2006/main">
+              <a:ext uri="{FF2B5EF4-FFF2-40B4-BE49-F238E27FC236}">
+                <a16:creationId xmlns:a16="http://schemas.microsoft.com/office/drawing/2014/main" id="{3AE1D533-126D-4FBF-817D-2E215533BB35}"/>
+              </a:ext>
+            </a:extLst>
+          </p:cNvPr>
+          <p:cNvSpPr>
+            <a:spLocks xmlns:a="http://schemas.openxmlformats.org/drawingml/2006/main" noGrp="1"/>
+          </p:cNvSpPr>
+          <p:nvPr/>
+        </p:nvSpPr>
+        <p:spPr>
+          <a:xfrm xmlns:a="http://schemas.openxmlformats.org/drawingml/2006/main">
+            <a:off x="5276850" y="3524250"/>
+            <a:ext cx="1295400" cy="304800"/>
+          </a:xfrm>
+          <a:prstGeom xmlns:a="http://schemas.openxmlformats.org/drawingml/2006/main" prst="rect">
+            <a:avLst/>
+          </a:prstGeom>
+          <a:ln xmlns:a="http://schemas.openxmlformats.org/drawingml/2006/main" w="0">
+            <a:solidFill>
+              <a:srgbClr val="FFFFFF"/>
+            </a:solidFill>
+            <a:prstDash val="solid"/>
+          </a:ln>
+        </p:spPr>
+        <p:txBody>
+          <a:bodyPr xmlns:a="http://schemas.openxmlformats.org/drawingml/2006/main" anchor="t"/>
+          <a:lstStyle xmlns:a="http://schemas.openxmlformats.org/drawingml/2006/main"/>
+          <a:p xmlns:a="http://schemas.openxmlformats.org/drawingml/2006/main">
+            <a:pPr algn="l">
+              <a:defRPr sz="1275" b="1">
+                <a:solidFill>
+                  <a:srgbClr val="172033"/>
+                </a:solidFill>
+              </a:defRPr>
+            </a:pPr>
+            <a:r>
+              <a:rPr sz="1275" b="1">
+                <a:solidFill>
+                  <a:srgbClr val="172033"/>
+                </a:solidFill>
+              </a:rPr>
+              <a:t>Confirm inputs</a:t>
+            </a:r>
+          </a:p>
+        </p:txBody>
+      </p:sp>
+      <p:sp>
+        <p:nvSpPr>
+          <p:cNvPr id="20" name="">
+            <a:extLst xmlns:a="http://schemas.openxmlformats.org/drawingml/2006/main">
+              <a:ext uri="{FF2B5EF4-FFF2-40B4-BE49-F238E27FC236}">
+                <a16:creationId xmlns:a16="http://schemas.microsoft.com/office/drawing/2014/main" id="{456A74A8-F3B6-443C-AE9B-246D2E94C97E}"/>
+              </a:ext>
+            </a:extLst>
+          </p:cNvPr>
+          <p:cNvSpPr>
+            <a:spLocks xmlns:a="http://schemas.openxmlformats.org/drawingml/2006/main" noGrp="1"/>
+          </p:cNvSpPr>
+          <p:nvPr/>
+        </p:nvSpPr>
+        <p:spPr>
+          <a:xfrm xmlns:a="http://schemas.openxmlformats.org/drawingml/2006/main">
+            <a:off x="5276850" y="3905250"/>
+            <a:ext cx="1295400" cy="742950"/>
+          </a:xfrm>
+          <a:prstGeom xmlns:a="http://schemas.openxmlformats.org/drawingml/2006/main" prst="rect">
+            <a:avLst/>
+          </a:prstGeom>
+          <a:ln xmlns:a="http://schemas.openxmlformats.org/drawingml/2006/main" w="0">
+            <a:solidFill>
+              <a:srgbClr val="FFFFFF"/>
+            </a:solidFill>
+            <a:prstDash val="solid"/>
+          </a:ln>
+        </p:spPr>
+        <p:txBody>
+          <a:bodyPr xmlns:a="http://schemas.openxmlformats.org/drawingml/2006/main" anchor="t"/>
+          <a:lstStyle xmlns:a="http://schemas.openxmlformats.org/drawingml/2006/main"/>
+          <a:p xmlns:a="http://schemas.openxmlformats.org/drawingml/2006/main">
+            <a:pPr algn="l">
+              <a:defRPr sz="900" b="0">
+                <a:solidFill>
+                  <a:srgbClr val="5F6F86"/>
+                </a:solidFill>
+              </a:defRPr>
+            </a:pPr>
+            <a:r>
+              <a:rPr sz="900" b="0">
+                <a:solidFill>
+                  <a:srgbClr val="5F6F86"/>
+                </a:solidFill>
+              </a:rPr>
+              <a:t>Accounting owner, opening balances, chart-of-accounts review, and tax/entity basics.</a:t>
+            </a:r>
+          </a:p>
+        </p:txBody>
+      </p:sp>
+      <p:sp>
+        <p:nvSpPr>
+          <p:cNvPr id="21" name="">
+            <a:extLst xmlns:a="http://schemas.openxmlformats.org/drawingml/2006/main">
+              <a:ext uri="{FF2B5EF4-FFF2-40B4-BE49-F238E27FC236}">
+                <a16:creationId xmlns:a16="http://schemas.microsoft.com/office/drawing/2014/main" id="{3EFA2495-0A9E-4A92-8E14-1871DFBD6630}"/>
+              </a:ext>
+            </a:extLst>
+          </p:cNvPr>
+          <p:cNvSpPr>
+            <a:spLocks xmlns:a="http://schemas.openxmlformats.org/drawingml/2006/main" noGrp="1"/>
+          </p:cNvSpPr>
+          <p:nvPr/>
+        </p:nvSpPr>
+        <p:spPr>
+          <a:xfrm xmlns:a="http://schemas.openxmlformats.org/drawingml/2006/main">
+            <a:off x="6858000" y="3314700"/>
+            <a:ext cx="323850" cy="323850"/>
+          </a:xfrm>
+          <a:prstGeom xmlns:a="http://schemas.openxmlformats.org/drawingml/2006/main" prst="rect">
+            <a:avLst/>
+          </a:prstGeom>
+          <a:ln xmlns:a="http://schemas.openxmlformats.org/drawingml/2006/main" w="0">
+            <a:solidFill>
+              <a:srgbClr val="FFFFFF"/>
+            </a:solidFill>
+            <a:prstDash val="solid"/>
+          </a:ln>
+        </p:spPr>
+        <p:txBody>
+          <a:bodyPr xmlns:a="http://schemas.openxmlformats.org/drawingml/2006/main" anchor="ctr"/>
+          <a:lstStyle xmlns:a="http://schemas.openxmlformats.org/drawingml/2006/main"/>
+          <a:p xmlns:a="http://schemas.openxmlformats.org/drawingml/2006/main">
+            <a:pPr algn="ctr">
+              <a:defRPr sz="1650" b="1">
+                <a:solidFill>
+                  <a:srgbClr val="145DA0"/>
+                </a:solidFill>
+              </a:defRPr>
+            </a:pPr>
+            <a:r>
+              <a:rPr sz="1650" b="1">
+                <a:solidFill>
+                  <a:srgbClr val="145DA0"/>
+                </a:solidFill>
+              </a:rPr>
+              <a:t>-&gt;</a:t>
+            </a:r>
+          </a:p>
+        </p:txBody>
+      </p:sp>
+      <p:sp>
+        <p:nvSpPr>
+          <p:cNvPr id="22" name="">
+            <a:extLst xmlns:a="http://schemas.openxmlformats.org/drawingml/2006/main">
+              <a:ext uri="{FF2B5EF4-FFF2-40B4-BE49-F238E27FC236}">
+                <a16:creationId xmlns:a16="http://schemas.microsoft.com/office/drawing/2014/main" id="{9F2AF274-DE87-4797-8277-7DE067AA8C15}"/>
+              </a:ext>
+            </a:extLst>
+          </p:cNvPr>
+          <p:cNvSpPr>
+            <a:spLocks xmlns:a="http://schemas.openxmlformats.org/drawingml/2006/main" noGrp="1"/>
+          </p:cNvSpPr>
+          <p:nvPr/>
+        </p:nvSpPr>
+        <p:spPr>
+          <a:xfrm xmlns:a="http://schemas.openxmlformats.org/drawingml/2006/main">
+            <a:off x="7315200" y="2667000"/>
+            <a:ext cx="1676400" cy="1676400"/>
+          </a:xfrm>
+          <a:prstGeom xmlns:a="http://schemas.openxmlformats.org/drawingml/2006/main" prst="rect">
+            <a:avLst/>
+          </a:prstGeom>
+          <a:solidFill xmlns:a="http://schemas.openxmlformats.org/drawingml/2006/main">
+            <a:srgbClr val="FFFFFF"/>
+          </a:solidFill>
+          <a:ln xmlns:a="http://schemas.openxmlformats.org/drawingml/2006/main" w="0">
+            <a:solidFill>
+              <a:srgbClr val="D8E2ED"/>
+            </a:solidFill>
+            <a:prstDash val="solid"/>
+          </a:ln>
+        </p:spPr>
+      </p:sp>
+      <p:sp>
+        <p:nvSpPr>
+          <p:cNvPr id="23" name="">
+            <a:extLst xmlns:a="http://schemas.openxmlformats.org/drawingml/2006/main">
+              <a:ext uri="{FF2B5EF4-FFF2-40B4-BE49-F238E27FC236}">
+                <a16:creationId xmlns:a16="http://schemas.microsoft.com/office/drawing/2014/main" id="{C79E6734-E42A-4C1F-9F9E-9120B345E372}"/>
+              </a:ext>
+            </a:extLst>
+          </p:cNvPr>
+          <p:cNvSpPr>
+            <a:spLocks xmlns:a="http://schemas.openxmlformats.org/drawingml/2006/main" noGrp="1"/>
+          </p:cNvSpPr>
+          <p:nvPr/>
+        </p:nvSpPr>
+        <p:spPr>
+          <a:xfrm xmlns:a="http://schemas.openxmlformats.org/drawingml/2006/main">
+            <a:off x="7486650" y="2895600"/>
+            <a:ext cx="419100" cy="419100"/>
           </a:xfrm>
           <a:prstGeom xmlns:a="http://schemas.openxmlformats.org/drawingml/2006/main" prst="rect">
             <a:avLst/>
@@ -11040,22 +12644,73 @@
       </p:sp>
       <p:sp>
         <p:nvSpPr>
-          <p:cNvPr id="18" name="">
-            <a:extLst xmlns:a="http://schemas.openxmlformats.org/drawingml/2006/main">
-              <a:ext uri="{FF2B5EF4-FFF2-40B4-BE49-F238E27FC236}">
-                <a16:creationId xmlns:a16="http://schemas.microsoft.com/office/drawing/2014/main" id="{C9D341B2-17BC-4B2C-808F-A17F6872EE0C}"/>
-              </a:ext>
-            </a:extLst>
-          </p:cNvPr>
-          <p:cNvSpPr>
-            <a:spLocks xmlns:a="http://schemas.openxmlformats.org/drawingml/2006/main" noGrp="1"/>
-          </p:cNvSpPr>
-          <p:nvPr/>
-        </p:nvSpPr>
-        <p:spPr>
-          <a:xfrm xmlns:a="http://schemas.openxmlformats.org/drawingml/2006/main">
-            <a:off x="4991100" y="5257800"/>
-            <a:ext cx="2286000" cy="285750"/>
+          <p:cNvPr id="24" name="">
+            <a:extLst xmlns:a="http://schemas.openxmlformats.org/drawingml/2006/main">
+              <a:ext uri="{FF2B5EF4-FFF2-40B4-BE49-F238E27FC236}">
+                <a16:creationId xmlns:a16="http://schemas.microsoft.com/office/drawing/2014/main" id="{582EC1AD-E27B-4276-8B8E-068361DCD578}"/>
+              </a:ext>
+            </a:extLst>
+          </p:cNvPr>
+          <p:cNvSpPr>
+            <a:spLocks xmlns:a="http://schemas.openxmlformats.org/drawingml/2006/main" noGrp="1"/>
+          </p:cNvSpPr>
+          <p:nvPr/>
+        </p:nvSpPr>
+        <p:spPr>
+          <a:xfrm xmlns:a="http://schemas.openxmlformats.org/drawingml/2006/main">
+            <a:off x="7486650" y="2962275"/>
+            <a:ext cx="419100" cy="285750"/>
+          </a:xfrm>
+          <a:prstGeom xmlns:a="http://schemas.openxmlformats.org/drawingml/2006/main" prst="rect">
+            <a:avLst/>
+          </a:prstGeom>
+          <a:ln xmlns:a="http://schemas.openxmlformats.org/drawingml/2006/main" w="0">
+            <a:solidFill>
+              <a:srgbClr val="FFFFFF"/>
+            </a:solidFill>
+            <a:prstDash val="solid"/>
+          </a:ln>
+        </p:spPr>
+        <p:txBody>
+          <a:bodyPr xmlns:a="http://schemas.openxmlformats.org/drawingml/2006/main" anchor="t"/>
+          <a:lstStyle xmlns:a="http://schemas.openxmlformats.org/drawingml/2006/main"/>
+          <a:p xmlns:a="http://schemas.openxmlformats.org/drawingml/2006/main">
+            <a:pPr algn="ctr">
+              <a:defRPr sz="1500" b="1">
+                <a:solidFill>
+                  <a:srgbClr val="FFFFFF"/>
+                </a:solidFill>
+              </a:defRPr>
+            </a:pPr>
+            <a:r>
+              <a:rPr sz="1500" b="1">
+                <a:solidFill>
+                  <a:srgbClr val="FFFFFF"/>
+                </a:solidFill>
+              </a:rPr>
+              <a:t>4</a:t>
+            </a:r>
+          </a:p>
+        </p:txBody>
+      </p:sp>
+      <p:sp>
+        <p:nvSpPr>
+          <p:cNvPr id="25" name="">
+            <a:extLst xmlns:a="http://schemas.openxmlformats.org/drawingml/2006/main">
+              <a:ext uri="{FF2B5EF4-FFF2-40B4-BE49-F238E27FC236}">
+                <a16:creationId xmlns:a16="http://schemas.microsoft.com/office/drawing/2014/main" id="{28AD6735-D7D9-4869-A20F-33DBEDB339D6}"/>
+              </a:ext>
+            </a:extLst>
+          </p:cNvPr>
+          <p:cNvSpPr>
+            <a:spLocks xmlns:a="http://schemas.openxmlformats.org/drawingml/2006/main" noGrp="1"/>
+          </p:cNvSpPr>
+          <p:nvPr/>
+        </p:nvSpPr>
+        <p:spPr>
+          <a:xfrm xmlns:a="http://schemas.openxmlformats.org/drawingml/2006/main">
+            <a:off x="7486650" y="3524250"/>
+            <a:ext cx="1295400" cy="304800"/>
           </a:xfrm>
           <a:prstGeom xmlns:a="http://schemas.openxmlformats.org/drawingml/2006/main" prst="rect">
             <a:avLst/>
@@ -11072,41 +12727,41 @@
           <a:lstStyle xmlns:a="http://schemas.openxmlformats.org/drawingml/2006/main"/>
           <a:p xmlns:a="http://schemas.openxmlformats.org/drawingml/2006/main">
             <a:pPr algn="l">
-              <a:defRPr sz="1350" b="1">
+              <a:defRPr sz="1275" b="1">
                 <a:solidFill>
                   <a:srgbClr val="172033"/>
                 </a:solidFill>
               </a:defRPr>
             </a:pPr>
             <a:r>
-              <a:rPr sz="1350" b="1">
+              <a:rPr sz="1275" b="1">
                 <a:solidFill>
                   <a:srgbClr val="172033"/>
                 </a:solidFill>
               </a:rPr>
-              <a:t>Next meeting</a:t>
-            </a:r>
-          </a:p>
-        </p:txBody>
-      </p:sp>
-      <p:sp>
-        <p:nvSpPr>
-          <p:cNvPr id="19" name="">
-            <a:extLst xmlns:a="http://schemas.openxmlformats.org/drawingml/2006/main">
-              <a:ext uri="{FF2B5EF4-FFF2-40B4-BE49-F238E27FC236}">
-                <a16:creationId xmlns:a16="http://schemas.microsoft.com/office/drawing/2014/main" id="{20EEA710-BF95-4686-AC05-004C58A396C4}"/>
-              </a:ext>
-            </a:extLst>
-          </p:cNvPr>
-          <p:cNvSpPr>
-            <a:spLocks xmlns:a="http://schemas.openxmlformats.org/drawingml/2006/main" noGrp="1"/>
-          </p:cNvSpPr>
-          <p:nvPr/>
-        </p:nvSpPr>
-        <p:spPr>
-          <a:xfrm xmlns:a="http://schemas.openxmlformats.org/drawingml/2006/main">
-            <a:off x="4991100" y="5619750"/>
-            <a:ext cx="2266950" cy="228600"/>
+              <a:t>Implement</a:t>
+            </a:r>
+          </a:p>
+        </p:txBody>
+      </p:sp>
+      <p:sp>
+        <p:nvSpPr>
+          <p:cNvPr id="26" name="">
+            <a:extLst xmlns:a="http://schemas.openxmlformats.org/drawingml/2006/main">
+              <a:ext uri="{FF2B5EF4-FFF2-40B4-BE49-F238E27FC236}">
+                <a16:creationId xmlns:a16="http://schemas.microsoft.com/office/drawing/2014/main" id="{18517A23-D880-4628-8168-7F378D7624CF}"/>
+              </a:ext>
+            </a:extLst>
+          </p:cNvPr>
+          <p:cNvSpPr>
+            <a:spLocks xmlns:a="http://schemas.openxmlformats.org/drawingml/2006/main" noGrp="1"/>
+          </p:cNvSpPr>
+          <p:nvPr/>
+        </p:nvSpPr>
+        <p:spPr>
+          <a:xfrm xmlns:a="http://schemas.openxmlformats.org/drawingml/2006/main">
+            <a:off x="7486650" y="3905250"/>
+            <a:ext cx="1295400" cy="742950"/>
           </a:xfrm>
           <a:prstGeom xmlns:a="http://schemas.openxmlformats.org/drawingml/2006/main" prst="rect">
             <a:avLst/>
@@ -11123,41 +12778,92 @@
           <a:lstStyle xmlns:a="http://schemas.openxmlformats.org/drawingml/2006/main"/>
           <a:p xmlns:a="http://schemas.openxmlformats.org/drawingml/2006/main">
             <a:pPr algn="l">
-              <a:defRPr sz="1050" b="0">
+              <a:defRPr sz="900" b="0">
                 <a:solidFill>
                   <a:srgbClr val="5F6F86"/>
                 </a:solidFill>
               </a:defRPr>
             </a:pPr>
             <a:r>
-              <a:rPr sz="1050" b="0">
+              <a:rPr sz="900" b="0">
                 <a:solidFill>
                   <a:srgbClr val="5F6F86"/>
                 </a:solidFill>
               </a:rPr>
-              <a:t>Kickoff once opening balances are confirmed.</a:t>
-            </a:r>
-          </a:p>
-        </p:txBody>
-      </p:sp>
-      <p:sp>
-        <p:nvSpPr>
-          <p:cNvPr id="20" name="">
-            <a:extLst xmlns:a="http://schemas.openxmlformats.org/drawingml/2006/main">
-              <a:ext uri="{FF2B5EF4-FFF2-40B4-BE49-F238E27FC236}">
-                <a16:creationId xmlns:a16="http://schemas.microsoft.com/office/drawing/2014/main" id="{12A93588-F87F-48FF-AB8B-E289E02A1FA4}"/>
-              </a:ext>
-            </a:extLst>
-          </p:cNvPr>
-          <p:cNvSpPr>
-            <a:spLocks xmlns:a="http://schemas.openxmlformats.org/drawingml/2006/main" noGrp="1"/>
-          </p:cNvSpPr>
-          <p:nvPr/>
-        </p:nvSpPr>
-        <p:spPr>
-          <a:xfrm xmlns:a="http://schemas.openxmlformats.org/drawingml/2006/main">
-            <a:off x="8001000" y="5067300"/>
-            <a:ext cx="2667000" cy="914400"/>
+              <a:t>Tailor the books, load opening balances, wire A/R and A/P, and train the team.</a:t>
+            </a:r>
+          </a:p>
+        </p:txBody>
+      </p:sp>
+      <p:sp>
+        <p:nvSpPr>
+          <p:cNvPr id="27" name="">
+            <a:extLst xmlns:a="http://schemas.openxmlformats.org/drawingml/2006/main">
+              <a:ext uri="{FF2B5EF4-FFF2-40B4-BE49-F238E27FC236}">
+                <a16:creationId xmlns:a16="http://schemas.microsoft.com/office/drawing/2014/main" id="{D94F156B-8BA1-4101-8DC3-7C12658FC1F1}"/>
+              </a:ext>
+            </a:extLst>
+          </p:cNvPr>
+          <p:cNvSpPr>
+            <a:spLocks xmlns:a="http://schemas.openxmlformats.org/drawingml/2006/main" noGrp="1"/>
+          </p:cNvSpPr>
+          <p:nvPr/>
+        </p:nvSpPr>
+        <p:spPr>
+          <a:xfrm xmlns:a="http://schemas.openxmlformats.org/drawingml/2006/main">
+            <a:off x="9067800" y="3314700"/>
+            <a:ext cx="323850" cy="323850"/>
+          </a:xfrm>
+          <a:prstGeom xmlns:a="http://schemas.openxmlformats.org/drawingml/2006/main" prst="rect">
+            <a:avLst/>
+          </a:prstGeom>
+          <a:ln xmlns:a="http://schemas.openxmlformats.org/drawingml/2006/main" w="0">
+            <a:solidFill>
+              <a:srgbClr val="FFFFFF"/>
+            </a:solidFill>
+            <a:prstDash val="solid"/>
+          </a:ln>
+        </p:spPr>
+        <p:txBody>
+          <a:bodyPr xmlns:a="http://schemas.openxmlformats.org/drawingml/2006/main" anchor="ctr"/>
+          <a:lstStyle xmlns:a="http://schemas.openxmlformats.org/drawingml/2006/main"/>
+          <a:p xmlns:a="http://schemas.openxmlformats.org/drawingml/2006/main">
+            <a:pPr algn="ctr">
+              <a:defRPr sz="1650" b="1">
+                <a:solidFill>
+                  <a:srgbClr val="145DA0"/>
+                </a:solidFill>
+              </a:defRPr>
+            </a:pPr>
+            <a:r>
+              <a:rPr sz="1650" b="1">
+                <a:solidFill>
+                  <a:srgbClr val="145DA0"/>
+                </a:solidFill>
+              </a:rPr>
+              <a:t>-&gt;</a:t>
+            </a:r>
+          </a:p>
+        </p:txBody>
+      </p:sp>
+      <p:sp>
+        <p:nvSpPr>
+          <p:cNvPr id="28" name="">
+            <a:extLst xmlns:a="http://schemas.openxmlformats.org/drawingml/2006/main">
+              <a:ext uri="{FF2B5EF4-FFF2-40B4-BE49-F238E27FC236}">
+                <a16:creationId xmlns:a16="http://schemas.microsoft.com/office/drawing/2014/main" id="{3AAC3618-0304-41E5-82C4-78258289B186}"/>
+              </a:ext>
+            </a:extLst>
+          </p:cNvPr>
+          <p:cNvSpPr>
+            <a:spLocks xmlns:a="http://schemas.openxmlformats.org/drawingml/2006/main" noGrp="1"/>
+          </p:cNvSpPr>
+          <p:nvPr/>
+        </p:nvSpPr>
+        <p:spPr>
+          <a:xfrm xmlns:a="http://schemas.openxmlformats.org/drawingml/2006/main">
+            <a:off x="9525000" y="2667000"/>
+            <a:ext cx="1676400" cy="1676400"/>
           </a:xfrm>
           <a:prstGeom xmlns:a="http://schemas.openxmlformats.org/drawingml/2006/main" prst="rect">
             <a:avLst/>
@@ -11175,55 +12881,106 @@
       </p:sp>
       <p:sp>
         <p:nvSpPr>
-          <p:cNvPr id="21" name="">
-            <a:extLst xmlns:a="http://schemas.openxmlformats.org/drawingml/2006/main">
-              <a:ext uri="{FF2B5EF4-FFF2-40B4-BE49-F238E27FC236}">
-                <a16:creationId xmlns:a16="http://schemas.microsoft.com/office/drawing/2014/main" id="{A023091D-9476-4E17-8505-FFAA70141AE8}"/>
-              </a:ext>
-            </a:extLst>
-          </p:cNvPr>
-          <p:cNvSpPr>
-            <a:spLocks xmlns:a="http://schemas.openxmlformats.org/drawingml/2006/main" noGrp="1"/>
-          </p:cNvSpPr>
-          <p:nvPr/>
-        </p:nvSpPr>
-        <p:spPr>
-          <a:xfrm xmlns:a="http://schemas.openxmlformats.org/drawingml/2006/main">
-            <a:off x="8001000" y="5067300"/>
-            <a:ext cx="57150" cy="914400"/>
+          <p:cNvPr id="29" name="">
+            <a:extLst xmlns:a="http://schemas.openxmlformats.org/drawingml/2006/main">
+              <a:ext uri="{FF2B5EF4-FFF2-40B4-BE49-F238E27FC236}">
+                <a16:creationId xmlns:a16="http://schemas.microsoft.com/office/drawing/2014/main" id="{87AD986F-D9AB-453B-B293-7A6F9E999C0C}"/>
+              </a:ext>
+            </a:extLst>
+          </p:cNvPr>
+          <p:cNvSpPr>
+            <a:spLocks xmlns:a="http://schemas.openxmlformats.org/drawingml/2006/main" noGrp="1"/>
+          </p:cNvSpPr>
+          <p:nvPr/>
+        </p:nvSpPr>
+        <p:spPr>
+          <a:xfrm xmlns:a="http://schemas.openxmlformats.org/drawingml/2006/main">
+            <a:off x="9696450" y="2895600"/>
+            <a:ext cx="419100" cy="419100"/>
           </a:xfrm>
           <a:prstGeom xmlns:a="http://schemas.openxmlformats.org/drawingml/2006/main" prst="rect">
             <a:avLst/>
           </a:prstGeom>
           <a:solidFill xmlns:a="http://schemas.openxmlformats.org/drawingml/2006/main">
-            <a:srgbClr val="D98C16"/>
+            <a:srgbClr val="1D7F5F"/>
           </a:solidFill>
           <a:ln xmlns:a="http://schemas.openxmlformats.org/drawingml/2006/main" w="0">
             <a:solidFill>
-              <a:srgbClr val="D98C16"/>
-            </a:solidFill>
-            <a:prstDash val="solid"/>
-          </a:ln>
-        </p:spPr>
-      </p:sp>
-      <p:sp>
-        <p:nvSpPr>
-          <p:cNvPr id="22" name="">
-            <a:extLst xmlns:a="http://schemas.openxmlformats.org/drawingml/2006/main">
-              <a:ext uri="{FF2B5EF4-FFF2-40B4-BE49-F238E27FC236}">
-                <a16:creationId xmlns:a16="http://schemas.microsoft.com/office/drawing/2014/main" id="{87EE94B7-E2D3-4B9D-AED3-9D6BA4DDA07A}"/>
-              </a:ext>
-            </a:extLst>
-          </p:cNvPr>
-          <p:cNvSpPr>
-            <a:spLocks xmlns:a="http://schemas.openxmlformats.org/drawingml/2006/main" noGrp="1"/>
-          </p:cNvSpPr>
-          <p:nvPr/>
-        </p:nvSpPr>
-        <p:spPr>
-          <a:xfrm xmlns:a="http://schemas.openxmlformats.org/drawingml/2006/main">
-            <a:off x="8229600" y="5257800"/>
-            <a:ext cx="2286000" cy="285750"/>
+              <a:srgbClr val="1D7F5F"/>
+            </a:solidFill>
+            <a:prstDash val="solid"/>
+          </a:ln>
+        </p:spPr>
+      </p:sp>
+      <p:sp>
+        <p:nvSpPr>
+          <p:cNvPr id="30" name="">
+            <a:extLst xmlns:a="http://schemas.openxmlformats.org/drawingml/2006/main">
+              <a:ext uri="{FF2B5EF4-FFF2-40B4-BE49-F238E27FC236}">
+                <a16:creationId xmlns:a16="http://schemas.microsoft.com/office/drawing/2014/main" id="{0C36B794-FE27-455E-88AE-74A6F932EE15}"/>
+              </a:ext>
+            </a:extLst>
+          </p:cNvPr>
+          <p:cNvSpPr>
+            <a:spLocks xmlns:a="http://schemas.openxmlformats.org/drawingml/2006/main" noGrp="1"/>
+          </p:cNvSpPr>
+          <p:nvPr/>
+        </p:nvSpPr>
+        <p:spPr>
+          <a:xfrm xmlns:a="http://schemas.openxmlformats.org/drawingml/2006/main">
+            <a:off x="9696450" y="2962275"/>
+            <a:ext cx="419100" cy="285750"/>
+          </a:xfrm>
+          <a:prstGeom xmlns:a="http://schemas.openxmlformats.org/drawingml/2006/main" prst="rect">
+            <a:avLst/>
+          </a:prstGeom>
+          <a:ln xmlns:a="http://schemas.openxmlformats.org/drawingml/2006/main" w="0">
+            <a:solidFill>
+              <a:srgbClr val="FFFFFF"/>
+            </a:solidFill>
+            <a:prstDash val="solid"/>
+          </a:ln>
+        </p:spPr>
+        <p:txBody>
+          <a:bodyPr xmlns:a="http://schemas.openxmlformats.org/drawingml/2006/main" anchor="t"/>
+          <a:lstStyle xmlns:a="http://schemas.openxmlformats.org/drawingml/2006/main"/>
+          <a:p xmlns:a="http://schemas.openxmlformats.org/drawingml/2006/main">
+            <a:pPr algn="ctr">
+              <a:defRPr sz="1500" b="1">
+                <a:solidFill>
+                  <a:srgbClr val="FFFFFF"/>
+                </a:solidFill>
+              </a:defRPr>
+            </a:pPr>
+            <a:r>
+              <a:rPr sz="1500" b="1">
+                <a:solidFill>
+                  <a:srgbClr val="FFFFFF"/>
+                </a:solidFill>
+              </a:rPr>
+              <a:t>5</a:t>
+            </a:r>
+          </a:p>
+        </p:txBody>
+      </p:sp>
+      <p:sp>
+        <p:nvSpPr>
+          <p:cNvPr id="31" name="">
+            <a:extLst xmlns:a="http://schemas.openxmlformats.org/drawingml/2006/main">
+              <a:ext uri="{FF2B5EF4-FFF2-40B4-BE49-F238E27FC236}">
+                <a16:creationId xmlns:a16="http://schemas.microsoft.com/office/drawing/2014/main" id="{894798DF-ECC1-4A18-98DC-C933DFE52E58}"/>
+              </a:ext>
+            </a:extLst>
+          </p:cNvPr>
+          <p:cNvSpPr>
+            <a:spLocks xmlns:a="http://schemas.openxmlformats.org/drawingml/2006/main" noGrp="1"/>
+          </p:cNvSpPr>
+          <p:nvPr/>
+        </p:nvSpPr>
+        <p:spPr>
+          <a:xfrm xmlns:a="http://schemas.openxmlformats.org/drawingml/2006/main">
+            <a:off x="9696450" y="3524250"/>
+            <a:ext cx="1295400" cy="304800"/>
           </a:xfrm>
           <a:prstGeom xmlns:a="http://schemas.openxmlformats.org/drawingml/2006/main" prst="rect">
             <a:avLst/>
@@ -11240,41 +12997,41 @@
           <a:lstStyle xmlns:a="http://schemas.openxmlformats.org/drawingml/2006/main"/>
           <a:p xmlns:a="http://schemas.openxmlformats.org/drawingml/2006/main">
             <a:pPr algn="l">
-              <a:defRPr sz="1350" b="1">
+              <a:defRPr sz="1275" b="1">
                 <a:solidFill>
                   <a:srgbClr val="172033"/>
                 </a:solidFill>
               </a:defRPr>
             </a:pPr>
             <a:r>
-              <a:rPr sz="1350" b="1">
+              <a:rPr sz="1275" b="1">
                 <a:solidFill>
                   <a:srgbClr val="172033"/>
                 </a:solidFill>
               </a:rPr>
-              <a:t>Next offer</a:t>
-            </a:r>
-          </a:p>
-        </p:txBody>
-      </p:sp>
-      <p:sp>
-        <p:nvSpPr>
-          <p:cNvPr id="23" name="">
-            <a:extLst xmlns:a="http://schemas.openxmlformats.org/drawingml/2006/main">
-              <a:ext uri="{FF2B5EF4-FFF2-40B4-BE49-F238E27FC236}">
-                <a16:creationId xmlns:a16="http://schemas.microsoft.com/office/drawing/2014/main" id="{452EF805-DA50-4723-9652-AC727A611E0F}"/>
-              </a:ext>
-            </a:extLst>
-          </p:cNvPr>
-          <p:cNvSpPr>
-            <a:spLocks xmlns:a="http://schemas.openxmlformats.org/drawingml/2006/main" noGrp="1"/>
-          </p:cNvSpPr>
-          <p:nvPr/>
-        </p:nvSpPr>
-        <p:spPr>
-          <a:xfrm xmlns:a="http://schemas.openxmlformats.org/drawingml/2006/main">
-            <a:off x="8229600" y="5619750"/>
-            <a:ext cx="2266950" cy="228600"/>
+              <a:t>First close</a:t>
+            </a:r>
+          </a:p>
+        </p:txBody>
+      </p:sp>
+      <p:sp>
+        <p:nvSpPr>
+          <p:cNvPr id="32" name="">
+            <a:extLst xmlns:a="http://schemas.openxmlformats.org/drawingml/2006/main">
+              <a:ext uri="{FF2B5EF4-FFF2-40B4-BE49-F238E27FC236}">
+                <a16:creationId xmlns:a16="http://schemas.microsoft.com/office/drawing/2014/main" id="{077D18A1-D2E8-46E9-9F89-9277722FD629}"/>
+              </a:ext>
+            </a:extLst>
+          </p:cNvPr>
+          <p:cNvSpPr>
+            <a:spLocks xmlns:a="http://schemas.openxmlformats.org/drawingml/2006/main" noGrp="1"/>
+          </p:cNvSpPr>
+          <p:nvPr/>
+        </p:nvSpPr>
+        <p:spPr>
+          <a:xfrm xmlns:a="http://schemas.openxmlformats.org/drawingml/2006/main">
+            <a:off x="9696450" y="3905250"/>
+            <a:ext cx="1295400" cy="742950"/>
           </a:xfrm>
           <a:prstGeom xmlns:a="http://schemas.openxmlformats.org/drawingml/2006/main" prst="rect">
             <a:avLst/>
@@ -11291,29 +13048,29 @@
           <a:lstStyle xmlns:a="http://schemas.openxmlformats.org/drawingml/2006/main"/>
           <a:p xmlns:a="http://schemas.openxmlformats.org/drawingml/2006/main">
             <a:pPr algn="l">
-              <a:defRPr sz="1050" b="0">
+              <a:defRPr sz="900" b="0">
                 <a:solidFill>
                   <a:srgbClr val="5F6F86"/>
                 </a:solidFill>
               </a:defRPr>
             </a:pPr>
             <a:r>
-              <a:rPr sz="1050" b="0">
+              <a:rPr sz="900" b="0">
                 <a:solidFill>
                   <a:srgbClr val="5F6F86"/>
                 </a:solidFill>
               </a:rPr>
-              <a:t>Books Care after go-live for monthly close support.</a:t>
-            </a:r>
-          </a:p>
-        </p:txBody>
-      </p:sp>
-      <p:sp>
-        <p:nvSpPr>
-          <p:cNvPr id="24" name="">
-            <a:extLst xmlns:a="http://schemas.openxmlformats.org/drawingml/2006/main">
-              <a:ext uri="{FF2B5EF4-FFF2-40B4-BE49-F238E27FC236}">
-                <a16:creationId xmlns:a16="http://schemas.microsoft.com/office/drawing/2014/main" id="{9B763400-80CC-472C-A600-54161D2DC043}"/>
+              <a:t>Run the first month-end in Blueprint and lock the period.</a:t>
+            </a:r>
+          </a:p>
+        </p:txBody>
+      </p:sp>
+      <p:sp>
+        <p:nvSpPr>
+          <p:cNvPr id="33" name="">
+            <a:extLst xmlns:a="http://schemas.openxmlformats.org/drawingml/2006/main">
+              <a:ext uri="{FF2B5EF4-FFF2-40B4-BE49-F238E27FC236}">
+                <a16:creationId xmlns:a16="http://schemas.microsoft.com/office/drawing/2014/main" id="{2D093F45-CBC7-4FA7-8EEB-7F8ED7A84C78}"/>
               </a:ext>
             </a:extLst>
           </p:cNvPr>
@@ -11344,14 +13101,14 @@
             <a:pPr algn="l">
               <a:defRPr sz="900" b="0">
                 <a:solidFill>
-                  <a:srgbClr val="9FB9D2"/>
+                  <a:srgbClr val="7B8798"/>
                 </a:solidFill>
               </a:defRPr>
             </a:pPr>
             <a:r>
               <a:rPr sz="900" b="0">
                 <a:solidFill>
-                  <a:srgbClr val="9FB9D2"/>
+                  <a:srgbClr val="7B8798"/>
                 </a:solidFill>
               </a:rPr>
               <a:t>Blueprint Books for Raves</a:t>
@@ -11361,10 +13118,10 @@
       </p:sp>
       <p:sp>
         <p:nvSpPr>
-          <p:cNvPr id="25" name="">
-            <a:extLst xmlns:a="http://schemas.openxmlformats.org/drawingml/2006/main">
-              <a:ext uri="{FF2B5EF4-FFF2-40B4-BE49-F238E27FC236}">
-                <a16:creationId xmlns:a16="http://schemas.microsoft.com/office/drawing/2014/main" id="{33B0AF35-040E-46E4-A320-6120EED4E1D7}"/>
+          <p:cNvPr id="34" name="">
+            <a:extLst xmlns:a="http://schemas.openxmlformats.org/drawingml/2006/main">
+              <a:ext uri="{FF2B5EF4-FFF2-40B4-BE49-F238E27FC236}">
+                <a16:creationId xmlns:a16="http://schemas.microsoft.com/office/drawing/2014/main" id="{D79A4F9B-7A9F-4032-977C-35246F9E8B7A}"/>
               </a:ext>
             </a:extLst>
           </p:cNvPr>
@@ -11395,17 +13152,17 @@
             <a:pPr algn="r">
               <a:defRPr sz="900" b="0">
                 <a:solidFill>
-                  <a:srgbClr val="9FB9D2"/>
+                  <a:srgbClr val="7B8798"/>
                 </a:solidFill>
               </a:defRPr>
             </a:pPr>
             <a:r>
               <a:rPr sz="900" b="0">
                 <a:solidFill>
-                  <a:srgbClr val="9FB9D2"/>
-                </a:solidFill>
-              </a:rPr>
-              <a:t>08</a:t>
+                  <a:srgbClr val="7B8798"/>
+                </a:solidFill>
+              </a:rPr>
+              <a:t>09</a:t>
             </a:r>
           </a:p>
         </p:txBody>
@@ -11413,7 +13170,7 @@
     </p:spTree>
     <p:extLst>
       <p:ext uri="{BB962C8B-B14F-4D97-AF65-F5344CB8AC3E}">
-        <p14:creationId xmlns:p14="http://schemas.microsoft.com/office/powerpoint/2010/main" val="2046304496"/>
+        <p14:creationId xmlns:p14="http://schemas.microsoft.com/office/powerpoint/2010/main" val="1212255944"/>
       </p:ext>
     </p:extLst>
   </p:cSld>

--- a/docs/Blueprint Books Pitch Deck - Raves.pptx
+++ b/docs/Blueprint Books Pitch Deck - Raves.pptx
@@ -2,22 +2,23 @@
 <file path=ppt/presentation.xml><?xml version="1.0" encoding="utf-8"?>
 <p:presentation xmlns:p="http://schemas.openxmlformats.org/presentationml/2006/main">
   <p:sldMasterIdLst>
-    <p:sldMasterId xmlns:r="http://schemas.openxmlformats.org/officeDocument/2006/relationships" id="2147483648" r:id="Rf14e05ef57b24e9c"/>
+    <p:sldMasterId xmlns:r="http://schemas.openxmlformats.org/officeDocument/2006/relationships" id="2147483648" r:id="R91c8fdf8a1e04614"/>
   </p:sldMasterIdLst>
   <p:notesMasterIdLst>
-    <p:notesMasterId xmlns:r="http://schemas.openxmlformats.org/officeDocument/2006/relationships" r:id="R317b44486bf04c72"/>
+    <p:notesMasterId xmlns:r="http://schemas.openxmlformats.org/officeDocument/2006/relationships" r:id="Rbddd324d89604e53"/>
   </p:notesMasterIdLst>
   <p:sldIdLst>
-    <p:sldId xmlns:r="http://schemas.openxmlformats.org/officeDocument/2006/relationships" id="256" r:id="Raaedf9bd2e694423"/>
-    <p:sldId xmlns:r="http://schemas.openxmlformats.org/officeDocument/2006/relationships" id="257" r:id="R9d1d038ce5844c80"/>
-    <p:sldId xmlns:r="http://schemas.openxmlformats.org/officeDocument/2006/relationships" id="258" r:id="Rc2733e4a7d7949a5"/>
-    <p:sldId xmlns:r="http://schemas.openxmlformats.org/officeDocument/2006/relationships" id="259" r:id="R0f1c4cef95ea4960"/>
-    <p:sldId xmlns:r="http://schemas.openxmlformats.org/officeDocument/2006/relationships" id="260" r:id="R346ef0355caa42e1"/>
-    <p:sldId xmlns:r="http://schemas.openxmlformats.org/officeDocument/2006/relationships" id="261" r:id="R284466f0c2364cc7"/>
-    <p:sldId xmlns:r="http://schemas.openxmlformats.org/officeDocument/2006/relationships" id="262" r:id="R46c88fd8ff7b4916"/>
-    <p:sldId xmlns:r="http://schemas.openxmlformats.org/officeDocument/2006/relationships" id="263" r:id="R2fa291400b4f4e3c"/>
-    <p:sldId xmlns:r="http://schemas.openxmlformats.org/officeDocument/2006/relationships" id="264" r:id="R69943f9468484923"/>
-    <p:sldId xmlns:r="http://schemas.openxmlformats.org/officeDocument/2006/relationships" id="265" r:id="R878ed77bdc024aa6"/>
+    <p:sldId xmlns:r="http://schemas.openxmlformats.org/officeDocument/2006/relationships" id="256" r:id="R16e60532a45448c1"/>
+    <p:sldId xmlns:r="http://schemas.openxmlformats.org/officeDocument/2006/relationships" id="257" r:id="R61c3dabe2f134b2a"/>
+    <p:sldId xmlns:r="http://schemas.openxmlformats.org/officeDocument/2006/relationships" id="258" r:id="Rcafd86bbd908472c"/>
+    <p:sldId xmlns:r="http://schemas.openxmlformats.org/officeDocument/2006/relationships" id="259" r:id="Rced9f55626f84b00"/>
+    <p:sldId xmlns:r="http://schemas.openxmlformats.org/officeDocument/2006/relationships" id="260" r:id="R89fdff4586304fd1"/>
+    <p:sldId xmlns:r="http://schemas.openxmlformats.org/officeDocument/2006/relationships" id="261" r:id="R56f08515536845e7"/>
+    <p:sldId xmlns:r="http://schemas.openxmlformats.org/officeDocument/2006/relationships" id="262" r:id="Re0ca5ec4410f480b"/>
+    <p:sldId xmlns:r="http://schemas.openxmlformats.org/officeDocument/2006/relationships" id="263" r:id="Rf0424d20ad1143f7"/>
+    <p:sldId xmlns:r="http://schemas.openxmlformats.org/officeDocument/2006/relationships" id="264" r:id="Re6ca11c1d23c4989"/>
+    <p:sldId xmlns:r="http://schemas.openxmlformats.org/officeDocument/2006/relationships" id="265" r:id="Ra9ec3132bf6f455f"/>
+    <p:sldId xmlns:r="http://schemas.openxmlformats.org/officeDocument/2006/relationships" id="266" r:id="R99f36da28e794542"/>
   </p:sldIdLst>
   <p:sldSz cx="12192000" cy="6858000"/>
   <p:notesSz cx="6858000" cy="9144000"/>
@@ -592,6 +593,72 @@
 </p:notes>
 </file>
 
+<file path=ppt/notesSlides/notesSlide11.xml><?xml version="1.0" encoding="utf-8"?>
+<p:notes xmlns:p="http://schemas.openxmlformats.org/presentationml/2006/main">
+  <p:cSld>
+    <p:spTree>
+      <p:nvGrpSpPr>
+        <p:cNvPr id="1" name=""/>
+        <p:cNvGrpSpPr/>
+        <p:nvPr/>
+      </p:nvGrpSpPr>
+      <p:grpSpPr>
+        <a:xfrm xmlns:a="http://schemas.openxmlformats.org/drawingml/2006/main"/>
+      </p:grpSpPr>
+      <p:sp>
+        <p:nvSpPr>
+          <p:cNvPr id="2" name="Slide Image Placeholder 1"/>
+          <p:cNvSpPr>
+            <a:spLocks xmlns:a="http://schemas.openxmlformats.org/drawingml/2006/main" noGrp="1"/>
+          </p:cNvSpPr>
+          <p:nvPr>
+            <p:ph type="sldImg" idx="0"/>
+          </p:nvPr>
+        </p:nvSpPr>
+        <p:spPr/>
+      </p:sp>
+      <p:sp>
+        <p:nvSpPr>
+          <p:cNvPr id="3" name="Notes Placeholder 2"/>
+          <p:cNvSpPr>
+            <a:spLocks xmlns:a="http://schemas.openxmlformats.org/drawingml/2006/main" noGrp="1"/>
+          </p:cNvSpPr>
+          <p:nvPr>
+            <p:ph type="body" idx="1"/>
+          </p:nvPr>
+        </p:nvSpPr>
+        <p:spPr/>
+        <p:txBody>
+          <a:bodyPr xmlns:a="http://schemas.openxmlformats.org/drawingml/2006/main"/>
+          <a:lstStyle xmlns:a="http://schemas.openxmlformats.org/drawingml/2006/main"/>
+          <a:p xmlns:a="http://schemas.openxmlformats.org/drawingml/2006/main"/>
+        </p:txBody>
+      </p:sp>
+      <p:sp>
+        <p:nvSpPr>
+          <p:cNvPr id="4" name="Slide Number Placeholder 3"/>
+          <p:cNvSpPr>
+            <a:spLocks xmlns:a="http://schemas.openxmlformats.org/drawingml/2006/main" noGrp="1"/>
+          </p:cNvSpPr>
+          <p:nvPr>
+            <p:ph type="sldNum" idx="5"/>
+          </p:nvPr>
+        </p:nvSpPr>
+        <p:spPr/>
+        <p:txBody>
+          <a:bodyPr xmlns:a="http://schemas.openxmlformats.org/drawingml/2006/main"/>
+          <a:lstStyle xmlns:a="http://schemas.openxmlformats.org/drawingml/2006/main"/>
+          <a:p xmlns:a="http://schemas.openxmlformats.org/drawingml/2006/main"/>
+        </p:txBody>
+      </p:sp>
+    </p:spTree>
+  </p:cSld>
+  <p:clrMapOvr>
+    <a:masterClrMapping xmlns:a="http://schemas.openxmlformats.org/drawingml/2006/main"/>
+  </p:clrMapOvr>
+</p:notes>
+</file>
+
 <file path=ppt/notesSlides/notesSlide2.xml><?xml version="1.0" encoding="utf-8"?>
 <p:notes xmlns:p="http://schemas.openxmlformats.org/presentationml/2006/main">
   <p:cSld>
@@ -1158,7 +1225,7 @@
   </p:cSld>
   <p:clrMap bg1="lt1" tx1="dk1" bg2="lt2" tx2="dk2" accent1="accent1" accent2="accent2" accent3="accent3" accent4="accent4" accent5="accent5" accent6="accent6" hlink="hlink" folHlink="folHlink"/>
   <p:sldLayoutIdLst>
-    <p:sldLayoutId xmlns:r="http://schemas.openxmlformats.org/officeDocument/2006/relationships" id="2147483649" r:id="R54f0412992c249d9"/>
+    <p:sldLayoutId xmlns:r="http://schemas.openxmlformats.org/officeDocument/2006/relationships" id="2147483649" r:id="Rd5816606f2264237"/>
   </p:sldLayoutIdLst>
   <p:txStyles>
     <p:titleStyle>
@@ -1656,7 +1723,7 @@
           <p:cNvPr id="1" name="">
             <a:extLst xmlns:a="http://schemas.openxmlformats.org/drawingml/2006/main">
               <a:ext uri="{FF2B5EF4-FFF2-40B4-BE49-F238E27FC236}">
-                <a16:creationId xmlns:a16="http://schemas.microsoft.com/office/drawing/2014/main" id="{3B9F8291-6C4D-4F42-8DFA-A7575E06C5DA}"/>
+                <a16:creationId xmlns:a16="http://schemas.microsoft.com/office/drawing/2014/main" id="{A2843F07-F90D-4A8C-9BDA-C14354586139}"/>
               </a:ext>
             </a:extLst>
           </p:cNvPr>
@@ -1689,7 +1756,7 @@
           <p:cNvPr id="2" name="">
             <a:extLst xmlns:a="http://schemas.openxmlformats.org/drawingml/2006/main">
               <a:ext uri="{FF2B5EF4-FFF2-40B4-BE49-F238E27FC236}">
-                <a16:creationId xmlns:a16="http://schemas.microsoft.com/office/drawing/2014/main" id="{D13F3B9B-4EC5-4FC3-9162-1C7AB97C9CE2}"/>
+                <a16:creationId xmlns:a16="http://schemas.microsoft.com/office/drawing/2014/main" id="{DEF9761C-0525-46C4-A080-2F1BCC401FEA}"/>
               </a:ext>
             </a:extLst>
           </p:cNvPr>
@@ -1722,7 +1789,7 @@
           <p:cNvPr id="3" name="">
             <a:extLst xmlns:a="http://schemas.openxmlformats.org/drawingml/2006/main">
               <a:ext uri="{FF2B5EF4-FFF2-40B4-BE49-F238E27FC236}">
-                <a16:creationId xmlns:a16="http://schemas.microsoft.com/office/drawing/2014/main" id="{F275A4B9-3FE2-43E5-A2DC-C3C05D25A552}"/>
+                <a16:creationId xmlns:a16="http://schemas.microsoft.com/office/drawing/2014/main" id="{7D026858-384C-43E4-B825-30620C1CE6AB}"/>
               </a:ext>
             </a:extLst>
           </p:cNvPr>
@@ -1773,7 +1840,7 @@
           <p:cNvPr id="4" name="">
             <a:extLst xmlns:a="http://schemas.openxmlformats.org/drawingml/2006/main">
               <a:ext uri="{FF2B5EF4-FFF2-40B4-BE49-F238E27FC236}">
-                <a16:creationId xmlns:a16="http://schemas.microsoft.com/office/drawing/2014/main" id="{F220A291-98B0-4B15-9E16-952EFE1B35C3}"/>
+                <a16:creationId xmlns:a16="http://schemas.microsoft.com/office/drawing/2014/main" id="{C8137DF9-1B7F-4075-A326-CD3767F92510}"/>
               </a:ext>
             </a:extLst>
           </p:cNvPr>
@@ -1824,7 +1891,7 @@
           <p:cNvPr id="5" name="">
             <a:extLst xmlns:a="http://schemas.openxmlformats.org/drawingml/2006/main">
               <a:ext uri="{FF2B5EF4-FFF2-40B4-BE49-F238E27FC236}">
-                <a16:creationId xmlns:a16="http://schemas.microsoft.com/office/drawing/2014/main" id="{8192E29E-2922-4662-BBD6-7A9203DDED46}"/>
+                <a16:creationId xmlns:a16="http://schemas.microsoft.com/office/drawing/2014/main" id="{F8BB9DB9-3190-4570-8B74-C61BC0DAF9B9}"/>
               </a:ext>
             </a:extLst>
           </p:cNvPr>
@@ -1875,7 +1942,7 @@
           <p:cNvPr id="6" name="">
             <a:extLst xmlns:a="http://schemas.openxmlformats.org/drawingml/2006/main">
               <a:ext uri="{FF2B5EF4-FFF2-40B4-BE49-F238E27FC236}">
-                <a16:creationId xmlns:a16="http://schemas.microsoft.com/office/drawing/2014/main" id="{223F0F60-DCCF-40F0-BD75-C948D5CE31A2}"/>
+                <a16:creationId xmlns:a16="http://schemas.microsoft.com/office/drawing/2014/main" id="{C525A20B-6A75-489C-BD35-32C932B59C61}"/>
               </a:ext>
             </a:extLst>
           </p:cNvPr>
@@ -1926,7 +1993,7 @@
           <p:cNvPr id="7" name="">
             <a:extLst xmlns:a="http://schemas.openxmlformats.org/drawingml/2006/main">
               <a:ext uri="{FF2B5EF4-FFF2-40B4-BE49-F238E27FC236}">
-                <a16:creationId xmlns:a16="http://schemas.microsoft.com/office/drawing/2014/main" id="{C3E76F3B-7285-43CC-A1E4-64A5430443DC}"/>
+                <a16:creationId xmlns:a16="http://schemas.microsoft.com/office/drawing/2014/main" id="{680D85CB-8C58-4C37-8DA6-CC2D3CA8B686}"/>
               </a:ext>
             </a:extLst>
           </p:cNvPr>
@@ -1977,7 +2044,7 @@
           <p:cNvPr id="8" name="">
             <a:extLst xmlns:a="http://schemas.openxmlformats.org/drawingml/2006/main">
               <a:ext uri="{FF2B5EF4-FFF2-40B4-BE49-F238E27FC236}">
-                <a16:creationId xmlns:a16="http://schemas.microsoft.com/office/drawing/2014/main" id="{51964169-3356-4BA4-AC30-D72912C74EF9}"/>
+                <a16:creationId xmlns:a16="http://schemas.microsoft.com/office/drawing/2014/main" id="{D573111E-FD3D-453D-81D8-D74A1D6FBDAA}"/>
               </a:ext>
             </a:extLst>
           </p:cNvPr>
@@ -2028,7 +2095,7 @@
           <p:cNvPr id="9" name="">
             <a:extLst xmlns:a="http://schemas.openxmlformats.org/drawingml/2006/main">
               <a:ext uri="{FF2B5EF4-FFF2-40B4-BE49-F238E27FC236}">
-                <a16:creationId xmlns:a16="http://schemas.microsoft.com/office/drawing/2014/main" id="{0E83E2E7-5A0C-4C2D-B0E8-A5F3A8B565B0}"/>
+                <a16:creationId xmlns:a16="http://schemas.microsoft.com/office/drawing/2014/main" id="{BCF1C939-C42E-401A-BD65-CE77024D4966}"/>
               </a:ext>
             </a:extLst>
           </p:cNvPr>
@@ -2061,7 +2128,7 @@
           <p:cNvPr id="10" name="">
             <a:extLst xmlns:a="http://schemas.openxmlformats.org/drawingml/2006/main">
               <a:ext uri="{FF2B5EF4-FFF2-40B4-BE49-F238E27FC236}">
-                <a16:creationId xmlns:a16="http://schemas.microsoft.com/office/drawing/2014/main" id="{F059EF2C-5304-4CDF-8FE2-B664732ED4D3}"/>
+                <a16:creationId xmlns:a16="http://schemas.microsoft.com/office/drawing/2014/main" id="{754E4839-DA89-427E-9757-DEB468140C25}"/>
               </a:ext>
             </a:extLst>
           </p:cNvPr>
@@ -2112,7 +2179,7 @@
           <p:cNvPr id="11" name="">
             <a:extLst xmlns:a="http://schemas.openxmlformats.org/drawingml/2006/main">
               <a:ext uri="{FF2B5EF4-FFF2-40B4-BE49-F238E27FC236}">
-                <a16:creationId xmlns:a16="http://schemas.microsoft.com/office/drawing/2014/main" id="{D610AC3D-87E9-472B-8B1F-0FE7CA4AB185}"/>
+                <a16:creationId xmlns:a16="http://schemas.microsoft.com/office/drawing/2014/main" id="{9AF849DE-9E2A-464D-A809-1DB0C6EF68AF}"/>
               </a:ext>
             </a:extLst>
           </p:cNvPr>
@@ -2180,7 +2247,7 @@
           <p:cNvPr id="12" name="">
             <a:extLst xmlns:a="http://schemas.openxmlformats.org/drawingml/2006/main">
               <a:ext uri="{FF2B5EF4-FFF2-40B4-BE49-F238E27FC236}">
-                <a16:creationId xmlns:a16="http://schemas.microsoft.com/office/drawing/2014/main" id="{D9A253BF-89CA-4CD5-A318-B99355CB9587}"/>
+                <a16:creationId xmlns:a16="http://schemas.microsoft.com/office/drawing/2014/main" id="{1DD572BE-3640-4DF0-9C14-04B02136A3E4}"/>
               </a:ext>
             </a:extLst>
           </p:cNvPr>
@@ -2231,7 +2298,7 @@
           <p:cNvPr id="13" name="">
             <a:extLst xmlns:a="http://schemas.openxmlformats.org/drawingml/2006/main">
               <a:ext uri="{FF2B5EF4-FFF2-40B4-BE49-F238E27FC236}">
-                <a16:creationId xmlns:a16="http://schemas.microsoft.com/office/drawing/2014/main" id="{6B7BDD24-D21B-4D47-937B-5402193CCB4E}"/>
+                <a16:creationId xmlns:a16="http://schemas.microsoft.com/office/drawing/2014/main" id="{C7BAEBF7-798E-41BA-8B07-06A603B5CC91}"/>
               </a:ext>
             </a:extLst>
           </p:cNvPr>
@@ -2280,7 +2347,7 @@
     </p:spTree>
     <p:extLst>
       <p:ext uri="{BB962C8B-B14F-4D97-AF65-F5344CB8AC3E}">
-        <p14:creationId xmlns:p14="http://schemas.microsoft.com/office/powerpoint/2010/main" val="1338770391"/>
+        <p14:creationId xmlns:p14="http://schemas.microsoft.com/office/powerpoint/2010/main" val="1420710754"/>
       </p:ext>
     </p:extLst>
   </p:cSld>
@@ -2304,7 +2371,1565 @@
           <p:cNvPr id="1" name="">
             <a:extLst xmlns:a="http://schemas.openxmlformats.org/drawingml/2006/main">
               <a:ext uri="{FF2B5EF4-FFF2-40B4-BE49-F238E27FC236}">
-                <a16:creationId xmlns:a16="http://schemas.microsoft.com/office/drawing/2014/main" id="{C5F884DE-79B9-4747-B690-4BA111EB178E}"/>
+                <a16:creationId xmlns:a16="http://schemas.microsoft.com/office/drawing/2014/main" id="{52511A6F-25D4-4278-875B-C10E3D8CCD94}"/>
+              </a:ext>
+            </a:extLst>
+          </p:cNvPr>
+          <p:cNvSpPr>
+            <a:spLocks xmlns:a="http://schemas.openxmlformats.org/drawingml/2006/main" noGrp="1"/>
+          </p:cNvSpPr>
+          <p:nvPr/>
+        </p:nvSpPr>
+        <p:spPr>
+          <a:xfrm xmlns:a="http://schemas.openxmlformats.org/drawingml/2006/main">
+            <a:off x="0" y="0"/>
+            <a:ext cx="12192000" cy="6858000"/>
+          </a:xfrm>
+          <a:prstGeom xmlns:a="http://schemas.openxmlformats.org/drawingml/2006/main" prst="rect">
+            <a:avLst/>
+          </a:prstGeom>
+          <a:solidFill xmlns:a="http://schemas.openxmlformats.org/drawingml/2006/main">
+            <a:srgbClr val="F5F8FC"/>
+          </a:solidFill>
+          <a:ln xmlns:a="http://schemas.openxmlformats.org/drawingml/2006/main" w="0">
+            <a:solidFill>
+              <a:srgbClr val="F5F8FC"/>
+            </a:solidFill>
+            <a:prstDash val="solid"/>
+          </a:ln>
+        </p:spPr>
+      </p:sp>
+      <p:sp>
+        <p:nvSpPr>
+          <p:cNvPr id="2" name="">
+            <a:extLst xmlns:a="http://schemas.openxmlformats.org/drawingml/2006/main">
+              <a:ext uri="{FF2B5EF4-FFF2-40B4-BE49-F238E27FC236}">
+                <a16:creationId xmlns:a16="http://schemas.microsoft.com/office/drawing/2014/main" id="{8082BC9F-E7D3-4609-B0D8-891976925D3F}"/>
+              </a:ext>
+            </a:extLst>
+          </p:cNvPr>
+          <p:cNvSpPr>
+            <a:spLocks xmlns:a="http://schemas.openxmlformats.org/drawingml/2006/main" noGrp="1"/>
+          </p:cNvSpPr>
+          <p:nvPr/>
+        </p:nvSpPr>
+        <p:spPr>
+          <a:xfrm xmlns:a="http://schemas.openxmlformats.org/drawingml/2006/main">
+            <a:off x="685800" y="457200"/>
+            <a:ext cx="7048500" cy="285750"/>
+          </a:xfrm>
+          <a:prstGeom xmlns:a="http://schemas.openxmlformats.org/drawingml/2006/main" prst="rect">
+            <a:avLst/>
+          </a:prstGeom>
+          <a:ln xmlns:a="http://schemas.openxmlformats.org/drawingml/2006/main" w="0">
+            <a:solidFill>
+              <a:srgbClr val="FFFFFF"/>
+            </a:solidFill>
+            <a:prstDash val="solid"/>
+          </a:ln>
+        </p:spPr>
+        <p:txBody>
+          <a:bodyPr xmlns:a="http://schemas.openxmlformats.org/drawingml/2006/main" anchor="t"/>
+          <a:lstStyle xmlns:a="http://schemas.openxmlformats.org/drawingml/2006/main"/>
+          <a:p xmlns:a="http://schemas.openxmlformats.org/drawingml/2006/main">
+            <a:pPr algn="l">
+              <a:defRPr sz="1050" b="1">
+                <a:solidFill>
+                  <a:srgbClr val="5F6F86"/>
+                </a:solidFill>
+              </a:defRPr>
+            </a:pPr>
+            <a:r>
+              <a:rPr sz="1050" b="1">
+                <a:solidFill>
+                  <a:srgbClr val="5F6F86"/>
+                </a:solidFill>
+              </a:rPr>
+              <a:t>MUTUAL ACTION PLAN</a:t>
+            </a:r>
+          </a:p>
+        </p:txBody>
+      </p:sp>
+      <p:sp>
+        <p:nvSpPr>
+          <p:cNvPr id="3" name="">
+            <a:extLst xmlns:a="http://schemas.openxmlformats.org/drawingml/2006/main">
+              <a:ext uri="{FF2B5EF4-FFF2-40B4-BE49-F238E27FC236}">
+                <a16:creationId xmlns:a16="http://schemas.microsoft.com/office/drawing/2014/main" id="{0044FDFD-A761-4C86-9F68-6710840EEAFA}"/>
+              </a:ext>
+            </a:extLst>
+          </p:cNvPr>
+          <p:cNvSpPr>
+            <a:spLocks xmlns:a="http://schemas.openxmlformats.org/drawingml/2006/main" noGrp="1"/>
+          </p:cNvSpPr>
+          <p:nvPr/>
+        </p:nvSpPr>
+        <p:spPr>
+          <a:xfrm xmlns:a="http://schemas.openxmlformats.org/drawingml/2006/main">
+            <a:off x="685800" y="819150"/>
+            <a:ext cx="8953500" cy="876300"/>
+          </a:xfrm>
+          <a:prstGeom xmlns:a="http://schemas.openxmlformats.org/drawingml/2006/main" prst="rect">
+            <a:avLst/>
+          </a:prstGeom>
+          <a:ln xmlns:a="http://schemas.openxmlformats.org/drawingml/2006/main" w="0">
+            <a:solidFill>
+              <a:srgbClr val="FFFFFF"/>
+            </a:solidFill>
+            <a:prstDash val="solid"/>
+          </a:ln>
+        </p:spPr>
+        <p:txBody>
+          <a:bodyPr xmlns:a="http://schemas.openxmlformats.org/drawingml/2006/main" anchor="t"/>
+          <a:lstStyle xmlns:a="http://schemas.openxmlformats.org/drawingml/2006/main"/>
+          <a:p xmlns:a="http://schemas.openxmlformats.org/drawingml/2006/main">
+            <a:pPr algn="l">
+              <a:defRPr sz="2700" b="1">
+                <a:solidFill>
+                  <a:srgbClr val="172033"/>
+                </a:solidFill>
+              </a:defRPr>
+            </a:pPr>
+            <a:r>
+              <a:rPr sz="2700" b="1">
+                <a:solidFill>
+                  <a:srgbClr val="172033"/>
+                </a:solidFill>
+              </a:rPr>
+              <a:t>A simple path from decision to first clean month-end.</a:t>
+            </a:r>
+          </a:p>
+        </p:txBody>
+      </p:sp>
+      <p:sp>
+        <p:nvSpPr>
+          <p:cNvPr id="4" name="">
+            <a:extLst xmlns:a="http://schemas.openxmlformats.org/drawingml/2006/main">
+              <a:ext uri="{FF2B5EF4-FFF2-40B4-BE49-F238E27FC236}">
+                <a16:creationId xmlns:a16="http://schemas.microsoft.com/office/drawing/2014/main" id="{020A96C4-315D-48AC-BF7C-1124492B7831}"/>
+              </a:ext>
+            </a:extLst>
+          </p:cNvPr>
+          <p:cNvSpPr>
+            <a:spLocks xmlns:a="http://schemas.openxmlformats.org/drawingml/2006/main" noGrp="1"/>
+          </p:cNvSpPr>
+          <p:nvPr/>
+        </p:nvSpPr>
+        <p:spPr>
+          <a:xfrm xmlns:a="http://schemas.openxmlformats.org/drawingml/2006/main">
+            <a:off x="685800" y="2667000"/>
+            <a:ext cx="1676400" cy="1676400"/>
+          </a:xfrm>
+          <a:prstGeom xmlns:a="http://schemas.openxmlformats.org/drawingml/2006/main" prst="rect">
+            <a:avLst/>
+          </a:prstGeom>
+          <a:solidFill xmlns:a="http://schemas.openxmlformats.org/drawingml/2006/main">
+            <a:srgbClr val="FFFFFF"/>
+          </a:solidFill>
+          <a:ln xmlns:a="http://schemas.openxmlformats.org/drawingml/2006/main" w="0">
+            <a:solidFill>
+              <a:srgbClr val="D8E2ED"/>
+            </a:solidFill>
+            <a:prstDash val="solid"/>
+          </a:ln>
+        </p:spPr>
+      </p:sp>
+      <p:sp>
+        <p:nvSpPr>
+          <p:cNvPr id="5" name="">
+            <a:extLst xmlns:a="http://schemas.openxmlformats.org/drawingml/2006/main">
+              <a:ext uri="{FF2B5EF4-FFF2-40B4-BE49-F238E27FC236}">
+                <a16:creationId xmlns:a16="http://schemas.microsoft.com/office/drawing/2014/main" id="{F0E8D5FB-4B75-4DD7-A490-1C5AFE44F861}"/>
+              </a:ext>
+            </a:extLst>
+          </p:cNvPr>
+          <p:cNvSpPr>
+            <a:spLocks xmlns:a="http://schemas.openxmlformats.org/drawingml/2006/main" noGrp="1"/>
+          </p:cNvSpPr>
+          <p:nvPr/>
+        </p:nvSpPr>
+        <p:spPr>
+          <a:xfrm xmlns:a="http://schemas.openxmlformats.org/drawingml/2006/main">
+            <a:off x="857250" y="2895600"/>
+            <a:ext cx="419100" cy="419100"/>
+          </a:xfrm>
+          <a:prstGeom xmlns:a="http://schemas.openxmlformats.org/drawingml/2006/main" prst="rect">
+            <a:avLst/>
+          </a:prstGeom>
+          <a:solidFill xmlns:a="http://schemas.openxmlformats.org/drawingml/2006/main">
+            <a:srgbClr val="1D7F5F"/>
+          </a:solidFill>
+          <a:ln xmlns:a="http://schemas.openxmlformats.org/drawingml/2006/main" w="0">
+            <a:solidFill>
+              <a:srgbClr val="1D7F5F"/>
+            </a:solidFill>
+            <a:prstDash val="solid"/>
+          </a:ln>
+        </p:spPr>
+      </p:sp>
+      <p:sp>
+        <p:nvSpPr>
+          <p:cNvPr id="6" name="">
+            <a:extLst xmlns:a="http://schemas.openxmlformats.org/drawingml/2006/main">
+              <a:ext uri="{FF2B5EF4-FFF2-40B4-BE49-F238E27FC236}">
+                <a16:creationId xmlns:a16="http://schemas.microsoft.com/office/drawing/2014/main" id="{170DFF5F-6652-44A7-89F8-ACA48524F36E}"/>
+              </a:ext>
+            </a:extLst>
+          </p:cNvPr>
+          <p:cNvSpPr>
+            <a:spLocks xmlns:a="http://schemas.openxmlformats.org/drawingml/2006/main" noGrp="1"/>
+          </p:cNvSpPr>
+          <p:nvPr/>
+        </p:nvSpPr>
+        <p:spPr>
+          <a:xfrm xmlns:a="http://schemas.openxmlformats.org/drawingml/2006/main">
+            <a:off x="857250" y="2962275"/>
+            <a:ext cx="419100" cy="285750"/>
+          </a:xfrm>
+          <a:prstGeom xmlns:a="http://schemas.openxmlformats.org/drawingml/2006/main" prst="rect">
+            <a:avLst/>
+          </a:prstGeom>
+          <a:ln xmlns:a="http://schemas.openxmlformats.org/drawingml/2006/main" w="0">
+            <a:solidFill>
+              <a:srgbClr val="FFFFFF"/>
+            </a:solidFill>
+            <a:prstDash val="solid"/>
+          </a:ln>
+        </p:spPr>
+        <p:txBody>
+          <a:bodyPr xmlns:a="http://schemas.openxmlformats.org/drawingml/2006/main" anchor="t"/>
+          <a:lstStyle xmlns:a="http://schemas.openxmlformats.org/drawingml/2006/main"/>
+          <a:p xmlns:a="http://schemas.openxmlformats.org/drawingml/2006/main">
+            <a:pPr algn="ctr">
+              <a:defRPr sz="1500" b="1">
+                <a:solidFill>
+                  <a:srgbClr val="FFFFFF"/>
+                </a:solidFill>
+              </a:defRPr>
+            </a:pPr>
+            <a:r>
+              <a:rPr sz="1500" b="1">
+                <a:solidFill>
+                  <a:srgbClr val="FFFFFF"/>
+                </a:solidFill>
+              </a:rPr>
+              <a:t>1</a:t>
+            </a:r>
+          </a:p>
+        </p:txBody>
+      </p:sp>
+      <p:sp>
+        <p:nvSpPr>
+          <p:cNvPr id="7" name="">
+            <a:extLst xmlns:a="http://schemas.openxmlformats.org/drawingml/2006/main">
+              <a:ext uri="{FF2B5EF4-FFF2-40B4-BE49-F238E27FC236}">
+                <a16:creationId xmlns:a16="http://schemas.microsoft.com/office/drawing/2014/main" id="{93E6B392-CA43-43BB-BE0F-E25565AFEA0D}"/>
+              </a:ext>
+            </a:extLst>
+          </p:cNvPr>
+          <p:cNvSpPr>
+            <a:spLocks xmlns:a="http://schemas.openxmlformats.org/drawingml/2006/main" noGrp="1"/>
+          </p:cNvSpPr>
+          <p:nvPr/>
+        </p:nvSpPr>
+        <p:spPr>
+          <a:xfrm xmlns:a="http://schemas.openxmlformats.org/drawingml/2006/main">
+            <a:off x="857250" y="3524250"/>
+            <a:ext cx="1295400" cy="304800"/>
+          </a:xfrm>
+          <a:prstGeom xmlns:a="http://schemas.openxmlformats.org/drawingml/2006/main" prst="rect">
+            <a:avLst/>
+          </a:prstGeom>
+          <a:ln xmlns:a="http://schemas.openxmlformats.org/drawingml/2006/main" w="0">
+            <a:solidFill>
+              <a:srgbClr val="FFFFFF"/>
+            </a:solidFill>
+            <a:prstDash val="solid"/>
+          </a:ln>
+        </p:spPr>
+        <p:txBody>
+          <a:bodyPr xmlns:a="http://schemas.openxmlformats.org/drawingml/2006/main" anchor="t"/>
+          <a:lstStyle xmlns:a="http://schemas.openxmlformats.org/drawingml/2006/main"/>
+          <a:p xmlns:a="http://schemas.openxmlformats.org/drawingml/2006/main">
+            <a:pPr algn="l">
+              <a:defRPr sz="1275" b="1">
+                <a:solidFill>
+                  <a:srgbClr val="172033"/>
+                </a:solidFill>
+              </a:defRPr>
+            </a:pPr>
+            <a:r>
+              <a:rPr sz="1275" b="1">
+                <a:solidFill>
+                  <a:srgbClr val="172033"/>
+                </a:solidFill>
+              </a:rPr>
+              <a:t>Select package</a:t>
+            </a:r>
+          </a:p>
+        </p:txBody>
+      </p:sp>
+      <p:sp>
+        <p:nvSpPr>
+          <p:cNvPr id="8" name="">
+            <a:extLst xmlns:a="http://schemas.openxmlformats.org/drawingml/2006/main">
+              <a:ext uri="{FF2B5EF4-FFF2-40B4-BE49-F238E27FC236}">
+                <a16:creationId xmlns:a16="http://schemas.microsoft.com/office/drawing/2014/main" id="{FF889570-563C-4419-8F33-FFC3773597BD}"/>
+              </a:ext>
+            </a:extLst>
+          </p:cNvPr>
+          <p:cNvSpPr>
+            <a:spLocks xmlns:a="http://schemas.openxmlformats.org/drawingml/2006/main" noGrp="1"/>
+          </p:cNvSpPr>
+          <p:nvPr/>
+        </p:nvSpPr>
+        <p:spPr>
+          <a:xfrm xmlns:a="http://schemas.openxmlformats.org/drawingml/2006/main">
+            <a:off x="857250" y="3905250"/>
+            <a:ext cx="1295400" cy="742950"/>
+          </a:xfrm>
+          <a:prstGeom xmlns:a="http://schemas.openxmlformats.org/drawingml/2006/main" prst="rect">
+            <a:avLst/>
+          </a:prstGeom>
+          <a:ln xmlns:a="http://schemas.openxmlformats.org/drawingml/2006/main" w="0">
+            <a:solidFill>
+              <a:srgbClr val="FFFFFF"/>
+            </a:solidFill>
+            <a:prstDash val="solid"/>
+          </a:ln>
+        </p:spPr>
+        <p:txBody>
+          <a:bodyPr xmlns:a="http://schemas.openxmlformats.org/drawingml/2006/main" anchor="t"/>
+          <a:lstStyle xmlns:a="http://schemas.openxmlformats.org/drawingml/2006/main"/>
+          <a:p xmlns:a="http://schemas.openxmlformats.org/drawingml/2006/main">
+            <a:pPr algn="l">
+              <a:defRPr sz="900" b="0">
+                <a:solidFill>
+                  <a:srgbClr val="5F6F86"/>
+                </a:solidFill>
+              </a:defRPr>
+            </a:pPr>
+            <a:r>
+              <a:rPr sz="900" b="0">
+                <a:solidFill>
+                  <a:srgbClr val="5F6F86"/>
+                </a:solidFill>
+              </a:rPr>
+              <a:t>Confirm Books Foundation or the expanded Books Complete scope.</a:t>
+            </a:r>
+          </a:p>
+        </p:txBody>
+      </p:sp>
+      <p:sp>
+        <p:nvSpPr>
+          <p:cNvPr id="9" name="">
+            <a:extLst xmlns:a="http://schemas.openxmlformats.org/drawingml/2006/main">
+              <a:ext uri="{FF2B5EF4-FFF2-40B4-BE49-F238E27FC236}">
+                <a16:creationId xmlns:a16="http://schemas.microsoft.com/office/drawing/2014/main" id="{8BB40F31-C723-4E2A-9FAC-F495DCB6EE80}"/>
+              </a:ext>
+            </a:extLst>
+          </p:cNvPr>
+          <p:cNvSpPr>
+            <a:spLocks xmlns:a="http://schemas.openxmlformats.org/drawingml/2006/main" noGrp="1"/>
+          </p:cNvSpPr>
+          <p:nvPr/>
+        </p:nvSpPr>
+        <p:spPr>
+          <a:xfrm xmlns:a="http://schemas.openxmlformats.org/drawingml/2006/main">
+            <a:off x="2438400" y="3314700"/>
+            <a:ext cx="323850" cy="323850"/>
+          </a:xfrm>
+          <a:prstGeom xmlns:a="http://schemas.openxmlformats.org/drawingml/2006/main" prst="rect">
+            <a:avLst/>
+          </a:prstGeom>
+          <a:ln xmlns:a="http://schemas.openxmlformats.org/drawingml/2006/main" w="0">
+            <a:solidFill>
+              <a:srgbClr val="FFFFFF"/>
+            </a:solidFill>
+            <a:prstDash val="solid"/>
+          </a:ln>
+        </p:spPr>
+        <p:txBody>
+          <a:bodyPr xmlns:a="http://schemas.openxmlformats.org/drawingml/2006/main" anchor="ctr"/>
+          <a:lstStyle xmlns:a="http://schemas.openxmlformats.org/drawingml/2006/main"/>
+          <a:p xmlns:a="http://schemas.openxmlformats.org/drawingml/2006/main">
+            <a:pPr algn="ctr">
+              <a:defRPr sz="1650" b="1">
+                <a:solidFill>
+                  <a:srgbClr val="145DA0"/>
+                </a:solidFill>
+              </a:defRPr>
+            </a:pPr>
+            <a:r>
+              <a:rPr sz="1650" b="1">
+                <a:solidFill>
+                  <a:srgbClr val="145DA0"/>
+                </a:solidFill>
+              </a:rPr>
+              <a:t>-&gt;</a:t>
+            </a:r>
+          </a:p>
+        </p:txBody>
+      </p:sp>
+      <p:sp>
+        <p:nvSpPr>
+          <p:cNvPr id="10" name="">
+            <a:extLst xmlns:a="http://schemas.openxmlformats.org/drawingml/2006/main">
+              <a:ext uri="{FF2B5EF4-FFF2-40B4-BE49-F238E27FC236}">
+                <a16:creationId xmlns:a16="http://schemas.microsoft.com/office/drawing/2014/main" id="{CBD17AEC-D82E-4D62-B851-E557FA9298FB}"/>
+              </a:ext>
+            </a:extLst>
+          </p:cNvPr>
+          <p:cNvSpPr>
+            <a:spLocks xmlns:a="http://schemas.openxmlformats.org/drawingml/2006/main" noGrp="1"/>
+          </p:cNvSpPr>
+          <p:nvPr/>
+        </p:nvSpPr>
+        <p:spPr>
+          <a:xfrm xmlns:a="http://schemas.openxmlformats.org/drawingml/2006/main">
+            <a:off x="2895600" y="2667000"/>
+            <a:ext cx="1676400" cy="1676400"/>
+          </a:xfrm>
+          <a:prstGeom xmlns:a="http://schemas.openxmlformats.org/drawingml/2006/main" prst="rect">
+            <a:avLst/>
+          </a:prstGeom>
+          <a:solidFill xmlns:a="http://schemas.openxmlformats.org/drawingml/2006/main">
+            <a:srgbClr val="FFFFFF"/>
+          </a:solidFill>
+          <a:ln xmlns:a="http://schemas.openxmlformats.org/drawingml/2006/main" w="0">
+            <a:solidFill>
+              <a:srgbClr val="D8E2ED"/>
+            </a:solidFill>
+            <a:prstDash val="solid"/>
+          </a:ln>
+        </p:spPr>
+      </p:sp>
+      <p:sp>
+        <p:nvSpPr>
+          <p:cNvPr id="11" name="">
+            <a:extLst xmlns:a="http://schemas.openxmlformats.org/drawingml/2006/main">
+              <a:ext uri="{FF2B5EF4-FFF2-40B4-BE49-F238E27FC236}">
+                <a16:creationId xmlns:a16="http://schemas.microsoft.com/office/drawing/2014/main" id="{D34C4F21-E7F2-498A-81F1-BFDF5AD4D5EE}"/>
+              </a:ext>
+            </a:extLst>
+          </p:cNvPr>
+          <p:cNvSpPr>
+            <a:spLocks xmlns:a="http://schemas.openxmlformats.org/drawingml/2006/main" noGrp="1"/>
+          </p:cNvSpPr>
+          <p:nvPr/>
+        </p:nvSpPr>
+        <p:spPr>
+          <a:xfrm xmlns:a="http://schemas.openxmlformats.org/drawingml/2006/main">
+            <a:off x="3067050" y="2895600"/>
+            <a:ext cx="419100" cy="419100"/>
+          </a:xfrm>
+          <a:prstGeom xmlns:a="http://schemas.openxmlformats.org/drawingml/2006/main" prst="rect">
+            <a:avLst/>
+          </a:prstGeom>
+          <a:solidFill xmlns:a="http://schemas.openxmlformats.org/drawingml/2006/main">
+            <a:srgbClr val="145DA0"/>
+          </a:solidFill>
+          <a:ln xmlns:a="http://schemas.openxmlformats.org/drawingml/2006/main" w="0">
+            <a:solidFill>
+              <a:srgbClr val="145DA0"/>
+            </a:solidFill>
+            <a:prstDash val="solid"/>
+          </a:ln>
+        </p:spPr>
+      </p:sp>
+      <p:sp>
+        <p:nvSpPr>
+          <p:cNvPr id="12" name="">
+            <a:extLst xmlns:a="http://schemas.openxmlformats.org/drawingml/2006/main">
+              <a:ext uri="{FF2B5EF4-FFF2-40B4-BE49-F238E27FC236}">
+                <a16:creationId xmlns:a16="http://schemas.microsoft.com/office/drawing/2014/main" id="{6C1C6C55-ED68-48F9-B8F3-2FC3BEF3C7EF}"/>
+              </a:ext>
+            </a:extLst>
+          </p:cNvPr>
+          <p:cNvSpPr>
+            <a:spLocks xmlns:a="http://schemas.openxmlformats.org/drawingml/2006/main" noGrp="1"/>
+          </p:cNvSpPr>
+          <p:nvPr/>
+        </p:nvSpPr>
+        <p:spPr>
+          <a:xfrm xmlns:a="http://schemas.openxmlformats.org/drawingml/2006/main">
+            <a:off x="3067050" y="2962275"/>
+            <a:ext cx="419100" cy="285750"/>
+          </a:xfrm>
+          <a:prstGeom xmlns:a="http://schemas.openxmlformats.org/drawingml/2006/main" prst="rect">
+            <a:avLst/>
+          </a:prstGeom>
+          <a:ln xmlns:a="http://schemas.openxmlformats.org/drawingml/2006/main" w="0">
+            <a:solidFill>
+              <a:srgbClr val="FFFFFF"/>
+            </a:solidFill>
+            <a:prstDash val="solid"/>
+          </a:ln>
+        </p:spPr>
+        <p:txBody>
+          <a:bodyPr xmlns:a="http://schemas.openxmlformats.org/drawingml/2006/main" anchor="t"/>
+          <a:lstStyle xmlns:a="http://schemas.openxmlformats.org/drawingml/2006/main"/>
+          <a:p xmlns:a="http://schemas.openxmlformats.org/drawingml/2006/main">
+            <a:pPr algn="ctr">
+              <a:defRPr sz="1500" b="1">
+                <a:solidFill>
+                  <a:srgbClr val="FFFFFF"/>
+                </a:solidFill>
+              </a:defRPr>
+            </a:pPr>
+            <a:r>
+              <a:rPr sz="1500" b="1">
+                <a:solidFill>
+                  <a:srgbClr val="FFFFFF"/>
+                </a:solidFill>
+              </a:rPr>
+              <a:t>2</a:t>
+            </a:r>
+          </a:p>
+        </p:txBody>
+      </p:sp>
+      <p:sp>
+        <p:nvSpPr>
+          <p:cNvPr id="13" name="">
+            <a:extLst xmlns:a="http://schemas.openxmlformats.org/drawingml/2006/main">
+              <a:ext uri="{FF2B5EF4-FFF2-40B4-BE49-F238E27FC236}">
+                <a16:creationId xmlns:a16="http://schemas.microsoft.com/office/drawing/2014/main" id="{8B0842C9-1646-4E0A-8273-5457432A6E71}"/>
+              </a:ext>
+            </a:extLst>
+          </p:cNvPr>
+          <p:cNvSpPr>
+            <a:spLocks xmlns:a="http://schemas.openxmlformats.org/drawingml/2006/main" noGrp="1"/>
+          </p:cNvSpPr>
+          <p:nvPr/>
+        </p:nvSpPr>
+        <p:spPr>
+          <a:xfrm xmlns:a="http://schemas.openxmlformats.org/drawingml/2006/main">
+            <a:off x="3067050" y="3524250"/>
+            <a:ext cx="1295400" cy="304800"/>
+          </a:xfrm>
+          <a:prstGeom xmlns:a="http://schemas.openxmlformats.org/drawingml/2006/main" prst="rect">
+            <a:avLst/>
+          </a:prstGeom>
+          <a:ln xmlns:a="http://schemas.openxmlformats.org/drawingml/2006/main" w="0">
+            <a:solidFill>
+              <a:srgbClr val="FFFFFF"/>
+            </a:solidFill>
+            <a:prstDash val="solid"/>
+          </a:ln>
+        </p:spPr>
+        <p:txBody>
+          <a:bodyPr xmlns:a="http://schemas.openxmlformats.org/drawingml/2006/main" anchor="t"/>
+          <a:lstStyle xmlns:a="http://schemas.openxmlformats.org/drawingml/2006/main"/>
+          <a:p xmlns:a="http://schemas.openxmlformats.org/drawingml/2006/main">
+            <a:pPr algn="l">
+              <a:defRPr sz="1275" b="1">
+                <a:solidFill>
+                  <a:srgbClr val="172033"/>
+                </a:solidFill>
+              </a:defRPr>
+            </a:pPr>
+            <a:r>
+              <a:rPr sz="1275" b="1">
+                <a:solidFill>
+                  <a:srgbClr val="172033"/>
+                </a:solidFill>
+              </a:rPr>
+              <a:t>Approve SOW</a:t>
+            </a:r>
+          </a:p>
+        </p:txBody>
+      </p:sp>
+      <p:sp>
+        <p:nvSpPr>
+          <p:cNvPr id="14" name="">
+            <a:extLst xmlns:a="http://schemas.openxmlformats.org/drawingml/2006/main">
+              <a:ext uri="{FF2B5EF4-FFF2-40B4-BE49-F238E27FC236}">
+                <a16:creationId xmlns:a16="http://schemas.microsoft.com/office/drawing/2014/main" id="{008B8446-9049-4FF2-8DAF-B834CE8F64AA}"/>
+              </a:ext>
+            </a:extLst>
+          </p:cNvPr>
+          <p:cNvSpPr>
+            <a:spLocks xmlns:a="http://schemas.openxmlformats.org/drawingml/2006/main" noGrp="1"/>
+          </p:cNvSpPr>
+          <p:nvPr/>
+        </p:nvSpPr>
+        <p:spPr>
+          <a:xfrm xmlns:a="http://schemas.openxmlformats.org/drawingml/2006/main">
+            <a:off x="3067050" y="3905250"/>
+            <a:ext cx="1295400" cy="742950"/>
+          </a:xfrm>
+          <a:prstGeom xmlns:a="http://schemas.openxmlformats.org/drawingml/2006/main" prst="rect">
+            <a:avLst/>
+          </a:prstGeom>
+          <a:ln xmlns:a="http://schemas.openxmlformats.org/drawingml/2006/main" w="0">
+            <a:solidFill>
+              <a:srgbClr val="FFFFFF"/>
+            </a:solidFill>
+            <a:prstDash val="solid"/>
+          </a:ln>
+        </p:spPr>
+        <p:txBody>
+          <a:bodyPr xmlns:a="http://schemas.openxmlformats.org/drawingml/2006/main" anchor="t"/>
+          <a:lstStyle xmlns:a="http://schemas.openxmlformats.org/drawingml/2006/main"/>
+          <a:p xmlns:a="http://schemas.openxmlformats.org/drawingml/2006/main">
+            <a:pPr algn="l">
+              <a:defRPr sz="900" b="0">
+                <a:solidFill>
+                  <a:srgbClr val="5F6F86"/>
+                </a:solidFill>
+              </a:defRPr>
+            </a:pPr>
+            <a:r>
+              <a:rPr sz="900" b="0">
+                <a:solidFill>
+                  <a:srgbClr val="5F6F86"/>
+                </a:solidFill>
+              </a:rPr>
+              <a:t>Name the approval owner and target decision date.</a:t>
+            </a:r>
+          </a:p>
+        </p:txBody>
+      </p:sp>
+      <p:sp>
+        <p:nvSpPr>
+          <p:cNvPr id="15" name="">
+            <a:extLst xmlns:a="http://schemas.openxmlformats.org/drawingml/2006/main">
+              <a:ext uri="{FF2B5EF4-FFF2-40B4-BE49-F238E27FC236}">
+                <a16:creationId xmlns:a16="http://schemas.microsoft.com/office/drawing/2014/main" id="{16C3FC9E-5860-422D-9003-E8582DE88CEE}"/>
+              </a:ext>
+            </a:extLst>
+          </p:cNvPr>
+          <p:cNvSpPr>
+            <a:spLocks xmlns:a="http://schemas.openxmlformats.org/drawingml/2006/main" noGrp="1"/>
+          </p:cNvSpPr>
+          <p:nvPr/>
+        </p:nvSpPr>
+        <p:spPr>
+          <a:xfrm xmlns:a="http://schemas.openxmlformats.org/drawingml/2006/main">
+            <a:off x="4648200" y="3314700"/>
+            <a:ext cx="323850" cy="323850"/>
+          </a:xfrm>
+          <a:prstGeom xmlns:a="http://schemas.openxmlformats.org/drawingml/2006/main" prst="rect">
+            <a:avLst/>
+          </a:prstGeom>
+          <a:ln xmlns:a="http://schemas.openxmlformats.org/drawingml/2006/main" w="0">
+            <a:solidFill>
+              <a:srgbClr val="FFFFFF"/>
+            </a:solidFill>
+            <a:prstDash val="solid"/>
+          </a:ln>
+        </p:spPr>
+        <p:txBody>
+          <a:bodyPr xmlns:a="http://schemas.openxmlformats.org/drawingml/2006/main" anchor="ctr"/>
+          <a:lstStyle xmlns:a="http://schemas.openxmlformats.org/drawingml/2006/main"/>
+          <a:p xmlns:a="http://schemas.openxmlformats.org/drawingml/2006/main">
+            <a:pPr algn="ctr">
+              <a:defRPr sz="1650" b="1">
+                <a:solidFill>
+                  <a:srgbClr val="145DA0"/>
+                </a:solidFill>
+              </a:defRPr>
+            </a:pPr>
+            <a:r>
+              <a:rPr sz="1650" b="1">
+                <a:solidFill>
+                  <a:srgbClr val="145DA0"/>
+                </a:solidFill>
+              </a:rPr>
+              <a:t>-&gt;</a:t>
+            </a:r>
+          </a:p>
+        </p:txBody>
+      </p:sp>
+      <p:sp>
+        <p:nvSpPr>
+          <p:cNvPr id="16" name="">
+            <a:extLst xmlns:a="http://schemas.openxmlformats.org/drawingml/2006/main">
+              <a:ext uri="{FF2B5EF4-FFF2-40B4-BE49-F238E27FC236}">
+                <a16:creationId xmlns:a16="http://schemas.microsoft.com/office/drawing/2014/main" id="{17C227EE-31B3-4F3B-B176-73EAFAF41DB2}"/>
+              </a:ext>
+            </a:extLst>
+          </p:cNvPr>
+          <p:cNvSpPr>
+            <a:spLocks xmlns:a="http://schemas.openxmlformats.org/drawingml/2006/main" noGrp="1"/>
+          </p:cNvSpPr>
+          <p:nvPr/>
+        </p:nvSpPr>
+        <p:spPr>
+          <a:xfrm xmlns:a="http://schemas.openxmlformats.org/drawingml/2006/main">
+            <a:off x="5105400" y="2667000"/>
+            <a:ext cx="1676400" cy="1676400"/>
+          </a:xfrm>
+          <a:prstGeom xmlns:a="http://schemas.openxmlformats.org/drawingml/2006/main" prst="rect">
+            <a:avLst/>
+          </a:prstGeom>
+          <a:solidFill xmlns:a="http://schemas.openxmlformats.org/drawingml/2006/main">
+            <a:srgbClr val="FFFFFF"/>
+          </a:solidFill>
+          <a:ln xmlns:a="http://schemas.openxmlformats.org/drawingml/2006/main" w="0">
+            <a:solidFill>
+              <a:srgbClr val="D8E2ED"/>
+            </a:solidFill>
+            <a:prstDash val="solid"/>
+          </a:ln>
+        </p:spPr>
+      </p:sp>
+      <p:sp>
+        <p:nvSpPr>
+          <p:cNvPr id="17" name="">
+            <a:extLst xmlns:a="http://schemas.openxmlformats.org/drawingml/2006/main">
+              <a:ext uri="{FF2B5EF4-FFF2-40B4-BE49-F238E27FC236}">
+                <a16:creationId xmlns:a16="http://schemas.microsoft.com/office/drawing/2014/main" id="{3CFC2F97-AAD4-4B47-9538-B05390393013}"/>
+              </a:ext>
+            </a:extLst>
+          </p:cNvPr>
+          <p:cNvSpPr>
+            <a:spLocks xmlns:a="http://schemas.openxmlformats.org/drawingml/2006/main" noGrp="1"/>
+          </p:cNvSpPr>
+          <p:nvPr/>
+        </p:nvSpPr>
+        <p:spPr>
+          <a:xfrm xmlns:a="http://schemas.openxmlformats.org/drawingml/2006/main">
+            <a:off x="5276850" y="2895600"/>
+            <a:ext cx="419100" cy="419100"/>
+          </a:xfrm>
+          <a:prstGeom xmlns:a="http://schemas.openxmlformats.org/drawingml/2006/main" prst="rect">
+            <a:avLst/>
+          </a:prstGeom>
+          <a:solidFill xmlns:a="http://schemas.openxmlformats.org/drawingml/2006/main">
+            <a:srgbClr val="D98C16"/>
+          </a:solidFill>
+          <a:ln xmlns:a="http://schemas.openxmlformats.org/drawingml/2006/main" w="0">
+            <a:solidFill>
+              <a:srgbClr val="D98C16"/>
+            </a:solidFill>
+            <a:prstDash val="solid"/>
+          </a:ln>
+        </p:spPr>
+      </p:sp>
+      <p:sp>
+        <p:nvSpPr>
+          <p:cNvPr id="18" name="">
+            <a:extLst xmlns:a="http://schemas.openxmlformats.org/drawingml/2006/main">
+              <a:ext uri="{FF2B5EF4-FFF2-40B4-BE49-F238E27FC236}">
+                <a16:creationId xmlns:a16="http://schemas.microsoft.com/office/drawing/2014/main" id="{2EA85162-AE80-4F1C-BA7E-CC89C3A4B66E}"/>
+              </a:ext>
+            </a:extLst>
+          </p:cNvPr>
+          <p:cNvSpPr>
+            <a:spLocks xmlns:a="http://schemas.openxmlformats.org/drawingml/2006/main" noGrp="1"/>
+          </p:cNvSpPr>
+          <p:nvPr/>
+        </p:nvSpPr>
+        <p:spPr>
+          <a:xfrm xmlns:a="http://schemas.openxmlformats.org/drawingml/2006/main">
+            <a:off x="5276850" y="2962275"/>
+            <a:ext cx="419100" cy="285750"/>
+          </a:xfrm>
+          <a:prstGeom xmlns:a="http://schemas.openxmlformats.org/drawingml/2006/main" prst="rect">
+            <a:avLst/>
+          </a:prstGeom>
+          <a:ln xmlns:a="http://schemas.openxmlformats.org/drawingml/2006/main" w="0">
+            <a:solidFill>
+              <a:srgbClr val="FFFFFF"/>
+            </a:solidFill>
+            <a:prstDash val="solid"/>
+          </a:ln>
+        </p:spPr>
+        <p:txBody>
+          <a:bodyPr xmlns:a="http://schemas.openxmlformats.org/drawingml/2006/main" anchor="t"/>
+          <a:lstStyle xmlns:a="http://schemas.openxmlformats.org/drawingml/2006/main"/>
+          <a:p xmlns:a="http://schemas.openxmlformats.org/drawingml/2006/main">
+            <a:pPr algn="ctr">
+              <a:defRPr sz="1500" b="1">
+                <a:solidFill>
+                  <a:srgbClr val="FFFFFF"/>
+                </a:solidFill>
+              </a:defRPr>
+            </a:pPr>
+            <a:r>
+              <a:rPr sz="1500" b="1">
+                <a:solidFill>
+                  <a:srgbClr val="FFFFFF"/>
+                </a:solidFill>
+              </a:rPr>
+              <a:t>3</a:t>
+            </a:r>
+          </a:p>
+        </p:txBody>
+      </p:sp>
+      <p:sp>
+        <p:nvSpPr>
+          <p:cNvPr id="19" name="">
+            <a:extLst xmlns:a="http://schemas.openxmlformats.org/drawingml/2006/main">
+              <a:ext uri="{FF2B5EF4-FFF2-40B4-BE49-F238E27FC236}">
+                <a16:creationId xmlns:a16="http://schemas.microsoft.com/office/drawing/2014/main" id="{8F7D8F75-C0A0-4814-AF37-1CF062081983}"/>
+              </a:ext>
+            </a:extLst>
+          </p:cNvPr>
+          <p:cNvSpPr>
+            <a:spLocks xmlns:a="http://schemas.openxmlformats.org/drawingml/2006/main" noGrp="1"/>
+          </p:cNvSpPr>
+          <p:nvPr/>
+        </p:nvSpPr>
+        <p:spPr>
+          <a:xfrm xmlns:a="http://schemas.openxmlformats.org/drawingml/2006/main">
+            <a:off x="5276850" y="3524250"/>
+            <a:ext cx="1295400" cy="304800"/>
+          </a:xfrm>
+          <a:prstGeom xmlns:a="http://schemas.openxmlformats.org/drawingml/2006/main" prst="rect">
+            <a:avLst/>
+          </a:prstGeom>
+          <a:ln xmlns:a="http://schemas.openxmlformats.org/drawingml/2006/main" w="0">
+            <a:solidFill>
+              <a:srgbClr val="FFFFFF"/>
+            </a:solidFill>
+            <a:prstDash val="solid"/>
+          </a:ln>
+        </p:spPr>
+        <p:txBody>
+          <a:bodyPr xmlns:a="http://schemas.openxmlformats.org/drawingml/2006/main" anchor="t"/>
+          <a:lstStyle xmlns:a="http://schemas.openxmlformats.org/drawingml/2006/main"/>
+          <a:p xmlns:a="http://schemas.openxmlformats.org/drawingml/2006/main">
+            <a:pPr algn="l">
+              <a:defRPr sz="1275" b="1">
+                <a:solidFill>
+                  <a:srgbClr val="172033"/>
+                </a:solidFill>
+              </a:defRPr>
+            </a:pPr>
+            <a:r>
+              <a:rPr sz="1275" b="1">
+                <a:solidFill>
+                  <a:srgbClr val="172033"/>
+                </a:solidFill>
+              </a:rPr>
+              <a:t>Confirm inputs</a:t>
+            </a:r>
+          </a:p>
+        </p:txBody>
+      </p:sp>
+      <p:sp>
+        <p:nvSpPr>
+          <p:cNvPr id="20" name="">
+            <a:extLst xmlns:a="http://schemas.openxmlformats.org/drawingml/2006/main">
+              <a:ext uri="{FF2B5EF4-FFF2-40B4-BE49-F238E27FC236}">
+                <a16:creationId xmlns:a16="http://schemas.microsoft.com/office/drawing/2014/main" id="{B867BCA8-3837-4D71-9C93-536BFC0284BC}"/>
+              </a:ext>
+            </a:extLst>
+          </p:cNvPr>
+          <p:cNvSpPr>
+            <a:spLocks xmlns:a="http://schemas.openxmlformats.org/drawingml/2006/main" noGrp="1"/>
+          </p:cNvSpPr>
+          <p:nvPr/>
+        </p:nvSpPr>
+        <p:spPr>
+          <a:xfrm xmlns:a="http://schemas.openxmlformats.org/drawingml/2006/main">
+            <a:off x="5276850" y="3905250"/>
+            <a:ext cx="1295400" cy="742950"/>
+          </a:xfrm>
+          <a:prstGeom xmlns:a="http://schemas.openxmlformats.org/drawingml/2006/main" prst="rect">
+            <a:avLst/>
+          </a:prstGeom>
+          <a:ln xmlns:a="http://schemas.openxmlformats.org/drawingml/2006/main" w="0">
+            <a:solidFill>
+              <a:srgbClr val="FFFFFF"/>
+            </a:solidFill>
+            <a:prstDash val="solid"/>
+          </a:ln>
+        </p:spPr>
+        <p:txBody>
+          <a:bodyPr xmlns:a="http://schemas.openxmlformats.org/drawingml/2006/main" anchor="t"/>
+          <a:lstStyle xmlns:a="http://schemas.openxmlformats.org/drawingml/2006/main"/>
+          <a:p xmlns:a="http://schemas.openxmlformats.org/drawingml/2006/main">
+            <a:pPr algn="l">
+              <a:defRPr sz="900" b="0">
+                <a:solidFill>
+                  <a:srgbClr val="5F6F86"/>
+                </a:solidFill>
+              </a:defRPr>
+            </a:pPr>
+            <a:r>
+              <a:rPr sz="900" b="0">
+                <a:solidFill>
+                  <a:srgbClr val="5F6F86"/>
+                </a:solidFill>
+              </a:rPr>
+              <a:t>Accounting owner, opening balances, chart-of-accounts review, and tax/entity basics.</a:t>
+            </a:r>
+          </a:p>
+        </p:txBody>
+      </p:sp>
+      <p:sp>
+        <p:nvSpPr>
+          <p:cNvPr id="21" name="">
+            <a:extLst xmlns:a="http://schemas.openxmlformats.org/drawingml/2006/main">
+              <a:ext uri="{FF2B5EF4-FFF2-40B4-BE49-F238E27FC236}">
+                <a16:creationId xmlns:a16="http://schemas.microsoft.com/office/drawing/2014/main" id="{84940A0A-9429-47E2-9B7A-1F6B515EAF78}"/>
+              </a:ext>
+            </a:extLst>
+          </p:cNvPr>
+          <p:cNvSpPr>
+            <a:spLocks xmlns:a="http://schemas.openxmlformats.org/drawingml/2006/main" noGrp="1"/>
+          </p:cNvSpPr>
+          <p:nvPr/>
+        </p:nvSpPr>
+        <p:spPr>
+          <a:xfrm xmlns:a="http://schemas.openxmlformats.org/drawingml/2006/main">
+            <a:off x="6858000" y="3314700"/>
+            <a:ext cx="323850" cy="323850"/>
+          </a:xfrm>
+          <a:prstGeom xmlns:a="http://schemas.openxmlformats.org/drawingml/2006/main" prst="rect">
+            <a:avLst/>
+          </a:prstGeom>
+          <a:ln xmlns:a="http://schemas.openxmlformats.org/drawingml/2006/main" w="0">
+            <a:solidFill>
+              <a:srgbClr val="FFFFFF"/>
+            </a:solidFill>
+            <a:prstDash val="solid"/>
+          </a:ln>
+        </p:spPr>
+        <p:txBody>
+          <a:bodyPr xmlns:a="http://schemas.openxmlformats.org/drawingml/2006/main" anchor="ctr"/>
+          <a:lstStyle xmlns:a="http://schemas.openxmlformats.org/drawingml/2006/main"/>
+          <a:p xmlns:a="http://schemas.openxmlformats.org/drawingml/2006/main">
+            <a:pPr algn="ctr">
+              <a:defRPr sz="1650" b="1">
+                <a:solidFill>
+                  <a:srgbClr val="145DA0"/>
+                </a:solidFill>
+              </a:defRPr>
+            </a:pPr>
+            <a:r>
+              <a:rPr sz="1650" b="1">
+                <a:solidFill>
+                  <a:srgbClr val="145DA0"/>
+                </a:solidFill>
+              </a:rPr>
+              <a:t>-&gt;</a:t>
+            </a:r>
+          </a:p>
+        </p:txBody>
+      </p:sp>
+      <p:sp>
+        <p:nvSpPr>
+          <p:cNvPr id="22" name="">
+            <a:extLst xmlns:a="http://schemas.openxmlformats.org/drawingml/2006/main">
+              <a:ext uri="{FF2B5EF4-FFF2-40B4-BE49-F238E27FC236}">
+                <a16:creationId xmlns:a16="http://schemas.microsoft.com/office/drawing/2014/main" id="{B04145C5-5E25-459A-9273-AF867E9A9010}"/>
+              </a:ext>
+            </a:extLst>
+          </p:cNvPr>
+          <p:cNvSpPr>
+            <a:spLocks xmlns:a="http://schemas.openxmlformats.org/drawingml/2006/main" noGrp="1"/>
+          </p:cNvSpPr>
+          <p:nvPr/>
+        </p:nvSpPr>
+        <p:spPr>
+          <a:xfrm xmlns:a="http://schemas.openxmlformats.org/drawingml/2006/main">
+            <a:off x="7315200" y="2667000"/>
+            <a:ext cx="1676400" cy="1676400"/>
+          </a:xfrm>
+          <a:prstGeom xmlns:a="http://schemas.openxmlformats.org/drawingml/2006/main" prst="rect">
+            <a:avLst/>
+          </a:prstGeom>
+          <a:solidFill xmlns:a="http://schemas.openxmlformats.org/drawingml/2006/main">
+            <a:srgbClr val="FFFFFF"/>
+          </a:solidFill>
+          <a:ln xmlns:a="http://schemas.openxmlformats.org/drawingml/2006/main" w="0">
+            <a:solidFill>
+              <a:srgbClr val="D8E2ED"/>
+            </a:solidFill>
+            <a:prstDash val="solid"/>
+          </a:ln>
+        </p:spPr>
+      </p:sp>
+      <p:sp>
+        <p:nvSpPr>
+          <p:cNvPr id="23" name="">
+            <a:extLst xmlns:a="http://schemas.openxmlformats.org/drawingml/2006/main">
+              <a:ext uri="{FF2B5EF4-FFF2-40B4-BE49-F238E27FC236}">
+                <a16:creationId xmlns:a16="http://schemas.microsoft.com/office/drawing/2014/main" id="{AD44FFA3-78CF-4C23-B896-D71A3CAEF17E}"/>
+              </a:ext>
+            </a:extLst>
+          </p:cNvPr>
+          <p:cNvSpPr>
+            <a:spLocks xmlns:a="http://schemas.openxmlformats.org/drawingml/2006/main" noGrp="1"/>
+          </p:cNvSpPr>
+          <p:nvPr/>
+        </p:nvSpPr>
+        <p:spPr>
+          <a:xfrm xmlns:a="http://schemas.openxmlformats.org/drawingml/2006/main">
+            <a:off x="7486650" y="2895600"/>
+            <a:ext cx="419100" cy="419100"/>
+          </a:xfrm>
+          <a:prstGeom xmlns:a="http://schemas.openxmlformats.org/drawingml/2006/main" prst="rect">
+            <a:avLst/>
+          </a:prstGeom>
+          <a:solidFill xmlns:a="http://schemas.openxmlformats.org/drawingml/2006/main">
+            <a:srgbClr val="23A6D5"/>
+          </a:solidFill>
+          <a:ln xmlns:a="http://schemas.openxmlformats.org/drawingml/2006/main" w="0">
+            <a:solidFill>
+              <a:srgbClr val="23A6D5"/>
+            </a:solidFill>
+            <a:prstDash val="solid"/>
+          </a:ln>
+        </p:spPr>
+      </p:sp>
+      <p:sp>
+        <p:nvSpPr>
+          <p:cNvPr id="24" name="">
+            <a:extLst xmlns:a="http://schemas.openxmlformats.org/drawingml/2006/main">
+              <a:ext uri="{FF2B5EF4-FFF2-40B4-BE49-F238E27FC236}">
+                <a16:creationId xmlns:a16="http://schemas.microsoft.com/office/drawing/2014/main" id="{19621A37-F7C3-4C9B-B09B-3EB13E042949}"/>
+              </a:ext>
+            </a:extLst>
+          </p:cNvPr>
+          <p:cNvSpPr>
+            <a:spLocks xmlns:a="http://schemas.openxmlformats.org/drawingml/2006/main" noGrp="1"/>
+          </p:cNvSpPr>
+          <p:nvPr/>
+        </p:nvSpPr>
+        <p:spPr>
+          <a:xfrm xmlns:a="http://schemas.openxmlformats.org/drawingml/2006/main">
+            <a:off x="7486650" y="2962275"/>
+            <a:ext cx="419100" cy="285750"/>
+          </a:xfrm>
+          <a:prstGeom xmlns:a="http://schemas.openxmlformats.org/drawingml/2006/main" prst="rect">
+            <a:avLst/>
+          </a:prstGeom>
+          <a:ln xmlns:a="http://schemas.openxmlformats.org/drawingml/2006/main" w="0">
+            <a:solidFill>
+              <a:srgbClr val="FFFFFF"/>
+            </a:solidFill>
+            <a:prstDash val="solid"/>
+          </a:ln>
+        </p:spPr>
+        <p:txBody>
+          <a:bodyPr xmlns:a="http://schemas.openxmlformats.org/drawingml/2006/main" anchor="t"/>
+          <a:lstStyle xmlns:a="http://schemas.openxmlformats.org/drawingml/2006/main"/>
+          <a:p xmlns:a="http://schemas.openxmlformats.org/drawingml/2006/main">
+            <a:pPr algn="ctr">
+              <a:defRPr sz="1500" b="1">
+                <a:solidFill>
+                  <a:srgbClr val="FFFFFF"/>
+                </a:solidFill>
+              </a:defRPr>
+            </a:pPr>
+            <a:r>
+              <a:rPr sz="1500" b="1">
+                <a:solidFill>
+                  <a:srgbClr val="FFFFFF"/>
+                </a:solidFill>
+              </a:rPr>
+              <a:t>4</a:t>
+            </a:r>
+          </a:p>
+        </p:txBody>
+      </p:sp>
+      <p:sp>
+        <p:nvSpPr>
+          <p:cNvPr id="25" name="">
+            <a:extLst xmlns:a="http://schemas.openxmlformats.org/drawingml/2006/main">
+              <a:ext uri="{FF2B5EF4-FFF2-40B4-BE49-F238E27FC236}">
+                <a16:creationId xmlns:a16="http://schemas.microsoft.com/office/drawing/2014/main" id="{E8922ED0-B70F-479A-A7F8-3E74AE8E1502}"/>
+              </a:ext>
+            </a:extLst>
+          </p:cNvPr>
+          <p:cNvSpPr>
+            <a:spLocks xmlns:a="http://schemas.openxmlformats.org/drawingml/2006/main" noGrp="1"/>
+          </p:cNvSpPr>
+          <p:nvPr/>
+        </p:nvSpPr>
+        <p:spPr>
+          <a:xfrm xmlns:a="http://schemas.openxmlformats.org/drawingml/2006/main">
+            <a:off x="7486650" y="3524250"/>
+            <a:ext cx="1295400" cy="304800"/>
+          </a:xfrm>
+          <a:prstGeom xmlns:a="http://schemas.openxmlformats.org/drawingml/2006/main" prst="rect">
+            <a:avLst/>
+          </a:prstGeom>
+          <a:ln xmlns:a="http://schemas.openxmlformats.org/drawingml/2006/main" w="0">
+            <a:solidFill>
+              <a:srgbClr val="FFFFFF"/>
+            </a:solidFill>
+            <a:prstDash val="solid"/>
+          </a:ln>
+        </p:spPr>
+        <p:txBody>
+          <a:bodyPr xmlns:a="http://schemas.openxmlformats.org/drawingml/2006/main" anchor="t"/>
+          <a:lstStyle xmlns:a="http://schemas.openxmlformats.org/drawingml/2006/main"/>
+          <a:p xmlns:a="http://schemas.openxmlformats.org/drawingml/2006/main">
+            <a:pPr algn="l">
+              <a:defRPr sz="1275" b="1">
+                <a:solidFill>
+                  <a:srgbClr val="172033"/>
+                </a:solidFill>
+              </a:defRPr>
+            </a:pPr>
+            <a:r>
+              <a:rPr sz="1275" b="1">
+                <a:solidFill>
+                  <a:srgbClr val="172033"/>
+                </a:solidFill>
+              </a:rPr>
+              <a:t>Implement</a:t>
+            </a:r>
+          </a:p>
+        </p:txBody>
+      </p:sp>
+      <p:sp>
+        <p:nvSpPr>
+          <p:cNvPr id="26" name="">
+            <a:extLst xmlns:a="http://schemas.openxmlformats.org/drawingml/2006/main">
+              <a:ext uri="{FF2B5EF4-FFF2-40B4-BE49-F238E27FC236}">
+                <a16:creationId xmlns:a16="http://schemas.microsoft.com/office/drawing/2014/main" id="{2E55DA48-D761-4FFF-84C1-80FDCE5C1EDD}"/>
+              </a:ext>
+            </a:extLst>
+          </p:cNvPr>
+          <p:cNvSpPr>
+            <a:spLocks xmlns:a="http://schemas.openxmlformats.org/drawingml/2006/main" noGrp="1"/>
+          </p:cNvSpPr>
+          <p:nvPr/>
+        </p:nvSpPr>
+        <p:spPr>
+          <a:xfrm xmlns:a="http://schemas.openxmlformats.org/drawingml/2006/main">
+            <a:off x="7486650" y="3905250"/>
+            <a:ext cx="1295400" cy="742950"/>
+          </a:xfrm>
+          <a:prstGeom xmlns:a="http://schemas.openxmlformats.org/drawingml/2006/main" prst="rect">
+            <a:avLst/>
+          </a:prstGeom>
+          <a:ln xmlns:a="http://schemas.openxmlformats.org/drawingml/2006/main" w="0">
+            <a:solidFill>
+              <a:srgbClr val="FFFFFF"/>
+            </a:solidFill>
+            <a:prstDash val="solid"/>
+          </a:ln>
+        </p:spPr>
+        <p:txBody>
+          <a:bodyPr xmlns:a="http://schemas.openxmlformats.org/drawingml/2006/main" anchor="t"/>
+          <a:lstStyle xmlns:a="http://schemas.openxmlformats.org/drawingml/2006/main"/>
+          <a:p xmlns:a="http://schemas.openxmlformats.org/drawingml/2006/main">
+            <a:pPr algn="l">
+              <a:defRPr sz="900" b="0">
+                <a:solidFill>
+                  <a:srgbClr val="5F6F86"/>
+                </a:solidFill>
+              </a:defRPr>
+            </a:pPr>
+            <a:r>
+              <a:rPr sz="900" b="0">
+                <a:solidFill>
+                  <a:srgbClr val="5F6F86"/>
+                </a:solidFill>
+              </a:rPr>
+              <a:t>Tailor the books, load opening balances, wire A/R and A/P, and train the team.</a:t>
+            </a:r>
+          </a:p>
+        </p:txBody>
+      </p:sp>
+      <p:sp>
+        <p:nvSpPr>
+          <p:cNvPr id="27" name="">
+            <a:extLst xmlns:a="http://schemas.openxmlformats.org/drawingml/2006/main">
+              <a:ext uri="{FF2B5EF4-FFF2-40B4-BE49-F238E27FC236}">
+                <a16:creationId xmlns:a16="http://schemas.microsoft.com/office/drawing/2014/main" id="{A95FCE28-6D4A-4425-BE05-8F62E2B9681B}"/>
+              </a:ext>
+            </a:extLst>
+          </p:cNvPr>
+          <p:cNvSpPr>
+            <a:spLocks xmlns:a="http://schemas.openxmlformats.org/drawingml/2006/main" noGrp="1"/>
+          </p:cNvSpPr>
+          <p:nvPr/>
+        </p:nvSpPr>
+        <p:spPr>
+          <a:xfrm xmlns:a="http://schemas.openxmlformats.org/drawingml/2006/main">
+            <a:off x="9067800" y="3314700"/>
+            <a:ext cx="323850" cy="323850"/>
+          </a:xfrm>
+          <a:prstGeom xmlns:a="http://schemas.openxmlformats.org/drawingml/2006/main" prst="rect">
+            <a:avLst/>
+          </a:prstGeom>
+          <a:ln xmlns:a="http://schemas.openxmlformats.org/drawingml/2006/main" w="0">
+            <a:solidFill>
+              <a:srgbClr val="FFFFFF"/>
+            </a:solidFill>
+            <a:prstDash val="solid"/>
+          </a:ln>
+        </p:spPr>
+        <p:txBody>
+          <a:bodyPr xmlns:a="http://schemas.openxmlformats.org/drawingml/2006/main" anchor="ctr"/>
+          <a:lstStyle xmlns:a="http://schemas.openxmlformats.org/drawingml/2006/main"/>
+          <a:p xmlns:a="http://schemas.openxmlformats.org/drawingml/2006/main">
+            <a:pPr algn="ctr">
+              <a:defRPr sz="1650" b="1">
+                <a:solidFill>
+                  <a:srgbClr val="145DA0"/>
+                </a:solidFill>
+              </a:defRPr>
+            </a:pPr>
+            <a:r>
+              <a:rPr sz="1650" b="1">
+                <a:solidFill>
+                  <a:srgbClr val="145DA0"/>
+                </a:solidFill>
+              </a:rPr>
+              <a:t>-&gt;</a:t>
+            </a:r>
+          </a:p>
+        </p:txBody>
+      </p:sp>
+      <p:sp>
+        <p:nvSpPr>
+          <p:cNvPr id="28" name="">
+            <a:extLst xmlns:a="http://schemas.openxmlformats.org/drawingml/2006/main">
+              <a:ext uri="{FF2B5EF4-FFF2-40B4-BE49-F238E27FC236}">
+                <a16:creationId xmlns:a16="http://schemas.microsoft.com/office/drawing/2014/main" id="{0D384C1B-8859-47AF-9974-1D014E859708}"/>
+              </a:ext>
+            </a:extLst>
+          </p:cNvPr>
+          <p:cNvSpPr>
+            <a:spLocks xmlns:a="http://schemas.openxmlformats.org/drawingml/2006/main" noGrp="1"/>
+          </p:cNvSpPr>
+          <p:nvPr/>
+        </p:nvSpPr>
+        <p:spPr>
+          <a:xfrm xmlns:a="http://schemas.openxmlformats.org/drawingml/2006/main">
+            <a:off x="9525000" y="2667000"/>
+            <a:ext cx="1676400" cy="1676400"/>
+          </a:xfrm>
+          <a:prstGeom xmlns:a="http://schemas.openxmlformats.org/drawingml/2006/main" prst="rect">
+            <a:avLst/>
+          </a:prstGeom>
+          <a:solidFill xmlns:a="http://schemas.openxmlformats.org/drawingml/2006/main">
+            <a:srgbClr val="FFFFFF"/>
+          </a:solidFill>
+          <a:ln xmlns:a="http://schemas.openxmlformats.org/drawingml/2006/main" w="0">
+            <a:solidFill>
+              <a:srgbClr val="D8E2ED"/>
+            </a:solidFill>
+            <a:prstDash val="solid"/>
+          </a:ln>
+        </p:spPr>
+      </p:sp>
+      <p:sp>
+        <p:nvSpPr>
+          <p:cNvPr id="29" name="">
+            <a:extLst xmlns:a="http://schemas.openxmlformats.org/drawingml/2006/main">
+              <a:ext uri="{FF2B5EF4-FFF2-40B4-BE49-F238E27FC236}">
+                <a16:creationId xmlns:a16="http://schemas.microsoft.com/office/drawing/2014/main" id="{BD53963C-ADC8-48C9-ACD5-A9CCE162E6AB}"/>
+              </a:ext>
+            </a:extLst>
+          </p:cNvPr>
+          <p:cNvSpPr>
+            <a:spLocks xmlns:a="http://schemas.openxmlformats.org/drawingml/2006/main" noGrp="1"/>
+          </p:cNvSpPr>
+          <p:nvPr/>
+        </p:nvSpPr>
+        <p:spPr>
+          <a:xfrm xmlns:a="http://schemas.openxmlformats.org/drawingml/2006/main">
+            <a:off x="9696450" y="2895600"/>
+            <a:ext cx="419100" cy="419100"/>
+          </a:xfrm>
+          <a:prstGeom xmlns:a="http://schemas.openxmlformats.org/drawingml/2006/main" prst="rect">
+            <a:avLst/>
+          </a:prstGeom>
+          <a:solidFill xmlns:a="http://schemas.openxmlformats.org/drawingml/2006/main">
+            <a:srgbClr val="1D7F5F"/>
+          </a:solidFill>
+          <a:ln xmlns:a="http://schemas.openxmlformats.org/drawingml/2006/main" w="0">
+            <a:solidFill>
+              <a:srgbClr val="1D7F5F"/>
+            </a:solidFill>
+            <a:prstDash val="solid"/>
+          </a:ln>
+        </p:spPr>
+      </p:sp>
+      <p:sp>
+        <p:nvSpPr>
+          <p:cNvPr id="30" name="">
+            <a:extLst xmlns:a="http://schemas.openxmlformats.org/drawingml/2006/main">
+              <a:ext uri="{FF2B5EF4-FFF2-40B4-BE49-F238E27FC236}">
+                <a16:creationId xmlns:a16="http://schemas.microsoft.com/office/drawing/2014/main" id="{963E3F7D-7F62-475C-B5F7-DA5098FECC2B}"/>
+              </a:ext>
+            </a:extLst>
+          </p:cNvPr>
+          <p:cNvSpPr>
+            <a:spLocks xmlns:a="http://schemas.openxmlformats.org/drawingml/2006/main" noGrp="1"/>
+          </p:cNvSpPr>
+          <p:nvPr/>
+        </p:nvSpPr>
+        <p:spPr>
+          <a:xfrm xmlns:a="http://schemas.openxmlformats.org/drawingml/2006/main">
+            <a:off x="9696450" y="2962275"/>
+            <a:ext cx="419100" cy="285750"/>
+          </a:xfrm>
+          <a:prstGeom xmlns:a="http://schemas.openxmlformats.org/drawingml/2006/main" prst="rect">
+            <a:avLst/>
+          </a:prstGeom>
+          <a:ln xmlns:a="http://schemas.openxmlformats.org/drawingml/2006/main" w="0">
+            <a:solidFill>
+              <a:srgbClr val="FFFFFF"/>
+            </a:solidFill>
+            <a:prstDash val="solid"/>
+          </a:ln>
+        </p:spPr>
+        <p:txBody>
+          <a:bodyPr xmlns:a="http://schemas.openxmlformats.org/drawingml/2006/main" anchor="t"/>
+          <a:lstStyle xmlns:a="http://schemas.openxmlformats.org/drawingml/2006/main"/>
+          <a:p xmlns:a="http://schemas.openxmlformats.org/drawingml/2006/main">
+            <a:pPr algn="ctr">
+              <a:defRPr sz="1500" b="1">
+                <a:solidFill>
+                  <a:srgbClr val="FFFFFF"/>
+                </a:solidFill>
+              </a:defRPr>
+            </a:pPr>
+            <a:r>
+              <a:rPr sz="1500" b="1">
+                <a:solidFill>
+                  <a:srgbClr val="FFFFFF"/>
+                </a:solidFill>
+              </a:rPr>
+              <a:t>5</a:t>
+            </a:r>
+          </a:p>
+        </p:txBody>
+      </p:sp>
+      <p:sp>
+        <p:nvSpPr>
+          <p:cNvPr id="31" name="">
+            <a:extLst xmlns:a="http://schemas.openxmlformats.org/drawingml/2006/main">
+              <a:ext uri="{FF2B5EF4-FFF2-40B4-BE49-F238E27FC236}">
+                <a16:creationId xmlns:a16="http://schemas.microsoft.com/office/drawing/2014/main" id="{7B5CB242-8097-4280-89B4-F63A66F4A371}"/>
+              </a:ext>
+            </a:extLst>
+          </p:cNvPr>
+          <p:cNvSpPr>
+            <a:spLocks xmlns:a="http://schemas.openxmlformats.org/drawingml/2006/main" noGrp="1"/>
+          </p:cNvSpPr>
+          <p:nvPr/>
+        </p:nvSpPr>
+        <p:spPr>
+          <a:xfrm xmlns:a="http://schemas.openxmlformats.org/drawingml/2006/main">
+            <a:off x="9696450" y="3524250"/>
+            <a:ext cx="1295400" cy="304800"/>
+          </a:xfrm>
+          <a:prstGeom xmlns:a="http://schemas.openxmlformats.org/drawingml/2006/main" prst="rect">
+            <a:avLst/>
+          </a:prstGeom>
+          <a:ln xmlns:a="http://schemas.openxmlformats.org/drawingml/2006/main" w="0">
+            <a:solidFill>
+              <a:srgbClr val="FFFFFF"/>
+            </a:solidFill>
+            <a:prstDash val="solid"/>
+          </a:ln>
+        </p:spPr>
+        <p:txBody>
+          <a:bodyPr xmlns:a="http://schemas.openxmlformats.org/drawingml/2006/main" anchor="t"/>
+          <a:lstStyle xmlns:a="http://schemas.openxmlformats.org/drawingml/2006/main"/>
+          <a:p xmlns:a="http://schemas.openxmlformats.org/drawingml/2006/main">
+            <a:pPr algn="l">
+              <a:defRPr sz="1275" b="1">
+                <a:solidFill>
+                  <a:srgbClr val="172033"/>
+                </a:solidFill>
+              </a:defRPr>
+            </a:pPr>
+            <a:r>
+              <a:rPr sz="1275" b="1">
+                <a:solidFill>
+                  <a:srgbClr val="172033"/>
+                </a:solidFill>
+              </a:rPr>
+              <a:t>First close</a:t>
+            </a:r>
+          </a:p>
+        </p:txBody>
+      </p:sp>
+      <p:sp>
+        <p:nvSpPr>
+          <p:cNvPr id="32" name="">
+            <a:extLst xmlns:a="http://schemas.openxmlformats.org/drawingml/2006/main">
+              <a:ext uri="{FF2B5EF4-FFF2-40B4-BE49-F238E27FC236}">
+                <a16:creationId xmlns:a16="http://schemas.microsoft.com/office/drawing/2014/main" id="{0584F545-C914-41EC-9AD8-EFCA6B83FFFC}"/>
+              </a:ext>
+            </a:extLst>
+          </p:cNvPr>
+          <p:cNvSpPr>
+            <a:spLocks xmlns:a="http://schemas.openxmlformats.org/drawingml/2006/main" noGrp="1"/>
+          </p:cNvSpPr>
+          <p:nvPr/>
+        </p:nvSpPr>
+        <p:spPr>
+          <a:xfrm xmlns:a="http://schemas.openxmlformats.org/drawingml/2006/main">
+            <a:off x="9696450" y="3905250"/>
+            <a:ext cx="1295400" cy="742950"/>
+          </a:xfrm>
+          <a:prstGeom xmlns:a="http://schemas.openxmlformats.org/drawingml/2006/main" prst="rect">
+            <a:avLst/>
+          </a:prstGeom>
+          <a:ln xmlns:a="http://schemas.openxmlformats.org/drawingml/2006/main" w="0">
+            <a:solidFill>
+              <a:srgbClr val="FFFFFF"/>
+            </a:solidFill>
+            <a:prstDash val="solid"/>
+          </a:ln>
+        </p:spPr>
+        <p:txBody>
+          <a:bodyPr xmlns:a="http://schemas.openxmlformats.org/drawingml/2006/main" anchor="t"/>
+          <a:lstStyle xmlns:a="http://schemas.openxmlformats.org/drawingml/2006/main"/>
+          <a:p xmlns:a="http://schemas.openxmlformats.org/drawingml/2006/main">
+            <a:pPr algn="l">
+              <a:defRPr sz="900" b="0">
+                <a:solidFill>
+                  <a:srgbClr val="5F6F86"/>
+                </a:solidFill>
+              </a:defRPr>
+            </a:pPr>
+            <a:r>
+              <a:rPr sz="900" b="0">
+                <a:solidFill>
+                  <a:srgbClr val="5F6F86"/>
+                </a:solidFill>
+              </a:rPr>
+              <a:t>Run the first month-end in Blueprint and lock the period.</a:t>
+            </a:r>
+          </a:p>
+        </p:txBody>
+      </p:sp>
+      <p:sp>
+        <p:nvSpPr>
+          <p:cNvPr id="33" name="">
+            <a:extLst xmlns:a="http://schemas.openxmlformats.org/drawingml/2006/main">
+              <a:ext uri="{FF2B5EF4-FFF2-40B4-BE49-F238E27FC236}">
+                <a16:creationId xmlns:a16="http://schemas.microsoft.com/office/drawing/2014/main" id="{AB7D18B1-BC66-45BE-90CC-B077EF16529E}"/>
+              </a:ext>
+            </a:extLst>
+          </p:cNvPr>
+          <p:cNvSpPr>
+            <a:spLocks xmlns:a="http://schemas.openxmlformats.org/drawingml/2006/main" noGrp="1"/>
+          </p:cNvSpPr>
+          <p:nvPr/>
+        </p:nvSpPr>
+        <p:spPr>
+          <a:xfrm xmlns:a="http://schemas.openxmlformats.org/drawingml/2006/main">
+            <a:off x="685800" y="6400800"/>
+            <a:ext cx="4000500" cy="228600"/>
+          </a:xfrm>
+          <a:prstGeom xmlns:a="http://schemas.openxmlformats.org/drawingml/2006/main" prst="rect">
+            <a:avLst/>
+          </a:prstGeom>
+          <a:ln xmlns:a="http://schemas.openxmlformats.org/drawingml/2006/main" w="0">
+            <a:solidFill>
+              <a:srgbClr val="FFFFFF"/>
+            </a:solidFill>
+            <a:prstDash val="solid"/>
+          </a:ln>
+        </p:spPr>
+        <p:txBody>
+          <a:bodyPr xmlns:a="http://schemas.openxmlformats.org/drawingml/2006/main" anchor="t"/>
+          <a:lstStyle xmlns:a="http://schemas.openxmlformats.org/drawingml/2006/main"/>
+          <a:p xmlns:a="http://schemas.openxmlformats.org/drawingml/2006/main">
+            <a:pPr algn="l">
+              <a:defRPr sz="900" b="0">
+                <a:solidFill>
+                  <a:srgbClr val="7B8798"/>
+                </a:solidFill>
+              </a:defRPr>
+            </a:pPr>
+            <a:r>
+              <a:rPr sz="900" b="0">
+                <a:solidFill>
+                  <a:srgbClr val="7B8798"/>
+                </a:solidFill>
+              </a:rPr>
+              <a:t>Blueprint Books for Raves</a:t>
+            </a:r>
+          </a:p>
+        </p:txBody>
+      </p:sp>
+      <p:sp>
+        <p:nvSpPr>
+          <p:cNvPr id="34" name="">
+            <a:extLst xmlns:a="http://schemas.openxmlformats.org/drawingml/2006/main">
+              <a:ext uri="{FF2B5EF4-FFF2-40B4-BE49-F238E27FC236}">
+                <a16:creationId xmlns:a16="http://schemas.microsoft.com/office/drawing/2014/main" id="{32AF275F-8560-4A54-A615-76FC705AADBB}"/>
+              </a:ext>
+            </a:extLst>
+          </p:cNvPr>
+          <p:cNvSpPr>
+            <a:spLocks xmlns:a="http://schemas.openxmlformats.org/drawingml/2006/main" noGrp="1"/>
+          </p:cNvSpPr>
+          <p:nvPr/>
+        </p:nvSpPr>
+        <p:spPr>
+          <a:xfrm xmlns:a="http://schemas.openxmlformats.org/drawingml/2006/main">
+            <a:off x="11049000" y="6400800"/>
+            <a:ext cx="457200" cy="228600"/>
+          </a:xfrm>
+          <a:prstGeom xmlns:a="http://schemas.openxmlformats.org/drawingml/2006/main" prst="rect">
+            <a:avLst/>
+          </a:prstGeom>
+          <a:ln xmlns:a="http://schemas.openxmlformats.org/drawingml/2006/main" w="0">
+            <a:solidFill>
+              <a:srgbClr val="FFFFFF"/>
+            </a:solidFill>
+            <a:prstDash val="solid"/>
+          </a:ln>
+        </p:spPr>
+        <p:txBody>
+          <a:bodyPr xmlns:a="http://schemas.openxmlformats.org/drawingml/2006/main" anchor="t"/>
+          <a:lstStyle xmlns:a="http://schemas.openxmlformats.org/drawingml/2006/main"/>
+          <a:p xmlns:a="http://schemas.openxmlformats.org/drawingml/2006/main">
+            <a:pPr algn="r">
+              <a:defRPr sz="900" b="0">
+                <a:solidFill>
+                  <a:srgbClr val="7B8798"/>
+                </a:solidFill>
+              </a:defRPr>
+            </a:pPr>
+            <a:r>
+              <a:rPr sz="900" b="0">
+                <a:solidFill>
+                  <a:srgbClr val="7B8798"/>
+                </a:solidFill>
+              </a:rPr>
+              <a:t>10</a:t>
+            </a:r>
+          </a:p>
+        </p:txBody>
+      </p:sp>
+    </p:spTree>
+    <p:extLst>
+      <p:ext uri="{BB962C8B-B14F-4D97-AF65-F5344CB8AC3E}">
+        <p14:creationId xmlns:p14="http://schemas.microsoft.com/office/powerpoint/2010/main" val="341073340"/>
+      </p:ext>
+    </p:extLst>
+  </p:cSld>
+</p:sld>
+</file>
+
+<file path=ppt/slides/slide11.xml><?xml version="1.0" encoding="utf-8"?>
+<p:sld xmlns:p="http://schemas.openxmlformats.org/presentationml/2006/main">
+  <p:cSld>
+    <p:spTree>
+      <p:nvGrpSpPr>
+        <p:cNvPr id="1" name=""/>
+        <p:cNvGrpSpPr/>
+        <p:nvPr/>
+      </p:nvGrpSpPr>
+      <p:grpSpPr>
+        <a:xfrm xmlns:a="http://schemas.openxmlformats.org/drawingml/2006/main"/>
+      </p:grpSpPr>
+      <p:sp>
+        <p:nvSpPr>
+          <p:cNvPr id="1" name="">
+            <a:extLst xmlns:a="http://schemas.openxmlformats.org/drawingml/2006/main">
+              <a:ext uri="{FF2B5EF4-FFF2-40B4-BE49-F238E27FC236}">
+                <a16:creationId xmlns:a16="http://schemas.microsoft.com/office/drawing/2014/main" id="{BFB1E1F3-514C-4412-AFD3-9EF504DFAFB4}"/>
               </a:ext>
             </a:extLst>
           </p:cNvPr>
@@ -2337,7 +3962,7 @@
           <p:cNvPr id="2" name="">
             <a:extLst xmlns:a="http://schemas.openxmlformats.org/drawingml/2006/main">
               <a:ext uri="{FF2B5EF4-FFF2-40B4-BE49-F238E27FC236}">
-                <a16:creationId xmlns:a16="http://schemas.microsoft.com/office/drawing/2014/main" id="{34FD4A92-2298-494A-ABDE-5C194BEE5A31}"/>
+                <a16:creationId xmlns:a16="http://schemas.microsoft.com/office/drawing/2014/main" id="{E9897A32-E0CA-4C7D-904E-E5BD01A0ECB7}"/>
               </a:ext>
             </a:extLst>
           </p:cNvPr>
@@ -2370,7 +3995,7 @@
           <p:cNvPr id="3" name="">
             <a:extLst xmlns:a="http://schemas.openxmlformats.org/drawingml/2006/main">
               <a:ext uri="{FF2B5EF4-FFF2-40B4-BE49-F238E27FC236}">
-                <a16:creationId xmlns:a16="http://schemas.microsoft.com/office/drawing/2014/main" id="{79EDB8AC-2D3B-4707-B5E5-1F14A59711C1}"/>
+                <a16:creationId xmlns:a16="http://schemas.microsoft.com/office/drawing/2014/main" id="{04FDA912-7202-48C0-9C4C-164C79E9B03F}"/>
               </a:ext>
             </a:extLst>
           </p:cNvPr>
@@ -2421,7 +4046,7 @@
           <p:cNvPr id="4" name="">
             <a:extLst xmlns:a="http://schemas.openxmlformats.org/drawingml/2006/main">
               <a:ext uri="{FF2B5EF4-FFF2-40B4-BE49-F238E27FC236}">
-                <a16:creationId xmlns:a16="http://schemas.microsoft.com/office/drawing/2014/main" id="{CBE19E4F-6F1D-4DA2-B99F-A6154FB2E3F0}"/>
+                <a16:creationId xmlns:a16="http://schemas.microsoft.com/office/drawing/2014/main" id="{9C4BD37B-CDBC-4599-A028-5FCF4A2BBED8}"/>
               </a:ext>
             </a:extLst>
           </p:cNvPr>
@@ -2472,7 +4097,7 @@
           <p:cNvPr id="5" name="">
             <a:extLst xmlns:a="http://schemas.openxmlformats.org/drawingml/2006/main">
               <a:ext uri="{FF2B5EF4-FFF2-40B4-BE49-F238E27FC236}">
-                <a16:creationId xmlns:a16="http://schemas.microsoft.com/office/drawing/2014/main" id="{52DE887E-8959-4B5E-835A-02CC2CC02912}"/>
+                <a16:creationId xmlns:a16="http://schemas.microsoft.com/office/drawing/2014/main" id="{28D6E9A8-D2CE-4880-A88E-390FE7513972}"/>
               </a:ext>
             </a:extLst>
           </p:cNvPr>
@@ -2523,7 +4148,7 @@
           <p:cNvPr id="6" name="">
             <a:extLst xmlns:a="http://schemas.openxmlformats.org/drawingml/2006/main">
               <a:ext uri="{FF2B5EF4-FFF2-40B4-BE49-F238E27FC236}">
-                <a16:creationId xmlns:a16="http://schemas.microsoft.com/office/drawing/2014/main" id="{2DEB8F97-F4E4-4103-B5A9-6A62CA2A4F63}"/>
+                <a16:creationId xmlns:a16="http://schemas.microsoft.com/office/drawing/2014/main" id="{D2158D0E-C56A-40CD-91DD-F43FC3E978EE}"/>
               </a:ext>
             </a:extLst>
           </p:cNvPr>
@@ -2574,7 +4199,7 @@
           <p:cNvPr id="7" name="">
             <a:extLst xmlns:a="http://schemas.openxmlformats.org/drawingml/2006/main">
               <a:ext uri="{FF2B5EF4-FFF2-40B4-BE49-F238E27FC236}">
-                <a16:creationId xmlns:a16="http://schemas.microsoft.com/office/drawing/2014/main" id="{512C91B8-13B6-4969-AEDA-91E2C4727E62}"/>
+                <a16:creationId xmlns:a16="http://schemas.microsoft.com/office/drawing/2014/main" id="{FCF004A0-9D73-4753-8A44-9EFF8949F830}"/>
               </a:ext>
             </a:extLst>
           </p:cNvPr>
@@ -2625,7 +4250,7 @@
           <p:cNvPr id="8" name="">
             <a:extLst xmlns:a="http://schemas.openxmlformats.org/drawingml/2006/main">
               <a:ext uri="{FF2B5EF4-FFF2-40B4-BE49-F238E27FC236}">
-                <a16:creationId xmlns:a16="http://schemas.microsoft.com/office/drawing/2014/main" id="{088E076B-23E0-48B8-AB40-57654FD16978}"/>
+                <a16:creationId xmlns:a16="http://schemas.microsoft.com/office/drawing/2014/main" id="{9E192DD9-B4DA-44F1-9411-CA40DE652E6F}"/>
               </a:ext>
             </a:extLst>
           </p:cNvPr>
@@ -2658,7 +4283,7 @@
           <p:cNvPr id="9" name="">
             <a:extLst xmlns:a="http://schemas.openxmlformats.org/drawingml/2006/main">
               <a:ext uri="{FF2B5EF4-FFF2-40B4-BE49-F238E27FC236}">
-                <a16:creationId xmlns:a16="http://schemas.microsoft.com/office/drawing/2014/main" id="{7409451B-69DD-4A5F-A4C8-F7478618F8A5}"/>
+                <a16:creationId xmlns:a16="http://schemas.microsoft.com/office/drawing/2014/main" id="{9C85835D-A238-4BB2-B322-9CA0D5558B08}"/>
               </a:ext>
             </a:extLst>
           </p:cNvPr>
@@ -2709,7 +4334,7 @@
           <p:cNvPr id="10" name="">
             <a:extLst xmlns:a="http://schemas.openxmlformats.org/drawingml/2006/main">
               <a:ext uri="{FF2B5EF4-FFF2-40B4-BE49-F238E27FC236}">
-                <a16:creationId xmlns:a16="http://schemas.microsoft.com/office/drawing/2014/main" id="{E0F3A97E-D313-48C9-B2CB-1B80F698096C}"/>
+                <a16:creationId xmlns:a16="http://schemas.microsoft.com/office/drawing/2014/main" id="{30F5549B-4CF3-4729-8B99-663191747C34}"/>
               </a:ext>
             </a:extLst>
           </p:cNvPr>
@@ -2760,7 +4385,7 @@
           <p:cNvPr id="11" name="">
             <a:extLst xmlns:a="http://schemas.openxmlformats.org/drawingml/2006/main">
               <a:ext uri="{FF2B5EF4-FFF2-40B4-BE49-F238E27FC236}">
-                <a16:creationId xmlns:a16="http://schemas.microsoft.com/office/drawing/2014/main" id="{979FB83D-FA42-4EBF-A4AC-264A3051B252}"/>
+                <a16:creationId xmlns:a16="http://schemas.microsoft.com/office/drawing/2014/main" id="{F5F0929E-24C8-4C4B-A8B9-3BF925AFC328}"/>
               </a:ext>
             </a:extLst>
           </p:cNvPr>
@@ -2811,7 +4436,7 @@
           <p:cNvPr id="12" name="">
             <a:extLst xmlns:a="http://schemas.openxmlformats.org/drawingml/2006/main">
               <a:ext uri="{FF2B5EF4-FFF2-40B4-BE49-F238E27FC236}">
-                <a16:creationId xmlns:a16="http://schemas.microsoft.com/office/drawing/2014/main" id="{BA5E9BF4-3935-489A-A57D-D6D1D6E72BFB}"/>
+                <a16:creationId xmlns:a16="http://schemas.microsoft.com/office/drawing/2014/main" id="{A58129E1-2C39-48B0-863E-F4C139A58B30}"/>
               </a:ext>
             </a:extLst>
           </p:cNvPr>
@@ -2844,7 +4469,7 @@
           <p:cNvPr id="13" name="">
             <a:extLst xmlns:a="http://schemas.openxmlformats.org/drawingml/2006/main">
               <a:ext uri="{FF2B5EF4-FFF2-40B4-BE49-F238E27FC236}">
-                <a16:creationId xmlns:a16="http://schemas.microsoft.com/office/drawing/2014/main" id="{AC0B83DD-177C-41BB-BCE3-C2E270209B7D}"/>
+                <a16:creationId xmlns:a16="http://schemas.microsoft.com/office/drawing/2014/main" id="{3268BC99-3619-409C-A742-38F3343E5042}"/>
               </a:ext>
             </a:extLst>
           </p:cNvPr>
@@ -2877,7 +4502,7 @@
           <p:cNvPr id="14" name="">
             <a:extLst xmlns:a="http://schemas.openxmlformats.org/drawingml/2006/main">
               <a:ext uri="{FF2B5EF4-FFF2-40B4-BE49-F238E27FC236}">
-                <a16:creationId xmlns:a16="http://schemas.microsoft.com/office/drawing/2014/main" id="{9CFBFF05-1AF2-4D59-AEC5-3C1FA3E6576A}"/>
+                <a16:creationId xmlns:a16="http://schemas.microsoft.com/office/drawing/2014/main" id="{78ADA367-9B15-4486-9DEC-1D656715995B}"/>
               </a:ext>
             </a:extLst>
           </p:cNvPr>
@@ -2928,7 +4553,7 @@
           <p:cNvPr id="15" name="">
             <a:extLst xmlns:a="http://schemas.openxmlformats.org/drawingml/2006/main">
               <a:ext uri="{FF2B5EF4-FFF2-40B4-BE49-F238E27FC236}">
-                <a16:creationId xmlns:a16="http://schemas.microsoft.com/office/drawing/2014/main" id="{E1120EDC-33EA-4EA6-B681-10BA402E6CA3}"/>
+                <a16:creationId xmlns:a16="http://schemas.microsoft.com/office/drawing/2014/main" id="{94D28119-A5BF-4B71-A1DF-50CD5EAA7669}"/>
               </a:ext>
             </a:extLst>
           </p:cNvPr>
@@ -2979,7 +4604,7 @@
           <p:cNvPr id="16" name="">
             <a:extLst xmlns:a="http://schemas.openxmlformats.org/drawingml/2006/main">
               <a:ext uri="{FF2B5EF4-FFF2-40B4-BE49-F238E27FC236}">
-                <a16:creationId xmlns:a16="http://schemas.microsoft.com/office/drawing/2014/main" id="{A7F0C7C6-C1B2-4648-9E60-AA4D2E14B26C}"/>
+                <a16:creationId xmlns:a16="http://schemas.microsoft.com/office/drawing/2014/main" id="{D8CEEF06-375A-4B17-A2A5-891DEC321D9F}"/>
               </a:ext>
             </a:extLst>
           </p:cNvPr>
@@ -3012,7 +4637,7 @@
           <p:cNvPr id="17" name="">
             <a:extLst xmlns:a="http://schemas.openxmlformats.org/drawingml/2006/main">
               <a:ext uri="{FF2B5EF4-FFF2-40B4-BE49-F238E27FC236}">
-                <a16:creationId xmlns:a16="http://schemas.microsoft.com/office/drawing/2014/main" id="{7A71AD7E-2A9A-47B8-9966-20AC56EE583D}"/>
+                <a16:creationId xmlns:a16="http://schemas.microsoft.com/office/drawing/2014/main" id="{0E9523FA-8172-4147-9FE2-C80A63CD8BD3}"/>
               </a:ext>
             </a:extLst>
           </p:cNvPr>
@@ -3045,7 +4670,7 @@
           <p:cNvPr id="18" name="">
             <a:extLst xmlns:a="http://schemas.openxmlformats.org/drawingml/2006/main">
               <a:ext uri="{FF2B5EF4-FFF2-40B4-BE49-F238E27FC236}">
-                <a16:creationId xmlns:a16="http://schemas.microsoft.com/office/drawing/2014/main" id="{8C191600-C041-4909-BFBC-CD56A1C42471}"/>
+                <a16:creationId xmlns:a16="http://schemas.microsoft.com/office/drawing/2014/main" id="{51FBF23F-6DD1-46A3-846D-98CFD4F7B8A0}"/>
               </a:ext>
             </a:extLst>
           </p:cNvPr>
@@ -3096,7 +4721,7 @@
           <p:cNvPr id="19" name="">
             <a:extLst xmlns:a="http://schemas.openxmlformats.org/drawingml/2006/main">
               <a:ext uri="{FF2B5EF4-FFF2-40B4-BE49-F238E27FC236}">
-                <a16:creationId xmlns:a16="http://schemas.microsoft.com/office/drawing/2014/main" id="{70CC1913-88BB-4EAA-B647-1BE5BAAF851C}"/>
+                <a16:creationId xmlns:a16="http://schemas.microsoft.com/office/drawing/2014/main" id="{371D81EB-3569-42B7-B7A8-055559847BD9}"/>
               </a:ext>
             </a:extLst>
           </p:cNvPr>
@@ -3147,7 +4772,7 @@
           <p:cNvPr id="20" name="">
             <a:extLst xmlns:a="http://schemas.openxmlformats.org/drawingml/2006/main">
               <a:ext uri="{FF2B5EF4-FFF2-40B4-BE49-F238E27FC236}">
-                <a16:creationId xmlns:a16="http://schemas.microsoft.com/office/drawing/2014/main" id="{DEBF0815-5A7F-4B83-87CD-728DBCD1E8BD}"/>
+                <a16:creationId xmlns:a16="http://schemas.microsoft.com/office/drawing/2014/main" id="{36B6CCAF-E751-49B7-BF3E-7D6A8561761F}"/>
               </a:ext>
             </a:extLst>
           </p:cNvPr>
@@ -3180,7 +4805,7 @@
           <p:cNvPr id="21" name="">
             <a:extLst xmlns:a="http://schemas.openxmlformats.org/drawingml/2006/main">
               <a:ext uri="{FF2B5EF4-FFF2-40B4-BE49-F238E27FC236}">
-                <a16:creationId xmlns:a16="http://schemas.microsoft.com/office/drawing/2014/main" id="{47384406-D587-4D9E-B97B-365A3BEFADBE}"/>
+                <a16:creationId xmlns:a16="http://schemas.microsoft.com/office/drawing/2014/main" id="{2393CEF3-FF42-4315-B0AB-998409616154}"/>
               </a:ext>
             </a:extLst>
           </p:cNvPr>
@@ -3213,7 +4838,7 @@
           <p:cNvPr id="22" name="">
             <a:extLst xmlns:a="http://schemas.openxmlformats.org/drawingml/2006/main">
               <a:ext uri="{FF2B5EF4-FFF2-40B4-BE49-F238E27FC236}">
-                <a16:creationId xmlns:a16="http://schemas.microsoft.com/office/drawing/2014/main" id="{F966A9FA-C38C-4D2E-A7F8-557BBBB7794E}"/>
+                <a16:creationId xmlns:a16="http://schemas.microsoft.com/office/drawing/2014/main" id="{45DE8B06-775A-4AEB-B0F8-0556ADC213BB}"/>
               </a:ext>
             </a:extLst>
           </p:cNvPr>
@@ -3264,7 +4889,7 @@
           <p:cNvPr id="23" name="">
             <a:extLst xmlns:a="http://schemas.openxmlformats.org/drawingml/2006/main">
               <a:ext uri="{FF2B5EF4-FFF2-40B4-BE49-F238E27FC236}">
-                <a16:creationId xmlns:a16="http://schemas.microsoft.com/office/drawing/2014/main" id="{0B13731B-5B4E-476E-971A-FA3FFF176135}"/>
+                <a16:creationId xmlns:a16="http://schemas.microsoft.com/office/drawing/2014/main" id="{D92712A9-3230-41B9-80CE-17C7FC9829DB}"/>
               </a:ext>
             </a:extLst>
           </p:cNvPr>
@@ -3315,7 +4940,7 @@
           <p:cNvPr id="24" name="">
             <a:extLst xmlns:a="http://schemas.openxmlformats.org/drawingml/2006/main">
               <a:ext uri="{FF2B5EF4-FFF2-40B4-BE49-F238E27FC236}">
-                <a16:creationId xmlns:a16="http://schemas.microsoft.com/office/drawing/2014/main" id="{49AF833E-83E5-4B56-BF8D-204145D80AF3}"/>
+                <a16:creationId xmlns:a16="http://schemas.microsoft.com/office/drawing/2014/main" id="{A01D9A24-3C98-47E8-B697-71193C3FA76A}"/>
               </a:ext>
             </a:extLst>
           </p:cNvPr>
@@ -3366,7 +4991,7 @@
           <p:cNvPr id="25" name="">
             <a:extLst xmlns:a="http://schemas.openxmlformats.org/drawingml/2006/main">
               <a:ext uri="{FF2B5EF4-FFF2-40B4-BE49-F238E27FC236}">
-                <a16:creationId xmlns:a16="http://schemas.microsoft.com/office/drawing/2014/main" id="{FAE09CF1-7E17-4915-BF38-49D1DB83F36E}"/>
+                <a16:creationId xmlns:a16="http://schemas.microsoft.com/office/drawing/2014/main" id="{52388290-D4FE-456A-AFD6-F3C08BCE42B9}"/>
               </a:ext>
             </a:extLst>
           </p:cNvPr>
@@ -3407,7 +5032,7 @@
                   <a:srgbClr val="9FB9D2"/>
                 </a:solidFill>
               </a:rPr>
-              <a:t>10</a:t>
+              <a:t>11</a:t>
             </a:r>
           </a:p>
         </p:txBody>
@@ -3415,7 +5040,7 @@
     </p:spTree>
     <p:extLst>
       <p:ext uri="{BB962C8B-B14F-4D97-AF65-F5344CB8AC3E}">
-        <p14:creationId xmlns:p14="http://schemas.microsoft.com/office/powerpoint/2010/main" val="832855993"/>
+        <p14:creationId xmlns:p14="http://schemas.microsoft.com/office/powerpoint/2010/main" val="128841676"/>
       </p:ext>
     </p:extLst>
   </p:cSld>
@@ -3439,7 +5064,7 @@
           <p:cNvPr id="1" name="">
             <a:extLst xmlns:a="http://schemas.openxmlformats.org/drawingml/2006/main">
               <a:ext uri="{FF2B5EF4-FFF2-40B4-BE49-F238E27FC236}">
-                <a16:creationId xmlns:a16="http://schemas.microsoft.com/office/drawing/2014/main" id="{C538E926-9373-4B64-A339-A4885B08074F}"/>
+                <a16:creationId xmlns:a16="http://schemas.microsoft.com/office/drawing/2014/main" id="{9ACB2097-3969-49F1-A502-C2F1C57ADD97}"/>
               </a:ext>
             </a:extLst>
           </p:cNvPr>
@@ -3472,7 +5097,7 @@
           <p:cNvPr id="2" name="">
             <a:extLst xmlns:a="http://schemas.openxmlformats.org/drawingml/2006/main">
               <a:ext uri="{FF2B5EF4-FFF2-40B4-BE49-F238E27FC236}">
-                <a16:creationId xmlns:a16="http://schemas.microsoft.com/office/drawing/2014/main" id="{C44D54BD-046E-4BEA-9271-FA7166B6E175}"/>
+                <a16:creationId xmlns:a16="http://schemas.microsoft.com/office/drawing/2014/main" id="{1B4C4CA6-BAF7-4AB3-8A93-DAAF61F386A6}"/>
               </a:ext>
             </a:extLst>
           </p:cNvPr>
@@ -3523,7 +5148,7 @@
           <p:cNvPr id="3" name="">
             <a:extLst xmlns:a="http://schemas.openxmlformats.org/drawingml/2006/main">
               <a:ext uri="{FF2B5EF4-FFF2-40B4-BE49-F238E27FC236}">
-                <a16:creationId xmlns:a16="http://schemas.microsoft.com/office/drawing/2014/main" id="{39EAB817-5E38-4608-8F52-4FAC01D3DA59}"/>
+                <a16:creationId xmlns:a16="http://schemas.microsoft.com/office/drawing/2014/main" id="{C62F1815-E17F-43D5-995F-B13E26D42E91}"/>
               </a:ext>
             </a:extLst>
           </p:cNvPr>
@@ -3574,7 +5199,7 @@
           <p:cNvPr id="4" name="">
             <a:extLst xmlns:a="http://schemas.openxmlformats.org/drawingml/2006/main">
               <a:ext uri="{FF2B5EF4-FFF2-40B4-BE49-F238E27FC236}">
-                <a16:creationId xmlns:a16="http://schemas.microsoft.com/office/drawing/2014/main" id="{CC90A54A-05C7-4E72-8990-27BE19E5E9D9}"/>
+                <a16:creationId xmlns:a16="http://schemas.microsoft.com/office/drawing/2014/main" id="{D0A416CE-5F7D-405D-83D8-47EEDBB146CB}"/>
               </a:ext>
             </a:extLst>
           </p:cNvPr>
@@ -3625,7 +5250,7 @@
           <p:cNvPr id="5" name="">
             <a:extLst xmlns:a="http://schemas.openxmlformats.org/drawingml/2006/main">
               <a:ext uri="{FF2B5EF4-FFF2-40B4-BE49-F238E27FC236}">
-                <a16:creationId xmlns:a16="http://schemas.microsoft.com/office/drawing/2014/main" id="{F038B968-DF13-42FE-A2EC-A8CAC096082A}"/>
+                <a16:creationId xmlns:a16="http://schemas.microsoft.com/office/drawing/2014/main" id="{F86A1389-091F-4020-B8F3-68152C51716F}"/>
               </a:ext>
             </a:extLst>
           </p:cNvPr>
@@ -3658,7 +5283,7 @@
           <p:cNvPr id="6" name="">
             <a:extLst xmlns:a="http://schemas.openxmlformats.org/drawingml/2006/main">
               <a:ext uri="{FF2B5EF4-FFF2-40B4-BE49-F238E27FC236}">
-                <a16:creationId xmlns:a16="http://schemas.microsoft.com/office/drawing/2014/main" id="{7B55D82E-14F7-4430-A182-4EACEED267F7}"/>
+                <a16:creationId xmlns:a16="http://schemas.microsoft.com/office/drawing/2014/main" id="{D5DABA5D-0B47-4F36-BADC-A38BF752C128}"/>
               </a:ext>
             </a:extLst>
           </p:cNvPr>
@@ -3691,7 +5316,7 @@
           <p:cNvPr id="7" name="">
             <a:extLst xmlns:a="http://schemas.openxmlformats.org/drawingml/2006/main">
               <a:ext uri="{FF2B5EF4-FFF2-40B4-BE49-F238E27FC236}">
-                <a16:creationId xmlns:a16="http://schemas.microsoft.com/office/drawing/2014/main" id="{0B160EC5-5B1B-464F-B4F4-6460B8C78437}"/>
+                <a16:creationId xmlns:a16="http://schemas.microsoft.com/office/drawing/2014/main" id="{EE37B350-606B-44FD-8CC1-204DA1429641}"/>
               </a:ext>
             </a:extLst>
           </p:cNvPr>
@@ -3742,7 +5367,7 @@
           <p:cNvPr id="8" name="">
             <a:extLst xmlns:a="http://schemas.openxmlformats.org/drawingml/2006/main">
               <a:ext uri="{FF2B5EF4-FFF2-40B4-BE49-F238E27FC236}">
-                <a16:creationId xmlns:a16="http://schemas.microsoft.com/office/drawing/2014/main" id="{7F987930-1306-4113-ACF6-34D88928915C}"/>
+                <a16:creationId xmlns:a16="http://schemas.microsoft.com/office/drawing/2014/main" id="{749441E7-9308-4BC6-9FA6-12ABEA773ECD}"/>
               </a:ext>
             </a:extLst>
           </p:cNvPr>
@@ -3793,7 +5418,7 @@
           <p:cNvPr id="9" name="">
             <a:extLst xmlns:a="http://schemas.openxmlformats.org/drawingml/2006/main">
               <a:ext uri="{FF2B5EF4-FFF2-40B4-BE49-F238E27FC236}">
-                <a16:creationId xmlns:a16="http://schemas.microsoft.com/office/drawing/2014/main" id="{F236AD03-DA30-4E70-9E15-3B1506DE663A}"/>
+                <a16:creationId xmlns:a16="http://schemas.microsoft.com/office/drawing/2014/main" id="{606B2CB4-D6B9-435D-886E-54C1801CE398}"/>
               </a:ext>
             </a:extLst>
           </p:cNvPr>
@@ -3826,7 +5451,7 @@
           <p:cNvPr id="10" name="">
             <a:extLst xmlns:a="http://schemas.openxmlformats.org/drawingml/2006/main">
               <a:ext uri="{FF2B5EF4-FFF2-40B4-BE49-F238E27FC236}">
-                <a16:creationId xmlns:a16="http://schemas.microsoft.com/office/drawing/2014/main" id="{3A914DC3-B4B8-4D0E-8844-F329266BAD6D}"/>
+                <a16:creationId xmlns:a16="http://schemas.microsoft.com/office/drawing/2014/main" id="{4750C2AA-9B60-473B-909A-B5BAAC886169}"/>
               </a:ext>
             </a:extLst>
           </p:cNvPr>
@@ -3859,7 +5484,7 @@
           <p:cNvPr id="11" name="">
             <a:extLst xmlns:a="http://schemas.openxmlformats.org/drawingml/2006/main">
               <a:ext uri="{FF2B5EF4-FFF2-40B4-BE49-F238E27FC236}">
-                <a16:creationId xmlns:a16="http://schemas.microsoft.com/office/drawing/2014/main" id="{A511F0E7-CFA1-48CE-98BA-F267443C9B08}"/>
+                <a16:creationId xmlns:a16="http://schemas.microsoft.com/office/drawing/2014/main" id="{085BEDED-3936-4CF5-9635-B16ADA56DABD}"/>
               </a:ext>
             </a:extLst>
           </p:cNvPr>
@@ -3910,7 +5535,7 @@
           <p:cNvPr id="12" name="">
             <a:extLst xmlns:a="http://schemas.openxmlformats.org/drawingml/2006/main">
               <a:ext uri="{FF2B5EF4-FFF2-40B4-BE49-F238E27FC236}">
-                <a16:creationId xmlns:a16="http://schemas.microsoft.com/office/drawing/2014/main" id="{C976AF39-4791-4FDF-B601-94F4990800F7}"/>
+                <a16:creationId xmlns:a16="http://schemas.microsoft.com/office/drawing/2014/main" id="{9079A200-5C3C-4FC0-9798-A1B609E5CFE4}"/>
               </a:ext>
             </a:extLst>
           </p:cNvPr>
@@ -3961,7 +5586,7 @@
           <p:cNvPr id="13" name="">
             <a:extLst xmlns:a="http://schemas.openxmlformats.org/drawingml/2006/main">
               <a:ext uri="{FF2B5EF4-FFF2-40B4-BE49-F238E27FC236}">
-                <a16:creationId xmlns:a16="http://schemas.microsoft.com/office/drawing/2014/main" id="{04454C4D-E123-4CA6-AE54-D4B8BD5CDAAE}"/>
+                <a16:creationId xmlns:a16="http://schemas.microsoft.com/office/drawing/2014/main" id="{36CC44D0-AB8A-4CB9-BBEA-D8A0027F4690}"/>
               </a:ext>
             </a:extLst>
           </p:cNvPr>
@@ -3994,7 +5619,7 @@
           <p:cNvPr id="14" name="">
             <a:extLst xmlns:a="http://schemas.openxmlformats.org/drawingml/2006/main">
               <a:ext uri="{FF2B5EF4-FFF2-40B4-BE49-F238E27FC236}">
-                <a16:creationId xmlns:a16="http://schemas.microsoft.com/office/drawing/2014/main" id="{C4FF563F-8B7C-46DD-82FD-5C4E92D89BA9}"/>
+                <a16:creationId xmlns:a16="http://schemas.microsoft.com/office/drawing/2014/main" id="{3E78E1FE-B622-4948-9B35-8A67E3503DA6}"/>
               </a:ext>
             </a:extLst>
           </p:cNvPr>
@@ -4027,7 +5652,7 @@
           <p:cNvPr id="15" name="">
             <a:extLst xmlns:a="http://schemas.openxmlformats.org/drawingml/2006/main">
               <a:ext uri="{FF2B5EF4-FFF2-40B4-BE49-F238E27FC236}">
-                <a16:creationId xmlns:a16="http://schemas.microsoft.com/office/drawing/2014/main" id="{E8C133EE-416E-42A4-9C86-BDD9CC121386}"/>
+                <a16:creationId xmlns:a16="http://schemas.microsoft.com/office/drawing/2014/main" id="{2691F68A-F178-449E-9F3A-061260865191}"/>
               </a:ext>
             </a:extLst>
           </p:cNvPr>
@@ -4078,7 +5703,7 @@
           <p:cNvPr id="16" name="">
             <a:extLst xmlns:a="http://schemas.openxmlformats.org/drawingml/2006/main">
               <a:ext uri="{FF2B5EF4-FFF2-40B4-BE49-F238E27FC236}">
-                <a16:creationId xmlns:a16="http://schemas.microsoft.com/office/drawing/2014/main" id="{ADBF3DD7-564F-4E1E-8384-27DFB20FC5E6}"/>
+                <a16:creationId xmlns:a16="http://schemas.microsoft.com/office/drawing/2014/main" id="{BF6D0F60-9E19-4D92-87A4-81152F29ED9E}"/>
               </a:ext>
             </a:extLst>
           </p:cNvPr>
@@ -4129,7 +5754,7 @@
           <p:cNvPr id="17" name="">
             <a:extLst xmlns:a="http://schemas.openxmlformats.org/drawingml/2006/main">
               <a:ext uri="{FF2B5EF4-FFF2-40B4-BE49-F238E27FC236}">
-                <a16:creationId xmlns:a16="http://schemas.microsoft.com/office/drawing/2014/main" id="{24A00BC3-4EE1-4828-998A-1C17DE9DBA2B}"/>
+                <a16:creationId xmlns:a16="http://schemas.microsoft.com/office/drawing/2014/main" id="{CE393F91-C790-410E-80DC-C5D364F0D100}"/>
               </a:ext>
             </a:extLst>
           </p:cNvPr>
@@ -4162,7 +5787,7 @@
           <p:cNvPr id="18" name="">
             <a:extLst xmlns:a="http://schemas.openxmlformats.org/drawingml/2006/main">
               <a:ext uri="{FF2B5EF4-FFF2-40B4-BE49-F238E27FC236}">
-                <a16:creationId xmlns:a16="http://schemas.microsoft.com/office/drawing/2014/main" id="{C0EC290D-34D2-4F30-B239-E54344FE9F94}"/>
+                <a16:creationId xmlns:a16="http://schemas.microsoft.com/office/drawing/2014/main" id="{DEBFAD6A-30AF-4136-BC79-C96FA652F58D}"/>
               </a:ext>
             </a:extLst>
           </p:cNvPr>
@@ -4195,7 +5820,7 @@
           <p:cNvPr id="19" name="">
             <a:extLst xmlns:a="http://schemas.openxmlformats.org/drawingml/2006/main">
               <a:ext uri="{FF2B5EF4-FFF2-40B4-BE49-F238E27FC236}">
-                <a16:creationId xmlns:a16="http://schemas.microsoft.com/office/drawing/2014/main" id="{743475C0-4951-4683-BDB7-5932C3D32E0A}"/>
+                <a16:creationId xmlns:a16="http://schemas.microsoft.com/office/drawing/2014/main" id="{3558A166-BFF3-4131-A865-2A3C1188A94F}"/>
               </a:ext>
             </a:extLst>
           </p:cNvPr>
@@ -4246,7 +5871,7 @@
           <p:cNvPr id="20" name="">
             <a:extLst xmlns:a="http://schemas.openxmlformats.org/drawingml/2006/main">
               <a:ext uri="{FF2B5EF4-FFF2-40B4-BE49-F238E27FC236}">
-                <a16:creationId xmlns:a16="http://schemas.microsoft.com/office/drawing/2014/main" id="{A713B8D9-D525-486F-A24C-333A3CC631DB}"/>
+                <a16:creationId xmlns:a16="http://schemas.microsoft.com/office/drawing/2014/main" id="{DEC8A14D-9A08-41AA-8F61-B8B552F9C0EB}"/>
               </a:ext>
             </a:extLst>
           </p:cNvPr>
@@ -4297,7 +5922,7 @@
           <p:cNvPr id="21" name="">
             <a:extLst xmlns:a="http://schemas.openxmlformats.org/drawingml/2006/main">
               <a:ext uri="{FF2B5EF4-FFF2-40B4-BE49-F238E27FC236}">
-                <a16:creationId xmlns:a16="http://schemas.microsoft.com/office/drawing/2014/main" id="{1595BF01-89AD-427A-BF69-4A7C0A0D8B89}"/>
+                <a16:creationId xmlns:a16="http://schemas.microsoft.com/office/drawing/2014/main" id="{BAB84A35-DF27-491A-BD77-FB243D0C5BA3}"/>
               </a:ext>
             </a:extLst>
           </p:cNvPr>
@@ -4330,7 +5955,7 @@
           <p:cNvPr id="22" name="">
             <a:extLst xmlns:a="http://schemas.openxmlformats.org/drawingml/2006/main">
               <a:ext uri="{FF2B5EF4-FFF2-40B4-BE49-F238E27FC236}">
-                <a16:creationId xmlns:a16="http://schemas.microsoft.com/office/drawing/2014/main" id="{D57462EA-0A45-4A77-B518-4E6B9BCB5C7D}"/>
+                <a16:creationId xmlns:a16="http://schemas.microsoft.com/office/drawing/2014/main" id="{8B1E88FA-2276-4DA3-BD9D-CDCF0DE593C9}"/>
               </a:ext>
             </a:extLst>
           </p:cNvPr>
@@ -4363,7 +5988,7 @@
           <p:cNvPr id="23" name="">
             <a:extLst xmlns:a="http://schemas.openxmlformats.org/drawingml/2006/main">
               <a:ext uri="{FF2B5EF4-FFF2-40B4-BE49-F238E27FC236}">
-                <a16:creationId xmlns:a16="http://schemas.microsoft.com/office/drawing/2014/main" id="{418CDA4B-164D-4320-B8C2-D48C2C1E5F15}"/>
+                <a16:creationId xmlns:a16="http://schemas.microsoft.com/office/drawing/2014/main" id="{3CB2E207-5194-4C22-9F1C-769778DFA6E5}"/>
               </a:ext>
             </a:extLst>
           </p:cNvPr>
@@ -4414,7 +6039,7 @@
           <p:cNvPr id="24" name="">
             <a:extLst xmlns:a="http://schemas.openxmlformats.org/drawingml/2006/main">
               <a:ext uri="{FF2B5EF4-FFF2-40B4-BE49-F238E27FC236}">
-                <a16:creationId xmlns:a16="http://schemas.microsoft.com/office/drawing/2014/main" id="{9B3B35AA-FDC8-4401-9881-0F567BBC369C}"/>
+                <a16:creationId xmlns:a16="http://schemas.microsoft.com/office/drawing/2014/main" id="{E3F01CCC-4AA6-484D-ADBD-A66430413A17}"/>
               </a:ext>
             </a:extLst>
           </p:cNvPr>
@@ -4465,7 +6090,7 @@
           <p:cNvPr id="25" name="">
             <a:extLst xmlns:a="http://schemas.openxmlformats.org/drawingml/2006/main">
               <a:ext uri="{FF2B5EF4-FFF2-40B4-BE49-F238E27FC236}">
-                <a16:creationId xmlns:a16="http://schemas.microsoft.com/office/drawing/2014/main" id="{DBF5206C-660C-4E24-9311-2A02451512F9}"/>
+                <a16:creationId xmlns:a16="http://schemas.microsoft.com/office/drawing/2014/main" id="{AF1C1EFF-52B3-4C7E-859F-D2A06F7F0888}"/>
               </a:ext>
             </a:extLst>
           </p:cNvPr>
@@ -4498,7 +6123,7 @@
           <p:cNvPr id="26" name="">
             <a:extLst xmlns:a="http://schemas.openxmlformats.org/drawingml/2006/main">
               <a:ext uri="{FF2B5EF4-FFF2-40B4-BE49-F238E27FC236}">
-                <a16:creationId xmlns:a16="http://schemas.microsoft.com/office/drawing/2014/main" id="{E44E8A4F-5386-4C56-A170-62ADFA490B74}"/>
+                <a16:creationId xmlns:a16="http://schemas.microsoft.com/office/drawing/2014/main" id="{03CCD780-7F68-4329-94C3-03447BAE4726}"/>
               </a:ext>
             </a:extLst>
           </p:cNvPr>
@@ -4531,7 +6156,7 @@
           <p:cNvPr id="27" name="">
             <a:extLst xmlns:a="http://schemas.openxmlformats.org/drawingml/2006/main">
               <a:ext uri="{FF2B5EF4-FFF2-40B4-BE49-F238E27FC236}">
-                <a16:creationId xmlns:a16="http://schemas.microsoft.com/office/drawing/2014/main" id="{800B3BD5-06E8-4C27-A2A8-74977161216E}"/>
+                <a16:creationId xmlns:a16="http://schemas.microsoft.com/office/drawing/2014/main" id="{5D33791A-24D5-47BE-B0A7-F4081BB6844A}"/>
               </a:ext>
             </a:extLst>
           </p:cNvPr>
@@ -4582,7 +6207,7 @@
           <p:cNvPr id="28" name="">
             <a:extLst xmlns:a="http://schemas.openxmlformats.org/drawingml/2006/main">
               <a:ext uri="{FF2B5EF4-FFF2-40B4-BE49-F238E27FC236}">
-                <a16:creationId xmlns:a16="http://schemas.microsoft.com/office/drawing/2014/main" id="{33A6677E-BDA3-459A-9929-75117A6ABE66}"/>
+                <a16:creationId xmlns:a16="http://schemas.microsoft.com/office/drawing/2014/main" id="{62E43CB2-ACF3-4B4E-AA17-620BBBBD8B41}"/>
               </a:ext>
             </a:extLst>
           </p:cNvPr>
@@ -4633,7 +6258,7 @@
           <p:cNvPr id="29" name="">
             <a:extLst xmlns:a="http://schemas.openxmlformats.org/drawingml/2006/main">
               <a:ext uri="{FF2B5EF4-FFF2-40B4-BE49-F238E27FC236}">
-                <a16:creationId xmlns:a16="http://schemas.microsoft.com/office/drawing/2014/main" id="{C7893E77-D0EF-49E1-915F-1EC67FC7A484}"/>
+                <a16:creationId xmlns:a16="http://schemas.microsoft.com/office/drawing/2014/main" id="{DFEBAA23-F2FE-468B-804A-120D88050C52}"/>
               </a:ext>
             </a:extLst>
           </p:cNvPr>
@@ -4666,7 +6291,7 @@
           <p:cNvPr id="30" name="">
             <a:extLst xmlns:a="http://schemas.openxmlformats.org/drawingml/2006/main">
               <a:ext uri="{FF2B5EF4-FFF2-40B4-BE49-F238E27FC236}">
-                <a16:creationId xmlns:a16="http://schemas.microsoft.com/office/drawing/2014/main" id="{C642A4C4-3961-413F-AEBC-780E1C02D90F}"/>
+                <a16:creationId xmlns:a16="http://schemas.microsoft.com/office/drawing/2014/main" id="{EBB19421-60F6-4EE7-AC6B-E968C4B48950}"/>
               </a:ext>
             </a:extLst>
           </p:cNvPr>
@@ -4699,7 +6324,7 @@
           <p:cNvPr id="31" name="">
             <a:extLst xmlns:a="http://schemas.openxmlformats.org/drawingml/2006/main">
               <a:ext uri="{FF2B5EF4-FFF2-40B4-BE49-F238E27FC236}">
-                <a16:creationId xmlns:a16="http://schemas.microsoft.com/office/drawing/2014/main" id="{A1A6B12B-30E7-4A98-8126-4481003808EE}"/>
+                <a16:creationId xmlns:a16="http://schemas.microsoft.com/office/drawing/2014/main" id="{2B40EA34-A32C-4072-9498-6A5AD47DAB58}"/>
               </a:ext>
             </a:extLst>
           </p:cNvPr>
@@ -4750,7 +6375,7 @@
           <p:cNvPr id="32" name="">
             <a:extLst xmlns:a="http://schemas.openxmlformats.org/drawingml/2006/main">
               <a:ext uri="{FF2B5EF4-FFF2-40B4-BE49-F238E27FC236}">
-                <a16:creationId xmlns:a16="http://schemas.microsoft.com/office/drawing/2014/main" id="{E1346287-FDF7-4872-9E00-BA8142B60C56}"/>
+                <a16:creationId xmlns:a16="http://schemas.microsoft.com/office/drawing/2014/main" id="{085EF4F3-D277-4A6B-BAB4-21343F042245}"/>
               </a:ext>
             </a:extLst>
           </p:cNvPr>
@@ -4801,7 +6426,7 @@
           <p:cNvPr id="33" name="">
             <a:extLst xmlns:a="http://schemas.openxmlformats.org/drawingml/2006/main">
               <a:ext uri="{FF2B5EF4-FFF2-40B4-BE49-F238E27FC236}">
-                <a16:creationId xmlns:a16="http://schemas.microsoft.com/office/drawing/2014/main" id="{C534D3D1-34E9-4B8F-8A67-12F9390A709F}"/>
+                <a16:creationId xmlns:a16="http://schemas.microsoft.com/office/drawing/2014/main" id="{3661F09A-2025-49FD-A889-63D8D4E611D0}"/>
               </a:ext>
             </a:extLst>
           </p:cNvPr>
@@ -4852,7 +6477,7 @@
           <p:cNvPr id="34" name="">
             <a:extLst xmlns:a="http://schemas.openxmlformats.org/drawingml/2006/main">
               <a:ext uri="{FF2B5EF4-FFF2-40B4-BE49-F238E27FC236}">
-                <a16:creationId xmlns:a16="http://schemas.microsoft.com/office/drawing/2014/main" id="{DE8DB04D-A4E8-45D8-8D92-9F13A471727A}"/>
+                <a16:creationId xmlns:a16="http://schemas.microsoft.com/office/drawing/2014/main" id="{8F448856-22B9-42E0-98F5-FA40EDB7F05E}"/>
               </a:ext>
             </a:extLst>
           </p:cNvPr>
@@ -4901,7 +6526,7 @@
     </p:spTree>
     <p:extLst>
       <p:ext uri="{BB962C8B-B14F-4D97-AF65-F5344CB8AC3E}">
-        <p14:creationId xmlns:p14="http://schemas.microsoft.com/office/powerpoint/2010/main" val="919630498"/>
+        <p14:creationId xmlns:p14="http://schemas.microsoft.com/office/powerpoint/2010/main" val="1047464516"/>
       </p:ext>
     </p:extLst>
   </p:cSld>
@@ -4925,7 +6550,7 @@
           <p:cNvPr id="1" name="">
             <a:extLst xmlns:a="http://schemas.openxmlformats.org/drawingml/2006/main">
               <a:ext uri="{FF2B5EF4-FFF2-40B4-BE49-F238E27FC236}">
-                <a16:creationId xmlns:a16="http://schemas.microsoft.com/office/drawing/2014/main" id="{590884CC-74D7-4F19-A91D-B90CDD9AC749}"/>
+                <a16:creationId xmlns:a16="http://schemas.microsoft.com/office/drawing/2014/main" id="{AA224BCB-3C6D-4B8F-B1BE-6FA98D7DB12F}"/>
               </a:ext>
             </a:extLst>
           </p:cNvPr>
@@ -4958,7 +6583,7 @@
           <p:cNvPr id="2" name="">
             <a:extLst xmlns:a="http://schemas.openxmlformats.org/drawingml/2006/main">
               <a:ext uri="{FF2B5EF4-FFF2-40B4-BE49-F238E27FC236}">
-                <a16:creationId xmlns:a16="http://schemas.microsoft.com/office/drawing/2014/main" id="{F8B9CDE6-833D-4CC5-83F4-79446360D39B}"/>
+                <a16:creationId xmlns:a16="http://schemas.microsoft.com/office/drawing/2014/main" id="{4837E99D-024F-428A-9505-1B359D414239}"/>
               </a:ext>
             </a:extLst>
           </p:cNvPr>
@@ -5009,7 +6634,7 @@
           <p:cNvPr id="3" name="">
             <a:extLst xmlns:a="http://schemas.openxmlformats.org/drawingml/2006/main">
               <a:ext uri="{FF2B5EF4-FFF2-40B4-BE49-F238E27FC236}">
-                <a16:creationId xmlns:a16="http://schemas.microsoft.com/office/drawing/2014/main" id="{C122A254-926B-4C7F-9504-DAAEE98023C1}"/>
+                <a16:creationId xmlns:a16="http://schemas.microsoft.com/office/drawing/2014/main" id="{DBCD0C85-8704-48FF-88D3-9D419992E1FA}"/>
               </a:ext>
             </a:extLst>
           </p:cNvPr>
@@ -5060,7 +6685,7 @@
           <p:cNvPr id="4" name="">
             <a:extLst xmlns:a="http://schemas.openxmlformats.org/drawingml/2006/main">
               <a:ext uri="{FF2B5EF4-FFF2-40B4-BE49-F238E27FC236}">
-                <a16:creationId xmlns:a16="http://schemas.microsoft.com/office/drawing/2014/main" id="{D71BB061-59A3-4192-B867-8382157E7F36}"/>
+                <a16:creationId xmlns:a16="http://schemas.microsoft.com/office/drawing/2014/main" id="{3478E4C8-1DE5-4974-AC2E-567F76F7A0AE}"/>
               </a:ext>
             </a:extLst>
           </p:cNvPr>
@@ -5093,7 +6718,7 @@
           <p:cNvPr id="5" name="">
             <a:extLst xmlns:a="http://schemas.openxmlformats.org/drawingml/2006/main">
               <a:ext uri="{FF2B5EF4-FFF2-40B4-BE49-F238E27FC236}">
-                <a16:creationId xmlns:a16="http://schemas.microsoft.com/office/drawing/2014/main" id="{8ADBA5DF-F5F2-4737-BB2C-1098E294E703}"/>
+                <a16:creationId xmlns:a16="http://schemas.microsoft.com/office/drawing/2014/main" id="{F64F2301-4DA4-42AE-BF1A-A1DE8A66230C}"/>
               </a:ext>
             </a:extLst>
           </p:cNvPr>
@@ -5126,7 +6751,7 @@
           <p:cNvPr id="6" name="">
             <a:extLst xmlns:a="http://schemas.openxmlformats.org/drawingml/2006/main">
               <a:ext uri="{FF2B5EF4-FFF2-40B4-BE49-F238E27FC236}">
-                <a16:creationId xmlns:a16="http://schemas.microsoft.com/office/drawing/2014/main" id="{DD361976-5E32-4201-8C54-87AF29EC95AA}"/>
+                <a16:creationId xmlns:a16="http://schemas.microsoft.com/office/drawing/2014/main" id="{7570826D-DF6E-4BCB-8A2B-EAA51B50FBE8}"/>
               </a:ext>
             </a:extLst>
           </p:cNvPr>
@@ -5177,7 +6802,7 @@
           <p:cNvPr id="7" name="">
             <a:extLst xmlns:a="http://schemas.openxmlformats.org/drawingml/2006/main">
               <a:ext uri="{FF2B5EF4-FFF2-40B4-BE49-F238E27FC236}">
-                <a16:creationId xmlns:a16="http://schemas.microsoft.com/office/drawing/2014/main" id="{BC972587-5F3F-48FE-8C8F-728F870F57B8}"/>
+                <a16:creationId xmlns:a16="http://schemas.microsoft.com/office/drawing/2014/main" id="{56425EE7-3808-4195-88D1-8DEC28F97521}"/>
               </a:ext>
             </a:extLst>
           </p:cNvPr>
@@ -5210,7 +6835,7 @@
           <p:cNvPr id="8" name="">
             <a:extLst xmlns:a="http://schemas.openxmlformats.org/drawingml/2006/main">
               <a:ext uri="{FF2B5EF4-FFF2-40B4-BE49-F238E27FC236}">
-                <a16:creationId xmlns:a16="http://schemas.microsoft.com/office/drawing/2014/main" id="{53450CE3-1EDE-4407-A14B-89C9815035ED}"/>
+                <a16:creationId xmlns:a16="http://schemas.microsoft.com/office/drawing/2014/main" id="{BBF283CF-45BC-463E-9FCA-BFC5C81C1DF5}"/>
               </a:ext>
             </a:extLst>
           </p:cNvPr>
@@ -5261,7 +6886,7 @@
           <p:cNvPr id="9" name="">
             <a:extLst xmlns:a="http://schemas.openxmlformats.org/drawingml/2006/main">
               <a:ext uri="{FF2B5EF4-FFF2-40B4-BE49-F238E27FC236}">
-                <a16:creationId xmlns:a16="http://schemas.microsoft.com/office/drawing/2014/main" id="{9191C8E3-DDE9-4ACE-9A57-541E9093F63D}"/>
+                <a16:creationId xmlns:a16="http://schemas.microsoft.com/office/drawing/2014/main" id="{E45C9D14-E263-4308-9093-8AE05AF88434}"/>
               </a:ext>
             </a:extLst>
           </p:cNvPr>
@@ -5294,7 +6919,7 @@
           <p:cNvPr id="10" name="">
             <a:extLst xmlns:a="http://schemas.openxmlformats.org/drawingml/2006/main">
               <a:ext uri="{FF2B5EF4-FFF2-40B4-BE49-F238E27FC236}">
-                <a16:creationId xmlns:a16="http://schemas.microsoft.com/office/drawing/2014/main" id="{A20BEF64-B675-48DD-A99B-7F8545F88427}"/>
+                <a16:creationId xmlns:a16="http://schemas.microsoft.com/office/drawing/2014/main" id="{3AD1A722-6D08-4633-B4F1-4968BA8229C5}"/>
               </a:ext>
             </a:extLst>
           </p:cNvPr>
@@ -5345,7 +6970,7 @@
           <p:cNvPr id="11" name="">
             <a:extLst xmlns:a="http://schemas.openxmlformats.org/drawingml/2006/main">
               <a:ext uri="{FF2B5EF4-FFF2-40B4-BE49-F238E27FC236}">
-                <a16:creationId xmlns:a16="http://schemas.microsoft.com/office/drawing/2014/main" id="{AEBBC36F-4843-4DB6-95F3-0AF0E2047B73}"/>
+                <a16:creationId xmlns:a16="http://schemas.microsoft.com/office/drawing/2014/main" id="{96AB25C1-1F63-43FA-BAD5-417A95968C3A}"/>
               </a:ext>
             </a:extLst>
           </p:cNvPr>
@@ -5378,7 +7003,7 @@
           <p:cNvPr id="12" name="">
             <a:extLst xmlns:a="http://schemas.openxmlformats.org/drawingml/2006/main">
               <a:ext uri="{FF2B5EF4-FFF2-40B4-BE49-F238E27FC236}">
-                <a16:creationId xmlns:a16="http://schemas.microsoft.com/office/drawing/2014/main" id="{5D13408D-8A1A-419A-9B84-54B655848038}"/>
+                <a16:creationId xmlns:a16="http://schemas.microsoft.com/office/drawing/2014/main" id="{B16CC759-6797-492A-8E43-7AAC2405AB94}"/>
               </a:ext>
             </a:extLst>
           </p:cNvPr>
@@ -5429,7 +7054,7 @@
           <p:cNvPr id="13" name="">
             <a:extLst xmlns:a="http://schemas.openxmlformats.org/drawingml/2006/main">
               <a:ext uri="{FF2B5EF4-FFF2-40B4-BE49-F238E27FC236}">
-                <a16:creationId xmlns:a16="http://schemas.microsoft.com/office/drawing/2014/main" id="{DA8B5B44-86C0-4B52-B27B-C5FC76291DED}"/>
+                <a16:creationId xmlns:a16="http://schemas.microsoft.com/office/drawing/2014/main" id="{C7A795BD-16EC-4434-B6B4-F67B36BEA1C8}"/>
               </a:ext>
             </a:extLst>
           </p:cNvPr>
@@ -5462,7 +7087,7 @@
           <p:cNvPr id="14" name="">
             <a:extLst xmlns:a="http://schemas.openxmlformats.org/drawingml/2006/main">
               <a:ext uri="{FF2B5EF4-FFF2-40B4-BE49-F238E27FC236}">
-                <a16:creationId xmlns:a16="http://schemas.microsoft.com/office/drawing/2014/main" id="{46FAE7F5-8645-4C3A-8AE8-BC7A6554F26B}"/>
+                <a16:creationId xmlns:a16="http://schemas.microsoft.com/office/drawing/2014/main" id="{65F74ECD-19EB-4548-87F3-BFEC855A2629}"/>
               </a:ext>
             </a:extLst>
           </p:cNvPr>
@@ -5513,7 +7138,7 @@
           <p:cNvPr id="15" name="">
             <a:extLst xmlns:a="http://schemas.openxmlformats.org/drawingml/2006/main">
               <a:ext uri="{FF2B5EF4-FFF2-40B4-BE49-F238E27FC236}">
-                <a16:creationId xmlns:a16="http://schemas.microsoft.com/office/drawing/2014/main" id="{FEB03D7A-FCD4-4D50-90AB-73B0F4F27D54}"/>
+                <a16:creationId xmlns:a16="http://schemas.microsoft.com/office/drawing/2014/main" id="{97569988-0B3B-4DAA-81AD-687771C3EFD4}"/>
               </a:ext>
             </a:extLst>
           </p:cNvPr>
@@ -5546,7 +7171,7 @@
           <p:cNvPr id="16" name="">
             <a:extLst xmlns:a="http://schemas.openxmlformats.org/drawingml/2006/main">
               <a:ext uri="{FF2B5EF4-FFF2-40B4-BE49-F238E27FC236}">
-                <a16:creationId xmlns:a16="http://schemas.microsoft.com/office/drawing/2014/main" id="{3CED3258-D290-4F8D-95CD-AE3A0D914AB6}"/>
+                <a16:creationId xmlns:a16="http://schemas.microsoft.com/office/drawing/2014/main" id="{DFC3F536-A28B-41F8-8D03-D9638449F839}"/>
               </a:ext>
             </a:extLst>
           </p:cNvPr>
@@ -5579,7 +7204,7 @@
           <p:cNvPr id="17" name="">
             <a:extLst xmlns:a="http://schemas.openxmlformats.org/drawingml/2006/main">
               <a:ext uri="{FF2B5EF4-FFF2-40B4-BE49-F238E27FC236}">
-                <a16:creationId xmlns:a16="http://schemas.microsoft.com/office/drawing/2014/main" id="{3D3B77A1-4834-4308-A8E4-4EADECD3441D}"/>
+                <a16:creationId xmlns:a16="http://schemas.microsoft.com/office/drawing/2014/main" id="{16199D0F-05C9-4E1E-A34F-E3DF497F4CA0}"/>
               </a:ext>
             </a:extLst>
           </p:cNvPr>
@@ -5630,7 +7255,7 @@
           <p:cNvPr id="18" name="">
             <a:extLst xmlns:a="http://schemas.openxmlformats.org/drawingml/2006/main">
               <a:ext uri="{FF2B5EF4-FFF2-40B4-BE49-F238E27FC236}">
-                <a16:creationId xmlns:a16="http://schemas.microsoft.com/office/drawing/2014/main" id="{2AACC19C-3897-4B39-A0D1-74CBE6D3E166}"/>
+                <a16:creationId xmlns:a16="http://schemas.microsoft.com/office/drawing/2014/main" id="{5A470CEE-450F-45BC-A085-7299C4AE55AB}"/>
               </a:ext>
             </a:extLst>
           </p:cNvPr>
@@ -5663,7 +7288,7 @@
           <p:cNvPr id="19" name="">
             <a:extLst xmlns:a="http://schemas.openxmlformats.org/drawingml/2006/main">
               <a:ext uri="{FF2B5EF4-FFF2-40B4-BE49-F238E27FC236}">
-                <a16:creationId xmlns:a16="http://schemas.microsoft.com/office/drawing/2014/main" id="{C1AC2BEB-04CC-41CC-A37C-526EEB58A9B8}"/>
+                <a16:creationId xmlns:a16="http://schemas.microsoft.com/office/drawing/2014/main" id="{49128BAA-2347-4D6A-901D-7BA0848D80DE}"/>
               </a:ext>
             </a:extLst>
           </p:cNvPr>
@@ -5714,7 +7339,7 @@
           <p:cNvPr id="20" name="">
             <a:extLst xmlns:a="http://schemas.openxmlformats.org/drawingml/2006/main">
               <a:ext uri="{FF2B5EF4-FFF2-40B4-BE49-F238E27FC236}">
-                <a16:creationId xmlns:a16="http://schemas.microsoft.com/office/drawing/2014/main" id="{0C014D61-1979-42D8-B5C8-BFDAAF816C60}"/>
+                <a16:creationId xmlns:a16="http://schemas.microsoft.com/office/drawing/2014/main" id="{734BEE20-F16B-49B6-A62B-77A2205587FB}"/>
               </a:ext>
             </a:extLst>
           </p:cNvPr>
@@ -5747,7 +7372,7 @@
           <p:cNvPr id="21" name="">
             <a:extLst xmlns:a="http://schemas.openxmlformats.org/drawingml/2006/main">
               <a:ext uri="{FF2B5EF4-FFF2-40B4-BE49-F238E27FC236}">
-                <a16:creationId xmlns:a16="http://schemas.microsoft.com/office/drawing/2014/main" id="{BFAF72FC-290A-4F7C-8493-313A6123BBD5}"/>
+                <a16:creationId xmlns:a16="http://schemas.microsoft.com/office/drawing/2014/main" id="{6D485B07-4284-4809-B4D7-D5B5EED6884D}"/>
               </a:ext>
             </a:extLst>
           </p:cNvPr>
@@ -5798,7 +7423,7 @@
           <p:cNvPr id="22" name="">
             <a:extLst xmlns:a="http://schemas.openxmlformats.org/drawingml/2006/main">
               <a:ext uri="{FF2B5EF4-FFF2-40B4-BE49-F238E27FC236}">
-                <a16:creationId xmlns:a16="http://schemas.microsoft.com/office/drawing/2014/main" id="{4FFEB58C-FFDC-4F39-875A-DD10974E3E72}"/>
+                <a16:creationId xmlns:a16="http://schemas.microsoft.com/office/drawing/2014/main" id="{39F53EDF-4419-4730-8808-8903AF6FD053}"/>
               </a:ext>
             </a:extLst>
           </p:cNvPr>
@@ -5831,7 +7456,7 @@
           <p:cNvPr id="23" name="">
             <a:extLst xmlns:a="http://schemas.openxmlformats.org/drawingml/2006/main">
               <a:ext uri="{FF2B5EF4-FFF2-40B4-BE49-F238E27FC236}">
-                <a16:creationId xmlns:a16="http://schemas.microsoft.com/office/drawing/2014/main" id="{F7127438-0E20-4083-BA93-C678950A013D}"/>
+                <a16:creationId xmlns:a16="http://schemas.microsoft.com/office/drawing/2014/main" id="{0BD95D67-99E4-45E5-B35D-40EAC9C4833D}"/>
               </a:ext>
             </a:extLst>
           </p:cNvPr>
@@ -5882,7 +7507,7 @@
           <p:cNvPr id="24" name="">
             <a:extLst xmlns:a="http://schemas.openxmlformats.org/drawingml/2006/main">
               <a:ext uri="{FF2B5EF4-FFF2-40B4-BE49-F238E27FC236}">
-                <a16:creationId xmlns:a16="http://schemas.microsoft.com/office/drawing/2014/main" id="{E0BD7957-5470-4676-A27E-CB3D1F1C3294}"/>
+                <a16:creationId xmlns:a16="http://schemas.microsoft.com/office/drawing/2014/main" id="{DCFEBDD7-2D8C-4CCA-A626-262CDFC0E407}"/>
               </a:ext>
             </a:extLst>
           </p:cNvPr>
@@ -5915,7 +7540,7 @@
           <p:cNvPr id="25" name="">
             <a:extLst xmlns:a="http://schemas.openxmlformats.org/drawingml/2006/main">
               <a:ext uri="{FF2B5EF4-FFF2-40B4-BE49-F238E27FC236}">
-                <a16:creationId xmlns:a16="http://schemas.microsoft.com/office/drawing/2014/main" id="{816F7F71-C9C5-472A-9989-66AA31D22EE8}"/>
+                <a16:creationId xmlns:a16="http://schemas.microsoft.com/office/drawing/2014/main" id="{064F2162-3126-41AD-B014-639840C1CDC2}"/>
               </a:ext>
             </a:extLst>
           </p:cNvPr>
@@ -5966,7 +7591,7 @@
           <p:cNvPr id="26" name="">
             <a:extLst xmlns:a="http://schemas.openxmlformats.org/drawingml/2006/main">
               <a:ext uri="{FF2B5EF4-FFF2-40B4-BE49-F238E27FC236}">
-                <a16:creationId xmlns:a16="http://schemas.microsoft.com/office/drawing/2014/main" id="{B6C377F0-D76B-4CF5-B5F7-41A270BDE296}"/>
+                <a16:creationId xmlns:a16="http://schemas.microsoft.com/office/drawing/2014/main" id="{5B2D84F0-D93B-4345-A89F-E3371FFB44DF}"/>
               </a:ext>
             </a:extLst>
           </p:cNvPr>
@@ -5999,7 +7624,7 @@
           <p:cNvPr id="27" name="">
             <a:extLst xmlns:a="http://schemas.openxmlformats.org/drawingml/2006/main">
               <a:ext uri="{FF2B5EF4-FFF2-40B4-BE49-F238E27FC236}">
-                <a16:creationId xmlns:a16="http://schemas.microsoft.com/office/drawing/2014/main" id="{BC5303FE-BC73-406D-B605-354B75A7055D}"/>
+                <a16:creationId xmlns:a16="http://schemas.microsoft.com/office/drawing/2014/main" id="{B9B207A2-41FD-473F-B4CE-C74B03C9F677}"/>
               </a:ext>
             </a:extLst>
           </p:cNvPr>
@@ -6032,7 +7657,7 @@
           <p:cNvPr id="28" name="">
             <a:extLst xmlns:a="http://schemas.openxmlformats.org/drawingml/2006/main">
               <a:ext uri="{FF2B5EF4-FFF2-40B4-BE49-F238E27FC236}">
-                <a16:creationId xmlns:a16="http://schemas.microsoft.com/office/drawing/2014/main" id="{3DD9B710-C5BF-4223-A922-16CD4539D7E4}"/>
+                <a16:creationId xmlns:a16="http://schemas.microsoft.com/office/drawing/2014/main" id="{9150D7E7-44B5-45E8-8469-D6260D0ACAC7}"/>
               </a:ext>
             </a:extLst>
           </p:cNvPr>
@@ -6083,7 +7708,7 @@
           <p:cNvPr id="29" name="">
             <a:extLst xmlns:a="http://schemas.openxmlformats.org/drawingml/2006/main">
               <a:ext uri="{FF2B5EF4-FFF2-40B4-BE49-F238E27FC236}">
-                <a16:creationId xmlns:a16="http://schemas.microsoft.com/office/drawing/2014/main" id="{5946F591-2BB8-4206-BDD4-AC4FF490A4D6}"/>
+                <a16:creationId xmlns:a16="http://schemas.microsoft.com/office/drawing/2014/main" id="{5C40A906-94FD-409A-9F43-A9FA37297044}"/>
               </a:ext>
             </a:extLst>
           </p:cNvPr>
@@ -6116,7 +7741,7 @@
           <p:cNvPr id="30" name="">
             <a:extLst xmlns:a="http://schemas.openxmlformats.org/drawingml/2006/main">
               <a:ext uri="{FF2B5EF4-FFF2-40B4-BE49-F238E27FC236}">
-                <a16:creationId xmlns:a16="http://schemas.microsoft.com/office/drawing/2014/main" id="{8B4DE1D9-B2D6-4382-91FC-5079BF7C5D86}"/>
+                <a16:creationId xmlns:a16="http://schemas.microsoft.com/office/drawing/2014/main" id="{BD32A7E3-1359-4790-877E-434D52C3C523}"/>
               </a:ext>
             </a:extLst>
           </p:cNvPr>
@@ -6167,7 +7792,7 @@
           <p:cNvPr id="31" name="">
             <a:extLst xmlns:a="http://schemas.openxmlformats.org/drawingml/2006/main">
               <a:ext uri="{FF2B5EF4-FFF2-40B4-BE49-F238E27FC236}">
-                <a16:creationId xmlns:a16="http://schemas.microsoft.com/office/drawing/2014/main" id="{A6115A44-57D2-4A9D-B4A4-F406E9CF8130}"/>
+                <a16:creationId xmlns:a16="http://schemas.microsoft.com/office/drawing/2014/main" id="{5A905DF0-B80E-4298-9573-F0810BF5C37D}"/>
               </a:ext>
             </a:extLst>
           </p:cNvPr>
@@ -6200,7 +7825,7 @@
           <p:cNvPr id="32" name="">
             <a:extLst xmlns:a="http://schemas.openxmlformats.org/drawingml/2006/main">
               <a:ext uri="{FF2B5EF4-FFF2-40B4-BE49-F238E27FC236}">
-                <a16:creationId xmlns:a16="http://schemas.microsoft.com/office/drawing/2014/main" id="{8F02AC95-D41E-47AD-8673-62EDBEA25499}"/>
+                <a16:creationId xmlns:a16="http://schemas.microsoft.com/office/drawing/2014/main" id="{1BD7B885-96FC-482C-AD0A-EE7151F7C371}"/>
               </a:ext>
             </a:extLst>
           </p:cNvPr>
@@ -6251,7 +7876,7 @@
           <p:cNvPr id="33" name="">
             <a:extLst xmlns:a="http://schemas.openxmlformats.org/drawingml/2006/main">
               <a:ext uri="{FF2B5EF4-FFF2-40B4-BE49-F238E27FC236}">
-                <a16:creationId xmlns:a16="http://schemas.microsoft.com/office/drawing/2014/main" id="{E01B059D-BFE6-4542-AE9F-9AC1B1E00208}"/>
+                <a16:creationId xmlns:a16="http://schemas.microsoft.com/office/drawing/2014/main" id="{EA7E52E6-0CE4-472A-93FE-0F4959645AA7}"/>
               </a:ext>
             </a:extLst>
           </p:cNvPr>
@@ -6284,7 +7909,7 @@
           <p:cNvPr id="34" name="">
             <a:extLst xmlns:a="http://schemas.openxmlformats.org/drawingml/2006/main">
               <a:ext uri="{FF2B5EF4-FFF2-40B4-BE49-F238E27FC236}">
-                <a16:creationId xmlns:a16="http://schemas.microsoft.com/office/drawing/2014/main" id="{7FAE16E1-8DCE-4BE6-933D-EF6A6059BC27}"/>
+                <a16:creationId xmlns:a16="http://schemas.microsoft.com/office/drawing/2014/main" id="{F9E27290-4D84-4552-90C3-A04032E082C6}"/>
               </a:ext>
             </a:extLst>
           </p:cNvPr>
@@ -6335,7 +7960,7 @@
           <p:cNvPr id="35" name="">
             <a:extLst xmlns:a="http://schemas.openxmlformats.org/drawingml/2006/main">
               <a:ext uri="{FF2B5EF4-FFF2-40B4-BE49-F238E27FC236}">
-                <a16:creationId xmlns:a16="http://schemas.microsoft.com/office/drawing/2014/main" id="{708E6A91-3508-4135-B12A-F27836821455}"/>
+                <a16:creationId xmlns:a16="http://schemas.microsoft.com/office/drawing/2014/main" id="{2C965936-8865-410E-AD5B-4D3960F61266}"/>
               </a:ext>
             </a:extLst>
           </p:cNvPr>
@@ -6368,7 +7993,7 @@
           <p:cNvPr id="36" name="">
             <a:extLst xmlns:a="http://schemas.openxmlformats.org/drawingml/2006/main">
               <a:ext uri="{FF2B5EF4-FFF2-40B4-BE49-F238E27FC236}">
-                <a16:creationId xmlns:a16="http://schemas.microsoft.com/office/drawing/2014/main" id="{7DDF4405-B528-486B-B39B-B787D78C4C01}"/>
+                <a16:creationId xmlns:a16="http://schemas.microsoft.com/office/drawing/2014/main" id="{442182E1-CB3A-4DB1-A0FB-EBA4FD717757}"/>
               </a:ext>
             </a:extLst>
           </p:cNvPr>
@@ -6419,7 +8044,7 @@
           <p:cNvPr id="37" name="">
             <a:extLst xmlns:a="http://schemas.openxmlformats.org/drawingml/2006/main">
               <a:ext uri="{FF2B5EF4-FFF2-40B4-BE49-F238E27FC236}">
-                <a16:creationId xmlns:a16="http://schemas.microsoft.com/office/drawing/2014/main" id="{CACE6CBC-A1E5-4E25-A920-63DE4E1BC22C}"/>
+                <a16:creationId xmlns:a16="http://schemas.microsoft.com/office/drawing/2014/main" id="{E1393674-7FCF-4201-A7FB-46CDC09E1739}"/>
               </a:ext>
             </a:extLst>
           </p:cNvPr>
@@ -6470,7 +8095,7 @@
           <p:cNvPr id="38" name="">
             <a:extLst xmlns:a="http://schemas.openxmlformats.org/drawingml/2006/main">
               <a:ext uri="{FF2B5EF4-FFF2-40B4-BE49-F238E27FC236}">
-                <a16:creationId xmlns:a16="http://schemas.microsoft.com/office/drawing/2014/main" id="{7BB177AF-5190-4F24-9809-19957B73DF9E}"/>
+                <a16:creationId xmlns:a16="http://schemas.microsoft.com/office/drawing/2014/main" id="{8FC65B0A-8437-479C-91BC-E17D76B9E743}"/>
               </a:ext>
             </a:extLst>
           </p:cNvPr>
@@ -6521,7 +8146,7 @@
           <p:cNvPr id="39" name="">
             <a:extLst xmlns:a="http://schemas.openxmlformats.org/drawingml/2006/main">
               <a:ext uri="{FF2B5EF4-FFF2-40B4-BE49-F238E27FC236}">
-                <a16:creationId xmlns:a16="http://schemas.microsoft.com/office/drawing/2014/main" id="{54E55854-7B33-4C2E-B635-FF892119502C}"/>
+                <a16:creationId xmlns:a16="http://schemas.microsoft.com/office/drawing/2014/main" id="{3DBC587E-3E13-455F-BCBD-15CD22FD90EE}"/>
               </a:ext>
             </a:extLst>
           </p:cNvPr>
@@ -6572,7 +8197,7 @@
           <p:cNvPr id="40" name="">
             <a:extLst xmlns:a="http://schemas.openxmlformats.org/drawingml/2006/main">
               <a:ext uri="{FF2B5EF4-FFF2-40B4-BE49-F238E27FC236}">
-                <a16:creationId xmlns:a16="http://schemas.microsoft.com/office/drawing/2014/main" id="{9D858B98-EB1A-4891-9FBF-5AAB9A40BACF}"/>
+                <a16:creationId xmlns:a16="http://schemas.microsoft.com/office/drawing/2014/main" id="{FD267EBC-76BB-4255-8F67-74ACFD59AD68}"/>
               </a:ext>
             </a:extLst>
           </p:cNvPr>
@@ -6621,7 +8246,7 @@
     </p:spTree>
     <p:extLst>
       <p:ext uri="{BB962C8B-B14F-4D97-AF65-F5344CB8AC3E}">
-        <p14:creationId xmlns:p14="http://schemas.microsoft.com/office/powerpoint/2010/main" val="181684823"/>
+        <p14:creationId xmlns:p14="http://schemas.microsoft.com/office/powerpoint/2010/main" val="800764287"/>
       </p:ext>
     </p:extLst>
   </p:cSld>
@@ -6645,7 +8270,7 @@
           <p:cNvPr id="1" name="">
             <a:extLst xmlns:a="http://schemas.openxmlformats.org/drawingml/2006/main">
               <a:ext uri="{FF2B5EF4-FFF2-40B4-BE49-F238E27FC236}">
-                <a16:creationId xmlns:a16="http://schemas.microsoft.com/office/drawing/2014/main" id="{FDEEFF3F-3B4F-4B6E-98BC-E2702A097F6E}"/>
+                <a16:creationId xmlns:a16="http://schemas.microsoft.com/office/drawing/2014/main" id="{844F4144-879E-4F50-9F7B-AD6310EC4A1F}"/>
               </a:ext>
             </a:extLst>
           </p:cNvPr>
@@ -6678,7 +8303,7 @@
           <p:cNvPr id="2" name="">
             <a:extLst xmlns:a="http://schemas.openxmlformats.org/drawingml/2006/main">
               <a:ext uri="{FF2B5EF4-FFF2-40B4-BE49-F238E27FC236}">
-                <a16:creationId xmlns:a16="http://schemas.microsoft.com/office/drawing/2014/main" id="{03B19494-10B4-4F89-AE91-F094BD5B7C8A}"/>
+                <a16:creationId xmlns:a16="http://schemas.microsoft.com/office/drawing/2014/main" id="{8985043A-0DA5-4641-A5B1-9E8CA5F6B056}"/>
               </a:ext>
             </a:extLst>
           </p:cNvPr>
@@ -6729,7 +8354,7 @@
           <p:cNvPr id="3" name="">
             <a:extLst xmlns:a="http://schemas.openxmlformats.org/drawingml/2006/main">
               <a:ext uri="{FF2B5EF4-FFF2-40B4-BE49-F238E27FC236}">
-                <a16:creationId xmlns:a16="http://schemas.microsoft.com/office/drawing/2014/main" id="{95A9FDC5-9F1F-4877-A369-16CFE1B8B763}"/>
+                <a16:creationId xmlns:a16="http://schemas.microsoft.com/office/drawing/2014/main" id="{661A520C-788A-4CA4-A649-1A9B51A19110}"/>
               </a:ext>
             </a:extLst>
           </p:cNvPr>
@@ -6780,7 +8405,7 @@
           <p:cNvPr id="4" name="">
             <a:extLst xmlns:a="http://schemas.openxmlformats.org/drawingml/2006/main">
               <a:ext uri="{FF2B5EF4-FFF2-40B4-BE49-F238E27FC236}">
-                <a16:creationId xmlns:a16="http://schemas.microsoft.com/office/drawing/2014/main" id="{5118F54A-9265-43FC-9E44-FFDA801D5D71}"/>
+                <a16:creationId xmlns:a16="http://schemas.microsoft.com/office/drawing/2014/main" id="{11AA92F2-693D-4873-9AD7-3B65779BFB33}"/>
               </a:ext>
             </a:extLst>
           </p:cNvPr>
@@ -6831,7 +8456,7 @@
           <p:cNvPr id="5" name="">
             <a:extLst xmlns:a="http://schemas.openxmlformats.org/drawingml/2006/main">
               <a:ext uri="{FF2B5EF4-FFF2-40B4-BE49-F238E27FC236}">
-                <a16:creationId xmlns:a16="http://schemas.microsoft.com/office/drawing/2014/main" id="{2442BCA9-C6CF-4350-BB21-6A82889A5EFD}"/>
+                <a16:creationId xmlns:a16="http://schemas.microsoft.com/office/drawing/2014/main" id="{556E55CB-627F-463C-BABE-525534A13DDE}"/>
               </a:ext>
             </a:extLst>
           </p:cNvPr>
@@ -6882,7 +8507,7 @@
           <p:cNvPr id="6" name="">
             <a:extLst xmlns:a="http://schemas.openxmlformats.org/drawingml/2006/main">
               <a:ext uri="{FF2B5EF4-FFF2-40B4-BE49-F238E27FC236}">
-                <a16:creationId xmlns:a16="http://schemas.microsoft.com/office/drawing/2014/main" id="{4BFD43B9-29E6-43F8-864A-8F2FDEDFB178}"/>
+                <a16:creationId xmlns:a16="http://schemas.microsoft.com/office/drawing/2014/main" id="{5783C444-9996-40C7-B909-B13583556C95}"/>
               </a:ext>
             </a:extLst>
           </p:cNvPr>
@@ -6933,7 +8558,7 @@
           <p:cNvPr id="7" name="">
             <a:extLst xmlns:a="http://schemas.openxmlformats.org/drawingml/2006/main">
               <a:ext uri="{FF2B5EF4-FFF2-40B4-BE49-F238E27FC236}">
-                <a16:creationId xmlns:a16="http://schemas.microsoft.com/office/drawing/2014/main" id="{234A90F4-4BB8-495B-8A17-652E4FF62C5F}"/>
+                <a16:creationId xmlns:a16="http://schemas.microsoft.com/office/drawing/2014/main" id="{08027EDF-A2A3-48CF-9EF4-99CB93943676}"/>
               </a:ext>
             </a:extLst>
           </p:cNvPr>
@@ -6966,7 +8591,7 @@
           <p:cNvPr id="8" name="">
             <a:extLst xmlns:a="http://schemas.openxmlformats.org/drawingml/2006/main">
               <a:ext uri="{FF2B5EF4-FFF2-40B4-BE49-F238E27FC236}">
-                <a16:creationId xmlns:a16="http://schemas.microsoft.com/office/drawing/2014/main" id="{B3D1F52D-97FB-4897-A2A8-672F6B481933}"/>
+                <a16:creationId xmlns:a16="http://schemas.microsoft.com/office/drawing/2014/main" id="{E8EB8470-E7EE-45BD-A8F6-F56C8A98EA33}"/>
               </a:ext>
             </a:extLst>
           </p:cNvPr>
@@ -6999,7 +8624,7 @@
           <p:cNvPr id="9" name="">
             <a:extLst xmlns:a="http://schemas.openxmlformats.org/drawingml/2006/main">
               <a:ext uri="{FF2B5EF4-FFF2-40B4-BE49-F238E27FC236}">
-                <a16:creationId xmlns:a16="http://schemas.microsoft.com/office/drawing/2014/main" id="{5142882E-4F00-4650-9BF7-7579ED49D17B}"/>
+                <a16:creationId xmlns:a16="http://schemas.microsoft.com/office/drawing/2014/main" id="{34A8A43C-B770-40DB-A5DF-6BF2C69F8390}"/>
               </a:ext>
             </a:extLst>
           </p:cNvPr>
@@ -7050,7 +8675,7 @@
           <p:cNvPr id="10" name="">
             <a:extLst xmlns:a="http://schemas.openxmlformats.org/drawingml/2006/main">
               <a:ext uri="{FF2B5EF4-FFF2-40B4-BE49-F238E27FC236}">
-                <a16:creationId xmlns:a16="http://schemas.microsoft.com/office/drawing/2014/main" id="{CC1744A8-3EA9-4C12-8658-2FB4A82AE5E3}"/>
+                <a16:creationId xmlns:a16="http://schemas.microsoft.com/office/drawing/2014/main" id="{5721B0A7-36B8-4369-B8E2-92CA78EE3867}"/>
               </a:ext>
             </a:extLst>
           </p:cNvPr>
@@ -7101,7 +8726,7 @@
           <p:cNvPr id="11" name="">
             <a:extLst xmlns:a="http://schemas.openxmlformats.org/drawingml/2006/main">
               <a:ext uri="{FF2B5EF4-FFF2-40B4-BE49-F238E27FC236}">
-                <a16:creationId xmlns:a16="http://schemas.microsoft.com/office/drawing/2014/main" id="{4E252041-F894-4093-B3A0-6256FA05CA93}"/>
+                <a16:creationId xmlns:a16="http://schemas.microsoft.com/office/drawing/2014/main" id="{9537C390-A31B-496A-91D8-26886B9A3C56}"/>
               </a:ext>
             </a:extLst>
           </p:cNvPr>
@@ -7134,7 +8759,7 @@
           <p:cNvPr id="12" name="">
             <a:extLst xmlns:a="http://schemas.openxmlformats.org/drawingml/2006/main">
               <a:ext uri="{FF2B5EF4-FFF2-40B4-BE49-F238E27FC236}">
-                <a16:creationId xmlns:a16="http://schemas.microsoft.com/office/drawing/2014/main" id="{C9523310-72C4-4290-BFA2-13F98D56D373}"/>
+                <a16:creationId xmlns:a16="http://schemas.microsoft.com/office/drawing/2014/main" id="{2DC474B4-2F19-4B08-A2F7-EC111F2936CE}"/>
               </a:ext>
             </a:extLst>
           </p:cNvPr>
@@ -7167,7 +8792,7 @@
           <p:cNvPr id="13" name="">
             <a:extLst xmlns:a="http://schemas.openxmlformats.org/drawingml/2006/main">
               <a:ext uri="{FF2B5EF4-FFF2-40B4-BE49-F238E27FC236}">
-                <a16:creationId xmlns:a16="http://schemas.microsoft.com/office/drawing/2014/main" id="{5555F0A9-B008-42A7-94D4-BFEAE60F0716}"/>
+                <a16:creationId xmlns:a16="http://schemas.microsoft.com/office/drawing/2014/main" id="{3950F8F9-C671-442B-8F8F-C1577BD50A76}"/>
               </a:ext>
             </a:extLst>
           </p:cNvPr>
@@ -7218,7 +8843,7 @@
           <p:cNvPr id="14" name="">
             <a:extLst xmlns:a="http://schemas.openxmlformats.org/drawingml/2006/main">
               <a:ext uri="{FF2B5EF4-FFF2-40B4-BE49-F238E27FC236}">
-                <a16:creationId xmlns:a16="http://schemas.microsoft.com/office/drawing/2014/main" id="{36207B53-FEE1-4CB2-A4E3-CD82D10407B0}"/>
+                <a16:creationId xmlns:a16="http://schemas.microsoft.com/office/drawing/2014/main" id="{4C0F5C8A-877D-494E-9564-406499780E57}"/>
               </a:ext>
             </a:extLst>
           </p:cNvPr>
@@ -7269,7 +8894,7 @@
           <p:cNvPr id="15" name="">
             <a:extLst xmlns:a="http://schemas.openxmlformats.org/drawingml/2006/main">
               <a:ext uri="{FF2B5EF4-FFF2-40B4-BE49-F238E27FC236}">
-                <a16:creationId xmlns:a16="http://schemas.microsoft.com/office/drawing/2014/main" id="{A5D83149-F2F9-406C-BB8E-09AD11410C9B}"/>
+                <a16:creationId xmlns:a16="http://schemas.microsoft.com/office/drawing/2014/main" id="{60B5EB52-2058-4493-984E-B795FB7F32E6}"/>
               </a:ext>
             </a:extLst>
           </p:cNvPr>
@@ -7302,7 +8927,7 @@
           <p:cNvPr id="16" name="">
             <a:extLst xmlns:a="http://schemas.openxmlformats.org/drawingml/2006/main">
               <a:ext uri="{FF2B5EF4-FFF2-40B4-BE49-F238E27FC236}">
-                <a16:creationId xmlns:a16="http://schemas.microsoft.com/office/drawing/2014/main" id="{D9924BB8-9A50-4E98-A9AC-D6937644B8D8}"/>
+                <a16:creationId xmlns:a16="http://schemas.microsoft.com/office/drawing/2014/main" id="{6B4E9FEE-7D55-4B7D-8351-325FDACDBD05}"/>
               </a:ext>
             </a:extLst>
           </p:cNvPr>
@@ -7335,7 +8960,7 @@
           <p:cNvPr id="17" name="">
             <a:extLst xmlns:a="http://schemas.openxmlformats.org/drawingml/2006/main">
               <a:ext uri="{FF2B5EF4-FFF2-40B4-BE49-F238E27FC236}">
-                <a16:creationId xmlns:a16="http://schemas.microsoft.com/office/drawing/2014/main" id="{98AE9770-38DD-479C-9E77-FD520CB80150}"/>
+                <a16:creationId xmlns:a16="http://schemas.microsoft.com/office/drawing/2014/main" id="{F9AC1656-7164-4C22-B616-D67466428742}"/>
               </a:ext>
             </a:extLst>
           </p:cNvPr>
@@ -7386,7 +9011,7 @@
           <p:cNvPr id="18" name="">
             <a:extLst xmlns:a="http://schemas.openxmlformats.org/drawingml/2006/main">
               <a:ext uri="{FF2B5EF4-FFF2-40B4-BE49-F238E27FC236}">
-                <a16:creationId xmlns:a16="http://schemas.microsoft.com/office/drawing/2014/main" id="{1837DBB5-4619-49FE-AD5E-396BE1612D43}"/>
+                <a16:creationId xmlns:a16="http://schemas.microsoft.com/office/drawing/2014/main" id="{A39E2018-7889-43E8-BA60-FA03ABBA6126}"/>
               </a:ext>
             </a:extLst>
           </p:cNvPr>
@@ -7437,7 +9062,7 @@
           <p:cNvPr id="19" name="">
             <a:extLst xmlns:a="http://schemas.openxmlformats.org/drawingml/2006/main">
               <a:ext uri="{FF2B5EF4-FFF2-40B4-BE49-F238E27FC236}">
-                <a16:creationId xmlns:a16="http://schemas.microsoft.com/office/drawing/2014/main" id="{3F261665-DEF7-466F-9C08-565CB6D0F692}"/>
+                <a16:creationId xmlns:a16="http://schemas.microsoft.com/office/drawing/2014/main" id="{449F55A4-DDE6-44BC-A3AF-65212CE8CACB}"/>
               </a:ext>
             </a:extLst>
           </p:cNvPr>
@@ -7470,7 +9095,7 @@
           <p:cNvPr id="20" name="">
             <a:extLst xmlns:a="http://schemas.openxmlformats.org/drawingml/2006/main">
               <a:ext uri="{FF2B5EF4-FFF2-40B4-BE49-F238E27FC236}">
-                <a16:creationId xmlns:a16="http://schemas.microsoft.com/office/drawing/2014/main" id="{F0AD0B22-7CEE-49B4-8C7C-D5834A144B6F}"/>
+                <a16:creationId xmlns:a16="http://schemas.microsoft.com/office/drawing/2014/main" id="{0802C6E3-45B6-45B8-B804-43521117A1FB}"/>
               </a:ext>
             </a:extLst>
           </p:cNvPr>
@@ -7503,7 +9128,7 @@
           <p:cNvPr id="21" name="">
             <a:extLst xmlns:a="http://schemas.openxmlformats.org/drawingml/2006/main">
               <a:ext uri="{FF2B5EF4-FFF2-40B4-BE49-F238E27FC236}">
-                <a16:creationId xmlns:a16="http://schemas.microsoft.com/office/drawing/2014/main" id="{85027DCE-B3ED-49AD-9DDC-BC2665128BC6}"/>
+                <a16:creationId xmlns:a16="http://schemas.microsoft.com/office/drawing/2014/main" id="{DC0E29BA-9E59-4D2A-8F5C-64FF500799AD}"/>
               </a:ext>
             </a:extLst>
           </p:cNvPr>
@@ -7554,7 +9179,7 @@
           <p:cNvPr id="22" name="">
             <a:extLst xmlns:a="http://schemas.openxmlformats.org/drawingml/2006/main">
               <a:ext uri="{FF2B5EF4-FFF2-40B4-BE49-F238E27FC236}">
-                <a16:creationId xmlns:a16="http://schemas.microsoft.com/office/drawing/2014/main" id="{F8059EC8-214E-428C-9D46-B89E7FEE68BB}"/>
+                <a16:creationId xmlns:a16="http://schemas.microsoft.com/office/drawing/2014/main" id="{D2DA855A-1751-4BC3-9955-04861A4F6DD1}"/>
               </a:ext>
             </a:extLst>
           </p:cNvPr>
@@ -7605,7 +9230,7 @@
           <p:cNvPr id="23" name="">
             <a:extLst xmlns:a="http://schemas.openxmlformats.org/drawingml/2006/main">
               <a:ext uri="{FF2B5EF4-FFF2-40B4-BE49-F238E27FC236}">
-                <a16:creationId xmlns:a16="http://schemas.microsoft.com/office/drawing/2014/main" id="{F9F7498D-DB44-41AE-941C-87D2CA1FF8F6}"/>
+                <a16:creationId xmlns:a16="http://schemas.microsoft.com/office/drawing/2014/main" id="{831A0DC7-30A5-4685-AC54-ED1B0C409CFA}"/>
               </a:ext>
             </a:extLst>
           </p:cNvPr>
@@ -7656,7 +9281,7 @@
           <p:cNvPr id="24" name="">
             <a:extLst xmlns:a="http://schemas.openxmlformats.org/drawingml/2006/main">
               <a:ext uri="{FF2B5EF4-FFF2-40B4-BE49-F238E27FC236}">
-                <a16:creationId xmlns:a16="http://schemas.microsoft.com/office/drawing/2014/main" id="{D33CC3A6-AB7E-40E1-99C5-29C2C275CCFE}"/>
+                <a16:creationId xmlns:a16="http://schemas.microsoft.com/office/drawing/2014/main" id="{72443B55-8057-4DB8-9AE9-EFFF8D5A451F}"/>
               </a:ext>
             </a:extLst>
           </p:cNvPr>
@@ -7707,7 +9332,7 @@
           <p:cNvPr id="25" name="">
             <a:extLst xmlns:a="http://schemas.openxmlformats.org/drawingml/2006/main">
               <a:ext uri="{FF2B5EF4-FFF2-40B4-BE49-F238E27FC236}">
-                <a16:creationId xmlns:a16="http://schemas.microsoft.com/office/drawing/2014/main" id="{F22671B8-89EB-407B-9951-3D5B176D9019}"/>
+                <a16:creationId xmlns:a16="http://schemas.microsoft.com/office/drawing/2014/main" id="{302DD8B8-2607-4CEE-A0B5-82FB6DEA2389}"/>
               </a:ext>
             </a:extLst>
           </p:cNvPr>
@@ -7756,7 +9381,7 @@
     </p:spTree>
     <p:extLst>
       <p:ext uri="{BB962C8B-B14F-4D97-AF65-F5344CB8AC3E}">
-        <p14:creationId xmlns:p14="http://schemas.microsoft.com/office/powerpoint/2010/main" val="2103248818"/>
+        <p14:creationId xmlns:p14="http://schemas.microsoft.com/office/powerpoint/2010/main" val="1003413164"/>
       </p:ext>
     </p:extLst>
   </p:cSld>
@@ -7780,7 +9405,7 @@
           <p:cNvPr id="1" name="">
             <a:extLst xmlns:a="http://schemas.openxmlformats.org/drawingml/2006/main">
               <a:ext uri="{FF2B5EF4-FFF2-40B4-BE49-F238E27FC236}">
-                <a16:creationId xmlns:a16="http://schemas.microsoft.com/office/drawing/2014/main" id="{FC18075D-02F8-4380-B40E-CF9FF4D900DD}"/>
+                <a16:creationId xmlns:a16="http://schemas.microsoft.com/office/drawing/2014/main" id="{2992A29F-F8B1-432F-A5DE-CB58F1F5FA2D}"/>
               </a:ext>
             </a:extLst>
           </p:cNvPr>
@@ -7813,7 +9438,7 @@
           <p:cNvPr id="2" name="">
             <a:extLst xmlns:a="http://schemas.openxmlformats.org/drawingml/2006/main">
               <a:ext uri="{FF2B5EF4-FFF2-40B4-BE49-F238E27FC236}">
-                <a16:creationId xmlns:a16="http://schemas.microsoft.com/office/drawing/2014/main" id="{3262EBE4-C4ED-4D7D-86B4-6336C39E2E64}"/>
+                <a16:creationId xmlns:a16="http://schemas.microsoft.com/office/drawing/2014/main" id="{82933334-9B97-4CE1-B9F0-CEB3AA299773}"/>
               </a:ext>
             </a:extLst>
           </p:cNvPr>
@@ -7864,7 +9489,7 @@
           <p:cNvPr id="3" name="">
             <a:extLst xmlns:a="http://schemas.openxmlformats.org/drawingml/2006/main">
               <a:ext uri="{FF2B5EF4-FFF2-40B4-BE49-F238E27FC236}">
-                <a16:creationId xmlns:a16="http://schemas.microsoft.com/office/drawing/2014/main" id="{C1890C85-28FC-41C6-B225-687286DD14ED}"/>
+                <a16:creationId xmlns:a16="http://schemas.microsoft.com/office/drawing/2014/main" id="{3A9BCE7F-30A1-43F2-9FEF-AAB4FBA6EBB5}"/>
               </a:ext>
             </a:extLst>
           </p:cNvPr>
@@ -7915,7 +9540,7 @@
           <p:cNvPr id="4" name="">
             <a:extLst xmlns:a="http://schemas.openxmlformats.org/drawingml/2006/main">
               <a:ext uri="{FF2B5EF4-FFF2-40B4-BE49-F238E27FC236}">
-                <a16:creationId xmlns:a16="http://schemas.microsoft.com/office/drawing/2014/main" id="{2EBCA1BC-BD5A-4714-A8CA-7394D60C9CA4}"/>
+                <a16:creationId xmlns:a16="http://schemas.microsoft.com/office/drawing/2014/main" id="{0F2BC9D4-C0CB-47D1-BE5C-73B43F590D7B}"/>
               </a:ext>
             </a:extLst>
           </p:cNvPr>
@@ -7948,7 +9573,7 @@
           <p:cNvPr id="5" name="">
             <a:extLst xmlns:a="http://schemas.openxmlformats.org/drawingml/2006/main">
               <a:ext uri="{FF2B5EF4-FFF2-40B4-BE49-F238E27FC236}">
-                <a16:creationId xmlns:a16="http://schemas.microsoft.com/office/drawing/2014/main" id="{36FAFB7D-8184-4003-9AC0-16BAE3F95AA8}"/>
+                <a16:creationId xmlns:a16="http://schemas.microsoft.com/office/drawing/2014/main" id="{8AA8EFD2-67E4-4536-841D-51CE0215697B}"/>
               </a:ext>
             </a:extLst>
           </p:cNvPr>
@@ -7981,7 +9606,7 @@
           <p:cNvPr id="6" name="">
             <a:extLst xmlns:a="http://schemas.openxmlformats.org/drawingml/2006/main">
               <a:ext uri="{FF2B5EF4-FFF2-40B4-BE49-F238E27FC236}">
-                <a16:creationId xmlns:a16="http://schemas.microsoft.com/office/drawing/2014/main" id="{E12EC5CA-DF8C-4A5F-BDE3-4863F0351F4A}"/>
+                <a16:creationId xmlns:a16="http://schemas.microsoft.com/office/drawing/2014/main" id="{D313F0E5-4D47-4D45-BFE5-590418D6554F}"/>
               </a:ext>
             </a:extLst>
           </p:cNvPr>
@@ -8022,7 +9647,7 @@
                   <a:srgbClr val="172033"/>
                 </a:solidFill>
               </a:rPr>
-              <a:t>Job-costed accounts</a:t>
+              <a:t>Job costing</a:t>
             </a:r>
           </a:p>
         </p:txBody>
@@ -8032,7 +9657,7 @@
           <p:cNvPr id="7" name="">
             <a:extLst xmlns:a="http://schemas.openxmlformats.org/drawingml/2006/main">
               <a:ext uri="{FF2B5EF4-FFF2-40B4-BE49-F238E27FC236}">
-                <a16:creationId xmlns:a16="http://schemas.microsoft.com/office/drawing/2014/main" id="{FE85D634-26D9-482A-BF74-A11E6E06E0A1}"/>
+                <a16:creationId xmlns:a16="http://schemas.microsoft.com/office/drawing/2014/main" id="{867D8755-EB8E-41F4-94AB-B725DB5EFB88}"/>
               </a:ext>
             </a:extLst>
           </p:cNvPr>
@@ -8073,7 +9698,7 @@
                   <a:srgbClr val="5F6F86"/>
                 </a:solidFill>
               </a:rPr>
-              <a:t>Construction chart of accounts: retainage, WIP, change orders, and job-cost categories.</a:t>
+              <a:t>Profit and margin per job, built from invoices, bills, and expenses tagged with the job.</a:t>
             </a:r>
           </a:p>
         </p:txBody>
@@ -8083,7 +9708,7 @@
           <p:cNvPr id="8" name="">
             <a:extLst xmlns:a="http://schemas.openxmlformats.org/drawingml/2006/main">
               <a:ext uri="{FF2B5EF4-FFF2-40B4-BE49-F238E27FC236}">
-                <a16:creationId xmlns:a16="http://schemas.microsoft.com/office/drawing/2014/main" id="{56D5BE23-E4F4-42C3-8EF4-31087749E4DD}"/>
+                <a16:creationId xmlns:a16="http://schemas.microsoft.com/office/drawing/2014/main" id="{74B11FDB-EDF5-433C-8C14-7FDBCD864172}"/>
               </a:ext>
             </a:extLst>
           </p:cNvPr>
@@ -8116,7 +9741,7 @@
           <p:cNvPr id="9" name="">
             <a:extLst xmlns:a="http://schemas.openxmlformats.org/drawingml/2006/main">
               <a:ext uri="{FF2B5EF4-FFF2-40B4-BE49-F238E27FC236}">
-                <a16:creationId xmlns:a16="http://schemas.microsoft.com/office/drawing/2014/main" id="{036AA0E6-CA3E-49C5-9813-B8835794982B}"/>
+                <a16:creationId xmlns:a16="http://schemas.microsoft.com/office/drawing/2014/main" id="{17F78B48-2CA8-4D18-BBD0-0ACFEFCA1BAB}"/>
               </a:ext>
             </a:extLst>
           </p:cNvPr>
@@ -8149,7 +9774,7 @@
           <p:cNvPr id="10" name="">
             <a:extLst xmlns:a="http://schemas.openxmlformats.org/drawingml/2006/main">
               <a:ext uri="{FF2B5EF4-FFF2-40B4-BE49-F238E27FC236}">
-                <a16:creationId xmlns:a16="http://schemas.microsoft.com/office/drawing/2014/main" id="{5C140769-CB3E-4FD5-B6A6-C9AE493A8B5E}"/>
+                <a16:creationId xmlns:a16="http://schemas.microsoft.com/office/drawing/2014/main" id="{B7606BC4-55B9-4F97-BE04-B8402D339084}"/>
               </a:ext>
             </a:extLst>
           </p:cNvPr>
@@ -8200,7 +9825,7 @@
           <p:cNvPr id="11" name="">
             <a:extLst xmlns:a="http://schemas.openxmlformats.org/drawingml/2006/main">
               <a:ext uri="{FF2B5EF4-FFF2-40B4-BE49-F238E27FC236}">
-                <a16:creationId xmlns:a16="http://schemas.microsoft.com/office/drawing/2014/main" id="{64BB9251-00D2-45D0-B5AC-4EA1C396E051}"/>
+                <a16:creationId xmlns:a16="http://schemas.microsoft.com/office/drawing/2014/main" id="{CF2DAEF7-5FF0-42C9-94A9-A9473D181F3B}"/>
               </a:ext>
             </a:extLst>
           </p:cNvPr>
@@ -8241,7 +9866,7 @@
                   <a:srgbClr val="5F6F86"/>
                 </a:solidFill>
               </a:rPr>
-              <a:t>Invoice customers from won quotes, record payments, and watch A/R aging buckets.</a:t>
+              <a:t>Invoice customers from won quotes, record payments and credit memos, watch A/R aging.</a:t>
             </a:r>
           </a:p>
         </p:txBody>
@@ -8251,7 +9876,7 @@
           <p:cNvPr id="12" name="">
             <a:extLst xmlns:a="http://schemas.openxmlformats.org/drawingml/2006/main">
               <a:ext uri="{FF2B5EF4-FFF2-40B4-BE49-F238E27FC236}">
-                <a16:creationId xmlns:a16="http://schemas.microsoft.com/office/drawing/2014/main" id="{C1E23BFF-6B03-47C7-9018-F7CDAB50162B}"/>
+                <a16:creationId xmlns:a16="http://schemas.microsoft.com/office/drawing/2014/main" id="{AED65E41-6B65-4953-A791-AFBF4DFA8CCE}"/>
               </a:ext>
             </a:extLst>
           </p:cNvPr>
@@ -8284,7 +9909,7 @@
           <p:cNvPr id="13" name="">
             <a:extLst xmlns:a="http://schemas.openxmlformats.org/drawingml/2006/main">
               <a:ext uri="{FF2B5EF4-FFF2-40B4-BE49-F238E27FC236}">
-                <a16:creationId xmlns:a16="http://schemas.microsoft.com/office/drawing/2014/main" id="{1ED03AF1-9D7B-4B2C-8EA8-B14EA2B76132}"/>
+                <a16:creationId xmlns:a16="http://schemas.microsoft.com/office/drawing/2014/main" id="{EB97B9DC-0D89-46DD-AF37-BD73B518FD59}"/>
               </a:ext>
             </a:extLst>
           </p:cNvPr>
@@ -8317,7 +9942,7 @@
           <p:cNvPr id="14" name="">
             <a:extLst xmlns:a="http://schemas.openxmlformats.org/drawingml/2006/main">
               <a:ext uri="{FF2B5EF4-FFF2-40B4-BE49-F238E27FC236}">
-                <a16:creationId xmlns:a16="http://schemas.microsoft.com/office/drawing/2014/main" id="{125945A9-E59B-4523-8E13-6408439B82D2}"/>
+                <a16:creationId xmlns:a16="http://schemas.microsoft.com/office/drawing/2014/main" id="{9FF1B27A-9AFB-44D8-B4C2-22CE10845A6C}"/>
               </a:ext>
             </a:extLst>
           </p:cNvPr>
@@ -8368,7 +9993,7 @@
           <p:cNvPr id="15" name="">
             <a:extLst xmlns:a="http://schemas.openxmlformats.org/drawingml/2006/main">
               <a:ext uri="{FF2B5EF4-FFF2-40B4-BE49-F238E27FC236}">
-                <a16:creationId xmlns:a16="http://schemas.microsoft.com/office/drawing/2014/main" id="{B3C1ED65-D1BB-455E-984F-C6F14838E7EE}"/>
+                <a16:creationId xmlns:a16="http://schemas.microsoft.com/office/drawing/2014/main" id="{F1649DE6-3E0B-47BB-B187-8756780ACC1E}"/>
               </a:ext>
             </a:extLst>
           </p:cNvPr>
@@ -8409,7 +10034,7 @@
                   <a:srgbClr val="5F6F86"/>
                 </a:solidFill>
               </a:rPr>
-              <a:t>Enter vendor bills, pay them, and watch what Raves owes with A/P aging.</a:t>
+              <a:t>Vendor bills, payments, vendor credits, one-click expense entry, and A/P aging.</a:t>
             </a:r>
           </a:p>
         </p:txBody>
@@ -8419,7 +10044,7 @@
           <p:cNvPr id="16" name="">
             <a:extLst xmlns:a="http://schemas.openxmlformats.org/drawingml/2006/main">
               <a:ext uri="{FF2B5EF4-FFF2-40B4-BE49-F238E27FC236}">
-                <a16:creationId xmlns:a16="http://schemas.microsoft.com/office/drawing/2014/main" id="{3776FE09-5B35-4B4A-BF19-6C1654B3DC00}"/>
+                <a16:creationId xmlns:a16="http://schemas.microsoft.com/office/drawing/2014/main" id="{86F864C3-E284-4387-9F69-DA0930A9D57B}"/>
               </a:ext>
             </a:extLst>
           </p:cNvPr>
@@ -8452,7 +10077,7 @@
           <p:cNvPr id="17" name="">
             <a:extLst xmlns:a="http://schemas.openxmlformats.org/drawingml/2006/main">
               <a:ext uri="{FF2B5EF4-FFF2-40B4-BE49-F238E27FC236}">
-                <a16:creationId xmlns:a16="http://schemas.microsoft.com/office/drawing/2014/main" id="{C52399F8-7B0D-4121-A5B8-F69B6914CB89}"/>
+                <a16:creationId xmlns:a16="http://schemas.microsoft.com/office/drawing/2014/main" id="{9BDDE790-0148-4898-88CF-B5FD1207807E}"/>
               </a:ext>
             </a:extLst>
           </p:cNvPr>
@@ -8485,7 +10110,7 @@
           <p:cNvPr id="18" name="">
             <a:extLst xmlns:a="http://schemas.openxmlformats.org/drawingml/2006/main">
               <a:ext uri="{FF2B5EF4-FFF2-40B4-BE49-F238E27FC236}">
-                <a16:creationId xmlns:a16="http://schemas.microsoft.com/office/drawing/2014/main" id="{024EFC3E-F498-49C6-9BD5-58A2FCE22372}"/>
+                <a16:creationId xmlns:a16="http://schemas.microsoft.com/office/drawing/2014/main" id="{99608F69-D998-430D-AA43-7B1107E8DFB3}"/>
               </a:ext>
             </a:extLst>
           </p:cNvPr>
@@ -8526,7 +10151,7 @@
                   <a:srgbClr val="172033"/>
                 </a:solidFill>
               </a:rPr>
-              <a:t>Ledger &amp; trial balance</a:t>
+              <a:t>Ledger &amp; registers</a:t>
             </a:r>
           </a:p>
         </p:txBody>
@@ -8536,7 +10161,7 @@
           <p:cNvPr id="19" name="">
             <a:extLst xmlns:a="http://schemas.openxmlformats.org/drawingml/2006/main">
               <a:ext uri="{FF2B5EF4-FFF2-40B4-BE49-F238E27FC236}">
-                <a16:creationId xmlns:a16="http://schemas.microsoft.com/office/drawing/2014/main" id="{B08AC107-3146-4B99-A582-2CD030B5DA5B}"/>
+                <a16:creationId xmlns:a16="http://schemas.microsoft.com/office/drawing/2014/main" id="{1B0C5DFB-6D33-4B22-9667-C9EC1713CD4D}"/>
               </a:ext>
             </a:extLst>
           </p:cNvPr>
@@ -8577,7 +10202,7 @@
                   <a:srgbClr val="5F6F86"/>
                 </a:solidFill>
               </a:rPr>
-              <a:t>Double-entry journal and a live trial balance that always ties out to the penny.</a:t>
+              <a:t>Double-entry journal, a live trial balance, and a running-balance register per account.</a:t>
             </a:r>
           </a:p>
         </p:txBody>
@@ -8587,7 +10212,7 @@
           <p:cNvPr id="20" name="">
             <a:extLst xmlns:a="http://schemas.openxmlformats.org/drawingml/2006/main">
               <a:ext uri="{FF2B5EF4-FFF2-40B4-BE49-F238E27FC236}">
-                <a16:creationId xmlns:a16="http://schemas.microsoft.com/office/drawing/2014/main" id="{12AFEA6E-6CA4-4243-BF1A-EB213E9062B2}"/>
+                <a16:creationId xmlns:a16="http://schemas.microsoft.com/office/drawing/2014/main" id="{4856969F-30EA-4B57-84FC-678F2D506008}"/>
               </a:ext>
             </a:extLst>
           </p:cNvPr>
@@ -8620,7 +10245,7 @@
           <p:cNvPr id="21" name="">
             <a:extLst xmlns:a="http://schemas.openxmlformats.org/drawingml/2006/main">
               <a:ext uri="{FF2B5EF4-FFF2-40B4-BE49-F238E27FC236}">
-                <a16:creationId xmlns:a16="http://schemas.microsoft.com/office/drawing/2014/main" id="{3C4FC478-B722-48E8-8B66-4E209F511261}"/>
+                <a16:creationId xmlns:a16="http://schemas.microsoft.com/office/drawing/2014/main" id="{37A1AA7E-BB41-43C7-81C1-D5C55F02839E}"/>
               </a:ext>
             </a:extLst>
           </p:cNvPr>
@@ -8653,7 +10278,7 @@
           <p:cNvPr id="22" name="">
             <a:extLst xmlns:a="http://schemas.openxmlformats.org/drawingml/2006/main">
               <a:ext uri="{FF2B5EF4-FFF2-40B4-BE49-F238E27FC236}">
-                <a16:creationId xmlns:a16="http://schemas.microsoft.com/office/drawing/2014/main" id="{460DA44A-F0B6-42D8-A0C9-28088C5C1E2D}"/>
+                <a16:creationId xmlns:a16="http://schemas.microsoft.com/office/drawing/2014/main" id="{54EEA548-FDB2-4B62-93D1-C99DD87E5838}"/>
               </a:ext>
             </a:extLst>
           </p:cNvPr>
@@ -8694,7 +10319,7 @@
                   <a:srgbClr val="172033"/>
                 </a:solidFill>
               </a:rPr>
-              <a:t>Statements</a:t>
+              <a:t>Statements &amp; reports</a:t>
             </a:r>
           </a:p>
         </p:txBody>
@@ -8704,7 +10329,7 @@
           <p:cNvPr id="23" name="">
             <a:extLst xmlns:a="http://schemas.openxmlformats.org/drawingml/2006/main">
               <a:ext uri="{FF2B5EF4-FFF2-40B4-BE49-F238E27FC236}">
-                <a16:creationId xmlns:a16="http://schemas.microsoft.com/office/drawing/2014/main" id="{9B345C2A-2971-40AB-AF38-8127F5C5EA43}"/>
+                <a16:creationId xmlns:a16="http://schemas.microsoft.com/office/drawing/2014/main" id="{B9E258B4-6C5B-47BF-8D64-0FB992A23C8B}"/>
               </a:ext>
             </a:extLst>
           </p:cNvPr>
@@ -8745,7 +10370,7 @@
                   <a:srgbClr val="5F6F86"/>
                 </a:solidFill>
               </a:rPr>
-              <a:t>Income statement and balance sheet on demand, no re-keying into other software.</a:t>
+              <a:t>Income statement, balance sheet, cash flow, and P&amp;L by month — print-ready on demand.</a:t>
             </a:r>
           </a:p>
         </p:txBody>
@@ -8755,7 +10380,7 @@
           <p:cNvPr id="24" name="">
             <a:extLst xmlns:a="http://schemas.openxmlformats.org/drawingml/2006/main">
               <a:ext uri="{FF2B5EF4-FFF2-40B4-BE49-F238E27FC236}">
-                <a16:creationId xmlns:a16="http://schemas.microsoft.com/office/drawing/2014/main" id="{AEB25C1B-8503-4A08-9AE9-856B3EC74667}"/>
+                <a16:creationId xmlns:a16="http://schemas.microsoft.com/office/drawing/2014/main" id="{235587DF-60EF-48E5-95A7-F44882895873}"/>
               </a:ext>
             </a:extLst>
           </p:cNvPr>
@@ -8788,7 +10413,7 @@
           <p:cNvPr id="25" name="">
             <a:extLst xmlns:a="http://schemas.openxmlformats.org/drawingml/2006/main">
               <a:ext uri="{FF2B5EF4-FFF2-40B4-BE49-F238E27FC236}">
-                <a16:creationId xmlns:a16="http://schemas.microsoft.com/office/drawing/2014/main" id="{6358FD8C-055A-4BAD-B5A6-842CA633701B}"/>
+                <a16:creationId xmlns:a16="http://schemas.microsoft.com/office/drawing/2014/main" id="{A49E3ED9-EA30-4162-8374-06698CBEC84D}"/>
               </a:ext>
             </a:extLst>
           </p:cNvPr>
@@ -8821,7 +10446,7 @@
           <p:cNvPr id="26" name="">
             <a:extLst xmlns:a="http://schemas.openxmlformats.org/drawingml/2006/main">
               <a:ext uri="{FF2B5EF4-FFF2-40B4-BE49-F238E27FC236}">
-                <a16:creationId xmlns:a16="http://schemas.microsoft.com/office/drawing/2014/main" id="{E980C319-8635-46C5-A426-60DDE4EE9E3C}"/>
+                <a16:creationId xmlns:a16="http://schemas.microsoft.com/office/drawing/2014/main" id="{A2E5AE06-B7CD-4812-B353-5DB5BD687311}"/>
               </a:ext>
             </a:extLst>
           </p:cNvPr>
@@ -8872,7 +10497,7 @@
           <p:cNvPr id="27" name="">
             <a:extLst xmlns:a="http://schemas.openxmlformats.org/drawingml/2006/main">
               <a:ext uri="{FF2B5EF4-FFF2-40B4-BE49-F238E27FC236}">
-                <a16:creationId xmlns:a16="http://schemas.microsoft.com/office/drawing/2014/main" id="{4533ECCF-0DCB-491B-820D-BD9BC5F78702}"/>
+                <a16:creationId xmlns:a16="http://schemas.microsoft.com/office/drawing/2014/main" id="{FA944C3E-BDF7-4CA6-9178-E1827CBB34BD}"/>
               </a:ext>
             </a:extLst>
           </p:cNvPr>
@@ -8913,7 +10538,7 @@
                   <a:srgbClr val="5F6F86"/>
                 </a:solidFill>
               </a:rPr>
-              <a:t>Lock a period when it is final, and send branded invoice and bill PDFs.</a:t>
+              <a:t>Lock a period when it is final, and send branded invoice, bill, and statement PDFs.</a:t>
             </a:r>
           </a:p>
         </p:txBody>
@@ -8923,7 +10548,7 @@
           <p:cNvPr id="28" name="">
             <a:extLst xmlns:a="http://schemas.openxmlformats.org/drawingml/2006/main">
               <a:ext uri="{FF2B5EF4-FFF2-40B4-BE49-F238E27FC236}">
-                <a16:creationId xmlns:a16="http://schemas.microsoft.com/office/drawing/2014/main" id="{B8F3F145-494F-468B-B8E2-DFA401203E43}"/>
+                <a16:creationId xmlns:a16="http://schemas.microsoft.com/office/drawing/2014/main" id="{CAD88CEC-B7E4-4F85-9A73-BF067405F171}"/>
               </a:ext>
             </a:extLst>
           </p:cNvPr>
@@ -8974,7 +10599,7 @@
           <p:cNvPr id="29" name="">
             <a:extLst xmlns:a="http://schemas.openxmlformats.org/drawingml/2006/main">
               <a:ext uri="{FF2B5EF4-FFF2-40B4-BE49-F238E27FC236}">
-                <a16:creationId xmlns:a16="http://schemas.microsoft.com/office/drawing/2014/main" id="{6B259483-FCDE-428A-9C0C-BC8FE09714BE}"/>
+                <a16:creationId xmlns:a16="http://schemas.microsoft.com/office/drawing/2014/main" id="{F359EC9D-2329-4331-8539-E57AD1BDCABE}"/>
               </a:ext>
             </a:extLst>
           </p:cNvPr>
@@ -9023,7 +10648,7 @@
     </p:spTree>
     <p:extLst>
       <p:ext uri="{BB962C8B-B14F-4D97-AF65-F5344CB8AC3E}">
-        <p14:creationId xmlns:p14="http://schemas.microsoft.com/office/powerpoint/2010/main" val="1542553388"/>
+        <p14:creationId xmlns:p14="http://schemas.microsoft.com/office/powerpoint/2010/main" val="246501900"/>
       </p:ext>
     </p:extLst>
   </p:cSld>
@@ -9047,7 +10672,7 @@
           <p:cNvPr id="1" name="">
             <a:extLst xmlns:a="http://schemas.openxmlformats.org/drawingml/2006/main">
               <a:ext uri="{FF2B5EF4-FFF2-40B4-BE49-F238E27FC236}">
-                <a16:creationId xmlns:a16="http://schemas.microsoft.com/office/drawing/2014/main" id="{539FE15F-1E35-43F8-A43D-7CEA40CEE423}"/>
+                <a16:creationId xmlns:a16="http://schemas.microsoft.com/office/drawing/2014/main" id="{4AF70CFB-89BE-4EC5-9DF2-94D044F4A600}"/>
               </a:ext>
             </a:extLst>
           </p:cNvPr>
@@ -9080,7 +10705,7 @@
           <p:cNvPr id="2" name="">
             <a:extLst xmlns:a="http://schemas.openxmlformats.org/drawingml/2006/main">
               <a:ext uri="{FF2B5EF4-FFF2-40B4-BE49-F238E27FC236}">
-                <a16:creationId xmlns:a16="http://schemas.microsoft.com/office/drawing/2014/main" id="{F61958BC-8D5A-4F60-A839-27E6E86AB7EE}"/>
+                <a16:creationId xmlns:a16="http://schemas.microsoft.com/office/drawing/2014/main" id="{C7185B00-0CDC-43D6-9BAB-2CE6CD849F42}"/>
               </a:ext>
             </a:extLst>
           </p:cNvPr>
@@ -9117,7 +10742,7 @@
           <p:nvPr/>
         </p:nvPicPr>
         <p:blipFill>
-          <a:blip xmlns:r="http://schemas.openxmlformats.org/officeDocument/2006/relationships" xmlns:a="http://schemas.openxmlformats.org/drawingml/2006/main" r:embed="Re1f126493bdb4c12"/>
+          <a:blip xmlns:r="http://schemas.openxmlformats.org/officeDocument/2006/relationships" xmlns:a="http://schemas.openxmlformats.org/drawingml/2006/main" r:embed="R85c1a5c1a1754a0a"/>
           <a:stretch xmlns:a="http://schemas.openxmlformats.org/drawingml/2006/main"/>
         </p:blipFill>
         <p:spPr>
@@ -9135,7 +10760,7 @@
           <p:cNvPr id="4" name="">
             <a:extLst xmlns:a="http://schemas.openxmlformats.org/drawingml/2006/main">
               <a:ext uri="{FF2B5EF4-FFF2-40B4-BE49-F238E27FC236}">
-                <a16:creationId xmlns:a16="http://schemas.microsoft.com/office/drawing/2014/main" id="{7B4B6046-5B41-4BDB-B682-613298D7C107}"/>
+                <a16:creationId xmlns:a16="http://schemas.microsoft.com/office/drawing/2014/main" id="{79192076-D2ED-4906-BBC4-10D9E3012B75}"/>
               </a:ext>
             </a:extLst>
           </p:cNvPr>
@@ -9186,7 +10811,7 @@
           <p:cNvPr id="5" name="">
             <a:extLst xmlns:a="http://schemas.openxmlformats.org/drawingml/2006/main">
               <a:ext uri="{FF2B5EF4-FFF2-40B4-BE49-F238E27FC236}">
-                <a16:creationId xmlns:a16="http://schemas.microsoft.com/office/drawing/2014/main" id="{B773E7D5-650C-4392-98CA-150BAA066751}"/>
+                <a16:creationId xmlns:a16="http://schemas.microsoft.com/office/drawing/2014/main" id="{0575AFF9-B6DB-40FE-A885-66BC33FB8E48}"/>
               </a:ext>
             </a:extLst>
           </p:cNvPr>
@@ -9237,7 +10862,7 @@
           <p:cNvPr id="6" name="">
             <a:extLst xmlns:a="http://schemas.openxmlformats.org/drawingml/2006/main">
               <a:ext uri="{FF2B5EF4-FFF2-40B4-BE49-F238E27FC236}">
-                <a16:creationId xmlns:a16="http://schemas.microsoft.com/office/drawing/2014/main" id="{3F3516E7-1133-4325-93AD-B3C02AAA3816}"/>
+                <a16:creationId xmlns:a16="http://schemas.microsoft.com/office/drawing/2014/main" id="{D5BD4BCF-8BC9-4FA7-9775-83A518AB87C2}"/>
               </a:ext>
             </a:extLst>
           </p:cNvPr>
@@ -9288,7 +10913,7 @@
           <p:cNvPr id="7" name="">
             <a:extLst xmlns:a="http://schemas.openxmlformats.org/drawingml/2006/main">
               <a:ext uri="{FF2B5EF4-FFF2-40B4-BE49-F238E27FC236}">
-                <a16:creationId xmlns:a16="http://schemas.microsoft.com/office/drawing/2014/main" id="{EEFE2C49-0202-4A8B-88D5-05929B6E7877}"/>
+                <a16:creationId xmlns:a16="http://schemas.microsoft.com/office/drawing/2014/main" id="{89F55AFD-C62F-413C-9D70-80A366E16636}"/>
               </a:ext>
             </a:extLst>
           </p:cNvPr>
@@ -9321,7 +10946,7 @@
           <p:cNvPr id="8" name="">
             <a:extLst xmlns:a="http://schemas.openxmlformats.org/drawingml/2006/main">
               <a:ext uri="{FF2B5EF4-FFF2-40B4-BE49-F238E27FC236}">
-                <a16:creationId xmlns:a16="http://schemas.microsoft.com/office/drawing/2014/main" id="{48736093-24C5-450C-8032-CA978CAABC31}"/>
+                <a16:creationId xmlns:a16="http://schemas.microsoft.com/office/drawing/2014/main" id="{9E1B1BD7-AED7-4206-A739-DC82F134C3F5}"/>
               </a:ext>
             </a:extLst>
           </p:cNvPr>
@@ -9354,7 +10979,7 @@
           <p:cNvPr id="9" name="">
             <a:extLst xmlns:a="http://schemas.openxmlformats.org/drawingml/2006/main">
               <a:ext uri="{FF2B5EF4-FFF2-40B4-BE49-F238E27FC236}">
-                <a16:creationId xmlns:a16="http://schemas.microsoft.com/office/drawing/2014/main" id="{5EB1E862-094D-41E7-8EC4-9326F2527506}"/>
+                <a16:creationId xmlns:a16="http://schemas.microsoft.com/office/drawing/2014/main" id="{EAE482F9-CCCC-46AA-A7AE-5B2C39DFC49E}"/>
               </a:ext>
             </a:extLst>
           </p:cNvPr>
@@ -9405,7 +11030,7 @@
           <p:cNvPr id="10" name="">
             <a:extLst xmlns:a="http://schemas.openxmlformats.org/drawingml/2006/main">
               <a:ext uri="{FF2B5EF4-FFF2-40B4-BE49-F238E27FC236}">
-                <a16:creationId xmlns:a16="http://schemas.microsoft.com/office/drawing/2014/main" id="{EDF17C03-2771-4B5F-8884-97E65A0AB7F4}"/>
+                <a16:creationId xmlns:a16="http://schemas.microsoft.com/office/drawing/2014/main" id="{309D37EA-BAAF-41E8-8AF5-2D2A2A8E6F58}"/>
               </a:ext>
             </a:extLst>
           </p:cNvPr>
@@ -9456,7 +11081,7 @@
           <p:cNvPr id="11" name="">
             <a:extLst xmlns:a="http://schemas.openxmlformats.org/drawingml/2006/main">
               <a:ext uri="{FF2B5EF4-FFF2-40B4-BE49-F238E27FC236}">
-                <a16:creationId xmlns:a16="http://schemas.microsoft.com/office/drawing/2014/main" id="{B3AFFA96-319D-4149-9017-9198CFB1FA38}"/>
+                <a16:creationId xmlns:a16="http://schemas.microsoft.com/office/drawing/2014/main" id="{1FBAE6C3-4135-40A2-8F6F-6E7F30573B22}"/>
               </a:ext>
             </a:extLst>
           </p:cNvPr>
@@ -9489,7 +11114,7 @@
           <p:cNvPr id="12" name="">
             <a:extLst xmlns:a="http://schemas.openxmlformats.org/drawingml/2006/main">
               <a:ext uri="{FF2B5EF4-FFF2-40B4-BE49-F238E27FC236}">
-                <a16:creationId xmlns:a16="http://schemas.microsoft.com/office/drawing/2014/main" id="{002D5784-0AB1-4351-87B9-FDB792687E39}"/>
+                <a16:creationId xmlns:a16="http://schemas.microsoft.com/office/drawing/2014/main" id="{0C31786B-66D3-4AED-B817-3229B0A80090}"/>
               </a:ext>
             </a:extLst>
           </p:cNvPr>
@@ -9522,7 +11147,7 @@
           <p:cNvPr id="13" name="">
             <a:extLst xmlns:a="http://schemas.openxmlformats.org/drawingml/2006/main">
               <a:ext uri="{FF2B5EF4-FFF2-40B4-BE49-F238E27FC236}">
-                <a16:creationId xmlns:a16="http://schemas.microsoft.com/office/drawing/2014/main" id="{D0941BA1-FECE-4496-A3B2-4523C008D980}"/>
+                <a16:creationId xmlns:a16="http://schemas.microsoft.com/office/drawing/2014/main" id="{BFF79351-1DE9-4E12-9683-C9F6B174FE6A}"/>
               </a:ext>
             </a:extLst>
           </p:cNvPr>
@@ -9573,7 +11198,7 @@
           <p:cNvPr id="14" name="">
             <a:extLst xmlns:a="http://schemas.openxmlformats.org/drawingml/2006/main">
               <a:ext uri="{FF2B5EF4-FFF2-40B4-BE49-F238E27FC236}">
-                <a16:creationId xmlns:a16="http://schemas.microsoft.com/office/drawing/2014/main" id="{1CA8DBC8-8455-4ED3-9E02-5FB4078B7E78}"/>
+                <a16:creationId xmlns:a16="http://schemas.microsoft.com/office/drawing/2014/main" id="{87FC0735-7B23-4153-BAAE-129121C9F5B0}"/>
               </a:ext>
             </a:extLst>
           </p:cNvPr>
@@ -9624,7 +11249,7 @@
           <p:cNvPr id="15" name="">
             <a:extLst xmlns:a="http://schemas.openxmlformats.org/drawingml/2006/main">
               <a:ext uri="{FF2B5EF4-FFF2-40B4-BE49-F238E27FC236}">
-                <a16:creationId xmlns:a16="http://schemas.microsoft.com/office/drawing/2014/main" id="{F6AECF66-BD09-4042-9EAF-B887ABE07E01}"/>
+                <a16:creationId xmlns:a16="http://schemas.microsoft.com/office/drawing/2014/main" id="{7693937E-5629-4710-BD4E-B7752C978A0B}"/>
               </a:ext>
             </a:extLst>
           </p:cNvPr>
@@ -9657,7 +11282,7 @@
           <p:cNvPr id="16" name="">
             <a:extLst xmlns:a="http://schemas.openxmlformats.org/drawingml/2006/main">
               <a:ext uri="{FF2B5EF4-FFF2-40B4-BE49-F238E27FC236}">
-                <a16:creationId xmlns:a16="http://schemas.microsoft.com/office/drawing/2014/main" id="{6C90044E-B82B-46D4-B29C-31E9D986FE1F}"/>
+                <a16:creationId xmlns:a16="http://schemas.microsoft.com/office/drawing/2014/main" id="{46D5A2EE-CAC9-414F-B9C4-DFD4177707F9}"/>
               </a:ext>
             </a:extLst>
           </p:cNvPr>
@@ -9690,7 +11315,7 @@
           <p:cNvPr id="17" name="">
             <a:extLst xmlns:a="http://schemas.openxmlformats.org/drawingml/2006/main">
               <a:ext uri="{FF2B5EF4-FFF2-40B4-BE49-F238E27FC236}">
-                <a16:creationId xmlns:a16="http://schemas.microsoft.com/office/drawing/2014/main" id="{FA3183F1-C7DD-4890-9B82-258D0A2E57CC}"/>
+                <a16:creationId xmlns:a16="http://schemas.microsoft.com/office/drawing/2014/main" id="{0F2941DE-7B3F-46DC-8EB7-7D3372FBC79B}"/>
               </a:ext>
             </a:extLst>
           </p:cNvPr>
@@ -9741,7 +11366,7 @@
           <p:cNvPr id="18" name="">
             <a:extLst xmlns:a="http://schemas.openxmlformats.org/drawingml/2006/main">
               <a:ext uri="{FF2B5EF4-FFF2-40B4-BE49-F238E27FC236}">
-                <a16:creationId xmlns:a16="http://schemas.microsoft.com/office/drawing/2014/main" id="{5E96C5FB-A5B6-431A-A9DE-1671E1EC5AC9}"/>
+                <a16:creationId xmlns:a16="http://schemas.microsoft.com/office/drawing/2014/main" id="{2A803CC5-4144-496B-A22B-3878E466A107}"/>
               </a:ext>
             </a:extLst>
           </p:cNvPr>
@@ -9792,7 +11417,7 @@
           <p:cNvPr id="19" name="">
             <a:extLst xmlns:a="http://schemas.openxmlformats.org/drawingml/2006/main">
               <a:ext uri="{FF2B5EF4-FFF2-40B4-BE49-F238E27FC236}">
-                <a16:creationId xmlns:a16="http://schemas.microsoft.com/office/drawing/2014/main" id="{059FE730-E0CF-4273-8578-D53F85EE3FA7}"/>
+                <a16:creationId xmlns:a16="http://schemas.microsoft.com/office/drawing/2014/main" id="{002B469D-3BD0-4EBB-BD73-ED70C8349E33}"/>
               </a:ext>
             </a:extLst>
           </p:cNvPr>
@@ -9843,7 +11468,7 @@
           <p:cNvPr id="20" name="">
             <a:extLst xmlns:a="http://schemas.openxmlformats.org/drawingml/2006/main">
               <a:ext uri="{FF2B5EF4-FFF2-40B4-BE49-F238E27FC236}">
-                <a16:creationId xmlns:a16="http://schemas.microsoft.com/office/drawing/2014/main" id="{76AA797C-2AFE-4473-9449-48425B327947}"/>
+                <a16:creationId xmlns:a16="http://schemas.microsoft.com/office/drawing/2014/main" id="{FFC2781E-A18C-4172-830B-BE7B9AFDB467}"/>
               </a:ext>
             </a:extLst>
           </p:cNvPr>
@@ -9892,7 +11517,7 @@
     </p:spTree>
     <p:extLst>
       <p:ext uri="{BB962C8B-B14F-4D97-AF65-F5344CB8AC3E}">
-        <p14:creationId xmlns:p14="http://schemas.microsoft.com/office/powerpoint/2010/main" val="1802258453"/>
+        <p14:creationId xmlns:p14="http://schemas.microsoft.com/office/powerpoint/2010/main" val="180261459"/>
       </p:ext>
     </p:extLst>
   </p:cSld>
@@ -9916,7 +11541,7 @@
           <p:cNvPr id="1" name="">
             <a:extLst xmlns:a="http://schemas.openxmlformats.org/drawingml/2006/main">
               <a:ext uri="{FF2B5EF4-FFF2-40B4-BE49-F238E27FC236}">
-                <a16:creationId xmlns:a16="http://schemas.microsoft.com/office/drawing/2014/main" id="{A7B35657-09DA-49D2-95C2-ACEB8BC75382}"/>
+                <a16:creationId xmlns:a16="http://schemas.microsoft.com/office/drawing/2014/main" id="{9F9B4995-8EFF-4CAE-8968-D1D1F0104EAB}"/>
               </a:ext>
             </a:extLst>
           </p:cNvPr>
@@ -9949,7 +11574,7 @@
           <p:cNvPr id="2" name="">
             <a:extLst xmlns:a="http://schemas.openxmlformats.org/drawingml/2006/main">
               <a:ext uri="{FF2B5EF4-FFF2-40B4-BE49-F238E27FC236}">
-                <a16:creationId xmlns:a16="http://schemas.microsoft.com/office/drawing/2014/main" id="{914B8A21-3BF4-4EE4-8432-88D8345C7FCE}"/>
+                <a16:creationId xmlns:a16="http://schemas.microsoft.com/office/drawing/2014/main" id="{61C89D43-218D-45A9-A9F1-D5B3E4645C2B}"/>
               </a:ext>
             </a:extLst>
           </p:cNvPr>
@@ -10000,7 +11625,7 @@
           <p:cNvPr id="3" name="">
             <a:extLst xmlns:a="http://schemas.openxmlformats.org/drawingml/2006/main">
               <a:ext uri="{FF2B5EF4-FFF2-40B4-BE49-F238E27FC236}">
-                <a16:creationId xmlns:a16="http://schemas.microsoft.com/office/drawing/2014/main" id="{332E31AC-04C8-4BC8-BA1A-B0CB9B6B1990}"/>
+                <a16:creationId xmlns:a16="http://schemas.microsoft.com/office/drawing/2014/main" id="{7AAED509-B89C-4E11-A198-F36EA90B102B}"/>
               </a:ext>
             </a:extLst>
           </p:cNvPr>
@@ -10051,7 +11676,7 @@
           <p:cNvPr id="4" name="">
             <a:extLst xmlns:a="http://schemas.openxmlformats.org/drawingml/2006/main">
               <a:ext uri="{FF2B5EF4-FFF2-40B4-BE49-F238E27FC236}">
-                <a16:creationId xmlns:a16="http://schemas.microsoft.com/office/drawing/2014/main" id="{5909E10B-A199-4105-BC31-782A47DDE62D}"/>
+                <a16:creationId xmlns:a16="http://schemas.microsoft.com/office/drawing/2014/main" id="{C4D86E3E-913E-46C6-B6CD-E12EFAB092A9}"/>
               </a:ext>
             </a:extLst>
           </p:cNvPr>
@@ -10088,7 +11713,7 @@
           <p:nvPr/>
         </p:nvPicPr>
         <p:blipFill>
-          <a:blip xmlns:r="http://schemas.openxmlformats.org/officeDocument/2006/relationships" xmlns:a="http://schemas.openxmlformats.org/drawingml/2006/main" r:embed="R37031a7b70e64830"/>
+          <a:blip xmlns:r="http://schemas.openxmlformats.org/officeDocument/2006/relationships" xmlns:a="http://schemas.openxmlformats.org/drawingml/2006/main" r:embed="R19b1ab2cb4aa40e1"/>
           <a:stretch xmlns:a="http://schemas.openxmlformats.org/drawingml/2006/main"/>
         </p:blipFill>
         <p:spPr>
@@ -10106,7 +11731,7 @@
           <p:cNvPr id="6" name="">
             <a:extLst xmlns:a="http://schemas.openxmlformats.org/drawingml/2006/main">
               <a:ext uri="{FF2B5EF4-FFF2-40B4-BE49-F238E27FC236}">
-                <a16:creationId xmlns:a16="http://schemas.microsoft.com/office/drawing/2014/main" id="{2C6703D0-6A0C-47BF-AFA9-B3C768DAAF91}"/>
+                <a16:creationId xmlns:a16="http://schemas.microsoft.com/office/drawing/2014/main" id="{9ACCB194-BDCF-492B-B660-48192920A49C}"/>
               </a:ext>
             </a:extLst>
           </p:cNvPr>
@@ -10160,7 +11785,7 @@
           <p:cNvPr id="7" name="">
             <a:extLst xmlns:a="http://schemas.openxmlformats.org/drawingml/2006/main">
               <a:ext uri="{FF2B5EF4-FFF2-40B4-BE49-F238E27FC236}">
-                <a16:creationId xmlns:a16="http://schemas.microsoft.com/office/drawing/2014/main" id="{D33233FE-2506-4D39-8C69-7B7E61C23D7F}"/>
+                <a16:creationId xmlns:a16="http://schemas.microsoft.com/office/drawing/2014/main" id="{937DCE3D-2544-47F6-B532-CC5B916EF0BD}"/>
               </a:ext>
             </a:extLst>
           </p:cNvPr>
@@ -10197,7 +11822,7 @@
           <p:nvPr/>
         </p:nvPicPr>
         <p:blipFill>
-          <a:blip xmlns:r="http://schemas.openxmlformats.org/officeDocument/2006/relationships" xmlns:a="http://schemas.openxmlformats.org/drawingml/2006/main" r:embed="Racd619ffdbcf42c4"/>
+          <a:blip xmlns:r="http://schemas.openxmlformats.org/officeDocument/2006/relationships" xmlns:a="http://schemas.openxmlformats.org/drawingml/2006/main" r:embed="R42f943d826c145e0"/>
           <a:stretch xmlns:a="http://schemas.openxmlformats.org/drawingml/2006/main"/>
         </p:blipFill>
         <p:spPr>
@@ -10215,7 +11840,7 @@
           <p:cNvPr id="9" name="">
             <a:extLst xmlns:a="http://schemas.openxmlformats.org/drawingml/2006/main">
               <a:ext uri="{FF2B5EF4-FFF2-40B4-BE49-F238E27FC236}">
-                <a16:creationId xmlns:a16="http://schemas.microsoft.com/office/drawing/2014/main" id="{659ED447-C11A-49FE-AFFE-12501469A488}"/>
+                <a16:creationId xmlns:a16="http://schemas.microsoft.com/office/drawing/2014/main" id="{014F8030-FF64-4931-B882-1E7C7C3D78B5}"/>
               </a:ext>
             </a:extLst>
           </p:cNvPr>
@@ -10269,7 +11894,7 @@
           <p:cNvPr id="10" name="">
             <a:extLst xmlns:a="http://schemas.openxmlformats.org/drawingml/2006/main">
               <a:ext uri="{FF2B5EF4-FFF2-40B4-BE49-F238E27FC236}">
-                <a16:creationId xmlns:a16="http://schemas.microsoft.com/office/drawing/2014/main" id="{FF51C620-9618-4605-925B-DD2A56FC1241}"/>
+                <a16:creationId xmlns:a16="http://schemas.microsoft.com/office/drawing/2014/main" id="{4684AD23-7F1B-4F36-A4BD-FF0F1653956A}"/>
               </a:ext>
             </a:extLst>
           </p:cNvPr>
@@ -10306,7 +11931,7 @@
           <p:nvPr/>
         </p:nvPicPr>
         <p:blipFill>
-          <a:blip xmlns:r="http://schemas.openxmlformats.org/officeDocument/2006/relationships" xmlns:a="http://schemas.openxmlformats.org/drawingml/2006/main" r:embed="R583e19868e5449bb"/>
+          <a:blip xmlns:r="http://schemas.openxmlformats.org/officeDocument/2006/relationships" xmlns:a="http://schemas.openxmlformats.org/drawingml/2006/main" r:embed="R1d054932e292464a"/>
           <a:stretch xmlns:a="http://schemas.openxmlformats.org/drawingml/2006/main"/>
         </p:blipFill>
         <p:spPr>
@@ -10324,7 +11949,7 @@
           <p:cNvPr id="12" name="">
             <a:extLst xmlns:a="http://schemas.openxmlformats.org/drawingml/2006/main">
               <a:ext uri="{FF2B5EF4-FFF2-40B4-BE49-F238E27FC236}">
-                <a16:creationId xmlns:a16="http://schemas.microsoft.com/office/drawing/2014/main" id="{ADDC34C4-DF4B-4D4C-8281-9992E4A44B02}"/>
+                <a16:creationId xmlns:a16="http://schemas.microsoft.com/office/drawing/2014/main" id="{433F8582-663B-4CB8-8CEB-11941937C1C4}"/>
               </a:ext>
             </a:extLst>
           </p:cNvPr>
@@ -10378,7 +12003,7 @@
           <p:cNvPr id="13" name="">
             <a:extLst xmlns:a="http://schemas.openxmlformats.org/drawingml/2006/main">
               <a:ext uri="{FF2B5EF4-FFF2-40B4-BE49-F238E27FC236}">
-                <a16:creationId xmlns:a16="http://schemas.microsoft.com/office/drawing/2014/main" id="{D84DA3D8-7C14-4D3D-98EE-50114F42198C}"/>
+                <a16:creationId xmlns:a16="http://schemas.microsoft.com/office/drawing/2014/main" id="{89001FD7-2B76-4079-885F-EFFE53F5B324}"/>
               </a:ext>
             </a:extLst>
           </p:cNvPr>
@@ -10411,7 +12036,7 @@
           <p:cNvPr id="14" name="">
             <a:extLst xmlns:a="http://schemas.openxmlformats.org/drawingml/2006/main">
               <a:ext uri="{FF2B5EF4-FFF2-40B4-BE49-F238E27FC236}">
-                <a16:creationId xmlns:a16="http://schemas.microsoft.com/office/drawing/2014/main" id="{062F1090-3535-4A05-83FF-F05FE3D0FE45}"/>
+                <a16:creationId xmlns:a16="http://schemas.microsoft.com/office/drawing/2014/main" id="{8F4BE3CC-A599-470C-A2D2-39406CC6D2E1}"/>
               </a:ext>
             </a:extLst>
           </p:cNvPr>
@@ -10444,7 +12069,7 @@
           <p:cNvPr id="15" name="">
             <a:extLst xmlns:a="http://schemas.openxmlformats.org/drawingml/2006/main">
               <a:ext uri="{FF2B5EF4-FFF2-40B4-BE49-F238E27FC236}">
-                <a16:creationId xmlns:a16="http://schemas.microsoft.com/office/drawing/2014/main" id="{56B88FD0-E55B-4072-ACB2-5E8DDBA3D601}"/>
+                <a16:creationId xmlns:a16="http://schemas.microsoft.com/office/drawing/2014/main" id="{64D08B0E-FB5F-4B88-AB60-9CBB6069DD20}"/>
               </a:ext>
             </a:extLst>
           </p:cNvPr>
@@ -10495,7 +12120,7 @@
           <p:cNvPr id="16" name="">
             <a:extLst xmlns:a="http://schemas.openxmlformats.org/drawingml/2006/main">
               <a:ext uri="{FF2B5EF4-FFF2-40B4-BE49-F238E27FC236}">
-                <a16:creationId xmlns:a16="http://schemas.microsoft.com/office/drawing/2014/main" id="{27D89E78-6C89-4F1F-B73F-FD2A7EA27D4E}"/>
+                <a16:creationId xmlns:a16="http://schemas.microsoft.com/office/drawing/2014/main" id="{7D07D9C4-E481-4516-96DB-0A371A235607}"/>
               </a:ext>
             </a:extLst>
           </p:cNvPr>
@@ -10536,7 +12161,7 @@
                   <a:srgbClr val="5F6F86"/>
                 </a:solidFill>
               </a:rPr>
-              <a:t>Vendor bills and A/P, customer and vendor directories, A/R + A/P aging, balance sheet, cash flow, journal and trial balance, period close, invoice/bill PDFs, dark mode.</a:t>
+              <a:t>Vendor bills and A/P, customer and vendor directories, A/R + A/P aging, balance sheet, cash flow, account registers, job costing, recurring transactions, credit memos and void, customer statement PDFs, quick expense entry, period close, invoice/bill PDFs, dark mode.</a:t>
             </a:r>
           </a:p>
         </p:txBody>
@@ -10546,7 +12171,7 @@
           <p:cNvPr id="17" name="">
             <a:extLst xmlns:a="http://schemas.openxmlformats.org/drawingml/2006/main">
               <a:ext uri="{FF2B5EF4-FFF2-40B4-BE49-F238E27FC236}">
-                <a16:creationId xmlns:a16="http://schemas.microsoft.com/office/drawing/2014/main" id="{22F17EB6-D532-49EA-93C5-E75AD9A35620}"/>
+                <a16:creationId xmlns:a16="http://schemas.microsoft.com/office/drawing/2014/main" id="{E29F7878-9BD9-4FA7-9228-2932035216EB}"/>
               </a:ext>
             </a:extLst>
           </p:cNvPr>
@@ -10597,7 +12222,7 @@
           <p:cNvPr id="18" name="">
             <a:extLst xmlns:a="http://schemas.openxmlformats.org/drawingml/2006/main">
               <a:ext uri="{FF2B5EF4-FFF2-40B4-BE49-F238E27FC236}">
-                <a16:creationId xmlns:a16="http://schemas.microsoft.com/office/drawing/2014/main" id="{82C2CDA1-BD2E-4596-8E99-AD26C4201A9C}"/>
+                <a16:creationId xmlns:a16="http://schemas.microsoft.com/office/drawing/2014/main" id="{CA86778A-84D1-4992-9735-8E1F57BDCB9F}"/>
               </a:ext>
             </a:extLst>
           </p:cNvPr>
@@ -10646,7 +12271,7 @@
     </p:spTree>
     <p:extLst>
       <p:ext uri="{BB962C8B-B14F-4D97-AF65-F5344CB8AC3E}">
-        <p14:creationId xmlns:p14="http://schemas.microsoft.com/office/powerpoint/2010/main" val="1508716678"/>
+        <p14:creationId xmlns:p14="http://schemas.microsoft.com/office/powerpoint/2010/main" val="160018142"/>
       </p:ext>
     </p:extLst>
   </p:cSld>
@@ -10670,7 +12295,7 @@
           <p:cNvPr id="1" name="">
             <a:extLst xmlns:a="http://schemas.openxmlformats.org/drawingml/2006/main">
               <a:ext uri="{FF2B5EF4-FFF2-40B4-BE49-F238E27FC236}">
-                <a16:creationId xmlns:a16="http://schemas.microsoft.com/office/drawing/2014/main" id="{2562BB7A-2950-4834-995B-81DA4F5F849F}"/>
+                <a16:creationId xmlns:a16="http://schemas.microsoft.com/office/drawing/2014/main" id="{665270D2-8EAD-42DE-9C08-2719FC42C4FB}"/>
               </a:ext>
             </a:extLst>
           </p:cNvPr>
@@ -10703,7 +12328,7 @@
           <p:cNvPr id="2" name="">
             <a:extLst xmlns:a="http://schemas.openxmlformats.org/drawingml/2006/main">
               <a:ext uri="{FF2B5EF4-FFF2-40B4-BE49-F238E27FC236}">
-                <a16:creationId xmlns:a16="http://schemas.microsoft.com/office/drawing/2014/main" id="{EFEF30BC-6262-4C66-BBBA-549DA1F7510F}"/>
+                <a16:creationId xmlns:a16="http://schemas.microsoft.com/office/drawing/2014/main" id="{ED2A82C2-4468-4808-BC66-3032C5EB0D20}"/>
               </a:ext>
             </a:extLst>
           </p:cNvPr>
@@ -10744,7 +12369,7 @@
                   <a:srgbClr val="5F6F86"/>
                 </a:solidFill>
               </a:rPr>
-              <a:t>COMMERCIAL PATH</a:t>
+              <a:t>ALREADY SHIPPED</a:t>
             </a:r>
           </a:p>
         </p:txBody>
@@ -10754,7 +12379,7 @@
           <p:cNvPr id="3" name="">
             <a:extLst xmlns:a="http://schemas.openxmlformats.org/drawingml/2006/main">
               <a:ext uri="{FF2B5EF4-FFF2-40B4-BE49-F238E27FC236}">
-                <a16:creationId xmlns:a16="http://schemas.microsoft.com/office/drawing/2014/main" id="{01CFFBD0-9458-4533-8EBB-2C5871664EEF}"/>
+                <a16:creationId xmlns:a16="http://schemas.microsoft.com/office/drawing/2014/main" id="{AB79B542-26B7-43A4-98CE-B0AE57579FC7}"/>
               </a:ext>
             </a:extLst>
           </p:cNvPr>
@@ -10795,7 +12420,7 @@
                   <a:srgbClr val="172033"/>
                 </a:solidFill>
               </a:rPr>
-              <a:t>One clean foundation build, then an optional close-support lane.</a:t>
+              <a:t>The QuickBooks-replacement layer is live in the product.</a:t>
             </a:r>
           </a:p>
         </p:txBody>
@@ -10805,222 +12430,70 @@
           <p:cNvPr id="4" name="">
             <a:extLst xmlns:a="http://schemas.openxmlformats.org/drawingml/2006/main">
               <a:ext uri="{FF2B5EF4-FFF2-40B4-BE49-F238E27FC236}">
-                <a16:creationId xmlns:a16="http://schemas.microsoft.com/office/drawing/2014/main" id="{FEF00793-D948-4B7F-847E-B03ABD025290}"/>
-              </a:ext>
-            </a:extLst>
-          </p:cNvPr>
-          <p:cNvSpPr>
-            <a:spLocks xmlns:a="http://schemas.openxmlformats.org/drawingml/2006/main" noGrp="1"/>
-          </p:cNvSpPr>
-          <p:nvPr/>
-        </p:nvSpPr>
-        <p:spPr>
-          <a:xfrm xmlns:a="http://schemas.openxmlformats.org/drawingml/2006/main">
-            <a:off x="685800" y="2343150"/>
-            <a:ext cx="4876800" cy="2705100"/>
-          </a:xfrm>
-          <a:prstGeom xmlns:a="http://schemas.openxmlformats.org/drawingml/2006/main" prst="rect">
-            <a:avLst/>
-          </a:prstGeom>
-          <a:solidFill xmlns:a="http://schemas.openxmlformats.org/drawingml/2006/main">
-            <a:srgbClr val="0B1F33"/>
-          </a:solidFill>
-          <a:ln xmlns:a="http://schemas.openxmlformats.org/drawingml/2006/main" w="0">
-            <a:solidFill>
-              <a:srgbClr val="0B1F33"/>
-            </a:solidFill>
-            <a:prstDash val="solid"/>
-          </a:ln>
-        </p:spPr>
+                <a16:creationId xmlns:a16="http://schemas.microsoft.com/office/drawing/2014/main" id="{0F2B0570-C4FD-4591-8E1E-DEDCBBCB1DD1}"/>
+              </a:ext>
+            </a:extLst>
+          </p:cNvPr>
+          <p:cNvSpPr>
+            <a:spLocks xmlns:a="http://schemas.openxmlformats.org/drawingml/2006/main" noGrp="1"/>
+          </p:cNvSpPr>
+          <p:nvPr/>
+        </p:nvSpPr>
+        <p:spPr>
+          <a:xfrm xmlns:a="http://schemas.openxmlformats.org/drawingml/2006/main">
+            <a:off x="685800" y="1628775"/>
+            <a:ext cx="8953500" cy="495300"/>
+          </a:xfrm>
+          <a:prstGeom xmlns:a="http://schemas.openxmlformats.org/drawingml/2006/main" prst="rect">
+            <a:avLst/>
+          </a:prstGeom>
+          <a:ln xmlns:a="http://schemas.openxmlformats.org/drawingml/2006/main" w="0">
+            <a:solidFill>
+              <a:srgbClr val="FFFFFF"/>
+            </a:solidFill>
+            <a:prstDash val="solid"/>
+          </a:ln>
+        </p:spPr>
+        <p:txBody>
+          <a:bodyPr xmlns:a="http://schemas.openxmlformats.org/drawingml/2006/main" anchor="t"/>
+          <a:lstStyle xmlns:a="http://schemas.openxmlformats.org/drawingml/2006/main"/>
+          <a:p xmlns:a="http://schemas.openxmlformats.org/drawingml/2006/main">
+            <a:pPr algn="l">
+              <a:defRPr sz="1425" b="0">
+                <a:solidFill>
+                  <a:srgbClr val="5F6F86"/>
+                </a:solidFill>
+              </a:defRPr>
+            </a:pPr>
+            <a:r>
+              <a:rPr sz="1425" b="0">
+                <a:solidFill>
+                  <a:srgbClr val="5F6F86"/>
+                </a:solidFill>
+              </a:rPr>
+              <a:t>Everything below is deployed today — rollout work, not a build-from-scratch roadmap.</a:t>
+            </a:r>
+          </a:p>
+        </p:txBody>
       </p:sp>
       <p:sp>
         <p:nvSpPr>
           <p:cNvPr id="5" name="">
             <a:extLst xmlns:a="http://schemas.openxmlformats.org/drawingml/2006/main">
               <a:ext uri="{FF2B5EF4-FFF2-40B4-BE49-F238E27FC236}">
-                <a16:creationId xmlns:a16="http://schemas.microsoft.com/office/drawing/2014/main" id="{A038046A-E3B9-4E36-97F0-650D90A615E1}"/>
-              </a:ext>
-            </a:extLst>
-          </p:cNvPr>
-          <p:cNvSpPr>
-            <a:spLocks xmlns:a="http://schemas.openxmlformats.org/drawingml/2006/main" noGrp="1"/>
-          </p:cNvSpPr>
-          <p:nvPr/>
-        </p:nvSpPr>
-        <p:spPr>
-          <a:xfrm xmlns:a="http://schemas.openxmlformats.org/drawingml/2006/main">
-            <a:off x="1047750" y="2724150"/>
-            <a:ext cx="4095750" cy="533400"/>
-          </a:xfrm>
-          <a:prstGeom xmlns:a="http://schemas.openxmlformats.org/drawingml/2006/main" prst="rect">
-            <a:avLst/>
-          </a:prstGeom>
-          <a:ln xmlns:a="http://schemas.openxmlformats.org/drawingml/2006/main" w="0">
-            <a:solidFill>
-              <a:srgbClr val="FFFFFF"/>
-            </a:solidFill>
-            <a:prstDash val="solid"/>
-          </a:ln>
-        </p:spPr>
-        <p:txBody>
-          <a:bodyPr xmlns:a="http://schemas.openxmlformats.org/drawingml/2006/main" anchor="t"/>
-          <a:lstStyle xmlns:a="http://schemas.openxmlformats.org/drawingml/2006/main"/>
-          <a:p xmlns:a="http://schemas.openxmlformats.org/drawingml/2006/main">
-            <a:pPr algn="l">
-              <a:defRPr sz="1800" b="1">
-                <a:solidFill>
-                  <a:srgbClr val="FFFFFF"/>
-                </a:solidFill>
-              </a:defRPr>
-            </a:pPr>
-            <a:r>
-              <a:rPr sz="1800" b="1">
-                <a:solidFill>
-                  <a:srgbClr val="FFFFFF"/>
-                </a:solidFill>
-              </a:rPr>
-              <a:t>Blueprint Books Foundation</a:t>
-            </a:r>
-          </a:p>
-        </p:txBody>
-      </p:sp>
-      <p:sp>
-        <p:nvSpPr>
-          <p:cNvPr id="6" name="">
-            <a:extLst xmlns:a="http://schemas.openxmlformats.org/drawingml/2006/main">
-              <a:ext uri="{FF2B5EF4-FFF2-40B4-BE49-F238E27FC236}">
-                <a16:creationId xmlns:a16="http://schemas.microsoft.com/office/drawing/2014/main" id="{21A084E2-8B3D-49F8-A856-47709CC312CE}"/>
-              </a:ext>
-            </a:extLst>
-          </p:cNvPr>
-          <p:cNvSpPr>
-            <a:spLocks xmlns:a="http://schemas.openxmlformats.org/drawingml/2006/main" noGrp="1"/>
-          </p:cNvSpPr>
-          <p:nvPr/>
-        </p:nvSpPr>
-        <p:spPr>
-          <a:xfrm xmlns:a="http://schemas.openxmlformats.org/drawingml/2006/main">
-            <a:off x="1047750" y="3390900"/>
-            <a:ext cx="4000500" cy="514350"/>
-          </a:xfrm>
-          <a:prstGeom xmlns:a="http://schemas.openxmlformats.org/drawingml/2006/main" prst="rect">
-            <a:avLst/>
-          </a:prstGeom>
-          <a:ln xmlns:a="http://schemas.openxmlformats.org/drawingml/2006/main" w="0">
-            <a:solidFill>
-              <a:srgbClr val="FFFFFF"/>
-            </a:solidFill>
-            <a:prstDash val="solid"/>
-          </a:ln>
-        </p:spPr>
-        <p:txBody>
-          <a:bodyPr xmlns:a="http://schemas.openxmlformats.org/drawingml/2006/main" anchor="t"/>
-          <a:lstStyle xmlns:a="http://schemas.openxmlformats.org/drawingml/2006/main"/>
-          <a:p xmlns:a="http://schemas.openxmlformats.org/drawingml/2006/main">
-            <a:pPr algn="l">
-              <a:defRPr sz="2850" b="1">
-                <a:solidFill>
-                  <a:srgbClr val="9FE0C8"/>
-                </a:solidFill>
-              </a:defRPr>
-            </a:pPr>
-            <a:r>
-              <a:rPr sz="2850" b="1">
-                <a:solidFill>
-                  <a:srgbClr val="9FE0C8"/>
-                </a:solidFill>
-              </a:rPr>
-              <a:t>$18,500 fixed fee</a:t>
-            </a:r>
-          </a:p>
-        </p:txBody>
-      </p:sp>
-      <p:sp>
-        <p:nvSpPr>
-          <p:cNvPr id="7" name="">
-            <a:extLst xmlns:a="http://schemas.openxmlformats.org/drawingml/2006/main">
-              <a:ext uri="{FF2B5EF4-FFF2-40B4-BE49-F238E27FC236}">
-                <a16:creationId xmlns:a16="http://schemas.microsoft.com/office/drawing/2014/main" id="{9D2C96C7-3844-4FE2-A69C-24394AEAB291}"/>
-              </a:ext>
-            </a:extLst>
-          </p:cNvPr>
-          <p:cNvSpPr>
-            <a:spLocks xmlns:a="http://schemas.openxmlformats.org/drawingml/2006/main" noGrp="1"/>
-          </p:cNvSpPr>
-          <p:nvPr/>
-        </p:nvSpPr>
-        <p:spPr>
-          <a:xfrm xmlns:a="http://schemas.openxmlformats.org/drawingml/2006/main">
-            <a:off x="1066800" y="4038600"/>
-            <a:ext cx="3905250" cy="628650"/>
-          </a:xfrm>
-          <a:prstGeom xmlns:a="http://schemas.openxmlformats.org/drawingml/2006/main" prst="rect">
-            <a:avLst/>
-          </a:prstGeom>
-          <a:ln xmlns:a="http://schemas.openxmlformats.org/drawingml/2006/main" w="0">
-            <a:solidFill>
-              <a:srgbClr val="FFFFFF"/>
-            </a:solidFill>
-            <a:prstDash val="solid"/>
-          </a:ln>
-        </p:spPr>
-        <p:txBody>
-          <a:bodyPr xmlns:a="http://schemas.openxmlformats.org/drawingml/2006/main" anchor="t"/>
-          <a:lstStyle xmlns:a="http://schemas.openxmlformats.org/drawingml/2006/main"/>
-          <a:p xmlns:a="http://schemas.openxmlformats.org/drawingml/2006/main">
-            <a:pPr algn="l">
-              <a:defRPr sz="1350" b="0">
-                <a:solidFill>
-                  <a:srgbClr val="D9EAF8"/>
-                </a:solidFill>
-              </a:defRPr>
-            </a:pPr>
-            <a:r>
-              <a:rPr sz="1350" b="0">
-                <a:solidFill>
-                  <a:srgbClr val="D9EAF8"/>
-                </a:solidFill>
-              </a:rPr>
-              <a:t>50% start / 50% closeout</a:t>
-            </a:r>
-          </a:p>
-          <a:p xmlns:a="http://schemas.openxmlformats.org/drawingml/2006/main">
-            <a:pPr algn="l">
-              <a:defRPr sz="1350" b="0">
-                <a:solidFill>
-                  <a:srgbClr val="D9EAF8"/>
-                </a:solidFill>
-              </a:defRPr>
-            </a:pPr>
-            <a:r>
-              <a:rPr sz="1350" b="0">
-                <a:solidFill>
-                  <a:srgbClr val="D9EAF8"/>
-                </a:solidFill>
-              </a:rPr>
-              <a:t>4-5 weeks from opening-balance readiness</a:t>
-            </a:r>
-          </a:p>
-        </p:txBody>
-      </p:sp>
-      <p:sp>
-        <p:nvSpPr>
-          <p:cNvPr id="8" name="">
-            <a:extLst xmlns:a="http://schemas.openxmlformats.org/drawingml/2006/main">
-              <a:ext uri="{FF2B5EF4-FFF2-40B4-BE49-F238E27FC236}">
-                <a16:creationId xmlns:a16="http://schemas.microsoft.com/office/drawing/2014/main" id="{F35CE544-00C7-4E2A-B5FB-9DD8E957128E}"/>
-              </a:ext>
-            </a:extLst>
-          </p:cNvPr>
-          <p:cNvSpPr>
-            <a:spLocks xmlns:a="http://schemas.openxmlformats.org/drawingml/2006/main" noGrp="1"/>
-          </p:cNvSpPr>
-          <p:nvPr/>
-        </p:nvSpPr>
-        <p:spPr>
-          <a:xfrm xmlns:a="http://schemas.openxmlformats.org/drawingml/2006/main">
-            <a:off x="6153150" y="2343150"/>
-            <a:ext cx="2381250" cy="1638300"/>
+                <a16:creationId xmlns:a16="http://schemas.microsoft.com/office/drawing/2014/main" id="{DE49C676-8216-4FB4-8BB3-4312B79E95CE}"/>
+              </a:ext>
+            </a:extLst>
+          </p:cNvPr>
+          <p:cNvSpPr>
+            <a:spLocks xmlns:a="http://schemas.openxmlformats.org/drawingml/2006/main" noGrp="1"/>
+          </p:cNvSpPr>
+          <p:nvPr/>
+        </p:nvSpPr>
+        <p:spPr>
+          <a:xfrm xmlns:a="http://schemas.openxmlformats.org/drawingml/2006/main">
+            <a:off x="685800" y="2362200"/>
+            <a:ext cx="3162300" cy="1428750"/>
           </a:xfrm>
           <a:prstGeom xmlns:a="http://schemas.openxmlformats.org/drawingml/2006/main" prst="rect">
             <a:avLst/>
@@ -11038,22 +12511,526 @@
       </p:sp>
       <p:sp>
         <p:nvSpPr>
+          <p:cNvPr id="6" name="">
+            <a:extLst xmlns:a="http://schemas.openxmlformats.org/drawingml/2006/main">
+              <a:ext uri="{FF2B5EF4-FFF2-40B4-BE49-F238E27FC236}">
+                <a16:creationId xmlns:a16="http://schemas.microsoft.com/office/drawing/2014/main" id="{579CF70A-211D-431B-92AF-434B897AA46C}"/>
+              </a:ext>
+            </a:extLst>
+          </p:cNvPr>
+          <p:cNvSpPr>
+            <a:spLocks xmlns:a="http://schemas.openxmlformats.org/drawingml/2006/main" noGrp="1"/>
+          </p:cNvSpPr>
+          <p:nvPr/>
+        </p:nvSpPr>
+        <p:spPr>
+          <a:xfrm xmlns:a="http://schemas.openxmlformats.org/drawingml/2006/main">
+            <a:off x="685800" y="2362200"/>
+            <a:ext cx="57150" cy="1428750"/>
+          </a:xfrm>
+          <a:prstGeom xmlns:a="http://schemas.openxmlformats.org/drawingml/2006/main" prst="rect">
+            <a:avLst/>
+          </a:prstGeom>
+          <a:solidFill xmlns:a="http://schemas.openxmlformats.org/drawingml/2006/main">
+            <a:srgbClr val="1D7F5F"/>
+          </a:solidFill>
+          <a:ln xmlns:a="http://schemas.openxmlformats.org/drawingml/2006/main" w="0">
+            <a:solidFill>
+              <a:srgbClr val="1D7F5F"/>
+            </a:solidFill>
+            <a:prstDash val="solid"/>
+          </a:ln>
+        </p:spPr>
+      </p:sp>
+      <p:sp>
+        <p:nvSpPr>
+          <p:cNvPr id="7" name="">
+            <a:extLst xmlns:a="http://schemas.openxmlformats.org/drawingml/2006/main">
+              <a:ext uri="{FF2B5EF4-FFF2-40B4-BE49-F238E27FC236}">
+                <a16:creationId xmlns:a16="http://schemas.microsoft.com/office/drawing/2014/main" id="{A6E9765A-34C6-4B08-ABC1-6A1237AEEFDF}"/>
+              </a:ext>
+            </a:extLst>
+          </p:cNvPr>
+          <p:cNvSpPr>
+            <a:spLocks xmlns:a="http://schemas.openxmlformats.org/drawingml/2006/main" noGrp="1"/>
+          </p:cNvSpPr>
+          <p:nvPr/>
+        </p:nvSpPr>
+        <p:spPr>
+          <a:xfrm xmlns:a="http://schemas.openxmlformats.org/drawingml/2006/main">
+            <a:off x="914400" y="2552700"/>
+            <a:ext cx="2781300" cy="285750"/>
+          </a:xfrm>
+          <a:prstGeom xmlns:a="http://schemas.openxmlformats.org/drawingml/2006/main" prst="rect">
+            <a:avLst/>
+          </a:prstGeom>
+          <a:ln xmlns:a="http://schemas.openxmlformats.org/drawingml/2006/main" w="0">
+            <a:solidFill>
+              <a:srgbClr val="FFFFFF"/>
+            </a:solidFill>
+            <a:prstDash val="solid"/>
+          </a:ln>
+        </p:spPr>
+        <p:txBody>
+          <a:bodyPr xmlns:a="http://schemas.openxmlformats.org/drawingml/2006/main" anchor="t"/>
+          <a:lstStyle xmlns:a="http://schemas.openxmlformats.org/drawingml/2006/main"/>
+          <a:p xmlns:a="http://schemas.openxmlformats.org/drawingml/2006/main">
+            <a:pPr algn="l">
+              <a:defRPr sz="1350" b="1">
+                <a:solidFill>
+                  <a:srgbClr val="172033"/>
+                </a:solidFill>
+              </a:defRPr>
+            </a:pPr>
+            <a:r>
+              <a:rPr sz="1350" b="1">
+                <a:solidFill>
+                  <a:srgbClr val="172033"/>
+                </a:solidFill>
+              </a:rPr>
+              <a:t>Account registers</a:t>
+            </a:r>
+          </a:p>
+        </p:txBody>
+      </p:sp>
+      <p:sp>
+        <p:nvSpPr>
+          <p:cNvPr id="8" name="">
+            <a:extLst xmlns:a="http://schemas.openxmlformats.org/drawingml/2006/main">
+              <a:ext uri="{FF2B5EF4-FFF2-40B4-BE49-F238E27FC236}">
+                <a16:creationId xmlns:a16="http://schemas.microsoft.com/office/drawing/2014/main" id="{0CB3DA27-2AC7-4706-9E68-E8D7D4D9FAF0}"/>
+              </a:ext>
+            </a:extLst>
+          </p:cNvPr>
+          <p:cNvSpPr>
+            <a:spLocks xmlns:a="http://schemas.openxmlformats.org/drawingml/2006/main" noGrp="1"/>
+          </p:cNvSpPr>
+          <p:nvPr/>
+        </p:nvSpPr>
+        <p:spPr>
+          <a:xfrm xmlns:a="http://schemas.openxmlformats.org/drawingml/2006/main">
+            <a:off x="914400" y="2914650"/>
+            <a:ext cx="2762250" cy="742950"/>
+          </a:xfrm>
+          <a:prstGeom xmlns:a="http://schemas.openxmlformats.org/drawingml/2006/main" prst="rect">
+            <a:avLst/>
+          </a:prstGeom>
+          <a:ln xmlns:a="http://schemas.openxmlformats.org/drawingml/2006/main" w="0">
+            <a:solidFill>
+              <a:srgbClr val="FFFFFF"/>
+            </a:solidFill>
+            <a:prstDash val="solid"/>
+          </a:ln>
+        </p:spPr>
+        <p:txBody>
+          <a:bodyPr xmlns:a="http://schemas.openxmlformats.org/drawingml/2006/main" anchor="t"/>
+          <a:lstStyle xmlns:a="http://schemas.openxmlformats.org/drawingml/2006/main"/>
+          <a:p xmlns:a="http://schemas.openxmlformats.org/drawingml/2006/main">
+            <a:pPr algn="l">
+              <a:defRPr sz="1050" b="0">
+                <a:solidFill>
+                  <a:srgbClr val="5F6F86"/>
+                </a:solidFill>
+              </a:defRPr>
+            </a:pPr>
+            <a:r>
+              <a:rPr sz="1050" b="0">
+                <a:solidFill>
+                  <a:srgbClr val="5F6F86"/>
+                </a:solidFill>
+              </a:rPr>
+              <a:t>Running-balance history for every account — a checkbook view per ledger line.</a:t>
+            </a:r>
+          </a:p>
+        </p:txBody>
+      </p:sp>
+      <p:sp>
+        <p:nvSpPr>
           <p:cNvPr id="9" name="">
             <a:extLst xmlns:a="http://schemas.openxmlformats.org/drawingml/2006/main">
               <a:ext uri="{FF2B5EF4-FFF2-40B4-BE49-F238E27FC236}">
-                <a16:creationId xmlns:a16="http://schemas.microsoft.com/office/drawing/2014/main" id="{E22CA8DB-225E-43BB-84AD-E1599F2C7EEB}"/>
-              </a:ext>
-            </a:extLst>
-          </p:cNvPr>
-          <p:cNvSpPr>
-            <a:spLocks xmlns:a="http://schemas.openxmlformats.org/drawingml/2006/main" noGrp="1"/>
-          </p:cNvSpPr>
-          <p:nvPr/>
-        </p:nvSpPr>
-        <p:spPr>
-          <a:xfrm xmlns:a="http://schemas.openxmlformats.org/drawingml/2006/main">
-            <a:off x="6153150" y="2343150"/>
-            <a:ext cx="57150" cy="1638300"/>
+                <a16:creationId xmlns:a16="http://schemas.microsoft.com/office/drawing/2014/main" id="{AFDD7751-B6B5-4CAF-80F4-88E5005C57DF}"/>
+              </a:ext>
+            </a:extLst>
+          </p:cNvPr>
+          <p:cNvSpPr>
+            <a:spLocks xmlns:a="http://schemas.openxmlformats.org/drawingml/2006/main" noGrp="1"/>
+          </p:cNvSpPr>
+          <p:nvPr/>
+        </p:nvSpPr>
+        <p:spPr>
+          <a:xfrm xmlns:a="http://schemas.openxmlformats.org/drawingml/2006/main">
+            <a:off x="4343400" y="2362200"/>
+            <a:ext cx="3162300" cy="1428750"/>
+          </a:xfrm>
+          <a:prstGeom xmlns:a="http://schemas.openxmlformats.org/drawingml/2006/main" prst="rect">
+            <a:avLst/>
+          </a:prstGeom>
+          <a:solidFill xmlns:a="http://schemas.openxmlformats.org/drawingml/2006/main">
+            <a:srgbClr val="FFFFFF"/>
+          </a:solidFill>
+          <a:ln xmlns:a="http://schemas.openxmlformats.org/drawingml/2006/main" w="0">
+            <a:solidFill>
+              <a:srgbClr val="D8E2ED"/>
+            </a:solidFill>
+            <a:prstDash val="solid"/>
+          </a:ln>
+        </p:spPr>
+      </p:sp>
+      <p:sp>
+        <p:nvSpPr>
+          <p:cNvPr id="10" name="">
+            <a:extLst xmlns:a="http://schemas.openxmlformats.org/drawingml/2006/main">
+              <a:ext uri="{FF2B5EF4-FFF2-40B4-BE49-F238E27FC236}">
+                <a16:creationId xmlns:a16="http://schemas.microsoft.com/office/drawing/2014/main" id="{32899306-509A-42D4-B3A9-69240F6B8D11}"/>
+              </a:ext>
+            </a:extLst>
+          </p:cNvPr>
+          <p:cNvSpPr>
+            <a:spLocks xmlns:a="http://schemas.openxmlformats.org/drawingml/2006/main" noGrp="1"/>
+          </p:cNvSpPr>
+          <p:nvPr/>
+        </p:nvSpPr>
+        <p:spPr>
+          <a:xfrm xmlns:a="http://schemas.openxmlformats.org/drawingml/2006/main">
+            <a:off x="4343400" y="2362200"/>
+            <a:ext cx="57150" cy="1428750"/>
+          </a:xfrm>
+          <a:prstGeom xmlns:a="http://schemas.openxmlformats.org/drawingml/2006/main" prst="rect">
+            <a:avLst/>
+          </a:prstGeom>
+          <a:solidFill xmlns:a="http://schemas.openxmlformats.org/drawingml/2006/main">
+            <a:srgbClr val="23A6D5"/>
+          </a:solidFill>
+          <a:ln xmlns:a="http://schemas.openxmlformats.org/drawingml/2006/main" w="0">
+            <a:solidFill>
+              <a:srgbClr val="23A6D5"/>
+            </a:solidFill>
+            <a:prstDash val="solid"/>
+          </a:ln>
+        </p:spPr>
+      </p:sp>
+      <p:sp>
+        <p:nvSpPr>
+          <p:cNvPr id="11" name="">
+            <a:extLst xmlns:a="http://schemas.openxmlformats.org/drawingml/2006/main">
+              <a:ext uri="{FF2B5EF4-FFF2-40B4-BE49-F238E27FC236}">
+                <a16:creationId xmlns:a16="http://schemas.microsoft.com/office/drawing/2014/main" id="{BA059FAB-4786-4D02-BCD7-8447654F3625}"/>
+              </a:ext>
+            </a:extLst>
+          </p:cNvPr>
+          <p:cNvSpPr>
+            <a:spLocks xmlns:a="http://schemas.openxmlformats.org/drawingml/2006/main" noGrp="1"/>
+          </p:cNvSpPr>
+          <p:nvPr/>
+        </p:nvSpPr>
+        <p:spPr>
+          <a:xfrm xmlns:a="http://schemas.openxmlformats.org/drawingml/2006/main">
+            <a:off x="4572000" y="2552700"/>
+            <a:ext cx="2781300" cy="285750"/>
+          </a:xfrm>
+          <a:prstGeom xmlns:a="http://schemas.openxmlformats.org/drawingml/2006/main" prst="rect">
+            <a:avLst/>
+          </a:prstGeom>
+          <a:ln xmlns:a="http://schemas.openxmlformats.org/drawingml/2006/main" w="0">
+            <a:solidFill>
+              <a:srgbClr val="FFFFFF"/>
+            </a:solidFill>
+            <a:prstDash val="solid"/>
+          </a:ln>
+        </p:spPr>
+        <p:txBody>
+          <a:bodyPr xmlns:a="http://schemas.openxmlformats.org/drawingml/2006/main" anchor="t"/>
+          <a:lstStyle xmlns:a="http://schemas.openxmlformats.org/drawingml/2006/main"/>
+          <a:p xmlns:a="http://schemas.openxmlformats.org/drawingml/2006/main">
+            <a:pPr algn="l">
+              <a:defRPr sz="1350" b="1">
+                <a:solidFill>
+                  <a:srgbClr val="172033"/>
+                </a:solidFill>
+              </a:defRPr>
+            </a:pPr>
+            <a:r>
+              <a:rPr sz="1350" b="1">
+                <a:solidFill>
+                  <a:srgbClr val="172033"/>
+                </a:solidFill>
+              </a:rPr>
+              <a:t>Report pack</a:t>
+            </a:r>
+          </a:p>
+        </p:txBody>
+      </p:sp>
+      <p:sp>
+        <p:nvSpPr>
+          <p:cNvPr id="12" name="">
+            <a:extLst xmlns:a="http://schemas.openxmlformats.org/drawingml/2006/main">
+              <a:ext uri="{FF2B5EF4-FFF2-40B4-BE49-F238E27FC236}">
+                <a16:creationId xmlns:a16="http://schemas.microsoft.com/office/drawing/2014/main" id="{F913F497-D0D7-41ED-AE11-802F01456B1E}"/>
+              </a:ext>
+            </a:extLst>
+          </p:cNvPr>
+          <p:cNvSpPr>
+            <a:spLocks xmlns:a="http://schemas.openxmlformats.org/drawingml/2006/main" noGrp="1"/>
+          </p:cNvSpPr>
+          <p:nvPr/>
+        </p:nvSpPr>
+        <p:spPr>
+          <a:xfrm xmlns:a="http://schemas.openxmlformats.org/drawingml/2006/main">
+            <a:off x="4572000" y="2914650"/>
+            <a:ext cx="2762250" cy="742950"/>
+          </a:xfrm>
+          <a:prstGeom xmlns:a="http://schemas.openxmlformats.org/drawingml/2006/main" prst="rect">
+            <a:avLst/>
+          </a:prstGeom>
+          <a:ln xmlns:a="http://schemas.openxmlformats.org/drawingml/2006/main" w="0">
+            <a:solidFill>
+              <a:srgbClr val="FFFFFF"/>
+            </a:solidFill>
+            <a:prstDash val="solid"/>
+          </a:ln>
+        </p:spPr>
+        <p:txBody>
+          <a:bodyPr xmlns:a="http://schemas.openxmlformats.org/drawingml/2006/main" anchor="t"/>
+          <a:lstStyle xmlns:a="http://schemas.openxmlformats.org/drawingml/2006/main"/>
+          <a:p xmlns:a="http://schemas.openxmlformats.org/drawingml/2006/main">
+            <a:pPr algn="l">
+              <a:defRPr sz="1050" b="0">
+                <a:solidFill>
+                  <a:srgbClr val="5F6F86"/>
+                </a:solidFill>
+              </a:defRPr>
+            </a:pPr>
+            <a:r>
+              <a:rPr sz="1050" b="0">
+                <a:solidFill>
+                  <a:srgbClr val="5F6F86"/>
+                </a:solidFill>
+              </a:rPr>
+              <a:t>General Ledger, Journal, and P&amp;L by month, alongside the three statements.</a:t>
+            </a:r>
+          </a:p>
+        </p:txBody>
+      </p:sp>
+      <p:sp>
+        <p:nvSpPr>
+          <p:cNvPr id="13" name="">
+            <a:extLst xmlns:a="http://schemas.openxmlformats.org/drawingml/2006/main">
+              <a:ext uri="{FF2B5EF4-FFF2-40B4-BE49-F238E27FC236}">
+                <a16:creationId xmlns:a16="http://schemas.microsoft.com/office/drawing/2014/main" id="{BD9BCB69-3C97-454D-BFA0-B8D44D5A1C01}"/>
+              </a:ext>
+            </a:extLst>
+          </p:cNvPr>
+          <p:cNvSpPr>
+            <a:spLocks xmlns:a="http://schemas.openxmlformats.org/drawingml/2006/main" noGrp="1"/>
+          </p:cNvSpPr>
+          <p:nvPr/>
+        </p:nvSpPr>
+        <p:spPr>
+          <a:xfrm xmlns:a="http://schemas.openxmlformats.org/drawingml/2006/main">
+            <a:off x="8001000" y="2362200"/>
+            <a:ext cx="3162300" cy="1428750"/>
+          </a:xfrm>
+          <a:prstGeom xmlns:a="http://schemas.openxmlformats.org/drawingml/2006/main" prst="rect">
+            <a:avLst/>
+          </a:prstGeom>
+          <a:solidFill xmlns:a="http://schemas.openxmlformats.org/drawingml/2006/main">
+            <a:srgbClr val="FFFFFF"/>
+          </a:solidFill>
+          <a:ln xmlns:a="http://schemas.openxmlformats.org/drawingml/2006/main" w="0">
+            <a:solidFill>
+              <a:srgbClr val="D8E2ED"/>
+            </a:solidFill>
+            <a:prstDash val="solid"/>
+          </a:ln>
+        </p:spPr>
+      </p:sp>
+      <p:sp>
+        <p:nvSpPr>
+          <p:cNvPr id="14" name="">
+            <a:extLst xmlns:a="http://schemas.openxmlformats.org/drawingml/2006/main">
+              <a:ext uri="{FF2B5EF4-FFF2-40B4-BE49-F238E27FC236}">
+                <a16:creationId xmlns:a16="http://schemas.microsoft.com/office/drawing/2014/main" id="{33AF1B78-37D2-46F4-8458-ED334B195337}"/>
+              </a:ext>
+            </a:extLst>
+          </p:cNvPr>
+          <p:cNvSpPr>
+            <a:spLocks xmlns:a="http://schemas.openxmlformats.org/drawingml/2006/main" noGrp="1"/>
+          </p:cNvSpPr>
+          <p:nvPr/>
+        </p:nvSpPr>
+        <p:spPr>
+          <a:xfrm xmlns:a="http://schemas.openxmlformats.org/drawingml/2006/main">
+            <a:off x="8001000" y="2362200"/>
+            <a:ext cx="57150" cy="1428750"/>
+          </a:xfrm>
+          <a:prstGeom xmlns:a="http://schemas.openxmlformats.org/drawingml/2006/main" prst="rect">
+            <a:avLst/>
+          </a:prstGeom>
+          <a:solidFill xmlns:a="http://schemas.openxmlformats.org/drawingml/2006/main">
+            <a:srgbClr val="145DA0"/>
+          </a:solidFill>
+          <a:ln xmlns:a="http://schemas.openxmlformats.org/drawingml/2006/main" w="0">
+            <a:solidFill>
+              <a:srgbClr val="145DA0"/>
+            </a:solidFill>
+            <a:prstDash val="solid"/>
+          </a:ln>
+        </p:spPr>
+      </p:sp>
+      <p:sp>
+        <p:nvSpPr>
+          <p:cNvPr id="15" name="">
+            <a:extLst xmlns:a="http://schemas.openxmlformats.org/drawingml/2006/main">
+              <a:ext uri="{FF2B5EF4-FFF2-40B4-BE49-F238E27FC236}">
+                <a16:creationId xmlns:a16="http://schemas.microsoft.com/office/drawing/2014/main" id="{9B826E26-58E5-4323-8BE8-7CB4A8411D75}"/>
+              </a:ext>
+            </a:extLst>
+          </p:cNvPr>
+          <p:cNvSpPr>
+            <a:spLocks xmlns:a="http://schemas.openxmlformats.org/drawingml/2006/main" noGrp="1"/>
+          </p:cNvSpPr>
+          <p:nvPr/>
+        </p:nvSpPr>
+        <p:spPr>
+          <a:xfrm xmlns:a="http://schemas.openxmlformats.org/drawingml/2006/main">
+            <a:off x="8229600" y="2552700"/>
+            <a:ext cx="2781300" cy="285750"/>
+          </a:xfrm>
+          <a:prstGeom xmlns:a="http://schemas.openxmlformats.org/drawingml/2006/main" prst="rect">
+            <a:avLst/>
+          </a:prstGeom>
+          <a:ln xmlns:a="http://schemas.openxmlformats.org/drawingml/2006/main" w="0">
+            <a:solidFill>
+              <a:srgbClr val="FFFFFF"/>
+            </a:solidFill>
+            <a:prstDash val="solid"/>
+          </a:ln>
+        </p:spPr>
+        <p:txBody>
+          <a:bodyPr xmlns:a="http://schemas.openxmlformats.org/drawingml/2006/main" anchor="t"/>
+          <a:lstStyle xmlns:a="http://schemas.openxmlformats.org/drawingml/2006/main"/>
+          <a:p xmlns:a="http://schemas.openxmlformats.org/drawingml/2006/main">
+            <a:pPr algn="l">
+              <a:defRPr sz="1350" b="1">
+                <a:solidFill>
+                  <a:srgbClr val="172033"/>
+                </a:solidFill>
+              </a:defRPr>
+            </a:pPr>
+            <a:r>
+              <a:rPr sz="1350" b="1">
+                <a:solidFill>
+                  <a:srgbClr val="172033"/>
+                </a:solidFill>
+              </a:rPr>
+              <a:t>Job costing</a:t>
+            </a:r>
+          </a:p>
+        </p:txBody>
+      </p:sp>
+      <p:sp>
+        <p:nvSpPr>
+          <p:cNvPr id="16" name="">
+            <a:extLst xmlns:a="http://schemas.openxmlformats.org/drawingml/2006/main">
+              <a:ext uri="{FF2B5EF4-FFF2-40B4-BE49-F238E27FC236}">
+                <a16:creationId xmlns:a16="http://schemas.microsoft.com/office/drawing/2014/main" id="{64D09C05-FC33-416D-8CBC-C35F691F538B}"/>
+              </a:ext>
+            </a:extLst>
+          </p:cNvPr>
+          <p:cNvSpPr>
+            <a:spLocks xmlns:a="http://schemas.openxmlformats.org/drawingml/2006/main" noGrp="1"/>
+          </p:cNvSpPr>
+          <p:nvPr/>
+        </p:nvSpPr>
+        <p:spPr>
+          <a:xfrm xmlns:a="http://schemas.openxmlformats.org/drawingml/2006/main">
+            <a:off x="8229600" y="2914650"/>
+            <a:ext cx="2762250" cy="742950"/>
+          </a:xfrm>
+          <a:prstGeom xmlns:a="http://schemas.openxmlformats.org/drawingml/2006/main" prst="rect">
+            <a:avLst/>
+          </a:prstGeom>
+          <a:ln xmlns:a="http://schemas.openxmlformats.org/drawingml/2006/main" w="0">
+            <a:solidFill>
+              <a:srgbClr val="FFFFFF"/>
+            </a:solidFill>
+            <a:prstDash val="solid"/>
+          </a:ln>
+        </p:spPr>
+        <p:txBody>
+          <a:bodyPr xmlns:a="http://schemas.openxmlformats.org/drawingml/2006/main" anchor="t"/>
+          <a:lstStyle xmlns:a="http://schemas.openxmlformats.org/drawingml/2006/main"/>
+          <a:p xmlns:a="http://schemas.openxmlformats.org/drawingml/2006/main">
+            <a:pPr algn="l">
+              <a:defRPr sz="1050" b="0">
+                <a:solidFill>
+                  <a:srgbClr val="5F6F86"/>
+                </a:solidFill>
+              </a:defRPr>
+            </a:pPr>
+            <a:r>
+              <a:rPr sz="1050" b="0">
+                <a:solidFill>
+                  <a:srgbClr val="5F6F86"/>
+                </a:solidFill>
+              </a:rPr>
+              <a:t>Per-job profit and margin from invoices, bills, and expenses tagged with the job.</a:t>
+            </a:r>
+          </a:p>
+        </p:txBody>
+      </p:sp>
+      <p:sp>
+        <p:nvSpPr>
+          <p:cNvPr id="17" name="">
+            <a:extLst xmlns:a="http://schemas.openxmlformats.org/drawingml/2006/main">
+              <a:ext uri="{FF2B5EF4-FFF2-40B4-BE49-F238E27FC236}">
+                <a16:creationId xmlns:a16="http://schemas.microsoft.com/office/drawing/2014/main" id="{28AAA87D-D2DE-4187-AB1B-0D6209480EC6}"/>
+              </a:ext>
+            </a:extLst>
+          </p:cNvPr>
+          <p:cNvSpPr>
+            <a:spLocks xmlns:a="http://schemas.openxmlformats.org/drawingml/2006/main" noGrp="1"/>
+          </p:cNvSpPr>
+          <p:nvPr/>
+        </p:nvSpPr>
+        <p:spPr>
+          <a:xfrm xmlns:a="http://schemas.openxmlformats.org/drawingml/2006/main">
+            <a:off x="685800" y="4305300"/>
+            <a:ext cx="3162300" cy="1428750"/>
+          </a:xfrm>
+          <a:prstGeom xmlns:a="http://schemas.openxmlformats.org/drawingml/2006/main" prst="rect">
+            <a:avLst/>
+          </a:prstGeom>
+          <a:solidFill xmlns:a="http://schemas.openxmlformats.org/drawingml/2006/main">
+            <a:srgbClr val="FFFFFF"/>
+          </a:solidFill>
+          <a:ln xmlns:a="http://schemas.openxmlformats.org/drawingml/2006/main" w="0">
+            <a:solidFill>
+              <a:srgbClr val="D8E2ED"/>
+            </a:solidFill>
+            <a:prstDash val="solid"/>
+          </a:ln>
+        </p:spPr>
+      </p:sp>
+      <p:sp>
+        <p:nvSpPr>
+          <p:cNvPr id="18" name="">
+            <a:extLst xmlns:a="http://schemas.openxmlformats.org/drawingml/2006/main">
+              <a:ext uri="{FF2B5EF4-FFF2-40B4-BE49-F238E27FC236}">
+                <a16:creationId xmlns:a16="http://schemas.microsoft.com/office/drawing/2014/main" id="{1EC25C4B-9149-4F9A-AE96-AB96F829ABF6}"/>
+              </a:ext>
+            </a:extLst>
+          </p:cNvPr>
+          <p:cNvSpPr>
+            <a:spLocks xmlns:a="http://schemas.openxmlformats.org/drawingml/2006/main" noGrp="1"/>
+          </p:cNvSpPr>
+          <p:nvPr/>
+        </p:nvSpPr>
+        <p:spPr>
+          <a:xfrm xmlns:a="http://schemas.openxmlformats.org/drawingml/2006/main">
+            <a:off x="685800" y="4305300"/>
+            <a:ext cx="57150" cy="1428750"/>
           </a:xfrm>
           <a:prstGeom xmlns:a="http://schemas.openxmlformats.org/drawingml/2006/main" prst="rect">
             <a:avLst/>
@@ -11071,22 +13048,22 @@
       </p:sp>
       <p:sp>
         <p:nvSpPr>
-          <p:cNvPr id="10" name="">
-            <a:extLst xmlns:a="http://schemas.openxmlformats.org/drawingml/2006/main">
-              <a:ext uri="{FF2B5EF4-FFF2-40B4-BE49-F238E27FC236}">
-                <a16:creationId xmlns:a16="http://schemas.microsoft.com/office/drawing/2014/main" id="{541C56B5-4B89-45D7-B09A-77D0C5A0D6E0}"/>
-              </a:ext>
-            </a:extLst>
-          </p:cNvPr>
-          <p:cNvSpPr>
-            <a:spLocks xmlns:a="http://schemas.openxmlformats.org/drawingml/2006/main" noGrp="1"/>
-          </p:cNvSpPr>
-          <p:nvPr/>
-        </p:nvSpPr>
-        <p:spPr>
-          <a:xfrm xmlns:a="http://schemas.openxmlformats.org/drawingml/2006/main">
-            <a:off x="6381750" y="2533650"/>
-            <a:ext cx="2000250" cy="285750"/>
+          <p:cNvPr id="19" name="">
+            <a:extLst xmlns:a="http://schemas.openxmlformats.org/drawingml/2006/main">
+              <a:ext uri="{FF2B5EF4-FFF2-40B4-BE49-F238E27FC236}">
+                <a16:creationId xmlns:a16="http://schemas.microsoft.com/office/drawing/2014/main" id="{85B1EC40-F759-47B6-9C71-92E42F13B8A2}"/>
+              </a:ext>
+            </a:extLst>
+          </p:cNvPr>
+          <p:cNvSpPr>
+            <a:spLocks xmlns:a="http://schemas.openxmlformats.org/drawingml/2006/main" noGrp="1"/>
+          </p:cNvSpPr>
+          <p:nvPr/>
+        </p:nvSpPr>
+        <p:spPr>
+          <a:xfrm xmlns:a="http://schemas.openxmlformats.org/drawingml/2006/main">
+            <a:off x="914400" y="4495800"/>
+            <a:ext cx="2781300" cy="285750"/>
           </a:xfrm>
           <a:prstGeom xmlns:a="http://schemas.openxmlformats.org/drawingml/2006/main" prst="rect">
             <a:avLst/>
@@ -11115,29 +13092,29 @@
                   <a:srgbClr val="172033"/>
                 </a:solidFill>
               </a:rPr>
-              <a:t>Books Complete</a:t>
-            </a:r>
-          </a:p>
-        </p:txBody>
-      </p:sp>
-      <p:sp>
-        <p:nvSpPr>
-          <p:cNvPr id="11" name="">
-            <a:extLst xmlns:a="http://schemas.openxmlformats.org/drawingml/2006/main">
-              <a:ext uri="{FF2B5EF4-FFF2-40B4-BE49-F238E27FC236}">
-                <a16:creationId xmlns:a16="http://schemas.microsoft.com/office/drawing/2014/main" id="{4A45CBEC-168D-40B4-B42E-9F839B2BFF0F}"/>
-              </a:ext>
-            </a:extLst>
-          </p:cNvPr>
-          <p:cNvSpPr>
-            <a:spLocks xmlns:a="http://schemas.openxmlformats.org/drawingml/2006/main" noGrp="1"/>
-          </p:cNvSpPr>
-          <p:nvPr/>
-        </p:nvSpPr>
-        <p:spPr>
-          <a:xfrm xmlns:a="http://schemas.openxmlformats.org/drawingml/2006/main">
-            <a:off x="6381750" y="2895600"/>
-            <a:ext cx="1981200" cy="952500"/>
+              <a:t>Credits &amp; void</a:t>
+            </a:r>
+          </a:p>
+        </p:txBody>
+      </p:sp>
+      <p:sp>
+        <p:nvSpPr>
+          <p:cNvPr id="20" name="">
+            <a:extLst xmlns:a="http://schemas.openxmlformats.org/drawingml/2006/main">
+              <a:ext uri="{FF2B5EF4-FFF2-40B4-BE49-F238E27FC236}">
+                <a16:creationId xmlns:a16="http://schemas.microsoft.com/office/drawing/2014/main" id="{241D26EA-51D6-460E-B258-861352DC9A47}"/>
+              </a:ext>
+            </a:extLst>
+          </p:cNvPr>
+          <p:cNvSpPr>
+            <a:spLocks xmlns:a="http://schemas.openxmlformats.org/drawingml/2006/main" noGrp="1"/>
+          </p:cNvSpPr>
+          <p:nvPr/>
+        </p:nvSpPr>
+        <p:spPr>
+          <a:xfrm xmlns:a="http://schemas.openxmlformats.org/drawingml/2006/main">
+            <a:off x="914400" y="4857750"/>
+            <a:ext cx="2762250" cy="742950"/>
           </a:xfrm>
           <a:prstGeom xmlns:a="http://schemas.openxmlformats.org/drawingml/2006/main" prst="rect">
             <a:avLst/>
@@ -11166,29 +13143,29 @@
                   <a:srgbClr val="5F6F86"/>
                 </a:solidFill>
               </a:rPr>
-              <a:t>$28,000 adds bank reconciliation, cash-flow statement, data migration from current books, and 30-day hypercare.</a:t>
-            </a:r>
-          </a:p>
-        </p:txBody>
-      </p:sp>
-      <p:sp>
-        <p:nvSpPr>
-          <p:cNvPr id="12" name="">
-            <a:extLst xmlns:a="http://schemas.openxmlformats.org/drawingml/2006/main">
-              <a:ext uri="{FF2B5EF4-FFF2-40B4-BE49-F238E27FC236}">
-                <a16:creationId xmlns:a16="http://schemas.microsoft.com/office/drawing/2014/main" id="{4A90BCDB-6464-4B82-AE39-5AEE4265E202}"/>
-              </a:ext>
-            </a:extLst>
-          </p:cNvPr>
-          <p:cNvSpPr>
-            <a:spLocks xmlns:a="http://schemas.openxmlformats.org/drawingml/2006/main" noGrp="1"/>
-          </p:cNvSpPr>
-          <p:nvPr/>
-        </p:nvSpPr>
-        <p:spPr>
-          <a:xfrm xmlns:a="http://schemas.openxmlformats.org/drawingml/2006/main">
-            <a:off x="8858250" y="2343150"/>
-            <a:ext cx="2381250" cy="1638300"/>
+              <a:t>Credit memos, vendor credits, and void — every correction an append-only reversal.</a:t>
+            </a:r>
+          </a:p>
+        </p:txBody>
+      </p:sp>
+      <p:sp>
+        <p:nvSpPr>
+          <p:cNvPr id="21" name="">
+            <a:extLst xmlns:a="http://schemas.openxmlformats.org/drawingml/2006/main">
+              <a:ext uri="{FF2B5EF4-FFF2-40B4-BE49-F238E27FC236}">
+                <a16:creationId xmlns:a16="http://schemas.microsoft.com/office/drawing/2014/main" id="{7F36EFC5-2FF5-448A-9346-D44E15EB35ED}"/>
+              </a:ext>
+            </a:extLst>
+          </p:cNvPr>
+          <p:cNvSpPr>
+            <a:spLocks xmlns:a="http://schemas.openxmlformats.org/drawingml/2006/main" noGrp="1"/>
+          </p:cNvSpPr>
+          <p:nvPr/>
+        </p:nvSpPr>
+        <p:spPr>
+          <a:xfrm xmlns:a="http://schemas.openxmlformats.org/drawingml/2006/main">
+            <a:off x="4343400" y="4305300"/>
+            <a:ext cx="3162300" cy="1428750"/>
           </a:xfrm>
           <a:prstGeom xmlns:a="http://schemas.openxmlformats.org/drawingml/2006/main" prst="rect">
             <a:avLst/>
@@ -11206,22 +13183,22 @@
       </p:sp>
       <p:sp>
         <p:nvSpPr>
-          <p:cNvPr id="13" name="">
-            <a:extLst xmlns:a="http://schemas.openxmlformats.org/drawingml/2006/main">
-              <a:ext uri="{FF2B5EF4-FFF2-40B4-BE49-F238E27FC236}">
-                <a16:creationId xmlns:a16="http://schemas.microsoft.com/office/drawing/2014/main" id="{80A4E665-28C2-4F01-8547-4CF042D399BE}"/>
-              </a:ext>
-            </a:extLst>
-          </p:cNvPr>
-          <p:cNvSpPr>
-            <a:spLocks xmlns:a="http://schemas.openxmlformats.org/drawingml/2006/main" noGrp="1"/>
-          </p:cNvSpPr>
-          <p:nvPr/>
-        </p:nvSpPr>
-        <p:spPr>
-          <a:xfrm xmlns:a="http://schemas.openxmlformats.org/drawingml/2006/main">
-            <a:off x="8858250" y="2343150"/>
-            <a:ext cx="57150" cy="1638300"/>
+          <p:cNvPr id="22" name="">
+            <a:extLst xmlns:a="http://schemas.openxmlformats.org/drawingml/2006/main">
+              <a:ext uri="{FF2B5EF4-FFF2-40B4-BE49-F238E27FC236}">
+                <a16:creationId xmlns:a16="http://schemas.microsoft.com/office/drawing/2014/main" id="{713A4C02-18EA-4C55-8C52-23D12414DC7F}"/>
+              </a:ext>
+            </a:extLst>
+          </p:cNvPr>
+          <p:cNvSpPr>
+            <a:spLocks xmlns:a="http://schemas.openxmlformats.org/drawingml/2006/main" noGrp="1"/>
+          </p:cNvSpPr>
+          <p:nvPr/>
+        </p:nvSpPr>
+        <p:spPr>
+          <a:xfrm xmlns:a="http://schemas.openxmlformats.org/drawingml/2006/main">
+            <a:off x="4343400" y="4305300"/>
+            <a:ext cx="57150" cy="1428750"/>
           </a:xfrm>
           <a:prstGeom xmlns:a="http://schemas.openxmlformats.org/drawingml/2006/main" prst="rect">
             <a:avLst/>
@@ -11239,22 +13216,22 @@
       </p:sp>
       <p:sp>
         <p:nvSpPr>
-          <p:cNvPr id="14" name="">
-            <a:extLst xmlns:a="http://schemas.openxmlformats.org/drawingml/2006/main">
-              <a:ext uri="{FF2B5EF4-FFF2-40B4-BE49-F238E27FC236}">
-                <a16:creationId xmlns:a16="http://schemas.microsoft.com/office/drawing/2014/main" id="{CFF9D4AE-D08C-40C3-83F2-356DB3E6372D}"/>
-              </a:ext>
-            </a:extLst>
-          </p:cNvPr>
-          <p:cNvSpPr>
-            <a:spLocks xmlns:a="http://schemas.openxmlformats.org/drawingml/2006/main" noGrp="1"/>
-          </p:cNvSpPr>
-          <p:nvPr/>
-        </p:nvSpPr>
-        <p:spPr>
-          <a:xfrm xmlns:a="http://schemas.openxmlformats.org/drawingml/2006/main">
-            <a:off x="9086850" y="2533650"/>
-            <a:ext cx="2000250" cy="285750"/>
+          <p:cNvPr id="23" name="">
+            <a:extLst xmlns:a="http://schemas.openxmlformats.org/drawingml/2006/main">
+              <a:ext uri="{FF2B5EF4-FFF2-40B4-BE49-F238E27FC236}">
+                <a16:creationId xmlns:a16="http://schemas.microsoft.com/office/drawing/2014/main" id="{1D4C4383-DFEE-4335-92FE-E4759FAB6D7F}"/>
+              </a:ext>
+            </a:extLst>
+          </p:cNvPr>
+          <p:cNvSpPr>
+            <a:spLocks xmlns:a="http://schemas.openxmlformats.org/drawingml/2006/main" noGrp="1"/>
+          </p:cNvSpPr>
+          <p:nvPr/>
+        </p:nvSpPr>
+        <p:spPr>
+          <a:xfrm xmlns:a="http://schemas.openxmlformats.org/drawingml/2006/main">
+            <a:off x="4572000" y="4495800"/>
+            <a:ext cx="2781300" cy="285750"/>
           </a:xfrm>
           <a:prstGeom xmlns:a="http://schemas.openxmlformats.org/drawingml/2006/main" prst="rect">
             <a:avLst/>
@@ -11283,29 +13260,29 @@
                   <a:srgbClr val="172033"/>
                 </a:solidFill>
               </a:rPr>
-              <a:t>Books Care</a:t>
-            </a:r>
-          </a:p>
-        </p:txBody>
-      </p:sp>
-      <p:sp>
-        <p:nvSpPr>
-          <p:cNvPr id="15" name="">
-            <a:extLst xmlns:a="http://schemas.openxmlformats.org/drawingml/2006/main">
-              <a:ext uri="{FF2B5EF4-FFF2-40B4-BE49-F238E27FC236}">
-                <a16:creationId xmlns:a16="http://schemas.microsoft.com/office/drawing/2014/main" id="{F126733A-EC19-4083-9ABA-705C27287DEC}"/>
-              </a:ext>
-            </a:extLst>
-          </p:cNvPr>
-          <p:cNvSpPr>
-            <a:spLocks xmlns:a="http://schemas.openxmlformats.org/drawingml/2006/main" noGrp="1"/>
-          </p:cNvSpPr>
-          <p:nvPr/>
-        </p:nvSpPr>
-        <p:spPr>
-          <a:xfrm xmlns:a="http://schemas.openxmlformats.org/drawingml/2006/main">
-            <a:off x="9086850" y="2895600"/>
-            <a:ext cx="1981200" cy="952500"/>
+              <a:t>Customer statements</a:t>
+            </a:r>
+          </a:p>
+        </p:txBody>
+      </p:sp>
+      <p:sp>
+        <p:nvSpPr>
+          <p:cNvPr id="24" name="">
+            <a:extLst xmlns:a="http://schemas.openxmlformats.org/drawingml/2006/main">
+              <a:ext uri="{FF2B5EF4-FFF2-40B4-BE49-F238E27FC236}">
+                <a16:creationId xmlns:a16="http://schemas.microsoft.com/office/drawing/2014/main" id="{94960AC2-D3C8-4253-8B79-00BEB6985AB3}"/>
+              </a:ext>
+            </a:extLst>
+          </p:cNvPr>
+          <p:cNvSpPr>
+            <a:spLocks xmlns:a="http://schemas.openxmlformats.org/drawingml/2006/main" noGrp="1"/>
+          </p:cNvSpPr>
+          <p:nvPr/>
+        </p:nvSpPr>
+        <p:spPr>
+          <a:xfrm xmlns:a="http://schemas.openxmlformats.org/drawingml/2006/main">
+            <a:off x="4572000" y="4857750"/>
+            <a:ext cx="2762250" cy="742950"/>
           </a:xfrm>
           <a:prstGeom xmlns:a="http://schemas.openxmlformats.org/drawingml/2006/main" prst="rect">
             <a:avLst/>
@@ -11334,29 +13311,29 @@
                   <a:srgbClr val="5F6F86"/>
                 </a:solidFill>
               </a:rPr>
-              <a:t>Optional monthly lane for month-end review, reconciliation checks, and small accounting changes.</a:t>
-            </a:r>
-          </a:p>
-        </p:txBody>
-      </p:sp>
-      <p:sp>
-        <p:nvSpPr>
-          <p:cNvPr id="16" name="">
-            <a:extLst xmlns:a="http://schemas.openxmlformats.org/drawingml/2006/main">
-              <a:ext uri="{FF2B5EF4-FFF2-40B4-BE49-F238E27FC236}">
-                <a16:creationId xmlns:a16="http://schemas.microsoft.com/office/drawing/2014/main" id="{9D18E898-C0E7-4EFB-9D89-6D6905DFD093}"/>
-              </a:ext>
-            </a:extLst>
-          </p:cNvPr>
-          <p:cNvSpPr>
-            <a:spLocks xmlns:a="http://schemas.openxmlformats.org/drawingml/2006/main" noGrp="1"/>
-          </p:cNvSpPr>
-          <p:nvPr/>
-        </p:nvSpPr>
-        <p:spPr>
-          <a:xfrm xmlns:a="http://schemas.openxmlformats.org/drawingml/2006/main">
-            <a:off x="6153150" y="4343400"/>
-            <a:ext cx="5086350" cy="1143000"/>
+              <a:t>A PDF of a customer’s open invoices with ages and total due, collections-ready.</a:t>
+            </a:r>
+          </a:p>
+        </p:txBody>
+      </p:sp>
+      <p:sp>
+        <p:nvSpPr>
+          <p:cNvPr id="25" name="">
+            <a:extLst xmlns:a="http://schemas.openxmlformats.org/drawingml/2006/main">
+              <a:ext uri="{FF2B5EF4-FFF2-40B4-BE49-F238E27FC236}">
+                <a16:creationId xmlns:a16="http://schemas.microsoft.com/office/drawing/2014/main" id="{D0B266BB-90C4-4E23-9E77-C606AC47D6AC}"/>
+              </a:ext>
+            </a:extLst>
+          </p:cNvPr>
+          <p:cNvSpPr>
+            <a:spLocks xmlns:a="http://schemas.openxmlformats.org/drawingml/2006/main" noGrp="1"/>
+          </p:cNvSpPr>
+          <p:nvPr/>
+        </p:nvSpPr>
+        <p:spPr>
+          <a:xfrm xmlns:a="http://schemas.openxmlformats.org/drawingml/2006/main">
+            <a:off x="8001000" y="4305300"/>
+            <a:ext cx="3162300" cy="1428750"/>
           </a:xfrm>
           <a:prstGeom xmlns:a="http://schemas.openxmlformats.org/drawingml/2006/main" prst="rect">
             <a:avLst/>
@@ -11374,55 +13351,55 @@
       </p:sp>
       <p:sp>
         <p:nvSpPr>
-          <p:cNvPr id="17" name="">
-            <a:extLst xmlns:a="http://schemas.openxmlformats.org/drawingml/2006/main">
-              <a:ext uri="{FF2B5EF4-FFF2-40B4-BE49-F238E27FC236}">
-                <a16:creationId xmlns:a16="http://schemas.microsoft.com/office/drawing/2014/main" id="{D1460619-F5FE-4A5A-8E2F-4A865EBDE4C4}"/>
-              </a:ext>
-            </a:extLst>
-          </p:cNvPr>
-          <p:cNvSpPr>
-            <a:spLocks xmlns:a="http://schemas.openxmlformats.org/drawingml/2006/main" noGrp="1"/>
-          </p:cNvSpPr>
-          <p:nvPr/>
-        </p:nvSpPr>
-        <p:spPr>
-          <a:xfrm xmlns:a="http://schemas.openxmlformats.org/drawingml/2006/main">
-            <a:off x="6153150" y="4343400"/>
-            <a:ext cx="57150" cy="1143000"/>
+          <p:cNvPr id="26" name="">
+            <a:extLst xmlns:a="http://schemas.openxmlformats.org/drawingml/2006/main">
+              <a:ext uri="{FF2B5EF4-FFF2-40B4-BE49-F238E27FC236}">
+                <a16:creationId xmlns:a16="http://schemas.microsoft.com/office/drawing/2014/main" id="{45385A67-694A-4F07-A6E3-C5D6BD47555D}"/>
+              </a:ext>
+            </a:extLst>
+          </p:cNvPr>
+          <p:cNvSpPr>
+            <a:spLocks xmlns:a="http://schemas.openxmlformats.org/drawingml/2006/main" noGrp="1"/>
+          </p:cNvSpPr>
+          <p:nvPr/>
+        </p:nvSpPr>
+        <p:spPr>
+          <a:xfrm xmlns:a="http://schemas.openxmlformats.org/drawingml/2006/main">
+            <a:off x="8001000" y="4305300"/>
+            <a:ext cx="57150" cy="1428750"/>
           </a:xfrm>
           <a:prstGeom xmlns:a="http://schemas.openxmlformats.org/drawingml/2006/main" prst="rect">
             <a:avLst/>
           </a:prstGeom>
           <a:solidFill xmlns:a="http://schemas.openxmlformats.org/drawingml/2006/main">
-            <a:srgbClr val="145DA0"/>
+            <a:srgbClr val="23A6D5"/>
           </a:solidFill>
           <a:ln xmlns:a="http://schemas.openxmlformats.org/drawingml/2006/main" w="0">
             <a:solidFill>
-              <a:srgbClr val="145DA0"/>
-            </a:solidFill>
-            <a:prstDash val="solid"/>
-          </a:ln>
-        </p:spPr>
-      </p:sp>
-      <p:sp>
-        <p:nvSpPr>
-          <p:cNvPr id="18" name="">
-            <a:extLst xmlns:a="http://schemas.openxmlformats.org/drawingml/2006/main">
-              <a:ext uri="{FF2B5EF4-FFF2-40B4-BE49-F238E27FC236}">
-                <a16:creationId xmlns:a16="http://schemas.microsoft.com/office/drawing/2014/main" id="{44DDC60E-270D-4213-8272-41A7E780F7C5}"/>
-              </a:ext>
-            </a:extLst>
-          </p:cNvPr>
-          <p:cNvSpPr>
-            <a:spLocks xmlns:a="http://schemas.openxmlformats.org/drawingml/2006/main" noGrp="1"/>
-          </p:cNvSpPr>
-          <p:nvPr/>
-        </p:nvSpPr>
-        <p:spPr>
-          <a:xfrm xmlns:a="http://schemas.openxmlformats.org/drawingml/2006/main">
-            <a:off x="6381750" y="4533900"/>
-            <a:ext cx="4705350" cy="285750"/>
+              <a:srgbClr val="23A6D5"/>
+            </a:solidFill>
+            <a:prstDash val="solid"/>
+          </a:ln>
+        </p:spPr>
+      </p:sp>
+      <p:sp>
+        <p:nvSpPr>
+          <p:cNvPr id="27" name="">
+            <a:extLst xmlns:a="http://schemas.openxmlformats.org/drawingml/2006/main">
+              <a:ext uri="{FF2B5EF4-FFF2-40B4-BE49-F238E27FC236}">
+                <a16:creationId xmlns:a16="http://schemas.microsoft.com/office/drawing/2014/main" id="{151F53B0-7AFB-46AA-B284-732EB5854902}"/>
+              </a:ext>
+            </a:extLst>
+          </p:cNvPr>
+          <p:cNvSpPr>
+            <a:spLocks xmlns:a="http://schemas.openxmlformats.org/drawingml/2006/main" noGrp="1"/>
+          </p:cNvSpPr>
+          <p:nvPr/>
+        </p:nvSpPr>
+        <p:spPr>
+          <a:xfrm xmlns:a="http://schemas.openxmlformats.org/drawingml/2006/main">
+            <a:off x="8229600" y="4495800"/>
+            <a:ext cx="2781300" cy="285750"/>
           </a:xfrm>
           <a:prstGeom xmlns:a="http://schemas.openxmlformats.org/drawingml/2006/main" prst="rect">
             <a:avLst/>
@@ -11451,29 +13428,29 @@
                   <a:srgbClr val="172033"/>
                 </a:solidFill>
               </a:rPr>
-              <a:t>Builds on what is shipped</a:t>
-            </a:r>
-          </a:p>
-        </p:txBody>
-      </p:sp>
-      <p:sp>
-        <p:nvSpPr>
-          <p:cNvPr id="19" name="">
-            <a:extLst xmlns:a="http://schemas.openxmlformats.org/drawingml/2006/main">
-              <a:ext uri="{FF2B5EF4-FFF2-40B4-BE49-F238E27FC236}">
-                <a16:creationId xmlns:a16="http://schemas.microsoft.com/office/drawing/2014/main" id="{659BF877-1333-44F2-8DF6-B8EA6342D37C}"/>
-              </a:ext>
-            </a:extLst>
-          </p:cNvPr>
-          <p:cNvSpPr>
-            <a:spLocks xmlns:a="http://schemas.openxmlformats.org/drawingml/2006/main" noGrp="1"/>
-          </p:cNvSpPr>
-          <p:nvPr/>
-        </p:nvSpPr>
-        <p:spPr>
-          <a:xfrm xmlns:a="http://schemas.openxmlformats.org/drawingml/2006/main">
-            <a:off x="6381750" y="4895850"/>
-            <a:ext cx="4686300" cy="457200"/>
+              <a:t>Recurring &amp; expenses</a:t>
+            </a:r>
+          </a:p>
+        </p:txBody>
+      </p:sp>
+      <p:sp>
+        <p:nvSpPr>
+          <p:cNvPr id="28" name="">
+            <a:extLst xmlns:a="http://schemas.openxmlformats.org/drawingml/2006/main">
+              <a:ext uri="{FF2B5EF4-FFF2-40B4-BE49-F238E27FC236}">
+                <a16:creationId xmlns:a16="http://schemas.microsoft.com/office/drawing/2014/main" id="{FA5D5E79-8587-4579-8261-A1549D68DA3A}"/>
+              </a:ext>
+            </a:extLst>
+          </p:cNvPr>
+          <p:cNvSpPr>
+            <a:spLocks xmlns:a="http://schemas.openxmlformats.org/drawingml/2006/main" noGrp="1"/>
+          </p:cNvSpPr>
+          <p:nvPr/>
+        </p:nvSpPr>
+        <p:spPr>
+          <a:xfrm xmlns:a="http://schemas.openxmlformats.org/drawingml/2006/main">
+            <a:off x="8229600" y="4857750"/>
+            <a:ext cx="2762250" cy="742950"/>
           </a:xfrm>
           <a:prstGeom xmlns:a="http://schemas.openxmlformats.org/drawingml/2006/main" prst="rect">
             <a:avLst/>
@@ -11502,17 +13479,17 @@
                   <a:srgbClr val="5F6F86"/>
                 </a:solidFill>
               </a:rPr>
-              <a:t>The ledger, A/R, A/P, statements, period close, and invoice/bill PDFs are already built. This phase tailors and rolls them out for Raves.</a:t>
-            </a:r>
-          </a:p>
-        </p:txBody>
-      </p:sp>
-      <p:sp>
-        <p:nvSpPr>
-          <p:cNvPr id="20" name="">
-            <a:extLst xmlns:a="http://schemas.openxmlformats.org/drawingml/2006/main">
-              <a:ext uri="{FF2B5EF4-FFF2-40B4-BE49-F238E27FC236}">
-                <a16:creationId xmlns:a16="http://schemas.microsoft.com/office/drawing/2014/main" id="{183FB585-6F48-48AE-8B55-C03543F5EA38}"/>
+              <a:t>Recurring invoices, bills, and journals that never double-post; one-click expenses.</a:t>
+            </a:r>
+          </a:p>
+        </p:txBody>
+      </p:sp>
+      <p:sp>
+        <p:nvSpPr>
+          <p:cNvPr id="29" name="">
+            <a:extLst xmlns:a="http://schemas.openxmlformats.org/drawingml/2006/main">
+              <a:ext uri="{FF2B5EF4-FFF2-40B4-BE49-F238E27FC236}">
+                <a16:creationId xmlns:a16="http://schemas.microsoft.com/office/drawing/2014/main" id="{FC7C6FC9-B5D4-44B3-B9E8-C633C4E928B7}"/>
               </a:ext>
             </a:extLst>
           </p:cNvPr>
@@ -11560,10 +13537,10 @@
       </p:sp>
       <p:sp>
         <p:nvSpPr>
-          <p:cNvPr id="21" name="">
-            <a:extLst xmlns:a="http://schemas.openxmlformats.org/drawingml/2006/main">
-              <a:ext uri="{FF2B5EF4-FFF2-40B4-BE49-F238E27FC236}">
-                <a16:creationId xmlns:a16="http://schemas.microsoft.com/office/drawing/2014/main" id="{6CFF6698-99F1-48D2-9F2C-DB6DB78B2483}"/>
+          <p:cNvPr id="30" name="">
+            <a:extLst xmlns:a="http://schemas.openxmlformats.org/drawingml/2006/main">
+              <a:ext uri="{FF2B5EF4-FFF2-40B4-BE49-F238E27FC236}">
+                <a16:creationId xmlns:a16="http://schemas.microsoft.com/office/drawing/2014/main" id="{ECA9EDDD-6BC7-481D-9307-5AD93AC913C1}"/>
               </a:ext>
             </a:extLst>
           </p:cNvPr>
@@ -11612,7 +13589,7 @@
     </p:spTree>
     <p:extLst>
       <p:ext uri="{BB962C8B-B14F-4D97-AF65-F5344CB8AC3E}">
-        <p14:creationId xmlns:p14="http://schemas.microsoft.com/office/powerpoint/2010/main" val="930396045"/>
+        <p14:creationId xmlns:p14="http://schemas.microsoft.com/office/powerpoint/2010/main" val="534653633"/>
       </p:ext>
     </p:extLst>
   </p:cSld>
@@ -11636,7 +13613,7 @@
           <p:cNvPr id="1" name="">
             <a:extLst xmlns:a="http://schemas.openxmlformats.org/drawingml/2006/main">
               <a:ext uri="{FF2B5EF4-FFF2-40B4-BE49-F238E27FC236}">
-                <a16:creationId xmlns:a16="http://schemas.microsoft.com/office/drawing/2014/main" id="{61B051F0-84F3-4EC1-8F81-AEEDA36CBFA9}"/>
+                <a16:creationId xmlns:a16="http://schemas.microsoft.com/office/drawing/2014/main" id="{27F61793-E149-42BA-A856-162C34B5C8AA}"/>
               </a:ext>
             </a:extLst>
           </p:cNvPr>
@@ -11669,7 +13646,7 @@
           <p:cNvPr id="2" name="">
             <a:extLst xmlns:a="http://schemas.openxmlformats.org/drawingml/2006/main">
               <a:ext uri="{FF2B5EF4-FFF2-40B4-BE49-F238E27FC236}">
-                <a16:creationId xmlns:a16="http://schemas.microsoft.com/office/drawing/2014/main" id="{0786228F-E109-4E84-A06A-BF505A1D6E03}"/>
+                <a16:creationId xmlns:a16="http://schemas.microsoft.com/office/drawing/2014/main" id="{253C06E6-73C8-4B55-AE3C-AC1008D30A67}"/>
               </a:ext>
             </a:extLst>
           </p:cNvPr>
@@ -11710,7 +13687,7 @@
                   <a:srgbClr val="5F6F86"/>
                 </a:solidFill>
               </a:rPr>
-              <a:t>MUTUAL ACTION PLAN</a:t>
+              <a:t>COMMERCIAL PATH</a:t>
             </a:r>
           </a:p>
         </p:txBody>
@@ -11720,7 +13697,7 @@
           <p:cNvPr id="3" name="">
             <a:extLst xmlns:a="http://schemas.openxmlformats.org/drawingml/2006/main">
               <a:ext uri="{FF2B5EF4-FFF2-40B4-BE49-F238E27FC236}">
-                <a16:creationId xmlns:a16="http://schemas.microsoft.com/office/drawing/2014/main" id="{2B57EFAE-7866-471C-9A33-78E06310B7D6}"/>
+                <a16:creationId xmlns:a16="http://schemas.microsoft.com/office/drawing/2014/main" id="{ECF6DEC2-9423-4259-BB97-1DCDF90A7B06}"/>
               </a:ext>
             </a:extLst>
           </p:cNvPr>
@@ -11761,7 +13738,7 @@
                   <a:srgbClr val="172033"/>
                 </a:solidFill>
               </a:rPr>
-              <a:t>A simple path from decision to first clean month-end.</a:t>
+              <a:t>One clean foundation build, then an optional close-support lane.</a:t>
             </a:r>
           </a:p>
         </p:txBody>
@@ -11771,19 +13748,222 @@
           <p:cNvPr id="4" name="">
             <a:extLst xmlns:a="http://schemas.openxmlformats.org/drawingml/2006/main">
               <a:ext uri="{FF2B5EF4-FFF2-40B4-BE49-F238E27FC236}">
-                <a16:creationId xmlns:a16="http://schemas.microsoft.com/office/drawing/2014/main" id="{8A203550-88A3-44B9-B661-94F22AD63E28}"/>
-              </a:ext>
-            </a:extLst>
-          </p:cNvPr>
-          <p:cNvSpPr>
-            <a:spLocks xmlns:a="http://schemas.openxmlformats.org/drawingml/2006/main" noGrp="1"/>
-          </p:cNvSpPr>
-          <p:nvPr/>
-        </p:nvSpPr>
-        <p:spPr>
-          <a:xfrm xmlns:a="http://schemas.openxmlformats.org/drawingml/2006/main">
-            <a:off x="685800" y="2667000"/>
-            <a:ext cx="1676400" cy="1676400"/>
+                <a16:creationId xmlns:a16="http://schemas.microsoft.com/office/drawing/2014/main" id="{DDF76618-6273-4069-B4F1-D2E034F67846}"/>
+              </a:ext>
+            </a:extLst>
+          </p:cNvPr>
+          <p:cNvSpPr>
+            <a:spLocks xmlns:a="http://schemas.openxmlformats.org/drawingml/2006/main" noGrp="1"/>
+          </p:cNvSpPr>
+          <p:nvPr/>
+        </p:nvSpPr>
+        <p:spPr>
+          <a:xfrm xmlns:a="http://schemas.openxmlformats.org/drawingml/2006/main">
+            <a:off x="685800" y="2343150"/>
+            <a:ext cx="4876800" cy="2705100"/>
+          </a:xfrm>
+          <a:prstGeom xmlns:a="http://schemas.openxmlformats.org/drawingml/2006/main" prst="rect">
+            <a:avLst/>
+          </a:prstGeom>
+          <a:solidFill xmlns:a="http://schemas.openxmlformats.org/drawingml/2006/main">
+            <a:srgbClr val="0B1F33"/>
+          </a:solidFill>
+          <a:ln xmlns:a="http://schemas.openxmlformats.org/drawingml/2006/main" w="0">
+            <a:solidFill>
+              <a:srgbClr val="0B1F33"/>
+            </a:solidFill>
+            <a:prstDash val="solid"/>
+          </a:ln>
+        </p:spPr>
+      </p:sp>
+      <p:sp>
+        <p:nvSpPr>
+          <p:cNvPr id="5" name="">
+            <a:extLst xmlns:a="http://schemas.openxmlformats.org/drawingml/2006/main">
+              <a:ext uri="{FF2B5EF4-FFF2-40B4-BE49-F238E27FC236}">
+                <a16:creationId xmlns:a16="http://schemas.microsoft.com/office/drawing/2014/main" id="{4791A540-A161-428B-852E-07B52264A652}"/>
+              </a:ext>
+            </a:extLst>
+          </p:cNvPr>
+          <p:cNvSpPr>
+            <a:spLocks xmlns:a="http://schemas.openxmlformats.org/drawingml/2006/main" noGrp="1"/>
+          </p:cNvSpPr>
+          <p:nvPr/>
+        </p:nvSpPr>
+        <p:spPr>
+          <a:xfrm xmlns:a="http://schemas.openxmlformats.org/drawingml/2006/main">
+            <a:off x="1047750" y="2724150"/>
+            <a:ext cx="4095750" cy="533400"/>
+          </a:xfrm>
+          <a:prstGeom xmlns:a="http://schemas.openxmlformats.org/drawingml/2006/main" prst="rect">
+            <a:avLst/>
+          </a:prstGeom>
+          <a:ln xmlns:a="http://schemas.openxmlformats.org/drawingml/2006/main" w="0">
+            <a:solidFill>
+              <a:srgbClr val="FFFFFF"/>
+            </a:solidFill>
+            <a:prstDash val="solid"/>
+          </a:ln>
+        </p:spPr>
+        <p:txBody>
+          <a:bodyPr xmlns:a="http://schemas.openxmlformats.org/drawingml/2006/main" anchor="t"/>
+          <a:lstStyle xmlns:a="http://schemas.openxmlformats.org/drawingml/2006/main"/>
+          <a:p xmlns:a="http://schemas.openxmlformats.org/drawingml/2006/main">
+            <a:pPr algn="l">
+              <a:defRPr sz="1800" b="1">
+                <a:solidFill>
+                  <a:srgbClr val="FFFFFF"/>
+                </a:solidFill>
+              </a:defRPr>
+            </a:pPr>
+            <a:r>
+              <a:rPr sz="1800" b="1">
+                <a:solidFill>
+                  <a:srgbClr val="FFFFFF"/>
+                </a:solidFill>
+              </a:rPr>
+              <a:t>Blueprint Books Foundation</a:t>
+            </a:r>
+          </a:p>
+        </p:txBody>
+      </p:sp>
+      <p:sp>
+        <p:nvSpPr>
+          <p:cNvPr id="6" name="">
+            <a:extLst xmlns:a="http://schemas.openxmlformats.org/drawingml/2006/main">
+              <a:ext uri="{FF2B5EF4-FFF2-40B4-BE49-F238E27FC236}">
+                <a16:creationId xmlns:a16="http://schemas.microsoft.com/office/drawing/2014/main" id="{479B3E7D-33F3-45CB-9DD5-68145C5EC668}"/>
+              </a:ext>
+            </a:extLst>
+          </p:cNvPr>
+          <p:cNvSpPr>
+            <a:spLocks xmlns:a="http://schemas.openxmlformats.org/drawingml/2006/main" noGrp="1"/>
+          </p:cNvSpPr>
+          <p:nvPr/>
+        </p:nvSpPr>
+        <p:spPr>
+          <a:xfrm xmlns:a="http://schemas.openxmlformats.org/drawingml/2006/main">
+            <a:off x="1047750" y="3390900"/>
+            <a:ext cx="4000500" cy="514350"/>
+          </a:xfrm>
+          <a:prstGeom xmlns:a="http://schemas.openxmlformats.org/drawingml/2006/main" prst="rect">
+            <a:avLst/>
+          </a:prstGeom>
+          <a:ln xmlns:a="http://schemas.openxmlformats.org/drawingml/2006/main" w="0">
+            <a:solidFill>
+              <a:srgbClr val="FFFFFF"/>
+            </a:solidFill>
+            <a:prstDash val="solid"/>
+          </a:ln>
+        </p:spPr>
+        <p:txBody>
+          <a:bodyPr xmlns:a="http://schemas.openxmlformats.org/drawingml/2006/main" anchor="t"/>
+          <a:lstStyle xmlns:a="http://schemas.openxmlformats.org/drawingml/2006/main"/>
+          <a:p xmlns:a="http://schemas.openxmlformats.org/drawingml/2006/main">
+            <a:pPr algn="l">
+              <a:defRPr sz="2850" b="1">
+                <a:solidFill>
+                  <a:srgbClr val="9FE0C8"/>
+                </a:solidFill>
+              </a:defRPr>
+            </a:pPr>
+            <a:r>
+              <a:rPr sz="2850" b="1">
+                <a:solidFill>
+                  <a:srgbClr val="9FE0C8"/>
+                </a:solidFill>
+              </a:rPr>
+              <a:t>$18,500 fixed fee</a:t>
+            </a:r>
+          </a:p>
+        </p:txBody>
+      </p:sp>
+      <p:sp>
+        <p:nvSpPr>
+          <p:cNvPr id="7" name="">
+            <a:extLst xmlns:a="http://schemas.openxmlformats.org/drawingml/2006/main">
+              <a:ext uri="{FF2B5EF4-FFF2-40B4-BE49-F238E27FC236}">
+                <a16:creationId xmlns:a16="http://schemas.microsoft.com/office/drawing/2014/main" id="{0A7E8D56-1CC2-4934-A1C6-57273B42D0B8}"/>
+              </a:ext>
+            </a:extLst>
+          </p:cNvPr>
+          <p:cNvSpPr>
+            <a:spLocks xmlns:a="http://schemas.openxmlformats.org/drawingml/2006/main" noGrp="1"/>
+          </p:cNvSpPr>
+          <p:nvPr/>
+        </p:nvSpPr>
+        <p:spPr>
+          <a:xfrm xmlns:a="http://schemas.openxmlformats.org/drawingml/2006/main">
+            <a:off x="1066800" y="4038600"/>
+            <a:ext cx="3905250" cy="628650"/>
+          </a:xfrm>
+          <a:prstGeom xmlns:a="http://schemas.openxmlformats.org/drawingml/2006/main" prst="rect">
+            <a:avLst/>
+          </a:prstGeom>
+          <a:ln xmlns:a="http://schemas.openxmlformats.org/drawingml/2006/main" w="0">
+            <a:solidFill>
+              <a:srgbClr val="FFFFFF"/>
+            </a:solidFill>
+            <a:prstDash val="solid"/>
+          </a:ln>
+        </p:spPr>
+        <p:txBody>
+          <a:bodyPr xmlns:a="http://schemas.openxmlformats.org/drawingml/2006/main" anchor="t"/>
+          <a:lstStyle xmlns:a="http://schemas.openxmlformats.org/drawingml/2006/main"/>
+          <a:p xmlns:a="http://schemas.openxmlformats.org/drawingml/2006/main">
+            <a:pPr algn="l">
+              <a:defRPr sz="1350" b="0">
+                <a:solidFill>
+                  <a:srgbClr val="D9EAF8"/>
+                </a:solidFill>
+              </a:defRPr>
+            </a:pPr>
+            <a:r>
+              <a:rPr sz="1350" b="0">
+                <a:solidFill>
+                  <a:srgbClr val="D9EAF8"/>
+                </a:solidFill>
+              </a:rPr>
+              <a:t>50% start / 50% closeout</a:t>
+            </a:r>
+          </a:p>
+          <a:p xmlns:a="http://schemas.openxmlformats.org/drawingml/2006/main">
+            <a:pPr algn="l">
+              <a:defRPr sz="1350" b="0">
+                <a:solidFill>
+                  <a:srgbClr val="D9EAF8"/>
+                </a:solidFill>
+              </a:defRPr>
+            </a:pPr>
+            <a:r>
+              <a:rPr sz="1350" b="0">
+                <a:solidFill>
+                  <a:srgbClr val="D9EAF8"/>
+                </a:solidFill>
+              </a:rPr>
+              <a:t>4-5 weeks from opening-balance readiness</a:t>
+            </a:r>
+          </a:p>
+        </p:txBody>
+      </p:sp>
+      <p:sp>
+        <p:nvSpPr>
+          <p:cNvPr id="8" name="">
+            <a:extLst xmlns:a="http://schemas.openxmlformats.org/drawingml/2006/main">
+              <a:ext uri="{FF2B5EF4-FFF2-40B4-BE49-F238E27FC236}">
+                <a16:creationId xmlns:a16="http://schemas.microsoft.com/office/drawing/2014/main" id="{4ABA853F-D678-4482-A7BB-316553B4D74F}"/>
+              </a:ext>
+            </a:extLst>
+          </p:cNvPr>
+          <p:cNvSpPr>
+            <a:spLocks xmlns:a="http://schemas.openxmlformats.org/drawingml/2006/main" noGrp="1"/>
+          </p:cNvSpPr>
+          <p:nvPr/>
+        </p:nvSpPr>
+        <p:spPr>
+          <a:xfrm xmlns:a="http://schemas.openxmlformats.org/drawingml/2006/main">
+            <a:off x="6153150" y="2343150"/>
+            <a:ext cx="2381250" cy="1638300"/>
           </a:xfrm>
           <a:prstGeom xmlns:a="http://schemas.openxmlformats.org/drawingml/2006/main" prst="rect">
             <a:avLst/>
@@ -11801,22 +13981,190 @@
       </p:sp>
       <p:sp>
         <p:nvSpPr>
-          <p:cNvPr id="5" name="">
-            <a:extLst xmlns:a="http://schemas.openxmlformats.org/drawingml/2006/main">
-              <a:ext uri="{FF2B5EF4-FFF2-40B4-BE49-F238E27FC236}">
-                <a16:creationId xmlns:a16="http://schemas.microsoft.com/office/drawing/2014/main" id="{18B00CC6-0139-4523-8E7A-A5466E058F99}"/>
-              </a:ext>
-            </a:extLst>
-          </p:cNvPr>
-          <p:cNvSpPr>
-            <a:spLocks xmlns:a="http://schemas.openxmlformats.org/drawingml/2006/main" noGrp="1"/>
-          </p:cNvSpPr>
-          <p:nvPr/>
-        </p:nvSpPr>
-        <p:spPr>
-          <a:xfrm xmlns:a="http://schemas.openxmlformats.org/drawingml/2006/main">
-            <a:off x="857250" y="2895600"/>
-            <a:ext cx="419100" cy="419100"/>
+          <p:cNvPr id="9" name="">
+            <a:extLst xmlns:a="http://schemas.openxmlformats.org/drawingml/2006/main">
+              <a:ext uri="{FF2B5EF4-FFF2-40B4-BE49-F238E27FC236}">
+                <a16:creationId xmlns:a16="http://schemas.microsoft.com/office/drawing/2014/main" id="{2E3B6FDC-8D40-4FC1-9A40-336AECEACE2D}"/>
+              </a:ext>
+            </a:extLst>
+          </p:cNvPr>
+          <p:cNvSpPr>
+            <a:spLocks xmlns:a="http://schemas.openxmlformats.org/drawingml/2006/main" noGrp="1"/>
+          </p:cNvSpPr>
+          <p:nvPr/>
+        </p:nvSpPr>
+        <p:spPr>
+          <a:xfrm xmlns:a="http://schemas.openxmlformats.org/drawingml/2006/main">
+            <a:off x="6153150" y="2343150"/>
+            <a:ext cx="57150" cy="1638300"/>
+          </a:xfrm>
+          <a:prstGeom xmlns:a="http://schemas.openxmlformats.org/drawingml/2006/main" prst="rect">
+            <a:avLst/>
+          </a:prstGeom>
+          <a:solidFill xmlns:a="http://schemas.openxmlformats.org/drawingml/2006/main">
+            <a:srgbClr val="D98C16"/>
+          </a:solidFill>
+          <a:ln xmlns:a="http://schemas.openxmlformats.org/drawingml/2006/main" w="0">
+            <a:solidFill>
+              <a:srgbClr val="D98C16"/>
+            </a:solidFill>
+            <a:prstDash val="solid"/>
+          </a:ln>
+        </p:spPr>
+      </p:sp>
+      <p:sp>
+        <p:nvSpPr>
+          <p:cNvPr id="10" name="">
+            <a:extLst xmlns:a="http://schemas.openxmlformats.org/drawingml/2006/main">
+              <a:ext uri="{FF2B5EF4-FFF2-40B4-BE49-F238E27FC236}">
+                <a16:creationId xmlns:a16="http://schemas.microsoft.com/office/drawing/2014/main" id="{5A243526-FCC7-4908-BFB7-CB0907EB8C8E}"/>
+              </a:ext>
+            </a:extLst>
+          </p:cNvPr>
+          <p:cNvSpPr>
+            <a:spLocks xmlns:a="http://schemas.openxmlformats.org/drawingml/2006/main" noGrp="1"/>
+          </p:cNvSpPr>
+          <p:nvPr/>
+        </p:nvSpPr>
+        <p:spPr>
+          <a:xfrm xmlns:a="http://schemas.openxmlformats.org/drawingml/2006/main">
+            <a:off x="6381750" y="2533650"/>
+            <a:ext cx="2000250" cy="285750"/>
+          </a:xfrm>
+          <a:prstGeom xmlns:a="http://schemas.openxmlformats.org/drawingml/2006/main" prst="rect">
+            <a:avLst/>
+          </a:prstGeom>
+          <a:ln xmlns:a="http://schemas.openxmlformats.org/drawingml/2006/main" w="0">
+            <a:solidFill>
+              <a:srgbClr val="FFFFFF"/>
+            </a:solidFill>
+            <a:prstDash val="solid"/>
+          </a:ln>
+        </p:spPr>
+        <p:txBody>
+          <a:bodyPr xmlns:a="http://schemas.openxmlformats.org/drawingml/2006/main" anchor="t"/>
+          <a:lstStyle xmlns:a="http://schemas.openxmlformats.org/drawingml/2006/main"/>
+          <a:p xmlns:a="http://schemas.openxmlformats.org/drawingml/2006/main">
+            <a:pPr algn="l">
+              <a:defRPr sz="1350" b="1">
+                <a:solidFill>
+                  <a:srgbClr val="172033"/>
+                </a:solidFill>
+              </a:defRPr>
+            </a:pPr>
+            <a:r>
+              <a:rPr sz="1350" b="1">
+                <a:solidFill>
+                  <a:srgbClr val="172033"/>
+                </a:solidFill>
+              </a:rPr>
+              <a:t>Books Complete</a:t>
+            </a:r>
+          </a:p>
+        </p:txBody>
+      </p:sp>
+      <p:sp>
+        <p:nvSpPr>
+          <p:cNvPr id="11" name="">
+            <a:extLst xmlns:a="http://schemas.openxmlformats.org/drawingml/2006/main">
+              <a:ext uri="{FF2B5EF4-FFF2-40B4-BE49-F238E27FC236}">
+                <a16:creationId xmlns:a16="http://schemas.microsoft.com/office/drawing/2014/main" id="{140CBD18-3FC5-4057-AB41-8BC074D9E645}"/>
+              </a:ext>
+            </a:extLst>
+          </p:cNvPr>
+          <p:cNvSpPr>
+            <a:spLocks xmlns:a="http://schemas.openxmlformats.org/drawingml/2006/main" noGrp="1"/>
+          </p:cNvSpPr>
+          <p:nvPr/>
+        </p:nvSpPr>
+        <p:spPr>
+          <a:xfrm xmlns:a="http://schemas.openxmlformats.org/drawingml/2006/main">
+            <a:off x="6381750" y="2895600"/>
+            <a:ext cx="1981200" cy="952500"/>
+          </a:xfrm>
+          <a:prstGeom xmlns:a="http://schemas.openxmlformats.org/drawingml/2006/main" prst="rect">
+            <a:avLst/>
+          </a:prstGeom>
+          <a:ln xmlns:a="http://schemas.openxmlformats.org/drawingml/2006/main" w="0">
+            <a:solidFill>
+              <a:srgbClr val="FFFFFF"/>
+            </a:solidFill>
+            <a:prstDash val="solid"/>
+          </a:ln>
+        </p:spPr>
+        <p:txBody>
+          <a:bodyPr xmlns:a="http://schemas.openxmlformats.org/drawingml/2006/main" anchor="t"/>
+          <a:lstStyle xmlns:a="http://schemas.openxmlformats.org/drawingml/2006/main"/>
+          <a:p xmlns:a="http://schemas.openxmlformats.org/drawingml/2006/main">
+            <a:pPr algn="l">
+              <a:defRPr sz="1050" b="0">
+                <a:solidFill>
+                  <a:srgbClr val="5F6F86"/>
+                </a:solidFill>
+              </a:defRPr>
+            </a:pPr>
+            <a:r>
+              <a:rPr sz="1050" b="0">
+                <a:solidFill>
+                  <a:srgbClr val="5F6F86"/>
+                </a:solidFill>
+              </a:rPr>
+              <a:t>$28,000 adds bank reconciliation, cash-flow statement, data migration from current books, and 30-day hypercare.</a:t>
+            </a:r>
+          </a:p>
+        </p:txBody>
+      </p:sp>
+      <p:sp>
+        <p:nvSpPr>
+          <p:cNvPr id="12" name="">
+            <a:extLst xmlns:a="http://schemas.openxmlformats.org/drawingml/2006/main">
+              <a:ext uri="{FF2B5EF4-FFF2-40B4-BE49-F238E27FC236}">
+                <a16:creationId xmlns:a16="http://schemas.microsoft.com/office/drawing/2014/main" id="{CF261170-A4D4-4718-AAE5-5CFF01458E85}"/>
+              </a:ext>
+            </a:extLst>
+          </p:cNvPr>
+          <p:cNvSpPr>
+            <a:spLocks xmlns:a="http://schemas.openxmlformats.org/drawingml/2006/main" noGrp="1"/>
+          </p:cNvSpPr>
+          <p:nvPr/>
+        </p:nvSpPr>
+        <p:spPr>
+          <a:xfrm xmlns:a="http://schemas.openxmlformats.org/drawingml/2006/main">
+            <a:off x="8858250" y="2343150"/>
+            <a:ext cx="2381250" cy="1638300"/>
+          </a:xfrm>
+          <a:prstGeom xmlns:a="http://schemas.openxmlformats.org/drawingml/2006/main" prst="rect">
+            <a:avLst/>
+          </a:prstGeom>
+          <a:solidFill xmlns:a="http://schemas.openxmlformats.org/drawingml/2006/main">
+            <a:srgbClr val="FFFFFF"/>
+          </a:solidFill>
+          <a:ln xmlns:a="http://schemas.openxmlformats.org/drawingml/2006/main" w="0">
+            <a:solidFill>
+              <a:srgbClr val="D8E2ED"/>
+            </a:solidFill>
+            <a:prstDash val="solid"/>
+          </a:ln>
+        </p:spPr>
+      </p:sp>
+      <p:sp>
+        <p:nvSpPr>
+          <p:cNvPr id="13" name="">
+            <a:extLst xmlns:a="http://schemas.openxmlformats.org/drawingml/2006/main">
+              <a:ext uri="{FF2B5EF4-FFF2-40B4-BE49-F238E27FC236}">
+                <a16:creationId xmlns:a16="http://schemas.microsoft.com/office/drawing/2014/main" id="{65051D35-45EA-4A3A-A194-43902C70EE78}"/>
+              </a:ext>
+            </a:extLst>
+          </p:cNvPr>
+          <p:cNvSpPr>
+            <a:spLocks xmlns:a="http://schemas.openxmlformats.org/drawingml/2006/main" noGrp="1"/>
+          </p:cNvSpPr>
+          <p:nvPr/>
+        </p:nvSpPr>
+        <p:spPr>
+          <a:xfrm xmlns:a="http://schemas.openxmlformats.org/drawingml/2006/main">
+            <a:off x="8858250" y="2343150"/>
+            <a:ext cx="57150" cy="1638300"/>
           </a:xfrm>
           <a:prstGeom xmlns:a="http://schemas.openxmlformats.org/drawingml/2006/main" prst="rect">
             <a:avLst/>
@@ -11834,73 +14182,22 @@
       </p:sp>
       <p:sp>
         <p:nvSpPr>
-          <p:cNvPr id="6" name="">
-            <a:extLst xmlns:a="http://schemas.openxmlformats.org/drawingml/2006/main">
-              <a:ext uri="{FF2B5EF4-FFF2-40B4-BE49-F238E27FC236}">
-                <a16:creationId xmlns:a16="http://schemas.microsoft.com/office/drawing/2014/main" id="{5C044C1A-994F-4016-84DA-48878C3BEA1A}"/>
-              </a:ext>
-            </a:extLst>
-          </p:cNvPr>
-          <p:cNvSpPr>
-            <a:spLocks xmlns:a="http://schemas.openxmlformats.org/drawingml/2006/main" noGrp="1"/>
-          </p:cNvSpPr>
-          <p:nvPr/>
-        </p:nvSpPr>
-        <p:spPr>
-          <a:xfrm xmlns:a="http://schemas.openxmlformats.org/drawingml/2006/main">
-            <a:off x="857250" y="2962275"/>
-            <a:ext cx="419100" cy="285750"/>
-          </a:xfrm>
-          <a:prstGeom xmlns:a="http://schemas.openxmlformats.org/drawingml/2006/main" prst="rect">
-            <a:avLst/>
-          </a:prstGeom>
-          <a:ln xmlns:a="http://schemas.openxmlformats.org/drawingml/2006/main" w="0">
-            <a:solidFill>
-              <a:srgbClr val="FFFFFF"/>
-            </a:solidFill>
-            <a:prstDash val="solid"/>
-          </a:ln>
-        </p:spPr>
-        <p:txBody>
-          <a:bodyPr xmlns:a="http://schemas.openxmlformats.org/drawingml/2006/main" anchor="t"/>
-          <a:lstStyle xmlns:a="http://schemas.openxmlformats.org/drawingml/2006/main"/>
-          <a:p xmlns:a="http://schemas.openxmlformats.org/drawingml/2006/main">
-            <a:pPr algn="ctr">
-              <a:defRPr sz="1500" b="1">
-                <a:solidFill>
-                  <a:srgbClr val="FFFFFF"/>
-                </a:solidFill>
-              </a:defRPr>
-            </a:pPr>
-            <a:r>
-              <a:rPr sz="1500" b="1">
-                <a:solidFill>
-                  <a:srgbClr val="FFFFFF"/>
-                </a:solidFill>
-              </a:rPr>
-              <a:t>1</a:t>
-            </a:r>
-          </a:p>
-        </p:txBody>
-      </p:sp>
-      <p:sp>
-        <p:nvSpPr>
-          <p:cNvPr id="7" name="">
-            <a:extLst xmlns:a="http://schemas.openxmlformats.org/drawingml/2006/main">
-              <a:ext uri="{FF2B5EF4-FFF2-40B4-BE49-F238E27FC236}">
-                <a16:creationId xmlns:a16="http://schemas.microsoft.com/office/drawing/2014/main" id="{8BE8F063-52B9-4270-A47A-E235F9C87804}"/>
-              </a:ext>
-            </a:extLst>
-          </p:cNvPr>
-          <p:cNvSpPr>
-            <a:spLocks xmlns:a="http://schemas.openxmlformats.org/drawingml/2006/main" noGrp="1"/>
-          </p:cNvSpPr>
-          <p:nvPr/>
-        </p:nvSpPr>
-        <p:spPr>
-          <a:xfrm xmlns:a="http://schemas.openxmlformats.org/drawingml/2006/main">
-            <a:off x="857250" y="3524250"/>
-            <a:ext cx="1295400" cy="304800"/>
+          <p:cNvPr id="14" name="">
+            <a:extLst xmlns:a="http://schemas.openxmlformats.org/drawingml/2006/main">
+              <a:ext uri="{FF2B5EF4-FFF2-40B4-BE49-F238E27FC236}">
+                <a16:creationId xmlns:a16="http://schemas.microsoft.com/office/drawing/2014/main" id="{FEB30712-57F1-403F-B527-84B7C778083E}"/>
+              </a:ext>
+            </a:extLst>
+          </p:cNvPr>
+          <p:cNvSpPr>
+            <a:spLocks xmlns:a="http://schemas.openxmlformats.org/drawingml/2006/main" noGrp="1"/>
+          </p:cNvSpPr>
+          <p:nvPr/>
+        </p:nvSpPr>
+        <p:spPr>
+          <a:xfrm xmlns:a="http://schemas.openxmlformats.org/drawingml/2006/main">
+            <a:off x="9086850" y="2533650"/>
+            <a:ext cx="2000250" cy="285750"/>
           </a:xfrm>
           <a:prstGeom xmlns:a="http://schemas.openxmlformats.org/drawingml/2006/main" prst="rect">
             <a:avLst/>
@@ -11917,41 +14214,41 @@
           <a:lstStyle xmlns:a="http://schemas.openxmlformats.org/drawingml/2006/main"/>
           <a:p xmlns:a="http://schemas.openxmlformats.org/drawingml/2006/main">
             <a:pPr algn="l">
-              <a:defRPr sz="1275" b="1">
+              <a:defRPr sz="1350" b="1">
                 <a:solidFill>
                   <a:srgbClr val="172033"/>
                 </a:solidFill>
               </a:defRPr>
             </a:pPr>
             <a:r>
-              <a:rPr sz="1275" b="1">
+              <a:rPr sz="1350" b="1">
                 <a:solidFill>
                   <a:srgbClr val="172033"/>
                 </a:solidFill>
               </a:rPr>
-              <a:t>Select package</a:t>
-            </a:r>
-          </a:p>
-        </p:txBody>
-      </p:sp>
-      <p:sp>
-        <p:nvSpPr>
-          <p:cNvPr id="8" name="">
-            <a:extLst xmlns:a="http://schemas.openxmlformats.org/drawingml/2006/main">
-              <a:ext uri="{FF2B5EF4-FFF2-40B4-BE49-F238E27FC236}">
-                <a16:creationId xmlns:a16="http://schemas.microsoft.com/office/drawing/2014/main" id="{8783B6A4-2C03-4917-ACAB-559F86BE765C}"/>
-              </a:ext>
-            </a:extLst>
-          </p:cNvPr>
-          <p:cNvSpPr>
-            <a:spLocks xmlns:a="http://schemas.openxmlformats.org/drawingml/2006/main" noGrp="1"/>
-          </p:cNvSpPr>
-          <p:nvPr/>
-        </p:nvSpPr>
-        <p:spPr>
-          <a:xfrm xmlns:a="http://schemas.openxmlformats.org/drawingml/2006/main">
-            <a:off x="857250" y="3905250"/>
-            <a:ext cx="1295400" cy="742950"/>
+              <a:t>Books Care</a:t>
+            </a:r>
+          </a:p>
+        </p:txBody>
+      </p:sp>
+      <p:sp>
+        <p:nvSpPr>
+          <p:cNvPr id="15" name="">
+            <a:extLst xmlns:a="http://schemas.openxmlformats.org/drawingml/2006/main">
+              <a:ext uri="{FF2B5EF4-FFF2-40B4-BE49-F238E27FC236}">
+                <a16:creationId xmlns:a16="http://schemas.microsoft.com/office/drawing/2014/main" id="{86014307-724C-4525-9693-1CDDB3252059}"/>
+              </a:ext>
+            </a:extLst>
+          </p:cNvPr>
+          <p:cNvSpPr>
+            <a:spLocks xmlns:a="http://schemas.openxmlformats.org/drawingml/2006/main" noGrp="1"/>
+          </p:cNvSpPr>
+          <p:nvPr/>
+        </p:nvSpPr>
+        <p:spPr>
+          <a:xfrm xmlns:a="http://schemas.openxmlformats.org/drawingml/2006/main">
+            <a:off x="9086850" y="2895600"/>
+            <a:ext cx="1981200" cy="952500"/>
           </a:xfrm>
           <a:prstGeom xmlns:a="http://schemas.openxmlformats.org/drawingml/2006/main" prst="rect">
             <a:avLst/>
@@ -11968,92 +14265,41 @@
           <a:lstStyle xmlns:a="http://schemas.openxmlformats.org/drawingml/2006/main"/>
           <a:p xmlns:a="http://schemas.openxmlformats.org/drawingml/2006/main">
             <a:pPr algn="l">
-              <a:defRPr sz="900" b="0">
+              <a:defRPr sz="1050" b="0">
                 <a:solidFill>
                   <a:srgbClr val="5F6F86"/>
                 </a:solidFill>
               </a:defRPr>
             </a:pPr>
             <a:r>
-              <a:rPr sz="900" b="0">
+              <a:rPr sz="1050" b="0">
                 <a:solidFill>
                   <a:srgbClr val="5F6F86"/>
                 </a:solidFill>
               </a:rPr>
-              <a:t>Confirm Books Foundation or the expanded Books Complete scope.</a:t>
-            </a:r>
-          </a:p>
-        </p:txBody>
-      </p:sp>
-      <p:sp>
-        <p:nvSpPr>
-          <p:cNvPr id="9" name="">
-            <a:extLst xmlns:a="http://schemas.openxmlformats.org/drawingml/2006/main">
-              <a:ext uri="{FF2B5EF4-FFF2-40B4-BE49-F238E27FC236}">
-                <a16:creationId xmlns:a16="http://schemas.microsoft.com/office/drawing/2014/main" id="{8120AAFF-14BE-48C2-88E5-7770535EF968}"/>
-              </a:ext>
-            </a:extLst>
-          </p:cNvPr>
-          <p:cNvSpPr>
-            <a:spLocks xmlns:a="http://schemas.openxmlformats.org/drawingml/2006/main" noGrp="1"/>
-          </p:cNvSpPr>
-          <p:nvPr/>
-        </p:nvSpPr>
-        <p:spPr>
-          <a:xfrm xmlns:a="http://schemas.openxmlformats.org/drawingml/2006/main">
-            <a:off x="2438400" y="3314700"/>
-            <a:ext cx="323850" cy="323850"/>
-          </a:xfrm>
-          <a:prstGeom xmlns:a="http://schemas.openxmlformats.org/drawingml/2006/main" prst="rect">
-            <a:avLst/>
-          </a:prstGeom>
-          <a:ln xmlns:a="http://schemas.openxmlformats.org/drawingml/2006/main" w="0">
-            <a:solidFill>
-              <a:srgbClr val="FFFFFF"/>
-            </a:solidFill>
-            <a:prstDash val="solid"/>
-          </a:ln>
-        </p:spPr>
-        <p:txBody>
-          <a:bodyPr xmlns:a="http://schemas.openxmlformats.org/drawingml/2006/main" anchor="ctr"/>
-          <a:lstStyle xmlns:a="http://schemas.openxmlformats.org/drawingml/2006/main"/>
-          <a:p xmlns:a="http://schemas.openxmlformats.org/drawingml/2006/main">
-            <a:pPr algn="ctr">
-              <a:defRPr sz="1650" b="1">
-                <a:solidFill>
-                  <a:srgbClr val="145DA0"/>
-                </a:solidFill>
-              </a:defRPr>
-            </a:pPr>
-            <a:r>
-              <a:rPr sz="1650" b="1">
-                <a:solidFill>
-                  <a:srgbClr val="145DA0"/>
-                </a:solidFill>
-              </a:rPr>
-              <a:t>-&gt;</a:t>
-            </a:r>
-          </a:p>
-        </p:txBody>
-      </p:sp>
-      <p:sp>
-        <p:nvSpPr>
-          <p:cNvPr id="10" name="">
-            <a:extLst xmlns:a="http://schemas.openxmlformats.org/drawingml/2006/main">
-              <a:ext uri="{FF2B5EF4-FFF2-40B4-BE49-F238E27FC236}">
-                <a16:creationId xmlns:a16="http://schemas.microsoft.com/office/drawing/2014/main" id="{274E7210-6B4B-4DA5-90BA-0495887793C8}"/>
-              </a:ext>
-            </a:extLst>
-          </p:cNvPr>
-          <p:cNvSpPr>
-            <a:spLocks xmlns:a="http://schemas.openxmlformats.org/drawingml/2006/main" noGrp="1"/>
-          </p:cNvSpPr>
-          <p:nvPr/>
-        </p:nvSpPr>
-        <p:spPr>
-          <a:xfrm xmlns:a="http://schemas.openxmlformats.org/drawingml/2006/main">
-            <a:off x="2895600" y="2667000"/>
-            <a:ext cx="1676400" cy="1676400"/>
+              <a:t>Optional monthly lane for month-end review, reconciliation checks, and small accounting changes.</a:t>
+            </a:r>
+          </a:p>
+        </p:txBody>
+      </p:sp>
+      <p:sp>
+        <p:nvSpPr>
+          <p:cNvPr id="16" name="">
+            <a:extLst xmlns:a="http://schemas.openxmlformats.org/drawingml/2006/main">
+              <a:ext uri="{FF2B5EF4-FFF2-40B4-BE49-F238E27FC236}">
+                <a16:creationId xmlns:a16="http://schemas.microsoft.com/office/drawing/2014/main" id="{889D0680-2753-4083-9CFC-3005AB5D7AC8}"/>
+              </a:ext>
+            </a:extLst>
+          </p:cNvPr>
+          <p:cNvSpPr>
+            <a:spLocks xmlns:a="http://schemas.openxmlformats.org/drawingml/2006/main" noGrp="1"/>
+          </p:cNvSpPr>
+          <p:nvPr/>
+        </p:nvSpPr>
+        <p:spPr>
+          <a:xfrm xmlns:a="http://schemas.openxmlformats.org/drawingml/2006/main">
+            <a:off x="6153150" y="4343400"/>
+            <a:ext cx="5086350" cy="1143000"/>
           </a:xfrm>
           <a:prstGeom xmlns:a="http://schemas.openxmlformats.org/drawingml/2006/main" prst="rect">
             <a:avLst/>
@@ -12071,22 +14317,22 @@
       </p:sp>
       <p:sp>
         <p:nvSpPr>
-          <p:cNvPr id="11" name="">
-            <a:extLst xmlns:a="http://schemas.openxmlformats.org/drawingml/2006/main">
-              <a:ext uri="{FF2B5EF4-FFF2-40B4-BE49-F238E27FC236}">
-                <a16:creationId xmlns:a16="http://schemas.microsoft.com/office/drawing/2014/main" id="{DC5259C2-C559-40ED-A8B4-6E5EECB8FD47}"/>
-              </a:ext>
-            </a:extLst>
-          </p:cNvPr>
-          <p:cNvSpPr>
-            <a:spLocks xmlns:a="http://schemas.openxmlformats.org/drawingml/2006/main" noGrp="1"/>
-          </p:cNvSpPr>
-          <p:nvPr/>
-        </p:nvSpPr>
-        <p:spPr>
-          <a:xfrm xmlns:a="http://schemas.openxmlformats.org/drawingml/2006/main">
-            <a:off x="3067050" y="2895600"/>
-            <a:ext cx="419100" cy="419100"/>
+          <p:cNvPr id="17" name="">
+            <a:extLst xmlns:a="http://schemas.openxmlformats.org/drawingml/2006/main">
+              <a:ext uri="{FF2B5EF4-FFF2-40B4-BE49-F238E27FC236}">
+                <a16:creationId xmlns:a16="http://schemas.microsoft.com/office/drawing/2014/main" id="{D5A56D9D-ED4F-49E8-A832-AA98CA46DC84}"/>
+              </a:ext>
+            </a:extLst>
+          </p:cNvPr>
+          <p:cNvSpPr>
+            <a:spLocks xmlns:a="http://schemas.openxmlformats.org/drawingml/2006/main" noGrp="1"/>
+          </p:cNvSpPr>
+          <p:nvPr/>
+        </p:nvSpPr>
+        <p:spPr>
+          <a:xfrm xmlns:a="http://schemas.openxmlformats.org/drawingml/2006/main">
+            <a:off x="6153150" y="4343400"/>
+            <a:ext cx="57150" cy="1143000"/>
           </a:xfrm>
           <a:prstGeom xmlns:a="http://schemas.openxmlformats.org/drawingml/2006/main" prst="rect">
             <a:avLst/>
@@ -12104,73 +14350,22 @@
       </p:sp>
       <p:sp>
         <p:nvSpPr>
-          <p:cNvPr id="12" name="">
-            <a:extLst xmlns:a="http://schemas.openxmlformats.org/drawingml/2006/main">
-              <a:ext uri="{FF2B5EF4-FFF2-40B4-BE49-F238E27FC236}">
-                <a16:creationId xmlns:a16="http://schemas.microsoft.com/office/drawing/2014/main" id="{F164FBFC-89C6-4D5A-8139-2C79CEAD1FA2}"/>
-              </a:ext>
-            </a:extLst>
-          </p:cNvPr>
-          <p:cNvSpPr>
-            <a:spLocks xmlns:a="http://schemas.openxmlformats.org/drawingml/2006/main" noGrp="1"/>
-          </p:cNvSpPr>
-          <p:nvPr/>
-        </p:nvSpPr>
-        <p:spPr>
-          <a:xfrm xmlns:a="http://schemas.openxmlformats.org/drawingml/2006/main">
-            <a:off x="3067050" y="2962275"/>
-            <a:ext cx="419100" cy="285750"/>
-          </a:xfrm>
-          <a:prstGeom xmlns:a="http://schemas.openxmlformats.org/drawingml/2006/main" prst="rect">
-            <a:avLst/>
-          </a:prstGeom>
-          <a:ln xmlns:a="http://schemas.openxmlformats.org/drawingml/2006/main" w="0">
-            <a:solidFill>
-              <a:srgbClr val="FFFFFF"/>
-            </a:solidFill>
-            <a:prstDash val="solid"/>
-          </a:ln>
-        </p:spPr>
-        <p:txBody>
-          <a:bodyPr xmlns:a="http://schemas.openxmlformats.org/drawingml/2006/main" anchor="t"/>
-          <a:lstStyle xmlns:a="http://schemas.openxmlformats.org/drawingml/2006/main"/>
-          <a:p xmlns:a="http://schemas.openxmlformats.org/drawingml/2006/main">
-            <a:pPr algn="ctr">
-              <a:defRPr sz="1500" b="1">
-                <a:solidFill>
-                  <a:srgbClr val="FFFFFF"/>
-                </a:solidFill>
-              </a:defRPr>
-            </a:pPr>
-            <a:r>
-              <a:rPr sz="1500" b="1">
-                <a:solidFill>
-                  <a:srgbClr val="FFFFFF"/>
-                </a:solidFill>
-              </a:rPr>
-              <a:t>2</a:t>
-            </a:r>
-          </a:p>
-        </p:txBody>
-      </p:sp>
-      <p:sp>
-        <p:nvSpPr>
-          <p:cNvPr id="13" name="">
-            <a:extLst xmlns:a="http://schemas.openxmlformats.org/drawingml/2006/main">
-              <a:ext uri="{FF2B5EF4-FFF2-40B4-BE49-F238E27FC236}">
-                <a16:creationId xmlns:a16="http://schemas.microsoft.com/office/drawing/2014/main" id="{9F7D7ADB-C31B-4266-BCFD-609101DDC9D7}"/>
-              </a:ext>
-            </a:extLst>
-          </p:cNvPr>
-          <p:cNvSpPr>
-            <a:spLocks xmlns:a="http://schemas.openxmlformats.org/drawingml/2006/main" noGrp="1"/>
-          </p:cNvSpPr>
-          <p:nvPr/>
-        </p:nvSpPr>
-        <p:spPr>
-          <a:xfrm xmlns:a="http://schemas.openxmlformats.org/drawingml/2006/main">
-            <a:off x="3067050" y="3524250"/>
-            <a:ext cx="1295400" cy="304800"/>
+          <p:cNvPr id="18" name="">
+            <a:extLst xmlns:a="http://schemas.openxmlformats.org/drawingml/2006/main">
+              <a:ext uri="{FF2B5EF4-FFF2-40B4-BE49-F238E27FC236}">
+                <a16:creationId xmlns:a16="http://schemas.microsoft.com/office/drawing/2014/main" id="{887B2A94-B23A-44B8-B1C7-0C2B2EFDE197}"/>
+              </a:ext>
+            </a:extLst>
+          </p:cNvPr>
+          <p:cNvSpPr>
+            <a:spLocks xmlns:a="http://schemas.openxmlformats.org/drawingml/2006/main" noGrp="1"/>
+          </p:cNvSpPr>
+          <p:nvPr/>
+        </p:nvSpPr>
+        <p:spPr>
+          <a:xfrm xmlns:a="http://schemas.openxmlformats.org/drawingml/2006/main">
+            <a:off x="6381750" y="4533900"/>
+            <a:ext cx="4705350" cy="285750"/>
           </a:xfrm>
           <a:prstGeom xmlns:a="http://schemas.openxmlformats.org/drawingml/2006/main" prst="rect">
             <a:avLst/>
@@ -12187,41 +14382,92 @@
           <a:lstStyle xmlns:a="http://schemas.openxmlformats.org/drawingml/2006/main"/>
           <a:p xmlns:a="http://schemas.openxmlformats.org/drawingml/2006/main">
             <a:pPr algn="l">
-              <a:defRPr sz="1275" b="1">
+              <a:defRPr sz="1350" b="1">
                 <a:solidFill>
                   <a:srgbClr val="172033"/>
                 </a:solidFill>
               </a:defRPr>
             </a:pPr>
             <a:r>
-              <a:rPr sz="1275" b="1">
+              <a:rPr sz="1350" b="1">
                 <a:solidFill>
                   <a:srgbClr val="172033"/>
                 </a:solidFill>
               </a:rPr>
-              <a:t>Approve SOW</a:t>
-            </a:r>
-          </a:p>
-        </p:txBody>
-      </p:sp>
-      <p:sp>
-        <p:nvSpPr>
-          <p:cNvPr id="14" name="">
-            <a:extLst xmlns:a="http://schemas.openxmlformats.org/drawingml/2006/main">
-              <a:ext uri="{FF2B5EF4-FFF2-40B4-BE49-F238E27FC236}">
-                <a16:creationId xmlns:a16="http://schemas.microsoft.com/office/drawing/2014/main" id="{46C20AA3-1FCA-4662-ADEA-6BF68CD65279}"/>
-              </a:ext>
-            </a:extLst>
-          </p:cNvPr>
-          <p:cNvSpPr>
-            <a:spLocks xmlns:a="http://schemas.openxmlformats.org/drawingml/2006/main" noGrp="1"/>
-          </p:cNvSpPr>
-          <p:nvPr/>
-        </p:nvSpPr>
-        <p:spPr>
-          <a:xfrm xmlns:a="http://schemas.openxmlformats.org/drawingml/2006/main">
-            <a:off x="3067050" y="3905250"/>
-            <a:ext cx="1295400" cy="742950"/>
+              <a:t>Builds on what is shipped</a:t>
+            </a:r>
+          </a:p>
+        </p:txBody>
+      </p:sp>
+      <p:sp>
+        <p:nvSpPr>
+          <p:cNvPr id="19" name="">
+            <a:extLst xmlns:a="http://schemas.openxmlformats.org/drawingml/2006/main">
+              <a:ext uri="{FF2B5EF4-FFF2-40B4-BE49-F238E27FC236}">
+                <a16:creationId xmlns:a16="http://schemas.microsoft.com/office/drawing/2014/main" id="{EE94F31D-BD8E-4502-98A5-256FE125FC39}"/>
+              </a:ext>
+            </a:extLst>
+          </p:cNvPr>
+          <p:cNvSpPr>
+            <a:spLocks xmlns:a="http://schemas.openxmlformats.org/drawingml/2006/main" noGrp="1"/>
+          </p:cNvSpPr>
+          <p:nvPr/>
+        </p:nvSpPr>
+        <p:spPr>
+          <a:xfrm xmlns:a="http://schemas.openxmlformats.org/drawingml/2006/main">
+            <a:off x="6381750" y="4895850"/>
+            <a:ext cx="4686300" cy="457200"/>
+          </a:xfrm>
+          <a:prstGeom xmlns:a="http://schemas.openxmlformats.org/drawingml/2006/main" prst="rect">
+            <a:avLst/>
+          </a:prstGeom>
+          <a:ln xmlns:a="http://schemas.openxmlformats.org/drawingml/2006/main" w="0">
+            <a:solidFill>
+              <a:srgbClr val="FFFFFF"/>
+            </a:solidFill>
+            <a:prstDash val="solid"/>
+          </a:ln>
+        </p:spPr>
+        <p:txBody>
+          <a:bodyPr xmlns:a="http://schemas.openxmlformats.org/drawingml/2006/main" anchor="t"/>
+          <a:lstStyle xmlns:a="http://schemas.openxmlformats.org/drawingml/2006/main"/>
+          <a:p xmlns:a="http://schemas.openxmlformats.org/drawingml/2006/main">
+            <a:pPr algn="l">
+              <a:defRPr sz="1050" b="0">
+                <a:solidFill>
+                  <a:srgbClr val="5F6F86"/>
+                </a:solidFill>
+              </a:defRPr>
+            </a:pPr>
+            <a:r>
+              <a:rPr sz="1050" b="0">
+                <a:solidFill>
+                  <a:srgbClr val="5F6F86"/>
+                </a:solidFill>
+              </a:rPr>
+              <a:t>The ledger, A/R, A/P, registers, job costing, statements, recurring, bank rec, period close, and invoice/bill/statement PDFs are already built. This phase tailors and rolls them out for Raves.</a:t>
+            </a:r>
+          </a:p>
+        </p:txBody>
+      </p:sp>
+      <p:sp>
+        <p:nvSpPr>
+          <p:cNvPr id="20" name="">
+            <a:extLst xmlns:a="http://schemas.openxmlformats.org/drawingml/2006/main">
+              <a:ext uri="{FF2B5EF4-FFF2-40B4-BE49-F238E27FC236}">
+                <a16:creationId xmlns:a16="http://schemas.microsoft.com/office/drawing/2014/main" id="{FDDEE929-D5B7-46BE-9F5A-2F94F2AE84DF}"/>
+              </a:ext>
+            </a:extLst>
+          </p:cNvPr>
+          <p:cNvSpPr>
+            <a:spLocks xmlns:a="http://schemas.openxmlformats.org/drawingml/2006/main" noGrp="1"/>
+          </p:cNvSpPr>
+          <p:nvPr/>
+        </p:nvSpPr>
+        <p:spPr>
+          <a:xfrm xmlns:a="http://schemas.openxmlformats.org/drawingml/2006/main">
+            <a:off x="685800" y="6400800"/>
+            <a:ext cx="4000500" cy="228600"/>
           </a:xfrm>
           <a:prstGeom xmlns:a="http://schemas.openxmlformats.org/drawingml/2006/main" prst="rect">
             <a:avLst/>
@@ -12240,287 +14486,17 @@
             <a:pPr algn="l">
               <a:defRPr sz="900" b="0">
                 <a:solidFill>
-                  <a:srgbClr val="5F6F86"/>
+                  <a:srgbClr val="7B8798"/>
                 </a:solidFill>
               </a:defRPr>
             </a:pPr>
             <a:r>
               <a:rPr sz="900" b="0">
                 <a:solidFill>
-                  <a:srgbClr val="5F6F86"/>
-                </a:solidFill>
-              </a:rPr>
-              <a:t>Name the approval owner and target decision date.</a:t>
-            </a:r>
-          </a:p>
-        </p:txBody>
-      </p:sp>
-      <p:sp>
-        <p:nvSpPr>
-          <p:cNvPr id="15" name="">
-            <a:extLst xmlns:a="http://schemas.openxmlformats.org/drawingml/2006/main">
-              <a:ext uri="{FF2B5EF4-FFF2-40B4-BE49-F238E27FC236}">
-                <a16:creationId xmlns:a16="http://schemas.microsoft.com/office/drawing/2014/main" id="{A8FAA5DB-2EC9-4C33-BA05-608F5D94B713}"/>
-              </a:ext>
-            </a:extLst>
-          </p:cNvPr>
-          <p:cNvSpPr>
-            <a:spLocks xmlns:a="http://schemas.openxmlformats.org/drawingml/2006/main" noGrp="1"/>
-          </p:cNvSpPr>
-          <p:nvPr/>
-        </p:nvSpPr>
-        <p:spPr>
-          <a:xfrm xmlns:a="http://schemas.openxmlformats.org/drawingml/2006/main">
-            <a:off x="4648200" y="3314700"/>
-            <a:ext cx="323850" cy="323850"/>
-          </a:xfrm>
-          <a:prstGeom xmlns:a="http://schemas.openxmlformats.org/drawingml/2006/main" prst="rect">
-            <a:avLst/>
-          </a:prstGeom>
-          <a:ln xmlns:a="http://schemas.openxmlformats.org/drawingml/2006/main" w="0">
-            <a:solidFill>
-              <a:srgbClr val="FFFFFF"/>
-            </a:solidFill>
-            <a:prstDash val="solid"/>
-          </a:ln>
-        </p:spPr>
-        <p:txBody>
-          <a:bodyPr xmlns:a="http://schemas.openxmlformats.org/drawingml/2006/main" anchor="ctr"/>
-          <a:lstStyle xmlns:a="http://schemas.openxmlformats.org/drawingml/2006/main"/>
-          <a:p xmlns:a="http://schemas.openxmlformats.org/drawingml/2006/main">
-            <a:pPr algn="ctr">
-              <a:defRPr sz="1650" b="1">
-                <a:solidFill>
-                  <a:srgbClr val="145DA0"/>
-                </a:solidFill>
-              </a:defRPr>
-            </a:pPr>
-            <a:r>
-              <a:rPr sz="1650" b="1">
-                <a:solidFill>
-                  <a:srgbClr val="145DA0"/>
-                </a:solidFill>
-              </a:rPr>
-              <a:t>-&gt;</a:t>
-            </a:r>
-          </a:p>
-        </p:txBody>
-      </p:sp>
-      <p:sp>
-        <p:nvSpPr>
-          <p:cNvPr id="16" name="">
-            <a:extLst xmlns:a="http://schemas.openxmlformats.org/drawingml/2006/main">
-              <a:ext uri="{FF2B5EF4-FFF2-40B4-BE49-F238E27FC236}">
-                <a16:creationId xmlns:a16="http://schemas.microsoft.com/office/drawing/2014/main" id="{B5FE538E-D5EE-46B3-8DAF-9661FA5FAD47}"/>
-              </a:ext>
-            </a:extLst>
-          </p:cNvPr>
-          <p:cNvSpPr>
-            <a:spLocks xmlns:a="http://schemas.openxmlformats.org/drawingml/2006/main" noGrp="1"/>
-          </p:cNvSpPr>
-          <p:nvPr/>
-        </p:nvSpPr>
-        <p:spPr>
-          <a:xfrm xmlns:a="http://schemas.openxmlformats.org/drawingml/2006/main">
-            <a:off x="5105400" y="2667000"/>
-            <a:ext cx="1676400" cy="1676400"/>
-          </a:xfrm>
-          <a:prstGeom xmlns:a="http://schemas.openxmlformats.org/drawingml/2006/main" prst="rect">
-            <a:avLst/>
-          </a:prstGeom>
-          <a:solidFill xmlns:a="http://schemas.openxmlformats.org/drawingml/2006/main">
-            <a:srgbClr val="FFFFFF"/>
-          </a:solidFill>
-          <a:ln xmlns:a="http://schemas.openxmlformats.org/drawingml/2006/main" w="0">
-            <a:solidFill>
-              <a:srgbClr val="D8E2ED"/>
-            </a:solidFill>
-            <a:prstDash val="solid"/>
-          </a:ln>
-        </p:spPr>
-      </p:sp>
-      <p:sp>
-        <p:nvSpPr>
-          <p:cNvPr id="17" name="">
-            <a:extLst xmlns:a="http://schemas.openxmlformats.org/drawingml/2006/main">
-              <a:ext uri="{FF2B5EF4-FFF2-40B4-BE49-F238E27FC236}">
-                <a16:creationId xmlns:a16="http://schemas.microsoft.com/office/drawing/2014/main" id="{F22D529D-C089-471B-BE90-AD1CE3CA8799}"/>
-              </a:ext>
-            </a:extLst>
-          </p:cNvPr>
-          <p:cNvSpPr>
-            <a:spLocks xmlns:a="http://schemas.openxmlformats.org/drawingml/2006/main" noGrp="1"/>
-          </p:cNvSpPr>
-          <p:nvPr/>
-        </p:nvSpPr>
-        <p:spPr>
-          <a:xfrm xmlns:a="http://schemas.openxmlformats.org/drawingml/2006/main">
-            <a:off x="5276850" y="2895600"/>
-            <a:ext cx="419100" cy="419100"/>
-          </a:xfrm>
-          <a:prstGeom xmlns:a="http://schemas.openxmlformats.org/drawingml/2006/main" prst="rect">
-            <a:avLst/>
-          </a:prstGeom>
-          <a:solidFill xmlns:a="http://schemas.openxmlformats.org/drawingml/2006/main">
-            <a:srgbClr val="D98C16"/>
-          </a:solidFill>
-          <a:ln xmlns:a="http://schemas.openxmlformats.org/drawingml/2006/main" w="0">
-            <a:solidFill>
-              <a:srgbClr val="D98C16"/>
-            </a:solidFill>
-            <a:prstDash val="solid"/>
-          </a:ln>
-        </p:spPr>
-      </p:sp>
-      <p:sp>
-        <p:nvSpPr>
-          <p:cNvPr id="18" name="">
-            <a:extLst xmlns:a="http://schemas.openxmlformats.org/drawingml/2006/main">
-              <a:ext uri="{FF2B5EF4-FFF2-40B4-BE49-F238E27FC236}">
-                <a16:creationId xmlns:a16="http://schemas.microsoft.com/office/drawing/2014/main" id="{2FBAAE6A-FF83-486E-BA65-371B7FB91995}"/>
-              </a:ext>
-            </a:extLst>
-          </p:cNvPr>
-          <p:cNvSpPr>
-            <a:spLocks xmlns:a="http://schemas.openxmlformats.org/drawingml/2006/main" noGrp="1"/>
-          </p:cNvSpPr>
-          <p:nvPr/>
-        </p:nvSpPr>
-        <p:spPr>
-          <a:xfrm xmlns:a="http://schemas.openxmlformats.org/drawingml/2006/main">
-            <a:off x="5276850" y="2962275"/>
-            <a:ext cx="419100" cy="285750"/>
-          </a:xfrm>
-          <a:prstGeom xmlns:a="http://schemas.openxmlformats.org/drawingml/2006/main" prst="rect">
-            <a:avLst/>
-          </a:prstGeom>
-          <a:ln xmlns:a="http://schemas.openxmlformats.org/drawingml/2006/main" w="0">
-            <a:solidFill>
-              <a:srgbClr val="FFFFFF"/>
-            </a:solidFill>
-            <a:prstDash val="solid"/>
-          </a:ln>
-        </p:spPr>
-        <p:txBody>
-          <a:bodyPr xmlns:a="http://schemas.openxmlformats.org/drawingml/2006/main" anchor="t"/>
-          <a:lstStyle xmlns:a="http://schemas.openxmlformats.org/drawingml/2006/main"/>
-          <a:p xmlns:a="http://schemas.openxmlformats.org/drawingml/2006/main">
-            <a:pPr algn="ctr">
-              <a:defRPr sz="1500" b="1">
-                <a:solidFill>
-                  <a:srgbClr val="FFFFFF"/>
-                </a:solidFill>
-              </a:defRPr>
-            </a:pPr>
-            <a:r>
-              <a:rPr sz="1500" b="1">
-                <a:solidFill>
-                  <a:srgbClr val="FFFFFF"/>
-                </a:solidFill>
-              </a:rPr>
-              <a:t>3</a:t>
-            </a:r>
-          </a:p>
-        </p:txBody>
-      </p:sp>
-      <p:sp>
-        <p:nvSpPr>
-          <p:cNvPr id="19" name="">
-            <a:extLst xmlns:a="http://schemas.openxmlformats.org/drawingml/2006/main">
-              <a:ext uri="{FF2B5EF4-FFF2-40B4-BE49-F238E27FC236}">
-                <a16:creationId xmlns:a16="http://schemas.microsoft.com/office/drawing/2014/main" id="{3AE1D533-126D-4FBF-817D-2E215533BB35}"/>
-              </a:ext>
-            </a:extLst>
-          </p:cNvPr>
-          <p:cNvSpPr>
-            <a:spLocks xmlns:a="http://schemas.openxmlformats.org/drawingml/2006/main" noGrp="1"/>
-          </p:cNvSpPr>
-          <p:nvPr/>
-        </p:nvSpPr>
-        <p:spPr>
-          <a:xfrm xmlns:a="http://schemas.openxmlformats.org/drawingml/2006/main">
-            <a:off x="5276850" y="3524250"/>
-            <a:ext cx="1295400" cy="304800"/>
-          </a:xfrm>
-          <a:prstGeom xmlns:a="http://schemas.openxmlformats.org/drawingml/2006/main" prst="rect">
-            <a:avLst/>
-          </a:prstGeom>
-          <a:ln xmlns:a="http://schemas.openxmlformats.org/drawingml/2006/main" w="0">
-            <a:solidFill>
-              <a:srgbClr val="FFFFFF"/>
-            </a:solidFill>
-            <a:prstDash val="solid"/>
-          </a:ln>
-        </p:spPr>
-        <p:txBody>
-          <a:bodyPr xmlns:a="http://schemas.openxmlformats.org/drawingml/2006/main" anchor="t"/>
-          <a:lstStyle xmlns:a="http://schemas.openxmlformats.org/drawingml/2006/main"/>
-          <a:p xmlns:a="http://schemas.openxmlformats.org/drawingml/2006/main">
-            <a:pPr algn="l">
-              <a:defRPr sz="1275" b="1">
-                <a:solidFill>
-                  <a:srgbClr val="172033"/>
-                </a:solidFill>
-              </a:defRPr>
-            </a:pPr>
-            <a:r>
-              <a:rPr sz="1275" b="1">
-                <a:solidFill>
-                  <a:srgbClr val="172033"/>
-                </a:solidFill>
-              </a:rPr>
-              <a:t>Confirm inputs</a:t>
-            </a:r>
-          </a:p>
-        </p:txBody>
-      </p:sp>
-      <p:sp>
-        <p:nvSpPr>
-          <p:cNvPr id="20" name="">
-            <a:extLst xmlns:a="http://schemas.openxmlformats.org/drawingml/2006/main">
-              <a:ext uri="{FF2B5EF4-FFF2-40B4-BE49-F238E27FC236}">
-                <a16:creationId xmlns:a16="http://schemas.microsoft.com/office/drawing/2014/main" id="{456A74A8-F3B6-443C-AE9B-246D2E94C97E}"/>
-              </a:ext>
-            </a:extLst>
-          </p:cNvPr>
-          <p:cNvSpPr>
-            <a:spLocks xmlns:a="http://schemas.openxmlformats.org/drawingml/2006/main" noGrp="1"/>
-          </p:cNvSpPr>
-          <p:nvPr/>
-        </p:nvSpPr>
-        <p:spPr>
-          <a:xfrm xmlns:a="http://schemas.openxmlformats.org/drawingml/2006/main">
-            <a:off x="5276850" y="3905250"/>
-            <a:ext cx="1295400" cy="742950"/>
-          </a:xfrm>
-          <a:prstGeom xmlns:a="http://schemas.openxmlformats.org/drawingml/2006/main" prst="rect">
-            <a:avLst/>
-          </a:prstGeom>
-          <a:ln xmlns:a="http://schemas.openxmlformats.org/drawingml/2006/main" w="0">
-            <a:solidFill>
-              <a:srgbClr val="FFFFFF"/>
-            </a:solidFill>
-            <a:prstDash val="solid"/>
-          </a:ln>
-        </p:spPr>
-        <p:txBody>
-          <a:bodyPr xmlns:a="http://schemas.openxmlformats.org/drawingml/2006/main" anchor="t"/>
-          <a:lstStyle xmlns:a="http://schemas.openxmlformats.org/drawingml/2006/main"/>
-          <a:p xmlns:a="http://schemas.openxmlformats.org/drawingml/2006/main">
-            <a:pPr algn="l">
-              <a:defRPr sz="900" b="0">
-                <a:solidFill>
-                  <a:srgbClr val="5F6F86"/>
-                </a:solidFill>
-              </a:defRPr>
-            </a:pPr>
-            <a:r>
-              <a:rPr sz="900" b="0">
-                <a:solidFill>
-                  <a:srgbClr val="5F6F86"/>
-                </a:solidFill>
-              </a:rPr>
-              <a:t>Accounting owner, opening balances, chart-of-accounts review, and tax/entity basics.</a:t>
+                  <a:srgbClr val="7B8798"/>
+                </a:solidFill>
+              </a:rPr>
+              <a:t>Blueprint Books for Raves</a:t>
             </a:r>
           </a:p>
         </p:txBody>
@@ -12530,598 +14506,7 @@
           <p:cNvPr id="21" name="">
             <a:extLst xmlns:a="http://schemas.openxmlformats.org/drawingml/2006/main">
               <a:ext uri="{FF2B5EF4-FFF2-40B4-BE49-F238E27FC236}">
-                <a16:creationId xmlns:a16="http://schemas.microsoft.com/office/drawing/2014/main" id="{3EFA2495-0A9E-4A92-8E14-1871DFBD6630}"/>
-              </a:ext>
-            </a:extLst>
-          </p:cNvPr>
-          <p:cNvSpPr>
-            <a:spLocks xmlns:a="http://schemas.openxmlformats.org/drawingml/2006/main" noGrp="1"/>
-          </p:cNvSpPr>
-          <p:nvPr/>
-        </p:nvSpPr>
-        <p:spPr>
-          <a:xfrm xmlns:a="http://schemas.openxmlformats.org/drawingml/2006/main">
-            <a:off x="6858000" y="3314700"/>
-            <a:ext cx="323850" cy="323850"/>
-          </a:xfrm>
-          <a:prstGeom xmlns:a="http://schemas.openxmlformats.org/drawingml/2006/main" prst="rect">
-            <a:avLst/>
-          </a:prstGeom>
-          <a:ln xmlns:a="http://schemas.openxmlformats.org/drawingml/2006/main" w="0">
-            <a:solidFill>
-              <a:srgbClr val="FFFFFF"/>
-            </a:solidFill>
-            <a:prstDash val="solid"/>
-          </a:ln>
-        </p:spPr>
-        <p:txBody>
-          <a:bodyPr xmlns:a="http://schemas.openxmlformats.org/drawingml/2006/main" anchor="ctr"/>
-          <a:lstStyle xmlns:a="http://schemas.openxmlformats.org/drawingml/2006/main"/>
-          <a:p xmlns:a="http://schemas.openxmlformats.org/drawingml/2006/main">
-            <a:pPr algn="ctr">
-              <a:defRPr sz="1650" b="1">
-                <a:solidFill>
-                  <a:srgbClr val="145DA0"/>
-                </a:solidFill>
-              </a:defRPr>
-            </a:pPr>
-            <a:r>
-              <a:rPr sz="1650" b="1">
-                <a:solidFill>
-                  <a:srgbClr val="145DA0"/>
-                </a:solidFill>
-              </a:rPr>
-              <a:t>-&gt;</a:t>
-            </a:r>
-          </a:p>
-        </p:txBody>
-      </p:sp>
-      <p:sp>
-        <p:nvSpPr>
-          <p:cNvPr id="22" name="">
-            <a:extLst xmlns:a="http://schemas.openxmlformats.org/drawingml/2006/main">
-              <a:ext uri="{FF2B5EF4-FFF2-40B4-BE49-F238E27FC236}">
-                <a16:creationId xmlns:a16="http://schemas.microsoft.com/office/drawing/2014/main" id="{9F2AF274-DE87-4797-8277-7DE067AA8C15}"/>
-              </a:ext>
-            </a:extLst>
-          </p:cNvPr>
-          <p:cNvSpPr>
-            <a:spLocks xmlns:a="http://schemas.openxmlformats.org/drawingml/2006/main" noGrp="1"/>
-          </p:cNvSpPr>
-          <p:nvPr/>
-        </p:nvSpPr>
-        <p:spPr>
-          <a:xfrm xmlns:a="http://schemas.openxmlformats.org/drawingml/2006/main">
-            <a:off x="7315200" y="2667000"/>
-            <a:ext cx="1676400" cy="1676400"/>
-          </a:xfrm>
-          <a:prstGeom xmlns:a="http://schemas.openxmlformats.org/drawingml/2006/main" prst="rect">
-            <a:avLst/>
-          </a:prstGeom>
-          <a:solidFill xmlns:a="http://schemas.openxmlformats.org/drawingml/2006/main">
-            <a:srgbClr val="FFFFFF"/>
-          </a:solidFill>
-          <a:ln xmlns:a="http://schemas.openxmlformats.org/drawingml/2006/main" w="0">
-            <a:solidFill>
-              <a:srgbClr val="D8E2ED"/>
-            </a:solidFill>
-            <a:prstDash val="solid"/>
-          </a:ln>
-        </p:spPr>
-      </p:sp>
-      <p:sp>
-        <p:nvSpPr>
-          <p:cNvPr id="23" name="">
-            <a:extLst xmlns:a="http://schemas.openxmlformats.org/drawingml/2006/main">
-              <a:ext uri="{FF2B5EF4-FFF2-40B4-BE49-F238E27FC236}">
-                <a16:creationId xmlns:a16="http://schemas.microsoft.com/office/drawing/2014/main" id="{C79E6734-E42A-4C1F-9F9E-9120B345E372}"/>
-              </a:ext>
-            </a:extLst>
-          </p:cNvPr>
-          <p:cNvSpPr>
-            <a:spLocks xmlns:a="http://schemas.openxmlformats.org/drawingml/2006/main" noGrp="1"/>
-          </p:cNvSpPr>
-          <p:nvPr/>
-        </p:nvSpPr>
-        <p:spPr>
-          <a:xfrm xmlns:a="http://schemas.openxmlformats.org/drawingml/2006/main">
-            <a:off x="7486650" y="2895600"/>
-            <a:ext cx="419100" cy="419100"/>
-          </a:xfrm>
-          <a:prstGeom xmlns:a="http://schemas.openxmlformats.org/drawingml/2006/main" prst="rect">
-            <a:avLst/>
-          </a:prstGeom>
-          <a:solidFill xmlns:a="http://schemas.openxmlformats.org/drawingml/2006/main">
-            <a:srgbClr val="23A6D5"/>
-          </a:solidFill>
-          <a:ln xmlns:a="http://schemas.openxmlformats.org/drawingml/2006/main" w="0">
-            <a:solidFill>
-              <a:srgbClr val="23A6D5"/>
-            </a:solidFill>
-            <a:prstDash val="solid"/>
-          </a:ln>
-        </p:spPr>
-      </p:sp>
-      <p:sp>
-        <p:nvSpPr>
-          <p:cNvPr id="24" name="">
-            <a:extLst xmlns:a="http://schemas.openxmlformats.org/drawingml/2006/main">
-              <a:ext uri="{FF2B5EF4-FFF2-40B4-BE49-F238E27FC236}">
-                <a16:creationId xmlns:a16="http://schemas.microsoft.com/office/drawing/2014/main" id="{582EC1AD-E27B-4276-8B8E-068361DCD578}"/>
-              </a:ext>
-            </a:extLst>
-          </p:cNvPr>
-          <p:cNvSpPr>
-            <a:spLocks xmlns:a="http://schemas.openxmlformats.org/drawingml/2006/main" noGrp="1"/>
-          </p:cNvSpPr>
-          <p:nvPr/>
-        </p:nvSpPr>
-        <p:spPr>
-          <a:xfrm xmlns:a="http://schemas.openxmlformats.org/drawingml/2006/main">
-            <a:off x="7486650" y="2962275"/>
-            <a:ext cx="419100" cy="285750"/>
-          </a:xfrm>
-          <a:prstGeom xmlns:a="http://schemas.openxmlformats.org/drawingml/2006/main" prst="rect">
-            <a:avLst/>
-          </a:prstGeom>
-          <a:ln xmlns:a="http://schemas.openxmlformats.org/drawingml/2006/main" w="0">
-            <a:solidFill>
-              <a:srgbClr val="FFFFFF"/>
-            </a:solidFill>
-            <a:prstDash val="solid"/>
-          </a:ln>
-        </p:spPr>
-        <p:txBody>
-          <a:bodyPr xmlns:a="http://schemas.openxmlformats.org/drawingml/2006/main" anchor="t"/>
-          <a:lstStyle xmlns:a="http://schemas.openxmlformats.org/drawingml/2006/main"/>
-          <a:p xmlns:a="http://schemas.openxmlformats.org/drawingml/2006/main">
-            <a:pPr algn="ctr">
-              <a:defRPr sz="1500" b="1">
-                <a:solidFill>
-                  <a:srgbClr val="FFFFFF"/>
-                </a:solidFill>
-              </a:defRPr>
-            </a:pPr>
-            <a:r>
-              <a:rPr sz="1500" b="1">
-                <a:solidFill>
-                  <a:srgbClr val="FFFFFF"/>
-                </a:solidFill>
-              </a:rPr>
-              <a:t>4</a:t>
-            </a:r>
-          </a:p>
-        </p:txBody>
-      </p:sp>
-      <p:sp>
-        <p:nvSpPr>
-          <p:cNvPr id="25" name="">
-            <a:extLst xmlns:a="http://schemas.openxmlformats.org/drawingml/2006/main">
-              <a:ext uri="{FF2B5EF4-FFF2-40B4-BE49-F238E27FC236}">
-                <a16:creationId xmlns:a16="http://schemas.microsoft.com/office/drawing/2014/main" id="{28AD6735-D7D9-4869-A20F-33DBEDB339D6}"/>
-              </a:ext>
-            </a:extLst>
-          </p:cNvPr>
-          <p:cNvSpPr>
-            <a:spLocks xmlns:a="http://schemas.openxmlformats.org/drawingml/2006/main" noGrp="1"/>
-          </p:cNvSpPr>
-          <p:nvPr/>
-        </p:nvSpPr>
-        <p:spPr>
-          <a:xfrm xmlns:a="http://schemas.openxmlformats.org/drawingml/2006/main">
-            <a:off x="7486650" y="3524250"/>
-            <a:ext cx="1295400" cy="304800"/>
-          </a:xfrm>
-          <a:prstGeom xmlns:a="http://schemas.openxmlformats.org/drawingml/2006/main" prst="rect">
-            <a:avLst/>
-          </a:prstGeom>
-          <a:ln xmlns:a="http://schemas.openxmlformats.org/drawingml/2006/main" w="0">
-            <a:solidFill>
-              <a:srgbClr val="FFFFFF"/>
-            </a:solidFill>
-            <a:prstDash val="solid"/>
-          </a:ln>
-        </p:spPr>
-        <p:txBody>
-          <a:bodyPr xmlns:a="http://schemas.openxmlformats.org/drawingml/2006/main" anchor="t"/>
-          <a:lstStyle xmlns:a="http://schemas.openxmlformats.org/drawingml/2006/main"/>
-          <a:p xmlns:a="http://schemas.openxmlformats.org/drawingml/2006/main">
-            <a:pPr algn="l">
-              <a:defRPr sz="1275" b="1">
-                <a:solidFill>
-                  <a:srgbClr val="172033"/>
-                </a:solidFill>
-              </a:defRPr>
-            </a:pPr>
-            <a:r>
-              <a:rPr sz="1275" b="1">
-                <a:solidFill>
-                  <a:srgbClr val="172033"/>
-                </a:solidFill>
-              </a:rPr>
-              <a:t>Implement</a:t>
-            </a:r>
-          </a:p>
-        </p:txBody>
-      </p:sp>
-      <p:sp>
-        <p:nvSpPr>
-          <p:cNvPr id="26" name="">
-            <a:extLst xmlns:a="http://schemas.openxmlformats.org/drawingml/2006/main">
-              <a:ext uri="{FF2B5EF4-FFF2-40B4-BE49-F238E27FC236}">
-                <a16:creationId xmlns:a16="http://schemas.microsoft.com/office/drawing/2014/main" id="{18517A23-D880-4628-8168-7F378D7624CF}"/>
-              </a:ext>
-            </a:extLst>
-          </p:cNvPr>
-          <p:cNvSpPr>
-            <a:spLocks xmlns:a="http://schemas.openxmlformats.org/drawingml/2006/main" noGrp="1"/>
-          </p:cNvSpPr>
-          <p:nvPr/>
-        </p:nvSpPr>
-        <p:spPr>
-          <a:xfrm xmlns:a="http://schemas.openxmlformats.org/drawingml/2006/main">
-            <a:off x="7486650" y="3905250"/>
-            <a:ext cx="1295400" cy="742950"/>
-          </a:xfrm>
-          <a:prstGeom xmlns:a="http://schemas.openxmlformats.org/drawingml/2006/main" prst="rect">
-            <a:avLst/>
-          </a:prstGeom>
-          <a:ln xmlns:a="http://schemas.openxmlformats.org/drawingml/2006/main" w="0">
-            <a:solidFill>
-              <a:srgbClr val="FFFFFF"/>
-            </a:solidFill>
-            <a:prstDash val="solid"/>
-          </a:ln>
-        </p:spPr>
-        <p:txBody>
-          <a:bodyPr xmlns:a="http://schemas.openxmlformats.org/drawingml/2006/main" anchor="t"/>
-          <a:lstStyle xmlns:a="http://schemas.openxmlformats.org/drawingml/2006/main"/>
-          <a:p xmlns:a="http://schemas.openxmlformats.org/drawingml/2006/main">
-            <a:pPr algn="l">
-              <a:defRPr sz="900" b="0">
-                <a:solidFill>
-                  <a:srgbClr val="5F6F86"/>
-                </a:solidFill>
-              </a:defRPr>
-            </a:pPr>
-            <a:r>
-              <a:rPr sz="900" b="0">
-                <a:solidFill>
-                  <a:srgbClr val="5F6F86"/>
-                </a:solidFill>
-              </a:rPr>
-              <a:t>Tailor the books, load opening balances, wire A/R and A/P, and train the team.</a:t>
-            </a:r>
-          </a:p>
-        </p:txBody>
-      </p:sp>
-      <p:sp>
-        <p:nvSpPr>
-          <p:cNvPr id="27" name="">
-            <a:extLst xmlns:a="http://schemas.openxmlformats.org/drawingml/2006/main">
-              <a:ext uri="{FF2B5EF4-FFF2-40B4-BE49-F238E27FC236}">
-                <a16:creationId xmlns:a16="http://schemas.microsoft.com/office/drawing/2014/main" id="{D94F156B-8BA1-4101-8DC3-7C12658FC1F1}"/>
-              </a:ext>
-            </a:extLst>
-          </p:cNvPr>
-          <p:cNvSpPr>
-            <a:spLocks xmlns:a="http://schemas.openxmlformats.org/drawingml/2006/main" noGrp="1"/>
-          </p:cNvSpPr>
-          <p:nvPr/>
-        </p:nvSpPr>
-        <p:spPr>
-          <a:xfrm xmlns:a="http://schemas.openxmlformats.org/drawingml/2006/main">
-            <a:off x="9067800" y="3314700"/>
-            <a:ext cx="323850" cy="323850"/>
-          </a:xfrm>
-          <a:prstGeom xmlns:a="http://schemas.openxmlformats.org/drawingml/2006/main" prst="rect">
-            <a:avLst/>
-          </a:prstGeom>
-          <a:ln xmlns:a="http://schemas.openxmlformats.org/drawingml/2006/main" w="0">
-            <a:solidFill>
-              <a:srgbClr val="FFFFFF"/>
-            </a:solidFill>
-            <a:prstDash val="solid"/>
-          </a:ln>
-        </p:spPr>
-        <p:txBody>
-          <a:bodyPr xmlns:a="http://schemas.openxmlformats.org/drawingml/2006/main" anchor="ctr"/>
-          <a:lstStyle xmlns:a="http://schemas.openxmlformats.org/drawingml/2006/main"/>
-          <a:p xmlns:a="http://schemas.openxmlformats.org/drawingml/2006/main">
-            <a:pPr algn="ctr">
-              <a:defRPr sz="1650" b="1">
-                <a:solidFill>
-                  <a:srgbClr val="145DA0"/>
-                </a:solidFill>
-              </a:defRPr>
-            </a:pPr>
-            <a:r>
-              <a:rPr sz="1650" b="1">
-                <a:solidFill>
-                  <a:srgbClr val="145DA0"/>
-                </a:solidFill>
-              </a:rPr>
-              <a:t>-&gt;</a:t>
-            </a:r>
-          </a:p>
-        </p:txBody>
-      </p:sp>
-      <p:sp>
-        <p:nvSpPr>
-          <p:cNvPr id="28" name="">
-            <a:extLst xmlns:a="http://schemas.openxmlformats.org/drawingml/2006/main">
-              <a:ext uri="{FF2B5EF4-FFF2-40B4-BE49-F238E27FC236}">
-                <a16:creationId xmlns:a16="http://schemas.microsoft.com/office/drawing/2014/main" id="{3AAC3618-0304-41E5-82C4-78258289B186}"/>
-              </a:ext>
-            </a:extLst>
-          </p:cNvPr>
-          <p:cNvSpPr>
-            <a:spLocks xmlns:a="http://schemas.openxmlformats.org/drawingml/2006/main" noGrp="1"/>
-          </p:cNvSpPr>
-          <p:nvPr/>
-        </p:nvSpPr>
-        <p:spPr>
-          <a:xfrm xmlns:a="http://schemas.openxmlformats.org/drawingml/2006/main">
-            <a:off x="9525000" y="2667000"/>
-            <a:ext cx="1676400" cy="1676400"/>
-          </a:xfrm>
-          <a:prstGeom xmlns:a="http://schemas.openxmlformats.org/drawingml/2006/main" prst="rect">
-            <a:avLst/>
-          </a:prstGeom>
-          <a:solidFill xmlns:a="http://schemas.openxmlformats.org/drawingml/2006/main">
-            <a:srgbClr val="FFFFFF"/>
-          </a:solidFill>
-          <a:ln xmlns:a="http://schemas.openxmlformats.org/drawingml/2006/main" w="0">
-            <a:solidFill>
-              <a:srgbClr val="D8E2ED"/>
-            </a:solidFill>
-            <a:prstDash val="solid"/>
-          </a:ln>
-        </p:spPr>
-      </p:sp>
-      <p:sp>
-        <p:nvSpPr>
-          <p:cNvPr id="29" name="">
-            <a:extLst xmlns:a="http://schemas.openxmlformats.org/drawingml/2006/main">
-              <a:ext uri="{FF2B5EF4-FFF2-40B4-BE49-F238E27FC236}">
-                <a16:creationId xmlns:a16="http://schemas.microsoft.com/office/drawing/2014/main" id="{87AD986F-D9AB-453B-B293-7A6F9E999C0C}"/>
-              </a:ext>
-            </a:extLst>
-          </p:cNvPr>
-          <p:cNvSpPr>
-            <a:spLocks xmlns:a="http://schemas.openxmlformats.org/drawingml/2006/main" noGrp="1"/>
-          </p:cNvSpPr>
-          <p:nvPr/>
-        </p:nvSpPr>
-        <p:spPr>
-          <a:xfrm xmlns:a="http://schemas.openxmlformats.org/drawingml/2006/main">
-            <a:off x="9696450" y="2895600"/>
-            <a:ext cx="419100" cy="419100"/>
-          </a:xfrm>
-          <a:prstGeom xmlns:a="http://schemas.openxmlformats.org/drawingml/2006/main" prst="rect">
-            <a:avLst/>
-          </a:prstGeom>
-          <a:solidFill xmlns:a="http://schemas.openxmlformats.org/drawingml/2006/main">
-            <a:srgbClr val="1D7F5F"/>
-          </a:solidFill>
-          <a:ln xmlns:a="http://schemas.openxmlformats.org/drawingml/2006/main" w="0">
-            <a:solidFill>
-              <a:srgbClr val="1D7F5F"/>
-            </a:solidFill>
-            <a:prstDash val="solid"/>
-          </a:ln>
-        </p:spPr>
-      </p:sp>
-      <p:sp>
-        <p:nvSpPr>
-          <p:cNvPr id="30" name="">
-            <a:extLst xmlns:a="http://schemas.openxmlformats.org/drawingml/2006/main">
-              <a:ext uri="{FF2B5EF4-FFF2-40B4-BE49-F238E27FC236}">
-                <a16:creationId xmlns:a16="http://schemas.microsoft.com/office/drawing/2014/main" id="{0C36B794-FE27-455E-88AE-74A6F932EE15}"/>
-              </a:ext>
-            </a:extLst>
-          </p:cNvPr>
-          <p:cNvSpPr>
-            <a:spLocks xmlns:a="http://schemas.openxmlformats.org/drawingml/2006/main" noGrp="1"/>
-          </p:cNvSpPr>
-          <p:nvPr/>
-        </p:nvSpPr>
-        <p:spPr>
-          <a:xfrm xmlns:a="http://schemas.openxmlformats.org/drawingml/2006/main">
-            <a:off x="9696450" y="2962275"/>
-            <a:ext cx="419100" cy="285750"/>
-          </a:xfrm>
-          <a:prstGeom xmlns:a="http://schemas.openxmlformats.org/drawingml/2006/main" prst="rect">
-            <a:avLst/>
-          </a:prstGeom>
-          <a:ln xmlns:a="http://schemas.openxmlformats.org/drawingml/2006/main" w="0">
-            <a:solidFill>
-              <a:srgbClr val="FFFFFF"/>
-            </a:solidFill>
-            <a:prstDash val="solid"/>
-          </a:ln>
-        </p:spPr>
-        <p:txBody>
-          <a:bodyPr xmlns:a="http://schemas.openxmlformats.org/drawingml/2006/main" anchor="t"/>
-          <a:lstStyle xmlns:a="http://schemas.openxmlformats.org/drawingml/2006/main"/>
-          <a:p xmlns:a="http://schemas.openxmlformats.org/drawingml/2006/main">
-            <a:pPr algn="ctr">
-              <a:defRPr sz="1500" b="1">
-                <a:solidFill>
-                  <a:srgbClr val="FFFFFF"/>
-                </a:solidFill>
-              </a:defRPr>
-            </a:pPr>
-            <a:r>
-              <a:rPr sz="1500" b="1">
-                <a:solidFill>
-                  <a:srgbClr val="FFFFFF"/>
-                </a:solidFill>
-              </a:rPr>
-              <a:t>5</a:t>
-            </a:r>
-          </a:p>
-        </p:txBody>
-      </p:sp>
-      <p:sp>
-        <p:nvSpPr>
-          <p:cNvPr id="31" name="">
-            <a:extLst xmlns:a="http://schemas.openxmlformats.org/drawingml/2006/main">
-              <a:ext uri="{FF2B5EF4-FFF2-40B4-BE49-F238E27FC236}">
-                <a16:creationId xmlns:a16="http://schemas.microsoft.com/office/drawing/2014/main" id="{894798DF-ECC1-4A18-98DC-C933DFE52E58}"/>
-              </a:ext>
-            </a:extLst>
-          </p:cNvPr>
-          <p:cNvSpPr>
-            <a:spLocks xmlns:a="http://schemas.openxmlformats.org/drawingml/2006/main" noGrp="1"/>
-          </p:cNvSpPr>
-          <p:nvPr/>
-        </p:nvSpPr>
-        <p:spPr>
-          <a:xfrm xmlns:a="http://schemas.openxmlformats.org/drawingml/2006/main">
-            <a:off x="9696450" y="3524250"/>
-            <a:ext cx="1295400" cy="304800"/>
-          </a:xfrm>
-          <a:prstGeom xmlns:a="http://schemas.openxmlformats.org/drawingml/2006/main" prst="rect">
-            <a:avLst/>
-          </a:prstGeom>
-          <a:ln xmlns:a="http://schemas.openxmlformats.org/drawingml/2006/main" w="0">
-            <a:solidFill>
-              <a:srgbClr val="FFFFFF"/>
-            </a:solidFill>
-            <a:prstDash val="solid"/>
-          </a:ln>
-        </p:spPr>
-        <p:txBody>
-          <a:bodyPr xmlns:a="http://schemas.openxmlformats.org/drawingml/2006/main" anchor="t"/>
-          <a:lstStyle xmlns:a="http://schemas.openxmlformats.org/drawingml/2006/main"/>
-          <a:p xmlns:a="http://schemas.openxmlformats.org/drawingml/2006/main">
-            <a:pPr algn="l">
-              <a:defRPr sz="1275" b="1">
-                <a:solidFill>
-                  <a:srgbClr val="172033"/>
-                </a:solidFill>
-              </a:defRPr>
-            </a:pPr>
-            <a:r>
-              <a:rPr sz="1275" b="1">
-                <a:solidFill>
-                  <a:srgbClr val="172033"/>
-                </a:solidFill>
-              </a:rPr>
-              <a:t>First close</a:t>
-            </a:r>
-          </a:p>
-        </p:txBody>
-      </p:sp>
-      <p:sp>
-        <p:nvSpPr>
-          <p:cNvPr id="32" name="">
-            <a:extLst xmlns:a="http://schemas.openxmlformats.org/drawingml/2006/main">
-              <a:ext uri="{FF2B5EF4-FFF2-40B4-BE49-F238E27FC236}">
-                <a16:creationId xmlns:a16="http://schemas.microsoft.com/office/drawing/2014/main" id="{077D18A1-D2E8-46E9-9F89-9277722FD629}"/>
-              </a:ext>
-            </a:extLst>
-          </p:cNvPr>
-          <p:cNvSpPr>
-            <a:spLocks xmlns:a="http://schemas.openxmlformats.org/drawingml/2006/main" noGrp="1"/>
-          </p:cNvSpPr>
-          <p:nvPr/>
-        </p:nvSpPr>
-        <p:spPr>
-          <a:xfrm xmlns:a="http://schemas.openxmlformats.org/drawingml/2006/main">
-            <a:off x="9696450" y="3905250"/>
-            <a:ext cx="1295400" cy="742950"/>
-          </a:xfrm>
-          <a:prstGeom xmlns:a="http://schemas.openxmlformats.org/drawingml/2006/main" prst="rect">
-            <a:avLst/>
-          </a:prstGeom>
-          <a:ln xmlns:a="http://schemas.openxmlformats.org/drawingml/2006/main" w="0">
-            <a:solidFill>
-              <a:srgbClr val="FFFFFF"/>
-            </a:solidFill>
-            <a:prstDash val="solid"/>
-          </a:ln>
-        </p:spPr>
-        <p:txBody>
-          <a:bodyPr xmlns:a="http://schemas.openxmlformats.org/drawingml/2006/main" anchor="t"/>
-          <a:lstStyle xmlns:a="http://schemas.openxmlformats.org/drawingml/2006/main"/>
-          <a:p xmlns:a="http://schemas.openxmlformats.org/drawingml/2006/main">
-            <a:pPr algn="l">
-              <a:defRPr sz="900" b="0">
-                <a:solidFill>
-                  <a:srgbClr val="5F6F86"/>
-                </a:solidFill>
-              </a:defRPr>
-            </a:pPr>
-            <a:r>
-              <a:rPr sz="900" b="0">
-                <a:solidFill>
-                  <a:srgbClr val="5F6F86"/>
-                </a:solidFill>
-              </a:rPr>
-              <a:t>Run the first month-end in Blueprint and lock the period.</a:t>
-            </a:r>
-          </a:p>
-        </p:txBody>
-      </p:sp>
-      <p:sp>
-        <p:nvSpPr>
-          <p:cNvPr id="33" name="">
-            <a:extLst xmlns:a="http://schemas.openxmlformats.org/drawingml/2006/main">
-              <a:ext uri="{FF2B5EF4-FFF2-40B4-BE49-F238E27FC236}">
-                <a16:creationId xmlns:a16="http://schemas.microsoft.com/office/drawing/2014/main" id="{2D093F45-CBC7-4FA7-8EEB-7F8ED7A84C78}"/>
-              </a:ext>
-            </a:extLst>
-          </p:cNvPr>
-          <p:cNvSpPr>
-            <a:spLocks xmlns:a="http://schemas.openxmlformats.org/drawingml/2006/main" noGrp="1"/>
-          </p:cNvSpPr>
-          <p:nvPr/>
-        </p:nvSpPr>
-        <p:spPr>
-          <a:xfrm xmlns:a="http://schemas.openxmlformats.org/drawingml/2006/main">
-            <a:off x="685800" y="6400800"/>
-            <a:ext cx="4000500" cy="228600"/>
-          </a:xfrm>
-          <a:prstGeom xmlns:a="http://schemas.openxmlformats.org/drawingml/2006/main" prst="rect">
-            <a:avLst/>
-          </a:prstGeom>
-          <a:ln xmlns:a="http://schemas.openxmlformats.org/drawingml/2006/main" w="0">
-            <a:solidFill>
-              <a:srgbClr val="FFFFFF"/>
-            </a:solidFill>
-            <a:prstDash val="solid"/>
-          </a:ln>
-        </p:spPr>
-        <p:txBody>
-          <a:bodyPr xmlns:a="http://schemas.openxmlformats.org/drawingml/2006/main" anchor="t"/>
-          <a:lstStyle xmlns:a="http://schemas.openxmlformats.org/drawingml/2006/main"/>
-          <a:p xmlns:a="http://schemas.openxmlformats.org/drawingml/2006/main">
-            <a:pPr algn="l">
-              <a:defRPr sz="900" b="0">
-                <a:solidFill>
-                  <a:srgbClr val="7B8798"/>
-                </a:solidFill>
-              </a:defRPr>
-            </a:pPr>
-            <a:r>
-              <a:rPr sz="900" b="0">
-                <a:solidFill>
-                  <a:srgbClr val="7B8798"/>
-                </a:solidFill>
-              </a:rPr>
-              <a:t>Blueprint Books for Raves</a:t>
-            </a:r>
-          </a:p>
-        </p:txBody>
-      </p:sp>
-      <p:sp>
-        <p:nvSpPr>
-          <p:cNvPr id="34" name="">
-            <a:extLst xmlns:a="http://schemas.openxmlformats.org/drawingml/2006/main">
-              <a:ext uri="{FF2B5EF4-FFF2-40B4-BE49-F238E27FC236}">
-                <a16:creationId xmlns:a16="http://schemas.microsoft.com/office/drawing/2014/main" id="{D79A4F9B-7A9F-4032-977C-35246F9E8B7A}"/>
+                <a16:creationId xmlns:a16="http://schemas.microsoft.com/office/drawing/2014/main" id="{1DA10B0B-4E3A-4969-BA9D-D0E6FB18A6E4}"/>
               </a:ext>
             </a:extLst>
           </p:cNvPr>
@@ -13170,7 +14555,7 @@
     </p:spTree>
     <p:extLst>
       <p:ext uri="{BB962C8B-B14F-4D97-AF65-F5344CB8AC3E}">
-        <p14:creationId xmlns:p14="http://schemas.microsoft.com/office/powerpoint/2010/main" val="1212255944"/>
+        <p14:creationId xmlns:p14="http://schemas.microsoft.com/office/powerpoint/2010/main" val="1425087874"/>
       </p:ext>
     </p:extLst>
   </p:cSld>

--- a/docs/Blueprint Books Pitch Deck - Raves.pptx
+++ b/docs/Blueprint Books Pitch Deck - Raves.pptx
@@ -2,23 +2,23 @@
 <file path=ppt/presentation.xml><?xml version="1.0" encoding="utf-8"?>
 <p:presentation xmlns:p="http://schemas.openxmlformats.org/presentationml/2006/main">
   <p:sldMasterIdLst>
-    <p:sldMasterId xmlns:r="http://schemas.openxmlformats.org/officeDocument/2006/relationships" id="2147483648" r:id="R91c8fdf8a1e04614"/>
+    <p:sldMasterId xmlns:r="http://schemas.openxmlformats.org/officeDocument/2006/relationships" id="2147483648" r:id="Rf29e60e7b698424f"/>
   </p:sldMasterIdLst>
   <p:notesMasterIdLst>
-    <p:notesMasterId xmlns:r="http://schemas.openxmlformats.org/officeDocument/2006/relationships" r:id="Rbddd324d89604e53"/>
+    <p:notesMasterId xmlns:r="http://schemas.openxmlformats.org/officeDocument/2006/relationships" r:id="R946f091c9c34431f"/>
   </p:notesMasterIdLst>
   <p:sldIdLst>
-    <p:sldId xmlns:r="http://schemas.openxmlformats.org/officeDocument/2006/relationships" id="256" r:id="R16e60532a45448c1"/>
-    <p:sldId xmlns:r="http://schemas.openxmlformats.org/officeDocument/2006/relationships" id="257" r:id="R61c3dabe2f134b2a"/>
-    <p:sldId xmlns:r="http://schemas.openxmlformats.org/officeDocument/2006/relationships" id="258" r:id="Rcafd86bbd908472c"/>
-    <p:sldId xmlns:r="http://schemas.openxmlformats.org/officeDocument/2006/relationships" id="259" r:id="Rced9f55626f84b00"/>
-    <p:sldId xmlns:r="http://schemas.openxmlformats.org/officeDocument/2006/relationships" id="260" r:id="R89fdff4586304fd1"/>
-    <p:sldId xmlns:r="http://schemas.openxmlformats.org/officeDocument/2006/relationships" id="261" r:id="R56f08515536845e7"/>
-    <p:sldId xmlns:r="http://schemas.openxmlformats.org/officeDocument/2006/relationships" id="262" r:id="Re0ca5ec4410f480b"/>
-    <p:sldId xmlns:r="http://schemas.openxmlformats.org/officeDocument/2006/relationships" id="263" r:id="Rf0424d20ad1143f7"/>
-    <p:sldId xmlns:r="http://schemas.openxmlformats.org/officeDocument/2006/relationships" id="264" r:id="Re6ca11c1d23c4989"/>
-    <p:sldId xmlns:r="http://schemas.openxmlformats.org/officeDocument/2006/relationships" id="265" r:id="Ra9ec3132bf6f455f"/>
-    <p:sldId xmlns:r="http://schemas.openxmlformats.org/officeDocument/2006/relationships" id="266" r:id="R99f36da28e794542"/>
+    <p:sldId xmlns:r="http://schemas.openxmlformats.org/officeDocument/2006/relationships" id="256" r:id="Rc801782da9da4e42"/>
+    <p:sldId xmlns:r="http://schemas.openxmlformats.org/officeDocument/2006/relationships" id="257" r:id="R5dee284de5bf4083"/>
+    <p:sldId xmlns:r="http://schemas.openxmlformats.org/officeDocument/2006/relationships" id="258" r:id="R368875123b0741d8"/>
+    <p:sldId xmlns:r="http://schemas.openxmlformats.org/officeDocument/2006/relationships" id="259" r:id="Rde4e71d65d404fcd"/>
+    <p:sldId xmlns:r="http://schemas.openxmlformats.org/officeDocument/2006/relationships" id="260" r:id="R276081a658174008"/>
+    <p:sldId xmlns:r="http://schemas.openxmlformats.org/officeDocument/2006/relationships" id="261" r:id="R747f89d6a7784cfe"/>
+    <p:sldId xmlns:r="http://schemas.openxmlformats.org/officeDocument/2006/relationships" id="262" r:id="R96c96a8516df43ab"/>
+    <p:sldId xmlns:r="http://schemas.openxmlformats.org/officeDocument/2006/relationships" id="263" r:id="R648fdcc727b24c51"/>
+    <p:sldId xmlns:r="http://schemas.openxmlformats.org/officeDocument/2006/relationships" id="264" r:id="R1e5933d333f34896"/>
+    <p:sldId xmlns:r="http://schemas.openxmlformats.org/officeDocument/2006/relationships" id="265" r:id="Rdf0bf97610734d96"/>
+    <p:sldId xmlns:r="http://schemas.openxmlformats.org/officeDocument/2006/relationships" id="266" r:id="R21461f808aa84350"/>
   </p:sldIdLst>
   <p:sldSz cx="12192000" cy="6858000"/>
   <p:notesSz cx="6858000" cy="9144000"/>
@@ -1225,7 +1225,7 @@
   </p:cSld>
   <p:clrMap bg1="lt1" tx1="dk1" bg2="lt2" tx2="dk2" accent1="accent1" accent2="accent2" accent3="accent3" accent4="accent4" accent5="accent5" accent6="accent6" hlink="hlink" folHlink="folHlink"/>
   <p:sldLayoutIdLst>
-    <p:sldLayoutId xmlns:r="http://schemas.openxmlformats.org/officeDocument/2006/relationships" id="2147483649" r:id="Rd5816606f2264237"/>
+    <p:sldLayoutId xmlns:r="http://schemas.openxmlformats.org/officeDocument/2006/relationships" id="2147483649" r:id="R6c63ba5815d44f81"/>
   </p:sldLayoutIdLst>
   <p:txStyles>
     <p:titleStyle>
@@ -1723,7 +1723,7 @@
           <p:cNvPr id="1" name="">
             <a:extLst xmlns:a="http://schemas.openxmlformats.org/drawingml/2006/main">
               <a:ext uri="{FF2B5EF4-FFF2-40B4-BE49-F238E27FC236}">
-                <a16:creationId xmlns:a16="http://schemas.microsoft.com/office/drawing/2014/main" id="{A2843F07-F90D-4A8C-9BDA-C14354586139}"/>
+                <a16:creationId xmlns:a16="http://schemas.microsoft.com/office/drawing/2014/main" id="{29E37280-3131-4CAE-AABE-E78A8F1A0550}"/>
               </a:ext>
             </a:extLst>
           </p:cNvPr>
@@ -1756,7 +1756,7 @@
           <p:cNvPr id="2" name="">
             <a:extLst xmlns:a="http://schemas.openxmlformats.org/drawingml/2006/main">
               <a:ext uri="{FF2B5EF4-FFF2-40B4-BE49-F238E27FC236}">
-                <a16:creationId xmlns:a16="http://schemas.microsoft.com/office/drawing/2014/main" id="{DEF9761C-0525-46C4-A080-2F1BCC401FEA}"/>
+                <a16:creationId xmlns:a16="http://schemas.microsoft.com/office/drawing/2014/main" id="{45872626-CA4C-43DC-9AFD-4F9C89838CEB}"/>
               </a:ext>
             </a:extLst>
           </p:cNvPr>
@@ -1789,7 +1789,7 @@
           <p:cNvPr id="3" name="">
             <a:extLst xmlns:a="http://schemas.openxmlformats.org/drawingml/2006/main">
               <a:ext uri="{FF2B5EF4-FFF2-40B4-BE49-F238E27FC236}">
-                <a16:creationId xmlns:a16="http://schemas.microsoft.com/office/drawing/2014/main" id="{7D026858-384C-43E4-B825-30620C1CE6AB}"/>
+                <a16:creationId xmlns:a16="http://schemas.microsoft.com/office/drawing/2014/main" id="{4C088F5D-AE64-4D47-87F7-C400A8B349E9}"/>
               </a:ext>
             </a:extLst>
           </p:cNvPr>
@@ -1840,7 +1840,7 @@
           <p:cNvPr id="4" name="">
             <a:extLst xmlns:a="http://schemas.openxmlformats.org/drawingml/2006/main">
               <a:ext uri="{FF2B5EF4-FFF2-40B4-BE49-F238E27FC236}">
-                <a16:creationId xmlns:a16="http://schemas.microsoft.com/office/drawing/2014/main" id="{C8137DF9-1B7F-4075-A326-CD3767F92510}"/>
+                <a16:creationId xmlns:a16="http://schemas.microsoft.com/office/drawing/2014/main" id="{2B110531-C83B-4F8F-A924-A5B053B9F93F}"/>
               </a:ext>
             </a:extLst>
           </p:cNvPr>
@@ -1891,7 +1891,7 @@
           <p:cNvPr id="5" name="">
             <a:extLst xmlns:a="http://schemas.openxmlformats.org/drawingml/2006/main">
               <a:ext uri="{FF2B5EF4-FFF2-40B4-BE49-F238E27FC236}">
-                <a16:creationId xmlns:a16="http://schemas.microsoft.com/office/drawing/2014/main" id="{F8BB9DB9-3190-4570-8B74-C61BC0DAF9B9}"/>
+                <a16:creationId xmlns:a16="http://schemas.microsoft.com/office/drawing/2014/main" id="{03949C35-5B0A-44D1-B180-548991365548}"/>
               </a:ext>
             </a:extLst>
           </p:cNvPr>
@@ -1942,7 +1942,7 @@
           <p:cNvPr id="6" name="">
             <a:extLst xmlns:a="http://schemas.openxmlformats.org/drawingml/2006/main">
               <a:ext uri="{FF2B5EF4-FFF2-40B4-BE49-F238E27FC236}">
-                <a16:creationId xmlns:a16="http://schemas.microsoft.com/office/drawing/2014/main" id="{C525A20B-6A75-489C-BD35-32C932B59C61}"/>
+                <a16:creationId xmlns:a16="http://schemas.microsoft.com/office/drawing/2014/main" id="{9B2698EF-2BE4-4197-A3ED-2CE8C0A44971}"/>
               </a:ext>
             </a:extLst>
           </p:cNvPr>
@@ -1993,7 +1993,7 @@
           <p:cNvPr id="7" name="">
             <a:extLst xmlns:a="http://schemas.openxmlformats.org/drawingml/2006/main">
               <a:ext uri="{FF2B5EF4-FFF2-40B4-BE49-F238E27FC236}">
-                <a16:creationId xmlns:a16="http://schemas.microsoft.com/office/drawing/2014/main" id="{680D85CB-8C58-4C37-8DA6-CC2D3CA8B686}"/>
+                <a16:creationId xmlns:a16="http://schemas.microsoft.com/office/drawing/2014/main" id="{2711CA28-F20A-41FE-874E-7DE0DC1B627E}"/>
               </a:ext>
             </a:extLst>
           </p:cNvPr>
@@ -2044,7 +2044,7 @@
           <p:cNvPr id="8" name="">
             <a:extLst xmlns:a="http://schemas.openxmlformats.org/drawingml/2006/main">
               <a:ext uri="{FF2B5EF4-FFF2-40B4-BE49-F238E27FC236}">
-                <a16:creationId xmlns:a16="http://schemas.microsoft.com/office/drawing/2014/main" id="{D573111E-FD3D-453D-81D8-D74A1D6FBDAA}"/>
+                <a16:creationId xmlns:a16="http://schemas.microsoft.com/office/drawing/2014/main" id="{B2FD66F7-E455-4D80-A293-D80D4F19D2E5}"/>
               </a:ext>
             </a:extLst>
           </p:cNvPr>
@@ -2095,7 +2095,7 @@
           <p:cNvPr id="9" name="">
             <a:extLst xmlns:a="http://schemas.openxmlformats.org/drawingml/2006/main">
               <a:ext uri="{FF2B5EF4-FFF2-40B4-BE49-F238E27FC236}">
-                <a16:creationId xmlns:a16="http://schemas.microsoft.com/office/drawing/2014/main" id="{BCF1C939-C42E-401A-BD65-CE77024D4966}"/>
+                <a16:creationId xmlns:a16="http://schemas.microsoft.com/office/drawing/2014/main" id="{4F9C790B-3A12-4CD0-8C3B-860974827CAF}"/>
               </a:ext>
             </a:extLst>
           </p:cNvPr>
@@ -2128,7 +2128,7 @@
           <p:cNvPr id="10" name="">
             <a:extLst xmlns:a="http://schemas.openxmlformats.org/drawingml/2006/main">
               <a:ext uri="{FF2B5EF4-FFF2-40B4-BE49-F238E27FC236}">
-                <a16:creationId xmlns:a16="http://schemas.microsoft.com/office/drawing/2014/main" id="{754E4839-DA89-427E-9757-DEB468140C25}"/>
+                <a16:creationId xmlns:a16="http://schemas.microsoft.com/office/drawing/2014/main" id="{5C5F98DA-C039-48AF-BD2B-9881A4102FD0}"/>
               </a:ext>
             </a:extLst>
           </p:cNvPr>
@@ -2179,7 +2179,7 @@
           <p:cNvPr id="11" name="">
             <a:extLst xmlns:a="http://schemas.openxmlformats.org/drawingml/2006/main">
               <a:ext uri="{FF2B5EF4-FFF2-40B4-BE49-F238E27FC236}">
-                <a16:creationId xmlns:a16="http://schemas.microsoft.com/office/drawing/2014/main" id="{9AF849DE-9E2A-464D-A809-1DB0C6EF68AF}"/>
+                <a16:creationId xmlns:a16="http://schemas.microsoft.com/office/drawing/2014/main" id="{76FC7697-9681-4238-A8D6-FA0356D2E581}"/>
               </a:ext>
             </a:extLst>
           </p:cNvPr>
@@ -2247,7 +2247,7 @@
           <p:cNvPr id="12" name="">
             <a:extLst xmlns:a="http://schemas.openxmlformats.org/drawingml/2006/main">
               <a:ext uri="{FF2B5EF4-FFF2-40B4-BE49-F238E27FC236}">
-                <a16:creationId xmlns:a16="http://schemas.microsoft.com/office/drawing/2014/main" id="{1DD572BE-3640-4DF0-9C14-04B02136A3E4}"/>
+                <a16:creationId xmlns:a16="http://schemas.microsoft.com/office/drawing/2014/main" id="{1307EF2B-ED9C-4FC4-8C4E-18997F296B4C}"/>
               </a:ext>
             </a:extLst>
           </p:cNvPr>
@@ -2298,7 +2298,7 @@
           <p:cNvPr id="13" name="">
             <a:extLst xmlns:a="http://schemas.openxmlformats.org/drawingml/2006/main">
               <a:ext uri="{FF2B5EF4-FFF2-40B4-BE49-F238E27FC236}">
-                <a16:creationId xmlns:a16="http://schemas.microsoft.com/office/drawing/2014/main" id="{C7BAEBF7-798E-41BA-8B07-06A603B5CC91}"/>
+                <a16:creationId xmlns:a16="http://schemas.microsoft.com/office/drawing/2014/main" id="{370D8DC5-C028-45D8-82B1-DE7686C167A4}"/>
               </a:ext>
             </a:extLst>
           </p:cNvPr>
@@ -2347,7 +2347,7 @@
     </p:spTree>
     <p:extLst>
       <p:ext uri="{BB962C8B-B14F-4D97-AF65-F5344CB8AC3E}">
-        <p14:creationId xmlns:p14="http://schemas.microsoft.com/office/powerpoint/2010/main" val="1420710754"/>
+        <p14:creationId xmlns:p14="http://schemas.microsoft.com/office/powerpoint/2010/main" val="1854565988"/>
       </p:ext>
     </p:extLst>
   </p:cSld>
@@ -2371,7 +2371,7 @@
           <p:cNvPr id="1" name="">
             <a:extLst xmlns:a="http://schemas.openxmlformats.org/drawingml/2006/main">
               <a:ext uri="{FF2B5EF4-FFF2-40B4-BE49-F238E27FC236}">
-                <a16:creationId xmlns:a16="http://schemas.microsoft.com/office/drawing/2014/main" id="{52511A6F-25D4-4278-875B-C10E3D8CCD94}"/>
+                <a16:creationId xmlns:a16="http://schemas.microsoft.com/office/drawing/2014/main" id="{64EA4308-4647-4F8D-A95F-559DEE42E8AF}"/>
               </a:ext>
             </a:extLst>
           </p:cNvPr>
@@ -2404,7 +2404,7 @@
           <p:cNvPr id="2" name="">
             <a:extLst xmlns:a="http://schemas.openxmlformats.org/drawingml/2006/main">
               <a:ext uri="{FF2B5EF4-FFF2-40B4-BE49-F238E27FC236}">
-                <a16:creationId xmlns:a16="http://schemas.microsoft.com/office/drawing/2014/main" id="{8082BC9F-E7D3-4609-B0D8-891976925D3F}"/>
+                <a16:creationId xmlns:a16="http://schemas.microsoft.com/office/drawing/2014/main" id="{8910A232-E92C-4FAD-B51F-907F6B295CC8}"/>
               </a:ext>
             </a:extLst>
           </p:cNvPr>
@@ -2455,7 +2455,7 @@
           <p:cNvPr id="3" name="">
             <a:extLst xmlns:a="http://schemas.openxmlformats.org/drawingml/2006/main">
               <a:ext uri="{FF2B5EF4-FFF2-40B4-BE49-F238E27FC236}">
-                <a16:creationId xmlns:a16="http://schemas.microsoft.com/office/drawing/2014/main" id="{0044FDFD-A761-4C86-9F68-6710840EEAFA}"/>
+                <a16:creationId xmlns:a16="http://schemas.microsoft.com/office/drawing/2014/main" id="{44D2AC35-247F-4C65-9A9A-B3E32C13FBD7}"/>
               </a:ext>
             </a:extLst>
           </p:cNvPr>
@@ -2506,7 +2506,7 @@
           <p:cNvPr id="4" name="">
             <a:extLst xmlns:a="http://schemas.openxmlformats.org/drawingml/2006/main">
               <a:ext uri="{FF2B5EF4-FFF2-40B4-BE49-F238E27FC236}">
-                <a16:creationId xmlns:a16="http://schemas.microsoft.com/office/drawing/2014/main" id="{020A96C4-315D-48AC-BF7C-1124492B7831}"/>
+                <a16:creationId xmlns:a16="http://schemas.microsoft.com/office/drawing/2014/main" id="{72B4D3C5-5D22-4D77-AD33-2455F07B9118}"/>
               </a:ext>
             </a:extLst>
           </p:cNvPr>
@@ -2539,7 +2539,7 @@
           <p:cNvPr id="5" name="">
             <a:extLst xmlns:a="http://schemas.openxmlformats.org/drawingml/2006/main">
               <a:ext uri="{FF2B5EF4-FFF2-40B4-BE49-F238E27FC236}">
-                <a16:creationId xmlns:a16="http://schemas.microsoft.com/office/drawing/2014/main" id="{F0E8D5FB-4B75-4DD7-A490-1C5AFE44F861}"/>
+                <a16:creationId xmlns:a16="http://schemas.microsoft.com/office/drawing/2014/main" id="{78F3ED17-362B-4DB4-9566-8B11EA402CA1}"/>
               </a:ext>
             </a:extLst>
           </p:cNvPr>
@@ -2572,7 +2572,7 @@
           <p:cNvPr id="6" name="">
             <a:extLst xmlns:a="http://schemas.openxmlformats.org/drawingml/2006/main">
               <a:ext uri="{FF2B5EF4-FFF2-40B4-BE49-F238E27FC236}">
-                <a16:creationId xmlns:a16="http://schemas.microsoft.com/office/drawing/2014/main" id="{170DFF5F-6652-44A7-89F8-ACA48524F36E}"/>
+                <a16:creationId xmlns:a16="http://schemas.microsoft.com/office/drawing/2014/main" id="{8F7F2418-A7DF-46F7-AE7E-9CE10959C954}"/>
               </a:ext>
             </a:extLst>
           </p:cNvPr>
@@ -2623,7 +2623,7 @@
           <p:cNvPr id="7" name="">
             <a:extLst xmlns:a="http://schemas.openxmlformats.org/drawingml/2006/main">
               <a:ext uri="{FF2B5EF4-FFF2-40B4-BE49-F238E27FC236}">
-                <a16:creationId xmlns:a16="http://schemas.microsoft.com/office/drawing/2014/main" id="{93E6B392-CA43-43BB-BE0F-E25565AFEA0D}"/>
+                <a16:creationId xmlns:a16="http://schemas.microsoft.com/office/drawing/2014/main" id="{9D8491DA-CD56-4365-BF9E-E3E62AAC37A8}"/>
               </a:ext>
             </a:extLst>
           </p:cNvPr>
@@ -2674,7 +2674,7 @@
           <p:cNvPr id="8" name="">
             <a:extLst xmlns:a="http://schemas.openxmlformats.org/drawingml/2006/main">
               <a:ext uri="{FF2B5EF4-FFF2-40B4-BE49-F238E27FC236}">
-                <a16:creationId xmlns:a16="http://schemas.microsoft.com/office/drawing/2014/main" id="{FF889570-563C-4419-8F33-FFC3773597BD}"/>
+                <a16:creationId xmlns:a16="http://schemas.microsoft.com/office/drawing/2014/main" id="{37E919C1-BBA0-4784-B4BC-AAC25E5193E9}"/>
               </a:ext>
             </a:extLst>
           </p:cNvPr>
@@ -2725,7 +2725,7 @@
           <p:cNvPr id="9" name="">
             <a:extLst xmlns:a="http://schemas.openxmlformats.org/drawingml/2006/main">
               <a:ext uri="{FF2B5EF4-FFF2-40B4-BE49-F238E27FC236}">
-                <a16:creationId xmlns:a16="http://schemas.microsoft.com/office/drawing/2014/main" id="{8BB40F31-C723-4E2A-9FAC-F495DCB6EE80}"/>
+                <a16:creationId xmlns:a16="http://schemas.microsoft.com/office/drawing/2014/main" id="{92E355A4-27F6-436D-9401-5CDEA36FCCA1}"/>
               </a:ext>
             </a:extLst>
           </p:cNvPr>
@@ -2776,7 +2776,7 @@
           <p:cNvPr id="10" name="">
             <a:extLst xmlns:a="http://schemas.openxmlformats.org/drawingml/2006/main">
               <a:ext uri="{FF2B5EF4-FFF2-40B4-BE49-F238E27FC236}">
-                <a16:creationId xmlns:a16="http://schemas.microsoft.com/office/drawing/2014/main" id="{CBD17AEC-D82E-4D62-B851-E557FA9298FB}"/>
+                <a16:creationId xmlns:a16="http://schemas.microsoft.com/office/drawing/2014/main" id="{E233136D-5A5E-4076-A401-5FE09F969D2D}"/>
               </a:ext>
             </a:extLst>
           </p:cNvPr>
@@ -2809,7 +2809,7 @@
           <p:cNvPr id="11" name="">
             <a:extLst xmlns:a="http://schemas.openxmlformats.org/drawingml/2006/main">
               <a:ext uri="{FF2B5EF4-FFF2-40B4-BE49-F238E27FC236}">
-                <a16:creationId xmlns:a16="http://schemas.microsoft.com/office/drawing/2014/main" id="{D34C4F21-E7F2-498A-81F1-BFDF5AD4D5EE}"/>
+                <a16:creationId xmlns:a16="http://schemas.microsoft.com/office/drawing/2014/main" id="{77F455D1-74E8-4EE1-B844-393A64AA4D34}"/>
               </a:ext>
             </a:extLst>
           </p:cNvPr>
@@ -2842,7 +2842,7 @@
           <p:cNvPr id="12" name="">
             <a:extLst xmlns:a="http://schemas.openxmlformats.org/drawingml/2006/main">
               <a:ext uri="{FF2B5EF4-FFF2-40B4-BE49-F238E27FC236}">
-                <a16:creationId xmlns:a16="http://schemas.microsoft.com/office/drawing/2014/main" id="{6C1C6C55-ED68-48F9-B8F3-2FC3BEF3C7EF}"/>
+                <a16:creationId xmlns:a16="http://schemas.microsoft.com/office/drawing/2014/main" id="{E4D389C0-36A1-46E3-84A1-315D70713CC1}"/>
               </a:ext>
             </a:extLst>
           </p:cNvPr>
@@ -2893,7 +2893,7 @@
           <p:cNvPr id="13" name="">
             <a:extLst xmlns:a="http://schemas.openxmlformats.org/drawingml/2006/main">
               <a:ext uri="{FF2B5EF4-FFF2-40B4-BE49-F238E27FC236}">
-                <a16:creationId xmlns:a16="http://schemas.microsoft.com/office/drawing/2014/main" id="{8B0842C9-1646-4E0A-8273-5457432A6E71}"/>
+                <a16:creationId xmlns:a16="http://schemas.microsoft.com/office/drawing/2014/main" id="{A11F73DF-C767-4E07-8CF1-D4F850124443}"/>
               </a:ext>
             </a:extLst>
           </p:cNvPr>
@@ -2944,7 +2944,7 @@
           <p:cNvPr id="14" name="">
             <a:extLst xmlns:a="http://schemas.openxmlformats.org/drawingml/2006/main">
               <a:ext uri="{FF2B5EF4-FFF2-40B4-BE49-F238E27FC236}">
-                <a16:creationId xmlns:a16="http://schemas.microsoft.com/office/drawing/2014/main" id="{008B8446-9049-4FF2-8DAF-B834CE8F64AA}"/>
+                <a16:creationId xmlns:a16="http://schemas.microsoft.com/office/drawing/2014/main" id="{74092CA4-21CB-42AB-B321-E7E7FF653538}"/>
               </a:ext>
             </a:extLst>
           </p:cNvPr>
@@ -2995,7 +2995,7 @@
           <p:cNvPr id="15" name="">
             <a:extLst xmlns:a="http://schemas.openxmlformats.org/drawingml/2006/main">
               <a:ext uri="{FF2B5EF4-FFF2-40B4-BE49-F238E27FC236}">
-                <a16:creationId xmlns:a16="http://schemas.microsoft.com/office/drawing/2014/main" id="{16C3FC9E-5860-422D-9003-E8582DE88CEE}"/>
+                <a16:creationId xmlns:a16="http://schemas.microsoft.com/office/drawing/2014/main" id="{571E3899-8CDC-4A36-865B-1E80E6C1CA35}"/>
               </a:ext>
             </a:extLst>
           </p:cNvPr>
@@ -3046,7 +3046,7 @@
           <p:cNvPr id="16" name="">
             <a:extLst xmlns:a="http://schemas.openxmlformats.org/drawingml/2006/main">
               <a:ext uri="{FF2B5EF4-FFF2-40B4-BE49-F238E27FC236}">
-                <a16:creationId xmlns:a16="http://schemas.microsoft.com/office/drawing/2014/main" id="{17C227EE-31B3-4F3B-B176-73EAFAF41DB2}"/>
+                <a16:creationId xmlns:a16="http://schemas.microsoft.com/office/drawing/2014/main" id="{336A14B6-C5FA-4746-8CA3-DD1ACADCBFD1}"/>
               </a:ext>
             </a:extLst>
           </p:cNvPr>
@@ -3079,7 +3079,7 @@
           <p:cNvPr id="17" name="">
             <a:extLst xmlns:a="http://schemas.openxmlformats.org/drawingml/2006/main">
               <a:ext uri="{FF2B5EF4-FFF2-40B4-BE49-F238E27FC236}">
-                <a16:creationId xmlns:a16="http://schemas.microsoft.com/office/drawing/2014/main" id="{3CFC2F97-AAD4-4B47-9538-B05390393013}"/>
+                <a16:creationId xmlns:a16="http://schemas.microsoft.com/office/drawing/2014/main" id="{84F43FBD-583A-45C2-B007-D6D97D679032}"/>
               </a:ext>
             </a:extLst>
           </p:cNvPr>
@@ -3112,7 +3112,7 @@
           <p:cNvPr id="18" name="">
             <a:extLst xmlns:a="http://schemas.openxmlformats.org/drawingml/2006/main">
               <a:ext uri="{FF2B5EF4-FFF2-40B4-BE49-F238E27FC236}">
-                <a16:creationId xmlns:a16="http://schemas.microsoft.com/office/drawing/2014/main" id="{2EA85162-AE80-4F1C-BA7E-CC89C3A4B66E}"/>
+                <a16:creationId xmlns:a16="http://schemas.microsoft.com/office/drawing/2014/main" id="{463A9AF7-CE77-4DED-B4F2-1A22D3578FD3}"/>
               </a:ext>
             </a:extLst>
           </p:cNvPr>
@@ -3163,7 +3163,7 @@
           <p:cNvPr id="19" name="">
             <a:extLst xmlns:a="http://schemas.openxmlformats.org/drawingml/2006/main">
               <a:ext uri="{FF2B5EF4-FFF2-40B4-BE49-F238E27FC236}">
-                <a16:creationId xmlns:a16="http://schemas.microsoft.com/office/drawing/2014/main" id="{8F7D8F75-C0A0-4814-AF37-1CF062081983}"/>
+                <a16:creationId xmlns:a16="http://schemas.microsoft.com/office/drawing/2014/main" id="{CB61910E-A9BF-4E62-A80F-BF8528B3CD5F}"/>
               </a:ext>
             </a:extLst>
           </p:cNvPr>
@@ -3214,7 +3214,7 @@
           <p:cNvPr id="20" name="">
             <a:extLst xmlns:a="http://schemas.openxmlformats.org/drawingml/2006/main">
               <a:ext uri="{FF2B5EF4-FFF2-40B4-BE49-F238E27FC236}">
-                <a16:creationId xmlns:a16="http://schemas.microsoft.com/office/drawing/2014/main" id="{B867BCA8-3837-4D71-9C93-536BFC0284BC}"/>
+                <a16:creationId xmlns:a16="http://schemas.microsoft.com/office/drawing/2014/main" id="{C2DE018F-15FB-4FB9-8DE3-8881186FEE0A}"/>
               </a:ext>
             </a:extLst>
           </p:cNvPr>
@@ -3265,7 +3265,7 @@
           <p:cNvPr id="21" name="">
             <a:extLst xmlns:a="http://schemas.openxmlformats.org/drawingml/2006/main">
               <a:ext uri="{FF2B5EF4-FFF2-40B4-BE49-F238E27FC236}">
-                <a16:creationId xmlns:a16="http://schemas.microsoft.com/office/drawing/2014/main" id="{84940A0A-9429-47E2-9B7A-1F6B515EAF78}"/>
+                <a16:creationId xmlns:a16="http://schemas.microsoft.com/office/drawing/2014/main" id="{F8CF07A6-47CC-4EBA-BCB7-03AF796AF2FF}"/>
               </a:ext>
             </a:extLst>
           </p:cNvPr>
@@ -3316,7 +3316,7 @@
           <p:cNvPr id="22" name="">
             <a:extLst xmlns:a="http://schemas.openxmlformats.org/drawingml/2006/main">
               <a:ext uri="{FF2B5EF4-FFF2-40B4-BE49-F238E27FC236}">
-                <a16:creationId xmlns:a16="http://schemas.microsoft.com/office/drawing/2014/main" id="{B04145C5-5E25-459A-9273-AF867E9A9010}"/>
+                <a16:creationId xmlns:a16="http://schemas.microsoft.com/office/drawing/2014/main" id="{EFB577CD-3389-4DAF-90D4-61F79464FC60}"/>
               </a:ext>
             </a:extLst>
           </p:cNvPr>
@@ -3349,7 +3349,7 @@
           <p:cNvPr id="23" name="">
             <a:extLst xmlns:a="http://schemas.openxmlformats.org/drawingml/2006/main">
               <a:ext uri="{FF2B5EF4-FFF2-40B4-BE49-F238E27FC236}">
-                <a16:creationId xmlns:a16="http://schemas.microsoft.com/office/drawing/2014/main" id="{AD44FFA3-78CF-4C23-B896-D71A3CAEF17E}"/>
+                <a16:creationId xmlns:a16="http://schemas.microsoft.com/office/drawing/2014/main" id="{18FE2265-1B7C-43D5-BCF3-CFC71DED7F00}"/>
               </a:ext>
             </a:extLst>
           </p:cNvPr>
@@ -3382,7 +3382,7 @@
           <p:cNvPr id="24" name="">
             <a:extLst xmlns:a="http://schemas.openxmlformats.org/drawingml/2006/main">
               <a:ext uri="{FF2B5EF4-FFF2-40B4-BE49-F238E27FC236}">
-                <a16:creationId xmlns:a16="http://schemas.microsoft.com/office/drawing/2014/main" id="{19621A37-F7C3-4C9B-B09B-3EB13E042949}"/>
+                <a16:creationId xmlns:a16="http://schemas.microsoft.com/office/drawing/2014/main" id="{9769D421-B18C-428E-A7A7-C5C29BFE0E67}"/>
               </a:ext>
             </a:extLst>
           </p:cNvPr>
@@ -3433,7 +3433,7 @@
           <p:cNvPr id="25" name="">
             <a:extLst xmlns:a="http://schemas.openxmlformats.org/drawingml/2006/main">
               <a:ext uri="{FF2B5EF4-FFF2-40B4-BE49-F238E27FC236}">
-                <a16:creationId xmlns:a16="http://schemas.microsoft.com/office/drawing/2014/main" id="{E8922ED0-B70F-479A-A7F8-3E74AE8E1502}"/>
+                <a16:creationId xmlns:a16="http://schemas.microsoft.com/office/drawing/2014/main" id="{2647CFFE-6299-434C-973B-A250C8848C0C}"/>
               </a:ext>
             </a:extLst>
           </p:cNvPr>
@@ -3484,7 +3484,7 @@
           <p:cNvPr id="26" name="">
             <a:extLst xmlns:a="http://schemas.openxmlformats.org/drawingml/2006/main">
               <a:ext uri="{FF2B5EF4-FFF2-40B4-BE49-F238E27FC236}">
-                <a16:creationId xmlns:a16="http://schemas.microsoft.com/office/drawing/2014/main" id="{2E55DA48-D761-4FFF-84C1-80FDCE5C1EDD}"/>
+                <a16:creationId xmlns:a16="http://schemas.microsoft.com/office/drawing/2014/main" id="{4828E555-9720-4EB4-AA96-090A7DFCA92A}"/>
               </a:ext>
             </a:extLst>
           </p:cNvPr>
@@ -3535,7 +3535,7 @@
           <p:cNvPr id="27" name="">
             <a:extLst xmlns:a="http://schemas.openxmlformats.org/drawingml/2006/main">
               <a:ext uri="{FF2B5EF4-FFF2-40B4-BE49-F238E27FC236}">
-                <a16:creationId xmlns:a16="http://schemas.microsoft.com/office/drawing/2014/main" id="{A95FCE28-6D4A-4425-BE05-8F62E2B9681B}"/>
+                <a16:creationId xmlns:a16="http://schemas.microsoft.com/office/drawing/2014/main" id="{3E503E33-9614-4A2D-8FB3-8F9997B0CA5D}"/>
               </a:ext>
             </a:extLst>
           </p:cNvPr>
@@ -3586,7 +3586,7 @@
           <p:cNvPr id="28" name="">
             <a:extLst xmlns:a="http://schemas.openxmlformats.org/drawingml/2006/main">
               <a:ext uri="{FF2B5EF4-FFF2-40B4-BE49-F238E27FC236}">
-                <a16:creationId xmlns:a16="http://schemas.microsoft.com/office/drawing/2014/main" id="{0D384C1B-8859-47AF-9974-1D014E859708}"/>
+                <a16:creationId xmlns:a16="http://schemas.microsoft.com/office/drawing/2014/main" id="{C1D2A0D4-4B60-46A3-AC00-F245FB350F1F}"/>
               </a:ext>
             </a:extLst>
           </p:cNvPr>
@@ -3619,7 +3619,7 @@
           <p:cNvPr id="29" name="">
             <a:extLst xmlns:a="http://schemas.openxmlformats.org/drawingml/2006/main">
               <a:ext uri="{FF2B5EF4-FFF2-40B4-BE49-F238E27FC236}">
-                <a16:creationId xmlns:a16="http://schemas.microsoft.com/office/drawing/2014/main" id="{BD53963C-ADC8-48C9-ACD5-A9CCE162E6AB}"/>
+                <a16:creationId xmlns:a16="http://schemas.microsoft.com/office/drawing/2014/main" id="{751548C1-C85B-4072-9D8A-2B97C80F77C5}"/>
               </a:ext>
             </a:extLst>
           </p:cNvPr>
@@ -3652,7 +3652,7 @@
           <p:cNvPr id="30" name="">
             <a:extLst xmlns:a="http://schemas.openxmlformats.org/drawingml/2006/main">
               <a:ext uri="{FF2B5EF4-FFF2-40B4-BE49-F238E27FC236}">
-                <a16:creationId xmlns:a16="http://schemas.microsoft.com/office/drawing/2014/main" id="{963E3F7D-7F62-475C-B5F7-DA5098FECC2B}"/>
+                <a16:creationId xmlns:a16="http://schemas.microsoft.com/office/drawing/2014/main" id="{4C7999EE-86C7-4BE3-AFCE-706807E7E354}"/>
               </a:ext>
             </a:extLst>
           </p:cNvPr>
@@ -3703,7 +3703,7 @@
           <p:cNvPr id="31" name="">
             <a:extLst xmlns:a="http://schemas.openxmlformats.org/drawingml/2006/main">
               <a:ext uri="{FF2B5EF4-FFF2-40B4-BE49-F238E27FC236}">
-                <a16:creationId xmlns:a16="http://schemas.microsoft.com/office/drawing/2014/main" id="{7B5CB242-8097-4280-89B4-F63A66F4A371}"/>
+                <a16:creationId xmlns:a16="http://schemas.microsoft.com/office/drawing/2014/main" id="{503B3F27-5468-4F0F-A8FD-35A37B6C1AA0}"/>
               </a:ext>
             </a:extLst>
           </p:cNvPr>
@@ -3754,7 +3754,7 @@
           <p:cNvPr id="32" name="">
             <a:extLst xmlns:a="http://schemas.openxmlformats.org/drawingml/2006/main">
               <a:ext uri="{FF2B5EF4-FFF2-40B4-BE49-F238E27FC236}">
-                <a16:creationId xmlns:a16="http://schemas.microsoft.com/office/drawing/2014/main" id="{0584F545-C914-41EC-9AD8-EFCA6B83FFFC}"/>
+                <a16:creationId xmlns:a16="http://schemas.microsoft.com/office/drawing/2014/main" id="{BC3A9195-90F6-4E42-AB8C-D5AE3C41AD65}"/>
               </a:ext>
             </a:extLst>
           </p:cNvPr>
@@ -3805,7 +3805,7 @@
           <p:cNvPr id="33" name="">
             <a:extLst xmlns:a="http://schemas.openxmlformats.org/drawingml/2006/main">
               <a:ext uri="{FF2B5EF4-FFF2-40B4-BE49-F238E27FC236}">
-                <a16:creationId xmlns:a16="http://schemas.microsoft.com/office/drawing/2014/main" id="{AB7D18B1-BC66-45BE-90CC-B077EF16529E}"/>
+                <a16:creationId xmlns:a16="http://schemas.microsoft.com/office/drawing/2014/main" id="{9BC276D7-5FBC-4596-B0A8-D0FF59F2C5E9}"/>
               </a:ext>
             </a:extLst>
           </p:cNvPr>
@@ -3856,7 +3856,7 @@
           <p:cNvPr id="34" name="">
             <a:extLst xmlns:a="http://schemas.openxmlformats.org/drawingml/2006/main">
               <a:ext uri="{FF2B5EF4-FFF2-40B4-BE49-F238E27FC236}">
-                <a16:creationId xmlns:a16="http://schemas.microsoft.com/office/drawing/2014/main" id="{32AF275F-8560-4A54-A615-76FC705AADBB}"/>
+                <a16:creationId xmlns:a16="http://schemas.microsoft.com/office/drawing/2014/main" id="{0E1BCBD3-EBBA-475F-8001-8FEEEF8CA226}"/>
               </a:ext>
             </a:extLst>
           </p:cNvPr>
@@ -3905,7 +3905,7 @@
     </p:spTree>
     <p:extLst>
       <p:ext uri="{BB962C8B-B14F-4D97-AF65-F5344CB8AC3E}">
-        <p14:creationId xmlns:p14="http://schemas.microsoft.com/office/powerpoint/2010/main" val="341073340"/>
+        <p14:creationId xmlns:p14="http://schemas.microsoft.com/office/powerpoint/2010/main" val="195968863"/>
       </p:ext>
     </p:extLst>
   </p:cSld>
@@ -3929,7 +3929,7 @@
           <p:cNvPr id="1" name="">
             <a:extLst xmlns:a="http://schemas.openxmlformats.org/drawingml/2006/main">
               <a:ext uri="{FF2B5EF4-FFF2-40B4-BE49-F238E27FC236}">
-                <a16:creationId xmlns:a16="http://schemas.microsoft.com/office/drawing/2014/main" id="{BFB1E1F3-514C-4412-AFD3-9EF504DFAFB4}"/>
+                <a16:creationId xmlns:a16="http://schemas.microsoft.com/office/drawing/2014/main" id="{41F3B6A6-4A4B-4DD3-B909-8E56AE19721E}"/>
               </a:ext>
             </a:extLst>
           </p:cNvPr>
@@ -3962,7 +3962,7 @@
           <p:cNvPr id="2" name="">
             <a:extLst xmlns:a="http://schemas.openxmlformats.org/drawingml/2006/main">
               <a:ext uri="{FF2B5EF4-FFF2-40B4-BE49-F238E27FC236}">
-                <a16:creationId xmlns:a16="http://schemas.microsoft.com/office/drawing/2014/main" id="{E9897A32-E0CA-4C7D-904E-E5BD01A0ECB7}"/>
+                <a16:creationId xmlns:a16="http://schemas.microsoft.com/office/drawing/2014/main" id="{086392FE-C0CF-46F7-9B5E-614B2DF24F14}"/>
               </a:ext>
             </a:extLst>
           </p:cNvPr>
@@ -3995,7 +3995,7 @@
           <p:cNvPr id="3" name="">
             <a:extLst xmlns:a="http://schemas.openxmlformats.org/drawingml/2006/main">
               <a:ext uri="{FF2B5EF4-FFF2-40B4-BE49-F238E27FC236}">
-                <a16:creationId xmlns:a16="http://schemas.microsoft.com/office/drawing/2014/main" id="{04FDA912-7202-48C0-9C4C-164C79E9B03F}"/>
+                <a16:creationId xmlns:a16="http://schemas.microsoft.com/office/drawing/2014/main" id="{1B21C722-4F38-45C4-A553-37B56163A908}"/>
               </a:ext>
             </a:extLst>
           </p:cNvPr>
@@ -4046,7 +4046,7 @@
           <p:cNvPr id="4" name="">
             <a:extLst xmlns:a="http://schemas.openxmlformats.org/drawingml/2006/main">
               <a:ext uri="{FF2B5EF4-FFF2-40B4-BE49-F238E27FC236}">
-                <a16:creationId xmlns:a16="http://schemas.microsoft.com/office/drawing/2014/main" id="{9C4BD37B-CDBC-4599-A028-5FCF4A2BBED8}"/>
+                <a16:creationId xmlns:a16="http://schemas.microsoft.com/office/drawing/2014/main" id="{272CF2D5-22E3-4299-9E99-9A600E0B2258}"/>
               </a:ext>
             </a:extLst>
           </p:cNvPr>
@@ -4097,7 +4097,7 @@
           <p:cNvPr id="5" name="">
             <a:extLst xmlns:a="http://schemas.openxmlformats.org/drawingml/2006/main">
               <a:ext uri="{FF2B5EF4-FFF2-40B4-BE49-F238E27FC236}">
-                <a16:creationId xmlns:a16="http://schemas.microsoft.com/office/drawing/2014/main" id="{28D6E9A8-D2CE-4880-A88E-390FE7513972}"/>
+                <a16:creationId xmlns:a16="http://schemas.microsoft.com/office/drawing/2014/main" id="{4E2D8BC7-133C-4FEF-B549-F31A7D5E63F4}"/>
               </a:ext>
             </a:extLst>
           </p:cNvPr>
@@ -4148,7 +4148,7 @@
           <p:cNvPr id="6" name="">
             <a:extLst xmlns:a="http://schemas.openxmlformats.org/drawingml/2006/main">
               <a:ext uri="{FF2B5EF4-FFF2-40B4-BE49-F238E27FC236}">
-                <a16:creationId xmlns:a16="http://schemas.microsoft.com/office/drawing/2014/main" id="{D2158D0E-C56A-40CD-91DD-F43FC3E978EE}"/>
+                <a16:creationId xmlns:a16="http://schemas.microsoft.com/office/drawing/2014/main" id="{B2781ADB-0108-48EF-B976-A42CF120C373}"/>
               </a:ext>
             </a:extLst>
           </p:cNvPr>
@@ -4199,7 +4199,7 @@
           <p:cNvPr id="7" name="">
             <a:extLst xmlns:a="http://schemas.openxmlformats.org/drawingml/2006/main">
               <a:ext uri="{FF2B5EF4-FFF2-40B4-BE49-F238E27FC236}">
-                <a16:creationId xmlns:a16="http://schemas.microsoft.com/office/drawing/2014/main" id="{FCF004A0-9D73-4753-8A44-9EFF8949F830}"/>
+                <a16:creationId xmlns:a16="http://schemas.microsoft.com/office/drawing/2014/main" id="{AB22F639-1148-4DB2-8DB2-2D8ABE51C740}"/>
               </a:ext>
             </a:extLst>
           </p:cNvPr>
@@ -4250,7 +4250,7 @@
           <p:cNvPr id="8" name="">
             <a:extLst xmlns:a="http://schemas.openxmlformats.org/drawingml/2006/main">
               <a:ext uri="{FF2B5EF4-FFF2-40B4-BE49-F238E27FC236}">
-                <a16:creationId xmlns:a16="http://schemas.microsoft.com/office/drawing/2014/main" id="{9E192DD9-B4DA-44F1-9411-CA40DE652E6F}"/>
+                <a16:creationId xmlns:a16="http://schemas.microsoft.com/office/drawing/2014/main" id="{F30471C2-DE59-45B6-A74E-E2C0F91C5DF7}"/>
               </a:ext>
             </a:extLst>
           </p:cNvPr>
@@ -4283,7 +4283,7 @@
           <p:cNvPr id="9" name="">
             <a:extLst xmlns:a="http://schemas.openxmlformats.org/drawingml/2006/main">
               <a:ext uri="{FF2B5EF4-FFF2-40B4-BE49-F238E27FC236}">
-                <a16:creationId xmlns:a16="http://schemas.microsoft.com/office/drawing/2014/main" id="{9C85835D-A238-4BB2-B322-9CA0D5558B08}"/>
+                <a16:creationId xmlns:a16="http://schemas.microsoft.com/office/drawing/2014/main" id="{C6733890-7525-40DF-A3D6-C2FC88795C59}"/>
               </a:ext>
             </a:extLst>
           </p:cNvPr>
@@ -4334,7 +4334,7 @@
           <p:cNvPr id="10" name="">
             <a:extLst xmlns:a="http://schemas.openxmlformats.org/drawingml/2006/main">
               <a:ext uri="{FF2B5EF4-FFF2-40B4-BE49-F238E27FC236}">
-                <a16:creationId xmlns:a16="http://schemas.microsoft.com/office/drawing/2014/main" id="{30F5549B-4CF3-4729-8B99-663191747C34}"/>
+                <a16:creationId xmlns:a16="http://schemas.microsoft.com/office/drawing/2014/main" id="{FD3C4208-59B9-4FD5-BC15-A5EB714BA20E}"/>
               </a:ext>
             </a:extLst>
           </p:cNvPr>
@@ -4385,7 +4385,7 @@
           <p:cNvPr id="11" name="">
             <a:extLst xmlns:a="http://schemas.openxmlformats.org/drawingml/2006/main">
               <a:ext uri="{FF2B5EF4-FFF2-40B4-BE49-F238E27FC236}">
-                <a16:creationId xmlns:a16="http://schemas.microsoft.com/office/drawing/2014/main" id="{F5F0929E-24C8-4C4B-A8B9-3BF925AFC328}"/>
+                <a16:creationId xmlns:a16="http://schemas.microsoft.com/office/drawing/2014/main" id="{E36559CB-A9EC-445F-8575-7E380CF5CFD6}"/>
               </a:ext>
             </a:extLst>
           </p:cNvPr>
@@ -4436,7 +4436,7 @@
           <p:cNvPr id="12" name="">
             <a:extLst xmlns:a="http://schemas.openxmlformats.org/drawingml/2006/main">
               <a:ext uri="{FF2B5EF4-FFF2-40B4-BE49-F238E27FC236}">
-                <a16:creationId xmlns:a16="http://schemas.microsoft.com/office/drawing/2014/main" id="{A58129E1-2C39-48B0-863E-F4C139A58B30}"/>
+                <a16:creationId xmlns:a16="http://schemas.microsoft.com/office/drawing/2014/main" id="{4CEA349D-CA16-4A29-B183-2DBFD7C9D973}"/>
               </a:ext>
             </a:extLst>
           </p:cNvPr>
@@ -4469,7 +4469,7 @@
           <p:cNvPr id="13" name="">
             <a:extLst xmlns:a="http://schemas.openxmlformats.org/drawingml/2006/main">
               <a:ext uri="{FF2B5EF4-FFF2-40B4-BE49-F238E27FC236}">
-                <a16:creationId xmlns:a16="http://schemas.microsoft.com/office/drawing/2014/main" id="{3268BC99-3619-409C-A742-38F3343E5042}"/>
+                <a16:creationId xmlns:a16="http://schemas.microsoft.com/office/drawing/2014/main" id="{877FCF0E-CB00-4A80-BDA5-9A81BC2FD367}"/>
               </a:ext>
             </a:extLst>
           </p:cNvPr>
@@ -4502,7 +4502,7 @@
           <p:cNvPr id="14" name="">
             <a:extLst xmlns:a="http://schemas.openxmlformats.org/drawingml/2006/main">
               <a:ext uri="{FF2B5EF4-FFF2-40B4-BE49-F238E27FC236}">
-                <a16:creationId xmlns:a16="http://schemas.microsoft.com/office/drawing/2014/main" id="{78ADA367-9B15-4486-9DEC-1D656715995B}"/>
+                <a16:creationId xmlns:a16="http://schemas.microsoft.com/office/drawing/2014/main" id="{5ADF5661-0BC7-4104-8033-00B2FD4E3936}"/>
               </a:ext>
             </a:extLst>
           </p:cNvPr>
@@ -4553,7 +4553,7 @@
           <p:cNvPr id="15" name="">
             <a:extLst xmlns:a="http://schemas.openxmlformats.org/drawingml/2006/main">
               <a:ext uri="{FF2B5EF4-FFF2-40B4-BE49-F238E27FC236}">
-                <a16:creationId xmlns:a16="http://schemas.microsoft.com/office/drawing/2014/main" id="{94D28119-A5BF-4B71-A1DF-50CD5EAA7669}"/>
+                <a16:creationId xmlns:a16="http://schemas.microsoft.com/office/drawing/2014/main" id="{D9DE753C-902C-4DBD-8347-7F6F9BD7D6FB}"/>
               </a:ext>
             </a:extLst>
           </p:cNvPr>
@@ -4604,7 +4604,7 @@
           <p:cNvPr id="16" name="">
             <a:extLst xmlns:a="http://schemas.openxmlformats.org/drawingml/2006/main">
               <a:ext uri="{FF2B5EF4-FFF2-40B4-BE49-F238E27FC236}">
-                <a16:creationId xmlns:a16="http://schemas.microsoft.com/office/drawing/2014/main" id="{D8CEEF06-375A-4B17-A2A5-891DEC321D9F}"/>
+                <a16:creationId xmlns:a16="http://schemas.microsoft.com/office/drawing/2014/main" id="{3C3EBD49-07A5-4344-ABAD-E2FB836D73DB}"/>
               </a:ext>
             </a:extLst>
           </p:cNvPr>
@@ -4637,7 +4637,7 @@
           <p:cNvPr id="17" name="">
             <a:extLst xmlns:a="http://schemas.openxmlformats.org/drawingml/2006/main">
               <a:ext uri="{FF2B5EF4-FFF2-40B4-BE49-F238E27FC236}">
-                <a16:creationId xmlns:a16="http://schemas.microsoft.com/office/drawing/2014/main" id="{0E9523FA-8172-4147-9FE2-C80A63CD8BD3}"/>
+                <a16:creationId xmlns:a16="http://schemas.microsoft.com/office/drawing/2014/main" id="{843CC0B7-3783-4387-AA1B-62144378D047}"/>
               </a:ext>
             </a:extLst>
           </p:cNvPr>
@@ -4670,7 +4670,7 @@
           <p:cNvPr id="18" name="">
             <a:extLst xmlns:a="http://schemas.openxmlformats.org/drawingml/2006/main">
               <a:ext uri="{FF2B5EF4-FFF2-40B4-BE49-F238E27FC236}">
-                <a16:creationId xmlns:a16="http://schemas.microsoft.com/office/drawing/2014/main" id="{51FBF23F-6DD1-46A3-846D-98CFD4F7B8A0}"/>
+                <a16:creationId xmlns:a16="http://schemas.microsoft.com/office/drawing/2014/main" id="{1AFEA0DE-9A35-44A9-BA9D-4D7B376BEAFC}"/>
               </a:ext>
             </a:extLst>
           </p:cNvPr>
@@ -4721,7 +4721,7 @@
           <p:cNvPr id="19" name="">
             <a:extLst xmlns:a="http://schemas.openxmlformats.org/drawingml/2006/main">
               <a:ext uri="{FF2B5EF4-FFF2-40B4-BE49-F238E27FC236}">
-                <a16:creationId xmlns:a16="http://schemas.microsoft.com/office/drawing/2014/main" id="{371D81EB-3569-42B7-B7A8-055559847BD9}"/>
+                <a16:creationId xmlns:a16="http://schemas.microsoft.com/office/drawing/2014/main" id="{A83A55BE-C42D-4CCE-8F8D-86428B4B9733}"/>
               </a:ext>
             </a:extLst>
           </p:cNvPr>
@@ -4772,7 +4772,7 @@
           <p:cNvPr id="20" name="">
             <a:extLst xmlns:a="http://schemas.openxmlformats.org/drawingml/2006/main">
               <a:ext uri="{FF2B5EF4-FFF2-40B4-BE49-F238E27FC236}">
-                <a16:creationId xmlns:a16="http://schemas.microsoft.com/office/drawing/2014/main" id="{36B6CCAF-E751-49B7-BF3E-7D6A8561761F}"/>
+                <a16:creationId xmlns:a16="http://schemas.microsoft.com/office/drawing/2014/main" id="{FE31B257-A7C8-4076-B598-1E22382B765C}"/>
               </a:ext>
             </a:extLst>
           </p:cNvPr>
@@ -4805,7 +4805,7 @@
           <p:cNvPr id="21" name="">
             <a:extLst xmlns:a="http://schemas.openxmlformats.org/drawingml/2006/main">
               <a:ext uri="{FF2B5EF4-FFF2-40B4-BE49-F238E27FC236}">
-                <a16:creationId xmlns:a16="http://schemas.microsoft.com/office/drawing/2014/main" id="{2393CEF3-FF42-4315-B0AB-998409616154}"/>
+                <a16:creationId xmlns:a16="http://schemas.microsoft.com/office/drawing/2014/main" id="{95E1D16B-1B2C-4FAD-92C8-B41296AE5F6C}"/>
               </a:ext>
             </a:extLst>
           </p:cNvPr>
@@ -4838,7 +4838,7 @@
           <p:cNvPr id="22" name="">
             <a:extLst xmlns:a="http://schemas.openxmlformats.org/drawingml/2006/main">
               <a:ext uri="{FF2B5EF4-FFF2-40B4-BE49-F238E27FC236}">
-                <a16:creationId xmlns:a16="http://schemas.microsoft.com/office/drawing/2014/main" id="{45DE8B06-775A-4AEB-B0F8-0556ADC213BB}"/>
+                <a16:creationId xmlns:a16="http://schemas.microsoft.com/office/drawing/2014/main" id="{672554EF-FEAF-4E20-ACBF-BF082E14E022}"/>
               </a:ext>
             </a:extLst>
           </p:cNvPr>
@@ -4889,7 +4889,7 @@
           <p:cNvPr id="23" name="">
             <a:extLst xmlns:a="http://schemas.openxmlformats.org/drawingml/2006/main">
               <a:ext uri="{FF2B5EF4-FFF2-40B4-BE49-F238E27FC236}">
-                <a16:creationId xmlns:a16="http://schemas.microsoft.com/office/drawing/2014/main" id="{D92712A9-3230-41B9-80CE-17C7FC9829DB}"/>
+                <a16:creationId xmlns:a16="http://schemas.microsoft.com/office/drawing/2014/main" id="{8991927E-7D9C-42AA-A487-D30E5E5BECBA}"/>
               </a:ext>
             </a:extLst>
           </p:cNvPr>
@@ -4940,7 +4940,7 @@
           <p:cNvPr id="24" name="">
             <a:extLst xmlns:a="http://schemas.openxmlformats.org/drawingml/2006/main">
               <a:ext uri="{FF2B5EF4-FFF2-40B4-BE49-F238E27FC236}">
-                <a16:creationId xmlns:a16="http://schemas.microsoft.com/office/drawing/2014/main" id="{A01D9A24-3C98-47E8-B697-71193C3FA76A}"/>
+                <a16:creationId xmlns:a16="http://schemas.microsoft.com/office/drawing/2014/main" id="{50E10E62-C84C-4319-B98A-64D4AA0DEC64}"/>
               </a:ext>
             </a:extLst>
           </p:cNvPr>
@@ -4991,7 +4991,7 @@
           <p:cNvPr id="25" name="">
             <a:extLst xmlns:a="http://schemas.openxmlformats.org/drawingml/2006/main">
               <a:ext uri="{FF2B5EF4-FFF2-40B4-BE49-F238E27FC236}">
-                <a16:creationId xmlns:a16="http://schemas.microsoft.com/office/drawing/2014/main" id="{52388290-D4FE-456A-AFD6-F3C08BCE42B9}"/>
+                <a16:creationId xmlns:a16="http://schemas.microsoft.com/office/drawing/2014/main" id="{3BAE0977-3AF7-44DD-B158-E842EB01D0B3}"/>
               </a:ext>
             </a:extLst>
           </p:cNvPr>
@@ -5040,7 +5040,7 @@
     </p:spTree>
     <p:extLst>
       <p:ext uri="{BB962C8B-B14F-4D97-AF65-F5344CB8AC3E}">
-        <p14:creationId xmlns:p14="http://schemas.microsoft.com/office/powerpoint/2010/main" val="128841676"/>
+        <p14:creationId xmlns:p14="http://schemas.microsoft.com/office/powerpoint/2010/main" val="1075445566"/>
       </p:ext>
     </p:extLst>
   </p:cSld>
@@ -5064,7 +5064,7 @@
           <p:cNvPr id="1" name="">
             <a:extLst xmlns:a="http://schemas.openxmlformats.org/drawingml/2006/main">
               <a:ext uri="{FF2B5EF4-FFF2-40B4-BE49-F238E27FC236}">
-                <a16:creationId xmlns:a16="http://schemas.microsoft.com/office/drawing/2014/main" id="{9ACB2097-3969-49F1-A502-C2F1C57ADD97}"/>
+                <a16:creationId xmlns:a16="http://schemas.microsoft.com/office/drawing/2014/main" id="{3B2D082E-33F5-436E-A617-7D3BC482F360}"/>
               </a:ext>
             </a:extLst>
           </p:cNvPr>
@@ -5097,7 +5097,7 @@
           <p:cNvPr id="2" name="">
             <a:extLst xmlns:a="http://schemas.openxmlformats.org/drawingml/2006/main">
               <a:ext uri="{FF2B5EF4-FFF2-40B4-BE49-F238E27FC236}">
-                <a16:creationId xmlns:a16="http://schemas.microsoft.com/office/drawing/2014/main" id="{1B4C4CA6-BAF7-4AB3-8A93-DAAF61F386A6}"/>
+                <a16:creationId xmlns:a16="http://schemas.microsoft.com/office/drawing/2014/main" id="{C570E9AA-2836-4F38-B749-BFE4483807EB}"/>
               </a:ext>
             </a:extLst>
           </p:cNvPr>
@@ -5148,7 +5148,7 @@
           <p:cNvPr id="3" name="">
             <a:extLst xmlns:a="http://schemas.openxmlformats.org/drawingml/2006/main">
               <a:ext uri="{FF2B5EF4-FFF2-40B4-BE49-F238E27FC236}">
-                <a16:creationId xmlns:a16="http://schemas.microsoft.com/office/drawing/2014/main" id="{C62F1815-E17F-43D5-995F-B13E26D42E91}"/>
+                <a16:creationId xmlns:a16="http://schemas.microsoft.com/office/drawing/2014/main" id="{3426E803-7201-47CB-878E-641D9D8A9A5D}"/>
               </a:ext>
             </a:extLst>
           </p:cNvPr>
@@ -5199,7 +5199,7 @@
           <p:cNvPr id="4" name="">
             <a:extLst xmlns:a="http://schemas.openxmlformats.org/drawingml/2006/main">
               <a:ext uri="{FF2B5EF4-FFF2-40B4-BE49-F238E27FC236}">
-                <a16:creationId xmlns:a16="http://schemas.microsoft.com/office/drawing/2014/main" id="{D0A416CE-5F7D-405D-83D8-47EEDBB146CB}"/>
+                <a16:creationId xmlns:a16="http://schemas.microsoft.com/office/drawing/2014/main" id="{9BC155C1-D19F-4891-B31E-6C13A6D4823A}"/>
               </a:ext>
             </a:extLst>
           </p:cNvPr>
@@ -5250,7 +5250,7 @@
           <p:cNvPr id="5" name="">
             <a:extLst xmlns:a="http://schemas.openxmlformats.org/drawingml/2006/main">
               <a:ext uri="{FF2B5EF4-FFF2-40B4-BE49-F238E27FC236}">
-                <a16:creationId xmlns:a16="http://schemas.microsoft.com/office/drawing/2014/main" id="{F86A1389-091F-4020-B8F3-68152C51716F}"/>
+                <a16:creationId xmlns:a16="http://schemas.microsoft.com/office/drawing/2014/main" id="{15033870-5A6C-4FA0-8B19-46D80FFBB782}"/>
               </a:ext>
             </a:extLst>
           </p:cNvPr>
@@ -5283,7 +5283,7 @@
           <p:cNvPr id="6" name="">
             <a:extLst xmlns:a="http://schemas.openxmlformats.org/drawingml/2006/main">
               <a:ext uri="{FF2B5EF4-FFF2-40B4-BE49-F238E27FC236}">
-                <a16:creationId xmlns:a16="http://schemas.microsoft.com/office/drawing/2014/main" id="{D5DABA5D-0B47-4F36-BADC-A38BF752C128}"/>
+                <a16:creationId xmlns:a16="http://schemas.microsoft.com/office/drawing/2014/main" id="{EA1E97E7-10C8-4DE1-9E0C-078FD548318C}"/>
               </a:ext>
             </a:extLst>
           </p:cNvPr>
@@ -5316,7 +5316,7 @@
           <p:cNvPr id="7" name="">
             <a:extLst xmlns:a="http://schemas.openxmlformats.org/drawingml/2006/main">
               <a:ext uri="{FF2B5EF4-FFF2-40B4-BE49-F238E27FC236}">
-                <a16:creationId xmlns:a16="http://schemas.microsoft.com/office/drawing/2014/main" id="{EE37B350-606B-44FD-8CC1-204DA1429641}"/>
+                <a16:creationId xmlns:a16="http://schemas.microsoft.com/office/drawing/2014/main" id="{71FF7FC3-0A6E-42EB-BEAD-431A8535CC51}"/>
               </a:ext>
             </a:extLst>
           </p:cNvPr>
@@ -5367,7 +5367,7 @@
           <p:cNvPr id="8" name="">
             <a:extLst xmlns:a="http://schemas.openxmlformats.org/drawingml/2006/main">
               <a:ext uri="{FF2B5EF4-FFF2-40B4-BE49-F238E27FC236}">
-                <a16:creationId xmlns:a16="http://schemas.microsoft.com/office/drawing/2014/main" id="{749441E7-9308-4BC6-9FA6-12ABEA773ECD}"/>
+                <a16:creationId xmlns:a16="http://schemas.microsoft.com/office/drawing/2014/main" id="{A8DED2A7-FD5C-4205-A087-ADBEB0B1DBC6}"/>
               </a:ext>
             </a:extLst>
           </p:cNvPr>
@@ -5418,7 +5418,7 @@
           <p:cNvPr id="9" name="">
             <a:extLst xmlns:a="http://schemas.openxmlformats.org/drawingml/2006/main">
               <a:ext uri="{FF2B5EF4-FFF2-40B4-BE49-F238E27FC236}">
-                <a16:creationId xmlns:a16="http://schemas.microsoft.com/office/drawing/2014/main" id="{606B2CB4-D6B9-435D-886E-54C1801CE398}"/>
+                <a16:creationId xmlns:a16="http://schemas.microsoft.com/office/drawing/2014/main" id="{E5E2F186-BD63-4E63-BD5B-D9BEF7A70CA2}"/>
               </a:ext>
             </a:extLst>
           </p:cNvPr>
@@ -5451,7 +5451,7 @@
           <p:cNvPr id="10" name="">
             <a:extLst xmlns:a="http://schemas.openxmlformats.org/drawingml/2006/main">
               <a:ext uri="{FF2B5EF4-FFF2-40B4-BE49-F238E27FC236}">
-                <a16:creationId xmlns:a16="http://schemas.microsoft.com/office/drawing/2014/main" id="{4750C2AA-9B60-473B-909A-B5BAAC886169}"/>
+                <a16:creationId xmlns:a16="http://schemas.microsoft.com/office/drawing/2014/main" id="{9881A0DB-216E-4398-B96F-E80865B6A942}"/>
               </a:ext>
             </a:extLst>
           </p:cNvPr>
@@ -5484,7 +5484,7 @@
           <p:cNvPr id="11" name="">
             <a:extLst xmlns:a="http://schemas.openxmlformats.org/drawingml/2006/main">
               <a:ext uri="{FF2B5EF4-FFF2-40B4-BE49-F238E27FC236}">
-                <a16:creationId xmlns:a16="http://schemas.microsoft.com/office/drawing/2014/main" id="{085BEDED-3936-4CF5-9635-B16ADA56DABD}"/>
+                <a16:creationId xmlns:a16="http://schemas.microsoft.com/office/drawing/2014/main" id="{4077BF3A-AAA1-4EFE-BF30-A6FC164E6212}"/>
               </a:ext>
             </a:extLst>
           </p:cNvPr>
@@ -5535,7 +5535,7 @@
           <p:cNvPr id="12" name="">
             <a:extLst xmlns:a="http://schemas.openxmlformats.org/drawingml/2006/main">
               <a:ext uri="{FF2B5EF4-FFF2-40B4-BE49-F238E27FC236}">
-                <a16:creationId xmlns:a16="http://schemas.microsoft.com/office/drawing/2014/main" id="{9079A200-5C3C-4FC0-9798-A1B609E5CFE4}"/>
+                <a16:creationId xmlns:a16="http://schemas.microsoft.com/office/drawing/2014/main" id="{80AF966D-E12E-4C18-BD0F-9795BDC3A39A}"/>
               </a:ext>
             </a:extLst>
           </p:cNvPr>
@@ -5586,7 +5586,7 @@
           <p:cNvPr id="13" name="">
             <a:extLst xmlns:a="http://schemas.openxmlformats.org/drawingml/2006/main">
               <a:ext uri="{FF2B5EF4-FFF2-40B4-BE49-F238E27FC236}">
-                <a16:creationId xmlns:a16="http://schemas.microsoft.com/office/drawing/2014/main" id="{36CC44D0-AB8A-4CB9-BBEA-D8A0027F4690}"/>
+                <a16:creationId xmlns:a16="http://schemas.microsoft.com/office/drawing/2014/main" id="{4193D793-8A55-41B8-8C31-B2E91064E6D7}"/>
               </a:ext>
             </a:extLst>
           </p:cNvPr>
@@ -5619,7 +5619,7 @@
           <p:cNvPr id="14" name="">
             <a:extLst xmlns:a="http://schemas.openxmlformats.org/drawingml/2006/main">
               <a:ext uri="{FF2B5EF4-FFF2-40B4-BE49-F238E27FC236}">
-                <a16:creationId xmlns:a16="http://schemas.microsoft.com/office/drawing/2014/main" id="{3E78E1FE-B622-4948-9B35-8A67E3503DA6}"/>
+                <a16:creationId xmlns:a16="http://schemas.microsoft.com/office/drawing/2014/main" id="{F44622FC-EDED-464A-9E4E-68284238F5C0}"/>
               </a:ext>
             </a:extLst>
           </p:cNvPr>
@@ -5652,7 +5652,7 @@
           <p:cNvPr id="15" name="">
             <a:extLst xmlns:a="http://schemas.openxmlformats.org/drawingml/2006/main">
               <a:ext uri="{FF2B5EF4-FFF2-40B4-BE49-F238E27FC236}">
-                <a16:creationId xmlns:a16="http://schemas.microsoft.com/office/drawing/2014/main" id="{2691F68A-F178-449E-9F3A-061260865191}"/>
+                <a16:creationId xmlns:a16="http://schemas.microsoft.com/office/drawing/2014/main" id="{489963E5-E55A-4379-A70D-A6D6CE095FE4}"/>
               </a:ext>
             </a:extLst>
           </p:cNvPr>
@@ -5703,7 +5703,7 @@
           <p:cNvPr id="16" name="">
             <a:extLst xmlns:a="http://schemas.openxmlformats.org/drawingml/2006/main">
               <a:ext uri="{FF2B5EF4-FFF2-40B4-BE49-F238E27FC236}">
-                <a16:creationId xmlns:a16="http://schemas.microsoft.com/office/drawing/2014/main" id="{BF6D0F60-9E19-4D92-87A4-81152F29ED9E}"/>
+                <a16:creationId xmlns:a16="http://schemas.microsoft.com/office/drawing/2014/main" id="{B7E8E02B-688B-4EEF-A974-7F7B0718C148}"/>
               </a:ext>
             </a:extLst>
           </p:cNvPr>
@@ -5754,7 +5754,7 @@
           <p:cNvPr id="17" name="">
             <a:extLst xmlns:a="http://schemas.openxmlformats.org/drawingml/2006/main">
               <a:ext uri="{FF2B5EF4-FFF2-40B4-BE49-F238E27FC236}">
-                <a16:creationId xmlns:a16="http://schemas.microsoft.com/office/drawing/2014/main" id="{CE393F91-C790-410E-80DC-C5D364F0D100}"/>
+                <a16:creationId xmlns:a16="http://schemas.microsoft.com/office/drawing/2014/main" id="{FD42A0CC-774B-44EF-A409-E2933A8186DF}"/>
               </a:ext>
             </a:extLst>
           </p:cNvPr>
@@ -5787,7 +5787,7 @@
           <p:cNvPr id="18" name="">
             <a:extLst xmlns:a="http://schemas.openxmlformats.org/drawingml/2006/main">
               <a:ext uri="{FF2B5EF4-FFF2-40B4-BE49-F238E27FC236}">
-                <a16:creationId xmlns:a16="http://schemas.microsoft.com/office/drawing/2014/main" id="{DEBFAD6A-30AF-4136-BC79-C96FA652F58D}"/>
+                <a16:creationId xmlns:a16="http://schemas.microsoft.com/office/drawing/2014/main" id="{FDCF1D60-D0CC-4E7D-BA1F-E24E4EBEE44C}"/>
               </a:ext>
             </a:extLst>
           </p:cNvPr>
@@ -5820,7 +5820,7 @@
           <p:cNvPr id="19" name="">
             <a:extLst xmlns:a="http://schemas.openxmlformats.org/drawingml/2006/main">
               <a:ext uri="{FF2B5EF4-FFF2-40B4-BE49-F238E27FC236}">
-                <a16:creationId xmlns:a16="http://schemas.microsoft.com/office/drawing/2014/main" id="{3558A166-BFF3-4131-A865-2A3C1188A94F}"/>
+                <a16:creationId xmlns:a16="http://schemas.microsoft.com/office/drawing/2014/main" id="{47D5F5CD-8AA4-4DE2-9550-ACDBB312CF57}"/>
               </a:ext>
             </a:extLst>
           </p:cNvPr>
@@ -5871,7 +5871,7 @@
           <p:cNvPr id="20" name="">
             <a:extLst xmlns:a="http://schemas.openxmlformats.org/drawingml/2006/main">
               <a:ext uri="{FF2B5EF4-FFF2-40B4-BE49-F238E27FC236}">
-                <a16:creationId xmlns:a16="http://schemas.microsoft.com/office/drawing/2014/main" id="{DEC8A14D-9A08-41AA-8F61-B8B552F9C0EB}"/>
+                <a16:creationId xmlns:a16="http://schemas.microsoft.com/office/drawing/2014/main" id="{7D5AF23D-7E44-450B-ABC2-20545D262A93}"/>
               </a:ext>
             </a:extLst>
           </p:cNvPr>
@@ -5922,7 +5922,7 @@
           <p:cNvPr id="21" name="">
             <a:extLst xmlns:a="http://schemas.openxmlformats.org/drawingml/2006/main">
               <a:ext uri="{FF2B5EF4-FFF2-40B4-BE49-F238E27FC236}">
-                <a16:creationId xmlns:a16="http://schemas.microsoft.com/office/drawing/2014/main" id="{BAB84A35-DF27-491A-BD77-FB243D0C5BA3}"/>
+                <a16:creationId xmlns:a16="http://schemas.microsoft.com/office/drawing/2014/main" id="{6FE5DDAA-C85E-414D-8B0B-D71A0720442E}"/>
               </a:ext>
             </a:extLst>
           </p:cNvPr>
@@ -5955,7 +5955,7 @@
           <p:cNvPr id="22" name="">
             <a:extLst xmlns:a="http://schemas.openxmlformats.org/drawingml/2006/main">
               <a:ext uri="{FF2B5EF4-FFF2-40B4-BE49-F238E27FC236}">
-                <a16:creationId xmlns:a16="http://schemas.microsoft.com/office/drawing/2014/main" id="{8B1E88FA-2276-4DA3-BD9D-CDCF0DE593C9}"/>
+                <a16:creationId xmlns:a16="http://schemas.microsoft.com/office/drawing/2014/main" id="{59CFDBAB-2174-4A5E-801F-68ED81BF50F6}"/>
               </a:ext>
             </a:extLst>
           </p:cNvPr>
@@ -5988,7 +5988,7 @@
           <p:cNvPr id="23" name="">
             <a:extLst xmlns:a="http://schemas.openxmlformats.org/drawingml/2006/main">
               <a:ext uri="{FF2B5EF4-FFF2-40B4-BE49-F238E27FC236}">
-                <a16:creationId xmlns:a16="http://schemas.microsoft.com/office/drawing/2014/main" id="{3CB2E207-5194-4C22-9F1C-769778DFA6E5}"/>
+                <a16:creationId xmlns:a16="http://schemas.microsoft.com/office/drawing/2014/main" id="{BB791FF8-50F3-47CD-A9A1-544230148A05}"/>
               </a:ext>
             </a:extLst>
           </p:cNvPr>
@@ -6039,7 +6039,7 @@
           <p:cNvPr id="24" name="">
             <a:extLst xmlns:a="http://schemas.openxmlformats.org/drawingml/2006/main">
               <a:ext uri="{FF2B5EF4-FFF2-40B4-BE49-F238E27FC236}">
-                <a16:creationId xmlns:a16="http://schemas.microsoft.com/office/drawing/2014/main" id="{E3F01CCC-4AA6-484D-ADBD-A66430413A17}"/>
+                <a16:creationId xmlns:a16="http://schemas.microsoft.com/office/drawing/2014/main" id="{6595A59A-3E5F-4F75-BD1C-444D53A36E4D}"/>
               </a:ext>
             </a:extLst>
           </p:cNvPr>
@@ -6090,7 +6090,7 @@
           <p:cNvPr id="25" name="">
             <a:extLst xmlns:a="http://schemas.openxmlformats.org/drawingml/2006/main">
               <a:ext uri="{FF2B5EF4-FFF2-40B4-BE49-F238E27FC236}">
-                <a16:creationId xmlns:a16="http://schemas.microsoft.com/office/drawing/2014/main" id="{AF1C1EFF-52B3-4C7E-859F-D2A06F7F0888}"/>
+                <a16:creationId xmlns:a16="http://schemas.microsoft.com/office/drawing/2014/main" id="{882643BB-1D58-460C-B28D-FDF9737BA071}"/>
               </a:ext>
             </a:extLst>
           </p:cNvPr>
@@ -6123,7 +6123,7 @@
           <p:cNvPr id="26" name="">
             <a:extLst xmlns:a="http://schemas.openxmlformats.org/drawingml/2006/main">
               <a:ext uri="{FF2B5EF4-FFF2-40B4-BE49-F238E27FC236}">
-                <a16:creationId xmlns:a16="http://schemas.microsoft.com/office/drawing/2014/main" id="{03CCD780-7F68-4329-94C3-03447BAE4726}"/>
+                <a16:creationId xmlns:a16="http://schemas.microsoft.com/office/drawing/2014/main" id="{B1344B9E-1166-4D6A-B8F4-BCE3D6F3DE92}"/>
               </a:ext>
             </a:extLst>
           </p:cNvPr>
@@ -6156,7 +6156,7 @@
           <p:cNvPr id="27" name="">
             <a:extLst xmlns:a="http://schemas.openxmlformats.org/drawingml/2006/main">
               <a:ext uri="{FF2B5EF4-FFF2-40B4-BE49-F238E27FC236}">
-                <a16:creationId xmlns:a16="http://schemas.microsoft.com/office/drawing/2014/main" id="{5D33791A-24D5-47BE-B0A7-F4081BB6844A}"/>
+                <a16:creationId xmlns:a16="http://schemas.microsoft.com/office/drawing/2014/main" id="{6FF8105F-1D47-4073-9071-49CF18CA6FB2}"/>
               </a:ext>
             </a:extLst>
           </p:cNvPr>
@@ -6207,7 +6207,7 @@
           <p:cNvPr id="28" name="">
             <a:extLst xmlns:a="http://schemas.openxmlformats.org/drawingml/2006/main">
               <a:ext uri="{FF2B5EF4-FFF2-40B4-BE49-F238E27FC236}">
-                <a16:creationId xmlns:a16="http://schemas.microsoft.com/office/drawing/2014/main" id="{62E43CB2-ACF3-4B4E-AA17-620BBBBD8B41}"/>
+                <a16:creationId xmlns:a16="http://schemas.microsoft.com/office/drawing/2014/main" id="{5CBFBEF4-63B4-4BAF-8F13-04D61F5F62DD}"/>
               </a:ext>
             </a:extLst>
           </p:cNvPr>
@@ -6258,7 +6258,7 @@
           <p:cNvPr id="29" name="">
             <a:extLst xmlns:a="http://schemas.openxmlformats.org/drawingml/2006/main">
               <a:ext uri="{FF2B5EF4-FFF2-40B4-BE49-F238E27FC236}">
-                <a16:creationId xmlns:a16="http://schemas.microsoft.com/office/drawing/2014/main" id="{DFEBAA23-F2FE-468B-804A-120D88050C52}"/>
+                <a16:creationId xmlns:a16="http://schemas.microsoft.com/office/drawing/2014/main" id="{B2B0F18C-4425-48EA-82EA-EBE92E4A521B}"/>
               </a:ext>
             </a:extLst>
           </p:cNvPr>
@@ -6291,7 +6291,7 @@
           <p:cNvPr id="30" name="">
             <a:extLst xmlns:a="http://schemas.openxmlformats.org/drawingml/2006/main">
               <a:ext uri="{FF2B5EF4-FFF2-40B4-BE49-F238E27FC236}">
-                <a16:creationId xmlns:a16="http://schemas.microsoft.com/office/drawing/2014/main" id="{EBB19421-60F6-4EE7-AC6B-E968C4B48950}"/>
+                <a16:creationId xmlns:a16="http://schemas.microsoft.com/office/drawing/2014/main" id="{0AB7571E-5A13-4666-91BB-69E0104C1759}"/>
               </a:ext>
             </a:extLst>
           </p:cNvPr>
@@ -6324,7 +6324,7 @@
           <p:cNvPr id="31" name="">
             <a:extLst xmlns:a="http://schemas.openxmlformats.org/drawingml/2006/main">
               <a:ext uri="{FF2B5EF4-FFF2-40B4-BE49-F238E27FC236}">
-                <a16:creationId xmlns:a16="http://schemas.microsoft.com/office/drawing/2014/main" id="{2B40EA34-A32C-4072-9498-6A5AD47DAB58}"/>
+                <a16:creationId xmlns:a16="http://schemas.microsoft.com/office/drawing/2014/main" id="{15329137-7BB6-4E58-B5F5-35543FD1C225}"/>
               </a:ext>
             </a:extLst>
           </p:cNvPr>
@@ -6375,7 +6375,7 @@
           <p:cNvPr id="32" name="">
             <a:extLst xmlns:a="http://schemas.openxmlformats.org/drawingml/2006/main">
               <a:ext uri="{FF2B5EF4-FFF2-40B4-BE49-F238E27FC236}">
-                <a16:creationId xmlns:a16="http://schemas.microsoft.com/office/drawing/2014/main" id="{085EF4F3-D277-4A6B-BAB4-21343F042245}"/>
+                <a16:creationId xmlns:a16="http://schemas.microsoft.com/office/drawing/2014/main" id="{F8BB5714-548E-4B24-A1CF-A6B73F9D40BD}"/>
               </a:ext>
             </a:extLst>
           </p:cNvPr>
@@ -6426,7 +6426,7 @@
           <p:cNvPr id="33" name="">
             <a:extLst xmlns:a="http://schemas.openxmlformats.org/drawingml/2006/main">
               <a:ext uri="{FF2B5EF4-FFF2-40B4-BE49-F238E27FC236}">
-                <a16:creationId xmlns:a16="http://schemas.microsoft.com/office/drawing/2014/main" id="{3661F09A-2025-49FD-A889-63D8D4E611D0}"/>
+                <a16:creationId xmlns:a16="http://schemas.microsoft.com/office/drawing/2014/main" id="{74717E0C-2D03-484C-9489-B5F319D955DA}"/>
               </a:ext>
             </a:extLst>
           </p:cNvPr>
@@ -6477,7 +6477,7 @@
           <p:cNvPr id="34" name="">
             <a:extLst xmlns:a="http://schemas.openxmlformats.org/drawingml/2006/main">
               <a:ext uri="{FF2B5EF4-FFF2-40B4-BE49-F238E27FC236}">
-                <a16:creationId xmlns:a16="http://schemas.microsoft.com/office/drawing/2014/main" id="{8F448856-22B9-42E0-98F5-FA40EDB7F05E}"/>
+                <a16:creationId xmlns:a16="http://schemas.microsoft.com/office/drawing/2014/main" id="{2E472409-3FF6-4389-822A-48E5030F6C72}"/>
               </a:ext>
             </a:extLst>
           </p:cNvPr>
@@ -6526,7 +6526,7 @@
     </p:spTree>
     <p:extLst>
       <p:ext uri="{BB962C8B-B14F-4D97-AF65-F5344CB8AC3E}">
-        <p14:creationId xmlns:p14="http://schemas.microsoft.com/office/powerpoint/2010/main" val="1047464516"/>
+        <p14:creationId xmlns:p14="http://schemas.microsoft.com/office/powerpoint/2010/main" val="318801805"/>
       </p:ext>
     </p:extLst>
   </p:cSld>
@@ -6550,7 +6550,7 @@
           <p:cNvPr id="1" name="">
             <a:extLst xmlns:a="http://schemas.openxmlformats.org/drawingml/2006/main">
               <a:ext uri="{FF2B5EF4-FFF2-40B4-BE49-F238E27FC236}">
-                <a16:creationId xmlns:a16="http://schemas.microsoft.com/office/drawing/2014/main" id="{AA224BCB-3C6D-4B8F-B1BE-6FA98D7DB12F}"/>
+                <a16:creationId xmlns:a16="http://schemas.microsoft.com/office/drawing/2014/main" id="{C75248DF-86D7-4658-BF12-C0F1C7272495}"/>
               </a:ext>
             </a:extLst>
           </p:cNvPr>
@@ -6583,7 +6583,7 @@
           <p:cNvPr id="2" name="">
             <a:extLst xmlns:a="http://schemas.openxmlformats.org/drawingml/2006/main">
               <a:ext uri="{FF2B5EF4-FFF2-40B4-BE49-F238E27FC236}">
-                <a16:creationId xmlns:a16="http://schemas.microsoft.com/office/drawing/2014/main" id="{4837E99D-024F-428A-9505-1B359D414239}"/>
+                <a16:creationId xmlns:a16="http://schemas.microsoft.com/office/drawing/2014/main" id="{DCBDA448-ADD4-4448-A220-B5942DBA4DB2}"/>
               </a:ext>
             </a:extLst>
           </p:cNvPr>
@@ -6634,7 +6634,7 @@
           <p:cNvPr id="3" name="">
             <a:extLst xmlns:a="http://schemas.openxmlformats.org/drawingml/2006/main">
               <a:ext uri="{FF2B5EF4-FFF2-40B4-BE49-F238E27FC236}">
-                <a16:creationId xmlns:a16="http://schemas.microsoft.com/office/drawing/2014/main" id="{DBCD0C85-8704-48FF-88D3-9D419992E1FA}"/>
+                <a16:creationId xmlns:a16="http://schemas.microsoft.com/office/drawing/2014/main" id="{BD265EFE-494E-4D2D-9162-FCB6FCB7B669}"/>
               </a:ext>
             </a:extLst>
           </p:cNvPr>
@@ -6685,7 +6685,7 @@
           <p:cNvPr id="4" name="">
             <a:extLst xmlns:a="http://schemas.openxmlformats.org/drawingml/2006/main">
               <a:ext uri="{FF2B5EF4-FFF2-40B4-BE49-F238E27FC236}">
-                <a16:creationId xmlns:a16="http://schemas.microsoft.com/office/drawing/2014/main" id="{3478E4C8-1DE5-4974-AC2E-567F76F7A0AE}"/>
+                <a16:creationId xmlns:a16="http://schemas.microsoft.com/office/drawing/2014/main" id="{05D4DAF1-3753-4E3E-B032-6D353DB0250F}"/>
               </a:ext>
             </a:extLst>
           </p:cNvPr>
@@ -6718,7 +6718,7 @@
           <p:cNvPr id="5" name="">
             <a:extLst xmlns:a="http://schemas.openxmlformats.org/drawingml/2006/main">
               <a:ext uri="{FF2B5EF4-FFF2-40B4-BE49-F238E27FC236}">
-                <a16:creationId xmlns:a16="http://schemas.microsoft.com/office/drawing/2014/main" id="{F64F2301-4DA4-42AE-BF1A-A1DE8A66230C}"/>
+                <a16:creationId xmlns:a16="http://schemas.microsoft.com/office/drawing/2014/main" id="{ABCE024C-B05D-448C-9FCC-CBF23B02A5B8}"/>
               </a:ext>
             </a:extLst>
           </p:cNvPr>
@@ -6751,7 +6751,7 @@
           <p:cNvPr id="6" name="">
             <a:extLst xmlns:a="http://schemas.openxmlformats.org/drawingml/2006/main">
               <a:ext uri="{FF2B5EF4-FFF2-40B4-BE49-F238E27FC236}">
-                <a16:creationId xmlns:a16="http://schemas.microsoft.com/office/drawing/2014/main" id="{7570826D-DF6E-4BCB-8A2B-EAA51B50FBE8}"/>
+                <a16:creationId xmlns:a16="http://schemas.microsoft.com/office/drawing/2014/main" id="{C263E332-717E-4BA2-8231-B248844585BE}"/>
               </a:ext>
             </a:extLst>
           </p:cNvPr>
@@ -6802,7 +6802,7 @@
           <p:cNvPr id="7" name="">
             <a:extLst xmlns:a="http://schemas.openxmlformats.org/drawingml/2006/main">
               <a:ext uri="{FF2B5EF4-FFF2-40B4-BE49-F238E27FC236}">
-                <a16:creationId xmlns:a16="http://schemas.microsoft.com/office/drawing/2014/main" id="{56425EE7-3808-4195-88D1-8DEC28F97521}"/>
+                <a16:creationId xmlns:a16="http://schemas.microsoft.com/office/drawing/2014/main" id="{B421E990-C302-4A23-BE6E-D45D5039AC78}"/>
               </a:ext>
             </a:extLst>
           </p:cNvPr>
@@ -6835,7 +6835,7 @@
           <p:cNvPr id="8" name="">
             <a:extLst xmlns:a="http://schemas.openxmlformats.org/drawingml/2006/main">
               <a:ext uri="{FF2B5EF4-FFF2-40B4-BE49-F238E27FC236}">
-                <a16:creationId xmlns:a16="http://schemas.microsoft.com/office/drawing/2014/main" id="{BBF283CF-45BC-463E-9FCA-BFC5C81C1DF5}"/>
+                <a16:creationId xmlns:a16="http://schemas.microsoft.com/office/drawing/2014/main" id="{449F73A3-AD1D-4A7E-A879-5F015D69B79E}"/>
               </a:ext>
             </a:extLst>
           </p:cNvPr>
@@ -6886,7 +6886,7 @@
           <p:cNvPr id="9" name="">
             <a:extLst xmlns:a="http://schemas.openxmlformats.org/drawingml/2006/main">
               <a:ext uri="{FF2B5EF4-FFF2-40B4-BE49-F238E27FC236}">
-                <a16:creationId xmlns:a16="http://schemas.microsoft.com/office/drawing/2014/main" id="{E45C9D14-E263-4308-9093-8AE05AF88434}"/>
+                <a16:creationId xmlns:a16="http://schemas.microsoft.com/office/drawing/2014/main" id="{A6DFAFFE-DABB-4D38-9B0A-6C9EA6974A14}"/>
               </a:ext>
             </a:extLst>
           </p:cNvPr>
@@ -6919,7 +6919,7 @@
           <p:cNvPr id="10" name="">
             <a:extLst xmlns:a="http://schemas.openxmlformats.org/drawingml/2006/main">
               <a:ext uri="{FF2B5EF4-FFF2-40B4-BE49-F238E27FC236}">
-                <a16:creationId xmlns:a16="http://schemas.microsoft.com/office/drawing/2014/main" id="{3AD1A722-6D08-4633-B4F1-4968BA8229C5}"/>
+                <a16:creationId xmlns:a16="http://schemas.microsoft.com/office/drawing/2014/main" id="{195DD952-81D6-4A24-813E-6B5C3424E649}"/>
               </a:ext>
             </a:extLst>
           </p:cNvPr>
@@ -6970,7 +6970,7 @@
           <p:cNvPr id="11" name="">
             <a:extLst xmlns:a="http://schemas.openxmlformats.org/drawingml/2006/main">
               <a:ext uri="{FF2B5EF4-FFF2-40B4-BE49-F238E27FC236}">
-                <a16:creationId xmlns:a16="http://schemas.microsoft.com/office/drawing/2014/main" id="{96AB25C1-1F63-43FA-BAD5-417A95968C3A}"/>
+                <a16:creationId xmlns:a16="http://schemas.microsoft.com/office/drawing/2014/main" id="{32122382-AC46-4DB2-BDE5-A601FBE5D4FE}"/>
               </a:ext>
             </a:extLst>
           </p:cNvPr>
@@ -7003,7 +7003,7 @@
           <p:cNvPr id="12" name="">
             <a:extLst xmlns:a="http://schemas.openxmlformats.org/drawingml/2006/main">
               <a:ext uri="{FF2B5EF4-FFF2-40B4-BE49-F238E27FC236}">
-                <a16:creationId xmlns:a16="http://schemas.microsoft.com/office/drawing/2014/main" id="{B16CC759-6797-492A-8E43-7AAC2405AB94}"/>
+                <a16:creationId xmlns:a16="http://schemas.microsoft.com/office/drawing/2014/main" id="{93A835F9-CB8D-4F1B-99A4-52DE976904FC}"/>
               </a:ext>
             </a:extLst>
           </p:cNvPr>
@@ -7054,7 +7054,7 @@
           <p:cNvPr id="13" name="">
             <a:extLst xmlns:a="http://schemas.openxmlformats.org/drawingml/2006/main">
               <a:ext uri="{FF2B5EF4-FFF2-40B4-BE49-F238E27FC236}">
-                <a16:creationId xmlns:a16="http://schemas.microsoft.com/office/drawing/2014/main" id="{C7A795BD-16EC-4434-B6B4-F67B36BEA1C8}"/>
+                <a16:creationId xmlns:a16="http://schemas.microsoft.com/office/drawing/2014/main" id="{B1FB066B-34F9-4BEE-965E-3DA274F193F1}"/>
               </a:ext>
             </a:extLst>
           </p:cNvPr>
@@ -7087,7 +7087,7 @@
           <p:cNvPr id="14" name="">
             <a:extLst xmlns:a="http://schemas.openxmlformats.org/drawingml/2006/main">
               <a:ext uri="{FF2B5EF4-FFF2-40B4-BE49-F238E27FC236}">
-                <a16:creationId xmlns:a16="http://schemas.microsoft.com/office/drawing/2014/main" id="{65F74ECD-19EB-4548-87F3-BFEC855A2629}"/>
+                <a16:creationId xmlns:a16="http://schemas.microsoft.com/office/drawing/2014/main" id="{1C234E9E-6B65-422D-B4CC-FA8B01BF4057}"/>
               </a:ext>
             </a:extLst>
           </p:cNvPr>
@@ -7138,7 +7138,7 @@
           <p:cNvPr id="15" name="">
             <a:extLst xmlns:a="http://schemas.openxmlformats.org/drawingml/2006/main">
               <a:ext uri="{FF2B5EF4-FFF2-40B4-BE49-F238E27FC236}">
-                <a16:creationId xmlns:a16="http://schemas.microsoft.com/office/drawing/2014/main" id="{97569988-0B3B-4DAA-81AD-687771C3EFD4}"/>
+                <a16:creationId xmlns:a16="http://schemas.microsoft.com/office/drawing/2014/main" id="{7B4789D1-003A-4D38-9795-FA3657BE075E}"/>
               </a:ext>
             </a:extLst>
           </p:cNvPr>
@@ -7171,7 +7171,7 @@
           <p:cNvPr id="16" name="">
             <a:extLst xmlns:a="http://schemas.openxmlformats.org/drawingml/2006/main">
               <a:ext uri="{FF2B5EF4-FFF2-40B4-BE49-F238E27FC236}">
-                <a16:creationId xmlns:a16="http://schemas.microsoft.com/office/drawing/2014/main" id="{DFC3F536-A28B-41F8-8D03-D9638449F839}"/>
+                <a16:creationId xmlns:a16="http://schemas.microsoft.com/office/drawing/2014/main" id="{2B24D63F-68BF-48D0-9669-995E9A66611B}"/>
               </a:ext>
             </a:extLst>
           </p:cNvPr>
@@ -7204,7 +7204,7 @@
           <p:cNvPr id="17" name="">
             <a:extLst xmlns:a="http://schemas.openxmlformats.org/drawingml/2006/main">
               <a:ext uri="{FF2B5EF4-FFF2-40B4-BE49-F238E27FC236}">
-                <a16:creationId xmlns:a16="http://schemas.microsoft.com/office/drawing/2014/main" id="{16199D0F-05C9-4E1E-A34F-E3DF497F4CA0}"/>
+                <a16:creationId xmlns:a16="http://schemas.microsoft.com/office/drawing/2014/main" id="{FE4A2958-41D5-4E77-B02F-987FA708837C}"/>
               </a:ext>
             </a:extLst>
           </p:cNvPr>
@@ -7255,7 +7255,7 @@
           <p:cNvPr id="18" name="">
             <a:extLst xmlns:a="http://schemas.openxmlformats.org/drawingml/2006/main">
               <a:ext uri="{FF2B5EF4-FFF2-40B4-BE49-F238E27FC236}">
-                <a16:creationId xmlns:a16="http://schemas.microsoft.com/office/drawing/2014/main" id="{5A470CEE-450F-45BC-A085-7299C4AE55AB}"/>
+                <a16:creationId xmlns:a16="http://schemas.microsoft.com/office/drawing/2014/main" id="{C14835E8-C091-4324-AEC0-CFCB06AFEAC4}"/>
               </a:ext>
             </a:extLst>
           </p:cNvPr>
@@ -7288,7 +7288,7 @@
           <p:cNvPr id="19" name="">
             <a:extLst xmlns:a="http://schemas.openxmlformats.org/drawingml/2006/main">
               <a:ext uri="{FF2B5EF4-FFF2-40B4-BE49-F238E27FC236}">
-                <a16:creationId xmlns:a16="http://schemas.microsoft.com/office/drawing/2014/main" id="{49128BAA-2347-4D6A-901D-7BA0848D80DE}"/>
+                <a16:creationId xmlns:a16="http://schemas.microsoft.com/office/drawing/2014/main" id="{67CF6907-6AF5-4277-8C1F-C0F1ADC510E3}"/>
               </a:ext>
             </a:extLst>
           </p:cNvPr>
@@ -7339,7 +7339,7 @@
           <p:cNvPr id="20" name="">
             <a:extLst xmlns:a="http://schemas.openxmlformats.org/drawingml/2006/main">
               <a:ext uri="{FF2B5EF4-FFF2-40B4-BE49-F238E27FC236}">
-                <a16:creationId xmlns:a16="http://schemas.microsoft.com/office/drawing/2014/main" id="{734BEE20-F16B-49B6-A62B-77A2205587FB}"/>
+                <a16:creationId xmlns:a16="http://schemas.microsoft.com/office/drawing/2014/main" id="{2D4FDD1E-746B-4D33-AEC6-474CF82786E7}"/>
               </a:ext>
             </a:extLst>
           </p:cNvPr>
@@ -7372,7 +7372,7 @@
           <p:cNvPr id="21" name="">
             <a:extLst xmlns:a="http://schemas.openxmlformats.org/drawingml/2006/main">
               <a:ext uri="{FF2B5EF4-FFF2-40B4-BE49-F238E27FC236}">
-                <a16:creationId xmlns:a16="http://schemas.microsoft.com/office/drawing/2014/main" id="{6D485B07-4284-4809-B4D7-D5B5EED6884D}"/>
+                <a16:creationId xmlns:a16="http://schemas.microsoft.com/office/drawing/2014/main" id="{86E74080-7DE3-4E02-BB3F-E4E18AC0F736}"/>
               </a:ext>
             </a:extLst>
           </p:cNvPr>
@@ -7423,7 +7423,7 @@
           <p:cNvPr id="22" name="">
             <a:extLst xmlns:a="http://schemas.openxmlformats.org/drawingml/2006/main">
               <a:ext uri="{FF2B5EF4-FFF2-40B4-BE49-F238E27FC236}">
-                <a16:creationId xmlns:a16="http://schemas.microsoft.com/office/drawing/2014/main" id="{39F53EDF-4419-4730-8808-8903AF6FD053}"/>
+                <a16:creationId xmlns:a16="http://schemas.microsoft.com/office/drawing/2014/main" id="{426D167C-3529-4274-BD23-8C5B8A66C32C}"/>
               </a:ext>
             </a:extLst>
           </p:cNvPr>
@@ -7456,7 +7456,7 @@
           <p:cNvPr id="23" name="">
             <a:extLst xmlns:a="http://schemas.openxmlformats.org/drawingml/2006/main">
               <a:ext uri="{FF2B5EF4-FFF2-40B4-BE49-F238E27FC236}">
-                <a16:creationId xmlns:a16="http://schemas.microsoft.com/office/drawing/2014/main" id="{0BD95D67-99E4-45E5-B35D-40EAC9C4833D}"/>
+                <a16:creationId xmlns:a16="http://schemas.microsoft.com/office/drawing/2014/main" id="{ED721584-27CF-4A31-8833-2BA1EB4C4C27}"/>
               </a:ext>
             </a:extLst>
           </p:cNvPr>
@@ -7507,7 +7507,7 @@
           <p:cNvPr id="24" name="">
             <a:extLst xmlns:a="http://schemas.openxmlformats.org/drawingml/2006/main">
               <a:ext uri="{FF2B5EF4-FFF2-40B4-BE49-F238E27FC236}">
-                <a16:creationId xmlns:a16="http://schemas.microsoft.com/office/drawing/2014/main" id="{DCFEBDD7-2D8C-4CCA-A626-262CDFC0E407}"/>
+                <a16:creationId xmlns:a16="http://schemas.microsoft.com/office/drawing/2014/main" id="{FB2F7D71-B591-4154-AA99-59BE390D56B6}"/>
               </a:ext>
             </a:extLst>
           </p:cNvPr>
@@ -7540,7 +7540,7 @@
           <p:cNvPr id="25" name="">
             <a:extLst xmlns:a="http://schemas.openxmlformats.org/drawingml/2006/main">
               <a:ext uri="{FF2B5EF4-FFF2-40B4-BE49-F238E27FC236}">
-                <a16:creationId xmlns:a16="http://schemas.microsoft.com/office/drawing/2014/main" id="{064F2162-3126-41AD-B014-639840C1CDC2}"/>
+                <a16:creationId xmlns:a16="http://schemas.microsoft.com/office/drawing/2014/main" id="{F0A849B6-FA49-41BA-BCF1-C6471B89D1D2}"/>
               </a:ext>
             </a:extLst>
           </p:cNvPr>
@@ -7591,7 +7591,7 @@
           <p:cNvPr id="26" name="">
             <a:extLst xmlns:a="http://schemas.openxmlformats.org/drawingml/2006/main">
               <a:ext uri="{FF2B5EF4-FFF2-40B4-BE49-F238E27FC236}">
-                <a16:creationId xmlns:a16="http://schemas.microsoft.com/office/drawing/2014/main" id="{5B2D84F0-D93B-4345-A89F-E3371FFB44DF}"/>
+                <a16:creationId xmlns:a16="http://schemas.microsoft.com/office/drawing/2014/main" id="{7AF294BF-55DE-4555-BBFD-E21E24E42828}"/>
               </a:ext>
             </a:extLst>
           </p:cNvPr>
@@ -7624,7 +7624,7 @@
           <p:cNvPr id="27" name="">
             <a:extLst xmlns:a="http://schemas.openxmlformats.org/drawingml/2006/main">
               <a:ext uri="{FF2B5EF4-FFF2-40B4-BE49-F238E27FC236}">
-                <a16:creationId xmlns:a16="http://schemas.microsoft.com/office/drawing/2014/main" id="{B9B207A2-41FD-473F-B4CE-C74B03C9F677}"/>
+                <a16:creationId xmlns:a16="http://schemas.microsoft.com/office/drawing/2014/main" id="{BAFABB9B-970B-43EC-8E2B-9375B46D6D6B}"/>
               </a:ext>
             </a:extLst>
           </p:cNvPr>
@@ -7657,7 +7657,7 @@
           <p:cNvPr id="28" name="">
             <a:extLst xmlns:a="http://schemas.openxmlformats.org/drawingml/2006/main">
               <a:ext uri="{FF2B5EF4-FFF2-40B4-BE49-F238E27FC236}">
-                <a16:creationId xmlns:a16="http://schemas.microsoft.com/office/drawing/2014/main" id="{9150D7E7-44B5-45E8-8469-D6260D0ACAC7}"/>
+                <a16:creationId xmlns:a16="http://schemas.microsoft.com/office/drawing/2014/main" id="{58A27230-44D1-44B2-BB49-B322F16ECE7B}"/>
               </a:ext>
             </a:extLst>
           </p:cNvPr>
@@ -7708,7 +7708,7 @@
           <p:cNvPr id="29" name="">
             <a:extLst xmlns:a="http://schemas.openxmlformats.org/drawingml/2006/main">
               <a:ext uri="{FF2B5EF4-FFF2-40B4-BE49-F238E27FC236}">
-                <a16:creationId xmlns:a16="http://schemas.microsoft.com/office/drawing/2014/main" id="{5C40A906-94FD-409A-9F43-A9FA37297044}"/>
+                <a16:creationId xmlns:a16="http://schemas.microsoft.com/office/drawing/2014/main" id="{9FC1ADAD-C7C6-40DF-B18F-C9AF8A6BB3FF}"/>
               </a:ext>
             </a:extLst>
           </p:cNvPr>
@@ -7741,7 +7741,7 @@
           <p:cNvPr id="30" name="">
             <a:extLst xmlns:a="http://schemas.openxmlformats.org/drawingml/2006/main">
               <a:ext uri="{FF2B5EF4-FFF2-40B4-BE49-F238E27FC236}">
-                <a16:creationId xmlns:a16="http://schemas.microsoft.com/office/drawing/2014/main" id="{BD32A7E3-1359-4790-877E-434D52C3C523}"/>
+                <a16:creationId xmlns:a16="http://schemas.microsoft.com/office/drawing/2014/main" id="{EDA69B85-1482-4994-817B-9212D1AC46CF}"/>
               </a:ext>
             </a:extLst>
           </p:cNvPr>
@@ -7792,7 +7792,7 @@
           <p:cNvPr id="31" name="">
             <a:extLst xmlns:a="http://schemas.openxmlformats.org/drawingml/2006/main">
               <a:ext uri="{FF2B5EF4-FFF2-40B4-BE49-F238E27FC236}">
-                <a16:creationId xmlns:a16="http://schemas.microsoft.com/office/drawing/2014/main" id="{5A905DF0-B80E-4298-9573-F0810BF5C37D}"/>
+                <a16:creationId xmlns:a16="http://schemas.microsoft.com/office/drawing/2014/main" id="{24F87EC3-4F59-4BA4-A073-5D0C16510F8A}"/>
               </a:ext>
             </a:extLst>
           </p:cNvPr>
@@ -7825,7 +7825,7 @@
           <p:cNvPr id="32" name="">
             <a:extLst xmlns:a="http://schemas.openxmlformats.org/drawingml/2006/main">
               <a:ext uri="{FF2B5EF4-FFF2-40B4-BE49-F238E27FC236}">
-                <a16:creationId xmlns:a16="http://schemas.microsoft.com/office/drawing/2014/main" id="{1BD7B885-96FC-482C-AD0A-EE7151F7C371}"/>
+                <a16:creationId xmlns:a16="http://schemas.microsoft.com/office/drawing/2014/main" id="{8AE324EE-F5C8-4224-921D-A4A06221FA97}"/>
               </a:ext>
             </a:extLst>
           </p:cNvPr>
@@ -7876,7 +7876,7 @@
           <p:cNvPr id="33" name="">
             <a:extLst xmlns:a="http://schemas.openxmlformats.org/drawingml/2006/main">
               <a:ext uri="{FF2B5EF4-FFF2-40B4-BE49-F238E27FC236}">
-                <a16:creationId xmlns:a16="http://schemas.microsoft.com/office/drawing/2014/main" id="{EA7E52E6-0CE4-472A-93FE-0F4959645AA7}"/>
+                <a16:creationId xmlns:a16="http://schemas.microsoft.com/office/drawing/2014/main" id="{68E62E2A-4162-45BE-90A6-381499B99C47}"/>
               </a:ext>
             </a:extLst>
           </p:cNvPr>
@@ -7909,7 +7909,7 @@
           <p:cNvPr id="34" name="">
             <a:extLst xmlns:a="http://schemas.openxmlformats.org/drawingml/2006/main">
               <a:ext uri="{FF2B5EF4-FFF2-40B4-BE49-F238E27FC236}">
-                <a16:creationId xmlns:a16="http://schemas.microsoft.com/office/drawing/2014/main" id="{F9E27290-4D84-4552-90C3-A04032E082C6}"/>
+                <a16:creationId xmlns:a16="http://schemas.microsoft.com/office/drawing/2014/main" id="{2D5326C8-1C01-403A-850D-6CD2B1843345}"/>
               </a:ext>
             </a:extLst>
           </p:cNvPr>
@@ -7960,7 +7960,7 @@
           <p:cNvPr id="35" name="">
             <a:extLst xmlns:a="http://schemas.openxmlformats.org/drawingml/2006/main">
               <a:ext uri="{FF2B5EF4-FFF2-40B4-BE49-F238E27FC236}">
-                <a16:creationId xmlns:a16="http://schemas.microsoft.com/office/drawing/2014/main" id="{2C965936-8865-410E-AD5B-4D3960F61266}"/>
+                <a16:creationId xmlns:a16="http://schemas.microsoft.com/office/drawing/2014/main" id="{A37F994A-9614-4175-A331-B38EF8B943C9}"/>
               </a:ext>
             </a:extLst>
           </p:cNvPr>
@@ -7993,7 +7993,7 @@
           <p:cNvPr id="36" name="">
             <a:extLst xmlns:a="http://schemas.openxmlformats.org/drawingml/2006/main">
               <a:ext uri="{FF2B5EF4-FFF2-40B4-BE49-F238E27FC236}">
-                <a16:creationId xmlns:a16="http://schemas.microsoft.com/office/drawing/2014/main" id="{442182E1-CB3A-4DB1-A0FB-EBA4FD717757}"/>
+                <a16:creationId xmlns:a16="http://schemas.microsoft.com/office/drawing/2014/main" id="{401F7ABA-59FD-40C4-8901-C83EFF7F3852}"/>
               </a:ext>
             </a:extLst>
           </p:cNvPr>
@@ -8044,7 +8044,7 @@
           <p:cNvPr id="37" name="">
             <a:extLst xmlns:a="http://schemas.openxmlformats.org/drawingml/2006/main">
               <a:ext uri="{FF2B5EF4-FFF2-40B4-BE49-F238E27FC236}">
-                <a16:creationId xmlns:a16="http://schemas.microsoft.com/office/drawing/2014/main" id="{E1393674-7FCF-4201-A7FB-46CDC09E1739}"/>
+                <a16:creationId xmlns:a16="http://schemas.microsoft.com/office/drawing/2014/main" id="{85903B3F-95F9-4A6A-B365-A5374B9325A8}"/>
               </a:ext>
             </a:extLst>
           </p:cNvPr>
@@ -8095,7 +8095,7 @@
           <p:cNvPr id="38" name="">
             <a:extLst xmlns:a="http://schemas.openxmlformats.org/drawingml/2006/main">
               <a:ext uri="{FF2B5EF4-FFF2-40B4-BE49-F238E27FC236}">
-                <a16:creationId xmlns:a16="http://schemas.microsoft.com/office/drawing/2014/main" id="{8FC65B0A-8437-479C-91BC-E17D76B9E743}"/>
+                <a16:creationId xmlns:a16="http://schemas.microsoft.com/office/drawing/2014/main" id="{E481880F-545E-4656-889B-8D0E091F43BD}"/>
               </a:ext>
             </a:extLst>
           </p:cNvPr>
@@ -8146,7 +8146,7 @@
           <p:cNvPr id="39" name="">
             <a:extLst xmlns:a="http://schemas.openxmlformats.org/drawingml/2006/main">
               <a:ext uri="{FF2B5EF4-FFF2-40B4-BE49-F238E27FC236}">
-                <a16:creationId xmlns:a16="http://schemas.microsoft.com/office/drawing/2014/main" id="{3DBC587E-3E13-455F-BCBD-15CD22FD90EE}"/>
+                <a16:creationId xmlns:a16="http://schemas.microsoft.com/office/drawing/2014/main" id="{16CCA8DB-69D8-4609-A0BA-82E59AB140DE}"/>
               </a:ext>
             </a:extLst>
           </p:cNvPr>
@@ -8197,7 +8197,7 @@
           <p:cNvPr id="40" name="">
             <a:extLst xmlns:a="http://schemas.openxmlformats.org/drawingml/2006/main">
               <a:ext uri="{FF2B5EF4-FFF2-40B4-BE49-F238E27FC236}">
-                <a16:creationId xmlns:a16="http://schemas.microsoft.com/office/drawing/2014/main" id="{FD267EBC-76BB-4255-8F67-74ACFD59AD68}"/>
+                <a16:creationId xmlns:a16="http://schemas.microsoft.com/office/drawing/2014/main" id="{CCA6E482-EC90-4CB0-97B1-73346276BA69}"/>
               </a:ext>
             </a:extLst>
           </p:cNvPr>
@@ -8246,7 +8246,7 @@
     </p:spTree>
     <p:extLst>
       <p:ext uri="{BB962C8B-B14F-4D97-AF65-F5344CB8AC3E}">
-        <p14:creationId xmlns:p14="http://schemas.microsoft.com/office/powerpoint/2010/main" val="800764287"/>
+        <p14:creationId xmlns:p14="http://schemas.microsoft.com/office/powerpoint/2010/main" val="757400114"/>
       </p:ext>
     </p:extLst>
   </p:cSld>
@@ -8270,7 +8270,7 @@
           <p:cNvPr id="1" name="">
             <a:extLst xmlns:a="http://schemas.openxmlformats.org/drawingml/2006/main">
               <a:ext uri="{FF2B5EF4-FFF2-40B4-BE49-F238E27FC236}">
-                <a16:creationId xmlns:a16="http://schemas.microsoft.com/office/drawing/2014/main" id="{844F4144-879E-4F50-9F7B-AD6310EC4A1F}"/>
+                <a16:creationId xmlns:a16="http://schemas.microsoft.com/office/drawing/2014/main" id="{91421AE4-13A3-47FC-982F-BB7DDC9FF60C}"/>
               </a:ext>
             </a:extLst>
           </p:cNvPr>
@@ -8303,7 +8303,7 @@
           <p:cNvPr id="2" name="">
             <a:extLst xmlns:a="http://schemas.openxmlformats.org/drawingml/2006/main">
               <a:ext uri="{FF2B5EF4-FFF2-40B4-BE49-F238E27FC236}">
-                <a16:creationId xmlns:a16="http://schemas.microsoft.com/office/drawing/2014/main" id="{8985043A-0DA5-4641-A5B1-9E8CA5F6B056}"/>
+                <a16:creationId xmlns:a16="http://schemas.microsoft.com/office/drawing/2014/main" id="{49163BA8-EABE-4B34-B98F-C78344C56390}"/>
               </a:ext>
             </a:extLst>
           </p:cNvPr>
@@ -8354,7 +8354,7 @@
           <p:cNvPr id="3" name="">
             <a:extLst xmlns:a="http://schemas.openxmlformats.org/drawingml/2006/main">
               <a:ext uri="{FF2B5EF4-FFF2-40B4-BE49-F238E27FC236}">
-                <a16:creationId xmlns:a16="http://schemas.microsoft.com/office/drawing/2014/main" id="{661A520C-788A-4CA4-A649-1A9B51A19110}"/>
+                <a16:creationId xmlns:a16="http://schemas.microsoft.com/office/drawing/2014/main" id="{7327F017-DDA3-4687-BDF3-E08F66917166}"/>
               </a:ext>
             </a:extLst>
           </p:cNvPr>
@@ -8405,7 +8405,7 @@
           <p:cNvPr id="4" name="">
             <a:extLst xmlns:a="http://schemas.openxmlformats.org/drawingml/2006/main">
               <a:ext uri="{FF2B5EF4-FFF2-40B4-BE49-F238E27FC236}">
-                <a16:creationId xmlns:a16="http://schemas.microsoft.com/office/drawing/2014/main" id="{11AA92F2-693D-4873-9AD7-3B65779BFB33}"/>
+                <a16:creationId xmlns:a16="http://schemas.microsoft.com/office/drawing/2014/main" id="{9BB61773-6ED6-47E5-8FB0-FF8181082093}"/>
               </a:ext>
             </a:extLst>
           </p:cNvPr>
@@ -8456,7 +8456,7 @@
           <p:cNvPr id="5" name="">
             <a:extLst xmlns:a="http://schemas.openxmlformats.org/drawingml/2006/main">
               <a:ext uri="{FF2B5EF4-FFF2-40B4-BE49-F238E27FC236}">
-                <a16:creationId xmlns:a16="http://schemas.microsoft.com/office/drawing/2014/main" id="{556E55CB-627F-463C-BABE-525534A13DDE}"/>
+                <a16:creationId xmlns:a16="http://schemas.microsoft.com/office/drawing/2014/main" id="{806AE433-FD3E-4A59-B540-5AE22C0FC3BD}"/>
               </a:ext>
             </a:extLst>
           </p:cNvPr>
@@ -8507,7 +8507,7 @@
           <p:cNvPr id="6" name="">
             <a:extLst xmlns:a="http://schemas.openxmlformats.org/drawingml/2006/main">
               <a:ext uri="{FF2B5EF4-FFF2-40B4-BE49-F238E27FC236}">
-                <a16:creationId xmlns:a16="http://schemas.microsoft.com/office/drawing/2014/main" id="{5783C444-9996-40C7-B909-B13583556C95}"/>
+                <a16:creationId xmlns:a16="http://schemas.microsoft.com/office/drawing/2014/main" id="{955A25C8-880E-442D-B1D4-8FD8C1C60B54}"/>
               </a:ext>
             </a:extLst>
           </p:cNvPr>
@@ -8558,7 +8558,7 @@
           <p:cNvPr id="7" name="">
             <a:extLst xmlns:a="http://schemas.openxmlformats.org/drawingml/2006/main">
               <a:ext uri="{FF2B5EF4-FFF2-40B4-BE49-F238E27FC236}">
-                <a16:creationId xmlns:a16="http://schemas.microsoft.com/office/drawing/2014/main" id="{08027EDF-A2A3-48CF-9EF4-99CB93943676}"/>
+                <a16:creationId xmlns:a16="http://schemas.microsoft.com/office/drawing/2014/main" id="{03062977-8289-42E8-A196-18F27766EEE4}"/>
               </a:ext>
             </a:extLst>
           </p:cNvPr>
@@ -8591,7 +8591,7 @@
           <p:cNvPr id="8" name="">
             <a:extLst xmlns:a="http://schemas.openxmlformats.org/drawingml/2006/main">
               <a:ext uri="{FF2B5EF4-FFF2-40B4-BE49-F238E27FC236}">
-                <a16:creationId xmlns:a16="http://schemas.microsoft.com/office/drawing/2014/main" id="{E8EB8470-E7EE-45BD-A8F6-F56C8A98EA33}"/>
+                <a16:creationId xmlns:a16="http://schemas.microsoft.com/office/drawing/2014/main" id="{1D3C8324-7A4A-457F-9116-906374DB6713}"/>
               </a:ext>
             </a:extLst>
           </p:cNvPr>
@@ -8624,7 +8624,7 @@
           <p:cNvPr id="9" name="">
             <a:extLst xmlns:a="http://schemas.openxmlformats.org/drawingml/2006/main">
               <a:ext uri="{FF2B5EF4-FFF2-40B4-BE49-F238E27FC236}">
-                <a16:creationId xmlns:a16="http://schemas.microsoft.com/office/drawing/2014/main" id="{34A8A43C-B770-40DB-A5DF-6BF2C69F8390}"/>
+                <a16:creationId xmlns:a16="http://schemas.microsoft.com/office/drawing/2014/main" id="{406136BF-5E81-40A4-9590-D85FA17D1B0F}"/>
               </a:ext>
             </a:extLst>
           </p:cNvPr>
@@ -8675,7 +8675,7 @@
           <p:cNvPr id="10" name="">
             <a:extLst xmlns:a="http://schemas.openxmlformats.org/drawingml/2006/main">
               <a:ext uri="{FF2B5EF4-FFF2-40B4-BE49-F238E27FC236}">
-                <a16:creationId xmlns:a16="http://schemas.microsoft.com/office/drawing/2014/main" id="{5721B0A7-36B8-4369-B8E2-92CA78EE3867}"/>
+                <a16:creationId xmlns:a16="http://schemas.microsoft.com/office/drawing/2014/main" id="{F5D916AC-403D-48D4-B0D4-029CF3F583ED}"/>
               </a:ext>
             </a:extLst>
           </p:cNvPr>
@@ -8726,7 +8726,7 @@
           <p:cNvPr id="11" name="">
             <a:extLst xmlns:a="http://schemas.openxmlformats.org/drawingml/2006/main">
               <a:ext uri="{FF2B5EF4-FFF2-40B4-BE49-F238E27FC236}">
-                <a16:creationId xmlns:a16="http://schemas.microsoft.com/office/drawing/2014/main" id="{9537C390-A31B-496A-91D8-26886B9A3C56}"/>
+                <a16:creationId xmlns:a16="http://schemas.microsoft.com/office/drawing/2014/main" id="{666C204C-BE55-43D0-9C13-C98D5E031720}"/>
               </a:ext>
             </a:extLst>
           </p:cNvPr>
@@ -8759,7 +8759,7 @@
           <p:cNvPr id="12" name="">
             <a:extLst xmlns:a="http://schemas.openxmlformats.org/drawingml/2006/main">
               <a:ext uri="{FF2B5EF4-FFF2-40B4-BE49-F238E27FC236}">
-                <a16:creationId xmlns:a16="http://schemas.microsoft.com/office/drawing/2014/main" id="{2DC474B4-2F19-4B08-A2F7-EC111F2936CE}"/>
+                <a16:creationId xmlns:a16="http://schemas.microsoft.com/office/drawing/2014/main" id="{D40C3466-E69D-4FDE-85F8-7A5EA2E031FE}"/>
               </a:ext>
             </a:extLst>
           </p:cNvPr>
@@ -8792,7 +8792,7 @@
           <p:cNvPr id="13" name="">
             <a:extLst xmlns:a="http://schemas.openxmlformats.org/drawingml/2006/main">
               <a:ext uri="{FF2B5EF4-FFF2-40B4-BE49-F238E27FC236}">
-                <a16:creationId xmlns:a16="http://schemas.microsoft.com/office/drawing/2014/main" id="{3950F8F9-C671-442B-8F8F-C1577BD50A76}"/>
+                <a16:creationId xmlns:a16="http://schemas.microsoft.com/office/drawing/2014/main" id="{1E6C9003-2779-4158-8975-0F1CB9D7CA95}"/>
               </a:ext>
             </a:extLst>
           </p:cNvPr>
@@ -8843,7 +8843,7 @@
           <p:cNvPr id="14" name="">
             <a:extLst xmlns:a="http://schemas.openxmlformats.org/drawingml/2006/main">
               <a:ext uri="{FF2B5EF4-FFF2-40B4-BE49-F238E27FC236}">
-                <a16:creationId xmlns:a16="http://schemas.microsoft.com/office/drawing/2014/main" id="{4C0F5C8A-877D-494E-9564-406499780E57}"/>
+                <a16:creationId xmlns:a16="http://schemas.microsoft.com/office/drawing/2014/main" id="{D90D68BF-1C14-4CE3-B56D-FF3D5BB1AFE9}"/>
               </a:ext>
             </a:extLst>
           </p:cNvPr>
@@ -8894,7 +8894,7 @@
           <p:cNvPr id="15" name="">
             <a:extLst xmlns:a="http://schemas.openxmlformats.org/drawingml/2006/main">
               <a:ext uri="{FF2B5EF4-FFF2-40B4-BE49-F238E27FC236}">
-                <a16:creationId xmlns:a16="http://schemas.microsoft.com/office/drawing/2014/main" id="{60B5EB52-2058-4493-984E-B795FB7F32E6}"/>
+                <a16:creationId xmlns:a16="http://schemas.microsoft.com/office/drawing/2014/main" id="{F88C51F5-489E-4D61-9E06-10C232AB256C}"/>
               </a:ext>
             </a:extLst>
           </p:cNvPr>
@@ -8927,7 +8927,7 @@
           <p:cNvPr id="16" name="">
             <a:extLst xmlns:a="http://schemas.openxmlformats.org/drawingml/2006/main">
               <a:ext uri="{FF2B5EF4-FFF2-40B4-BE49-F238E27FC236}">
-                <a16:creationId xmlns:a16="http://schemas.microsoft.com/office/drawing/2014/main" id="{6B4E9FEE-7D55-4B7D-8351-325FDACDBD05}"/>
+                <a16:creationId xmlns:a16="http://schemas.microsoft.com/office/drawing/2014/main" id="{8D8575FE-EB3F-4BB0-BA16-E0BB3F8294B0}"/>
               </a:ext>
             </a:extLst>
           </p:cNvPr>
@@ -8960,7 +8960,7 @@
           <p:cNvPr id="17" name="">
             <a:extLst xmlns:a="http://schemas.openxmlformats.org/drawingml/2006/main">
               <a:ext uri="{FF2B5EF4-FFF2-40B4-BE49-F238E27FC236}">
-                <a16:creationId xmlns:a16="http://schemas.microsoft.com/office/drawing/2014/main" id="{F9AC1656-7164-4C22-B616-D67466428742}"/>
+                <a16:creationId xmlns:a16="http://schemas.microsoft.com/office/drawing/2014/main" id="{7425CEDC-A675-4473-AC01-892CFD4D4896}"/>
               </a:ext>
             </a:extLst>
           </p:cNvPr>
@@ -9011,7 +9011,7 @@
           <p:cNvPr id="18" name="">
             <a:extLst xmlns:a="http://schemas.openxmlformats.org/drawingml/2006/main">
               <a:ext uri="{FF2B5EF4-FFF2-40B4-BE49-F238E27FC236}">
-                <a16:creationId xmlns:a16="http://schemas.microsoft.com/office/drawing/2014/main" id="{A39E2018-7889-43E8-BA60-FA03ABBA6126}"/>
+                <a16:creationId xmlns:a16="http://schemas.microsoft.com/office/drawing/2014/main" id="{C5ABC4AA-A86D-4070-A2B5-D4A95C2859EA}"/>
               </a:ext>
             </a:extLst>
           </p:cNvPr>
@@ -9062,7 +9062,7 @@
           <p:cNvPr id="19" name="">
             <a:extLst xmlns:a="http://schemas.openxmlformats.org/drawingml/2006/main">
               <a:ext uri="{FF2B5EF4-FFF2-40B4-BE49-F238E27FC236}">
-                <a16:creationId xmlns:a16="http://schemas.microsoft.com/office/drawing/2014/main" id="{449F55A4-DDE6-44BC-A3AF-65212CE8CACB}"/>
+                <a16:creationId xmlns:a16="http://schemas.microsoft.com/office/drawing/2014/main" id="{FC741A1D-E5D9-4763-B69A-1AE99C0CF563}"/>
               </a:ext>
             </a:extLst>
           </p:cNvPr>
@@ -9095,7 +9095,7 @@
           <p:cNvPr id="20" name="">
             <a:extLst xmlns:a="http://schemas.openxmlformats.org/drawingml/2006/main">
               <a:ext uri="{FF2B5EF4-FFF2-40B4-BE49-F238E27FC236}">
-                <a16:creationId xmlns:a16="http://schemas.microsoft.com/office/drawing/2014/main" id="{0802C6E3-45B6-45B8-B804-43521117A1FB}"/>
+                <a16:creationId xmlns:a16="http://schemas.microsoft.com/office/drawing/2014/main" id="{3E222F92-5DC3-468B-A4D5-B26AE6A12500}"/>
               </a:ext>
             </a:extLst>
           </p:cNvPr>
@@ -9128,7 +9128,7 @@
           <p:cNvPr id="21" name="">
             <a:extLst xmlns:a="http://schemas.openxmlformats.org/drawingml/2006/main">
               <a:ext uri="{FF2B5EF4-FFF2-40B4-BE49-F238E27FC236}">
-                <a16:creationId xmlns:a16="http://schemas.microsoft.com/office/drawing/2014/main" id="{DC0E29BA-9E59-4D2A-8F5C-64FF500799AD}"/>
+                <a16:creationId xmlns:a16="http://schemas.microsoft.com/office/drawing/2014/main" id="{D72ADCD7-BBD9-4066-9BC6-BA583F34CCAF}"/>
               </a:ext>
             </a:extLst>
           </p:cNvPr>
@@ -9179,7 +9179,7 @@
           <p:cNvPr id="22" name="">
             <a:extLst xmlns:a="http://schemas.openxmlformats.org/drawingml/2006/main">
               <a:ext uri="{FF2B5EF4-FFF2-40B4-BE49-F238E27FC236}">
-                <a16:creationId xmlns:a16="http://schemas.microsoft.com/office/drawing/2014/main" id="{D2DA855A-1751-4BC3-9955-04861A4F6DD1}"/>
+                <a16:creationId xmlns:a16="http://schemas.microsoft.com/office/drawing/2014/main" id="{0840D6BE-1447-4A65-AD48-C64C768AB22C}"/>
               </a:ext>
             </a:extLst>
           </p:cNvPr>
@@ -9230,7 +9230,7 @@
           <p:cNvPr id="23" name="">
             <a:extLst xmlns:a="http://schemas.openxmlformats.org/drawingml/2006/main">
               <a:ext uri="{FF2B5EF4-FFF2-40B4-BE49-F238E27FC236}">
-                <a16:creationId xmlns:a16="http://schemas.microsoft.com/office/drawing/2014/main" id="{831A0DC7-30A5-4685-AC54-ED1B0C409CFA}"/>
+                <a16:creationId xmlns:a16="http://schemas.microsoft.com/office/drawing/2014/main" id="{9EDEC11E-C5FB-4423-978C-E98CCB83F3A7}"/>
               </a:ext>
             </a:extLst>
           </p:cNvPr>
@@ -9281,7 +9281,7 @@
           <p:cNvPr id="24" name="">
             <a:extLst xmlns:a="http://schemas.openxmlformats.org/drawingml/2006/main">
               <a:ext uri="{FF2B5EF4-FFF2-40B4-BE49-F238E27FC236}">
-                <a16:creationId xmlns:a16="http://schemas.microsoft.com/office/drawing/2014/main" id="{72443B55-8057-4DB8-9AE9-EFFF8D5A451F}"/>
+                <a16:creationId xmlns:a16="http://schemas.microsoft.com/office/drawing/2014/main" id="{CF2D9B0C-FA0D-41EA-82C8-EBDC9B7F5852}"/>
               </a:ext>
             </a:extLst>
           </p:cNvPr>
@@ -9332,7 +9332,7 @@
           <p:cNvPr id="25" name="">
             <a:extLst xmlns:a="http://schemas.openxmlformats.org/drawingml/2006/main">
               <a:ext uri="{FF2B5EF4-FFF2-40B4-BE49-F238E27FC236}">
-                <a16:creationId xmlns:a16="http://schemas.microsoft.com/office/drawing/2014/main" id="{302DD8B8-2607-4CEE-A0B5-82FB6DEA2389}"/>
+                <a16:creationId xmlns:a16="http://schemas.microsoft.com/office/drawing/2014/main" id="{F8FC9B9C-D881-4D51-899C-D744288B9405}"/>
               </a:ext>
             </a:extLst>
           </p:cNvPr>
@@ -9381,7 +9381,7 @@
     </p:spTree>
     <p:extLst>
       <p:ext uri="{BB962C8B-B14F-4D97-AF65-F5344CB8AC3E}">
-        <p14:creationId xmlns:p14="http://schemas.microsoft.com/office/powerpoint/2010/main" val="1003413164"/>
+        <p14:creationId xmlns:p14="http://schemas.microsoft.com/office/powerpoint/2010/main" val="1995150264"/>
       </p:ext>
     </p:extLst>
   </p:cSld>
@@ -9405,7 +9405,7 @@
           <p:cNvPr id="1" name="">
             <a:extLst xmlns:a="http://schemas.openxmlformats.org/drawingml/2006/main">
               <a:ext uri="{FF2B5EF4-FFF2-40B4-BE49-F238E27FC236}">
-                <a16:creationId xmlns:a16="http://schemas.microsoft.com/office/drawing/2014/main" id="{2992A29F-F8B1-432F-A5DE-CB58F1F5FA2D}"/>
+                <a16:creationId xmlns:a16="http://schemas.microsoft.com/office/drawing/2014/main" id="{74ACDC9F-7B58-41B1-9926-681A2551D04C}"/>
               </a:ext>
             </a:extLst>
           </p:cNvPr>
@@ -9438,7 +9438,7 @@
           <p:cNvPr id="2" name="">
             <a:extLst xmlns:a="http://schemas.openxmlformats.org/drawingml/2006/main">
               <a:ext uri="{FF2B5EF4-FFF2-40B4-BE49-F238E27FC236}">
-                <a16:creationId xmlns:a16="http://schemas.microsoft.com/office/drawing/2014/main" id="{82933334-9B97-4CE1-B9F0-CEB3AA299773}"/>
+                <a16:creationId xmlns:a16="http://schemas.microsoft.com/office/drawing/2014/main" id="{ADCE0509-84B6-44BD-8452-CDA3F5D66C84}"/>
               </a:ext>
             </a:extLst>
           </p:cNvPr>
@@ -9489,7 +9489,7 @@
           <p:cNvPr id="3" name="">
             <a:extLst xmlns:a="http://schemas.openxmlformats.org/drawingml/2006/main">
               <a:ext uri="{FF2B5EF4-FFF2-40B4-BE49-F238E27FC236}">
-                <a16:creationId xmlns:a16="http://schemas.microsoft.com/office/drawing/2014/main" id="{3A9BCE7F-30A1-43F2-9FEF-AAB4FBA6EBB5}"/>
+                <a16:creationId xmlns:a16="http://schemas.microsoft.com/office/drawing/2014/main" id="{9E3EE278-FFB6-40AA-B205-0D8DCE3E3018}"/>
               </a:ext>
             </a:extLst>
           </p:cNvPr>
@@ -9540,7 +9540,7 @@
           <p:cNvPr id="4" name="">
             <a:extLst xmlns:a="http://schemas.openxmlformats.org/drawingml/2006/main">
               <a:ext uri="{FF2B5EF4-FFF2-40B4-BE49-F238E27FC236}">
-                <a16:creationId xmlns:a16="http://schemas.microsoft.com/office/drawing/2014/main" id="{0F2BC9D4-C0CB-47D1-BE5C-73B43F590D7B}"/>
+                <a16:creationId xmlns:a16="http://schemas.microsoft.com/office/drawing/2014/main" id="{E52AF4B2-3FE6-466A-AE38-9F40F6EA6D91}"/>
               </a:ext>
             </a:extLst>
           </p:cNvPr>
@@ -9573,7 +9573,7 @@
           <p:cNvPr id="5" name="">
             <a:extLst xmlns:a="http://schemas.openxmlformats.org/drawingml/2006/main">
               <a:ext uri="{FF2B5EF4-FFF2-40B4-BE49-F238E27FC236}">
-                <a16:creationId xmlns:a16="http://schemas.microsoft.com/office/drawing/2014/main" id="{8AA8EFD2-67E4-4536-841D-51CE0215697B}"/>
+                <a16:creationId xmlns:a16="http://schemas.microsoft.com/office/drawing/2014/main" id="{7D338FAE-6C6A-4F0E-AE4E-0BCA47DF821B}"/>
               </a:ext>
             </a:extLst>
           </p:cNvPr>
@@ -9606,7 +9606,7 @@
           <p:cNvPr id="6" name="">
             <a:extLst xmlns:a="http://schemas.openxmlformats.org/drawingml/2006/main">
               <a:ext uri="{FF2B5EF4-FFF2-40B4-BE49-F238E27FC236}">
-                <a16:creationId xmlns:a16="http://schemas.microsoft.com/office/drawing/2014/main" id="{D313F0E5-4D47-4D45-BFE5-590418D6554F}"/>
+                <a16:creationId xmlns:a16="http://schemas.microsoft.com/office/drawing/2014/main" id="{82370A90-8AFF-4675-8F70-C29C557CB2AC}"/>
               </a:ext>
             </a:extLst>
           </p:cNvPr>
@@ -9657,7 +9657,7 @@
           <p:cNvPr id="7" name="">
             <a:extLst xmlns:a="http://schemas.openxmlformats.org/drawingml/2006/main">
               <a:ext uri="{FF2B5EF4-FFF2-40B4-BE49-F238E27FC236}">
-                <a16:creationId xmlns:a16="http://schemas.microsoft.com/office/drawing/2014/main" id="{867D8755-EB8E-41F4-94AB-B725DB5EFB88}"/>
+                <a16:creationId xmlns:a16="http://schemas.microsoft.com/office/drawing/2014/main" id="{D5AC7A8B-251E-44FD-BF37-9599A7F0B3AB}"/>
               </a:ext>
             </a:extLst>
           </p:cNvPr>
@@ -9708,7 +9708,7 @@
           <p:cNvPr id="8" name="">
             <a:extLst xmlns:a="http://schemas.openxmlformats.org/drawingml/2006/main">
               <a:ext uri="{FF2B5EF4-FFF2-40B4-BE49-F238E27FC236}">
-                <a16:creationId xmlns:a16="http://schemas.microsoft.com/office/drawing/2014/main" id="{74B11FDB-EDF5-433C-8C14-7FDBCD864172}"/>
+                <a16:creationId xmlns:a16="http://schemas.microsoft.com/office/drawing/2014/main" id="{9512D71B-517A-4440-88BA-2AD86EBA96DE}"/>
               </a:ext>
             </a:extLst>
           </p:cNvPr>
@@ -9741,7 +9741,7 @@
           <p:cNvPr id="9" name="">
             <a:extLst xmlns:a="http://schemas.openxmlformats.org/drawingml/2006/main">
               <a:ext uri="{FF2B5EF4-FFF2-40B4-BE49-F238E27FC236}">
-                <a16:creationId xmlns:a16="http://schemas.microsoft.com/office/drawing/2014/main" id="{17F78B48-2CA8-4D18-BBD0-0ACFEFCA1BAB}"/>
+                <a16:creationId xmlns:a16="http://schemas.microsoft.com/office/drawing/2014/main" id="{4C0D8C5C-3AC5-4522-8FF9-721F10572F45}"/>
               </a:ext>
             </a:extLst>
           </p:cNvPr>
@@ -9774,7 +9774,7 @@
           <p:cNvPr id="10" name="">
             <a:extLst xmlns:a="http://schemas.openxmlformats.org/drawingml/2006/main">
               <a:ext uri="{FF2B5EF4-FFF2-40B4-BE49-F238E27FC236}">
-                <a16:creationId xmlns:a16="http://schemas.microsoft.com/office/drawing/2014/main" id="{B7606BC4-55B9-4F97-BE04-B8402D339084}"/>
+                <a16:creationId xmlns:a16="http://schemas.microsoft.com/office/drawing/2014/main" id="{A3FB9111-5B94-4EDE-BF15-BE9B894D26F9}"/>
               </a:ext>
             </a:extLst>
           </p:cNvPr>
@@ -9825,7 +9825,7 @@
           <p:cNvPr id="11" name="">
             <a:extLst xmlns:a="http://schemas.openxmlformats.org/drawingml/2006/main">
               <a:ext uri="{FF2B5EF4-FFF2-40B4-BE49-F238E27FC236}">
-                <a16:creationId xmlns:a16="http://schemas.microsoft.com/office/drawing/2014/main" id="{CF2DAEF7-5FF0-42C9-94A9-A9473D181F3B}"/>
+                <a16:creationId xmlns:a16="http://schemas.microsoft.com/office/drawing/2014/main" id="{FC6A1E8B-AD5F-477F-98DA-D075F8BBC4C5}"/>
               </a:ext>
             </a:extLst>
           </p:cNvPr>
@@ -9876,7 +9876,7 @@
           <p:cNvPr id="12" name="">
             <a:extLst xmlns:a="http://schemas.openxmlformats.org/drawingml/2006/main">
               <a:ext uri="{FF2B5EF4-FFF2-40B4-BE49-F238E27FC236}">
-                <a16:creationId xmlns:a16="http://schemas.microsoft.com/office/drawing/2014/main" id="{AED65E41-6B65-4953-A791-AFBF4DFA8CCE}"/>
+                <a16:creationId xmlns:a16="http://schemas.microsoft.com/office/drawing/2014/main" id="{901B6089-98A6-4FD7-8AC6-3D56860B6E4C}"/>
               </a:ext>
             </a:extLst>
           </p:cNvPr>
@@ -9909,7 +9909,7 @@
           <p:cNvPr id="13" name="">
             <a:extLst xmlns:a="http://schemas.openxmlformats.org/drawingml/2006/main">
               <a:ext uri="{FF2B5EF4-FFF2-40B4-BE49-F238E27FC236}">
-                <a16:creationId xmlns:a16="http://schemas.microsoft.com/office/drawing/2014/main" id="{EB97B9DC-0D89-46DD-AF37-BD73B518FD59}"/>
+                <a16:creationId xmlns:a16="http://schemas.microsoft.com/office/drawing/2014/main" id="{B2D228C3-F5ED-40DE-8D9C-1ED7B3447AA2}"/>
               </a:ext>
             </a:extLst>
           </p:cNvPr>
@@ -9942,7 +9942,7 @@
           <p:cNvPr id="14" name="">
             <a:extLst xmlns:a="http://schemas.openxmlformats.org/drawingml/2006/main">
               <a:ext uri="{FF2B5EF4-FFF2-40B4-BE49-F238E27FC236}">
-                <a16:creationId xmlns:a16="http://schemas.microsoft.com/office/drawing/2014/main" id="{9FF1B27A-9AFB-44D8-B4C2-22CE10845A6C}"/>
+                <a16:creationId xmlns:a16="http://schemas.microsoft.com/office/drawing/2014/main" id="{2C7030B1-33DD-44C0-B6D6-DD2C8A3EC72F}"/>
               </a:ext>
             </a:extLst>
           </p:cNvPr>
@@ -9993,7 +9993,7 @@
           <p:cNvPr id="15" name="">
             <a:extLst xmlns:a="http://schemas.openxmlformats.org/drawingml/2006/main">
               <a:ext uri="{FF2B5EF4-FFF2-40B4-BE49-F238E27FC236}">
-                <a16:creationId xmlns:a16="http://schemas.microsoft.com/office/drawing/2014/main" id="{F1649DE6-3E0B-47BB-B187-8756780ACC1E}"/>
+                <a16:creationId xmlns:a16="http://schemas.microsoft.com/office/drawing/2014/main" id="{0D96F31E-F4DD-4078-A6D8-CE4F252AC31D}"/>
               </a:ext>
             </a:extLst>
           </p:cNvPr>
@@ -10044,7 +10044,7 @@
           <p:cNvPr id="16" name="">
             <a:extLst xmlns:a="http://schemas.openxmlformats.org/drawingml/2006/main">
               <a:ext uri="{FF2B5EF4-FFF2-40B4-BE49-F238E27FC236}">
-                <a16:creationId xmlns:a16="http://schemas.microsoft.com/office/drawing/2014/main" id="{86F864C3-E284-4387-9F69-DA0930A9D57B}"/>
+                <a16:creationId xmlns:a16="http://schemas.microsoft.com/office/drawing/2014/main" id="{A2FEBD98-0E74-4BD5-A044-8D966567EF85}"/>
               </a:ext>
             </a:extLst>
           </p:cNvPr>
@@ -10077,7 +10077,7 @@
           <p:cNvPr id="17" name="">
             <a:extLst xmlns:a="http://schemas.openxmlformats.org/drawingml/2006/main">
               <a:ext uri="{FF2B5EF4-FFF2-40B4-BE49-F238E27FC236}">
-                <a16:creationId xmlns:a16="http://schemas.microsoft.com/office/drawing/2014/main" id="{9BDDE790-0148-4898-88CF-B5FD1207807E}"/>
+                <a16:creationId xmlns:a16="http://schemas.microsoft.com/office/drawing/2014/main" id="{7D7E2CEA-4BAE-490B-B340-B101DEE8D19B}"/>
               </a:ext>
             </a:extLst>
           </p:cNvPr>
@@ -10110,7 +10110,7 @@
           <p:cNvPr id="18" name="">
             <a:extLst xmlns:a="http://schemas.openxmlformats.org/drawingml/2006/main">
               <a:ext uri="{FF2B5EF4-FFF2-40B4-BE49-F238E27FC236}">
-                <a16:creationId xmlns:a16="http://schemas.microsoft.com/office/drawing/2014/main" id="{99608F69-D998-430D-AA43-7B1107E8DFB3}"/>
+                <a16:creationId xmlns:a16="http://schemas.microsoft.com/office/drawing/2014/main" id="{F57AD614-AE98-4709-8D9B-CC69E2553D1D}"/>
               </a:ext>
             </a:extLst>
           </p:cNvPr>
@@ -10161,7 +10161,7 @@
           <p:cNvPr id="19" name="">
             <a:extLst xmlns:a="http://schemas.openxmlformats.org/drawingml/2006/main">
               <a:ext uri="{FF2B5EF4-FFF2-40B4-BE49-F238E27FC236}">
-                <a16:creationId xmlns:a16="http://schemas.microsoft.com/office/drawing/2014/main" id="{1B0C5DFB-6D33-4B22-9667-C9EC1713CD4D}"/>
+                <a16:creationId xmlns:a16="http://schemas.microsoft.com/office/drawing/2014/main" id="{1A359FB1-2307-4A04-909B-66CBFDDB4C05}"/>
               </a:ext>
             </a:extLst>
           </p:cNvPr>
@@ -10212,7 +10212,7 @@
           <p:cNvPr id="20" name="">
             <a:extLst xmlns:a="http://schemas.openxmlformats.org/drawingml/2006/main">
               <a:ext uri="{FF2B5EF4-FFF2-40B4-BE49-F238E27FC236}">
-                <a16:creationId xmlns:a16="http://schemas.microsoft.com/office/drawing/2014/main" id="{4856969F-30EA-4B57-84FC-678F2D506008}"/>
+                <a16:creationId xmlns:a16="http://schemas.microsoft.com/office/drawing/2014/main" id="{5EA5E2CC-BB30-496A-A5AD-82A17FB6FD09}"/>
               </a:ext>
             </a:extLst>
           </p:cNvPr>
@@ -10245,7 +10245,7 @@
           <p:cNvPr id="21" name="">
             <a:extLst xmlns:a="http://schemas.openxmlformats.org/drawingml/2006/main">
               <a:ext uri="{FF2B5EF4-FFF2-40B4-BE49-F238E27FC236}">
-                <a16:creationId xmlns:a16="http://schemas.microsoft.com/office/drawing/2014/main" id="{37A1AA7E-BB41-43C7-81C1-D5C55F02839E}"/>
+                <a16:creationId xmlns:a16="http://schemas.microsoft.com/office/drawing/2014/main" id="{02794E2B-65E9-4593-8E6C-ECDAA4BCF1AD}"/>
               </a:ext>
             </a:extLst>
           </p:cNvPr>
@@ -10278,7 +10278,7 @@
           <p:cNvPr id="22" name="">
             <a:extLst xmlns:a="http://schemas.openxmlformats.org/drawingml/2006/main">
               <a:ext uri="{FF2B5EF4-FFF2-40B4-BE49-F238E27FC236}">
-                <a16:creationId xmlns:a16="http://schemas.microsoft.com/office/drawing/2014/main" id="{54EEA548-FDB2-4B62-93D1-C99DD87E5838}"/>
+                <a16:creationId xmlns:a16="http://schemas.microsoft.com/office/drawing/2014/main" id="{24BA5F77-AF63-48B5-AA01-D5616B09AD24}"/>
               </a:ext>
             </a:extLst>
           </p:cNvPr>
@@ -10329,7 +10329,7 @@
           <p:cNvPr id="23" name="">
             <a:extLst xmlns:a="http://schemas.openxmlformats.org/drawingml/2006/main">
               <a:ext uri="{FF2B5EF4-FFF2-40B4-BE49-F238E27FC236}">
-                <a16:creationId xmlns:a16="http://schemas.microsoft.com/office/drawing/2014/main" id="{B9E258B4-6C5B-47BF-8D64-0FB992A23C8B}"/>
+                <a16:creationId xmlns:a16="http://schemas.microsoft.com/office/drawing/2014/main" id="{70627762-020C-4866-A09C-CF8CB84CC67B}"/>
               </a:ext>
             </a:extLst>
           </p:cNvPr>
@@ -10380,7 +10380,7 @@
           <p:cNvPr id="24" name="">
             <a:extLst xmlns:a="http://schemas.openxmlformats.org/drawingml/2006/main">
               <a:ext uri="{FF2B5EF4-FFF2-40B4-BE49-F238E27FC236}">
-                <a16:creationId xmlns:a16="http://schemas.microsoft.com/office/drawing/2014/main" id="{235587DF-60EF-48E5-95A7-F44882895873}"/>
+                <a16:creationId xmlns:a16="http://schemas.microsoft.com/office/drawing/2014/main" id="{EF693C70-A7E9-4260-9862-F148FF5A18FD}"/>
               </a:ext>
             </a:extLst>
           </p:cNvPr>
@@ -10413,7 +10413,7 @@
           <p:cNvPr id="25" name="">
             <a:extLst xmlns:a="http://schemas.openxmlformats.org/drawingml/2006/main">
               <a:ext uri="{FF2B5EF4-FFF2-40B4-BE49-F238E27FC236}">
-                <a16:creationId xmlns:a16="http://schemas.microsoft.com/office/drawing/2014/main" id="{A49E3ED9-EA30-4162-8374-06698CBEC84D}"/>
+                <a16:creationId xmlns:a16="http://schemas.microsoft.com/office/drawing/2014/main" id="{C2DA3AC6-1E80-4833-AEAE-5721A0F5E3A5}"/>
               </a:ext>
             </a:extLst>
           </p:cNvPr>
@@ -10446,7 +10446,7 @@
           <p:cNvPr id="26" name="">
             <a:extLst xmlns:a="http://schemas.openxmlformats.org/drawingml/2006/main">
               <a:ext uri="{FF2B5EF4-FFF2-40B4-BE49-F238E27FC236}">
-                <a16:creationId xmlns:a16="http://schemas.microsoft.com/office/drawing/2014/main" id="{A2E5AE06-B7CD-4812-B353-5DB5BD687311}"/>
+                <a16:creationId xmlns:a16="http://schemas.microsoft.com/office/drawing/2014/main" id="{7882C06B-3BC6-4F96-A380-3BEA8014BC3D}"/>
               </a:ext>
             </a:extLst>
           </p:cNvPr>
@@ -10497,7 +10497,7 @@
           <p:cNvPr id="27" name="">
             <a:extLst xmlns:a="http://schemas.openxmlformats.org/drawingml/2006/main">
               <a:ext uri="{FF2B5EF4-FFF2-40B4-BE49-F238E27FC236}">
-                <a16:creationId xmlns:a16="http://schemas.microsoft.com/office/drawing/2014/main" id="{FA944C3E-BDF7-4CA6-9178-E1827CBB34BD}"/>
+                <a16:creationId xmlns:a16="http://schemas.microsoft.com/office/drawing/2014/main" id="{E22AFB0E-8E3F-4173-AA35-A1B82596F33D}"/>
               </a:ext>
             </a:extLst>
           </p:cNvPr>
@@ -10548,7 +10548,7 @@
           <p:cNvPr id="28" name="">
             <a:extLst xmlns:a="http://schemas.openxmlformats.org/drawingml/2006/main">
               <a:ext uri="{FF2B5EF4-FFF2-40B4-BE49-F238E27FC236}">
-                <a16:creationId xmlns:a16="http://schemas.microsoft.com/office/drawing/2014/main" id="{CAD88CEC-B7E4-4F85-9A73-BF067405F171}"/>
+                <a16:creationId xmlns:a16="http://schemas.microsoft.com/office/drawing/2014/main" id="{D3126999-00E5-4043-B8D9-5EAD3980FA58}"/>
               </a:ext>
             </a:extLst>
           </p:cNvPr>
@@ -10599,7 +10599,7 @@
           <p:cNvPr id="29" name="">
             <a:extLst xmlns:a="http://schemas.openxmlformats.org/drawingml/2006/main">
               <a:ext uri="{FF2B5EF4-FFF2-40B4-BE49-F238E27FC236}">
-                <a16:creationId xmlns:a16="http://schemas.microsoft.com/office/drawing/2014/main" id="{F359EC9D-2329-4331-8539-E57AD1BDCABE}"/>
+                <a16:creationId xmlns:a16="http://schemas.microsoft.com/office/drawing/2014/main" id="{5580125C-C980-454D-9D98-AE9FC7AFC70E}"/>
               </a:ext>
             </a:extLst>
           </p:cNvPr>
@@ -10648,7 +10648,7 @@
     </p:spTree>
     <p:extLst>
       <p:ext uri="{BB962C8B-B14F-4D97-AF65-F5344CB8AC3E}">
-        <p14:creationId xmlns:p14="http://schemas.microsoft.com/office/powerpoint/2010/main" val="246501900"/>
+        <p14:creationId xmlns:p14="http://schemas.microsoft.com/office/powerpoint/2010/main" val="340009906"/>
       </p:ext>
     </p:extLst>
   </p:cSld>
@@ -10672,7 +10672,7 @@
           <p:cNvPr id="1" name="">
             <a:extLst xmlns:a="http://schemas.openxmlformats.org/drawingml/2006/main">
               <a:ext uri="{FF2B5EF4-FFF2-40B4-BE49-F238E27FC236}">
-                <a16:creationId xmlns:a16="http://schemas.microsoft.com/office/drawing/2014/main" id="{4AF70CFB-89BE-4EC5-9DF2-94D044F4A600}"/>
+                <a16:creationId xmlns:a16="http://schemas.microsoft.com/office/drawing/2014/main" id="{CF12BA3A-F61B-417C-8DBF-FD63978283BC}"/>
               </a:ext>
             </a:extLst>
           </p:cNvPr>
@@ -10705,7 +10705,7 @@
           <p:cNvPr id="2" name="">
             <a:extLst xmlns:a="http://schemas.openxmlformats.org/drawingml/2006/main">
               <a:ext uri="{FF2B5EF4-FFF2-40B4-BE49-F238E27FC236}">
-                <a16:creationId xmlns:a16="http://schemas.microsoft.com/office/drawing/2014/main" id="{C7185B00-0CDC-43D6-9BAB-2CE6CD849F42}"/>
+                <a16:creationId xmlns:a16="http://schemas.microsoft.com/office/drawing/2014/main" id="{3989EABD-131B-48C4-9DC4-694AD952764C}"/>
               </a:ext>
             </a:extLst>
           </p:cNvPr>
@@ -10742,7 +10742,7 @@
           <p:nvPr/>
         </p:nvPicPr>
         <p:blipFill>
-          <a:blip xmlns:r="http://schemas.openxmlformats.org/officeDocument/2006/relationships" xmlns:a="http://schemas.openxmlformats.org/drawingml/2006/main" r:embed="R85c1a5c1a1754a0a"/>
+          <a:blip xmlns:r="http://schemas.openxmlformats.org/officeDocument/2006/relationships" xmlns:a="http://schemas.openxmlformats.org/drawingml/2006/main" r:embed="R1168033db0ab4f59"/>
           <a:stretch xmlns:a="http://schemas.openxmlformats.org/drawingml/2006/main"/>
         </p:blipFill>
         <p:spPr>
@@ -10760,7 +10760,7 @@
           <p:cNvPr id="4" name="">
             <a:extLst xmlns:a="http://schemas.openxmlformats.org/drawingml/2006/main">
               <a:ext uri="{FF2B5EF4-FFF2-40B4-BE49-F238E27FC236}">
-                <a16:creationId xmlns:a16="http://schemas.microsoft.com/office/drawing/2014/main" id="{79192076-D2ED-4906-BBC4-10D9E3012B75}"/>
+                <a16:creationId xmlns:a16="http://schemas.microsoft.com/office/drawing/2014/main" id="{4C6B0C4A-2DFB-40BF-B6B0-387683D4BF80}"/>
               </a:ext>
             </a:extLst>
           </p:cNvPr>
@@ -10811,7 +10811,7 @@
           <p:cNvPr id="5" name="">
             <a:extLst xmlns:a="http://schemas.openxmlformats.org/drawingml/2006/main">
               <a:ext uri="{FF2B5EF4-FFF2-40B4-BE49-F238E27FC236}">
-                <a16:creationId xmlns:a16="http://schemas.microsoft.com/office/drawing/2014/main" id="{0575AFF9-B6DB-40FE-A885-66BC33FB8E48}"/>
+                <a16:creationId xmlns:a16="http://schemas.microsoft.com/office/drawing/2014/main" id="{313DA7B2-09D1-4427-A6E7-B66696621ED4}"/>
               </a:ext>
             </a:extLst>
           </p:cNvPr>
@@ -10862,7 +10862,7 @@
           <p:cNvPr id="6" name="">
             <a:extLst xmlns:a="http://schemas.openxmlformats.org/drawingml/2006/main">
               <a:ext uri="{FF2B5EF4-FFF2-40B4-BE49-F238E27FC236}">
-                <a16:creationId xmlns:a16="http://schemas.microsoft.com/office/drawing/2014/main" id="{D5BD4BCF-8BC9-4FA7-9775-83A518AB87C2}"/>
+                <a16:creationId xmlns:a16="http://schemas.microsoft.com/office/drawing/2014/main" id="{189E8764-92D4-4C70-979B-5952C2656447}"/>
               </a:ext>
             </a:extLst>
           </p:cNvPr>
@@ -10913,7 +10913,7 @@
           <p:cNvPr id="7" name="">
             <a:extLst xmlns:a="http://schemas.openxmlformats.org/drawingml/2006/main">
               <a:ext uri="{FF2B5EF4-FFF2-40B4-BE49-F238E27FC236}">
-                <a16:creationId xmlns:a16="http://schemas.microsoft.com/office/drawing/2014/main" id="{89F55AFD-C62F-413C-9D70-80A366E16636}"/>
+                <a16:creationId xmlns:a16="http://schemas.microsoft.com/office/drawing/2014/main" id="{C309F023-30CF-4F29-AAA3-32DE95575819}"/>
               </a:ext>
             </a:extLst>
           </p:cNvPr>
@@ -10946,7 +10946,7 @@
           <p:cNvPr id="8" name="">
             <a:extLst xmlns:a="http://schemas.openxmlformats.org/drawingml/2006/main">
               <a:ext uri="{FF2B5EF4-FFF2-40B4-BE49-F238E27FC236}">
-                <a16:creationId xmlns:a16="http://schemas.microsoft.com/office/drawing/2014/main" id="{9E1B1BD7-AED7-4206-A739-DC82F134C3F5}"/>
+                <a16:creationId xmlns:a16="http://schemas.microsoft.com/office/drawing/2014/main" id="{FF670EB0-8CE1-4CE8-A1B1-88356015B958}"/>
               </a:ext>
             </a:extLst>
           </p:cNvPr>
@@ -10979,7 +10979,7 @@
           <p:cNvPr id="9" name="">
             <a:extLst xmlns:a="http://schemas.openxmlformats.org/drawingml/2006/main">
               <a:ext uri="{FF2B5EF4-FFF2-40B4-BE49-F238E27FC236}">
-                <a16:creationId xmlns:a16="http://schemas.microsoft.com/office/drawing/2014/main" id="{EAE482F9-CCCC-46AA-A7AE-5B2C39DFC49E}"/>
+                <a16:creationId xmlns:a16="http://schemas.microsoft.com/office/drawing/2014/main" id="{9F0742E8-924D-4BB9-9F3A-74495DB78007}"/>
               </a:ext>
             </a:extLst>
           </p:cNvPr>
@@ -11030,7 +11030,7 @@
           <p:cNvPr id="10" name="">
             <a:extLst xmlns:a="http://schemas.openxmlformats.org/drawingml/2006/main">
               <a:ext uri="{FF2B5EF4-FFF2-40B4-BE49-F238E27FC236}">
-                <a16:creationId xmlns:a16="http://schemas.microsoft.com/office/drawing/2014/main" id="{309D37EA-BAAF-41E8-8AF5-2D2A2A8E6F58}"/>
+                <a16:creationId xmlns:a16="http://schemas.microsoft.com/office/drawing/2014/main" id="{20C730E6-8AA8-4756-8550-83CBF970D4AB}"/>
               </a:ext>
             </a:extLst>
           </p:cNvPr>
@@ -11081,7 +11081,7 @@
           <p:cNvPr id="11" name="">
             <a:extLst xmlns:a="http://schemas.openxmlformats.org/drawingml/2006/main">
               <a:ext uri="{FF2B5EF4-FFF2-40B4-BE49-F238E27FC236}">
-                <a16:creationId xmlns:a16="http://schemas.microsoft.com/office/drawing/2014/main" id="{1FBAE6C3-4135-40A2-8F6F-6E7F30573B22}"/>
+                <a16:creationId xmlns:a16="http://schemas.microsoft.com/office/drawing/2014/main" id="{8BA07855-6FB9-47A8-857C-599BC27C119D}"/>
               </a:ext>
             </a:extLst>
           </p:cNvPr>
@@ -11114,7 +11114,7 @@
           <p:cNvPr id="12" name="">
             <a:extLst xmlns:a="http://schemas.openxmlformats.org/drawingml/2006/main">
               <a:ext uri="{FF2B5EF4-FFF2-40B4-BE49-F238E27FC236}">
-                <a16:creationId xmlns:a16="http://schemas.microsoft.com/office/drawing/2014/main" id="{0C31786B-66D3-4AED-B817-3229B0A80090}"/>
+                <a16:creationId xmlns:a16="http://schemas.microsoft.com/office/drawing/2014/main" id="{1767A3EB-24E2-4E55-991E-85A11FC4E347}"/>
               </a:ext>
             </a:extLst>
           </p:cNvPr>
@@ -11147,7 +11147,7 @@
           <p:cNvPr id="13" name="">
             <a:extLst xmlns:a="http://schemas.openxmlformats.org/drawingml/2006/main">
               <a:ext uri="{FF2B5EF4-FFF2-40B4-BE49-F238E27FC236}">
-                <a16:creationId xmlns:a16="http://schemas.microsoft.com/office/drawing/2014/main" id="{BFF79351-1DE9-4E12-9683-C9F6B174FE6A}"/>
+                <a16:creationId xmlns:a16="http://schemas.microsoft.com/office/drawing/2014/main" id="{66C44F50-4A61-423B-9DE7-9DFEA6767914}"/>
               </a:ext>
             </a:extLst>
           </p:cNvPr>
@@ -11198,7 +11198,7 @@
           <p:cNvPr id="14" name="">
             <a:extLst xmlns:a="http://schemas.openxmlformats.org/drawingml/2006/main">
               <a:ext uri="{FF2B5EF4-FFF2-40B4-BE49-F238E27FC236}">
-                <a16:creationId xmlns:a16="http://schemas.microsoft.com/office/drawing/2014/main" id="{87FC0735-7B23-4153-BAAE-129121C9F5B0}"/>
+                <a16:creationId xmlns:a16="http://schemas.microsoft.com/office/drawing/2014/main" id="{C662F4CD-BF3C-4DFA-B4A6-9F24A73EEBD9}"/>
               </a:ext>
             </a:extLst>
           </p:cNvPr>
@@ -11249,7 +11249,7 @@
           <p:cNvPr id="15" name="">
             <a:extLst xmlns:a="http://schemas.openxmlformats.org/drawingml/2006/main">
               <a:ext uri="{FF2B5EF4-FFF2-40B4-BE49-F238E27FC236}">
-                <a16:creationId xmlns:a16="http://schemas.microsoft.com/office/drawing/2014/main" id="{7693937E-5629-4710-BD4E-B7752C978A0B}"/>
+                <a16:creationId xmlns:a16="http://schemas.microsoft.com/office/drawing/2014/main" id="{B0BC258D-825A-4EE1-A9E7-E568F76179CF}"/>
               </a:ext>
             </a:extLst>
           </p:cNvPr>
@@ -11282,7 +11282,7 @@
           <p:cNvPr id="16" name="">
             <a:extLst xmlns:a="http://schemas.openxmlformats.org/drawingml/2006/main">
               <a:ext uri="{FF2B5EF4-FFF2-40B4-BE49-F238E27FC236}">
-                <a16:creationId xmlns:a16="http://schemas.microsoft.com/office/drawing/2014/main" id="{46D5A2EE-CAC9-414F-B9C4-DFD4177707F9}"/>
+                <a16:creationId xmlns:a16="http://schemas.microsoft.com/office/drawing/2014/main" id="{9579F368-5922-452A-9F43-1B03D7348714}"/>
               </a:ext>
             </a:extLst>
           </p:cNvPr>
@@ -11315,7 +11315,7 @@
           <p:cNvPr id="17" name="">
             <a:extLst xmlns:a="http://schemas.openxmlformats.org/drawingml/2006/main">
               <a:ext uri="{FF2B5EF4-FFF2-40B4-BE49-F238E27FC236}">
-                <a16:creationId xmlns:a16="http://schemas.microsoft.com/office/drawing/2014/main" id="{0F2941DE-7B3F-46DC-8EB7-7D3372FBC79B}"/>
+                <a16:creationId xmlns:a16="http://schemas.microsoft.com/office/drawing/2014/main" id="{8D7C9AA1-D18A-4842-A9E3-367CE9A6A8FC}"/>
               </a:ext>
             </a:extLst>
           </p:cNvPr>
@@ -11366,7 +11366,7 @@
           <p:cNvPr id="18" name="">
             <a:extLst xmlns:a="http://schemas.openxmlformats.org/drawingml/2006/main">
               <a:ext uri="{FF2B5EF4-FFF2-40B4-BE49-F238E27FC236}">
-                <a16:creationId xmlns:a16="http://schemas.microsoft.com/office/drawing/2014/main" id="{2A803CC5-4144-496B-A22B-3878E466A107}"/>
+                <a16:creationId xmlns:a16="http://schemas.microsoft.com/office/drawing/2014/main" id="{71D4E199-41C3-4AA3-B615-7E250AEA7AA0}"/>
               </a:ext>
             </a:extLst>
           </p:cNvPr>
@@ -11417,7 +11417,7 @@
           <p:cNvPr id="19" name="">
             <a:extLst xmlns:a="http://schemas.openxmlformats.org/drawingml/2006/main">
               <a:ext uri="{FF2B5EF4-FFF2-40B4-BE49-F238E27FC236}">
-                <a16:creationId xmlns:a16="http://schemas.microsoft.com/office/drawing/2014/main" id="{002B469D-3BD0-4EBB-BD73-ED70C8349E33}"/>
+                <a16:creationId xmlns:a16="http://schemas.microsoft.com/office/drawing/2014/main" id="{7B930A9A-B56F-4397-8680-04694D9E4ADB}"/>
               </a:ext>
             </a:extLst>
           </p:cNvPr>
@@ -11468,7 +11468,7 @@
           <p:cNvPr id="20" name="">
             <a:extLst xmlns:a="http://schemas.openxmlformats.org/drawingml/2006/main">
               <a:ext uri="{FF2B5EF4-FFF2-40B4-BE49-F238E27FC236}">
-                <a16:creationId xmlns:a16="http://schemas.microsoft.com/office/drawing/2014/main" id="{FFC2781E-A18C-4172-830B-BE7B9AFDB467}"/>
+                <a16:creationId xmlns:a16="http://schemas.microsoft.com/office/drawing/2014/main" id="{10BFC484-5B04-4706-858A-AD7FEBD093AA}"/>
               </a:ext>
             </a:extLst>
           </p:cNvPr>
@@ -11517,7 +11517,7 @@
     </p:spTree>
     <p:extLst>
       <p:ext uri="{BB962C8B-B14F-4D97-AF65-F5344CB8AC3E}">
-        <p14:creationId xmlns:p14="http://schemas.microsoft.com/office/powerpoint/2010/main" val="180261459"/>
+        <p14:creationId xmlns:p14="http://schemas.microsoft.com/office/powerpoint/2010/main" val="472038161"/>
       </p:ext>
     </p:extLst>
   </p:cSld>
@@ -11541,7 +11541,7 @@
           <p:cNvPr id="1" name="">
             <a:extLst xmlns:a="http://schemas.openxmlformats.org/drawingml/2006/main">
               <a:ext uri="{FF2B5EF4-FFF2-40B4-BE49-F238E27FC236}">
-                <a16:creationId xmlns:a16="http://schemas.microsoft.com/office/drawing/2014/main" id="{9F9B4995-8EFF-4CAE-8968-D1D1F0104EAB}"/>
+                <a16:creationId xmlns:a16="http://schemas.microsoft.com/office/drawing/2014/main" id="{DDE9B8DE-6CFA-4693-91F7-26CDA8DE4C4A}"/>
               </a:ext>
             </a:extLst>
           </p:cNvPr>
@@ -11574,7 +11574,7 @@
           <p:cNvPr id="2" name="">
             <a:extLst xmlns:a="http://schemas.openxmlformats.org/drawingml/2006/main">
               <a:ext uri="{FF2B5EF4-FFF2-40B4-BE49-F238E27FC236}">
-                <a16:creationId xmlns:a16="http://schemas.microsoft.com/office/drawing/2014/main" id="{61C89D43-218D-45A9-A9F1-D5B3E4645C2B}"/>
+                <a16:creationId xmlns:a16="http://schemas.microsoft.com/office/drawing/2014/main" id="{A19200BC-7EC9-4DAD-979E-8311D30E3B9F}"/>
               </a:ext>
             </a:extLst>
           </p:cNvPr>
@@ -11625,7 +11625,7 @@
           <p:cNvPr id="3" name="">
             <a:extLst xmlns:a="http://schemas.openxmlformats.org/drawingml/2006/main">
               <a:ext uri="{FF2B5EF4-FFF2-40B4-BE49-F238E27FC236}">
-                <a16:creationId xmlns:a16="http://schemas.microsoft.com/office/drawing/2014/main" id="{7AAED509-B89C-4E11-A198-F36EA90B102B}"/>
+                <a16:creationId xmlns:a16="http://schemas.microsoft.com/office/drawing/2014/main" id="{5BB4DAB7-68E6-42A2-8B64-2C2A44E6683B}"/>
               </a:ext>
             </a:extLst>
           </p:cNvPr>
@@ -11676,7 +11676,7 @@
           <p:cNvPr id="4" name="">
             <a:extLst xmlns:a="http://schemas.openxmlformats.org/drawingml/2006/main">
               <a:ext uri="{FF2B5EF4-FFF2-40B4-BE49-F238E27FC236}">
-                <a16:creationId xmlns:a16="http://schemas.microsoft.com/office/drawing/2014/main" id="{C4D86E3E-913E-46C6-B6CD-E12EFAB092A9}"/>
+                <a16:creationId xmlns:a16="http://schemas.microsoft.com/office/drawing/2014/main" id="{633FD8C4-D696-4945-8DC6-0E3F7F20D4D5}"/>
               </a:ext>
             </a:extLst>
           </p:cNvPr>
@@ -11713,7 +11713,7 @@
           <p:nvPr/>
         </p:nvPicPr>
         <p:blipFill>
-          <a:blip xmlns:r="http://schemas.openxmlformats.org/officeDocument/2006/relationships" xmlns:a="http://schemas.openxmlformats.org/drawingml/2006/main" r:embed="R19b1ab2cb4aa40e1"/>
+          <a:blip xmlns:r="http://schemas.openxmlformats.org/officeDocument/2006/relationships" xmlns:a="http://schemas.openxmlformats.org/drawingml/2006/main" r:embed="Rab7d5a3b8fa7404c"/>
           <a:stretch xmlns:a="http://schemas.openxmlformats.org/drawingml/2006/main"/>
         </p:blipFill>
         <p:spPr>
@@ -11731,7 +11731,7 @@
           <p:cNvPr id="6" name="">
             <a:extLst xmlns:a="http://schemas.openxmlformats.org/drawingml/2006/main">
               <a:ext uri="{FF2B5EF4-FFF2-40B4-BE49-F238E27FC236}">
-                <a16:creationId xmlns:a16="http://schemas.microsoft.com/office/drawing/2014/main" id="{9ACCB194-BDCF-492B-B660-48192920A49C}"/>
+                <a16:creationId xmlns:a16="http://schemas.microsoft.com/office/drawing/2014/main" id="{763C9AD1-8BF4-4954-9C5B-587490F5FE00}"/>
               </a:ext>
             </a:extLst>
           </p:cNvPr>
@@ -11785,7 +11785,7 @@
           <p:cNvPr id="7" name="">
             <a:extLst xmlns:a="http://schemas.openxmlformats.org/drawingml/2006/main">
               <a:ext uri="{FF2B5EF4-FFF2-40B4-BE49-F238E27FC236}">
-                <a16:creationId xmlns:a16="http://schemas.microsoft.com/office/drawing/2014/main" id="{937DCE3D-2544-47F6-B532-CC5B916EF0BD}"/>
+                <a16:creationId xmlns:a16="http://schemas.microsoft.com/office/drawing/2014/main" id="{A2885075-1CDD-4C06-8499-07892961D100}"/>
               </a:ext>
             </a:extLst>
           </p:cNvPr>
@@ -11822,7 +11822,7 @@
           <p:nvPr/>
         </p:nvPicPr>
         <p:blipFill>
-          <a:blip xmlns:r="http://schemas.openxmlformats.org/officeDocument/2006/relationships" xmlns:a="http://schemas.openxmlformats.org/drawingml/2006/main" r:embed="R42f943d826c145e0"/>
+          <a:blip xmlns:r="http://schemas.openxmlformats.org/officeDocument/2006/relationships" xmlns:a="http://schemas.openxmlformats.org/drawingml/2006/main" r:embed="R73895721f8f04fd4"/>
           <a:stretch xmlns:a="http://schemas.openxmlformats.org/drawingml/2006/main"/>
         </p:blipFill>
         <p:spPr>
@@ -11840,7 +11840,7 @@
           <p:cNvPr id="9" name="">
             <a:extLst xmlns:a="http://schemas.openxmlformats.org/drawingml/2006/main">
               <a:ext uri="{FF2B5EF4-FFF2-40B4-BE49-F238E27FC236}">
-                <a16:creationId xmlns:a16="http://schemas.microsoft.com/office/drawing/2014/main" id="{014F8030-FF64-4931-B882-1E7C7C3D78B5}"/>
+                <a16:creationId xmlns:a16="http://schemas.microsoft.com/office/drawing/2014/main" id="{3EE68493-D5C0-459C-BA08-88E1B711475A}"/>
               </a:ext>
             </a:extLst>
           </p:cNvPr>
@@ -11894,7 +11894,7 @@
           <p:cNvPr id="10" name="">
             <a:extLst xmlns:a="http://schemas.openxmlformats.org/drawingml/2006/main">
               <a:ext uri="{FF2B5EF4-FFF2-40B4-BE49-F238E27FC236}">
-                <a16:creationId xmlns:a16="http://schemas.microsoft.com/office/drawing/2014/main" id="{4684AD23-7F1B-4F36-A4BD-FF0F1653956A}"/>
+                <a16:creationId xmlns:a16="http://schemas.microsoft.com/office/drawing/2014/main" id="{EE6616BD-8B44-49EF-817C-89820231E504}"/>
               </a:ext>
             </a:extLst>
           </p:cNvPr>
@@ -11931,7 +11931,7 @@
           <p:nvPr/>
         </p:nvPicPr>
         <p:blipFill>
-          <a:blip xmlns:r="http://schemas.openxmlformats.org/officeDocument/2006/relationships" xmlns:a="http://schemas.openxmlformats.org/drawingml/2006/main" r:embed="R1d054932e292464a"/>
+          <a:blip xmlns:r="http://schemas.openxmlformats.org/officeDocument/2006/relationships" xmlns:a="http://schemas.openxmlformats.org/drawingml/2006/main" r:embed="Rc69b734812994ef7"/>
           <a:stretch xmlns:a="http://schemas.openxmlformats.org/drawingml/2006/main"/>
         </p:blipFill>
         <p:spPr>
@@ -11949,7 +11949,7 @@
           <p:cNvPr id="12" name="">
             <a:extLst xmlns:a="http://schemas.openxmlformats.org/drawingml/2006/main">
               <a:ext uri="{FF2B5EF4-FFF2-40B4-BE49-F238E27FC236}">
-                <a16:creationId xmlns:a16="http://schemas.microsoft.com/office/drawing/2014/main" id="{433F8582-663B-4CB8-8CEB-11941937C1C4}"/>
+                <a16:creationId xmlns:a16="http://schemas.microsoft.com/office/drawing/2014/main" id="{28D9EDBC-CB9F-498C-9B0C-ED69E20DAFB1}"/>
               </a:ext>
             </a:extLst>
           </p:cNvPr>
@@ -12003,7 +12003,7 @@
           <p:cNvPr id="13" name="">
             <a:extLst xmlns:a="http://schemas.openxmlformats.org/drawingml/2006/main">
               <a:ext uri="{FF2B5EF4-FFF2-40B4-BE49-F238E27FC236}">
-                <a16:creationId xmlns:a16="http://schemas.microsoft.com/office/drawing/2014/main" id="{89001FD7-2B76-4079-885F-EFFE53F5B324}"/>
+                <a16:creationId xmlns:a16="http://schemas.microsoft.com/office/drawing/2014/main" id="{3DD7A25E-F7DC-4F8F-980D-AE0FB2C99294}"/>
               </a:ext>
             </a:extLst>
           </p:cNvPr>
@@ -12036,7 +12036,7 @@
           <p:cNvPr id="14" name="">
             <a:extLst xmlns:a="http://schemas.openxmlformats.org/drawingml/2006/main">
               <a:ext uri="{FF2B5EF4-FFF2-40B4-BE49-F238E27FC236}">
-                <a16:creationId xmlns:a16="http://schemas.microsoft.com/office/drawing/2014/main" id="{8F4BE3CC-A599-470C-A2D2-39406CC6D2E1}"/>
+                <a16:creationId xmlns:a16="http://schemas.microsoft.com/office/drawing/2014/main" id="{77322885-0841-4437-8B50-9A41F69C5CD8}"/>
               </a:ext>
             </a:extLst>
           </p:cNvPr>
@@ -12069,7 +12069,7 @@
           <p:cNvPr id="15" name="">
             <a:extLst xmlns:a="http://schemas.openxmlformats.org/drawingml/2006/main">
               <a:ext uri="{FF2B5EF4-FFF2-40B4-BE49-F238E27FC236}">
-                <a16:creationId xmlns:a16="http://schemas.microsoft.com/office/drawing/2014/main" id="{64D08B0E-FB5F-4B88-AB60-9CBB6069DD20}"/>
+                <a16:creationId xmlns:a16="http://schemas.microsoft.com/office/drawing/2014/main" id="{921A4DC9-26F1-4F73-A48F-DAE7A382E141}"/>
               </a:ext>
             </a:extLst>
           </p:cNvPr>
@@ -12120,7 +12120,7 @@
           <p:cNvPr id="16" name="">
             <a:extLst xmlns:a="http://schemas.openxmlformats.org/drawingml/2006/main">
               <a:ext uri="{FF2B5EF4-FFF2-40B4-BE49-F238E27FC236}">
-                <a16:creationId xmlns:a16="http://schemas.microsoft.com/office/drawing/2014/main" id="{7D07D9C4-E481-4516-96DB-0A371A235607}"/>
+                <a16:creationId xmlns:a16="http://schemas.microsoft.com/office/drawing/2014/main" id="{5D37C9CB-195E-4CD5-80DC-0087ED21C34F}"/>
               </a:ext>
             </a:extLst>
           </p:cNvPr>
@@ -12171,7 +12171,7 @@
           <p:cNvPr id="17" name="">
             <a:extLst xmlns:a="http://schemas.openxmlformats.org/drawingml/2006/main">
               <a:ext uri="{FF2B5EF4-FFF2-40B4-BE49-F238E27FC236}">
-                <a16:creationId xmlns:a16="http://schemas.microsoft.com/office/drawing/2014/main" id="{E29F7878-9BD9-4FA7-9228-2932035216EB}"/>
+                <a16:creationId xmlns:a16="http://schemas.microsoft.com/office/drawing/2014/main" id="{1AE4C86D-A431-493C-AD4A-662DDFF65298}"/>
               </a:ext>
             </a:extLst>
           </p:cNvPr>
@@ -12222,7 +12222,7 @@
           <p:cNvPr id="18" name="">
             <a:extLst xmlns:a="http://schemas.openxmlformats.org/drawingml/2006/main">
               <a:ext uri="{FF2B5EF4-FFF2-40B4-BE49-F238E27FC236}">
-                <a16:creationId xmlns:a16="http://schemas.microsoft.com/office/drawing/2014/main" id="{CA86778A-84D1-4992-9735-8E1F57BDCB9F}"/>
+                <a16:creationId xmlns:a16="http://schemas.microsoft.com/office/drawing/2014/main" id="{1EE1C2F9-3C78-4DDA-851D-5DDC31393DC0}"/>
               </a:ext>
             </a:extLst>
           </p:cNvPr>
@@ -12271,7 +12271,7 @@
     </p:spTree>
     <p:extLst>
       <p:ext uri="{BB962C8B-B14F-4D97-AF65-F5344CB8AC3E}">
-        <p14:creationId xmlns:p14="http://schemas.microsoft.com/office/powerpoint/2010/main" val="160018142"/>
+        <p14:creationId xmlns:p14="http://schemas.microsoft.com/office/powerpoint/2010/main" val="304864011"/>
       </p:ext>
     </p:extLst>
   </p:cSld>
@@ -12295,7 +12295,7 @@
           <p:cNvPr id="1" name="">
             <a:extLst xmlns:a="http://schemas.openxmlformats.org/drawingml/2006/main">
               <a:ext uri="{FF2B5EF4-FFF2-40B4-BE49-F238E27FC236}">
-                <a16:creationId xmlns:a16="http://schemas.microsoft.com/office/drawing/2014/main" id="{665270D2-8EAD-42DE-9C08-2719FC42C4FB}"/>
+                <a16:creationId xmlns:a16="http://schemas.microsoft.com/office/drawing/2014/main" id="{976B7B42-893B-4478-A9A3-2B06F13BF51D}"/>
               </a:ext>
             </a:extLst>
           </p:cNvPr>
@@ -12328,7 +12328,7 @@
           <p:cNvPr id="2" name="">
             <a:extLst xmlns:a="http://schemas.openxmlformats.org/drawingml/2006/main">
               <a:ext uri="{FF2B5EF4-FFF2-40B4-BE49-F238E27FC236}">
-                <a16:creationId xmlns:a16="http://schemas.microsoft.com/office/drawing/2014/main" id="{ED2A82C2-4468-4808-BC66-3032C5EB0D20}"/>
+                <a16:creationId xmlns:a16="http://schemas.microsoft.com/office/drawing/2014/main" id="{26238729-DA73-499C-8812-290D985716C0}"/>
               </a:ext>
             </a:extLst>
           </p:cNvPr>
@@ -12379,7 +12379,7 @@
           <p:cNvPr id="3" name="">
             <a:extLst xmlns:a="http://schemas.openxmlformats.org/drawingml/2006/main">
               <a:ext uri="{FF2B5EF4-FFF2-40B4-BE49-F238E27FC236}">
-                <a16:creationId xmlns:a16="http://schemas.microsoft.com/office/drawing/2014/main" id="{AB79B542-26B7-43A4-98CE-B0AE57579FC7}"/>
+                <a16:creationId xmlns:a16="http://schemas.microsoft.com/office/drawing/2014/main" id="{0BFC96CD-D5D3-45F7-97A7-CA9680EB270C}"/>
               </a:ext>
             </a:extLst>
           </p:cNvPr>
@@ -12430,7 +12430,7 @@
           <p:cNvPr id="4" name="">
             <a:extLst xmlns:a="http://schemas.openxmlformats.org/drawingml/2006/main">
               <a:ext uri="{FF2B5EF4-FFF2-40B4-BE49-F238E27FC236}">
-                <a16:creationId xmlns:a16="http://schemas.microsoft.com/office/drawing/2014/main" id="{0F2B0570-C4FD-4591-8E1E-DEDCBBCB1DD1}"/>
+                <a16:creationId xmlns:a16="http://schemas.microsoft.com/office/drawing/2014/main" id="{26D9FE4F-F8AC-4749-AE3E-A67CC0D2D578}"/>
               </a:ext>
             </a:extLst>
           </p:cNvPr>
@@ -12481,7 +12481,7 @@
           <p:cNvPr id="5" name="">
             <a:extLst xmlns:a="http://schemas.openxmlformats.org/drawingml/2006/main">
               <a:ext uri="{FF2B5EF4-FFF2-40B4-BE49-F238E27FC236}">
-                <a16:creationId xmlns:a16="http://schemas.microsoft.com/office/drawing/2014/main" id="{DE49C676-8216-4FB4-8BB3-4312B79E95CE}"/>
+                <a16:creationId xmlns:a16="http://schemas.microsoft.com/office/drawing/2014/main" id="{356EA5F2-5133-4A52-B854-B7124FF74889}"/>
               </a:ext>
             </a:extLst>
           </p:cNvPr>
@@ -12514,7 +12514,7 @@
           <p:cNvPr id="6" name="">
             <a:extLst xmlns:a="http://schemas.openxmlformats.org/drawingml/2006/main">
               <a:ext uri="{FF2B5EF4-FFF2-40B4-BE49-F238E27FC236}">
-                <a16:creationId xmlns:a16="http://schemas.microsoft.com/office/drawing/2014/main" id="{579CF70A-211D-431B-92AF-434B897AA46C}"/>
+                <a16:creationId xmlns:a16="http://schemas.microsoft.com/office/drawing/2014/main" id="{C7C9C6D9-1788-49C5-AD36-45A8E776C9D9}"/>
               </a:ext>
             </a:extLst>
           </p:cNvPr>
@@ -12547,7 +12547,7 @@
           <p:cNvPr id="7" name="">
             <a:extLst xmlns:a="http://schemas.openxmlformats.org/drawingml/2006/main">
               <a:ext uri="{FF2B5EF4-FFF2-40B4-BE49-F238E27FC236}">
-                <a16:creationId xmlns:a16="http://schemas.microsoft.com/office/drawing/2014/main" id="{A6E9765A-34C6-4B08-ABC1-6A1237AEEFDF}"/>
+                <a16:creationId xmlns:a16="http://schemas.microsoft.com/office/drawing/2014/main" id="{CD014308-5418-4679-8F01-D75121CCA48A}"/>
               </a:ext>
             </a:extLst>
           </p:cNvPr>
@@ -12598,7 +12598,7 @@
           <p:cNvPr id="8" name="">
             <a:extLst xmlns:a="http://schemas.openxmlformats.org/drawingml/2006/main">
               <a:ext uri="{FF2B5EF4-FFF2-40B4-BE49-F238E27FC236}">
-                <a16:creationId xmlns:a16="http://schemas.microsoft.com/office/drawing/2014/main" id="{0CB3DA27-2AC7-4706-9E68-E8D7D4D9FAF0}"/>
+                <a16:creationId xmlns:a16="http://schemas.microsoft.com/office/drawing/2014/main" id="{26EEF1CA-67F7-4AB1-9869-E9ADE338DAC6}"/>
               </a:ext>
             </a:extLst>
           </p:cNvPr>
@@ -12649,7 +12649,7 @@
           <p:cNvPr id="9" name="">
             <a:extLst xmlns:a="http://schemas.openxmlformats.org/drawingml/2006/main">
               <a:ext uri="{FF2B5EF4-FFF2-40B4-BE49-F238E27FC236}">
-                <a16:creationId xmlns:a16="http://schemas.microsoft.com/office/drawing/2014/main" id="{AFDD7751-B6B5-4CAF-80F4-88E5005C57DF}"/>
+                <a16:creationId xmlns:a16="http://schemas.microsoft.com/office/drawing/2014/main" id="{0B4CACE4-F4A5-4B16-8A2B-C00F509E5DEA}"/>
               </a:ext>
             </a:extLst>
           </p:cNvPr>
@@ -12682,7 +12682,7 @@
           <p:cNvPr id="10" name="">
             <a:extLst xmlns:a="http://schemas.openxmlformats.org/drawingml/2006/main">
               <a:ext uri="{FF2B5EF4-FFF2-40B4-BE49-F238E27FC236}">
-                <a16:creationId xmlns:a16="http://schemas.microsoft.com/office/drawing/2014/main" id="{32899306-509A-42D4-B3A9-69240F6B8D11}"/>
+                <a16:creationId xmlns:a16="http://schemas.microsoft.com/office/drawing/2014/main" id="{9FD6A189-F935-4C1E-A396-98E3922D9282}"/>
               </a:ext>
             </a:extLst>
           </p:cNvPr>
@@ -12715,7 +12715,7 @@
           <p:cNvPr id="11" name="">
             <a:extLst xmlns:a="http://schemas.openxmlformats.org/drawingml/2006/main">
               <a:ext uri="{FF2B5EF4-FFF2-40B4-BE49-F238E27FC236}">
-                <a16:creationId xmlns:a16="http://schemas.microsoft.com/office/drawing/2014/main" id="{BA059FAB-4786-4D02-BCD7-8447654F3625}"/>
+                <a16:creationId xmlns:a16="http://schemas.microsoft.com/office/drawing/2014/main" id="{2504C3F0-9F36-4B4B-8F18-E14B87DED964}"/>
               </a:ext>
             </a:extLst>
           </p:cNvPr>
@@ -12766,7 +12766,7 @@
           <p:cNvPr id="12" name="">
             <a:extLst xmlns:a="http://schemas.openxmlformats.org/drawingml/2006/main">
               <a:ext uri="{FF2B5EF4-FFF2-40B4-BE49-F238E27FC236}">
-                <a16:creationId xmlns:a16="http://schemas.microsoft.com/office/drawing/2014/main" id="{F913F497-D0D7-41ED-AE11-802F01456B1E}"/>
+                <a16:creationId xmlns:a16="http://schemas.microsoft.com/office/drawing/2014/main" id="{DE43D0F8-B1A4-4815-9FDD-A0B58CF04C30}"/>
               </a:ext>
             </a:extLst>
           </p:cNvPr>
@@ -12817,7 +12817,7 @@
           <p:cNvPr id="13" name="">
             <a:extLst xmlns:a="http://schemas.openxmlformats.org/drawingml/2006/main">
               <a:ext uri="{FF2B5EF4-FFF2-40B4-BE49-F238E27FC236}">
-                <a16:creationId xmlns:a16="http://schemas.microsoft.com/office/drawing/2014/main" id="{BD9BCB69-3C97-454D-BFA0-B8D44D5A1C01}"/>
+                <a16:creationId xmlns:a16="http://schemas.microsoft.com/office/drawing/2014/main" id="{6E4EA5DC-D6A6-447E-95E1-FD30AD082F9A}"/>
               </a:ext>
             </a:extLst>
           </p:cNvPr>
@@ -12850,7 +12850,7 @@
           <p:cNvPr id="14" name="">
             <a:extLst xmlns:a="http://schemas.openxmlformats.org/drawingml/2006/main">
               <a:ext uri="{FF2B5EF4-FFF2-40B4-BE49-F238E27FC236}">
-                <a16:creationId xmlns:a16="http://schemas.microsoft.com/office/drawing/2014/main" id="{33AF1B78-37D2-46F4-8458-ED334B195337}"/>
+                <a16:creationId xmlns:a16="http://schemas.microsoft.com/office/drawing/2014/main" id="{6ADF6671-7BD9-4D06-B782-D6362093B412}"/>
               </a:ext>
             </a:extLst>
           </p:cNvPr>
@@ -12883,7 +12883,7 @@
           <p:cNvPr id="15" name="">
             <a:extLst xmlns:a="http://schemas.openxmlformats.org/drawingml/2006/main">
               <a:ext uri="{FF2B5EF4-FFF2-40B4-BE49-F238E27FC236}">
-                <a16:creationId xmlns:a16="http://schemas.microsoft.com/office/drawing/2014/main" id="{9B826E26-58E5-4323-8BE8-7CB4A8411D75}"/>
+                <a16:creationId xmlns:a16="http://schemas.microsoft.com/office/drawing/2014/main" id="{3579934E-4A1B-41B0-A374-3D035257678F}"/>
               </a:ext>
             </a:extLst>
           </p:cNvPr>
@@ -12934,7 +12934,7 @@
           <p:cNvPr id="16" name="">
             <a:extLst xmlns:a="http://schemas.openxmlformats.org/drawingml/2006/main">
               <a:ext uri="{FF2B5EF4-FFF2-40B4-BE49-F238E27FC236}">
-                <a16:creationId xmlns:a16="http://schemas.microsoft.com/office/drawing/2014/main" id="{64D09C05-FC33-416D-8CBC-C35F691F538B}"/>
+                <a16:creationId xmlns:a16="http://schemas.microsoft.com/office/drawing/2014/main" id="{1F415F0E-1507-4F1E-9126-962796D28B4C}"/>
               </a:ext>
             </a:extLst>
           </p:cNvPr>
@@ -12985,7 +12985,7 @@
           <p:cNvPr id="17" name="">
             <a:extLst xmlns:a="http://schemas.openxmlformats.org/drawingml/2006/main">
               <a:ext uri="{FF2B5EF4-FFF2-40B4-BE49-F238E27FC236}">
-                <a16:creationId xmlns:a16="http://schemas.microsoft.com/office/drawing/2014/main" id="{28AAA87D-D2DE-4187-AB1B-0D6209480EC6}"/>
+                <a16:creationId xmlns:a16="http://schemas.microsoft.com/office/drawing/2014/main" id="{12DB4E91-CD6F-4B84-B438-46B19CBEF3ED}"/>
               </a:ext>
             </a:extLst>
           </p:cNvPr>
@@ -13018,7 +13018,7 @@
           <p:cNvPr id="18" name="">
             <a:extLst xmlns:a="http://schemas.openxmlformats.org/drawingml/2006/main">
               <a:ext uri="{FF2B5EF4-FFF2-40B4-BE49-F238E27FC236}">
-                <a16:creationId xmlns:a16="http://schemas.microsoft.com/office/drawing/2014/main" id="{1EC25C4B-9149-4F9A-AE96-AB96F829ABF6}"/>
+                <a16:creationId xmlns:a16="http://schemas.microsoft.com/office/drawing/2014/main" id="{1D296103-7A8C-4D26-8B72-E7650CF0AFC7}"/>
               </a:ext>
             </a:extLst>
           </p:cNvPr>
@@ -13051,7 +13051,7 @@
           <p:cNvPr id="19" name="">
             <a:extLst xmlns:a="http://schemas.openxmlformats.org/drawingml/2006/main">
               <a:ext uri="{FF2B5EF4-FFF2-40B4-BE49-F238E27FC236}">
-                <a16:creationId xmlns:a16="http://schemas.microsoft.com/office/drawing/2014/main" id="{85B1EC40-F759-47B6-9C71-92E42F13B8A2}"/>
+                <a16:creationId xmlns:a16="http://schemas.microsoft.com/office/drawing/2014/main" id="{DE9403E6-4C2E-452B-9088-915B17C2359C}"/>
               </a:ext>
             </a:extLst>
           </p:cNvPr>
@@ -13102,7 +13102,7 @@
           <p:cNvPr id="20" name="">
             <a:extLst xmlns:a="http://schemas.openxmlformats.org/drawingml/2006/main">
               <a:ext uri="{FF2B5EF4-FFF2-40B4-BE49-F238E27FC236}">
-                <a16:creationId xmlns:a16="http://schemas.microsoft.com/office/drawing/2014/main" id="{241D26EA-51D6-460E-B258-861352DC9A47}"/>
+                <a16:creationId xmlns:a16="http://schemas.microsoft.com/office/drawing/2014/main" id="{2DCAB117-C3FF-446E-8D07-054729B2B09D}"/>
               </a:ext>
             </a:extLst>
           </p:cNvPr>
@@ -13153,7 +13153,7 @@
           <p:cNvPr id="21" name="">
             <a:extLst xmlns:a="http://schemas.openxmlformats.org/drawingml/2006/main">
               <a:ext uri="{FF2B5EF4-FFF2-40B4-BE49-F238E27FC236}">
-                <a16:creationId xmlns:a16="http://schemas.microsoft.com/office/drawing/2014/main" id="{7F36EFC5-2FF5-448A-9346-D44E15EB35ED}"/>
+                <a16:creationId xmlns:a16="http://schemas.microsoft.com/office/drawing/2014/main" id="{1CF8EBA0-3C9C-4D1D-AD27-C88672E12313}"/>
               </a:ext>
             </a:extLst>
           </p:cNvPr>
@@ -13186,7 +13186,7 @@
           <p:cNvPr id="22" name="">
             <a:extLst xmlns:a="http://schemas.openxmlformats.org/drawingml/2006/main">
               <a:ext uri="{FF2B5EF4-FFF2-40B4-BE49-F238E27FC236}">
-                <a16:creationId xmlns:a16="http://schemas.microsoft.com/office/drawing/2014/main" id="{713A4C02-18EA-4C55-8C52-23D12414DC7F}"/>
+                <a16:creationId xmlns:a16="http://schemas.microsoft.com/office/drawing/2014/main" id="{678F4A76-1C87-49E5-840D-4CEA9B8F5973}"/>
               </a:ext>
             </a:extLst>
           </p:cNvPr>
@@ -13219,7 +13219,7 @@
           <p:cNvPr id="23" name="">
             <a:extLst xmlns:a="http://schemas.openxmlformats.org/drawingml/2006/main">
               <a:ext uri="{FF2B5EF4-FFF2-40B4-BE49-F238E27FC236}">
-                <a16:creationId xmlns:a16="http://schemas.microsoft.com/office/drawing/2014/main" id="{1D4C4383-DFEE-4335-92FE-E4759FAB6D7F}"/>
+                <a16:creationId xmlns:a16="http://schemas.microsoft.com/office/drawing/2014/main" id="{035CC17D-7B7A-4558-A3FD-F998DA8723DE}"/>
               </a:ext>
             </a:extLst>
           </p:cNvPr>
@@ -13270,7 +13270,7 @@
           <p:cNvPr id="24" name="">
             <a:extLst xmlns:a="http://schemas.openxmlformats.org/drawingml/2006/main">
               <a:ext uri="{FF2B5EF4-FFF2-40B4-BE49-F238E27FC236}">
-                <a16:creationId xmlns:a16="http://schemas.microsoft.com/office/drawing/2014/main" id="{94960AC2-D3C8-4253-8B79-00BEB6985AB3}"/>
+                <a16:creationId xmlns:a16="http://schemas.microsoft.com/office/drawing/2014/main" id="{FBEBDBA6-BA63-48EB-BC97-F72AE8A5771B}"/>
               </a:ext>
             </a:extLst>
           </p:cNvPr>
@@ -13321,7 +13321,7 @@
           <p:cNvPr id="25" name="">
             <a:extLst xmlns:a="http://schemas.openxmlformats.org/drawingml/2006/main">
               <a:ext uri="{FF2B5EF4-FFF2-40B4-BE49-F238E27FC236}">
-                <a16:creationId xmlns:a16="http://schemas.microsoft.com/office/drawing/2014/main" id="{D0B266BB-90C4-4E23-9E77-C606AC47D6AC}"/>
+                <a16:creationId xmlns:a16="http://schemas.microsoft.com/office/drawing/2014/main" id="{837D88B1-08E8-4AB9-9A37-140F85F33565}"/>
               </a:ext>
             </a:extLst>
           </p:cNvPr>
@@ -13354,7 +13354,7 @@
           <p:cNvPr id="26" name="">
             <a:extLst xmlns:a="http://schemas.openxmlformats.org/drawingml/2006/main">
               <a:ext uri="{FF2B5EF4-FFF2-40B4-BE49-F238E27FC236}">
-                <a16:creationId xmlns:a16="http://schemas.microsoft.com/office/drawing/2014/main" id="{45385A67-694A-4F07-A6E3-C5D6BD47555D}"/>
+                <a16:creationId xmlns:a16="http://schemas.microsoft.com/office/drawing/2014/main" id="{4B18D66C-C8AF-46B7-B958-FE616B46C750}"/>
               </a:ext>
             </a:extLst>
           </p:cNvPr>
@@ -13387,7 +13387,7 @@
           <p:cNvPr id="27" name="">
             <a:extLst xmlns:a="http://schemas.openxmlformats.org/drawingml/2006/main">
               <a:ext uri="{FF2B5EF4-FFF2-40B4-BE49-F238E27FC236}">
-                <a16:creationId xmlns:a16="http://schemas.microsoft.com/office/drawing/2014/main" id="{151F53B0-7AFB-46AA-B284-732EB5854902}"/>
+                <a16:creationId xmlns:a16="http://schemas.microsoft.com/office/drawing/2014/main" id="{58FE21A8-024F-415C-875F-CBA4423C19EE}"/>
               </a:ext>
             </a:extLst>
           </p:cNvPr>
@@ -13438,7 +13438,7 @@
           <p:cNvPr id="28" name="">
             <a:extLst xmlns:a="http://schemas.openxmlformats.org/drawingml/2006/main">
               <a:ext uri="{FF2B5EF4-FFF2-40B4-BE49-F238E27FC236}">
-                <a16:creationId xmlns:a16="http://schemas.microsoft.com/office/drawing/2014/main" id="{FA5D5E79-8587-4579-8261-A1549D68DA3A}"/>
+                <a16:creationId xmlns:a16="http://schemas.microsoft.com/office/drawing/2014/main" id="{31042DF2-CEEA-4525-A3D8-E3F1789184E3}"/>
               </a:ext>
             </a:extLst>
           </p:cNvPr>
@@ -13489,7 +13489,7 @@
           <p:cNvPr id="29" name="">
             <a:extLst xmlns:a="http://schemas.openxmlformats.org/drawingml/2006/main">
               <a:ext uri="{FF2B5EF4-FFF2-40B4-BE49-F238E27FC236}">
-                <a16:creationId xmlns:a16="http://schemas.microsoft.com/office/drawing/2014/main" id="{FC7C6FC9-B5D4-44B3-B9E8-C633C4E928B7}"/>
+                <a16:creationId xmlns:a16="http://schemas.microsoft.com/office/drawing/2014/main" id="{306385B9-D538-47EF-AAC4-05F68E0496A5}"/>
               </a:ext>
             </a:extLst>
           </p:cNvPr>
@@ -13540,7 +13540,7 @@
           <p:cNvPr id="30" name="">
             <a:extLst xmlns:a="http://schemas.openxmlformats.org/drawingml/2006/main">
               <a:ext uri="{FF2B5EF4-FFF2-40B4-BE49-F238E27FC236}">
-                <a16:creationId xmlns:a16="http://schemas.microsoft.com/office/drawing/2014/main" id="{ECA9EDDD-6BC7-481D-9307-5AD93AC913C1}"/>
+                <a16:creationId xmlns:a16="http://schemas.microsoft.com/office/drawing/2014/main" id="{C19E73E3-C09E-4512-8778-0D353C547FB0}"/>
               </a:ext>
             </a:extLst>
           </p:cNvPr>
@@ -13589,7 +13589,7 @@
     </p:spTree>
     <p:extLst>
       <p:ext uri="{BB962C8B-B14F-4D97-AF65-F5344CB8AC3E}">
-        <p14:creationId xmlns:p14="http://schemas.microsoft.com/office/powerpoint/2010/main" val="534653633"/>
+        <p14:creationId xmlns:p14="http://schemas.microsoft.com/office/powerpoint/2010/main" val="294305864"/>
       </p:ext>
     </p:extLst>
   </p:cSld>
@@ -13613,7 +13613,7 @@
           <p:cNvPr id="1" name="">
             <a:extLst xmlns:a="http://schemas.openxmlformats.org/drawingml/2006/main">
               <a:ext uri="{FF2B5EF4-FFF2-40B4-BE49-F238E27FC236}">
-                <a16:creationId xmlns:a16="http://schemas.microsoft.com/office/drawing/2014/main" id="{27F61793-E149-42BA-A856-162C34B5C8AA}"/>
+                <a16:creationId xmlns:a16="http://schemas.microsoft.com/office/drawing/2014/main" id="{3FBC0981-88EE-4F0B-ADC5-C3B697690E82}"/>
               </a:ext>
             </a:extLst>
           </p:cNvPr>
@@ -13646,7 +13646,7 @@
           <p:cNvPr id="2" name="">
             <a:extLst xmlns:a="http://schemas.openxmlformats.org/drawingml/2006/main">
               <a:ext uri="{FF2B5EF4-FFF2-40B4-BE49-F238E27FC236}">
-                <a16:creationId xmlns:a16="http://schemas.microsoft.com/office/drawing/2014/main" id="{253C06E6-73C8-4B55-AE3C-AC1008D30A67}"/>
+                <a16:creationId xmlns:a16="http://schemas.microsoft.com/office/drawing/2014/main" id="{5264E9FD-4F85-4FB6-9F24-A41C9F7899E9}"/>
               </a:ext>
             </a:extLst>
           </p:cNvPr>
@@ -13697,7 +13697,7 @@
           <p:cNvPr id="3" name="">
             <a:extLst xmlns:a="http://schemas.openxmlformats.org/drawingml/2006/main">
               <a:ext uri="{FF2B5EF4-FFF2-40B4-BE49-F238E27FC236}">
-                <a16:creationId xmlns:a16="http://schemas.microsoft.com/office/drawing/2014/main" id="{ECF6DEC2-9423-4259-BB97-1DCDF90A7B06}"/>
+                <a16:creationId xmlns:a16="http://schemas.microsoft.com/office/drawing/2014/main" id="{EC0E1055-754A-4CC7-B689-FE7C7CF3AEBF}"/>
               </a:ext>
             </a:extLst>
           </p:cNvPr>
@@ -13748,7 +13748,7 @@
           <p:cNvPr id="4" name="">
             <a:extLst xmlns:a="http://schemas.openxmlformats.org/drawingml/2006/main">
               <a:ext uri="{FF2B5EF4-FFF2-40B4-BE49-F238E27FC236}">
-                <a16:creationId xmlns:a16="http://schemas.microsoft.com/office/drawing/2014/main" id="{DDF76618-6273-4069-B4F1-D2E034F67846}"/>
+                <a16:creationId xmlns:a16="http://schemas.microsoft.com/office/drawing/2014/main" id="{D90E2217-C256-422A-8FDD-909902F67798}"/>
               </a:ext>
             </a:extLst>
           </p:cNvPr>
@@ -13781,7 +13781,7 @@
           <p:cNvPr id="5" name="">
             <a:extLst xmlns:a="http://schemas.openxmlformats.org/drawingml/2006/main">
               <a:ext uri="{FF2B5EF4-FFF2-40B4-BE49-F238E27FC236}">
-                <a16:creationId xmlns:a16="http://schemas.microsoft.com/office/drawing/2014/main" id="{4791A540-A161-428B-852E-07B52264A652}"/>
+                <a16:creationId xmlns:a16="http://schemas.microsoft.com/office/drawing/2014/main" id="{4A6BB60A-18B6-4D2D-AF1E-B45F5B1E011F}"/>
               </a:ext>
             </a:extLst>
           </p:cNvPr>
@@ -13832,7 +13832,7 @@
           <p:cNvPr id="6" name="">
             <a:extLst xmlns:a="http://schemas.openxmlformats.org/drawingml/2006/main">
               <a:ext uri="{FF2B5EF4-FFF2-40B4-BE49-F238E27FC236}">
-                <a16:creationId xmlns:a16="http://schemas.microsoft.com/office/drawing/2014/main" id="{479B3E7D-33F3-45CB-9DD5-68145C5EC668}"/>
+                <a16:creationId xmlns:a16="http://schemas.microsoft.com/office/drawing/2014/main" id="{5810F5C2-29D8-43FB-8B27-89F18C8EA569}"/>
               </a:ext>
             </a:extLst>
           </p:cNvPr>
@@ -13883,7 +13883,7 @@
           <p:cNvPr id="7" name="">
             <a:extLst xmlns:a="http://schemas.openxmlformats.org/drawingml/2006/main">
               <a:ext uri="{FF2B5EF4-FFF2-40B4-BE49-F238E27FC236}">
-                <a16:creationId xmlns:a16="http://schemas.microsoft.com/office/drawing/2014/main" id="{0A7E8D56-1CC2-4934-A1C6-57273B42D0B8}"/>
+                <a16:creationId xmlns:a16="http://schemas.microsoft.com/office/drawing/2014/main" id="{8492C475-DF23-4EB2-8E05-244968272D6B}"/>
               </a:ext>
             </a:extLst>
           </p:cNvPr>
@@ -13951,7 +13951,7 @@
           <p:cNvPr id="8" name="">
             <a:extLst xmlns:a="http://schemas.openxmlformats.org/drawingml/2006/main">
               <a:ext uri="{FF2B5EF4-FFF2-40B4-BE49-F238E27FC236}">
-                <a16:creationId xmlns:a16="http://schemas.microsoft.com/office/drawing/2014/main" id="{4ABA853F-D678-4482-A7BB-316553B4D74F}"/>
+                <a16:creationId xmlns:a16="http://schemas.microsoft.com/office/drawing/2014/main" id="{81106C79-E75E-4FC0-AFA6-34A8A0999329}"/>
               </a:ext>
             </a:extLst>
           </p:cNvPr>
@@ -13984,7 +13984,7 @@
           <p:cNvPr id="9" name="">
             <a:extLst xmlns:a="http://schemas.openxmlformats.org/drawingml/2006/main">
               <a:ext uri="{FF2B5EF4-FFF2-40B4-BE49-F238E27FC236}">
-                <a16:creationId xmlns:a16="http://schemas.microsoft.com/office/drawing/2014/main" id="{2E3B6FDC-8D40-4FC1-9A40-336AECEACE2D}"/>
+                <a16:creationId xmlns:a16="http://schemas.microsoft.com/office/drawing/2014/main" id="{076508FB-C22C-438F-B4FE-F870FB2C4122}"/>
               </a:ext>
             </a:extLst>
           </p:cNvPr>
@@ -14017,7 +14017,7 @@
           <p:cNvPr id="10" name="">
             <a:extLst xmlns:a="http://schemas.openxmlformats.org/drawingml/2006/main">
               <a:ext uri="{FF2B5EF4-FFF2-40B4-BE49-F238E27FC236}">
-                <a16:creationId xmlns:a16="http://schemas.microsoft.com/office/drawing/2014/main" id="{5A243526-FCC7-4908-BFB7-CB0907EB8C8E}"/>
+                <a16:creationId xmlns:a16="http://schemas.microsoft.com/office/drawing/2014/main" id="{9A1CACE4-139F-4194-A375-8D5521BA424B}"/>
               </a:ext>
             </a:extLst>
           </p:cNvPr>
@@ -14068,7 +14068,7 @@
           <p:cNvPr id="11" name="">
             <a:extLst xmlns:a="http://schemas.openxmlformats.org/drawingml/2006/main">
               <a:ext uri="{FF2B5EF4-FFF2-40B4-BE49-F238E27FC236}">
-                <a16:creationId xmlns:a16="http://schemas.microsoft.com/office/drawing/2014/main" id="{140CBD18-3FC5-4057-AB41-8BC074D9E645}"/>
+                <a16:creationId xmlns:a16="http://schemas.microsoft.com/office/drawing/2014/main" id="{2A43D9C3-76AE-4F8E-BFFE-E472DD3E2EB6}"/>
               </a:ext>
             </a:extLst>
           </p:cNvPr>
@@ -14119,7 +14119,7 @@
           <p:cNvPr id="12" name="">
             <a:extLst xmlns:a="http://schemas.openxmlformats.org/drawingml/2006/main">
               <a:ext uri="{FF2B5EF4-FFF2-40B4-BE49-F238E27FC236}">
-                <a16:creationId xmlns:a16="http://schemas.microsoft.com/office/drawing/2014/main" id="{CF261170-A4D4-4718-AAE5-5CFF01458E85}"/>
+                <a16:creationId xmlns:a16="http://schemas.microsoft.com/office/drawing/2014/main" id="{0ED22929-85AB-4FA3-B946-CB2E22329748}"/>
               </a:ext>
             </a:extLst>
           </p:cNvPr>
@@ -14152,7 +14152,7 @@
           <p:cNvPr id="13" name="">
             <a:extLst xmlns:a="http://schemas.openxmlformats.org/drawingml/2006/main">
               <a:ext uri="{FF2B5EF4-FFF2-40B4-BE49-F238E27FC236}">
-                <a16:creationId xmlns:a16="http://schemas.microsoft.com/office/drawing/2014/main" id="{65051D35-45EA-4A3A-A194-43902C70EE78}"/>
+                <a16:creationId xmlns:a16="http://schemas.microsoft.com/office/drawing/2014/main" id="{B17A3EFF-2811-423A-87B3-B044D5203CCF}"/>
               </a:ext>
             </a:extLst>
           </p:cNvPr>
@@ -14185,7 +14185,7 @@
           <p:cNvPr id="14" name="">
             <a:extLst xmlns:a="http://schemas.openxmlformats.org/drawingml/2006/main">
               <a:ext uri="{FF2B5EF4-FFF2-40B4-BE49-F238E27FC236}">
-                <a16:creationId xmlns:a16="http://schemas.microsoft.com/office/drawing/2014/main" id="{FEB30712-57F1-403F-B527-84B7C778083E}"/>
+                <a16:creationId xmlns:a16="http://schemas.microsoft.com/office/drawing/2014/main" id="{F4071771-CB63-41EB-999C-284261955807}"/>
               </a:ext>
             </a:extLst>
           </p:cNvPr>
@@ -14236,7 +14236,7 @@
           <p:cNvPr id="15" name="">
             <a:extLst xmlns:a="http://schemas.openxmlformats.org/drawingml/2006/main">
               <a:ext uri="{FF2B5EF4-FFF2-40B4-BE49-F238E27FC236}">
-                <a16:creationId xmlns:a16="http://schemas.microsoft.com/office/drawing/2014/main" id="{86014307-724C-4525-9693-1CDDB3252059}"/>
+                <a16:creationId xmlns:a16="http://schemas.microsoft.com/office/drawing/2014/main" id="{CA09BF96-1D70-4C07-BA55-F15B579007BB}"/>
               </a:ext>
             </a:extLst>
           </p:cNvPr>
@@ -14287,7 +14287,7 @@
           <p:cNvPr id="16" name="">
             <a:extLst xmlns:a="http://schemas.openxmlformats.org/drawingml/2006/main">
               <a:ext uri="{FF2B5EF4-FFF2-40B4-BE49-F238E27FC236}">
-                <a16:creationId xmlns:a16="http://schemas.microsoft.com/office/drawing/2014/main" id="{889D0680-2753-4083-9CFC-3005AB5D7AC8}"/>
+                <a16:creationId xmlns:a16="http://schemas.microsoft.com/office/drawing/2014/main" id="{74A504FF-81D7-49B7-9C4C-A34F79999431}"/>
               </a:ext>
             </a:extLst>
           </p:cNvPr>
@@ -14320,7 +14320,7 @@
           <p:cNvPr id="17" name="">
             <a:extLst xmlns:a="http://schemas.openxmlformats.org/drawingml/2006/main">
               <a:ext uri="{FF2B5EF4-FFF2-40B4-BE49-F238E27FC236}">
-                <a16:creationId xmlns:a16="http://schemas.microsoft.com/office/drawing/2014/main" id="{D5A56D9D-ED4F-49E8-A832-AA98CA46DC84}"/>
+                <a16:creationId xmlns:a16="http://schemas.microsoft.com/office/drawing/2014/main" id="{C2F535C8-4916-4672-97D8-FE9D86B46CC5}"/>
               </a:ext>
             </a:extLst>
           </p:cNvPr>
@@ -14353,7 +14353,7 @@
           <p:cNvPr id="18" name="">
             <a:extLst xmlns:a="http://schemas.openxmlformats.org/drawingml/2006/main">
               <a:ext uri="{FF2B5EF4-FFF2-40B4-BE49-F238E27FC236}">
-                <a16:creationId xmlns:a16="http://schemas.microsoft.com/office/drawing/2014/main" id="{887B2A94-B23A-44B8-B1C7-0C2B2EFDE197}"/>
+                <a16:creationId xmlns:a16="http://schemas.microsoft.com/office/drawing/2014/main" id="{AE96DE3E-69EC-4F3D-8CD6-977C8AB833FD}"/>
               </a:ext>
             </a:extLst>
           </p:cNvPr>
@@ -14404,7 +14404,7 @@
           <p:cNvPr id="19" name="">
             <a:extLst xmlns:a="http://schemas.openxmlformats.org/drawingml/2006/main">
               <a:ext uri="{FF2B5EF4-FFF2-40B4-BE49-F238E27FC236}">
-                <a16:creationId xmlns:a16="http://schemas.microsoft.com/office/drawing/2014/main" id="{EE94F31D-BD8E-4502-98A5-256FE125FC39}"/>
+                <a16:creationId xmlns:a16="http://schemas.microsoft.com/office/drawing/2014/main" id="{02A2AD99-5B77-48EE-B6D7-D556288C0289}"/>
               </a:ext>
             </a:extLst>
           </p:cNvPr>
@@ -14445,7 +14445,7 @@
                   <a:srgbClr val="5F6F86"/>
                 </a:solidFill>
               </a:rPr>
-              <a:t>The ledger, A/R, A/P, registers, job costing, statements, recurring, bank rec, period close, and invoice/bill/statement PDFs are already built. This phase tailors and rolls them out for Raves.</a:t>
+              <a:t>The ledger, A/R, A/P, registers, job costing, statements, recurring, period close, and invoice/bill/statement PDFs are already built. This phase tailors and rolls them out for Raves.</a:t>
             </a:r>
           </a:p>
         </p:txBody>
@@ -14455,7 +14455,7 @@
           <p:cNvPr id="20" name="">
             <a:extLst xmlns:a="http://schemas.openxmlformats.org/drawingml/2006/main">
               <a:ext uri="{FF2B5EF4-FFF2-40B4-BE49-F238E27FC236}">
-                <a16:creationId xmlns:a16="http://schemas.microsoft.com/office/drawing/2014/main" id="{FDDEE929-D5B7-46BE-9F5A-2F94F2AE84DF}"/>
+                <a16:creationId xmlns:a16="http://schemas.microsoft.com/office/drawing/2014/main" id="{EC0BCDCF-63DA-43C1-86C0-05C77834E634}"/>
               </a:ext>
             </a:extLst>
           </p:cNvPr>
@@ -14506,7 +14506,7 @@
           <p:cNvPr id="21" name="">
             <a:extLst xmlns:a="http://schemas.openxmlformats.org/drawingml/2006/main">
               <a:ext uri="{FF2B5EF4-FFF2-40B4-BE49-F238E27FC236}">
-                <a16:creationId xmlns:a16="http://schemas.microsoft.com/office/drawing/2014/main" id="{1DA10B0B-4E3A-4969-BA9D-D0E6FB18A6E4}"/>
+                <a16:creationId xmlns:a16="http://schemas.microsoft.com/office/drawing/2014/main" id="{42426524-1564-45A7-ADA2-FFC847C8ECD2}"/>
               </a:ext>
             </a:extLst>
           </p:cNvPr>
@@ -14555,7 +14555,7 @@
     </p:spTree>
     <p:extLst>
       <p:ext uri="{BB962C8B-B14F-4D97-AF65-F5344CB8AC3E}">
-        <p14:creationId xmlns:p14="http://schemas.microsoft.com/office/powerpoint/2010/main" val="1425087874"/>
+        <p14:creationId xmlns:p14="http://schemas.microsoft.com/office/powerpoint/2010/main" val="1826309866"/>
       </p:ext>
     </p:extLst>
   </p:cSld>

--- a/docs/Blueprint Books Pitch Deck - Raves.pptx
+++ b/docs/Blueprint Books Pitch Deck - Raves.pptx
@@ -2,22 +2,23 @@
 <file path=ppt/presentation.xml><?xml version="1.0" encoding="utf-8"?>
 <p:presentation xmlns:p="http://schemas.openxmlformats.org/presentationml/2006/main">
   <p:sldMasterIdLst>
-    <p:sldMasterId xmlns:r="http://schemas.openxmlformats.org/officeDocument/2006/relationships" id="2147483648" r:id="Rf14e05ef57b24e9c"/>
+    <p:sldMasterId xmlns:r="http://schemas.openxmlformats.org/officeDocument/2006/relationships" id="2147483648" r:id="Rf29e60e7b698424f"/>
   </p:sldMasterIdLst>
   <p:notesMasterIdLst>
-    <p:notesMasterId xmlns:r="http://schemas.openxmlformats.org/officeDocument/2006/relationships" r:id="R317b44486bf04c72"/>
+    <p:notesMasterId xmlns:r="http://schemas.openxmlformats.org/officeDocument/2006/relationships" r:id="R946f091c9c34431f"/>
   </p:notesMasterIdLst>
   <p:sldIdLst>
-    <p:sldId xmlns:r="http://schemas.openxmlformats.org/officeDocument/2006/relationships" id="256" r:id="Raaedf9bd2e694423"/>
-    <p:sldId xmlns:r="http://schemas.openxmlformats.org/officeDocument/2006/relationships" id="257" r:id="R9d1d038ce5844c80"/>
-    <p:sldId xmlns:r="http://schemas.openxmlformats.org/officeDocument/2006/relationships" id="258" r:id="Rc2733e4a7d7949a5"/>
-    <p:sldId xmlns:r="http://schemas.openxmlformats.org/officeDocument/2006/relationships" id="259" r:id="R0f1c4cef95ea4960"/>
-    <p:sldId xmlns:r="http://schemas.openxmlformats.org/officeDocument/2006/relationships" id="260" r:id="R346ef0355caa42e1"/>
-    <p:sldId xmlns:r="http://schemas.openxmlformats.org/officeDocument/2006/relationships" id="261" r:id="R284466f0c2364cc7"/>
-    <p:sldId xmlns:r="http://schemas.openxmlformats.org/officeDocument/2006/relationships" id="262" r:id="R46c88fd8ff7b4916"/>
-    <p:sldId xmlns:r="http://schemas.openxmlformats.org/officeDocument/2006/relationships" id="263" r:id="R2fa291400b4f4e3c"/>
-    <p:sldId xmlns:r="http://schemas.openxmlformats.org/officeDocument/2006/relationships" id="264" r:id="R69943f9468484923"/>
-    <p:sldId xmlns:r="http://schemas.openxmlformats.org/officeDocument/2006/relationships" id="265" r:id="R878ed77bdc024aa6"/>
+    <p:sldId xmlns:r="http://schemas.openxmlformats.org/officeDocument/2006/relationships" id="256" r:id="Rc801782da9da4e42"/>
+    <p:sldId xmlns:r="http://schemas.openxmlformats.org/officeDocument/2006/relationships" id="257" r:id="R5dee284de5bf4083"/>
+    <p:sldId xmlns:r="http://schemas.openxmlformats.org/officeDocument/2006/relationships" id="258" r:id="R368875123b0741d8"/>
+    <p:sldId xmlns:r="http://schemas.openxmlformats.org/officeDocument/2006/relationships" id="259" r:id="Rde4e71d65d404fcd"/>
+    <p:sldId xmlns:r="http://schemas.openxmlformats.org/officeDocument/2006/relationships" id="260" r:id="R276081a658174008"/>
+    <p:sldId xmlns:r="http://schemas.openxmlformats.org/officeDocument/2006/relationships" id="261" r:id="R747f89d6a7784cfe"/>
+    <p:sldId xmlns:r="http://schemas.openxmlformats.org/officeDocument/2006/relationships" id="262" r:id="R96c96a8516df43ab"/>
+    <p:sldId xmlns:r="http://schemas.openxmlformats.org/officeDocument/2006/relationships" id="263" r:id="R648fdcc727b24c51"/>
+    <p:sldId xmlns:r="http://schemas.openxmlformats.org/officeDocument/2006/relationships" id="264" r:id="R1e5933d333f34896"/>
+    <p:sldId xmlns:r="http://schemas.openxmlformats.org/officeDocument/2006/relationships" id="265" r:id="Rdf0bf97610734d96"/>
+    <p:sldId xmlns:r="http://schemas.openxmlformats.org/officeDocument/2006/relationships" id="266" r:id="R21461f808aa84350"/>
   </p:sldIdLst>
   <p:sldSz cx="12192000" cy="6858000"/>
   <p:notesSz cx="6858000" cy="9144000"/>
@@ -592,6 +593,72 @@
 </p:notes>
 </file>
 
+<file path=ppt/notesSlides/notesSlide11.xml><?xml version="1.0" encoding="utf-8"?>
+<p:notes xmlns:p="http://schemas.openxmlformats.org/presentationml/2006/main">
+  <p:cSld>
+    <p:spTree>
+      <p:nvGrpSpPr>
+        <p:cNvPr id="1" name=""/>
+        <p:cNvGrpSpPr/>
+        <p:nvPr/>
+      </p:nvGrpSpPr>
+      <p:grpSpPr>
+        <a:xfrm xmlns:a="http://schemas.openxmlformats.org/drawingml/2006/main"/>
+      </p:grpSpPr>
+      <p:sp>
+        <p:nvSpPr>
+          <p:cNvPr id="2" name="Slide Image Placeholder 1"/>
+          <p:cNvSpPr>
+            <a:spLocks xmlns:a="http://schemas.openxmlformats.org/drawingml/2006/main" noGrp="1"/>
+          </p:cNvSpPr>
+          <p:nvPr>
+            <p:ph type="sldImg" idx="0"/>
+          </p:nvPr>
+        </p:nvSpPr>
+        <p:spPr/>
+      </p:sp>
+      <p:sp>
+        <p:nvSpPr>
+          <p:cNvPr id="3" name="Notes Placeholder 2"/>
+          <p:cNvSpPr>
+            <a:spLocks xmlns:a="http://schemas.openxmlformats.org/drawingml/2006/main" noGrp="1"/>
+          </p:cNvSpPr>
+          <p:nvPr>
+            <p:ph type="body" idx="1"/>
+          </p:nvPr>
+        </p:nvSpPr>
+        <p:spPr/>
+        <p:txBody>
+          <a:bodyPr xmlns:a="http://schemas.openxmlformats.org/drawingml/2006/main"/>
+          <a:lstStyle xmlns:a="http://schemas.openxmlformats.org/drawingml/2006/main"/>
+          <a:p xmlns:a="http://schemas.openxmlformats.org/drawingml/2006/main"/>
+        </p:txBody>
+      </p:sp>
+      <p:sp>
+        <p:nvSpPr>
+          <p:cNvPr id="4" name="Slide Number Placeholder 3"/>
+          <p:cNvSpPr>
+            <a:spLocks xmlns:a="http://schemas.openxmlformats.org/drawingml/2006/main" noGrp="1"/>
+          </p:cNvSpPr>
+          <p:nvPr>
+            <p:ph type="sldNum" idx="5"/>
+          </p:nvPr>
+        </p:nvSpPr>
+        <p:spPr/>
+        <p:txBody>
+          <a:bodyPr xmlns:a="http://schemas.openxmlformats.org/drawingml/2006/main"/>
+          <a:lstStyle xmlns:a="http://schemas.openxmlformats.org/drawingml/2006/main"/>
+          <a:p xmlns:a="http://schemas.openxmlformats.org/drawingml/2006/main"/>
+        </p:txBody>
+      </p:sp>
+    </p:spTree>
+  </p:cSld>
+  <p:clrMapOvr>
+    <a:masterClrMapping xmlns:a="http://schemas.openxmlformats.org/drawingml/2006/main"/>
+  </p:clrMapOvr>
+</p:notes>
+</file>
+
 <file path=ppt/notesSlides/notesSlide2.xml><?xml version="1.0" encoding="utf-8"?>
 <p:notes xmlns:p="http://schemas.openxmlformats.org/presentationml/2006/main">
   <p:cSld>
@@ -1158,7 +1225,7 @@
   </p:cSld>
   <p:clrMap bg1="lt1" tx1="dk1" bg2="lt2" tx2="dk2" accent1="accent1" accent2="accent2" accent3="accent3" accent4="accent4" accent5="accent5" accent6="accent6" hlink="hlink" folHlink="folHlink"/>
   <p:sldLayoutIdLst>
-    <p:sldLayoutId xmlns:r="http://schemas.openxmlformats.org/officeDocument/2006/relationships" id="2147483649" r:id="R54f0412992c249d9"/>
+    <p:sldLayoutId xmlns:r="http://schemas.openxmlformats.org/officeDocument/2006/relationships" id="2147483649" r:id="R6c63ba5815d44f81"/>
   </p:sldLayoutIdLst>
   <p:txStyles>
     <p:titleStyle>
@@ -1656,7 +1723,7 @@
           <p:cNvPr id="1" name="">
             <a:extLst xmlns:a="http://schemas.openxmlformats.org/drawingml/2006/main">
               <a:ext uri="{FF2B5EF4-FFF2-40B4-BE49-F238E27FC236}">
-                <a16:creationId xmlns:a16="http://schemas.microsoft.com/office/drawing/2014/main" id="{3B9F8291-6C4D-4F42-8DFA-A7575E06C5DA}"/>
+                <a16:creationId xmlns:a16="http://schemas.microsoft.com/office/drawing/2014/main" id="{29E37280-3131-4CAE-AABE-E78A8F1A0550}"/>
               </a:ext>
             </a:extLst>
           </p:cNvPr>
@@ -1689,7 +1756,7 @@
           <p:cNvPr id="2" name="">
             <a:extLst xmlns:a="http://schemas.openxmlformats.org/drawingml/2006/main">
               <a:ext uri="{FF2B5EF4-FFF2-40B4-BE49-F238E27FC236}">
-                <a16:creationId xmlns:a16="http://schemas.microsoft.com/office/drawing/2014/main" id="{D13F3B9B-4EC5-4FC3-9162-1C7AB97C9CE2}"/>
+                <a16:creationId xmlns:a16="http://schemas.microsoft.com/office/drawing/2014/main" id="{45872626-CA4C-43DC-9AFD-4F9C89838CEB}"/>
               </a:ext>
             </a:extLst>
           </p:cNvPr>
@@ -1722,7 +1789,7 @@
           <p:cNvPr id="3" name="">
             <a:extLst xmlns:a="http://schemas.openxmlformats.org/drawingml/2006/main">
               <a:ext uri="{FF2B5EF4-FFF2-40B4-BE49-F238E27FC236}">
-                <a16:creationId xmlns:a16="http://schemas.microsoft.com/office/drawing/2014/main" id="{F275A4B9-3FE2-43E5-A2DC-C3C05D25A552}"/>
+                <a16:creationId xmlns:a16="http://schemas.microsoft.com/office/drawing/2014/main" id="{4C088F5D-AE64-4D47-87F7-C400A8B349E9}"/>
               </a:ext>
             </a:extLst>
           </p:cNvPr>
@@ -1773,7 +1840,7 @@
           <p:cNvPr id="4" name="">
             <a:extLst xmlns:a="http://schemas.openxmlformats.org/drawingml/2006/main">
               <a:ext uri="{FF2B5EF4-FFF2-40B4-BE49-F238E27FC236}">
-                <a16:creationId xmlns:a16="http://schemas.microsoft.com/office/drawing/2014/main" id="{F220A291-98B0-4B15-9E16-952EFE1B35C3}"/>
+                <a16:creationId xmlns:a16="http://schemas.microsoft.com/office/drawing/2014/main" id="{2B110531-C83B-4F8F-A924-A5B053B9F93F}"/>
               </a:ext>
             </a:extLst>
           </p:cNvPr>
@@ -1824,7 +1891,7 @@
           <p:cNvPr id="5" name="">
             <a:extLst xmlns:a="http://schemas.openxmlformats.org/drawingml/2006/main">
               <a:ext uri="{FF2B5EF4-FFF2-40B4-BE49-F238E27FC236}">
-                <a16:creationId xmlns:a16="http://schemas.microsoft.com/office/drawing/2014/main" id="{8192E29E-2922-4662-BBD6-7A9203DDED46}"/>
+                <a16:creationId xmlns:a16="http://schemas.microsoft.com/office/drawing/2014/main" id="{03949C35-5B0A-44D1-B180-548991365548}"/>
               </a:ext>
             </a:extLst>
           </p:cNvPr>
@@ -1875,7 +1942,7 @@
           <p:cNvPr id="6" name="">
             <a:extLst xmlns:a="http://schemas.openxmlformats.org/drawingml/2006/main">
               <a:ext uri="{FF2B5EF4-FFF2-40B4-BE49-F238E27FC236}">
-                <a16:creationId xmlns:a16="http://schemas.microsoft.com/office/drawing/2014/main" id="{223F0F60-DCCF-40F0-BD75-C948D5CE31A2}"/>
+                <a16:creationId xmlns:a16="http://schemas.microsoft.com/office/drawing/2014/main" id="{9B2698EF-2BE4-4197-A3ED-2CE8C0A44971}"/>
               </a:ext>
             </a:extLst>
           </p:cNvPr>
@@ -1926,7 +1993,7 @@
           <p:cNvPr id="7" name="">
             <a:extLst xmlns:a="http://schemas.openxmlformats.org/drawingml/2006/main">
               <a:ext uri="{FF2B5EF4-FFF2-40B4-BE49-F238E27FC236}">
-                <a16:creationId xmlns:a16="http://schemas.microsoft.com/office/drawing/2014/main" id="{C3E76F3B-7285-43CC-A1E4-64A5430443DC}"/>
+                <a16:creationId xmlns:a16="http://schemas.microsoft.com/office/drawing/2014/main" id="{2711CA28-F20A-41FE-874E-7DE0DC1B627E}"/>
               </a:ext>
             </a:extLst>
           </p:cNvPr>
@@ -1977,7 +2044,7 @@
           <p:cNvPr id="8" name="">
             <a:extLst xmlns:a="http://schemas.openxmlformats.org/drawingml/2006/main">
               <a:ext uri="{FF2B5EF4-FFF2-40B4-BE49-F238E27FC236}">
-                <a16:creationId xmlns:a16="http://schemas.microsoft.com/office/drawing/2014/main" id="{51964169-3356-4BA4-AC30-D72912C74EF9}"/>
+                <a16:creationId xmlns:a16="http://schemas.microsoft.com/office/drawing/2014/main" id="{B2FD66F7-E455-4D80-A293-D80D4F19D2E5}"/>
               </a:ext>
             </a:extLst>
           </p:cNvPr>
@@ -2028,7 +2095,7 @@
           <p:cNvPr id="9" name="">
             <a:extLst xmlns:a="http://schemas.openxmlformats.org/drawingml/2006/main">
               <a:ext uri="{FF2B5EF4-FFF2-40B4-BE49-F238E27FC236}">
-                <a16:creationId xmlns:a16="http://schemas.microsoft.com/office/drawing/2014/main" id="{0E83E2E7-5A0C-4C2D-B0E8-A5F3A8B565B0}"/>
+                <a16:creationId xmlns:a16="http://schemas.microsoft.com/office/drawing/2014/main" id="{4F9C790B-3A12-4CD0-8C3B-860974827CAF}"/>
               </a:ext>
             </a:extLst>
           </p:cNvPr>
@@ -2061,7 +2128,7 @@
           <p:cNvPr id="10" name="">
             <a:extLst xmlns:a="http://schemas.openxmlformats.org/drawingml/2006/main">
               <a:ext uri="{FF2B5EF4-FFF2-40B4-BE49-F238E27FC236}">
-                <a16:creationId xmlns:a16="http://schemas.microsoft.com/office/drawing/2014/main" id="{F059EF2C-5304-4CDF-8FE2-B664732ED4D3}"/>
+                <a16:creationId xmlns:a16="http://schemas.microsoft.com/office/drawing/2014/main" id="{5C5F98DA-C039-48AF-BD2B-9881A4102FD0}"/>
               </a:ext>
             </a:extLst>
           </p:cNvPr>
@@ -2112,7 +2179,7 @@
           <p:cNvPr id="11" name="">
             <a:extLst xmlns:a="http://schemas.openxmlformats.org/drawingml/2006/main">
               <a:ext uri="{FF2B5EF4-FFF2-40B4-BE49-F238E27FC236}">
-                <a16:creationId xmlns:a16="http://schemas.microsoft.com/office/drawing/2014/main" id="{D610AC3D-87E9-472B-8B1F-0FE7CA4AB185}"/>
+                <a16:creationId xmlns:a16="http://schemas.microsoft.com/office/drawing/2014/main" id="{76FC7697-9681-4238-A8D6-FA0356D2E581}"/>
               </a:ext>
             </a:extLst>
           </p:cNvPr>
@@ -2180,7 +2247,7 @@
           <p:cNvPr id="12" name="">
             <a:extLst xmlns:a="http://schemas.openxmlformats.org/drawingml/2006/main">
               <a:ext uri="{FF2B5EF4-FFF2-40B4-BE49-F238E27FC236}">
-                <a16:creationId xmlns:a16="http://schemas.microsoft.com/office/drawing/2014/main" id="{D9A253BF-89CA-4CD5-A318-B99355CB9587}"/>
+                <a16:creationId xmlns:a16="http://schemas.microsoft.com/office/drawing/2014/main" id="{1307EF2B-ED9C-4FC4-8C4E-18997F296B4C}"/>
               </a:ext>
             </a:extLst>
           </p:cNvPr>
@@ -2231,7 +2298,7 @@
           <p:cNvPr id="13" name="">
             <a:extLst xmlns:a="http://schemas.openxmlformats.org/drawingml/2006/main">
               <a:ext uri="{FF2B5EF4-FFF2-40B4-BE49-F238E27FC236}">
-                <a16:creationId xmlns:a16="http://schemas.microsoft.com/office/drawing/2014/main" id="{6B7BDD24-D21B-4D47-937B-5402193CCB4E}"/>
+                <a16:creationId xmlns:a16="http://schemas.microsoft.com/office/drawing/2014/main" id="{370D8DC5-C028-45D8-82B1-DE7686C167A4}"/>
               </a:ext>
             </a:extLst>
           </p:cNvPr>
@@ -2280,7 +2347,7 @@
     </p:spTree>
     <p:extLst>
       <p:ext uri="{BB962C8B-B14F-4D97-AF65-F5344CB8AC3E}">
-        <p14:creationId xmlns:p14="http://schemas.microsoft.com/office/powerpoint/2010/main" val="1338770391"/>
+        <p14:creationId xmlns:p14="http://schemas.microsoft.com/office/powerpoint/2010/main" val="1854565988"/>
       </p:ext>
     </p:extLst>
   </p:cSld>
@@ -2304,7 +2371,1565 @@
           <p:cNvPr id="1" name="">
             <a:extLst xmlns:a="http://schemas.openxmlformats.org/drawingml/2006/main">
               <a:ext uri="{FF2B5EF4-FFF2-40B4-BE49-F238E27FC236}">
-                <a16:creationId xmlns:a16="http://schemas.microsoft.com/office/drawing/2014/main" id="{C5F884DE-79B9-4747-B690-4BA111EB178E}"/>
+                <a16:creationId xmlns:a16="http://schemas.microsoft.com/office/drawing/2014/main" id="{64EA4308-4647-4F8D-A95F-559DEE42E8AF}"/>
+              </a:ext>
+            </a:extLst>
+          </p:cNvPr>
+          <p:cNvSpPr>
+            <a:spLocks xmlns:a="http://schemas.openxmlformats.org/drawingml/2006/main" noGrp="1"/>
+          </p:cNvSpPr>
+          <p:nvPr/>
+        </p:nvSpPr>
+        <p:spPr>
+          <a:xfrm xmlns:a="http://schemas.openxmlformats.org/drawingml/2006/main">
+            <a:off x="0" y="0"/>
+            <a:ext cx="12192000" cy="6858000"/>
+          </a:xfrm>
+          <a:prstGeom xmlns:a="http://schemas.openxmlformats.org/drawingml/2006/main" prst="rect">
+            <a:avLst/>
+          </a:prstGeom>
+          <a:solidFill xmlns:a="http://schemas.openxmlformats.org/drawingml/2006/main">
+            <a:srgbClr val="F5F8FC"/>
+          </a:solidFill>
+          <a:ln xmlns:a="http://schemas.openxmlformats.org/drawingml/2006/main" w="0">
+            <a:solidFill>
+              <a:srgbClr val="F5F8FC"/>
+            </a:solidFill>
+            <a:prstDash val="solid"/>
+          </a:ln>
+        </p:spPr>
+      </p:sp>
+      <p:sp>
+        <p:nvSpPr>
+          <p:cNvPr id="2" name="">
+            <a:extLst xmlns:a="http://schemas.openxmlformats.org/drawingml/2006/main">
+              <a:ext uri="{FF2B5EF4-FFF2-40B4-BE49-F238E27FC236}">
+                <a16:creationId xmlns:a16="http://schemas.microsoft.com/office/drawing/2014/main" id="{8910A232-E92C-4FAD-B51F-907F6B295CC8}"/>
+              </a:ext>
+            </a:extLst>
+          </p:cNvPr>
+          <p:cNvSpPr>
+            <a:spLocks xmlns:a="http://schemas.openxmlformats.org/drawingml/2006/main" noGrp="1"/>
+          </p:cNvSpPr>
+          <p:nvPr/>
+        </p:nvSpPr>
+        <p:spPr>
+          <a:xfrm xmlns:a="http://schemas.openxmlformats.org/drawingml/2006/main">
+            <a:off x="685800" y="457200"/>
+            <a:ext cx="7048500" cy="285750"/>
+          </a:xfrm>
+          <a:prstGeom xmlns:a="http://schemas.openxmlformats.org/drawingml/2006/main" prst="rect">
+            <a:avLst/>
+          </a:prstGeom>
+          <a:ln xmlns:a="http://schemas.openxmlformats.org/drawingml/2006/main" w="0">
+            <a:solidFill>
+              <a:srgbClr val="FFFFFF"/>
+            </a:solidFill>
+            <a:prstDash val="solid"/>
+          </a:ln>
+        </p:spPr>
+        <p:txBody>
+          <a:bodyPr xmlns:a="http://schemas.openxmlformats.org/drawingml/2006/main" anchor="t"/>
+          <a:lstStyle xmlns:a="http://schemas.openxmlformats.org/drawingml/2006/main"/>
+          <a:p xmlns:a="http://schemas.openxmlformats.org/drawingml/2006/main">
+            <a:pPr algn="l">
+              <a:defRPr sz="1050" b="1">
+                <a:solidFill>
+                  <a:srgbClr val="5F6F86"/>
+                </a:solidFill>
+              </a:defRPr>
+            </a:pPr>
+            <a:r>
+              <a:rPr sz="1050" b="1">
+                <a:solidFill>
+                  <a:srgbClr val="5F6F86"/>
+                </a:solidFill>
+              </a:rPr>
+              <a:t>MUTUAL ACTION PLAN</a:t>
+            </a:r>
+          </a:p>
+        </p:txBody>
+      </p:sp>
+      <p:sp>
+        <p:nvSpPr>
+          <p:cNvPr id="3" name="">
+            <a:extLst xmlns:a="http://schemas.openxmlformats.org/drawingml/2006/main">
+              <a:ext uri="{FF2B5EF4-FFF2-40B4-BE49-F238E27FC236}">
+                <a16:creationId xmlns:a16="http://schemas.microsoft.com/office/drawing/2014/main" id="{44D2AC35-247F-4C65-9A9A-B3E32C13FBD7}"/>
+              </a:ext>
+            </a:extLst>
+          </p:cNvPr>
+          <p:cNvSpPr>
+            <a:spLocks xmlns:a="http://schemas.openxmlformats.org/drawingml/2006/main" noGrp="1"/>
+          </p:cNvSpPr>
+          <p:nvPr/>
+        </p:nvSpPr>
+        <p:spPr>
+          <a:xfrm xmlns:a="http://schemas.openxmlformats.org/drawingml/2006/main">
+            <a:off x="685800" y="819150"/>
+            <a:ext cx="8953500" cy="876300"/>
+          </a:xfrm>
+          <a:prstGeom xmlns:a="http://schemas.openxmlformats.org/drawingml/2006/main" prst="rect">
+            <a:avLst/>
+          </a:prstGeom>
+          <a:ln xmlns:a="http://schemas.openxmlformats.org/drawingml/2006/main" w="0">
+            <a:solidFill>
+              <a:srgbClr val="FFFFFF"/>
+            </a:solidFill>
+            <a:prstDash val="solid"/>
+          </a:ln>
+        </p:spPr>
+        <p:txBody>
+          <a:bodyPr xmlns:a="http://schemas.openxmlformats.org/drawingml/2006/main" anchor="t"/>
+          <a:lstStyle xmlns:a="http://schemas.openxmlformats.org/drawingml/2006/main"/>
+          <a:p xmlns:a="http://schemas.openxmlformats.org/drawingml/2006/main">
+            <a:pPr algn="l">
+              <a:defRPr sz="2700" b="1">
+                <a:solidFill>
+                  <a:srgbClr val="172033"/>
+                </a:solidFill>
+              </a:defRPr>
+            </a:pPr>
+            <a:r>
+              <a:rPr sz="2700" b="1">
+                <a:solidFill>
+                  <a:srgbClr val="172033"/>
+                </a:solidFill>
+              </a:rPr>
+              <a:t>A simple path from decision to first clean month-end.</a:t>
+            </a:r>
+          </a:p>
+        </p:txBody>
+      </p:sp>
+      <p:sp>
+        <p:nvSpPr>
+          <p:cNvPr id="4" name="">
+            <a:extLst xmlns:a="http://schemas.openxmlformats.org/drawingml/2006/main">
+              <a:ext uri="{FF2B5EF4-FFF2-40B4-BE49-F238E27FC236}">
+                <a16:creationId xmlns:a16="http://schemas.microsoft.com/office/drawing/2014/main" id="{72B4D3C5-5D22-4D77-AD33-2455F07B9118}"/>
+              </a:ext>
+            </a:extLst>
+          </p:cNvPr>
+          <p:cNvSpPr>
+            <a:spLocks xmlns:a="http://schemas.openxmlformats.org/drawingml/2006/main" noGrp="1"/>
+          </p:cNvSpPr>
+          <p:nvPr/>
+        </p:nvSpPr>
+        <p:spPr>
+          <a:xfrm xmlns:a="http://schemas.openxmlformats.org/drawingml/2006/main">
+            <a:off x="685800" y="2667000"/>
+            <a:ext cx="1676400" cy="1676400"/>
+          </a:xfrm>
+          <a:prstGeom xmlns:a="http://schemas.openxmlformats.org/drawingml/2006/main" prst="rect">
+            <a:avLst/>
+          </a:prstGeom>
+          <a:solidFill xmlns:a="http://schemas.openxmlformats.org/drawingml/2006/main">
+            <a:srgbClr val="FFFFFF"/>
+          </a:solidFill>
+          <a:ln xmlns:a="http://schemas.openxmlformats.org/drawingml/2006/main" w="0">
+            <a:solidFill>
+              <a:srgbClr val="D8E2ED"/>
+            </a:solidFill>
+            <a:prstDash val="solid"/>
+          </a:ln>
+        </p:spPr>
+      </p:sp>
+      <p:sp>
+        <p:nvSpPr>
+          <p:cNvPr id="5" name="">
+            <a:extLst xmlns:a="http://schemas.openxmlformats.org/drawingml/2006/main">
+              <a:ext uri="{FF2B5EF4-FFF2-40B4-BE49-F238E27FC236}">
+                <a16:creationId xmlns:a16="http://schemas.microsoft.com/office/drawing/2014/main" id="{78F3ED17-362B-4DB4-9566-8B11EA402CA1}"/>
+              </a:ext>
+            </a:extLst>
+          </p:cNvPr>
+          <p:cNvSpPr>
+            <a:spLocks xmlns:a="http://schemas.openxmlformats.org/drawingml/2006/main" noGrp="1"/>
+          </p:cNvSpPr>
+          <p:nvPr/>
+        </p:nvSpPr>
+        <p:spPr>
+          <a:xfrm xmlns:a="http://schemas.openxmlformats.org/drawingml/2006/main">
+            <a:off x="857250" y="2895600"/>
+            <a:ext cx="419100" cy="419100"/>
+          </a:xfrm>
+          <a:prstGeom xmlns:a="http://schemas.openxmlformats.org/drawingml/2006/main" prst="rect">
+            <a:avLst/>
+          </a:prstGeom>
+          <a:solidFill xmlns:a="http://schemas.openxmlformats.org/drawingml/2006/main">
+            <a:srgbClr val="1D7F5F"/>
+          </a:solidFill>
+          <a:ln xmlns:a="http://schemas.openxmlformats.org/drawingml/2006/main" w="0">
+            <a:solidFill>
+              <a:srgbClr val="1D7F5F"/>
+            </a:solidFill>
+            <a:prstDash val="solid"/>
+          </a:ln>
+        </p:spPr>
+      </p:sp>
+      <p:sp>
+        <p:nvSpPr>
+          <p:cNvPr id="6" name="">
+            <a:extLst xmlns:a="http://schemas.openxmlformats.org/drawingml/2006/main">
+              <a:ext uri="{FF2B5EF4-FFF2-40B4-BE49-F238E27FC236}">
+                <a16:creationId xmlns:a16="http://schemas.microsoft.com/office/drawing/2014/main" id="{8F7F2418-A7DF-46F7-AE7E-9CE10959C954}"/>
+              </a:ext>
+            </a:extLst>
+          </p:cNvPr>
+          <p:cNvSpPr>
+            <a:spLocks xmlns:a="http://schemas.openxmlformats.org/drawingml/2006/main" noGrp="1"/>
+          </p:cNvSpPr>
+          <p:nvPr/>
+        </p:nvSpPr>
+        <p:spPr>
+          <a:xfrm xmlns:a="http://schemas.openxmlformats.org/drawingml/2006/main">
+            <a:off x="857250" y="2962275"/>
+            <a:ext cx="419100" cy="285750"/>
+          </a:xfrm>
+          <a:prstGeom xmlns:a="http://schemas.openxmlformats.org/drawingml/2006/main" prst="rect">
+            <a:avLst/>
+          </a:prstGeom>
+          <a:ln xmlns:a="http://schemas.openxmlformats.org/drawingml/2006/main" w="0">
+            <a:solidFill>
+              <a:srgbClr val="FFFFFF"/>
+            </a:solidFill>
+            <a:prstDash val="solid"/>
+          </a:ln>
+        </p:spPr>
+        <p:txBody>
+          <a:bodyPr xmlns:a="http://schemas.openxmlformats.org/drawingml/2006/main" anchor="t"/>
+          <a:lstStyle xmlns:a="http://schemas.openxmlformats.org/drawingml/2006/main"/>
+          <a:p xmlns:a="http://schemas.openxmlformats.org/drawingml/2006/main">
+            <a:pPr algn="ctr">
+              <a:defRPr sz="1500" b="1">
+                <a:solidFill>
+                  <a:srgbClr val="FFFFFF"/>
+                </a:solidFill>
+              </a:defRPr>
+            </a:pPr>
+            <a:r>
+              <a:rPr sz="1500" b="1">
+                <a:solidFill>
+                  <a:srgbClr val="FFFFFF"/>
+                </a:solidFill>
+              </a:rPr>
+              <a:t>1</a:t>
+            </a:r>
+          </a:p>
+        </p:txBody>
+      </p:sp>
+      <p:sp>
+        <p:nvSpPr>
+          <p:cNvPr id="7" name="">
+            <a:extLst xmlns:a="http://schemas.openxmlformats.org/drawingml/2006/main">
+              <a:ext uri="{FF2B5EF4-FFF2-40B4-BE49-F238E27FC236}">
+                <a16:creationId xmlns:a16="http://schemas.microsoft.com/office/drawing/2014/main" id="{9D8491DA-CD56-4365-BF9E-E3E62AAC37A8}"/>
+              </a:ext>
+            </a:extLst>
+          </p:cNvPr>
+          <p:cNvSpPr>
+            <a:spLocks xmlns:a="http://schemas.openxmlformats.org/drawingml/2006/main" noGrp="1"/>
+          </p:cNvSpPr>
+          <p:nvPr/>
+        </p:nvSpPr>
+        <p:spPr>
+          <a:xfrm xmlns:a="http://schemas.openxmlformats.org/drawingml/2006/main">
+            <a:off x="857250" y="3524250"/>
+            <a:ext cx="1295400" cy="304800"/>
+          </a:xfrm>
+          <a:prstGeom xmlns:a="http://schemas.openxmlformats.org/drawingml/2006/main" prst="rect">
+            <a:avLst/>
+          </a:prstGeom>
+          <a:ln xmlns:a="http://schemas.openxmlformats.org/drawingml/2006/main" w="0">
+            <a:solidFill>
+              <a:srgbClr val="FFFFFF"/>
+            </a:solidFill>
+            <a:prstDash val="solid"/>
+          </a:ln>
+        </p:spPr>
+        <p:txBody>
+          <a:bodyPr xmlns:a="http://schemas.openxmlformats.org/drawingml/2006/main" anchor="t"/>
+          <a:lstStyle xmlns:a="http://schemas.openxmlformats.org/drawingml/2006/main"/>
+          <a:p xmlns:a="http://schemas.openxmlformats.org/drawingml/2006/main">
+            <a:pPr algn="l">
+              <a:defRPr sz="1275" b="1">
+                <a:solidFill>
+                  <a:srgbClr val="172033"/>
+                </a:solidFill>
+              </a:defRPr>
+            </a:pPr>
+            <a:r>
+              <a:rPr sz="1275" b="1">
+                <a:solidFill>
+                  <a:srgbClr val="172033"/>
+                </a:solidFill>
+              </a:rPr>
+              <a:t>Select package</a:t>
+            </a:r>
+          </a:p>
+        </p:txBody>
+      </p:sp>
+      <p:sp>
+        <p:nvSpPr>
+          <p:cNvPr id="8" name="">
+            <a:extLst xmlns:a="http://schemas.openxmlformats.org/drawingml/2006/main">
+              <a:ext uri="{FF2B5EF4-FFF2-40B4-BE49-F238E27FC236}">
+                <a16:creationId xmlns:a16="http://schemas.microsoft.com/office/drawing/2014/main" id="{37E919C1-BBA0-4784-B4BC-AAC25E5193E9}"/>
+              </a:ext>
+            </a:extLst>
+          </p:cNvPr>
+          <p:cNvSpPr>
+            <a:spLocks xmlns:a="http://schemas.openxmlformats.org/drawingml/2006/main" noGrp="1"/>
+          </p:cNvSpPr>
+          <p:nvPr/>
+        </p:nvSpPr>
+        <p:spPr>
+          <a:xfrm xmlns:a="http://schemas.openxmlformats.org/drawingml/2006/main">
+            <a:off x="857250" y="3905250"/>
+            <a:ext cx="1295400" cy="742950"/>
+          </a:xfrm>
+          <a:prstGeom xmlns:a="http://schemas.openxmlformats.org/drawingml/2006/main" prst="rect">
+            <a:avLst/>
+          </a:prstGeom>
+          <a:ln xmlns:a="http://schemas.openxmlformats.org/drawingml/2006/main" w="0">
+            <a:solidFill>
+              <a:srgbClr val="FFFFFF"/>
+            </a:solidFill>
+            <a:prstDash val="solid"/>
+          </a:ln>
+        </p:spPr>
+        <p:txBody>
+          <a:bodyPr xmlns:a="http://schemas.openxmlformats.org/drawingml/2006/main" anchor="t"/>
+          <a:lstStyle xmlns:a="http://schemas.openxmlformats.org/drawingml/2006/main"/>
+          <a:p xmlns:a="http://schemas.openxmlformats.org/drawingml/2006/main">
+            <a:pPr algn="l">
+              <a:defRPr sz="900" b="0">
+                <a:solidFill>
+                  <a:srgbClr val="5F6F86"/>
+                </a:solidFill>
+              </a:defRPr>
+            </a:pPr>
+            <a:r>
+              <a:rPr sz="900" b="0">
+                <a:solidFill>
+                  <a:srgbClr val="5F6F86"/>
+                </a:solidFill>
+              </a:rPr>
+              <a:t>Confirm Books Foundation or the expanded Books Complete scope.</a:t>
+            </a:r>
+          </a:p>
+        </p:txBody>
+      </p:sp>
+      <p:sp>
+        <p:nvSpPr>
+          <p:cNvPr id="9" name="">
+            <a:extLst xmlns:a="http://schemas.openxmlformats.org/drawingml/2006/main">
+              <a:ext uri="{FF2B5EF4-FFF2-40B4-BE49-F238E27FC236}">
+                <a16:creationId xmlns:a16="http://schemas.microsoft.com/office/drawing/2014/main" id="{92E355A4-27F6-436D-9401-5CDEA36FCCA1}"/>
+              </a:ext>
+            </a:extLst>
+          </p:cNvPr>
+          <p:cNvSpPr>
+            <a:spLocks xmlns:a="http://schemas.openxmlformats.org/drawingml/2006/main" noGrp="1"/>
+          </p:cNvSpPr>
+          <p:nvPr/>
+        </p:nvSpPr>
+        <p:spPr>
+          <a:xfrm xmlns:a="http://schemas.openxmlformats.org/drawingml/2006/main">
+            <a:off x="2438400" y="3314700"/>
+            <a:ext cx="323850" cy="323850"/>
+          </a:xfrm>
+          <a:prstGeom xmlns:a="http://schemas.openxmlformats.org/drawingml/2006/main" prst="rect">
+            <a:avLst/>
+          </a:prstGeom>
+          <a:ln xmlns:a="http://schemas.openxmlformats.org/drawingml/2006/main" w="0">
+            <a:solidFill>
+              <a:srgbClr val="FFFFFF"/>
+            </a:solidFill>
+            <a:prstDash val="solid"/>
+          </a:ln>
+        </p:spPr>
+        <p:txBody>
+          <a:bodyPr xmlns:a="http://schemas.openxmlformats.org/drawingml/2006/main" anchor="ctr"/>
+          <a:lstStyle xmlns:a="http://schemas.openxmlformats.org/drawingml/2006/main"/>
+          <a:p xmlns:a="http://schemas.openxmlformats.org/drawingml/2006/main">
+            <a:pPr algn="ctr">
+              <a:defRPr sz="1650" b="1">
+                <a:solidFill>
+                  <a:srgbClr val="145DA0"/>
+                </a:solidFill>
+              </a:defRPr>
+            </a:pPr>
+            <a:r>
+              <a:rPr sz="1650" b="1">
+                <a:solidFill>
+                  <a:srgbClr val="145DA0"/>
+                </a:solidFill>
+              </a:rPr>
+              <a:t>-&gt;</a:t>
+            </a:r>
+          </a:p>
+        </p:txBody>
+      </p:sp>
+      <p:sp>
+        <p:nvSpPr>
+          <p:cNvPr id="10" name="">
+            <a:extLst xmlns:a="http://schemas.openxmlformats.org/drawingml/2006/main">
+              <a:ext uri="{FF2B5EF4-FFF2-40B4-BE49-F238E27FC236}">
+                <a16:creationId xmlns:a16="http://schemas.microsoft.com/office/drawing/2014/main" id="{E233136D-5A5E-4076-A401-5FE09F969D2D}"/>
+              </a:ext>
+            </a:extLst>
+          </p:cNvPr>
+          <p:cNvSpPr>
+            <a:spLocks xmlns:a="http://schemas.openxmlformats.org/drawingml/2006/main" noGrp="1"/>
+          </p:cNvSpPr>
+          <p:nvPr/>
+        </p:nvSpPr>
+        <p:spPr>
+          <a:xfrm xmlns:a="http://schemas.openxmlformats.org/drawingml/2006/main">
+            <a:off x="2895600" y="2667000"/>
+            <a:ext cx="1676400" cy="1676400"/>
+          </a:xfrm>
+          <a:prstGeom xmlns:a="http://schemas.openxmlformats.org/drawingml/2006/main" prst="rect">
+            <a:avLst/>
+          </a:prstGeom>
+          <a:solidFill xmlns:a="http://schemas.openxmlformats.org/drawingml/2006/main">
+            <a:srgbClr val="FFFFFF"/>
+          </a:solidFill>
+          <a:ln xmlns:a="http://schemas.openxmlformats.org/drawingml/2006/main" w="0">
+            <a:solidFill>
+              <a:srgbClr val="D8E2ED"/>
+            </a:solidFill>
+            <a:prstDash val="solid"/>
+          </a:ln>
+        </p:spPr>
+      </p:sp>
+      <p:sp>
+        <p:nvSpPr>
+          <p:cNvPr id="11" name="">
+            <a:extLst xmlns:a="http://schemas.openxmlformats.org/drawingml/2006/main">
+              <a:ext uri="{FF2B5EF4-FFF2-40B4-BE49-F238E27FC236}">
+                <a16:creationId xmlns:a16="http://schemas.microsoft.com/office/drawing/2014/main" id="{77F455D1-74E8-4EE1-B844-393A64AA4D34}"/>
+              </a:ext>
+            </a:extLst>
+          </p:cNvPr>
+          <p:cNvSpPr>
+            <a:spLocks xmlns:a="http://schemas.openxmlformats.org/drawingml/2006/main" noGrp="1"/>
+          </p:cNvSpPr>
+          <p:nvPr/>
+        </p:nvSpPr>
+        <p:spPr>
+          <a:xfrm xmlns:a="http://schemas.openxmlformats.org/drawingml/2006/main">
+            <a:off x="3067050" y="2895600"/>
+            <a:ext cx="419100" cy="419100"/>
+          </a:xfrm>
+          <a:prstGeom xmlns:a="http://schemas.openxmlformats.org/drawingml/2006/main" prst="rect">
+            <a:avLst/>
+          </a:prstGeom>
+          <a:solidFill xmlns:a="http://schemas.openxmlformats.org/drawingml/2006/main">
+            <a:srgbClr val="145DA0"/>
+          </a:solidFill>
+          <a:ln xmlns:a="http://schemas.openxmlformats.org/drawingml/2006/main" w="0">
+            <a:solidFill>
+              <a:srgbClr val="145DA0"/>
+            </a:solidFill>
+            <a:prstDash val="solid"/>
+          </a:ln>
+        </p:spPr>
+      </p:sp>
+      <p:sp>
+        <p:nvSpPr>
+          <p:cNvPr id="12" name="">
+            <a:extLst xmlns:a="http://schemas.openxmlformats.org/drawingml/2006/main">
+              <a:ext uri="{FF2B5EF4-FFF2-40B4-BE49-F238E27FC236}">
+                <a16:creationId xmlns:a16="http://schemas.microsoft.com/office/drawing/2014/main" id="{E4D389C0-36A1-46E3-84A1-315D70713CC1}"/>
+              </a:ext>
+            </a:extLst>
+          </p:cNvPr>
+          <p:cNvSpPr>
+            <a:spLocks xmlns:a="http://schemas.openxmlformats.org/drawingml/2006/main" noGrp="1"/>
+          </p:cNvSpPr>
+          <p:nvPr/>
+        </p:nvSpPr>
+        <p:spPr>
+          <a:xfrm xmlns:a="http://schemas.openxmlformats.org/drawingml/2006/main">
+            <a:off x="3067050" y="2962275"/>
+            <a:ext cx="419100" cy="285750"/>
+          </a:xfrm>
+          <a:prstGeom xmlns:a="http://schemas.openxmlformats.org/drawingml/2006/main" prst="rect">
+            <a:avLst/>
+          </a:prstGeom>
+          <a:ln xmlns:a="http://schemas.openxmlformats.org/drawingml/2006/main" w="0">
+            <a:solidFill>
+              <a:srgbClr val="FFFFFF"/>
+            </a:solidFill>
+            <a:prstDash val="solid"/>
+          </a:ln>
+        </p:spPr>
+        <p:txBody>
+          <a:bodyPr xmlns:a="http://schemas.openxmlformats.org/drawingml/2006/main" anchor="t"/>
+          <a:lstStyle xmlns:a="http://schemas.openxmlformats.org/drawingml/2006/main"/>
+          <a:p xmlns:a="http://schemas.openxmlformats.org/drawingml/2006/main">
+            <a:pPr algn="ctr">
+              <a:defRPr sz="1500" b="1">
+                <a:solidFill>
+                  <a:srgbClr val="FFFFFF"/>
+                </a:solidFill>
+              </a:defRPr>
+            </a:pPr>
+            <a:r>
+              <a:rPr sz="1500" b="1">
+                <a:solidFill>
+                  <a:srgbClr val="FFFFFF"/>
+                </a:solidFill>
+              </a:rPr>
+              <a:t>2</a:t>
+            </a:r>
+          </a:p>
+        </p:txBody>
+      </p:sp>
+      <p:sp>
+        <p:nvSpPr>
+          <p:cNvPr id="13" name="">
+            <a:extLst xmlns:a="http://schemas.openxmlformats.org/drawingml/2006/main">
+              <a:ext uri="{FF2B5EF4-FFF2-40B4-BE49-F238E27FC236}">
+                <a16:creationId xmlns:a16="http://schemas.microsoft.com/office/drawing/2014/main" id="{A11F73DF-C767-4E07-8CF1-D4F850124443}"/>
+              </a:ext>
+            </a:extLst>
+          </p:cNvPr>
+          <p:cNvSpPr>
+            <a:spLocks xmlns:a="http://schemas.openxmlformats.org/drawingml/2006/main" noGrp="1"/>
+          </p:cNvSpPr>
+          <p:nvPr/>
+        </p:nvSpPr>
+        <p:spPr>
+          <a:xfrm xmlns:a="http://schemas.openxmlformats.org/drawingml/2006/main">
+            <a:off x="3067050" y="3524250"/>
+            <a:ext cx="1295400" cy="304800"/>
+          </a:xfrm>
+          <a:prstGeom xmlns:a="http://schemas.openxmlformats.org/drawingml/2006/main" prst="rect">
+            <a:avLst/>
+          </a:prstGeom>
+          <a:ln xmlns:a="http://schemas.openxmlformats.org/drawingml/2006/main" w="0">
+            <a:solidFill>
+              <a:srgbClr val="FFFFFF"/>
+            </a:solidFill>
+            <a:prstDash val="solid"/>
+          </a:ln>
+        </p:spPr>
+        <p:txBody>
+          <a:bodyPr xmlns:a="http://schemas.openxmlformats.org/drawingml/2006/main" anchor="t"/>
+          <a:lstStyle xmlns:a="http://schemas.openxmlformats.org/drawingml/2006/main"/>
+          <a:p xmlns:a="http://schemas.openxmlformats.org/drawingml/2006/main">
+            <a:pPr algn="l">
+              <a:defRPr sz="1275" b="1">
+                <a:solidFill>
+                  <a:srgbClr val="172033"/>
+                </a:solidFill>
+              </a:defRPr>
+            </a:pPr>
+            <a:r>
+              <a:rPr sz="1275" b="1">
+                <a:solidFill>
+                  <a:srgbClr val="172033"/>
+                </a:solidFill>
+              </a:rPr>
+              <a:t>Approve SOW</a:t>
+            </a:r>
+          </a:p>
+        </p:txBody>
+      </p:sp>
+      <p:sp>
+        <p:nvSpPr>
+          <p:cNvPr id="14" name="">
+            <a:extLst xmlns:a="http://schemas.openxmlformats.org/drawingml/2006/main">
+              <a:ext uri="{FF2B5EF4-FFF2-40B4-BE49-F238E27FC236}">
+                <a16:creationId xmlns:a16="http://schemas.microsoft.com/office/drawing/2014/main" id="{74092CA4-21CB-42AB-B321-E7E7FF653538}"/>
+              </a:ext>
+            </a:extLst>
+          </p:cNvPr>
+          <p:cNvSpPr>
+            <a:spLocks xmlns:a="http://schemas.openxmlformats.org/drawingml/2006/main" noGrp="1"/>
+          </p:cNvSpPr>
+          <p:nvPr/>
+        </p:nvSpPr>
+        <p:spPr>
+          <a:xfrm xmlns:a="http://schemas.openxmlformats.org/drawingml/2006/main">
+            <a:off x="3067050" y="3905250"/>
+            <a:ext cx="1295400" cy="742950"/>
+          </a:xfrm>
+          <a:prstGeom xmlns:a="http://schemas.openxmlformats.org/drawingml/2006/main" prst="rect">
+            <a:avLst/>
+          </a:prstGeom>
+          <a:ln xmlns:a="http://schemas.openxmlformats.org/drawingml/2006/main" w="0">
+            <a:solidFill>
+              <a:srgbClr val="FFFFFF"/>
+            </a:solidFill>
+            <a:prstDash val="solid"/>
+          </a:ln>
+        </p:spPr>
+        <p:txBody>
+          <a:bodyPr xmlns:a="http://schemas.openxmlformats.org/drawingml/2006/main" anchor="t"/>
+          <a:lstStyle xmlns:a="http://schemas.openxmlformats.org/drawingml/2006/main"/>
+          <a:p xmlns:a="http://schemas.openxmlformats.org/drawingml/2006/main">
+            <a:pPr algn="l">
+              <a:defRPr sz="900" b="0">
+                <a:solidFill>
+                  <a:srgbClr val="5F6F86"/>
+                </a:solidFill>
+              </a:defRPr>
+            </a:pPr>
+            <a:r>
+              <a:rPr sz="900" b="0">
+                <a:solidFill>
+                  <a:srgbClr val="5F6F86"/>
+                </a:solidFill>
+              </a:rPr>
+              <a:t>Name the approval owner and target decision date.</a:t>
+            </a:r>
+          </a:p>
+        </p:txBody>
+      </p:sp>
+      <p:sp>
+        <p:nvSpPr>
+          <p:cNvPr id="15" name="">
+            <a:extLst xmlns:a="http://schemas.openxmlformats.org/drawingml/2006/main">
+              <a:ext uri="{FF2B5EF4-FFF2-40B4-BE49-F238E27FC236}">
+                <a16:creationId xmlns:a16="http://schemas.microsoft.com/office/drawing/2014/main" id="{571E3899-8CDC-4A36-865B-1E80E6C1CA35}"/>
+              </a:ext>
+            </a:extLst>
+          </p:cNvPr>
+          <p:cNvSpPr>
+            <a:spLocks xmlns:a="http://schemas.openxmlformats.org/drawingml/2006/main" noGrp="1"/>
+          </p:cNvSpPr>
+          <p:nvPr/>
+        </p:nvSpPr>
+        <p:spPr>
+          <a:xfrm xmlns:a="http://schemas.openxmlformats.org/drawingml/2006/main">
+            <a:off x="4648200" y="3314700"/>
+            <a:ext cx="323850" cy="323850"/>
+          </a:xfrm>
+          <a:prstGeom xmlns:a="http://schemas.openxmlformats.org/drawingml/2006/main" prst="rect">
+            <a:avLst/>
+          </a:prstGeom>
+          <a:ln xmlns:a="http://schemas.openxmlformats.org/drawingml/2006/main" w="0">
+            <a:solidFill>
+              <a:srgbClr val="FFFFFF"/>
+            </a:solidFill>
+            <a:prstDash val="solid"/>
+          </a:ln>
+        </p:spPr>
+        <p:txBody>
+          <a:bodyPr xmlns:a="http://schemas.openxmlformats.org/drawingml/2006/main" anchor="ctr"/>
+          <a:lstStyle xmlns:a="http://schemas.openxmlformats.org/drawingml/2006/main"/>
+          <a:p xmlns:a="http://schemas.openxmlformats.org/drawingml/2006/main">
+            <a:pPr algn="ctr">
+              <a:defRPr sz="1650" b="1">
+                <a:solidFill>
+                  <a:srgbClr val="145DA0"/>
+                </a:solidFill>
+              </a:defRPr>
+            </a:pPr>
+            <a:r>
+              <a:rPr sz="1650" b="1">
+                <a:solidFill>
+                  <a:srgbClr val="145DA0"/>
+                </a:solidFill>
+              </a:rPr>
+              <a:t>-&gt;</a:t>
+            </a:r>
+          </a:p>
+        </p:txBody>
+      </p:sp>
+      <p:sp>
+        <p:nvSpPr>
+          <p:cNvPr id="16" name="">
+            <a:extLst xmlns:a="http://schemas.openxmlformats.org/drawingml/2006/main">
+              <a:ext uri="{FF2B5EF4-FFF2-40B4-BE49-F238E27FC236}">
+                <a16:creationId xmlns:a16="http://schemas.microsoft.com/office/drawing/2014/main" id="{336A14B6-C5FA-4746-8CA3-DD1ACADCBFD1}"/>
+              </a:ext>
+            </a:extLst>
+          </p:cNvPr>
+          <p:cNvSpPr>
+            <a:spLocks xmlns:a="http://schemas.openxmlformats.org/drawingml/2006/main" noGrp="1"/>
+          </p:cNvSpPr>
+          <p:nvPr/>
+        </p:nvSpPr>
+        <p:spPr>
+          <a:xfrm xmlns:a="http://schemas.openxmlformats.org/drawingml/2006/main">
+            <a:off x="5105400" y="2667000"/>
+            <a:ext cx="1676400" cy="1676400"/>
+          </a:xfrm>
+          <a:prstGeom xmlns:a="http://schemas.openxmlformats.org/drawingml/2006/main" prst="rect">
+            <a:avLst/>
+          </a:prstGeom>
+          <a:solidFill xmlns:a="http://schemas.openxmlformats.org/drawingml/2006/main">
+            <a:srgbClr val="FFFFFF"/>
+          </a:solidFill>
+          <a:ln xmlns:a="http://schemas.openxmlformats.org/drawingml/2006/main" w="0">
+            <a:solidFill>
+              <a:srgbClr val="D8E2ED"/>
+            </a:solidFill>
+            <a:prstDash val="solid"/>
+          </a:ln>
+        </p:spPr>
+      </p:sp>
+      <p:sp>
+        <p:nvSpPr>
+          <p:cNvPr id="17" name="">
+            <a:extLst xmlns:a="http://schemas.openxmlformats.org/drawingml/2006/main">
+              <a:ext uri="{FF2B5EF4-FFF2-40B4-BE49-F238E27FC236}">
+                <a16:creationId xmlns:a16="http://schemas.microsoft.com/office/drawing/2014/main" id="{84F43FBD-583A-45C2-B007-D6D97D679032}"/>
+              </a:ext>
+            </a:extLst>
+          </p:cNvPr>
+          <p:cNvSpPr>
+            <a:spLocks xmlns:a="http://schemas.openxmlformats.org/drawingml/2006/main" noGrp="1"/>
+          </p:cNvSpPr>
+          <p:nvPr/>
+        </p:nvSpPr>
+        <p:spPr>
+          <a:xfrm xmlns:a="http://schemas.openxmlformats.org/drawingml/2006/main">
+            <a:off x="5276850" y="2895600"/>
+            <a:ext cx="419100" cy="419100"/>
+          </a:xfrm>
+          <a:prstGeom xmlns:a="http://schemas.openxmlformats.org/drawingml/2006/main" prst="rect">
+            <a:avLst/>
+          </a:prstGeom>
+          <a:solidFill xmlns:a="http://schemas.openxmlformats.org/drawingml/2006/main">
+            <a:srgbClr val="D98C16"/>
+          </a:solidFill>
+          <a:ln xmlns:a="http://schemas.openxmlformats.org/drawingml/2006/main" w="0">
+            <a:solidFill>
+              <a:srgbClr val="D98C16"/>
+            </a:solidFill>
+            <a:prstDash val="solid"/>
+          </a:ln>
+        </p:spPr>
+      </p:sp>
+      <p:sp>
+        <p:nvSpPr>
+          <p:cNvPr id="18" name="">
+            <a:extLst xmlns:a="http://schemas.openxmlformats.org/drawingml/2006/main">
+              <a:ext uri="{FF2B5EF4-FFF2-40B4-BE49-F238E27FC236}">
+                <a16:creationId xmlns:a16="http://schemas.microsoft.com/office/drawing/2014/main" id="{463A9AF7-CE77-4DED-B4F2-1A22D3578FD3}"/>
+              </a:ext>
+            </a:extLst>
+          </p:cNvPr>
+          <p:cNvSpPr>
+            <a:spLocks xmlns:a="http://schemas.openxmlformats.org/drawingml/2006/main" noGrp="1"/>
+          </p:cNvSpPr>
+          <p:nvPr/>
+        </p:nvSpPr>
+        <p:spPr>
+          <a:xfrm xmlns:a="http://schemas.openxmlformats.org/drawingml/2006/main">
+            <a:off x="5276850" y="2962275"/>
+            <a:ext cx="419100" cy="285750"/>
+          </a:xfrm>
+          <a:prstGeom xmlns:a="http://schemas.openxmlformats.org/drawingml/2006/main" prst="rect">
+            <a:avLst/>
+          </a:prstGeom>
+          <a:ln xmlns:a="http://schemas.openxmlformats.org/drawingml/2006/main" w="0">
+            <a:solidFill>
+              <a:srgbClr val="FFFFFF"/>
+            </a:solidFill>
+            <a:prstDash val="solid"/>
+          </a:ln>
+        </p:spPr>
+        <p:txBody>
+          <a:bodyPr xmlns:a="http://schemas.openxmlformats.org/drawingml/2006/main" anchor="t"/>
+          <a:lstStyle xmlns:a="http://schemas.openxmlformats.org/drawingml/2006/main"/>
+          <a:p xmlns:a="http://schemas.openxmlformats.org/drawingml/2006/main">
+            <a:pPr algn="ctr">
+              <a:defRPr sz="1500" b="1">
+                <a:solidFill>
+                  <a:srgbClr val="FFFFFF"/>
+                </a:solidFill>
+              </a:defRPr>
+            </a:pPr>
+            <a:r>
+              <a:rPr sz="1500" b="1">
+                <a:solidFill>
+                  <a:srgbClr val="FFFFFF"/>
+                </a:solidFill>
+              </a:rPr>
+              <a:t>3</a:t>
+            </a:r>
+          </a:p>
+        </p:txBody>
+      </p:sp>
+      <p:sp>
+        <p:nvSpPr>
+          <p:cNvPr id="19" name="">
+            <a:extLst xmlns:a="http://schemas.openxmlformats.org/drawingml/2006/main">
+              <a:ext uri="{FF2B5EF4-FFF2-40B4-BE49-F238E27FC236}">
+                <a16:creationId xmlns:a16="http://schemas.microsoft.com/office/drawing/2014/main" id="{CB61910E-A9BF-4E62-A80F-BF8528B3CD5F}"/>
+              </a:ext>
+            </a:extLst>
+          </p:cNvPr>
+          <p:cNvSpPr>
+            <a:spLocks xmlns:a="http://schemas.openxmlformats.org/drawingml/2006/main" noGrp="1"/>
+          </p:cNvSpPr>
+          <p:nvPr/>
+        </p:nvSpPr>
+        <p:spPr>
+          <a:xfrm xmlns:a="http://schemas.openxmlformats.org/drawingml/2006/main">
+            <a:off x="5276850" y="3524250"/>
+            <a:ext cx="1295400" cy="304800"/>
+          </a:xfrm>
+          <a:prstGeom xmlns:a="http://schemas.openxmlformats.org/drawingml/2006/main" prst="rect">
+            <a:avLst/>
+          </a:prstGeom>
+          <a:ln xmlns:a="http://schemas.openxmlformats.org/drawingml/2006/main" w="0">
+            <a:solidFill>
+              <a:srgbClr val="FFFFFF"/>
+            </a:solidFill>
+            <a:prstDash val="solid"/>
+          </a:ln>
+        </p:spPr>
+        <p:txBody>
+          <a:bodyPr xmlns:a="http://schemas.openxmlformats.org/drawingml/2006/main" anchor="t"/>
+          <a:lstStyle xmlns:a="http://schemas.openxmlformats.org/drawingml/2006/main"/>
+          <a:p xmlns:a="http://schemas.openxmlformats.org/drawingml/2006/main">
+            <a:pPr algn="l">
+              <a:defRPr sz="1275" b="1">
+                <a:solidFill>
+                  <a:srgbClr val="172033"/>
+                </a:solidFill>
+              </a:defRPr>
+            </a:pPr>
+            <a:r>
+              <a:rPr sz="1275" b="1">
+                <a:solidFill>
+                  <a:srgbClr val="172033"/>
+                </a:solidFill>
+              </a:rPr>
+              <a:t>Confirm inputs</a:t>
+            </a:r>
+          </a:p>
+        </p:txBody>
+      </p:sp>
+      <p:sp>
+        <p:nvSpPr>
+          <p:cNvPr id="20" name="">
+            <a:extLst xmlns:a="http://schemas.openxmlformats.org/drawingml/2006/main">
+              <a:ext uri="{FF2B5EF4-FFF2-40B4-BE49-F238E27FC236}">
+                <a16:creationId xmlns:a16="http://schemas.microsoft.com/office/drawing/2014/main" id="{C2DE018F-15FB-4FB9-8DE3-8881186FEE0A}"/>
+              </a:ext>
+            </a:extLst>
+          </p:cNvPr>
+          <p:cNvSpPr>
+            <a:spLocks xmlns:a="http://schemas.openxmlformats.org/drawingml/2006/main" noGrp="1"/>
+          </p:cNvSpPr>
+          <p:nvPr/>
+        </p:nvSpPr>
+        <p:spPr>
+          <a:xfrm xmlns:a="http://schemas.openxmlformats.org/drawingml/2006/main">
+            <a:off x="5276850" y="3905250"/>
+            <a:ext cx="1295400" cy="742950"/>
+          </a:xfrm>
+          <a:prstGeom xmlns:a="http://schemas.openxmlformats.org/drawingml/2006/main" prst="rect">
+            <a:avLst/>
+          </a:prstGeom>
+          <a:ln xmlns:a="http://schemas.openxmlformats.org/drawingml/2006/main" w="0">
+            <a:solidFill>
+              <a:srgbClr val="FFFFFF"/>
+            </a:solidFill>
+            <a:prstDash val="solid"/>
+          </a:ln>
+        </p:spPr>
+        <p:txBody>
+          <a:bodyPr xmlns:a="http://schemas.openxmlformats.org/drawingml/2006/main" anchor="t"/>
+          <a:lstStyle xmlns:a="http://schemas.openxmlformats.org/drawingml/2006/main"/>
+          <a:p xmlns:a="http://schemas.openxmlformats.org/drawingml/2006/main">
+            <a:pPr algn="l">
+              <a:defRPr sz="900" b="0">
+                <a:solidFill>
+                  <a:srgbClr val="5F6F86"/>
+                </a:solidFill>
+              </a:defRPr>
+            </a:pPr>
+            <a:r>
+              <a:rPr sz="900" b="0">
+                <a:solidFill>
+                  <a:srgbClr val="5F6F86"/>
+                </a:solidFill>
+              </a:rPr>
+              <a:t>Accounting owner, opening balances, chart-of-accounts review, and tax/entity basics.</a:t>
+            </a:r>
+          </a:p>
+        </p:txBody>
+      </p:sp>
+      <p:sp>
+        <p:nvSpPr>
+          <p:cNvPr id="21" name="">
+            <a:extLst xmlns:a="http://schemas.openxmlformats.org/drawingml/2006/main">
+              <a:ext uri="{FF2B5EF4-FFF2-40B4-BE49-F238E27FC236}">
+                <a16:creationId xmlns:a16="http://schemas.microsoft.com/office/drawing/2014/main" id="{F8CF07A6-47CC-4EBA-BCB7-03AF796AF2FF}"/>
+              </a:ext>
+            </a:extLst>
+          </p:cNvPr>
+          <p:cNvSpPr>
+            <a:spLocks xmlns:a="http://schemas.openxmlformats.org/drawingml/2006/main" noGrp="1"/>
+          </p:cNvSpPr>
+          <p:nvPr/>
+        </p:nvSpPr>
+        <p:spPr>
+          <a:xfrm xmlns:a="http://schemas.openxmlformats.org/drawingml/2006/main">
+            <a:off x="6858000" y="3314700"/>
+            <a:ext cx="323850" cy="323850"/>
+          </a:xfrm>
+          <a:prstGeom xmlns:a="http://schemas.openxmlformats.org/drawingml/2006/main" prst="rect">
+            <a:avLst/>
+          </a:prstGeom>
+          <a:ln xmlns:a="http://schemas.openxmlformats.org/drawingml/2006/main" w="0">
+            <a:solidFill>
+              <a:srgbClr val="FFFFFF"/>
+            </a:solidFill>
+            <a:prstDash val="solid"/>
+          </a:ln>
+        </p:spPr>
+        <p:txBody>
+          <a:bodyPr xmlns:a="http://schemas.openxmlformats.org/drawingml/2006/main" anchor="ctr"/>
+          <a:lstStyle xmlns:a="http://schemas.openxmlformats.org/drawingml/2006/main"/>
+          <a:p xmlns:a="http://schemas.openxmlformats.org/drawingml/2006/main">
+            <a:pPr algn="ctr">
+              <a:defRPr sz="1650" b="1">
+                <a:solidFill>
+                  <a:srgbClr val="145DA0"/>
+                </a:solidFill>
+              </a:defRPr>
+            </a:pPr>
+            <a:r>
+              <a:rPr sz="1650" b="1">
+                <a:solidFill>
+                  <a:srgbClr val="145DA0"/>
+                </a:solidFill>
+              </a:rPr>
+              <a:t>-&gt;</a:t>
+            </a:r>
+          </a:p>
+        </p:txBody>
+      </p:sp>
+      <p:sp>
+        <p:nvSpPr>
+          <p:cNvPr id="22" name="">
+            <a:extLst xmlns:a="http://schemas.openxmlformats.org/drawingml/2006/main">
+              <a:ext uri="{FF2B5EF4-FFF2-40B4-BE49-F238E27FC236}">
+                <a16:creationId xmlns:a16="http://schemas.microsoft.com/office/drawing/2014/main" id="{EFB577CD-3389-4DAF-90D4-61F79464FC60}"/>
+              </a:ext>
+            </a:extLst>
+          </p:cNvPr>
+          <p:cNvSpPr>
+            <a:spLocks xmlns:a="http://schemas.openxmlformats.org/drawingml/2006/main" noGrp="1"/>
+          </p:cNvSpPr>
+          <p:nvPr/>
+        </p:nvSpPr>
+        <p:spPr>
+          <a:xfrm xmlns:a="http://schemas.openxmlformats.org/drawingml/2006/main">
+            <a:off x="7315200" y="2667000"/>
+            <a:ext cx="1676400" cy="1676400"/>
+          </a:xfrm>
+          <a:prstGeom xmlns:a="http://schemas.openxmlformats.org/drawingml/2006/main" prst="rect">
+            <a:avLst/>
+          </a:prstGeom>
+          <a:solidFill xmlns:a="http://schemas.openxmlformats.org/drawingml/2006/main">
+            <a:srgbClr val="FFFFFF"/>
+          </a:solidFill>
+          <a:ln xmlns:a="http://schemas.openxmlformats.org/drawingml/2006/main" w="0">
+            <a:solidFill>
+              <a:srgbClr val="D8E2ED"/>
+            </a:solidFill>
+            <a:prstDash val="solid"/>
+          </a:ln>
+        </p:spPr>
+      </p:sp>
+      <p:sp>
+        <p:nvSpPr>
+          <p:cNvPr id="23" name="">
+            <a:extLst xmlns:a="http://schemas.openxmlformats.org/drawingml/2006/main">
+              <a:ext uri="{FF2B5EF4-FFF2-40B4-BE49-F238E27FC236}">
+                <a16:creationId xmlns:a16="http://schemas.microsoft.com/office/drawing/2014/main" id="{18FE2265-1B7C-43D5-BCF3-CFC71DED7F00}"/>
+              </a:ext>
+            </a:extLst>
+          </p:cNvPr>
+          <p:cNvSpPr>
+            <a:spLocks xmlns:a="http://schemas.openxmlformats.org/drawingml/2006/main" noGrp="1"/>
+          </p:cNvSpPr>
+          <p:nvPr/>
+        </p:nvSpPr>
+        <p:spPr>
+          <a:xfrm xmlns:a="http://schemas.openxmlformats.org/drawingml/2006/main">
+            <a:off x="7486650" y="2895600"/>
+            <a:ext cx="419100" cy="419100"/>
+          </a:xfrm>
+          <a:prstGeom xmlns:a="http://schemas.openxmlformats.org/drawingml/2006/main" prst="rect">
+            <a:avLst/>
+          </a:prstGeom>
+          <a:solidFill xmlns:a="http://schemas.openxmlformats.org/drawingml/2006/main">
+            <a:srgbClr val="23A6D5"/>
+          </a:solidFill>
+          <a:ln xmlns:a="http://schemas.openxmlformats.org/drawingml/2006/main" w="0">
+            <a:solidFill>
+              <a:srgbClr val="23A6D5"/>
+            </a:solidFill>
+            <a:prstDash val="solid"/>
+          </a:ln>
+        </p:spPr>
+      </p:sp>
+      <p:sp>
+        <p:nvSpPr>
+          <p:cNvPr id="24" name="">
+            <a:extLst xmlns:a="http://schemas.openxmlformats.org/drawingml/2006/main">
+              <a:ext uri="{FF2B5EF4-FFF2-40B4-BE49-F238E27FC236}">
+                <a16:creationId xmlns:a16="http://schemas.microsoft.com/office/drawing/2014/main" id="{9769D421-B18C-428E-A7A7-C5C29BFE0E67}"/>
+              </a:ext>
+            </a:extLst>
+          </p:cNvPr>
+          <p:cNvSpPr>
+            <a:spLocks xmlns:a="http://schemas.openxmlformats.org/drawingml/2006/main" noGrp="1"/>
+          </p:cNvSpPr>
+          <p:nvPr/>
+        </p:nvSpPr>
+        <p:spPr>
+          <a:xfrm xmlns:a="http://schemas.openxmlformats.org/drawingml/2006/main">
+            <a:off x="7486650" y="2962275"/>
+            <a:ext cx="419100" cy="285750"/>
+          </a:xfrm>
+          <a:prstGeom xmlns:a="http://schemas.openxmlformats.org/drawingml/2006/main" prst="rect">
+            <a:avLst/>
+          </a:prstGeom>
+          <a:ln xmlns:a="http://schemas.openxmlformats.org/drawingml/2006/main" w="0">
+            <a:solidFill>
+              <a:srgbClr val="FFFFFF"/>
+            </a:solidFill>
+            <a:prstDash val="solid"/>
+          </a:ln>
+        </p:spPr>
+        <p:txBody>
+          <a:bodyPr xmlns:a="http://schemas.openxmlformats.org/drawingml/2006/main" anchor="t"/>
+          <a:lstStyle xmlns:a="http://schemas.openxmlformats.org/drawingml/2006/main"/>
+          <a:p xmlns:a="http://schemas.openxmlformats.org/drawingml/2006/main">
+            <a:pPr algn="ctr">
+              <a:defRPr sz="1500" b="1">
+                <a:solidFill>
+                  <a:srgbClr val="FFFFFF"/>
+                </a:solidFill>
+              </a:defRPr>
+            </a:pPr>
+            <a:r>
+              <a:rPr sz="1500" b="1">
+                <a:solidFill>
+                  <a:srgbClr val="FFFFFF"/>
+                </a:solidFill>
+              </a:rPr>
+              <a:t>4</a:t>
+            </a:r>
+          </a:p>
+        </p:txBody>
+      </p:sp>
+      <p:sp>
+        <p:nvSpPr>
+          <p:cNvPr id="25" name="">
+            <a:extLst xmlns:a="http://schemas.openxmlformats.org/drawingml/2006/main">
+              <a:ext uri="{FF2B5EF4-FFF2-40B4-BE49-F238E27FC236}">
+                <a16:creationId xmlns:a16="http://schemas.microsoft.com/office/drawing/2014/main" id="{2647CFFE-6299-434C-973B-A250C8848C0C}"/>
+              </a:ext>
+            </a:extLst>
+          </p:cNvPr>
+          <p:cNvSpPr>
+            <a:spLocks xmlns:a="http://schemas.openxmlformats.org/drawingml/2006/main" noGrp="1"/>
+          </p:cNvSpPr>
+          <p:nvPr/>
+        </p:nvSpPr>
+        <p:spPr>
+          <a:xfrm xmlns:a="http://schemas.openxmlformats.org/drawingml/2006/main">
+            <a:off x="7486650" y="3524250"/>
+            <a:ext cx="1295400" cy="304800"/>
+          </a:xfrm>
+          <a:prstGeom xmlns:a="http://schemas.openxmlformats.org/drawingml/2006/main" prst="rect">
+            <a:avLst/>
+          </a:prstGeom>
+          <a:ln xmlns:a="http://schemas.openxmlformats.org/drawingml/2006/main" w="0">
+            <a:solidFill>
+              <a:srgbClr val="FFFFFF"/>
+            </a:solidFill>
+            <a:prstDash val="solid"/>
+          </a:ln>
+        </p:spPr>
+        <p:txBody>
+          <a:bodyPr xmlns:a="http://schemas.openxmlformats.org/drawingml/2006/main" anchor="t"/>
+          <a:lstStyle xmlns:a="http://schemas.openxmlformats.org/drawingml/2006/main"/>
+          <a:p xmlns:a="http://schemas.openxmlformats.org/drawingml/2006/main">
+            <a:pPr algn="l">
+              <a:defRPr sz="1275" b="1">
+                <a:solidFill>
+                  <a:srgbClr val="172033"/>
+                </a:solidFill>
+              </a:defRPr>
+            </a:pPr>
+            <a:r>
+              <a:rPr sz="1275" b="1">
+                <a:solidFill>
+                  <a:srgbClr val="172033"/>
+                </a:solidFill>
+              </a:rPr>
+              <a:t>Implement</a:t>
+            </a:r>
+          </a:p>
+        </p:txBody>
+      </p:sp>
+      <p:sp>
+        <p:nvSpPr>
+          <p:cNvPr id="26" name="">
+            <a:extLst xmlns:a="http://schemas.openxmlformats.org/drawingml/2006/main">
+              <a:ext uri="{FF2B5EF4-FFF2-40B4-BE49-F238E27FC236}">
+                <a16:creationId xmlns:a16="http://schemas.microsoft.com/office/drawing/2014/main" id="{4828E555-9720-4EB4-AA96-090A7DFCA92A}"/>
+              </a:ext>
+            </a:extLst>
+          </p:cNvPr>
+          <p:cNvSpPr>
+            <a:spLocks xmlns:a="http://schemas.openxmlformats.org/drawingml/2006/main" noGrp="1"/>
+          </p:cNvSpPr>
+          <p:nvPr/>
+        </p:nvSpPr>
+        <p:spPr>
+          <a:xfrm xmlns:a="http://schemas.openxmlformats.org/drawingml/2006/main">
+            <a:off x="7486650" y="3905250"/>
+            <a:ext cx="1295400" cy="742950"/>
+          </a:xfrm>
+          <a:prstGeom xmlns:a="http://schemas.openxmlformats.org/drawingml/2006/main" prst="rect">
+            <a:avLst/>
+          </a:prstGeom>
+          <a:ln xmlns:a="http://schemas.openxmlformats.org/drawingml/2006/main" w="0">
+            <a:solidFill>
+              <a:srgbClr val="FFFFFF"/>
+            </a:solidFill>
+            <a:prstDash val="solid"/>
+          </a:ln>
+        </p:spPr>
+        <p:txBody>
+          <a:bodyPr xmlns:a="http://schemas.openxmlformats.org/drawingml/2006/main" anchor="t"/>
+          <a:lstStyle xmlns:a="http://schemas.openxmlformats.org/drawingml/2006/main"/>
+          <a:p xmlns:a="http://schemas.openxmlformats.org/drawingml/2006/main">
+            <a:pPr algn="l">
+              <a:defRPr sz="900" b="0">
+                <a:solidFill>
+                  <a:srgbClr val="5F6F86"/>
+                </a:solidFill>
+              </a:defRPr>
+            </a:pPr>
+            <a:r>
+              <a:rPr sz="900" b="0">
+                <a:solidFill>
+                  <a:srgbClr val="5F6F86"/>
+                </a:solidFill>
+              </a:rPr>
+              <a:t>Tailor the books, load opening balances, wire A/R and A/P, and train the team.</a:t>
+            </a:r>
+          </a:p>
+        </p:txBody>
+      </p:sp>
+      <p:sp>
+        <p:nvSpPr>
+          <p:cNvPr id="27" name="">
+            <a:extLst xmlns:a="http://schemas.openxmlformats.org/drawingml/2006/main">
+              <a:ext uri="{FF2B5EF4-FFF2-40B4-BE49-F238E27FC236}">
+                <a16:creationId xmlns:a16="http://schemas.microsoft.com/office/drawing/2014/main" id="{3E503E33-9614-4A2D-8FB3-8F9997B0CA5D}"/>
+              </a:ext>
+            </a:extLst>
+          </p:cNvPr>
+          <p:cNvSpPr>
+            <a:spLocks xmlns:a="http://schemas.openxmlformats.org/drawingml/2006/main" noGrp="1"/>
+          </p:cNvSpPr>
+          <p:nvPr/>
+        </p:nvSpPr>
+        <p:spPr>
+          <a:xfrm xmlns:a="http://schemas.openxmlformats.org/drawingml/2006/main">
+            <a:off x="9067800" y="3314700"/>
+            <a:ext cx="323850" cy="323850"/>
+          </a:xfrm>
+          <a:prstGeom xmlns:a="http://schemas.openxmlformats.org/drawingml/2006/main" prst="rect">
+            <a:avLst/>
+          </a:prstGeom>
+          <a:ln xmlns:a="http://schemas.openxmlformats.org/drawingml/2006/main" w="0">
+            <a:solidFill>
+              <a:srgbClr val="FFFFFF"/>
+            </a:solidFill>
+            <a:prstDash val="solid"/>
+          </a:ln>
+        </p:spPr>
+        <p:txBody>
+          <a:bodyPr xmlns:a="http://schemas.openxmlformats.org/drawingml/2006/main" anchor="ctr"/>
+          <a:lstStyle xmlns:a="http://schemas.openxmlformats.org/drawingml/2006/main"/>
+          <a:p xmlns:a="http://schemas.openxmlformats.org/drawingml/2006/main">
+            <a:pPr algn="ctr">
+              <a:defRPr sz="1650" b="1">
+                <a:solidFill>
+                  <a:srgbClr val="145DA0"/>
+                </a:solidFill>
+              </a:defRPr>
+            </a:pPr>
+            <a:r>
+              <a:rPr sz="1650" b="1">
+                <a:solidFill>
+                  <a:srgbClr val="145DA0"/>
+                </a:solidFill>
+              </a:rPr>
+              <a:t>-&gt;</a:t>
+            </a:r>
+          </a:p>
+        </p:txBody>
+      </p:sp>
+      <p:sp>
+        <p:nvSpPr>
+          <p:cNvPr id="28" name="">
+            <a:extLst xmlns:a="http://schemas.openxmlformats.org/drawingml/2006/main">
+              <a:ext uri="{FF2B5EF4-FFF2-40B4-BE49-F238E27FC236}">
+                <a16:creationId xmlns:a16="http://schemas.microsoft.com/office/drawing/2014/main" id="{C1D2A0D4-4B60-46A3-AC00-F245FB350F1F}"/>
+              </a:ext>
+            </a:extLst>
+          </p:cNvPr>
+          <p:cNvSpPr>
+            <a:spLocks xmlns:a="http://schemas.openxmlformats.org/drawingml/2006/main" noGrp="1"/>
+          </p:cNvSpPr>
+          <p:nvPr/>
+        </p:nvSpPr>
+        <p:spPr>
+          <a:xfrm xmlns:a="http://schemas.openxmlformats.org/drawingml/2006/main">
+            <a:off x="9525000" y="2667000"/>
+            <a:ext cx="1676400" cy="1676400"/>
+          </a:xfrm>
+          <a:prstGeom xmlns:a="http://schemas.openxmlformats.org/drawingml/2006/main" prst="rect">
+            <a:avLst/>
+          </a:prstGeom>
+          <a:solidFill xmlns:a="http://schemas.openxmlformats.org/drawingml/2006/main">
+            <a:srgbClr val="FFFFFF"/>
+          </a:solidFill>
+          <a:ln xmlns:a="http://schemas.openxmlformats.org/drawingml/2006/main" w="0">
+            <a:solidFill>
+              <a:srgbClr val="D8E2ED"/>
+            </a:solidFill>
+            <a:prstDash val="solid"/>
+          </a:ln>
+        </p:spPr>
+      </p:sp>
+      <p:sp>
+        <p:nvSpPr>
+          <p:cNvPr id="29" name="">
+            <a:extLst xmlns:a="http://schemas.openxmlformats.org/drawingml/2006/main">
+              <a:ext uri="{FF2B5EF4-FFF2-40B4-BE49-F238E27FC236}">
+                <a16:creationId xmlns:a16="http://schemas.microsoft.com/office/drawing/2014/main" id="{751548C1-C85B-4072-9D8A-2B97C80F77C5}"/>
+              </a:ext>
+            </a:extLst>
+          </p:cNvPr>
+          <p:cNvSpPr>
+            <a:spLocks xmlns:a="http://schemas.openxmlformats.org/drawingml/2006/main" noGrp="1"/>
+          </p:cNvSpPr>
+          <p:nvPr/>
+        </p:nvSpPr>
+        <p:spPr>
+          <a:xfrm xmlns:a="http://schemas.openxmlformats.org/drawingml/2006/main">
+            <a:off x="9696450" y="2895600"/>
+            <a:ext cx="419100" cy="419100"/>
+          </a:xfrm>
+          <a:prstGeom xmlns:a="http://schemas.openxmlformats.org/drawingml/2006/main" prst="rect">
+            <a:avLst/>
+          </a:prstGeom>
+          <a:solidFill xmlns:a="http://schemas.openxmlformats.org/drawingml/2006/main">
+            <a:srgbClr val="1D7F5F"/>
+          </a:solidFill>
+          <a:ln xmlns:a="http://schemas.openxmlformats.org/drawingml/2006/main" w="0">
+            <a:solidFill>
+              <a:srgbClr val="1D7F5F"/>
+            </a:solidFill>
+            <a:prstDash val="solid"/>
+          </a:ln>
+        </p:spPr>
+      </p:sp>
+      <p:sp>
+        <p:nvSpPr>
+          <p:cNvPr id="30" name="">
+            <a:extLst xmlns:a="http://schemas.openxmlformats.org/drawingml/2006/main">
+              <a:ext uri="{FF2B5EF4-FFF2-40B4-BE49-F238E27FC236}">
+                <a16:creationId xmlns:a16="http://schemas.microsoft.com/office/drawing/2014/main" id="{4C7999EE-86C7-4BE3-AFCE-706807E7E354}"/>
+              </a:ext>
+            </a:extLst>
+          </p:cNvPr>
+          <p:cNvSpPr>
+            <a:spLocks xmlns:a="http://schemas.openxmlformats.org/drawingml/2006/main" noGrp="1"/>
+          </p:cNvSpPr>
+          <p:nvPr/>
+        </p:nvSpPr>
+        <p:spPr>
+          <a:xfrm xmlns:a="http://schemas.openxmlformats.org/drawingml/2006/main">
+            <a:off x="9696450" y="2962275"/>
+            <a:ext cx="419100" cy="285750"/>
+          </a:xfrm>
+          <a:prstGeom xmlns:a="http://schemas.openxmlformats.org/drawingml/2006/main" prst="rect">
+            <a:avLst/>
+          </a:prstGeom>
+          <a:ln xmlns:a="http://schemas.openxmlformats.org/drawingml/2006/main" w="0">
+            <a:solidFill>
+              <a:srgbClr val="FFFFFF"/>
+            </a:solidFill>
+            <a:prstDash val="solid"/>
+          </a:ln>
+        </p:spPr>
+        <p:txBody>
+          <a:bodyPr xmlns:a="http://schemas.openxmlformats.org/drawingml/2006/main" anchor="t"/>
+          <a:lstStyle xmlns:a="http://schemas.openxmlformats.org/drawingml/2006/main"/>
+          <a:p xmlns:a="http://schemas.openxmlformats.org/drawingml/2006/main">
+            <a:pPr algn="ctr">
+              <a:defRPr sz="1500" b="1">
+                <a:solidFill>
+                  <a:srgbClr val="FFFFFF"/>
+                </a:solidFill>
+              </a:defRPr>
+            </a:pPr>
+            <a:r>
+              <a:rPr sz="1500" b="1">
+                <a:solidFill>
+                  <a:srgbClr val="FFFFFF"/>
+                </a:solidFill>
+              </a:rPr>
+              <a:t>5</a:t>
+            </a:r>
+          </a:p>
+        </p:txBody>
+      </p:sp>
+      <p:sp>
+        <p:nvSpPr>
+          <p:cNvPr id="31" name="">
+            <a:extLst xmlns:a="http://schemas.openxmlformats.org/drawingml/2006/main">
+              <a:ext uri="{FF2B5EF4-FFF2-40B4-BE49-F238E27FC236}">
+                <a16:creationId xmlns:a16="http://schemas.microsoft.com/office/drawing/2014/main" id="{503B3F27-5468-4F0F-A8FD-35A37B6C1AA0}"/>
+              </a:ext>
+            </a:extLst>
+          </p:cNvPr>
+          <p:cNvSpPr>
+            <a:spLocks xmlns:a="http://schemas.openxmlformats.org/drawingml/2006/main" noGrp="1"/>
+          </p:cNvSpPr>
+          <p:nvPr/>
+        </p:nvSpPr>
+        <p:spPr>
+          <a:xfrm xmlns:a="http://schemas.openxmlformats.org/drawingml/2006/main">
+            <a:off x="9696450" y="3524250"/>
+            <a:ext cx="1295400" cy="304800"/>
+          </a:xfrm>
+          <a:prstGeom xmlns:a="http://schemas.openxmlformats.org/drawingml/2006/main" prst="rect">
+            <a:avLst/>
+          </a:prstGeom>
+          <a:ln xmlns:a="http://schemas.openxmlformats.org/drawingml/2006/main" w="0">
+            <a:solidFill>
+              <a:srgbClr val="FFFFFF"/>
+            </a:solidFill>
+            <a:prstDash val="solid"/>
+          </a:ln>
+        </p:spPr>
+        <p:txBody>
+          <a:bodyPr xmlns:a="http://schemas.openxmlformats.org/drawingml/2006/main" anchor="t"/>
+          <a:lstStyle xmlns:a="http://schemas.openxmlformats.org/drawingml/2006/main"/>
+          <a:p xmlns:a="http://schemas.openxmlformats.org/drawingml/2006/main">
+            <a:pPr algn="l">
+              <a:defRPr sz="1275" b="1">
+                <a:solidFill>
+                  <a:srgbClr val="172033"/>
+                </a:solidFill>
+              </a:defRPr>
+            </a:pPr>
+            <a:r>
+              <a:rPr sz="1275" b="1">
+                <a:solidFill>
+                  <a:srgbClr val="172033"/>
+                </a:solidFill>
+              </a:rPr>
+              <a:t>First close</a:t>
+            </a:r>
+          </a:p>
+        </p:txBody>
+      </p:sp>
+      <p:sp>
+        <p:nvSpPr>
+          <p:cNvPr id="32" name="">
+            <a:extLst xmlns:a="http://schemas.openxmlformats.org/drawingml/2006/main">
+              <a:ext uri="{FF2B5EF4-FFF2-40B4-BE49-F238E27FC236}">
+                <a16:creationId xmlns:a16="http://schemas.microsoft.com/office/drawing/2014/main" id="{BC3A9195-90F6-4E42-AB8C-D5AE3C41AD65}"/>
+              </a:ext>
+            </a:extLst>
+          </p:cNvPr>
+          <p:cNvSpPr>
+            <a:spLocks xmlns:a="http://schemas.openxmlformats.org/drawingml/2006/main" noGrp="1"/>
+          </p:cNvSpPr>
+          <p:nvPr/>
+        </p:nvSpPr>
+        <p:spPr>
+          <a:xfrm xmlns:a="http://schemas.openxmlformats.org/drawingml/2006/main">
+            <a:off x="9696450" y="3905250"/>
+            <a:ext cx="1295400" cy="742950"/>
+          </a:xfrm>
+          <a:prstGeom xmlns:a="http://schemas.openxmlformats.org/drawingml/2006/main" prst="rect">
+            <a:avLst/>
+          </a:prstGeom>
+          <a:ln xmlns:a="http://schemas.openxmlformats.org/drawingml/2006/main" w="0">
+            <a:solidFill>
+              <a:srgbClr val="FFFFFF"/>
+            </a:solidFill>
+            <a:prstDash val="solid"/>
+          </a:ln>
+        </p:spPr>
+        <p:txBody>
+          <a:bodyPr xmlns:a="http://schemas.openxmlformats.org/drawingml/2006/main" anchor="t"/>
+          <a:lstStyle xmlns:a="http://schemas.openxmlformats.org/drawingml/2006/main"/>
+          <a:p xmlns:a="http://schemas.openxmlformats.org/drawingml/2006/main">
+            <a:pPr algn="l">
+              <a:defRPr sz="900" b="0">
+                <a:solidFill>
+                  <a:srgbClr val="5F6F86"/>
+                </a:solidFill>
+              </a:defRPr>
+            </a:pPr>
+            <a:r>
+              <a:rPr sz="900" b="0">
+                <a:solidFill>
+                  <a:srgbClr val="5F6F86"/>
+                </a:solidFill>
+              </a:rPr>
+              <a:t>Run the first month-end in Blueprint and lock the period.</a:t>
+            </a:r>
+          </a:p>
+        </p:txBody>
+      </p:sp>
+      <p:sp>
+        <p:nvSpPr>
+          <p:cNvPr id="33" name="">
+            <a:extLst xmlns:a="http://schemas.openxmlformats.org/drawingml/2006/main">
+              <a:ext uri="{FF2B5EF4-FFF2-40B4-BE49-F238E27FC236}">
+                <a16:creationId xmlns:a16="http://schemas.microsoft.com/office/drawing/2014/main" id="{9BC276D7-5FBC-4596-B0A8-D0FF59F2C5E9}"/>
+              </a:ext>
+            </a:extLst>
+          </p:cNvPr>
+          <p:cNvSpPr>
+            <a:spLocks xmlns:a="http://schemas.openxmlformats.org/drawingml/2006/main" noGrp="1"/>
+          </p:cNvSpPr>
+          <p:nvPr/>
+        </p:nvSpPr>
+        <p:spPr>
+          <a:xfrm xmlns:a="http://schemas.openxmlformats.org/drawingml/2006/main">
+            <a:off x="685800" y="6400800"/>
+            <a:ext cx="4000500" cy="228600"/>
+          </a:xfrm>
+          <a:prstGeom xmlns:a="http://schemas.openxmlformats.org/drawingml/2006/main" prst="rect">
+            <a:avLst/>
+          </a:prstGeom>
+          <a:ln xmlns:a="http://schemas.openxmlformats.org/drawingml/2006/main" w="0">
+            <a:solidFill>
+              <a:srgbClr val="FFFFFF"/>
+            </a:solidFill>
+            <a:prstDash val="solid"/>
+          </a:ln>
+        </p:spPr>
+        <p:txBody>
+          <a:bodyPr xmlns:a="http://schemas.openxmlformats.org/drawingml/2006/main" anchor="t"/>
+          <a:lstStyle xmlns:a="http://schemas.openxmlformats.org/drawingml/2006/main"/>
+          <a:p xmlns:a="http://schemas.openxmlformats.org/drawingml/2006/main">
+            <a:pPr algn="l">
+              <a:defRPr sz="900" b="0">
+                <a:solidFill>
+                  <a:srgbClr val="7B8798"/>
+                </a:solidFill>
+              </a:defRPr>
+            </a:pPr>
+            <a:r>
+              <a:rPr sz="900" b="0">
+                <a:solidFill>
+                  <a:srgbClr val="7B8798"/>
+                </a:solidFill>
+              </a:rPr>
+              <a:t>Blueprint Books for Raves</a:t>
+            </a:r>
+          </a:p>
+        </p:txBody>
+      </p:sp>
+      <p:sp>
+        <p:nvSpPr>
+          <p:cNvPr id="34" name="">
+            <a:extLst xmlns:a="http://schemas.openxmlformats.org/drawingml/2006/main">
+              <a:ext uri="{FF2B5EF4-FFF2-40B4-BE49-F238E27FC236}">
+                <a16:creationId xmlns:a16="http://schemas.microsoft.com/office/drawing/2014/main" id="{0E1BCBD3-EBBA-475F-8001-8FEEEF8CA226}"/>
+              </a:ext>
+            </a:extLst>
+          </p:cNvPr>
+          <p:cNvSpPr>
+            <a:spLocks xmlns:a="http://schemas.openxmlformats.org/drawingml/2006/main" noGrp="1"/>
+          </p:cNvSpPr>
+          <p:nvPr/>
+        </p:nvSpPr>
+        <p:spPr>
+          <a:xfrm xmlns:a="http://schemas.openxmlformats.org/drawingml/2006/main">
+            <a:off x="11049000" y="6400800"/>
+            <a:ext cx="457200" cy="228600"/>
+          </a:xfrm>
+          <a:prstGeom xmlns:a="http://schemas.openxmlformats.org/drawingml/2006/main" prst="rect">
+            <a:avLst/>
+          </a:prstGeom>
+          <a:ln xmlns:a="http://schemas.openxmlformats.org/drawingml/2006/main" w="0">
+            <a:solidFill>
+              <a:srgbClr val="FFFFFF"/>
+            </a:solidFill>
+            <a:prstDash val="solid"/>
+          </a:ln>
+        </p:spPr>
+        <p:txBody>
+          <a:bodyPr xmlns:a="http://schemas.openxmlformats.org/drawingml/2006/main" anchor="t"/>
+          <a:lstStyle xmlns:a="http://schemas.openxmlformats.org/drawingml/2006/main"/>
+          <a:p xmlns:a="http://schemas.openxmlformats.org/drawingml/2006/main">
+            <a:pPr algn="r">
+              <a:defRPr sz="900" b="0">
+                <a:solidFill>
+                  <a:srgbClr val="7B8798"/>
+                </a:solidFill>
+              </a:defRPr>
+            </a:pPr>
+            <a:r>
+              <a:rPr sz="900" b="0">
+                <a:solidFill>
+                  <a:srgbClr val="7B8798"/>
+                </a:solidFill>
+              </a:rPr>
+              <a:t>10</a:t>
+            </a:r>
+          </a:p>
+        </p:txBody>
+      </p:sp>
+    </p:spTree>
+    <p:extLst>
+      <p:ext uri="{BB962C8B-B14F-4D97-AF65-F5344CB8AC3E}">
+        <p14:creationId xmlns:p14="http://schemas.microsoft.com/office/powerpoint/2010/main" val="195968863"/>
+      </p:ext>
+    </p:extLst>
+  </p:cSld>
+</p:sld>
+</file>
+
+<file path=ppt/slides/slide11.xml><?xml version="1.0" encoding="utf-8"?>
+<p:sld xmlns:p="http://schemas.openxmlformats.org/presentationml/2006/main">
+  <p:cSld>
+    <p:spTree>
+      <p:nvGrpSpPr>
+        <p:cNvPr id="1" name=""/>
+        <p:cNvGrpSpPr/>
+        <p:nvPr/>
+      </p:nvGrpSpPr>
+      <p:grpSpPr>
+        <a:xfrm xmlns:a="http://schemas.openxmlformats.org/drawingml/2006/main"/>
+      </p:grpSpPr>
+      <p:sp>
+        <p:nvSpPr>
+          <p:cNvPr id="1" name="">
+            <a:extLst xmlns:a="http://schemas.openxmlformats.org/drawingml/2006/main">
+              <a:ext uri="{FF2B5EF4-FFF2-40B4-BE49-F238E27FC236}">
+                <a16:creationId xmlns:a16="http://schemas.microsoft.com/office/drawing/2014/main" id="{41F3B6A6-4A4B-4DD3-B909-8E56AE19721E}"/>
               </a:ext>
             </a:extLst>
           </p:cNvPr>
@@ -2337,7 +3962,7 @@
           <p:cNvPr id="2" name="">
             <a:extLst xmlns:a="http://schemas.openxmlformats.org/drawingml/2006/main">
               <a:ext uri="{FF2B5EF4-FFF2-40B4-BE49-F238E27FC236}">
-                <a16:creationId xmlns:a16="http://schemas.microsoft.com/office/drawing/2014/main" id="{34FD4A92-2298-494A-ABDE-5C194BEE5A31}"/>
+                <a16:creationId xmlns:a16="http://schemas.microsoft.com/office/drawing/2014/main" id="{086392FE-C0CF-46F7-9B5E-614B2DF24F14}"/>
               </a:ext>
             </a:extLst>
           </p:cNvPr>
@@ -2370,7 +3995,7 @@
           <p:cNvPr id="3" name="">
             <a:extLst xmlns:a="http://schemas.openxmlformats.org/drawingml/2006/main">
               <a:ext uri="{FF2B5EF4-FFF2-40B4-BE49-F238E27FC236}">
-                <a16:creationId xmlns:a16="http://schemas.microsoft.com/office/drawing/2014/main" id="{79EDB8AC-2D3B-4707-B5E5-1F14A59711C1}"/>
+                <a16:creationId xmlns:a16="http://schemas.microsoft.com/office/drawing/2014/main" id="{1B21C722-4F38-45C4-A553-37B56163A908}"/>
               </a:ext>
             </a:extLst>
           </p:cNvPr>
@@ -2421,7 +4046,7 @@
           <p:cNvPr id="4" name="">
             <a:extLst xmlns:a="http://schemas.openxmlformats.org/drawingml/2006/main">
               <a:ext uri="{FF2B5EF4-FFF2-40B4-BE49-F238E27FC236}">
-                <a16:creationId xmlns:a16="http://schemas.microsoft.com/office/drawing/2014/main" id="{CBE19E4F-6F1D-4DA2-B99F-A6154FB2E3F0}"/>
+                <a16:creationId xmlns:a16="http://schemas.microsoft.com/office/drawing/2014/main" id="{272CF2D5-22E3-4299-9E99-9A600E0B2258}"/>
               </a:ext>
             </a:extLst>
           </p:cNvPr>
@@ -2472,7 +4097,7 @@
           <p:cNvPr id="5" name="">
             <a:extLst xmlns:a="http://schemas.openxmlformats.org/drawingml/2006/main">
               <a:ext uri="{FF2B5EF4-FFF2-40B4-BE49-F238E27FC236}">
-                <a16:creationId xmlns:a16="http://schemas.microsoft.com/office/drawing/2014/main" id="{52DE887E-8959-4B5E-835A-02CC2CC02912}"/>
+                <a16:creationId xmlns:a16="http://schemas.microsoft.com/office/drawing/2014/main" id="{4E2D8BC7-133C-4FEF-B549-F31A7D5E63F4}"/>
               </a:ext>
             </a:extLst>
           </p:cNvPr>
@@ -2523,7 +4148,7 @@
           <p:cNvPr id="6" name="">
             <a:extLst xmlns:a="http://schemas.openxmlformats.org/drawingml/2006/main">
               <a:ext uri="{FF2B5EF4-FFF2-40B4-BE49-F238E27FC236}">
-                <a16:creationId xmlns:a16="http://schemas.microsoft.com/office/drawing/2014/main" id="{2DEB8F97-F4E4-4103-B5A9-6A62CA2A4F63}"/>
+                <a16:creationId xmlns:a16="http://schemas.microsoft.com/office/drawing/2014/main" id="{B2781ADB-0108-48EF-B976-A42CF120C373}"/>
               </a:ext>
             </a:extLst>
           </p:cNvPr>
@@ -2574,7 +4199,7 @@
           <p:cNvPr id="7" name="">
             <a:extLst xmlns:a="http://schemas.openxmlformats.org/drawingml/2006/main">
               <a:ext uri="{FF2B5EF4-FFF2-40B4-BE49-F238E27FC236}">
-                <a16:creationId xmlns:a16="http://schemas.microsoft.com/office/drawing/2014/main" id="{512C91B8-13B6-4969-AEDA-91E2C4727E62}"/>
+                <a16:creationId xmlns:a16="http://schemas.microsoft.com/office/drawing/2014/main" id="{AB22F639-1148-4DB2-8DB2-2D8ABE51C740}"/>
               </a:ext>
             </a:extLst>
           </p:cNvPr>
@@ -2625,7 +4250,7 @@
           <p:cNvPr id="8" name="">
             <a:extLst xmlns:a="http://schemas.openxmlformats.org/drawingml/2006/main">
               <a:ext uri="{FF2B5EF4-FFF2-40B4-BE49-F238E27FC236}">
-                <a16:creationId xmlns:a16="http://schemas.microsoft.com/office/drawing/2014/main" id="{088E076B-23E0-48B8-AB40-57654FD16978}"/>
+                <a16:creationId xmlns:a16="http://schemas.microsoft.com/office/drawing/2014/main" id="{F30471C2-DE59-45B6-A74E-E2C0F91C5DF7}"/>
               </a:ext>
             </a:extLst>
           </p:cNvPr>
@@ -2658,7 +4283,7 @@
           <p:cNvPr id="9" name="">
             <a:extLst xmlns:a="http://schemas.openxmlformats.org/drawingml/2006/main">
               <a:ext uri="{FF2B5EF4-FFF2-40B4-BE49-F238E27FC236}">
-                <a16:creationId xmlns:a16="http://schemas.microsoft.com/office/drawing/2014/main" id="{7409451B-69DD-4A5F-A4C8-F7478618F8A5}"/>
+                <a16:creationId xmlns:a16="http://schemas.microsoft.com/office/drawing/2014/main" id="{C6733890-7525-40DF-A3D6-C2FC88795C59}"/>
               </a:ext>
             </a:extLst>
           </p:cNvPr>
@@ -2709,7 +4334,7 @@
           <p:cNvPr id="10" name="">
             <a:extLst xmlns:a="http://schemas.openxmlformats.org/drawingml/2006/main">
               <a:ext uri="{FF2B5EF4-FFF2-40B4-BE49-F238E27FC236}">
-                <a16:creationId xmlns:a16="http://schemas.microsoft.com/office/drawing/2014/main" id="{E0F3A97E-D313-48C9-B2CB-1B80F698096C}"/>
+                <a16:creationId xmlns:a16="http://schemas.microsoft.com/office/drawing/2014/main" id="{FD3C4208-59B9-4FD5-BC15-A5EB714BA20E}"/>
               </a:ext>
             </a:extLst>
           </p:cNvPr>
@@ -2760,7 +4385,7 @@
           <p:cNvPr id="11" name="">
             <a:extLst xmlns:a="http://schemas.openxmlformats.org/drawingml/2006/main">
               <a:ext uri="{FF2B5EF4-FFF2-40B4-BE49-F238E27FC236}">
-                <a16:creationId xmlns:a16="http://schemas.microsoft.com/office/drawing/2014/main" id="{979FB83D-FA42-4EBF-A4AC-264A3051B252}"/>
+                <a16:creationId xmlns:a16="http://schemas.microsoft.com/office/drawing/2014/main" id="{E36559CB-A9EC-445F-8575-7E380CF5CFD6}"/>
               </a:ext>
             </a:extLst>
           </p:cNvPr>
@@ -2811,7 +4436,7 @@
           <p:cNvPr id="12" name="">
             <a:extLst xmlns:a="http://schemas.openxmlformats.org/drawingml/2006/main">
               <a:ext uri="{FF2B5EF4-FFF2-40B4-BE49-F238E27FC236}">
-                <a16:creationId xmlns:a16="http://schemas.microsoft.com/office/drawing/2014/main" id="{BA5E9BF4-3935-489A-A57D-D6D1D6E72BFB}"/>
+                <a16:creationId xmlns:a16="http://schemas.microsoft.com/office/drawing/2014/main" id="{4CEA349D-CA16-4A29-B183-2DBFD7C9D973}"/>
               </a:ext>
             </a:extLst>
           </p:cNvPr>
@@ -2844,7 +4469,7 @@
           <p:cNvPr id="13" name="">
             <a:extLst xmlns:a="http://schemas.openxmlformats.org/drawingml/2006/main">
               <a:ext uri="{FF2B5EF4-FFF2-40B4-BE49-F238E27FC236}">
-                <a16:creationId xmlns:a16="http://schemas.microsoft.com/office/drawing/2014/main" id="{AC0B83DD-177C-41BB-BCE3-C2E270209B7D}"/>
+                <a16:creationId xmlns:a16="http://schemas.microsoft.com/office/drawing/2014/main" id="{877FCF0E-CB00-4A80-BDA5-9A81BC2FD367}"/>
               </a:ext>
             </a:extLst>
           </p:cNvPr>
@@ -2877,7 +4502,7 @@
           <p:cNvPr id="14" name="">
             <a:extLst xmlns:a="http://schemas.openxmlformats.org/drawingml/2006/main">
               <a:ext uri="{FF2B5EF4-FFF2-40B4-BE49-F238E27FC236}">
-                <a16:creationId xmlns:a16="http://schemas.microsoft.com/office/drawing/2014/main" id="{9CFBFF05-1AF2-4D59-AEC5-3C1FA3E6576A}"/>
+                <a16:creationId xmlns:a16="http://schemas.microsoft.com/office/drawing/2014/main" id="{5ADF5661-0BC7-4104-8033-00B2FD4E3936}"/>
               </a:ext>
             </a:extLst>
           </p:cNvPr>
@@ -2928,7 +4553,7 @@
           <p:cNvPr id="15" name="">
             <a:extLst xmlns:a="http://schemas.openxmlformats.org/drawingml/2006/main">
               <a:ext uri="{FF2B5EF4-FFF2-40B4-BE49-F238E27FC236}">
-                <a16:creationId xmlns:a16="http://schemas.microsoft.com/office/drawing/2014/main" id="{E1120EDC-33EA-4EA6-B681-10BA402E6CA3}"/>
+                <a16:creationId xmlns:a16="http://schemas.microsoft.com/office/drawing/2014/main" id="{D9DE753C-902C-4DBD-8347-7F6F9BD7D6FB}"/>
               </a:ext>
             </a:extLst>
           </p:cNvPr>
@@ -2979,7 +4604,7 @@
           <p:cNvPr id="16" name="">
             <a:extLst xmlns:a="http://schemas.openxmlformats.org/drawingml/2006/main">
               <a:ext uri="{FF2B5EF4-FFF2-40B4-BE49-F238E27FC236}">
-                <a16:creationId xmlns:a16="http://schemas.microsoft.com/office/drawing/2014/main" id="{A7F0C7C6-C1B2-4648-9E60-AA4D2E14B26C}"/>
+                <a16:creationId xmlns:a16="http://schemas.microsoft.com/office/drawing/2014/main" id="{3C3EBD49-07A5-4344-ABAD-E2FB836D73DB}"/>
               </a:ext>
             </a:extLst>
           </p:cNvPr>
@@ -3012,7 +4637,7 @@
           <p:cNvPr id="17" name="">
             <a:extLst xmlns:a="http://schemas.openxmlformats.org/drawingml/2006/main">
               <a:ext uri="{FF2B5EF4-FFF2-40B4-BE49-F238E27FC236}">
-                <a16:creationId xmlns:a16="http://schemas.microsoft.com/office/drawing/2014/main" id="{7A71AD7E-2A9A-47B8-9966-20AC56EE583D}"/>
+                <a16:creationId xmlns:a16="http://schemas.microsoft.com/office/drawing/2014/main" id="{843CC0B7-3783-4387-AA1B-62144378D047}"/>
               </a:ext>
             </a:extLst>
           </p:cNvPr>
@@ -3045,7 +4670,7 @@
           <p:cNvPr id="18" name="">
             <a:extLst xmlns:a="http://schemas.openxmlformats.org/drawingml/2006/main">
               <a:ext uri="{FF2B5EF4-FFF2-40B4-BE49-F238E27FC236}">
-                <a16:creationId xmlns:a16="http://schemas.microsoft.com/office/drawing/2014/main" id="{8C191600-C041-4909-BFBC-CD56A1C42471}"/>
+                <a16:creationId xmlns:a16="http://schemas.microsoft.com/office/drawing/2014/main" id="{1AFEA0DE-9A35-44A9-BA9D-4D7B376BEAFC}"/>
               </a:ext>
             </a:extLst>
           </p:cNvPr>
@@ -3096,7 +4721,7 @@
           <p:cNvPr id="19" name="">
             <a:extLst xmlns:a="http://schemas.openxmlformats.org/drawingml/2006/main">
               <a:ext uri="{FF2B5EF4-FFF2-40B4-BE49-F238E27FC236}">
-                <a16:creationId xmlns:a16="http://schemas.microsoft.com/office/drawing/2014/main" id="{70CC1913-88BB-4EAA-B647-1BE5BAAF851C}"/>
+                <a16:creationId xmlns:a16="http://schemas.microsoft.com/office/drawing/2014/main" id="{A83A55BE-C42D-4CCE-8F8D-86428B4B9733}"/>
               </a:ext>
             </a:extLst>
           </p:cNvPr>
@@ -3147,7 +4772,7 @@
           <p:cNvPr id="20" name="">
             <a:extLst xmlns:a="http://schemas.openxmlformats.org/drawingml/2006/main">
               <a:ext uri="{FF2B5EF4-FFF2-40B4-BE49-F238E27FC236}">
-                <a16:creationId xmlns:a16="http://schemas.microsoft.com/office/drawing/2014/main" id="{DEBF0815-5A7F-4B83-87CD-728DBCD1E8BD}"/>
+                <a16:creationId xmlns:a16="http://schemas.microsoft.com/office/drawing/2014/main" id="{FE31B257-A7C8-4076-B598-1E22382B765C}"/>
               </a:ext>
             </a:extLst>
           </p:cNvPr>
@@ -3180,7 +4805,7 @@
           <p:cNvPr id="21" name="">
             <a:extLst xmlns:a="http://schemas.openxmlformats.org/drawingml/2006/main">
               <a:ext uri="{FF2B5EF4-FFF2-40B4-BE49-F238E27FC236}">
-                <a16:creationId xmlns:a16="http://schemas.microsoft.com/office/drawing/2014/main" id="{47384406-D587-4D9E-B97B-365A3BEFADBE}"/>
+                <a16:creationId xmlns:a16="http://schemas.microsoft.com/office/drawing/2014/main" id="{95E1D16B-1B2C-4FAD-92C8-B41296AE5F6C}"/>
               </a:ext>
             </a:extLst>
           </p:cNvPr>
@@ -3213,7 +4838,7 @@
           <p:cNvPr id="22" name="">
             <a:extLst xmlns:a="http://schemas.openxmlformats.org/drawingml/2006/main">
               <a:ext uri="{FF2B5EF4-FFF2-40B4-BE49-F238E27FC236}">
-                <a16:creationId xmlns:a16="http://schemas.microsoft.com/office/drawing/2014/main" id="{F966A9FA-C38C-4D2E-A7F8-557BBBB7794E}"/>
+                <a16:creationId xmlns:a16="http://schemas.microsoft.com/office/drawing/2014/main" id="{672554EF-FEAF-4E20-ACBF-BF082E14E022}"/>
               </a:ext>
             </a:extLst>
           </p:cNvPr>
@@ -3264,7 +4889,7 @@
           <p:cNvPr id="23" name="">
             <a:extLst xmlns:a="http://schemas.openxmlformats.org/drawingml/2006/main">
               <a:ext uri="{FF2B5EF4-FFF2-40B4-BE49-F238E27FC236}">
-                <a16:creationId xmlns:a16="http://schemas.microsoft.com/office/drawing/2014/main" id="{0B13731B-5B4E-476E-971A-FA3FFF176135}"/>
+                <a16:creationId xmlns:a16="http://schemas.microsoft.com/office/drawing/2014/main" id="{8991927E-7D9C-42AA-A487-D30E5E5BECBA}"/>
               </a:ext>
             </a:extLst>
           </p:cNvPr>
@@ -3315,7 +4940,7 @@
           <p:cNvPr id="24" name="">
             <a:extLst xmlns:a="http://schemas.openxmlformats.org/drawingml/2006/main">
               <a:ext uri="{FF2B5EF4-FFF2-40B4-BE49-F238E27FC236}">
-                <a16:creationId xmlns:a16="http://schemas.microsoft.com/office/drawing/2014/main" id="{49AF833E-83E5-4B56-BF8D-204145D80AF3}"/>
+                <a16:creationId xmlns:a16="http://schemas.microsoft.com/office/drawing/2014/main" id="{50E10E62-C84C-4319-B98A-64D4AA0DEC64}"/>
               </a:ext>
             </a:extLst>
           </p:cNvPr>
@@ -3366,7 +4991,7 @@
           <p:cNvPr id="25" name="">
             <a:extLst xmlns:a="http://schemas.openxmlformats.org/drawingml/2006/main">
               <a:ext uri="{FF2B5EF4-FFF2-40B4-BE49-F238E27FC236}">
-                <a16:creationId xmlns:a16="http://schemas.microsoft.com/office/drawing/2014/main" id="{FAE09CF1-7E17-4915-BF38-49D1DB83F36E}"/>
+                <a16:creationId xmlns:a16="http://schemas.microsoft.com/office/drawing/2014/main" id="{3BAE0977-3AF7-44DD-B158-E842EB01D0B3}"/>
               </a:ext>
             </a:extLst>
           </p:cNvPr>
@@ -3407,7 +5032,7 @@
                   <a:srgbClr val="9FB9D2"/>
                 </a:solidFill>
               </a:rPr>
-              <a:t>10</a:t>
+              <a:t>11</a:t>
             </a:r>
           </a:p>
         </p:txBody>
@@ -3415,7 +5040,7 @@
     </p:spTree>
     <p:extLst>
       <p:ext uri="{BB962C8B-B14F-4D97-AF65-F5344CB8AC3E}">
-        <p14:creationId xmlns:p14="http://schemas.microsoft.com/office/powerpoint/2010/main" val="832855993"/>
+        <p14:creationId xmlns:p14="http://schemas.microsoft.com/office/powerpoint/2010/main" val="1075445566"/>
       </p:ext>
     </p:extLst>
   </p:cSld>
@@ -3439,7 +5064,7 @@
           <p:cNvPr id="1" name="">
             <a:extLst xmlns:a="http://schemas.openxmlformats.org/drawingml/2006/main">
               <a:ext uri="{FF2B5EF4-FFF2-40B4-BE49-F238E27FC236}">
-                <a16:creationId xmlns:a16="http://schemas.microsoft.com/office/drawing/2014/main" id="{C538E926-9373-4B64-A339-A4885B08074F}"/>
+                <a16:creationId xmlns:a16="http://schemas.microsoft.com/office/drawing/2014/main" id="{3B2D082E-33F5-436E-A617-7D3BC482F360}"/>
               </a:ext>
             </a:extLst>
           </p:cNvPr>
@@ -3472,7 +5097,7 @@
           <p:cNvPr id="2" name="">
             <a:extLst xmlns:a="http://schemas.openxmlformats.org/drawingml/2006/main">
               <a:ext uri="{FF2B5EF4-FFF2-40B4-BE49-F238E27FC236}">
-                <a16:creationId xmlns:a16="http://schemas.microsoft.com/office/drawing/2014/main" id="{C44D54BD-046E-4BEA-9271-FA7166B6E175}"/>
+                <a16:creationId xmlns:a16="http://schemas.microsoft.com/office/drawing/2014/main" id="{C570E9AA-2836-4F38-B749-BFE4483807EB}"/>
               </a:ext>
             </a:extLst>
           </p:cNvPr>
@@ -3523,7 +5148,7 @@
           <p:cNvPr id="3" name="">
             <a:extLst xmlns:a="http://schemas.openxmlformats.org/drawingml/2006/main">
               <a:ext uri="{FF2B5EF4-FFF2-40B4-BE49-F238E27FC236}">
-                <a16:creationId xmlns:a16="http://schemas.microsoft.com/office/drawing/2014/main" id="{39EAB817-5E38-4608-8F52-4FAC01D3DA59}"/>
+                <a16:creationId xmlns:a16="http://schemas.microsoft.com/office/drawing/2014/main" id="{3426E803-7201-47CB-878E-641D9D8A9A5D}"/>
               </a:ext>
             </a:extLst>
           </p:cNvPr>
@@ -3574,7 +5199,7 @@
           <p:cNvPr id="4" name="">
             <a:extLst xmlns:a="http://schemas.openxmlformats.org/drawingml/2006/main">
               <a:ext uri="{FF2B5EF4-FFF2-40B4-BE49-F238E27FC236}">
-                <a16:creationId xmlns:a16="http://schemas.microsoft.com/office/drawing/2014/main" id="{CC90A54A-05C7-4E72-8990-27BE19E5E9D9}"/>
+                <a16:creationId xmlns:a16="http://schemas.microsoft.com/office/drawing/2014/main" id="{9BC155C1-D19F-4891-B31E-6C13A6D4823A}"/>
               </a:ext>
             </a:extLst>
           </p:cNvPr>
@@ -3625,7 +5250,7 @@
           <p:cNvPr id="5" name="">
             <a:extLst xmlns:a="http://schemas.openxmlformats.org/drawingml/2006/main">
               <a:ext uri="{FF2B5EF4-FFF2-40B4-BE49-F238E27FC236}">
-                <a16:creationId xmlns:a16="http://schemas.microsoft.com/office/drawing/2014/main" id="{F038B968-DF13-42FE-A2EC-A8CAC096082A}"/>
+                <a16:creationId xmlns:a16="http://schemas.microsoft.com/office/drawing/2014/main" id="{15033870-5A6C-4FA0-8B19-46D80FFBB782}"/>
               </a:ext>
             </a:extLst>
           </p:cNvPr>
@@ -3658,7 +5283,7 @@
           <p:cNvPr id="6" name="">
             <a:extLst xmlns:a="http://schemas.openxmlformats.org/drawingml/2006/main">
               <a:ext uri="{FF2B5EF4-FFF2-40B4-BE49-F238E27FC236}">
-                <a16:creationId xmlns:a16="http://schemas.microsoft.com/office/drawing/2014/main" id="{7B55D82E-14F7-4430-A182-4EACEED267F7}"/>
+                <a16:creationId xmlns:a16="http://schemas.microsoft.com/office/drawing/2014/main" id="{EA1E97E7-10C8-4DE1-9E0C-078FD548318C}"/>
               </a:ext>
             </a:extLst>
           </p:cNvPr>
@@ -3691,7 +5316,7 @@
           <p:cNvPr id="7" name="">
             <a:extLst xmlns:a="http://schemas.openxmlformats.org/drawingml/2006/main">
               <a:ext uri="{FF2B5EF4-FFF2-40B4-BE49-F238E27FC236}">
-                <a16:creationId xmlns:a16="http://schemas.microsoft.com/office/drawing/2014/main" id="{0B160EC5-5B1B-464F-B4F4-6460B8C78437}"/>
+                <a16:creationId xmlns:a16="http://schemas.microsoft.com/office/drawing/2014/main" id="{71FF7FC3-0A6E-42EB-BEAD-431A8535CC51}"/>
               </a:ext>
             </a:extLst>
           </p:cNvPr>
@@ -3742,7 +5367,7 @@
           <p:cNvPr id="8" name="">
             <a:extLst xmlns:a="http://schemas.openxmlformats.org/drawingml/2006/main">
               <a:ext uri="{FF2B5EF4-FFF2-40B4-BE49-F238E27FC236}">
-                <a16:creationId xmlns:a16="http://schemas.microsoft.com/office/drawing/2014/main" id="{7F987930-1306-4113-ACF6-34D88928915C}"/>
+                <a16:creationId xmlns:a16="http://schemas.microsoft.com/office/drawing/2014/main" id="{A8DED2A7-FD5C-4205-A087-ADBEB0B1DBC6}"/>
               </a:ext>
             </a:extLst>
           </p:cNvPr>
@@ -3793,7 +5418,7 @@
           <p:cNvPr id="9" name="">
             <a:extLst xmlns:a="http://schemas.openxmlformats.org/drawingml/2006/main">
               <a:ext uri="{FF2B5EF4-FFF2-40B4-BE49-F238E27FC236}">
-                <a16:creationId xmlns:a16="http://schemas.microsoft.com/office/drawing/2014/main" id="{F236AD03-DA30-4E70-9E15-3B1506DE663A}"/>
+                <a16:creationId xmlns:a16="http://schemas.microsoft.com/office/drawing/2014/main" id="{E5E2F186-BD63-4E63-BD5B-D9BEF7A70CA2}"/>
               </a:ext>
             </a:extLst>
           </p:cNvPr>
@@ -3826,7 +5451,7 @@
           <p:cNvPr id="10" name="">
             <a:extLst xmlns:a="http://schemas.openxmlformats.org/drawingml/2006/main">
               <a:ext uri="{FF2B5EF4-FFF2-40B4-BE49-F238E27FC236}">
-                <a16:creationId xmlns:a16="http://schemas.microsoft.com/office/drawing/2014/main" id="{3A914DC3-B4B8-4D0E-8844-F329266BAD6D}"/>
+                <a16:creationId xmlns:a16="http://schemas.microsoft.com/office/drawing/2014/main" id="{9881A0DB-216E-4398-B96F-E80865B6A942}"/>
               </a:ext>
             </a:extLst>
           </p:cNvPr>
@@ -3859,7 +5484,7 @@
           <p:cNvPr id="11" name="">
             <a:extLst xmlns:a="http://schemas.openxmlformats.org/drawingml/2006/main">
               <a:ext uri="{FF2B5EF4-FFF2-40B4-BE49-F238E27FC236}">
-                <a16:creationId xmlns:a16="http://schemas.microsoft.com/office/drawing/2014/main" id="{A511F0E7-CFA1-48CE-98BA-F267443C9B08}"/>
+                <a16:creationId xmlns:a16="http://schemas.microsoft.com/office/drawing/2014/main" id="{4077BF3A-AAA1-4EFE-BF30-A6FC164E6212}"/>
               </a:ext>
             </a:extLst>
           </p:cNvPr>
@@ -3910,7 +5535,7 @@
           <p:cNvPr id="12" name="">
             <a:extLst xmlns:a="http://schemas.openxmlformats.org/drawingml/2006/main">
               <a:ext uri="{FF2B5EF4-FFF2-40B4-BE49-F238E27FC236}">
-                <a16:creationId xmlns:a16="http://schemas.microsoft.com/office/drawing/2014/main" id="{C976AF39-4791-4FDF-B601-94F4990800F7}"/>
+                <a16:creationId xmlns:a16="http://schemas.microsoft.com/office/drawing/2014/main" id="{80AF966D-E12E-4C18-BD0F-9795BDC3A39A}"/>
               </a:ext>
             </a:extLst>
           </p:cNvPr>
@@ -3961,7 +5586,7 @@
           <p:cNvPr id="13" name="">
             <a:extLst xmlns:a="http://schemas.openxmlformats.org/drawingml/2006/main">
               <a:ext uri="{FF2B5EF4-FFF2-40B4-BE49-F238E27FC236}">
-                <a16:creationId xmlns:a16="http://schemas.microsoft.com/office/drawing/2014/main" id="{04454C4D-E123-4CA6-AE54-D4B8BD5CDAAE}"/>
+                <a16:creationId xmlns:a16="http://schemas.microsoft.com/office/drawing/2014/main" id="{4193D793-8A55-41B8-8C31-B2E91064E6D7}"/>
               </a:ext>
             </a:extLst>
           </p:cNvPr>
@@ -3994,7 +5619,7 @@
           <p:cNvPr id="14" name="">
             <a:extLst xmlns:a="http://schemas.openxmlformats.org/drawingml/2006/main">
               <a:ext uri="{FF2B5EF4-FFF2-40B4-BE49-F238E27FC236}">
-                <a16:creationId xmlns:a16="http://schemas.microsoft.com/office/drawing/2014/main" id="{C4FF563F-8B7C-46DD-82FD-5C4E92D89BA9}"/>
+                <a16:creationId xmlns:a16="http://schemas.microsoft.com/office/drawing/2014/main" id="{F44622FC-EDED-464A-9E4E-68284238F5C0}"/>
               </a:ext>
             </a:extLst>
           </p:cNvPr>
@@ -4027,7 +5652,7 @@
           <p:cNvPr id="15" name="">
             <a:extLst xmlns:a="http://schemas.openxmlformats.org/drawingml/2006/main">
               <a:ext uri="{FF2B5EF4-FFF2-40B4-BE49-F238E27FC236}">
-                <a16:creationId xmlns:a16="http://schemas.microsoft.com/office/drawing/2014/main" id="{E8C133EE-416E-42A4-9C86-BDD9CC121386}"/>
+                <a16:creationId xmlns:a16="http://schemas.microsoft.com/office/drawing/2014/main" id="{489963E5-E55A-4379-A70D-A6D6CE095FE4}"/>
               </a:ext>
             </a:extLst>
           </p:cNvPr>
@@ -4078,7 +5703,7 @@
           <p:cNvPr id="16" name="">
             <a:extLst xmlns:a="http://schemas.openxmlformats.org/drawingml/2006/main">
               <a:ext uri="{FF2B5EF4-FFF2-40B4-BE49-F238E27FC236}">
-                <a16:creationId xmlns:a16="http://schemas.microsoft.com/office/drawing/2014/main" id="{ADBF3DD7-564F-4E1E-8384-27DFB20FC5E6}"/>
+                <a16:creationId xmlns:a16="http://schemas.microsoft.com/office/drawing/2014/main" id="{B7E8E02B-688B-4EEF-A974-7F7B0718C148}"/>
               </a:ext>
             </a:extLst>
           </p:cNvPr>
@@ -4129,7 +5754,7 @@
           <p:cNvPr id="17" name="">
             <a:extLst xmlns:a="http://schemas.openxmlformats.org/drawingml/2006/main">
               <a:ext uri="{FF2B5EF4-FFF2-40B4-BE49-F238E27FC236}">
-                <a16:creationId xmlns:a16="http://schemas.microsoft.com/office/drawing/2014/main" id="{24A00BC3-4EE1-4828-998A-1C17DE9DBA2B}"/>
+                <a16:creationId xmlns:a16="http://schemas.microsoft.com/office/drawing/2014/main" id="{FD42A0CC-774B-44EF-A409-E2933A8186DF}"/>
               </a:ext>
             </a:extLst>
           </p:cNvPr>
@@ -4162,7 +5787,7 @@
           <p:cNvPr id="18" name="">
             <a:extLst xmlns:a="http://schemas.openxmlformats.org/drawingml/2006/main">
               <a:ext uri="{FF2B5EF4-FFF2-40B4-BE49-F238E27FC236}">
-                <a16:creationId xmlns:a16="http://schemas.microsoft.com/office/drawing/2014/main" id="{C0EC290D-34D2-4F30-B239-E54344FE9F94}"/>
+                <a16:creationId xmlns:a16="http://schemas.microsoft.com/office/drawing/2014/main" id="{FDCF1D60-D0CC-4E7D-BA1F-E24E4EBEE44C}"/>
               </a:ext>
             </a:extLst>
           </p:cNvPr>
@@ -4195,7 +5820,7 @@
           <p:cNvPr id="19" name="">
             <a:extLst xmlns:a="http://schemas.openxmlformats.org/drawingml/2006/main">
               <a:ext uri="{FF2B5EF4-FFF2-40B4-BE49-F238E27FC236}">
-                <a16:creationId xmlns:a16="http://schemas.microsoft.com/office/drawing/2014/main" id="{743475C0-4951-4683-BDB7-5932C3D32E0A}"/>
+                <a16:creationId xmlns:a16="http://schemas.microsoft.com/office/drawing/2014/main" id="{47D5F5CD-8AA4-4DE2-9550-ACDBB312CF57}"/>
               </a:ext>
             </a:extLst>
           </p:cNvPr>
@@ -4246,7 +5871,7 @@
           <p:cNvPr id="20" name="">
             <a:extLst xmlns:a="http://schemas.openxmlformats.org/drawingml/2006/main">
               <a:ext uri="{FF2B5EF4-FFF2-40B4-BE49-F238E27FC236}">
-                <a16:creationId xmlns:a16="http://schemas.microsoft.com/office/drawing/2014/main" id="{A713B8D9-D525-486F-A24C-333A3CC631DB}"/>
+                <a16:creationId xmlns:a16="http://schemas.microsoft.com/office/drawing/2014/main" id="{7D5AF23D-7E44-450B-ABC2-20545D262A93}"/>
               </a:ext>
             </a:extLst>
           </p:cNvPr>
@@ -4297,7 +5922,7 @@
           <p:cNvPr id="21" name="">
             <a:extLst xmlns:a="http://schemas.openxmlformats.org/drawingml/2006/main">
               <a:ext uri="{FF2B5EF4-FFF2-40B4-BE49-F238E27FC236}">
-                <a16:creationId xmlns:a16="http://schemas.microsoft.com/office/drawing/2014/main" id="{1595BF01-89AD-427A-BF69-4A7C0A0D8B89}"/>
+                <a16:creationId xmlns:a16="http://schemas.microsoft.com/office/drawing/2014/main" id="{6FE5DDAA-C85E-414D-8B0B-D71A0720442E}"/>
               </a:ext>
             </a:extLst>
           </p:cNvPr>
@@ -4330,7 +5955,7 @@
           <p:cNvPr id="22" name="">
             <a:extLst xmlns:a="http://schemas.openxmlformats.org/drawingml/2006/main">
               <a:ext uri="{FF2B5EF4-FFF2-40B4-BE49-F238E27FC236}">
-                <a16:creationId xmlns:a16="http://schemas.microsoft.com/office/drawing/2014/main" id="{D57462EA-0A45-4A77-B518-4E6B9BCB5C7D}"/>
+                <a16:creationId xmlns:a16="http://schemas.microsoft.com/office/drawing/2014/main" id="{59CFDBAB-2174-4A5E-801F-68ED81BF50F6}"/>
               </a:ext>
             </a:extLst>
           </p:cNvPr>
@@ -4363,7 +5988,7 @@
           <p:cNvPr id="23" name="">
             <a:extLst xmlns:a="http://schemas.openxmlformats.org/drawingml/2006/main">
               <a:ext uri="{FF2B5EF4-FFF2-40B4-BE49-F238E27FC236}">
-                <a16:creationId xmlns:a16="http://schemas.microsoft.com/office/drawing/2014/main" id="{418CDA4B-164D-4320-B8C2-D48C2C1E5F15}"/>
+                <a16:creationId xmlns:a16="http://schemas.microsoft.com/office/drawing/2014/main" id="{BB791FF8-50F3-47CD-A9A1-544230148A05}"/>
               </a:ext>
             </a:extLst>
           </p:cNvPr>
@@ -4414,7 +6039,7 @@
           <p:cNvPr id="24" name="">
             <a:extLst xmlns:a="http://schemas.openxmlformats.org/drawingml/2006/main">
               <a:ext uri="{FF2B5EF4-FFF2-40B4-BE49-F238E27FC236}">
-                <a16:creationId xmlns:a16="http://schemas.microsoft.com/office/drawing/2014/main" id="{9B3B35AA-FDC8-4401-9881-0F567BBC369C}"/>
+                <a16:creationId xmlns:a16="http://schemas.microsoft.com/office/drawing/2014/main" id="{6595A59A-3E5F-4F75-BD1C-444D53A36E4D}"/>
               </a:ext>
             </a:extLst>
           </p:cNvPr>
@@ -4465,7 +6090,7 @@
           <p:cNvPr id="25" name="">
             <a:extLst xmlns:a="http://schemas.openxmlformats.org/drawingml/2006/main">
               <a:ext uri="{FF2B5EF4-FFF2-40B4-BE49-F238E27FC236}">
-                <a16:creationId xmlns:a16="http://schemas.microsoft.com/office/drawing/2014/main" id="{DBF5206C-660C-4E24-9311-2A02451512F9}"/>
+                <a16:creationId xmlns:a16="http://schemas.microsoft.com/office/drawing/2014/main" id="{882643BB-1D58-460C-B28D-FDF9737BA071}"/>
               </a:ext>
             </a:extLst>
           </p:cNvPr>
@@ -4498,7 +6123,7 @@
           <p:cNvPr id="26" name="">
             <a:extLst xmlns:a="http://schemas.openxmlformats.org/drawingml/2006/main">
               <a:ext uri="{FF2B5EF4-FFF2-40B4-BE49-F238E27FC236}">
-                <a16:creationId xmlns:a16="http://schemas.microsoft.com/office/drawing/2014/main" id="{E44E8A4F-5386-4C56-A170-62ADFA490B74}"/>
+                <a16:creationId xmlns:a16="http://schemas.microsoft.com/office/drawing/2014/main" id="{B1344B9E-1166-4D6A-B8F4-BCE3D6F3DE92}"/>
               </a:ext>
             </a:extLst>
           </p:cNvPr>
@@ -4531,7 +6156,7 @@
           <p:cNvPr id="27" name="">
             <a:extLst xmlns:a="http://schemas.openxmlformats.org/drawingml/2006/main">
               <a:ext uri="{FF2B5EF4-FFF2-40B4-BE49-F238E27FC236}">
-                <a16:creationId xmlns:a16="http://schemas.microsoft.com/office/drawing/2014/main" id="{800B3BD5-06E8-4C27-A2A8-74977161216E}"/>
+                <a16:creationId xmlns:a16="http://schemas.microsoft.com/office/drawing/2014/main" id="{6FF8105F-1D47-4073-9071-49CF18CA6FB2}"/>
               </a:ext>
             </a:extLst>
           </p:cNvPr>
@@ -4582,7 +6207,7 @@
           <p:cNvPr id="28" name="">
             <a:extLst xmlns:a="http://schemas.openxmlformats.org/drawingml/2006/main">
               <a:ext uri="{FF2B5EF4-FFF2-40B4-BE49-F238E27FC236}">
-                <a16:creationId xmlns:a16="http://schemas.microsoft.com/office/drawing/2014/main" id="{33A6677E-BDA3-459A-9929-75117A6ABE66}"/>
+                <a16:creationId xmlns:a16="http://schemas.microsoft.com/office/drawing/2014/main" id="{5CBFBEF4-63B4-4BAF-8F13-04D61F5F62DD}"/>
               </a:ext>
             </a:extLst>
           </p:cNvPr>
@@ -4633,7 +6258,7 @@
           <p:cNvPr id="29" name="">
             <a:extLst xmlns:a="http://schemas.openxmlformats.org/drawingml/2006/main">
               <a:ext uri="{FF2B5EF4-FFF2-40B4-BE49-F238E27FC236}">
-                <a16:creationId xmlns:a16="http://schemas.microsoft.com/office/drawing/2014/main" id="{C7893E77-D0EF-49E1-915F-1EC67FC7A484}"/>
+                <a16:creationId xmlns:a16="http://schemas.microsoft.com/office/drawing/2014/main" id="{B2B0F18C-4425-48EA-82EA-EBE92E4A521B}"/>
               </a:ext>
             </a:extLst>
           </p:cNvPr>
@@ -4666,7 +6291,7 @@
           <p:cNvPr id="30" name="">
             <a:extLst xmlns:a="http://schemas.openxmlformats.org/drawingml/2006/main">
               <a:ext uri="{FF2B5EF4-FFF2-40B4-BE49-F238E27FC236}">
-                <a16:creationId xmlns:a16="http://schemas.microsoft.com/office/drawing/2014/main" id="{C642A4C4-3961-413F-AEBC-780E1C02D90F}"/>
+                <a16:creationId xmlns:a16="http://schemas.microsoft.com/office/drawing/2014/main" id="{0AB7571E-5A13-4666-91BB-69E0104C1759}"/>
               </a:ext>
             </a:extLst>
           </p:cNvPr>
@@ -4699,7 +6324,7 @@
           <p:cNvPr id="31" name="">
             <a:extLst xmlns:a="http://schemas.openxmlformats.org/drawingml/2006/main">
               <a:ext uri="{FF2B5EF4-FFF2-40B4-BE49-F238E27FC236}">
-                <a16:creationId xmlns:a16="http://schemas.microsoft.com/office/drawing/2014/main" id="{A1A6B12B-30E7-4A98-8126-4481003808EE}"/>
+                <a16:creationId xmlns:a16="http://schemas.microsoft.com/office/drawing/2014/main" id="{15329137-7BB6-4E58-B5F5-35543FD1C225}"/>
               </a:ext>
             </a:extLst>
           </p:cNvPr>
@@ -4750,7 +6375,7 @@
           <p:cNvPr id="32" name="">
             <a:extLst xmlns:a="http://schemas.openxmlformats.org/drawingml/2006/main">
               <a:ext uri="{FF2B5EF4-FFF2-40B4-BE49-F238E27FC236}">
-                <a16:creationId xmlns:a16="http://schemas.microsoft.com/office/drawing/2014/main" id="{E1346287-FDF7-4872-9E00-BA8142B60C56}"/>
+                <a16:creationId xmlns:a16="http://schemas.microsoft.com/office/drawing/2014/main" id="{F8BB5714-548E-4B24-A1CF-A6B73F9D40BD}"/>
               </a:ext>
             </a:extLst>
           </p:cNvPr>
@@ -4801,7 +6426,7 @@
           <p:cNvPr id="33" name="">
             <a:extLst xmlns:a="http://schemas.openxmlformats.org/drawingml/2006/main">
               <a:ext uri="{FF2B5EF4-FFF2-40B4-BE49-F238E27FC236}">
-                <a16:creationId xmlns:a16="http://schemas.microsoft.com/office/drawing/2014/main" id="{C534D3D1-34E9-4B8F-8A67-12F9390A709F}"/>
+                <a16:creationId xmlns:a16="http://schemas.microsoft.com/office/drawing/2014/main" id="{74717E0C-2D03-484C-9489-B5F319D955DA}"/>
               </a:ext>
             </a:extLst>
           </p:cNvPr>
@@ -4852,7 +6477,7 @@
           <p:cNvPr id="34" name="">
             <a:extLst xmlns:a="http://schemas.openxmlformats.org/drawingml/2006/main">
               <a:ext uri="{FF2B5EF4-FFF2-40B4-BE49-F238E27FC236}">
-                <a16:creationId xmlns:a16="http://schemas.microsoft.com/office/drawing/2014/main" id="{DE8DB04D-A4E8-45D8-8D92-9F13A471727A}"/>
+                <a16:creationId xmlns:a16="http://schemas.microsoft.com/office/drawing/2014/main" id="{2E472409-3FF6-4389-822A-48E5030F6C72}"/>
               </a:ext>
             </a:extLst>
           </p:cNvPr>
@@ -4901,7 +6526,7 @@
     </p:spTree>
     <p:extLst>
       <p:ext uri="{BB962C8B-B14F-4D97-AF65-F5344CB8AC3E}">
-        <p14:creationId xmlns:p14="http://schemas.microsoft.com/office/powerpoint/2010/main" val="919630498"/>
+        <p14:creationId xmlns:p14="http://schemas.microsoft.com/office/powerpoint/2010/main" val="318801805"/>
       </p:ext>
     </p:extLst>
   </p:cSld>
@@ -4925,7 +6550,7 @@
           <p:cNvPr id="1" name="">
             <a:extLst xmlns:a="http://schemas.openxmlformats.org/drawingml/2006/main">
               <a:ext uri="{FF2B5EF4-FFF2-40B4-BE49-F238E27FC236}">
-                <a16:creationId xmlns:a16="http://schemas.microsoft.com/office/drawing/2014/main" id="{590884CC-74D7-4F19-A91D-B90CDD9AC749}"/>
+                <a16:creationId xmlns:a16="http://schemas.microsoft.com/office/drawing/2014/main" id="{C75248DF-86D7-4658-BF12-C0F1C7272495}"/>
               </a:ext>
             </a:extLst>
           </p:cNvPr>
@@ -4958,7 +6583,7 @@
           <p:cNvPr id="2" name="">
             <a:extLst xmlns:a="http://schemas.openxmlformats.org/drawingml/2006/main">
               <a:ext uri="{FF2B5EF4-FFF2-40B4-BE49-F238E27FC236}">
-                <a16:creationId xmlns:a16="http://schemas.microsoft.com/office/drawing/2014/main" id="{F8B9CDE6-833D-4CC5-83F4-79446360D39B}"/>
+                <a16:creationId xmlns:a16="http://schemas.microsoft.com/office/drawing/2014/main" id="{DCBDA448-ADD4-4448-A220-B5942DBA4DB2}"/>
               </a:ext>
             </a:extLst>
           </p:cNvPr>
@@ -5009,7 +6634,7 @@
           <p:cNvPr id="3" name="">
             <a:extLst xmlns:a="http://schemas.openxmlformats.org/drawingml/2006/main">
               <a:ext uri="{FF2B5EF4-FFF2-40B4-BE49-F238E27FC236}">
-                <a16:creationId xmlns:a16="http://schemas.microsoft.com/office/drawing/2014/main" id="{C122A254-926B-4C7F-9504-DAAEE98023C1}"/>
+                <a16:creationId xmlns:a16="http://schemas.microsoft.com/office/drawing/2014/main" id="{BD265EFE-494E-4D2D-9162-FCB6FCB7B669}"/>
               </a:ext>
             </a:extLst>
           </p:cNvPr>
@@ -5060,7 +6685,7 @@
           <p:cNvPr id="4" name="">
             <a:extLst xmlns:a="http://schemas.openxmlformats.org/drawingml/2006/main">
               <a:ext uri="{FF2B5EF4-FFF2-40B4-BE49-F238E27FC236}">
-                <a16:creationId xmlns:a16="http://schemas.microsoft.com/office/drawing/2014/main" id="{D71BB061-59A3-4192-B867-8382157E7F36}"/>
+                <a16:creationId xmlns:a16="http://schemas.microsoft.com/office/drawing/2014/main" id="{05D4DAF1-3753-4E3E-B032-6D353DB0250F}"/>
               </a:ext>
             </a:extLst>
           </p:cNvPr>
@@ -5093,7 +6718,7 @@
           <p:cNvPr id="5" name="">
             <a:extLst xmlns:a="http://schemas.openxmlformats.org/drawingml/2006/main">
               <a:ext uri="{FF2B5EF4-FFF2-40B4-BE49-F238E27FC236}">
-                <a16:creationId xmlns:a16="http://schemas.microsoft.com/office/drawing/2014/main" id="{8ADBA5DF-F5F2-4737-BB2C-1098E294E703}"/>
+                <a16:creationId xmlns:a16="http://schemas.microsoft.com/office/drawing/2014/main" id="{ABCE024C-B05D-448C-9FCC-CBF23B02A5B8}"/>
               </a:ext>
             </a:extLst>
           </p:cNvPr>
@@ -5126,7 +6751,7 @@
           <p:cNvPr id="6" name="">
             <a:extLst xmlns:a="http://schemas.openxmlformats.org/drawingml/2006/main">
               <a:ext uri="{FF2B5EF4-FFF2-40B4-BE49-F238E27FC236}">
-                <a16:creationId xmlns:a16="http://schemas.microsoft.com/office/drawing/2014/main" id="{DD361976-5E32-4201-8C54-87AF29EC95AA}"/>
+                <a16:creationId xmlns:a16="http://schemas.microsoft.com/office/drawing/2014/main" id="{C263E332-717E-4BA2-8231-B248844585BE}"/>
               </a:ext>
             </a:extLst>
           </p:cNvPr>
@@ -5177,7 +6802,7 @@
           <p:cNvPr id="7" name="">
             <a:extLst xmlns:a="http://schemas.openxmlformats.org/drawingml/2006/main">
               <a:ext uri="{FF2B5EF4-FFF2-40B4-BE49-F238E27FC236}">
-                <a16:creationId xmlns:a16="http://schemas.microsoft.com/office/drawing/2014/main" id="{BC972587-5F3F-48FE-8C8F-728F870F57B8}"/>
+                <a16:creationId xmlns:a16="http://schemas.microsoft.com/office/drawing/2014/main" id="{B421E990-C302-4A23-BE6E-D45D5039AC78}"/>
               </a:ext>
             </a:extLst>
           </p:cNvPr>
@@ -5210,7 +6835,7 @@
           <p:cNvPr id="8" name="">
             <a:extLst xmlns:a="http://schemas.openxmlformats.org/drawingml/2006/main">
               <a:ext uri="{FF2B5EF4-FFF2-40B4-BE49-F238E27FC236}">
-                <a16:creationId xmlns:a16="http://schemas.microsoft.com/office/drawing/2014/main" id="{53450CE3-1EDE-4407-A14B-89C9815035ED}"/>
+                <a16:creationId xmlns:a16="http://schemas.microsoft.com/office/drawing/2014/main" id="{449F73A3-AD1D-4A7E-A879-5F015D69B79E}"/>
               </a:ext>
             </a:extLst>
           </p:cNvPr>
@@ -5261,7 +6886,7 @@
           <p:cNvPr id="9" name="">
             <a:extLst xmlns:a="http://schemas.openxmlformats.org/drawingml/2006/main">
               <a:ext uri="{FF2B5EF4-FFF2-40B4-BE49-F238E27FC236}">
-                <a16:creationId xmlns:a16="http://schemas.microsoft.com/office/drawing/2014/main" id="{9191C8E3-DDE9-4ACE-9A57-541E9093F63D}"/>
+                <a16:creationId xmlns:a16="http://schemas.microsoft.com/office/drawing/2014/main" id="{A6DFAFFE-DABB-4D38-9B0A-6C9EA6974A14}"/>
               </a:ext>
             </a:extLst>
           </p:cNvPr>
@@ -5294,7 +6919,7 @@
           <p:cNvPr id="10" name="">
             <a:extLst xmlns:a="http://schemas.openxmlformats.org/drawingml/2006/main">
               <a:ext uri="{FF2B5EF4-FFF2-40B4-BE49-F238E27FC236}">
-                <a16:creationId xmlns:a16="http://schemas.microsoft.com/office/drawing/2014/main" id="{A20BEF64-B675-48DD-A99B-7F8545F88427}"/>
+                <a16:creationId xmlns:a16="http://schemas.microsoft.com/office/drawing/2014/main" id="{195DD952-81D6-4A24-813E-6B5C3424E649}"/>
               </a:ext>
             </a:extLst>
           </p:cNvPr>
@@ -5345,7 +6970,7 @@
           <p:cNvPr id="11" name="">
             <a:extLst xmlns:a="http://schemas.openxmlformats.org/drawingml/2006/main">
               <a:ext uri="{FF2B5EF4-FFF2-40B4-BE49-F238E27FC236}">
-                <a16:creationId xmlns:a16="http://schemas.microsoft.com/office/drawing/2014/main" id="{AEBBC36F-4843-4DB6-95F3-0AF0E2047B73}"/>
+                <a16:creationId xmlns:a16="http://schemas.microsoft.com/office/drawing/2014/main" id="{32122382-AC46-4DB2-BDE5-A601FBE5D4FE}"/>
               </a:ext>
             </a:extLst>
           </p:cNvPr>
@@ -5378,7 +7003,7 @@
           <p:cNvPr id="12" name="">
             <a:extLst xmlns:a="http://schemas.openxmlformats.org/drawingml/2006/main">
               <a:ext uri="{FF2B5EF4-FFF2-40B4-BE49-F238E27FC236}">
-                <a16:creationId xmlns:a16="http://schemas.microsoft.com/office/drawing/2014/main" id="{5D13408D-8A1A-419A-9B84-54B655848038}"/>
+                <a16:creationId xmlns:a16="http://schemas.microsoft.com/office/drawing/2014/main" id="{93A835F9-CB8D-4F1B-99A4-52DE976904FC}"/>
               </a:ext>
             </a:extLst>
           </p:cNvPr>
@@ -5429,7 +7054,7 @@
           <p:cNvPr id="13" name="">
             <a:extLst xmlns:a="http://schemas.openxmlformats.org/drawingml/2006/main">
               <a:ext uri="{FF2B5EF4-FFF2-40B4-BE49-F238E27FC236}">
-                <a16:creationId xmlns:a16="http://schemas.microsoft.com/office/drawing/2014/main" id="{DA8B5B44-86C0-4B52-B27B-C5FC76291DED}"/>
+                <a16:creationId xmlns:a16="http://schemas.microsoft.com/office/drawing/2014/main" id="{B1FB066B-34F9-4BEE-965E-3DA274F193F1}"/>
               </a:ext>
             </a:extLst>
           </p:cNvPr>
@@ -5462,7 +7087,7 @@
           <p:cNvPr id="14" name="">
             <a:extLst xmlns:a="http://schemas.openxmlformats.org/drawingml/2006/main">
               <a:ext uri="{FF2B5EF4-FFF2-40B4-BE49-F238E27FC236}">
-                <a16:creationId xmlns:a16="http://schemas.microsoft.com/office/drawing/2014/main" id="{46FAE7F5-8645-4C3A-8AE8-BC7A6554F26B}"/>
+                <a16:creationId xmlns:a16="http://schemas.microsoft.com/office/drawing/2014/main" id="{1C234E9E-6B65-422D-B4CC-FA8B01BF4057}"/>
               </a:ext>
             </a:extLst>
           </p:cNvPr>
@@ -5513,7 +7138,7 @@
           <p:cNvPr id="15" name="">
             <a:extLst xmlns:a="http://schemas.openxmlformats.org/drawingml/2006/main">
               <a:ext uri="{FF2B5EF4-FFF2-40B4-BE49-F238E27FC236}">
-                <a16:creationId xmlns:a16="http://schemas.microsoft.com/office/drawing/2014/main" id="{FEB03D7A-FCD4-4D50-90AB-73B0F4F27D54}"/>
+                <a16:creationId xmlns:a16="http://schemas.microsoft.com/office/drawing/2014/main" id="{7B4789D1-003A-4D38-9795-FA3657BE075E}"/>
               </a:ext>
             </a:extLst>
           </p:cNvPr>
@@ -5546,7 +7171,7 @@
           <p:cNvPr id="16" name="">
             <a:extLst xmlns:a="http://schemas.openxmlformats.org/drawingml/2006/main">
               <a:ext uri="{FF2B5EF4-FFF2-40B4-BE49-F238E27FC236}">
-                <a16:creationId xmlns:a16="http://schemas.microsoft.com/office/drawing/2014/main" id="{3CED3258-D290-4F8D-95CD-AE3A0D914AB6}"/>
+                <a16:creationId xmlns:a16="http://schemas.microsoft.com/office/drawing/2014/main" id="{2B24D63F-68BF-48D0-9669-995E9A66611B}"/>
               </a:ext>
             </a:extLst>
           </p:cNvPr>
@@ -5579,7 +7204,7 @@
           <p:cNvPr id="17" name="">
             <a:extLst xmlns:a="http://schemas.openxmlformats.org/drawingml/2006/main">
               <a:ext uri="{FF2B5EF4-FFF2-40B4-BE49-F238E27FC236}">
-                <a16:creationId xmlns:a16="http://schemas.microsoft.com/office/drawing/2014/main" id="{3D3B77A1-4834-4308-A8E4-4EADECD3441D}"/>
+                <a16:creationId xmlns:a16="http://schemas.microsoft.com/office/drawing/2014/main" id="{FE4A2958-41D5-4E77-B02F-987FA708837C}"/>
               </a:ext>
             </a:extLst>
           </p:cNvPr>
@@ -5630,7 +7255,7 @@
           <p:cNvPr id="18" name="">
             <a:extLst xmlns:a="http://schemas.openxmlformats.org/drawingml/2006/main">
               <a:ext uri="{FF2B5EF4-FFF2-40B4-BE49-F238E27FC236}">
-                <a16:creationId xmlns:a16="http://schemas.microsoft.com/office/drawing/2014/main" id="{2AACC19C-3897-4B39-A0D1-74CBE6D3E166}"/>
+                <a16:creationId xmlns:a16="http://schemas.microsoft.com/office/drawing/2014/main" id="{C14835E8-C091-4324-AEC0-CFCB06AFEAC4}"/>
               </a:ext>
             </a:extLst>
           </p:cNvPr>
@@ -5663,7 +7288,7 @@
           <p:cNvPr id="19" name="">
             <a:extLst xmlns:a="http://schemas.openxmlformats.org/drawingml/2006/main">
               <a:ext uri="{FF2B5EF4-FFF2-40B4-BE49-F238E27FC236}">
-                <a16:creationId xmlns:a16="http://schemas.microsoft.com/office/drawing/2014/main" id="{C1AC2BEB-04CC-41CC-A37C-526EEB58A9B8}"/>
+                <a16:creationId xmlns:a16="http://schemas.microsoft.com/office/drawing/2014/main" id="{67CF6907-6AF5-4277-8C1F-C0F1ADC510E3}"/>
               </a:ext>
             </a:extLst>
           </p:cNvPr>
@@ -5714,7 +7339,7 @@
           <p:cNvPr id="20" name="">
             <a:extLst xmlns:a="http://schemas.openxmlformats.org/drawingml/2006/main">
               <a:ext uri="{FF2B5EF4-FFF2-40B4-BE49-F238E27FC236}">
-                <a16:creationId xmlns:a16="http://schemas.microsoft.com/office/drawing/2014/main" id="{0C014D61-1979-42D8-B5C8-BFDAAF816C60}"/>
+                <a16:creationId xmlns:a16="http://schemas.microsoft.com/office/drawing/2014/main" id="{2D4FDD1E-746B-4D33-AEC6-474CF82786E7}"/>
               </a:ext>
             </a:extLst>
           </p:cNvPr>
@@ -5747,7 +7372,7 @@
           <p:cNvPr id="21" name="">
             <a:extLst xmlns:a="http://schemas.openxmlformats.org/drawingml/2006/main">
               <a:ext uri="{FF2B5EF4-FFF2-40B4-BE49-F238E27FC236}">
-                <a16:creationId xmlns:a16="http://schemas.microsoft.com/office/drawing/2014/main" id="{BFAF72FC-290A-4F7C-8493-313A6123BBD5}"/>
+                <a16:creationId xmlns:a16="http://schemas.microsoft.com/office/drawing/2014/main" id="{86E74080-7DE3-4E02-BB3F-E4E18AC0F736}"/>
               </a:ext>
             </a:extLst>
           </p:cNvPr>
@@ -5798,7 +7423,7 @@
           <p:cNvPr id="22" name="">
             <a:extLst xmlns:a="http://schemas.openxmlformats.org/drawingml/2006/main">
               <a:ext uri="{FF2B5EF4-FFF2-40B4-BE49-F238E27FC236}">
-                <a16:creationId xmlns:a16="http://schemas.microsoft.com/office/drawing/2014/main" id="{4FFEB58C-FFDC-4F39-875A-DD10974E3E72}"/>
+                <a16:creationId xmlns:a16="http://schemas.microsoft.com/office/drawing/2014/main" id="{426D167C-3529-4274-BD23-8C5B8A66C32C}"/>
               </a:ext>
             </a:extLst>
           </p:cNvPr>
@@ -5831,7 +7456,7 @@
           <p:cNvPr id="23" name="">
             <a:extLst xmlns:a="http://schemas.openxmlformats.org/drawingml/2006/main">
               <a:ext uri="{FF2B5EF4-FFF2-40B4-BE49-F238E27FC236}">
-                <a16:creationId xmlns:a16="http://schemas.microsoft.com/office/drawing/2014/main" id="{F7127438-0E20-4083-BA93-C678950A013D}"/>
+                <a16:creationId xmlns:a16="http://schemas.microsoft.com/office/drawing/2014/main" id="{ED721584-27CF-4A31-8833-2BA1EB4C4C27}"/>
               </a:ext>
             </a:extLst>
           </p:cNvPr>
@@ -5882,7 +7507,7 @@
           <p:cNvPr id="24" name="">
             <a:extLst xmlns:a="http://schemas.openxmlformats.org/drawingml/2006/main">
               <a:ext uri="{FF2B5EF4-FFF2-40B4-BE49-F238E27FC236}">
-                <a16:creationId xmlns:a16="http://schemas.microsoft.com/office/drawing/2014/main" id="{E0BD7957-5470-4676-A27E-CB3D1F1C3294}"/>
+                <a16:creationId xmlns:a16="http://schemas.microsoft.com/office/drawing/2014/main" id="{FB2F7D71-B591-4154-AA99-59BE390D56B6}"/>
               </a:ext>
             </a:extLst>
           </p:cNvPr>
@@ -5915,7 +7540,7 @@
           <p:cNvPr id="25" name="">
             <a:extLst xmlns:a="http://schemas.openxmlformats.org/drawingml/2006/main">
               <a:ext uri="{FF2B5EF4-FFF2-40B4-BE49-F238E27FC236}">
-                <a16:creationId xmlns:a16="http://schemas.microsoft.com/office/drawing/2014/main" id="{816F7F71-C9C5-472A-9989-66AA31D22EE8}"/>
+                <a16:creationId xmlns:a16="http://schemas.microsoft.com/office/drawing/2014/main" id="{F0A849B6-FA49-41BA-BCF1-C6471B89D1D2}"/>
               </a:ext>
             </a:extLst>
           </p:cNvPr>
@@ -5966,7 +7591,7 @@
           <p:cNvPr id="26" name="">
             <a:extLst xmlns:a="http://schemas.openxmlformats.org/drawingml/2006/main">
               <a:ext uri="{FF2B5EF4-FFF2-40B4-BE49-F238E27FC236}">
-                <a16:creationId xmlns:a16="http://schemas.microsoft.com/office/drawing/2014/main" id="{B6C377F0-D76B-4CF5-B5F7-41A270BDE296}"/>
+                <a16:creationId xmlns:a16="http://schemas.microsoft.com/office/drawing/2014/main" id="{7AF294BF-55DE-4555-BBFD-E21E24E42828}"/>
               </a:ext>
             </a:extLst>
           </p:cNvPr>
@@ -5999,7 +7624,7 @@
           <p:cNvPr id="27" name="">
             <a:extLst xmlns:a="http://schemas.openxmlformats.org/drawingml/2006/main">
               <a:ext uri="{FF2B5EF4-FFF2-40B4-BE49-F238E27FC236}">
-                <a16:creationId xmlns:a16="http://schemas.microsoft.com/office/drawing/2014/main" id="{BC5303FE-BC73-406D-B605-354B75A7055D}"/>
+                <a16:creationId xmlns:a16="http://schemas.microsoft.com/office/drawing/2014/main" id="{BAFABB9B-970B-43EC-8E2B-9375B46D6D6B}"/>
               </a:ext>
             </a:extLst>
           </p:cNvPr>
@@ -6032,7 +7657,7 @@
           <p:cNvPr id="28" name="">
             <a:extLst xmlns:a="http://schemas.openxmlformats.org/drawingml/2006/main">
               <a:ext uri="{FF2B5EF4-FFF2-40B4-BE49-F238E27FC236}">
-                <a16:creationId xmlns:a16="http://schemas.microsoft.com/office/drawing/2014/main" id="{3DD9B710-C5BF-4223-A922-16CD4539D7E4}"/>
+                <a16:creationId xmlns:a16="http://schemas.microsoft.com/office/drawing/2014/main" id="{58A27230-44D1-44B2-BB49-B322F16ECE7B}"/>
               </a:ext>
             </a:extLst>
           </p:cNvPr>
@@ -6083,7 +7708,7 @@
           <p:cNvPr id="29" name="">
             <a:extLst xmlns:a="http://schemas.openxmlformats.org/drawingml/2006/main">
               <a:ext uri="{FF2B5EF4-FFF2-40B4-BE49-F238E27FC236}">
-                <a16:creationId xmlns:a16="http://schemas.microsoft.com/office/drawing/2014/main" id="{5946F591-2BB8-4206-BDD4-AC4FF490A4D6}"/>
+                <a16:creationId xmlns:a16="http://schemas.microsoft.com/office/drawing/2014/main" id="{9FC1ADAD-C7C6-40DF-B18F-C9AF8A6BB3FF}"/>
               </a:ext>
             </a:extLst>
           </p:cNvPr>
@@ -6116,7 +7741,7 @@
           <p:cNvPr id="30" name="">
             <a:extLst xmlns:a="http://schemas.openxmlformats.org/drawingml/2006/main">
               <a:ext uri="{FF2B5EF4-FFF2-40B4-BE49-F238E27FC236}">
-                <a16:creationId xmlns:a16="http://schemas.microsoft.com/office/drawing/2014/main" id="{8B4DE1D9-B2D6-4382-91FC-5079BF7C5D86}"/>
+                <a16:creationId xmlns:a16="http://schemas.microsoft.com/office/drawing/2014/main" id="{EDA69B85-1482-4994-817B-9212D1AC46CF}"/>
               </a:ext>
             </a:extLst>
           </p:cNvPr>
@@ -6167,7 +7792,7 @@
           <p:cNvPr id="31" name="">
             <a:extLst xmlns:a="http://schemas.openxmlformats.org/drawingml/2006/main">
               <a:ext uri="{FF2B5EF4-FFF2-40B4-BE49-F238E27FC236}">
-                <a16:creationId xmlns:a16="http://schemas.microsoft.com/office/drawing/2014/main" id="{A6115A44-57D2-4A9D-B4A4-F406E9CF8130}"/>
+                <a16:creationId xmlns:a16="http://schemas.microsoft.com/office/drawing/2014/main" id="{24F87EC3-4F59-4BA4-A073-5D0C16510F8A}"/>
               </a:ext>
             </a:extLst>
           </p:cNvPr>
@@ -6200,7 +7825,7 @@
           <p:cNvPr id="32" name="">
             <a:extLst xmlns:a="http://schemas.openxmlformats.org/drawingml/2006/main">
               <a:ext uri="{FF2B5EF4-FFF2-40B4-BE49-F238E27FC236}">
-                <a16:creationId xmlns:a16="http://schemas.microsoft.com/office/drawing/2014/main" id="{8F02AC95-D41E-47AD-8673-62EDBEA25499}"/>
+                <a16:creationId xmlns:a16="http://schemas.microsoft.com/office/drawing/2014/main" id="{8AE324EE-F5C8-4224-921D-A4A06221FA97}"/>
               </a:ext>
             </a:extLst>
           </p:cNvPr>
@@ -6251,7 +7876,7 @@
           <p:cNvPr id="33" name="">
             <a:extLst xmlns:a="http://schemas.openxmlformats.org/drawingml/2006/main">
               <a:ext uri="{FF2B5EF4-FFF2-40B4-BE49-F238E27FC236}">
-                <a16:creationId xmlns:a16="http://schemas.microsoft.com/office/drawing/2014/main" id="{E01B059D-BFE6-4542-AE9F-9AC1B1E00208}"/>
+                <a16:creationId xmlns:a16="http://schemas.microsoft.com/office/drawing/2014/main" id="{68E62E2A-4162-45BE-90A6-381499B99C47}"/>
               </a:ext>
             </a:extLst>
           </p:cNvPr>
@@ -6284,7 +7909,7 @@
           <p:cNvPr id="34" name="">
             <a:extLst xmlns:a="http://schemas.openxmlformats.org/drawingml/2006/main">
               <a:ext uri="{FF2B5EF4-FFF2-40B4-BE49-F238E27FC236}">
-                <a16:creationId xmlns:a16="http://schemas.microsoft.com/office/drawing/2014/main" id="{7FAE16E1-8DCE-4BE6-933D-EF6A6059BC27}"/>
+                <a16:creationId xmlns:a16="http://schemas.microsoft.com/office/drawing/2014/main" id="{2D5326C8-1C01-403A-850D-6CD2B1843345}"/>
               </a:ext>
             </a:extLst>
           </p:cNvPr>
@@ -6335,7 +7960,7 @@
           <p:cNvPr id="35" name="">
             <a:extLst xmlns:a="http://schemas.openxmlformats.org/drawingml/2006/main">
               <a:ext uri="{FF2B5EF4-FFF2-40B4-BE49-F238E27FC236}">
-                <a16:creationId xmlns:a16="http://schemas.microsoft.com/office/drawing/2014/main" id="{708E6A91-3508-4135-B12A-F27836821455}"/>
+                <a16:creationId xmlns:a16="http://schemas.microsoft.com/office/drawing/2014/main" id="{A37F994A-9614-4175-A331-B38EF8B943C9}"/>
               </a:ext>
             </a:extLst>
           </p:cNvPr>
@@ -6368,7 +7993,7 @@
           <p:cNvPr id="36" name="">
             <a:extLst xmlns:a="http://schemas.openxmlformats.org/drawingml/2006/main">
               <a:ext uri="{FF2B5EF4-FFF2-40B4-BE49-F238E27FC236}">
-                <a16:creationId xmlns:a16="http://schemas.microsoft.com/office/drawing/2014/main" id="{7DDF4405-B528-486B-B39B-B787D78C4C01}"/>
+                <a16:creationId xmlns:a16="http://schemas.microsoft.com/office/drawing/2014/main" id="{401F7ABA-59FD-40C4-8901-C83EFF7F3852}"/>
               </a:ext>
             </a:extLst>
           </p:cNvPr>
@@ -6419,7 +8044,7 @@
           <p:cNvPr id="37" name="">
             <a:extLst xmlns:a="http://schemas.openxmlformats.org/drawingml/2006/main">
               <a:ext uri="{FF2B5EF4-FFF2-40B4-BE49-F238E27FC236}">
-                <a16:creationId xmlns:a16="http://schemas.microsoft.com/office/drawing/2014/main" id="{CACE6CBC-A1E5-4E25-A920-63DE4E1BC22C}"/>
+                <a16:creationId xmlns:a16="http://schemas.microsoft.com/office/drawing/2014/main" id="{85903B3F-95F9-4A6A-B365-A5374B9325A8}"/>
               </a:ext>
             </a:extLst>
           </p:cNvPr>
@@ -6470,7 +8095,7 @@
           <p:cNvPr id="38" name="">
             <a:extLst xmlns:a="http://schemas.openxmlformats.org/drawingml/2006/main">
               <a:ext uri="{FF2B5EF4-FFF2-40B4-BE49-F238E27FC236}">
-                <a16:creationId xmlns:a16="http://schemas.microsoft.com/office/drawing/2014/main" id="{7BB177AF-5190-4F24-9809-19957B73DF9E}"/>
+                <a16:creationId xmlns:a16="http://schemas.microsoft.com/office/drawing/2014/main" id="{E481880F-545E-4656-889B-8D0E091F43BD}"/>
               </a:ext>
             </a:extLst>
           </p:cNvPr>
@@ -6521,7 +8146,7 @@
           <p:cNvPr id="39" name="">
             <a:extLst xmlns:a="http://schemas.openxmlformats.org/drawingml/2006/main">
               <a:ext uri="{FF2B5EF4-FFF2-40B4-BE49-F238E27FC236}">
-                <a16:creationId xmlns:a16="http://schemas.microsoft.com/office/drawing/2014/main" id="{54E55854-7B33-4C2E-B635-FF892119502C}"/>
+                <a16:creationId xmlns:a16="http://schemas.microsoft.com/office/drawing/2014/main" id="{16CCA8DB-69D8-4609-A0BA-82E59AB140DE}"/>
               </a:ext>
             </a:extLst>
           </p:cNvPr>
@@ -6572,7 +8197,7 @@
           <p:cNvPr id="40" name="">
             <a:extLst xmlns:a="http://schemas.openxmlformats.org/drawingml/2006/main">
               <a:ext uri="{FF2B5EF4-FFF2-40B4-BE49-F238E27FC236}">
-                <a16:creationId xmlns:a16="http://schemas.microsoft.com/office/drawing/2014/main" id="{9D858B98-EB1A-4891-9FBF-5AAB9A40BACF}"/>
+                <a16:creationId xmlns:a16="http://schemas.microsoft.com/office/drawing/2014/main" id="{CCA6E482-EC90-4CB0-97B1-73346276BA69}"/>
               </a:ext>
             </a:extLst>
           </p:cNvPr>
@@ -6621,7 +8246,7 @@
     </p:spTree>
     <p:extLst>
       <p:ext uri="{BB962C8B-B14F-4D97-AF65-F5344CB8AC3E}">
-        <p14:creationId xmlns:p14="http://schemas.microsoft.com/office/powerpoint/2010/main" val="181684823"/>
+        <p14:creationId xmlns:p14="http://schemas.microsoft.com/office/powerpoint/2010/main" val="757400114"/>
       </p:ext>
     </p:extLst>
   </p:cSld>
@@ -6645,7 +8270,7 @@
           <p:cNvPr id="1" name="">
             <a:extLst xmlns:a="http://schemas.openxmlformats.org/drawingml/2006/main">
               <a:ext uri="{FF2B5EF4-FFF2-40B4-BE49-F238E27FC236}">
-                <a16:creationId xmlns:a16="http://schemas.microsoft.com/office/drawing/2014/main" id="{FDEEFF3F-3B4F-4B6E-98BC-E2702A097F6E}"/>
+                <a16:creationId xmlns:a16="http://schemas.microsoft.com/office/drawing/2014/main" id="{91421AE4-13A3-47FC-982F-BB7DDC9FF60C}"/>
               </a:ext>
             </a:extLst>
           </p:cNvPr>
@@ -6678,7 +8303,7 @@
           <p:cNvPr id="2" name="">
             <a:extLst xmlns:a="http://schemas.openxmlformats.org/drawingml/2006/main">
               <a:ext uri="{FF2B5EF4-FFF2-40B4-BE49-F238E27FC236}">
-                <a16:creationId xmlns:a16="http://schemas.microsoft.com/office/drawing/2014/main" id="{03B19494-10B4-4F89-AE91-F094BD5B7C8A}"/>
+                <a16:creationId xmlns:a16="http://schemas.microsoft.com/office/drawing/2014/main" id="{49163BA8-EABE-4B34-B98F-C78344C56390}"/>
               </a:ext>
             </a:extLst>
           </p:cNvPr>
@@ -6729,7 +8354,7 @@
           <p:cNvPr id="3" name="">
             <a:extLst xmlns:a="http://schemas.openxmlformats.org/drawingml/2006/main">
               <a:ext uri="{FF2B5EF4-FFF2-40B4-BE49-F238E27FC236}">
-                <a16:creationId xmlns:a16="http://schemas.microsoft.com/office/drawing/2014/main" id="{95A9FDC5-9F1F-4877-A369-16CFE1B8B763}"/>
+                <a16:creationId xmlns:a16="http://schemas.microsoft.com/office/drawing/2014/main" id="{7327F017-DDA3-4687-BDF3-E08F66917166}"/>
               </a:ext>
             </a:extLst>
           </p:cNvPr>
@@ -6780,7 +8405,7 @@
           <p:cNvPr id="4" name="">
             <a:extLst xmlns:a="http://schemas.openxmlformats.org/drawingml/2006/main">
               <a:ext uri="{FF2B5EF4-FFF2-40B4-BE49-F238E27FC236}">
-                <a16:creationId xmlns:a16="http://schemas.microsoft.com/office/drawing/2014/main" id="{5118F54A-9265-43FC-9E44-FFDA801D5D71}"/>
+                <a16:creationId xmlns:a16="http://schemas.microsoft.com/office/drawing/2014/main" id="{9BB61773-6ED6-47E5-8FB0-FF8181082093}"/>
               </a:ext>
             </a:extLst>
           </p:cNvPr>
@@ -6831,7 +8456,7 @@
           <p:cNvPr id="5" name="">
             <a:extLst xmlns:a="http://schemas.openxmlformats.org/drawingml/2006/main">
               <a:ext uri="{FF2B5EF4-FFF2-40B4-BE49-F238E27FC236}">
-                <a16:creationId xmlns:a16="http://schemas.microsoft.com/office/drawing/2014/main" id="{2442BCA9-C6CF-4350-BB21-6A82889A5EFD}"/>
+                <a16:creationId xmlns:a16="http://schemas.microsoft.com/office/drawing/2014/main" id="{806AE433-FD3E-4A59-B540-5AE22C0FC3BD}"/>
               </a:ext>
             </a:extLst>
           </p:cNvPr>
@@ -6882,7 +8507,7 @@
           <p:cNvPr id="6" name="">
             <a:extLst xmlns:a="http://schemas.openxmlformats.org/drawingml/2006/main">
               <a:ext uri="{FF2B5EF4-FFF2-40B4-BE49-F238E27FC236}">
-                <a16:creationId xmlns:a16="http://schemas.microsoft.com/office/drawing/2014/main" id="{4BFD43B9-29E6-43F8-864A-8F2FDEDFB178}"/>
+                <a16:creationId xmlns:a16="http://schemas.microsoft.com/office/drawing/2014/main" id="{955A25C8-880E-442D-B1D4-8FD8C1C60B54}"/>
               </a:ext>
             </a:extLst>
           </p:cNvPr>
@@ -6933,7 +8558,7 @@
           <p:cNvPr id="7" name="">
             <a:extLst xmlns:a="http://schemas.openxmlformats.org/drawingml/2006/main">
               <a:ext uri="{FF2B5EF4-FFF2-40B4-BE49-F238E27FC236}">
-                <a16:creationId xmlns:a16="http://schemas.microsoft.com/office/drawing/2014/main" id="{234A90F4-4BB8-495B-8A17-652E4FF62C5F}"/>
+                <a16:creationId xmlns:a16="http://schemas.microsoft.com/office/drawing/2014/main" id="{03062977-8289-42E8-A196-18F27766EEE4}"/>
               </a:ext>
             </a:extLst>
           </p:cNvPr>
@@ -6966,7 +8591,7 @@
           <p:cNvPr id="8" name="">
             <a:extLst xmlns:a="http://schemas.openxmlformats.org/drawingml/2006/main">
               <a:ext uri="{FF2B5EF4-FFF2-40B4-BE49-F238E27FC236}">
-                <a16:creationId xmlns:a16="http://schemas.microsoft.com/office/drawing/2014/main" id="{B3D1F52D-97FB-4897-A2A8-672F6B481933}"/>
+                <a16:creationId xmlns:a16="http://schemas.microsoft.com/office/drawing/2014/main" id="{1D3C8324-7A4A-457F-9116-906374DB6713}"/>
               </a:ext>
             </a:extLst>
           </p:cNvPr>
@@ -6999,7 +8624,7 @@
           <p:cNvPr id="9" name="">
             <a:extLst xmlns:a="http://schemas.openxmlformats.org/drawingml/2006/main">
               <a:ext uri="{FF2B5EF4-FFF2-40B4-BE49-F238E27FC236}">
-                <a16:creationId xmlns:a16="http://schemas.microsoft.com/office/drawing/2014/main" id="{5142882E-4F00-4650-9BF7-7579ED49D17B}"/>
+                <a16:creationId xmlns:a16="http://schemas.microsoft.com/office/drawing/2014/main" id="{406136BF-5E81-40A4-9590-D85FA17D1B0F}"/>
               </a:ext>
             </a:extLst>
           </p:cNvPr>
@@ -7050,7 +8675,7 @@
           <p:cNvPr id="10" name="">
             <a:extLst xmlns:a="http://schemas.openxmlformats.org/drawingml/2006/main">
               <a:ext uri="{FF2B5EF4-FFF2-40B4-BE49-F238E27FC236}">
-                <a16:creationId xmlns:a16="http://schemas.microsoft.com/office/drawing/2014/main" id="{CC1744A8-3EA9-4C12-8658-2FB4A82AE5E3}"/>
+                <a16:creationId xmlns:a16="http://schemas.microsoft.com/office/drawing/2014/main" id="{F5D916AC-403D-48D4-B0D4-029CF3F583ED}"/>
               </a:ext>
             </a:extLst>
           </p:cNvPr>
@@ -7101,7 +8726,7 @@
           <p:cNvPr id="11" name="">
             <a:extLst xmlns:a="http://schemas.openxmlformats.org/drawingml/2006/main">
               <a:ext uri="{FF2B5EF4-FFF2-40B4-BE49-F238E27FC236}">
-                <a16:creationId xmlns:a16="http://schemas.microsoft.com/office/drawing/2014/main" id="{4E252041-F894-4093-B3A0-6256FA05CA93}"/>
+                <a16:creationId xmlns:a16="http://schemas.microsoft.com/office/drawing/2014/main" id="{666C204C-BE55-43D0-9C13-C98D5E031720}"/>
               </a:ext>
             </a:extLst>
           </p:cNvPr>
@@ -7134,7 +8759,7 @@
           <p:cNvPr id="12" name="">
             <a:extLst xmlns:a="http://schemas.openxmlformats.org/drawingml/2006/main">
               <a:ext uri="{FF2B5EF4-FFF2-40B4-BE49-F238E27FC236}">
-                <a16:creationId xmlns:a16="http://schemas.microsoft.com/office/drawing/2014/main" id="{C9523310-72C4-4290-BFA2-13F98D56D373}"/>
+                <a16:creationId xmlns:a16="http://schemas.microsoft.com/office/drawing/2014/main" id="{D40C3466-E69D-4FDE-85F8-7A5EA2E031FE}"/>
               </a:ext>
             </a:extLst>
           </p:cNvPr>
@@ -7167,7 +8792,7 @@
           <p:cNvPr id="13" name="">
             <a:extLst xmlns:a="http://schemas.openxmlformats.org/drawingml/2006/main">
               <a:ext uri="{FF2B5EF4-FFF2-40B4-BE49-F238E27FC236}">
-                <a16:creationId xmlns:a16="http://schemas.microsoft.com/office/drawing/2014/main" id="{5555F0A9-B008-42A7-94D4-BFEAE60F0716}"/>
+                <a16:creationId xmlns:a16="http://schemas.microsoft.com/office/drawing/2014/main" id="{1E6C9003-2779-4158-8975-0F1CB9D7CA95}"/>
               </a:ext>
             </a:extLst>
           </p:cNvPr>
@@ -7218,7 +8843,7 @@
           <p:cNvPr id="14" name="">
             <a:extLst xmlns:a="http://schemas.openxmlformats.org/drawingml/2006/main">
               <a:ext uri="{FF2B5EF4-FFF2-40B4-BE49-F238E27FC236}">
-                <a16:creationId xmlns:a16="http://schemas.microsoft.com/office/drawing/2014/main" id="{36207B53-FEE1-4CB2-A4E3-CD82D10407B0}"/>
+                <a16:creationId xmlns:a16="http://schemas.microsoft.com/office/drawing/2014/main" id="{D90D68BF-1C14-4CE3-B56D-FF3D5BB1AFE9}"/>
               </a:ext>
             </a:extLst>
           </p:cNvPr>
@@ -7269,7 +8894,7 @@
           <p:cNvPr id="15" name="">
             <a:extLst xmlns:a="http://schemas.openxmlformats.org/drawingml/2006/main">
               <a:ext uri="{FF2B5EF4-FFF2-40B4-BE49-F238E27FC236}">
-                <a16:creationId xmlns:a16="http://schemas.microsoft.com/office/drawing/2014/main" id="{A5D83149-F2F9-406C-BB8E-09AD11410C9B}"/>
+                <a16:creationId xmlns:a16="http://schemas.microsoft.com/office/drawing/2014/main" id="{F88C51F5-489E-4D61-9E06-10C232AB256C}"/>
               </a:ext>
             </a:extLst>
           </p:cNvPr>
@@ -7302,7 +8927,7 @@
           <p:cNvPr id="16" name="">
             <a:extLst xmlns:a="http://schemas.openxmlformats.org/drawingml/2006/main">
               <a:ext uri="{FF2B5EF4-FFF2-40B4-BE49-F238E27FC236}">
-                <a16:creationId xmlns:a16="http://schemas.microsoft.com/office/drawing/2014/main" id="{D9924BB8-9A50-4E98-A9AC-D6937644B8D8}"/>
+                <a16:creationId xmlns:a16="http://schemas.microsoft.com/office/drawing/2014/main" id="{8D8575FE-EB3F-4BB0-BA16-E0BB3F8294B0}"/>
               </a:ext>
             </a:extLst>
           </p:cNvPr>
@@ -7335,7 +8960,7 @@
           <p:cNvPr id="17" name="">
             <a:extLst xmlns:a="http://schemas.openxmlformats.org/drawingml/2006/main">
               <a:ext uri="{FF2B5EF4-FFF2-40B4-BE49-F238E27FC236}">
-                <a16:creationId xmlns:a16="http://schemas.microsoft.com/office/drawing/2014/main" id="{98AE9770-38DD-479C-9E77-FD520CB80150}"/>
+                <a16:creationId xmlns:a16="http://schemas.microsoft.com/office/drawing/2014/main" id="{7425CEDC-A675-4473-AC01-892CFD4D4896}"/>
               </a:ext>
             </a:extLst>
           </p:cNvPr>
@@ -7386,7 +9011,7 @@
           <p:cNvPr id="18" name="">
             <a:extLst xmlns:a="http://schemas.openxmlformats.org/drawingml/2006/main">
               <a:ext uri="{FF2B5EF4-FFF2-40B4-BE49-F238E27FC236}">
-                <a16:creationId xmlns:a16="http://schemas.microsoft.com/office/drawing/2014/main" id="{1837DBB5-4619-49FE-AD5E-396BE1612D43}"/>
+                <a16:creationId xmlns:a16="http://schemas.microsoft.com/office/drawing/2014/main" id="{C5ABC4AA-A86D-4070-A2B5-D4A95C2859EA}"/>
               </a:ext>
             </a:extLst>
           </p:cNvPr>
@@ -7437,7 +9062,7 @@
           <p:cNvPr id="19" name="">
             <a:extLst xmlns:a="http://schemas.openxmlformats.org/drawingml/2006/main">
               <a:ext uri="{FF2B5EF4-FFF2-40B4-BE49-F238E27FC236}">
-                <a16:creationId xmlns:a16="http://schemas.microsoft.com/office/drawing/2014/main" id="{3F261665-DEF7-466F-9C08-565CB6D0F692}"/>
+                <a16:creationId xmlns:a16="http://schemas.microsoft.com/office/drawing/2014/main" id="{FC741A1D-E5D9-4763-B69A-1AE99C0CF563}"/>
               </a:ext>
             </a:extLst>
           </p:cNvPr>
@@ -7470,7 +9095,7 @@
           <p:cNvPr id="20" name="">
             <a:extLst xmlns:a="http://schemas.openxmlformats.org/drawingml/2006/main">
               <a:ext uri="{FF2B5EF4-FFF2-40B4-BE49-F238E27FC236}">
-                <a16:creationId xmlns:a16="http://schemas.microsoft.com/office/drawing/2014/main" id="{F0AD0B22-7CEE-49B4-8C7C-D5834A144B6F}"/>
+                <a16:creationId xmlns:a16="http://schemas.microsoft.com/office/drawing/2014/main" id="{3E222F92-5DC3-468B-A4D5-B26AE6A12500}"/>
               </a:ext>
             </a:extLst>
           </p:cNvPr>
@@ -7503,7 +9128,7 @@
           <p:cNvPr id="21" name="">
             <a:extLst xmlns:a="http://schemas.openxmlformats.org/drawingml/2006/main">
               <a:ext uri="{FF2B5EF4-FFF2-40B4-BE49-F238E27FC236}">
-                <a16:creationId xmlns:a16="http://schemas.microsoft.com/office/drawing/2014/main" id="{85027DCE-B3ED-49AD-9DDC-BC2665128BC6}"/>
+                <a16:creationId xmlns:a16="http://schemas.microsoft.com/office/drawing/2014/main" id="{D72ADCD7-BBD9-4066-9BC6-BA583F34CCAF}"/>
               </a:ext>
             </a:extLst>
           </p:cNvPr>
@@ -7554,7 +9179,7 @@
           <p:cNvPr id="22" name="">
             <a:extLst xmlns:a="http://schemas.openxmlformats.org/drawingml/2006/main">
               <a:ext uri="{FF2B5EF4-FFF2-40B4-BE49-F238E27FC236}">
-                <a16:creationId xmlns:a16="http://schemas.microsoft.com/office/drawing/2014/main" id="{F8059EC8-214E-428C-9D46-B89E7FEE68BB}"/>
+                <a16:creationId xmlns:a16="http://schemas.microsoft.com/office/drawing/2014/main" id="{0840D6BE-1447-4A65-AD48-C64C768AB22C}"/>
               </a:ext>
             </a:extLst>
           </p:cNvPr>
@@ -7605,7 +9230,7 @@
           <p:cNvPr id="23" name="">
             <a:extLst xmlns:a="http://schemas.openxmlformats.org/drawingml/2006/main">
               <a:ext uri="{FF2B5EF4-FFF2-40B4-BE49-F238E27FC236}">
-                <a16:creationId xmlns:a16="http://schemas.microsoft.com/office/drawing/2014/main" id="{F9F7498D-DB44-41AE-941C-87D2CA1FF8F6}"/>
+                <a16:creationId xmlns:a16="http://schemas.microsoft.com/office/drawing/2014/main" id="{9EDEC11E-C5FB-4423-978C-E98CCB83F3A7}"/>
               </a:ext>
             </a:extLst>
           </p:cNvPr>
@@ -7656,7 +9281,7 @@
           <p:cNvPr id="24" name="">
             <a:extLst xmlns:a="http://schemas.openxmlformats.org/drawingml/2006/main">
               <a:ext uri="{FF2B5EF4-FFF2-40B4-BE49-F238E27FC236}">
-                <a16:creationId xmlns:a16="http://schemas.microsoft.com/office/drawing/2014/main" id="{D33CC3A6-AB7E-40E1-99C5-29C2C275CCFE}"/>
+                <a16:creationId xmlns:a16="http://schemas.microsoft.com/office/drawing/2014/main" id="{CF2D9B0C-FA0D-41EA-82C8-EBDC9B7F5852}"/>
               </a:ext>
             </a:extLst>
           </p:cNvPr>
@@ -7707,7 +9332,7 @@
           <p:cNvPr id="25" name="">
             <a:extLst xmlns:a="http://schemas.openxmlformats.org/drawingml/2006/main">
               <a:ext uri="{FF2B5EF4-FFF2-40B4-BE49-F238E27FC236}">
-                <a16:creationId xmlns:a16="http://schemas.microsoft.com/office/drawing/2014/main" id="{F22671B8-89EB-407B-9951-3D5B176D9019}"/>
+                <a16:creationId xmlns:a16="http://schemas.microsoft.com/office/drawing/2014/main" id="{F8FC9B9C-D881-4D51-899C-D744288B9405}"/>
               </a:ext>
             </a:extLst>
           </p:cNvPr>
@@ -7756,7 +9381,7 @@
     </p:spTree>
     <p:extLst>
       <p:ext uri="{BB962C8B-B14F-4D97-AF65-F5344CB8AC3E}">
-        <p14:creationId xmlns:p14="http://schemas.microsoft.com/office/powerpoint/2010/main" val="2103248818"/>
+        <p14:creationId xmlns:p14="http://schemas.microsoft.com/office/powerpoint/2010/main" val="1995150264"/>
       </p:ext>
     </p:extLst>
   </p:cSld>
@@ -7780,7 +9405,7 @@
           <p:cNvPr id="1" name="">
             <a:extLst xmlns:a="http://schemas.openxmlformats.org/drawingml/2006/main">
               <a:ext uri="{FF2B5EF4-FFF2-40B4-BE49-F238E27FC236}">
-                <a16:creationId xmlns:a16="http://schemas.microsoft.com/office/drawing/2014/main" id="{FC18075D-02F8-4380-B40E-CF9FF4D900DD}"/>
+                <a16:creationId xmlns:a16="http://schemas.microsoft.com/office/drawing/2014/main" id="{74ACDC9F-7B58-41B1-9926-681A2551D04C}"/>
               </a:ext>
             </a:extLst>
           </p:cNvPr>
@@ -7813,7 +9438,7 @@
           <p:cNvPr id="2" name="">
             <a:extLst xmlns:a="http://schemas.openxmlformats.org/drawingml/2006/main">
               <a:ext uri="{FF2B5EF4-FFF2-40B4-BE49-F238E27FC236}">
-                <a16:creationId xmlns:a16="http://schemas.microsoft.com/office/drawing/2014/main" id="{3262EBE4-C4ED-4D7D-86B4-6336C39E2E64}"/>
+                <a16:creationId xmlns:a16="http://schemas.microsoft.com/office/drawing/2014/main" id="{ADCE0509-84B6-44BD-8452-CDA3F5D66C84}"/>
               </a:ext>
             </a:extLst>
           </p:cNvPr>
@@ -7864,7 +9489,7 @@
           <p:cNvPr id="3" name="">
             <a:extLst xmlns:a="http://schemas.openxmlformats.org/drawingml/2006/main">
               <a:ext uri="{FF2B5EF4-FFF2-40B4-BE49-F238E27FC236}">
-                <a16:creationId xmlns:a16="http://schemas.microsoft.com/office/drawing/2014/main" id="{C1890C85-28FC-41C6-B225-687286DD14ED}"/>
+                <a16:creationId xmlns:a16="http://schemas.microsoft.com/office/drawing/2014/main" id="{9E3EE278-FFB6-40AA-B205-0D8DCE3E3018}"/>
               </a:ext>
             </a:extLst>
           </p:cNvPr>
@@ -7915,7 +9540,7 @@
           <p:cNvPr id="4" name="">
             <a:extLst xmlns:a="http://schemas.openxmlformats.org/drawingml/2006/main">
               <a:ext uri="{FF2B5EF4-FFF2-40B4-BE49-F238E27FC236}">
-                <a16:creationId xmlns:a16="http://schemas.microsoft.com/office/drawing/2014/main" id="{2EBCA1BC-BD5A-4714-A8CA-7394D60C9CA4}"/>
+                <a16:creationId xmlns:a16="http://schemas.microsoft.com/office/drawing/2014/main" id="{E52AF4B2-3FE6-466A-AE38-9F40F6EA6D91}"/>
               </a:ext>
             </a:extLst>
           </p:cNvPr>
@@ -7948,7 +9573,7 @@
           <p:cNvPr id="5" name="">
             <a:extLst xmlns:a="http://schemas.openxmlformats.org/drawingml/2006/main">
               <a:ext uri="{FF2B5EF4-FFF2-40B4-BE49-F238E27FC236}">
-                <a16:creationId xmlns:a16="http://schemas.microsoft.com/office/drawing/2014/main" id="{36FAFB7D-8184-4003-9AC0-16BAE3F95AA8}"/>
+                <a16:creationId xmlns:a16="http://schemas.microsoft.com/office/drawing/2014/main" id="{7D338FAE-6C6A-4F0E-AE4E-0BCA47DF821B}"/>
               </a:ext>
             </a:extLst>
           </p:cNvPr>
@@ -7981,7 +9606,7 @@
           <p:cNvPr id="6" name="">
             <a:extLst xmlns:a="http://schemas.openxmlformats.org/drawingml/2006/main">
               <a:ext uri="{FF2B5EF4-FFF2-40B4-BE49-F238E27FC236}">
-                <a16:creationId xmlns:a16="http://schemas.microsoft.com/office/drawing/2014/main" id="{E12EC5CA-DF8C-4A5F-BDE3-4863F0351F4A}"/>
+                <a16:creationId xmlns:a16="http://schemas.microsoft.com/office/drawing/2014/main" id="{82370A90-8AFF-4675-8F70-C29C557CB2AC}"/>
               </a:ext>
             </a:extLst>
           </p:cNvPr>
@@ -8022,7 +9647,7 @@
                   <a:srgbClr val="172033"/>
                 </a:solidFill>
               </a:rPr>
-              <a:t>Job-costed accounts</a:t>
+              <a:t>Job costing</a:t>
             </a:r>
           </a:p>
         </p:txBody>
@@ -8032,7 +9657,7 @@
           <p:cNvPr id="7" name="">
             <a:extLst xmlns:a="http://schemas.openxmlformats.org/drawingml/2006/main">
               <a:ext uri="{FF2B5EF4-FFF2-40B4-BE49-F238E27FC236}">
-                <a16:creationId xmlns:a16="http://schemas.microsoft.com/office/drawing/2014/main" id="{FE85D634-26D9-482A-BF74-A11E6E06E0A1}"/>
+                <a16:creationId xmlns:a16="http://schemas.microsoft.com/office/drawing/2014/main" id="{D5AC7A8B-251E-44FD-BF37-9599A7F0B3AB}"/>
               </a:ext>
             </a:extLst>
           </p:cNvPr>
@@ -8073,7 +9698,7 @@
                   <a:srgbClr val="5F6F86"/>
                 </a:solidFill>
               </a:rPr>
-              <a:t>Construction chart of accounts: retainage, WIP, change orders, and job-cost categories.</a:t>
+              <a:t>Profit and margin per job, built from invoices, bills, and expenses tagged with the job.</a:t>
             </a:r>
           </a:p>
         </p:txBody>
@@ -8083,7 +9708,7 @@
           <p:cNvPr id="8" name="">
             <a:extLst xmlns:a="http://schemas.openxmlformats.org/drawingml/2006/main">
               <a:ext uri="{FF2B5EF4-FFF2-40B4-BE49-F238E27FC236}">
-                <a16:creationId xmlns:a16="http://schemas.microsoft.com/office/drawing/2014/main" id="{56D5BE23-E4F4-42C3-8EF4-31087749E4DD}"/>
+                <a16:creationId xmlns:a16="http://schemas.microsoft.com/office/drawing/2014/main" id="{9512D71B-517A-4440-88BA-2AD86EBA96DE}"/>
               </a:ext>
             </a:extLst>
           </p:cNvPr>
@@ -8116,7 +9741,7 @@
           <p:cNvPr id="9" name="">
             <a:extLst xmlns:a="http://schemas.openxmlformats.org/drawingml/2006/main">
               <a:ext uri="{FF2B5EF4-FFF2-40B4-BE49-F238E27FC236}">
-                <a16:creationId xmlns:a16="http://schemas.microsoft.com/office/drawing/2014/main" id="{036AA0E6-CA3E-49C5-9813-B8835794982B}"/>
+                <a16:creationId xmlns:a16="http://schemas.microsoft.com/office/drawing/2014/main" id="{4C0D8C5C-3AC5-4522-8FF9-721F10572F45}"/>
               </a:ext>
             </a:extLst>
           </p:cNvPr>
@@ -8149,7 +9774,7 @@
           <p:cNvPr id="10" name="">
             <a:extLst xmlns:a="http://schemas.openxmlformats.org/drawingml/2006/main">
               <a:ext uri="{FF2B5EF4-FFF2-40B4-BE49-F238E27FC236}">
-                <a16:creationId xmlns:a16="http://schemas.microsoft.com/office/drawing/2014/main" id="{5C140769-CB3E-4FD5-B6A6-C9AE493A8B5E}"/>
+                <a16:creationId xmlns:a16="http://schemas.microsoft.com/office/drawing/2014/main" id="{A3FB9111-5B94-4EDE-BF15-BE9B894D26F9}"/>
               </a:ext>
             </a:extLst>
           </p:cNvPr>
@@ -8200,7 +9825,7 @@
           <p:cNvPr id="11" name="">
             <a:extLst xmlns:a="http://schemas.openxmlformats.org/drawingml/2006/main">
               <a:ext uri="{FF2B5EF4-FFF2-40B4-BE49-F238E27FC236}">
-                <a16:creationId xmlns:a16="http://schemas.microsoft.com/office/drawing/2014/main" id="{64BB9251-00D2-45D0-B5AC-4EA1C396E051}"/>
+                <a16:creationId xmlns:a16="http://schemas.microsoft.com/office/drawing/2014/main" id="{FC6A1E8B-AD5F-477F-98DA-D075F8BBC4C5}"/>
               </a:ext>
             </a:extLst>
           </p:cNvPr>
@@ -8241,7 +9866,7 @@
                   <a:srgbClr val="5F6F86"/>
                 </a:solidFill>
               </a:rPr>
-              <a:t>Invoice customers from won quotes, record payments, and watch A/R aging buckets.</a:t>
+              <a:t>Invoice customers from won quotes, record payments and credit memos, watch A/R aging.</a:t>
             </a:r>
           </a:p>
         </p:txBody>
@@ -8251,7 +9876,7 @@
           <p:cNvPr id="12" name="">
             <a:extLst xmlns:a="http://schemas.openxmlformats.org/drawingml/2006/main">
               <a:ext uri="{FF2B5EF4-FFF2-40B4-BE49-F238E27FC236}">
-                <a16:creationId xmlns:a16="http://schemas.microsoft.com/office/drawing/2014/main" id="{C1E23BFF-6B03-47C7-9018-F7CDAB50162B}"/>
+                <a16:creationId xmlns:a16="http://schemas.microsoft.com/office/drawing/2014/main" id="{901B6089-98A6-4FD7-8AC6-3D56860B6E4C}"/>
               </a:ext>
             </a:extLst>
           </p:cNvPr>
@@ -8284,7 +9909,7 @@
           <p:cNvPr id="13" name="">
             <a:extLst xmlns:a="http://schemas.openxmlformats.org/drawingml/2006/main">
               <a:ext uri="{FF2B5EF4-FFF2-40B4-BE49-F238E27FC236}">
-                <a16:creationId xmlns:a16="http://schemas.microsoft.com/office/drawing/2014/main" id="{1ED03AF1-9D7B-4B2C-8EA8-B14EA2B76132}"/>
+                <a16:creationId xmlns:a16="http://schemas.microsoft.com/office/drawing/2014/main" id="{B2D228C3-F5ED-40DE-8D9C-1ED7B3447AA2}"/>
               </a:ext>
             </a:extLst>
           </p:cNvPr>
@@ -8317,7 +9942,7 @@
           <p:cNvPr id="14" name="">
             <a:extLst xmlns:a="http://schemas.openxmlformats.org/drawingml/2006/main">
               <a:ext uri="{FF2B5EF4-FFF2-40B4-BE49-F238E27FC236}">
-                <a16:creationId xmlns:a16="http://schemas.microsoft.com/office/drawing/2014/main" id="{125945A9-E59B-4523-8E13-6408439B82D2}"/>
+                <a16:creationId xmlns:a16="http://schemas.microsoft.com/office/drawing/2014/main" id="{2C7030B1-33DD-44C0-B6D6-DD2C8A3EC72F}"/>
               </a:ext>
             </a:extLst>
           </p:cNvPr>
@@ -8368,7 +9993,7 @@
           <p:cNvPr id="15" name="">
             <a:extLst xmlns:a="http://schemas.openxmlformats.org/drawingml/2006/main">
               <a:ext uri="{FF2B5EF4-FFF2-40B4-BE49-F238E27FC236}">
-                <a16:creationId xmlns:a16="http://schemas.microsoft.com/office/drawing/2014/main" id="{B3C1ED65-D1BB-455E-984F-C6F14838E7EE}"/>
+                <a16:creationId xmlns:a16="http://schemas.microsoft.com/office/drawing/2014/main" id="{0D96F31E-F4DD-4078-A6D8-CE4F252AC31D}"/>
               </a:ext>
             </a:extLst>
           </p:cNvPr>
@@ -8409,7 +10034,7 @@
                   <a:srgbClr val="5F6F86"/>
                 </a:solidFill>
               </a:rPr>
-              <a:t>Enter vendor bills, pay them, and watch what Raves owes with A/P aging.</a:t>
+              <a:t>Vendor bills, payments, vendor credits, one-click expense entry, and A/P aging.</a:t>
             </a:r>
           </a:p>
         </p:txBody>
@@ -8419,7 +10044,7 @@
           <p:cNvPr id="16" name="">
             <a:extLst xmlns:a="http://schemas.openxmlformats.org/drawingml/2006/main">
               <a:ext uri="{FF2B5EF4-FFF2-40B4-BE49-F238E27FC236}">
-                <a16:creationId xmlns:a16="http://schemas.microsoft.com/office/drawing/2014/main" id="{3776FE09-5B35-4B4A-BF19-6C1654B3DC00}"/>
+                <a16:creationId xmlns:a16="http://schemas.microsoft.com/office/drawing/2014/main" id="{A2FEBD98-0E74-4BD5-A044-8D966567EF85}"/>
               </a:ext>
             </a:extLst>
           </p:cNvPr>
@@ -8452,7 +10077,7 @@
           <p:cNvPr id="17" name="">
             <a:extLst xmlns:a="http://schemas.openxmlformats.org/drawingml/2006/main">
               <a:ext uri="{FF2B5EF4-FFF2-40B4-BE49-F238E27FC236}">
-                <a16:creationId xmlns:a16="http://schemas.microsoft.com/office/drawing/2014/main" id="{C52399F8-7B0D-4121-A5B8-F69B6914CB89}"/>
+                <a16:creationId xmlns:a16="http://schemas.microsoft.com/office/drawing/2014/main" id="{7D7E2CEA-4BAE-490B-B340-B101DEE8D19B}"/>
               </a:ext>
             </a:extLst>
           </p:cNvPr>
@@ -8485,7 +10110,7 @@
           <p:cNvPr id="18" name="">
             <a:extLst xmlns:a="http://schemas.openxmlformats.org/drawingml/2006/main">
               <a:ext uri="{FF2B5EF4-FFF2-40B4-BE49-F238E27FC236}">
-                <a16:creationId xmlns:a16="http://schemas.microsoft.com/office/drawing/2014/main" id="{024EFC3E-F498-49C6-9BD5-58A2FCE22372}"/>
+                <a16:creationId xmlns:a16="http://schemas.microsoft.com/office/drawing/2014/main" id="{F57AD614-AE98-4709-8D9B-CC69E2553D1D}"/>
               </a:ext>
             </a:extLst>
           </p:cNvPr>
@@ -8526,7 +10151,7 @@
                   <a:srgbClr val="172033"/>
                 </a:solidFill>
               </a:rPr>
-              <a:t>Ledger &amp; trial balance</a:t>
+              <a:t>Ledger &amp; registers</a:t>
             </a:r>
           </a:p>
         </p:txBody>
@@ -8536,7 +10161,7 @@
           <p:cNvPr id="19" name="">
             <a:extLst xmlns:a="http://schemas.openxmlformats.org/drawingml/2006/main">
               <a:ext uri="{FF2B5EF4-FFF2-40B4-BE49-F238E27FC236}">
-                <a16:creationId xmlns:a16="http://schemas.microsoft.com/office/drawing/2014/main" id="{B08AC107-3146-4B99-A582-2CD030B5DA5B}"/>
+                <a16:creationId xmlns:a16="http://schemas.microsoft.com/office/drawing/2014/main" id="{1A359FB1-2307-4A04-909B-66CBFDDB4C05}"/>
               </a:ext>
             </a:extLst>
           </p:cNvPr>
@@ -8577,7 +10202,7 @@
                   <a:srgbClr val="5F6F86"/>
                 </a:solidFill>
               </a:rPr>
-              <a:t>Double-entry journal and a live trial balance that always ties out to the penny.</a:t>
+              <a:t>Double-entry journal, a live trial balance, and a running-balance register per account.</a:t>
             </a:r>
           </a:p>
         </p:txBody>
@@ -8587,7 +10212,7 @@
           <p:cNvPr id="20" name="">
             <a:extLst xmlns:a="http://schemas.openxmlformats.org/drawingml/2006/main">
               <a:ext uri="{FF2B5EF4-FFF2-40B4-BE49-F238E27FC236}">
-                <a16:creationId xmlns:a16="http://schemas.microsoft.com/office/drawing/2014/main" id="{12AFEA6E-6CA4-4243-BF1A-EB213E9062B2}"/>
+                <a16:creationId xmlns:a16="http://schemas.microsoft.com/office/drawing/2014/main" id="{5EA5E2CC-BB30-496A-A5AD-82A17FB6FD09}"/>
               </a:ext>
             </a:extLst>
           </p:cNvPr>
@@ -8620,7 +10245,7 @@
           <p:cNvPr id="21" name="">
             <a:extLst xmlns:a="http://schemas.openxmlformats.org/drawingml/2006/main">
               <a:ext uri="{FF2B5EF4-FFF2-40B4-BE49-F238E27FC236}">
-                <a16:creationId xmlns:a16="http://schemas.microsoft.com/office/drawing/2014/main" id="{3C4FC478-B722-48E8-8B66-4E209F511261}"/>
+                <a16:creationId xmlns:a16="http://schemas.microsoft.com/office/drawing/2014/main" id="{02794E2B-65E9-4593-8E6C-ECDAA4BCF1AD}"/>
               </a:ext>
             </a:extLst>
           </p:cNvPr>
@@ -8653,7 +10278,7 @@
           <p:cNvPr id="22" name="">
             <a:extLst xmlns:a="http://schemas.openxmlformats.org/drawingml/2006/main">
               <a:ext uri="{FF2B5EF4-FFF2-40B4-BE49-F238E27FC236}">
-                <a16:creationId xmlns:a16="http://schemas.microsoft.com/office/drawing/2014/main" id="{460DA44A-F0B6-42D8-A0C9-28088C5C1E2D}"/>
+                <a16:creationId xmlns:a16="http://schemas.microsoft.com/office/drawing/2014/main" id="{24BA5F77-AF63-48B5-AA01-D5616B09AD24}"/>
               </a:ext>
             </a:extLst>
           </p:cNvPr>
@@ -8694,7 +10319,7 @@
                   <a:srgbClr val="172033"/>
                 </a:solidFill>
               </a:rPr>
-              <a:t>Statements</a:t>
+              <a:t>Statements &amp; reports</a:t>
             </a:r>
           </a:p>
         </p:txBody>
@@ -8704,7 +10329,7 @@
           <p:cNvPr id="23" name="">
             <a:extLst xmlns:a="http://schemas.openxmlformats.org/drawingml/2006/main">
               <a:ext uri="{FF2B5EF4-FFF2-40B4-BE49-F238E27FC236}">
-                <a16:creationId xmlns:a16="http://schemas.microsoft.com/office/drawing/2014/main" id="{9B345C2A-2971-40AB-AF38-8127F5C5EA43}"/>
+                <a16:creationId xmlns:a16="http://schemas.microsoft.com/office/drawing/2014/main" id="{70627762-020C-4866-A09C-CF8CB84CC67B}"/>
               </a:ext>
             </a:extLst>
           </p:cNvPr>
@@ -8745,7 +10370,7 @@
                   <a:srgbClr val="5F6F86"/>
                 </a:solidFill>
               </a:rPr>
-              <a:t>Income statement and balance sheet on demand, no re-keying into other software.</a:t>
+              <a:t>Income statement, balance sheet, cash flow, and P&amp;L by month — print-ready on demand.</a:t>
             </a:r>
           </a:p>
         </p:txBody>
@@ -8755,7 +10380,7 @@
           <p:cNvPr id="24" name="">
             <a:extLst xmlns:a="http://schemas.openxmlformats.org/drawingml/2006/main">
               <a:ext uri="{FF2B5EF4-FFF2-40B4-BE49-F238E27FC236}">
-                <a16:creationId xmlns:a16="http://schemas.microsoft.com/office/drawing/2014/main" id="{AEB25C1B-8503-4A08-9AE9-856B3EC74667}"/>
+                <a16:creationId xmlns:a16="http://schemas.microsoft.com/office/drawing/2014/main" id="{EF693C70-A7E9-4260-9862-F148FF5A18FD}"/>
               </a:ext>
             </a:extLst>
           </p:cNvPr>
@@ -8788,7 +10413,7 @@
           <p:cNvPr id="25" name="">
             <a:extLst xmlns:a="http://schemas.openxmlformats.org/drawingml/2006/main">
               <a:ext uri="{FF2B5EF4-FFF2-40B4-BE49-F238E27FC236}">
-                <a16:creationId xmlns:a16="http://schemas.microsoft.com/office/drawing/2014/main" id="{6358FD8C-055A-4BAD-B5A6-842CA633701B}"/>
+                <a16:creationId xmlns:a16="http://schemas.microsoft.com/office/drawing/2014/main" id="{C2DA3AC6-1E80-4833-AEAE-5721A0F5E3A5}"/>
               </a:ext>
             </a:extLst>
           </p:cNvPr>
@@ -8821,7 +10446,7 @@
           <p:cNvPr id="26" name="">
             <a:extLst xmlns:a="http://schemas.openxmlformats.org/drawingml/2006/main">
               <a:ext uri="{FF2B5EF4-FFF2-40B4-BE49-F238E27FC236}">
-                <a16:creationId xmlns:a16="http://schemas.microsoft.com/office/drawing/2014/main" id="{E980C319-8635-46C5-A426-60DDE4EE9E3C}"/>
+                <a16:creationId xmlns:a16="http://schemas.microsoft.com/office/drawing/2014/main" id="{7882C06B-3BC6-4F96-A380-3BEA8014BC3D}"/>
               </a:ext>
             </a:extLst>
           </p:cNvPr>
@@ -8872,7 +10497,7 @@
           <p:cNvPr id="27" name="">
             <a:extLst xmlns:a="http://schemas.openxmlformats.org/drawingml/2006/main">
               <a:ext uri="{FF2B5EF4-FFF2-40B4-BE49-F238E27FC236}">
-                <a16:creationId xmlns:a16="http://schemas.microsoft.com/office/drawing/2014/main" id="{4533ECCF-0DCB-491B-820D-BD9BC5F78702}"/>
+                <a16:creationId xmlns:a16="http://schemas.microsoft.com/office/drawing/2014/main" id="{E22AFB0E-8E3F-4173-AA35-A1B82596F33D}"/>
               </a:ext>
             </a:extLst>
           </p:cNvPr>
@@ -8913,7 +10538,7 @@
                   <a:srgbClr val="5F6F86"/>
                 </a:solidFill>
               </a:rPr>
-              <a:t>Lock a period when it is final, and send branded invoice and bill PDFs.</a:t>
+              <a:t>Lock a period when it is final, and send branded invoice, bill, and statement PDFs.</a:t>
             </a:r>
           </a:p>
         </p:txBody>
@@ -8923,7 +10548,7 @@
           <p:cNvPr id="28" name="">
             <a:extLst xmlns:a="http://schemas.openxmlformats.org/drawingml/2006/main">
               <a:ext uri="{FF2B5EF4-FFF2-40B4-BE49-F238E27FC236}">
-                <a16:creationId xmlns:a16="http://schemas.microsoft.com/office/drawing/2014/main" id="{B8F3F145-494F-468B-B8E2-DFA401203E43}"/>
+                <a16:creationId xmlns:a16="http://schemas.microsoft.com/office/drawing/2014/main" id="{D3126999-00E5-4043-B8D9-5EAD3980FA58}"/>
               </a:ext>
             </a:extLst>
           </p:cNvPr>
@@ -8974,7 +10599,7 @@
           <p:cNvPr id="29" name="">
             <a:extLst xmlns:a="http://schemas.openxmlformats.org/drawingml/2006/main">
               <a:ext uri="{FF2B5EF4-FFF2-40B4-BE49-F238E27FC236}">
-                <a16:creationId xmlns:a16="http://schemas.microsoft.com/office/drawing/2014/main" id="{6B259483-FCDE-428A-9C0C-BC8FE09714BE}"/>
+                <a16:creationId xmlns:a16="http://schemas.microsoft.com/office/drawing/2014/main" id="{5580125C-C980-454D-9D98-AE9FC7AFC70E}"/>
               </a:ext>
             </a:extLst>
           </p:cNvPr>
@@ -9023,7 +10648,7 @@
     </p:spTree>
     <p:extLst>
       <p:ext uri="{BB962C8B-B14F-4D97-AF65-F5344CB8AC3E}">
-        <p14:creationId xmlns:p14="http://schemas.microsoft.com/office/powerpoint/2010/main" val="1542553388"/>
+        <p14:creationId xmlns:p14="http://schemas.microsoft.com/office/powerpoint/2010/main" val="340009906"/>
       </p:ext>
     </p:extLst>
   </p:cSld>
@@ -9047,7 +10672,7 @@
           <p:cNvPr id="1" name="">
             <a:extLst xmlns:a="http://schemas.openxmlformats.org/drawingml/2006/main">
               <a:ext uri="{FF2B5EF4-FFF2-40B4-BE49-F238E27FC236}">
-                <a16:creationId xmlns:a16="http://schemas.microsoft.com/office/drawing/2014/main" id="{539FE15F-1E35-43F8-A43D-7CEA40CEE423}"/>
+                <a16:creationId xmlns:a16="http://schemas.microsoft.com/office/drawing/2014/main" id="{CF12BA3A-F61B-417C-8DBF-FD63978283BC}"/>
               </a:ext>
             </a:extLst>
           </p:cNvPr>
@@ -9080,7 +10705,7 @@
           <p:cNvPr id="2" name="">
             <a:extLst xmlns:a="http://schemas.openxmlformats.org/drawingml/2006/main">
               <a:ext uri="{FF2B5EF4-FFF2-40B4-BE49-F238E27FC236}">
-                <a16:creationId xmlns:a16="http://schemas.microsoft.com/office/drawing/2014/main" id="{F61958BC-8D5A-4F60-A839-27E6E86AB7EE}"/>
+                <a16:creationId xmlns:a16="http://schemas.microsoft.com/office/drawing/2014/main" id="{3989EABD-131B-48C4-9DC4-694AD952764C}"/>
               </a:ext>
             </a:extLst>
           </p:cNvPr>
@@ -9117,7 +10742,7 @@
           <p:nvPr/>
         </p:nvPicPr>
         <p:blipFill>
-          <a:blip xmlns:r="http://schemas.openxmlformats.org/officeDocument/2006/relationships" xmlns:a="http://schemas.openxmlformats.org/drawingml/2006/main" r:embed="Re1f126493bdb4c12"/>
+          <a:blip xmlns:r="http://schemas.openxmlformats.org/officeDocument/2006/relationships" xmlns:a="http://schemas.openxmlformats.org/drawingml/2006/main" r:embed="R1168033db0ab4f59"/>
           <a:stretch xmlns:a="http://schemas.openxmlformats.org/drawingml/2006/main"/>
         </p:blipFill>
         <p:spPr>
@@ -9135,7 +10760,7 @@
           <p:cNvPr id="4" name="">
             <a:extLst xmlns:a="http://schemas.openxmlformats.org/drawingml/2006/main">
               <a:ext uri="{FF2B5EF4-FFF2-40B4-BE49-F238E27FC236}">
-                <a16:creationId xmlns:a16="http://schemas.microsoft.com/office/drawing/2014/main" id="{7B4B6046-5B41-4BDB-B682-613298D7C107}"/>
+                <a16:creationId xmlns:a16="http://schemas.microsoft.com/office/drawing/2014/main" id="{4C6B0C4A-2DFB-40BF-B6B0-387683D4BF80}"/>
               </a:ext>
             </a:extLst>
           </p:cNvPr>
@@ -9186,7 +10811,7 @@
           <p:cNvPr id="5" name="">
             <a:extLst xmlns:a="http://schemas.openxmlformats.org/drawingml/2006/main">
               <a:ext uri="{FF2B5EF4-FFF2-40B4-BE49-F238E27FC236}">
-                <a16:creationId xmlns:a16="http://schemas.microsoft.com/office/drawing/2014/main" id="{B773E7D5-650C-4392-98CA-150BAA066751}"/>
+                <a16:creationId xmlns:a16="http://schemas.microsoft.com/office/drawing/2014/main" id="{313DA7B2-09D1-4427-A6E7-B66696621ED4}"/>
               </a:ext>
             </a:extLst>
           </p:cNvPr>
@@ -9237,7 +10862,7 @@
           <p:cNvPr id="6" name="">
             <a:extLst xmlns:a="http://schemas.openxmlformats.org/drawingml/2006/main">
               <a:ext uri="{FF2B5EF4-FFF2-40B4-BE49-F238E27FC236}">
-                <a16:creationId xmlns:a16="http://schemas.microsoft.com/office/drawing/2014/main" id="{3F3516E7-1133-4325-93AD-B3C02AAA3816}"/>
+                <a16:creationId xmlns:a16="http://schemas.microsoft.com/office/drawing/2014/main" id="{189E8764-92D4-4C70-979B-5952C2656447}"/>
               </a:ext>
             </a:extLst>
           </p:cNvPr>
@@ -9288,7 +10913,7 @@
           <p:cNvPr id="7" name="">
             <a:extLst xmlns:a="http://schemas.openxmlformats.org/drawingml/2006/main">
               <a:ext uri="{FF2B5EF4-FFF2-40B4-BE49-F238E27FC236}">
-                <a16:creationId xmlns:a16="http://schemas.microsoft.com/office/drawing/2014/main" id="{EEFE2C49-0202-4A8B-88D5-05929B6E7877}"/>
+                <a16:creationId xmlns:a16="http://schemas.microsoft.com/office/drawing/2014/main" id="{C309F023-30CF-4F29-AAA3-32DE95575819}"/>
               </a:ext>
             </a:extLst>
           </p:cNvPr>
@@ -9321,7 +10946,7 @@
           <p:cNvPr id="8" name="">
             <a:extLst xmlns:a="http://schemas.openxmlformats.org/drawingml/2006/main">
               <a:ext uri="{FF2B5EF4-FFF2-40B4-BE49-F238E27FC236}">
-                <a16:creationId xmlns:a16="http://schemas.microsoft.com/office/drawing/2014/main" id="{48736093-24C5-450C-8032-CA978CAABC31}"/>
+                <a16:creationId xmlns:a16="http://schemas.microsoft.com/office/drawing/2014/main" id="{FF670EB0-8CE1-4CE8-A1B1-88356015B958}"/>
               </a:ext>
             </a:extLst>
           </p:cNvPr>
@@ -9354,7 +10979,7 @@
           <p:cNvPr id="9" name="">
             <a:extLst xmlns:a="http://schemas.openxmlformats.org/drawingml/2006/main">
               <a:ext uri="{FF2B5EF4-FFF2-40B4-BE49-F238E27FC236}">
-                <a16:creationId xmlns:a16="http://schemas.microsoft.com/office/drawing/2014/main" id="{5EB1E862-094D-41E7-8EC4-9326F2527506}"/>
+                <a16:creationId xmlns:a16="http://schemas.microsoft.com/office/drawing/2014/main" id="{9F0742E8-924D-4BB9-9F3A-74495DB78007}"/>
               </a:ext>
             </a:extLst>
           </p:cNvPr>
@@ -9405,7 +11030,7 @@
           <p:cNvPr id="10" name="">
             <a:extLst xmlns:a="http://schemas.openxmlformats.org/drawingml/2006/main">
               <a:ext uri="{FF2B5EF4-FFF2-40B4-BE49-F238E27FC236}">
-                <a16:creationId xmlns:a16="http://schemas.microsoft.com/office/drawing/2014/main" id="{EDF17C03-2771-4B5F-8884-97E65A0AB7F4}"/>
+                <a16:creationId xmlns:a16="http://schemas.microsoft.com/office/drawing/2014/main" id="{20C730E6-8AA8-4756-8550-83CBF970D4AB}"/>
               </a:ext>
             </a:extLst>
           </p:cNvPr>
@@ -9456,7 +11081,7 @@
           <p:cNvPr id="11" name="">
             <a:extLst xmlns:a="http://schemas.openxmlformats.org/drawingml/2006/main">
               <a:ext uri="{FF2B5EF4-FFF2-40B4-BE49-F238E27FC236}">
-                <a16:creationId xmlns:a16="http://schemas.microsoft.com/office/drawing/2014/main" id="{B3AFFA96-319D-4149-9017-9198CFB1FA38}"/>
+                <a16:creationId xmlns:a16="http://schemas.microsoft.com/office/drawing/2014/main" id="{8BA07855-6FB9-47A8-857C-599BC27C119D}"/>
               </a:ext>
             </a:extLst>
           </p:cNvPr>
@@ -9489,7 +11114,7 @@
           <p:cNvPr id="12" name="">
             <a:extLst xmlns:a="http://schemas.openxmlformats.org/drawingml/2006/main">
               <a:ext uri="{FF2B5EF4-FFF2-40B4-BE49-F238E27FC236}">
-                <a16:creationId xmlns:a16="http://schemas.microsoft.com/office/drawing/2014/main" id="{002D5784-0AB1-4351-87B9-FDB792687E39}"/>
+                <a16:creationId xmlns:a16="http://schemas.microsoft.com/office/drawing/2014/main" id="{1767A3EB-24E2-4E55-991E-85A11FC4E347}"/>
               </a:ext>
             </a:extLst>
           </p:cNvPr>
@@ -9522,7 +11147,7 @@
           <p:cNvPr id="13" name="">
             <a:extLst xmlns:a="http://schemas.openxmlformats.org/drawingml/2006/main">
               <a:ext uri="{FF2B5EF4-FFF2-40B4-BE49-F238E27FC236}">
-                <a16:creationId xmlns:a16="http://schemas.microsoft.com/office/drawing/2014/main" id="{D0941BA1-FECE-4496-A3B2-4523C008D980}"/>
+                <a16:creationId xmlns:a16="http://schemas.microsoft.com/office/drawing/2014/main" id="{66C44F50-4A61-423B-9DE7-9DFEA6767914}"/>
               </a:ext>
             </a:extLst>
           </p:cNvPr>
@@ -9573,7 +11198,7 @@
           <p:cNvPr id="14" name="">
             <a:extLst xmlns:a="http://schemas.openxmlformats.org/drawingml/2006/main">
               <a:ext uri="{FF2B5EF4-FFF2-40B4-BE49-F238E27FC236}">
-                <a16:creationId xmlns:a16="http://schemas.microsoft.com/office/drawing/2014/main" id="{1CA8DBC8-8455-4ED3-9E02-5FB4078B7E78}"/>
+                <a16:creationId xmlns:a16="http://schemas.microsoft.com/office/drawing/2014/main" id="{C662F4CD-BF3C-4DFA-B4A6-9F24A73EEBD9}"/>
               </a:ext>
             </a:extLst>
           </p:cNvPr>
@@ -9624,7 +11249,7 @@
           <p:cNvPr id="15" name="">
             <a:extLst xmlns:a="http://schemas.openxmlformats.org/drawingml/2006/main">
               <a:ext uri="{FF2B5EF4-FFF2-40B4-BE49-F238E27FC236}">
-                <a16:creationId xmlns:a16="http://schemas.microsoft.com/office/drawing/2014/main" id="{F6AECF66-BD09-4042-9EAF-B887ABE07E01}"/>
+                <a16:creationId xmlns:a16="http://schemas.microsoft.com/office/drawing/2014/main" id="{B0BC258D-825A-4EE1-A9E7-E568F76179CF}"/>
               </a:ext>
             </a:extLst>
           </p:cNvPr>
@@ -9657,7 +11282,7 @@
           <p:cNvPr id="16" name="">
             <a:extLst xmlns:a="http://schemas.openxmlformats.org/drawingml/2006/main">
               <a:ext uri="{FF2B5EF4-FFF2-40B4-BE49-F238E27FC236}">
-                <a16:creationId xmlns:a16="http://schemas.microsoft.com/office/drawing/2014/main" id="{6C90044E-B82B-46D4-B29C-31E9D986FE1F}"/>
+                <a16:creationId xmlns:a16="http://schemas.microsoft.com/office/drawing/2014/main" id="{9579F368-5922-452A-9F43-1B03D7348714}"/>
               </a:ext>
             </a:extLst>
           </p:cNvPr>
@@ -9690,7 +11315,7 @@
           <p:cNvPr id="17" name="">
             <a:extLst xmlns:a="http://schemas.openxmlformats.org/drawingml/2006/main">
               <a:ext uri="{FF2B5EF4-FFF2-40B4-BE49-F238E27FC236}">
-                <a16:creationId xmlns:a16="http://schemas.microsoft.com/office/drawing/2014/main" id="{FA3183F1-C7DD-4890-9B82-258D0A2E57CC}"/>
+                <a16:creationId xmlns:a16="http://schemas.microsoft.com/office/drawing/2014/main" id="{8D7C9AA1-D18A-4842-A9E3-367CE9A6A8FC}"/>
               </a:ext>
             </a:extLst>
           </p:cNvPr>
@@ -9741,7 +11366,7 @@
           <p:cNvPr id="18" name="">
             <a:extLst xmlns:a="http://schemas.openxmlformats.org/drawingml/2006/main">
               <a:ext uri="{FF2B5EF4-FFF2-40B4-BE49-F238E27FC236}">
-                <a16:creationId xmlns:a16="http://schemas.microsoft.com/office/drawing/2014/main" id="{5E96C5FB-A5B6-431A-A9DE-1671E1EC5AC9}"/>
+                <a16:creationId xmlns:a16="http://schemas.microsoft.com/office/drawing/2014/main" id="{71D4E199-41C3-4AA3-B615-7E250AEA7AA0}"/>
               </a:ext>
             </a:extLst>
           </p:cNvPr>
@@ -9792,7 +11417,7 @@
           <p:cNvPr id="19" name="">
             <a:extLst xmlns:a="http://schemas.openxmlformats.org/drawingml/2006/main">
               <a:ext uri="{FF2B5EF4-FFF2-40B4-BE49-F238E27FC236}">
-                <a16:creationId xmlns:a16="http://schemas.microsoft.com/office/drawing/2014/main" id="{059FE730-E0CF-4273-8578-D53F85EE3FA7}"/>
+                <a16:creationId xmlns:a16="http://schemas.microsoft.com/office/drawing/2014/main" id="{7B930A9A-B56F-4397-8680-04694D9E4ADB}"/>
               </a:ext>
             </a:extLst>
           </p:cNvPr>
@@ -9843,7 +11468,7 @@
           <p:cNvPr id="20" name="">
             <a:extLst xmlns:a="http://schemas.openxmlformats.org/drawingml/2006/main">
               <a:ext uri="{FF2B5EF4-FFF2-40B4-BE49-F238E27FC236}">
-                <a16:creationId xmlns:a16="http://schemas.microsoft.com/office/drawing/2014/main" id="{76AA797C-2AFE-4473-9449-48425B327947}"/>
+                <a16:creationId xmlns:a16="http://schemas.microsoft.com/office/drawing/2014/main" id="{10BFC484-5B04-4706-858A-AD7FEBD093AA}"/>
               </a:ext>
             </a:extLst>
           </p:cNvPr>
@@ -9892,7 +11517,7 @@
     </p:spTree>
     <p:extLst>
       <p:ext uri="{BB962C8B-B14F-4D97-AF65-F5344CB8AC3E}">
-        <p14:creationId xmlns:p14="http://schemas.microsoft.com/office/powerpoint/2010/main" val="1802258453"/>
+        <p14:creationId xmlns:p14="http://schemas.microsoft.com/office/powerpoint/2010/main" val="472038161"/>
       </p:ext>
     </p:extLst>
   </p:cSld>
@@ -9916,7 +11541,7 @@
           <p:cNvPr id="1" name="">
             <a:extLst xmlns:a="http://schemas.openxmlformats.org/drawingml/2006/main">
               <a:ext uri="{FF2B5EF4-FFF2-40B4-BE49-F238E27FC236}">
-                <a16:creationId xmlns:a16="http://schemas.microsoft.com/office/drawing/2014/main" id="{A7B35657-09DA-49D2-95C2-ACEB8BC75382}"/>
+                <a16:creationId xmlns:a16="http://schemas.microsoft.com/office/drawing/2014/main" id="{DDE9B8DE-6CFA-4693-91F7-26CDA8DE4C4A}"/>
               </a:ext>
             </a:extLst>
           </p:cNvPr>
@@ -9949,7 +11574,7 @@
           <p:cNvPr id="2" name="">
             <a:extLst xmlns:a="http://schemas.openxmlformats.org/drawingml/2006/main">
               <a:ext uri="{FF2B5EF4-FFF2-40B4-BE49-F238E27FC236}">
-                <a16:creationId xmlns:a16="http://schemas.microsoft.com/office/drawing/2014/main" id="{914B8A21-3BF4-4EE4-8432-88D8345C7FCE}"/>
+                <a16:creationId xmlns:a16="http://schemas.microsoft.com/office/drawing/2014/main" id="{A19200BC-7EC9-4DAD-979E-8311D30E3B9F}"/>
               </a:ext>
             </a:extLst>
           </p:cNvPr>
@@ -10000,7 +11625,7 @@
           <p:cNvPr id="3" name="">
             <a:extLst xmlns:a="http://schemas.openxmlformats.org/drawingml/2006/main">
               <a:ext uri="{FF2B5EF4-FFF2-40B4-BE49-F238E27FC236}">
-                <a16:creationId xmlns:a16="http://schemas.microsoft.com/office/drawing/2014/main" id="{332E31AC-04C8-4BC8-BA1A-B0CB9B6B1990}"/>
+                <a16:creationId xmlns:a16="http://schemas.microsoft.com/office/drawing/2014/main" id="{5BB4DAB7-68E6-42A2-8B64-2C2A44E6683B}"/>
               </a:ext>
             </a:extLst>
           </p:cNvPr>
@@ -10051,7 +11676,7 @@
           <p:cNvPr id="4" name="">
             <a:extLst xmlns:a="http://schemas.openxmlformats.org/drawingml/2006/main">
               <a:ext uri="{FF2B5EF4-FFF2-40B4-BE49-F238E27FC236}">
-                <a16:creationId xmlns:a16="http://schemas.microsoft.com/office/drawing/2014/main" id="{5909E10B-A199-4105-BC31-782A47DDE62D}"/>
+                <a16:creationId xmlns:a16="http://schemas.microsoft.com/office/drawing/2014/main" id="{633FD8C4-D696-4945-8DC6-0E3F7F20D4D5}"/>
               </a:ext>
             </a:extLst>
           </p:cNvPr>
@@ -10088,7 +11713,7 @@
           <p:nvPr/>
         </p:nvPicPr>
         <p:blipFill>
-          <a:blip xmlns:r="http://schemas.openxmlformats.org/officeDocument/2006/relationships" xmlns:a="http://schemas.openxmlformats.org/drawingml/2006/main" r:embed="R37031a7b70e64830"/>
+          <a:blip xmlns:r="http://schemas.openxmlformats.org/officeDocument/2006/relationships" xmlns:a="http://schemas.openxmlformats.org/drawingml/2006/main" r:embed="Rab7d5a3b8fa7404c"/>
           <a:stretch xmlns:a="http://schemas.openxmlformats.org/drawingml/2006/main"/>
         </p:blipFill>
         <p:spPr>
@@ -10106,7 +11731,7 @@
           <p:cNvPr id="6" name="">
             <a:extLst xmlns:a="http://schemas.openxmlformats.org/drawingml/2006/main">
               <a:ext uri="{FF2B5EF4-FFF2-40B4-BE49-F238E27FC236}">
-                <a16:creationId xmlns:a16="http://schemas.microsoft.com/office/drawing/2014/main" id="{2C6703D0-6A0C-47BF-AFA9-B3C768DAAF91}"/>
+                <a16:creationId xmlns:a16="http://schemas.microsoft.com/office/drawing/2014/main" id="{763C9AD1-8BF4-4954-9C5B-587490F5FE00}"/>
               </a:ext>
             </a:extLst>
           </p:cNvPr>
@@ -10160,7 +11785,7 @@
           <p:cNvPr id="7" name="">
             <a:extLst xmlns:a="http://schemas.openxmlformats.org/drawingml/2006/main">
               <a:ext uri="{FF2B5EF4-FFF2-40B4-BE49-F238E27FC236}">
-                <a16:creationId xmlns:a16="http://schemas.microsoft.com/office/drawing/2014/main" id="{D33233FE-2506-4D39-8C69-7B7E61C23D7F}"/>
+                <a16:creationId xmlns:a16="http://schemas.microsoft.com/office/drawing/2014/main" id="{A2885075-1CDD-4C06-8499-07892961D100}"/>
               </a:ext>
             </a:extLst>
           </p:cNvPr>
@@ -10197,7 +11822,7 @@
           <p:nvPr/>
         </p:nvPicPr>
         <p:blipFill>
-          <a:blip xmlns:r="http://schemas.openxmlformats.org/officeDocument/2006/relationships" xmlns:a="http://schemas.openxmlformats.org/drawingml/2006/main" r:embed="Racd619ffdbcf42c4"/>
+          <a:blip xmlns:r="http://schemas.openxmlformats.org/officeDocument/2006/relationships" xmlns:a="http://schemas.openxmlformats.org/drawingml/2006/main" r:embed="R73895721f8f04fd4"/>
           <a:stretch xmlns:a="http://schemas.openxmlformats.org/drawingml/2006/main"/>
         </p:blipFill>
         <p:spPr>
@@ -10215,7 +11840,7 @@
           <p:cNvPr id="9" name="">
             <a:extLst xmlns:a="http://schemas.openxmlformats.org/drawingml/2006/main">
               <a:ext uri="{FF2B5EF4-FFF2-40B4-BE49-F238E27FC236}">
-                <a16:creationId xmlns:a16="http://schemas.microsoft.com/office/drawing/2014/main" id="{659ED447-C11A-49FE-AFFE-12501469A488}"/>
+                <a16:creationId xmlns:a16="http://schemas.microsoft.com/office/drawing/2014/main" id="{3EE68493-D5C0-459C-BA08-88E1B711475A}"/>
               </a:ext>
             </a:extLst>
           </p:cNvPr>
@@ -10269,7 +11894,7 @@
           <p:cNvPr id="10" name="">
             <a:extLst xmlns:a="http://schemas.openxmlformats.org/drawingml/2006/main">
               <a:ext uri="{FF2B5EF4-FFF2-40B4-BE49-F238E27FC236}">
-                <a16:creationId xmlns:a16="http://schemas.microsoft.com/office/drawing/2014/main" id="{FF51C620-9618-4605-925B-DD2A56FC1241}"/>
+                <a16:creationId xmlns:a16="http://schemas.microsoft.com/office/drawing/2014/main" id="{EE6616BD-8B44-49EF-817C-89820231E504}"/>
               </a:ext>
             </a:extLst>
           </p:cNvPr>
@@ -10306,7 +11931,7 @@
           <p:nvPr/>
         </p:nvPicPr>
         <p:blipFill>
-          <a:blip xmlns:r="http://schemas.openxmlformats.org/officeDocument/2006/relationships" xmlns:a="http://schemas.openxmlformats.org/drawingml/2006/main" r:embed="R583e19868e5449bb"/>
+          <a:blip xmlns:r="http://schemas.openxmlformats.org/officeDocument/2006/relationships" xmlns:a="http://schemas.openxmlformats.org/drawingml/2006/main" r:embed="Rc69b734812994ef7"/>
           <a:stretch xmlns:a="http://schemas.openxmlformats.org/drawingml/2006/main"/>
         </p:blipFill>
         <p:spPr>
@@ -10324,7 +11949,7 @@
           <p:cNvPr id="12" name="">
             <a:extLst xmlns:a="http://schemas.openxmlformats.org/drawingml/2006/main">
               <a:ext uri="{FF2B5EF4-FFF2-40B4-BE49-F238E27FC236}">
-                <a16:creationId xmlns:a16="http://schemas.microsoft.com/office/drawing/2014/main" id="{ADDC34C4-DF4B-4D4C-8281-9992E4A44B02}"/>
+                <a16:creationId xmlns:a16="http://schemas.microsoft.com/office/drawing/2014/main" id="{28D9EDBC-CB9F-498C-9B0C-ED69E20DAFB1}"/>
               </a:ext>
             </a:extLst>
           </p:cNvPr>
@@ -10378,7 +12003,7 @@
           <p:cNvPr id="13" name="">
             <a:extLst xmlns:a="http://schemas.openxmlformats.org/drawingml/2006/main">
               <a:ext uri="{FF2B5EF4-FFF2-40B4-BE49-F238E27FC236}">
-                <a16:creationId xmlns:a16="http://schemas.microsoft.com/office/drawing/2014/main" id="{D84DA3D8-7C14-4D3D-98EE-50114F42198C}"/>
+                <a16:creationId xmlns:a16="http://schemas.microsoft.com/office/drawing/2014/main" id="{3DD7A25E-F7DC-4F8F-980D-AE0FB2C99294}"/>
               </a:ext>
             </a:extLst>
           </p:cNvPr>
@@ -10411,7 +12036,7 @@
           <p:cNvPr id="14" name="">
             <a:extLst xmlns:a="http://schemas.openxmlformats.org/drawingml/2006/main">
               <a:ext uri="{FF2B5EF4-FFF2-40B4-BE49-F238E27FC236}">
-                <a16:creationId xmlns:a16="http://schemas.microsoft.com/office/drawing/2014/main" id="{062F1090-3535-4A05-83FF-F05FE3D0FE45}"/>
+                <a16:creationId xmlns:a16="http://schemas.microsoft.com/office/drawing/2014/main" id="{77322885-0841-4437-8B50-9A41F69C5CD8}"/>
               </a:ext>
             </a:extLst>
           </p:cNvPr>
@@ -10444,7 +12069,7 @@
           <p:cNvPr id="15" name="">
             <a:extLst xmlns:a="http://schemas.openxmlformats.org/drawingml/2006/main">
               <a:ext uri="{FF2B5EF4-FFF2-40B4-BE49-F238E27FC236}">
-                <a16:creationId xmlns:a16="http://schemas.microsoft.com/office/drawing/2014/main" id="{56B88FD0-E55B-4072-ACB2-5E8DDBA3D601}"/>
+                <a16:creationId xmlns:a16="http://schemas.microsoft.com/office/drawing/2014/main" id="{921A4DC9-26F1-4F73-A48F-DAE7A382E141}"/>
               </a:ext>
             </a:extLst>
           </p:cNvPr>
@@ -10495,7 +12120,7 @@
           <p:cNvPr id="16" name="">
             <a:extLst xmlns:a="http://schemas.openxmlformats.org/drawingml/2006/main">
               <a:ext uri="{FF2B5EF4-FFF2-40B4-BE49-F238E27FC236}">
-                <a16:creationId xmlns:a16="http://schemas.microsoft.com/office/drawing/2014/main" id="{27D89E78-6C89-4F1F-B73F-FD2A7EA27D4E}"/>
+                <a16:creationId xmlns:a16="http://schemas.microsoft.com/office/drawing/2014/main" id="{5D37C9CB-195E-4CD5-80DC-0087ED21C34F}"/>
               </a:ext>
             </a:extLst>
           </p:cNvPr>
@@ -10536,7 +12161,7 @@
                   <a:srgbClr val="5F6F86"/>
                 </a:solidFill>
               </a:rPr>
-              <a:t>Vendor bills and A/P, customer and vendor directories, A/R + A/P aging, balance sheet, cash flow, journal and trial balance, period close, invoice/bill PDFs, dark mode.</a:t>
+              <a:t>Vendor bills and A/P, customer and vendor directories, A/R + A/P aging, balance sheet, cash flow, account registers, job costing, recurring transactions, credit memos and void, customer statement PDFs, quick expense entry, period close, invoice/bill PDFs, dark mode.</a:t>
             </a:r>
           </a:p>
         </p:txBody>
@@ -10546,7 +12171,7 @@
           <p:cNvPr id="17" name="">
             <a:extLst xmlns:a="http://schemas.openxmlformats.org/drawingml/2006/main">
               <a:ext uri="{FF2B5EF4-FFF2-40B4-BE49-F238E27FC236}">
-                <a16:creationId xmlns:a16="http://schemas.microsoft.com/office/drawing/2014/main" id="{22F17EB6-D532-49EA-93C5-E75AD9A35620}"/>
+                <a16:creationId xmlns:a16="http://schemas.microsoft.com/office/drawing/2014/main" id="{1AE4C86D-A431-493C-AD4A-662DDFF65298}"/>
               </a:ext>
             </a:extLst>
           </p:cNvPr>
@@ -10597,7 +12222,7 @@
           <p:cNvPr id="18" name="">
             <a:extLst xmlns:a="http://schemas.openxmlformats.org/drawingml/2006/main">
               <a:ext uri="{FF2B5EF4-FFF2-40B4-BE49-F238E27FC236}">
-                <a16:creationId xmlns:a16="http://schemas.microsoft.com/office/drawing/2014/main" id="{82C2CDA1-BD2E-4596-8E99-AD26C4201A9C}"/>
+                <a16:creationId xmlns:a16="http://schemas.microsoft.com/office/drawing/2014/main" id="{1EE1C2F9-3C78-4DDA-851D-5DDC31393DC0}"/>
               </a:ext>
             </a:extLst>
           </p:cNvPr>
@@ -10646,7 +12271,7 @@
     </p:spTree>
     <p:extLst>
       <p:ext uri="{BB962C8B-B14F-4D97-AF65-F5344CB8AC3E}">
-        <p14:creationId xmlns:p14="http://schemas.microsoft.com/office/powerpoint/2010/main" val="1508716678"/>
+        <p14:creationId xmlns:p14="http://schemas.microsoft.com/office/powerpoint/2010/main" val="304864011"/>
       </p:ext>
     </p:extLst>
   </p:cSld>
@@ -10670,7 +12295,7 @@
           <p:cNvPr id="1" name="">
             <a:extLst xmlns:a="http://schemas.openxmlformats.org/drawingml/2006/main">
               <a:ext uri="{FF2B5EF4-FFF2-40B4-BE49-F238E27FC236}">
-                <a16:creationId xmlns:a16="http://schemas.microsoft.com/office/drawing/2014/main" id="{2562BB7A-2950-4834-995B-81DA4F5F849F}"/>
+                <a16:creationId xmlns:a16="http://schemas.microsoft.com/office/drawing/2014/main" id="{976B7B42-893B-4478-A9A3-2B06F13BF51D}"/>
               </a:ext>
             </a:extLst>
           </p:cNvPr>
@@ -10703,7 +12328,7 @@
           <p:cNvPr id="2" name="">
             <a:extLst xmlns:a="http://schemas.openxmlformats.org/drawingml/2006/main">
               <a:ext uri="{FF2B5EF4-FFF2-40B4-BE49-F238E27FC236}">
-                <a16:creationId xmlns:a16="http://schemas.microsoft.com/office/drawing/2014/main" id="{EFEF30BC-6262-4C66-BBBA-549DA1F7510F}"/>
+                <a16:creationId xmlns:a16="http://schemas.microsoft.com/office/drawing/2014/main" id="{26238729-DA73-499C-8812-290D985716C0}"/>
               </a:ext>
             </a:extLst>
           </p:cNvPr>
@@ -10744,7 +12369,7 @@
                   <a:srgbClr val="5F6F86"/>
                 </a:solidFill>
               </a:rPr>
-              <a:t>COMMERCIAL PATH</a:t>
+              <a:t>ALREADY SHIPPED</a:t>
             </a:r>
           </a:p>
         </p:txBody>
@@ -10754,7 +12379,7 @@
           <p:cNvPr id="3" name="">
             <a:extLst xmlns:a="http://schemas.openxmlformats.org/drawingml/2006/main">
               <a:ext uri="{FF2B5EF4-FFF2-40B4-BE49-F238E27FC236}">
-                <a16:creationId xmlns:a16="http://schemas.microsoft.com/office/drawing/2014/main" id="{01CFFBD0-9458-4533-8EBB-2C5871664EEF}"/>
+                <a16:creationId xmlns:a16="http://schemas.microsoft.com/office/drawing/2014/main" id="{0BFC96CD-D5D3-45F7-97A7-CA9680EB270C}"/>
               </a:ext>
             </a:extLst>
           </p:cNvPr>
@@ -10795,7 +12420,7 @@
                   <a:srgbClr val="172033"/>
                 </a:solidFill>
               </a:rPr>
-              <a:t>One clean foundation build, then an optional close-support lane.</a:t>
+              <a:t>The QuickBooks-replacement layer is live in the product.</a:t>
             </a:r>
           </a:p>
         </p:txBody>
@@ -10805,222 +12430,70 @@
           <p:cNvPr id="4" name="">
             <a:extLst xmlns:a="http://schemas.openxmlformats.org/drawingml/2006/main">
               <a:ext uri="{FF2B5EF4-FFF2-40B4-BE49-F238E27FC236}">
-                <a16:creationId xmlns:a16="http://schemas.microsoft.com/office/drawing/2014/main" id="{FEF00793-D948-4B7F-847E-B03ABD025290}"/>
-              </a:ext>
-            </a:extLst>
-          </p:cNvPr>
-          <p:cNvSpPr>
-            <a:spLocks xmlns:a="http://schemas.openxmlformats.org/drawingml/2006/main" noGrp="1"/>
-          </p:cNvSpPr>
-          <p:nvPr/>
-        </p:nvSpPr>
-        <p:spPr>
-          <a:xfrm xmlns:a="http://schemas.openxmlformats.org/drawingml/2006/main">
-            <a:off x="685800" y="2343150"/>
-            <a:ext cx="4876800" cy="2705100"/>
-          </a:xfrm>
-          <a:prstGeom xmlns:a="http://schemas.openxmlformats.org/drawingml/2006/main" prst="rect">
-            <a:avLst/>
-          </a:prstGeom>
-          <a:solidFill xmlns:a="http://schemas.openxmlformats.org/drawingml/2006/main">
-            <a:srgbClr val="0B1F33"/>
-          </a:solidFill>
-          <a:ln xmlns:a="http://schemas.openxmlformats.org/drawingml/2006/main" w="0">
-            <a:solidFill>
-              <a:srgbClr val="0B1F33"/>
-            </a:solidFill>
-            <a:prstDash val="solid"/>
-          </a:ln>
-        </p:spPr>
+                <a16:creationId xmlns:a16="http://schemas.microsoft.com/office/drawing/2014/main" id="{26D9FE4F-F8AC-4749-AE3E-A67CC0D2D578}"/>
+              </a:ext>
+            </a:extLst>
+          </p:cNvPr>
+          <p:cNvSpPr>
+            <a:spLocks xmlns:a="http://schemas.openxmlformats.org/drawingml/2006/main" noGrp="1"/>
+          </p:cNvSpPr>
+          <p:nvPr/>
+        </p:nvSpPr>
+        <p:spPr>
+          <a:xfrm xmlns:a="http://schemas.openxmlformats.org/drawingml/2006/main">
+            <a:off x="685800" y="1628775"/>
+            <a:ext cx="8953500" cy="495300"/>
+          </a:xfrm>
+          <a:prstGeom xmlns:a="http://schemas.openxmlformats.org/drawingml/2006/main" prst="rect">
+            <a:avLst/>
+          </a:prstGeom>
+          <a:ln xmlns:a="http://schemas.openxmlformats.org/drawingml/2006/main" w="0">
+            <a:solidFill>
+              <a:srgbClr val="FFFFFF"/>
+            </a:solidFill>
+            <a:prstDash val="solid"/>
+          </a:ln>
+        </p:spPr>
+        <p:txBody>
+          <a:bodyPr xmlns:a="http://schemas.openxmlformats.org/drawingml/2006/main" anchor="t"/>
+          <a:lstStyle xmlns:a="http://schemas.openxmlformats.org/drawingml/2006/main"/>
+          <a:p xmlns:a="http://schemas.openxmlformats.org/drawingml/2006/main">
+            <a:pPr algn="l">
+              <a:defRPr sz="1425" b="0">
+                <a:solidFill>
+                  <a:srgbClr val="5F6F86"/>
+                </a:solidFill>
+              </a:defRPr>
+            </a:pPr>
+            <a:r>
+              <a:rPr sz="1425" b="0">
+                <a:solidFill>
+                  <a:srgbClr val="5F6F86"/>
+                </a:solidFill>
+              </a:rPr>
+              <a:t>Everything below is deployed today — rollout work, not a build-from-scratch roadmap.</a:t>
+            </a:r>
+          </a:p>
+        </p:txBody>
       </p:sp>
       <p:sp>
         <p:nvSpPr>
           <p:cNvPr id="5" name="">
             <a:extLst xmlns:a="http://schemas.openxmlformats.org/drawingml/2006/main">
               <a:ext uri="{FF2B5EF4-FFF2-40B4-BE49-F238E27FC236}">
-                <a16:creationId xmlns:a16="http://schemas.microsoft.com/office/drawing/2014/main" id="{A038046A-E3B9-4E36-97F0-650D90A615E1}"/>
-              </a:ext>
-            </a:extLst>
-          </p:cNvPr>
-          <p:cNvSpPr>
-            <a:spLocks xmlns:a="http://schemas.openxmlformats.org/drawingml/2006/main" noGrp="1"/>
-          </p:cNvSpPr>
-          <p:nvPr/>
-        </p:nvSpPr>
-        <p:spPr>
-          <a:xfrm xmlns:a="http://schemas.openxmlformats.org/drawingml/2006/main">
-            <a:off x="1047750" y="2724150"/>
-            <a:ext cx="4095750" cy="533400"/>
-          </a:xfrm>
-          <a:prstGeom xmlns:a="http://schemas.openxmlformats.org/drawingml/2006/main" prst="rect">
-            <a:avLst/>
-          </a:prstGeom>
-          <a:ln xmlns:a="http://schemas.openxmlformats.org/drawingml/2006/main" w="0">
-            <a:solidFill>
-              <a:srgbClr val="FFFFFF"/>
-            </a:solidFill>
-            <a:prstDash val="solid"/>
-          </a:ln>
-        </p:spPr>
-        <p:txBody>
-          <a:bodyPr xmlns:a="http://schemas.openxmlformats.org/drawingml/2006/main" anchor="t"/>
-          <a:lstStyle xmlns:a="http://schemas.openxmlformats.org/drawingml/2006/main"/>
-          <a:p xmlns:a="http://schemas.openxmlformats.org/drawingml/2006/main">
-            <a:pPr algn="l">
-              <a:defRPr sz="1800" b="1">
-                <a:solidFill>
-                  <a:srgbClr val="FFFFFF"/>
-                </a:solidFill>
-              </a:defRPr>
-            </a:pPr>
-            <a:r>
-              <a:rPr sz="1800" b="1">
-                <a:solidFill>
-                  <a:srgbClr val="FFFFFF"/>
-                </a:solidFill>
-              </a:rPr>
-              <a:t>Blueprint Books Foundation</a:t>
-            </a:r>
-          </a:p>
-        </p:txBody>
-      </p:sp>
-      <p:sp>
-        <p:nvSpPr>
-          <p:cNvPr id="6" name="">
-            <a:extLst xmlns:a="http://schemas.openxmlformats.org/drawingml/2006/main">
-              <a:ext uri="{FF2B5EF4-FFF2-40B4-BE49-F238E27FC236}">
-                <a16:creationId xmlns:a16="http://schemas.microsoft.com/office/drawing/2014/main" id="{21A084E2-8B3D-49F8-A856-47709CC312CE}"/>
-              </a:ext>
-            </a:extLst>
-          </p:cNvPr>
-          <p:cNvSpPr>
-            <a:spLocks xmlns:a="http://schemas.openxmlformats.org/drawingml/2006/main" noGrp="1"/>
-          </p:cNvSpPr>
-          <p:nvPr/>
-        </p:nvSpPr>
-        <p:spPr>
-          <a:xfrm xmlns:a="http://schemas.openxmlformats.org/drawingml/2006/main">
-            <a:off x="1047750" y="3390900"/>
-            <a:ext cx="4000500" cy="514350"/>
-          </a:xfrm>
-          <a:prstGeom xmlns:a="http://schemas.openxmlformats.org/drawingml/2006/main" prst="rect">
-            <a:avLst/>
-          </a:prstGeom>
-          <a:ln xmlns:a="http://schemas.openxmlformats.org/drawingml/2006/main" w="0">
-            <a:solidFill>
-              <a:srgbClr val="FFFFFF"/>
-            </a:solidFill>
-            <a:prstDash val="solid"/>
-          </a:ln>
-        </p:spPr>
-        <p:txBody>
-          <a:bodyPr xmlns:a="http://schemas.openxmlformats.org/drawingml/2006/main" anchor="t"/>
-          <a:lstStyle xmlns:a="http://schemas.openxmlformats.org/drawingml/2006/main"/>
-          <a:p xmlns:a="http://schemas.openxmlformats.org/drawingml/2006/main">
-            <a:pPr algn="l">
-              <a:defRPr sz="2850" b="1">
-                <a:solidFill>
-                  <a:srgbClr val="9FE0C8"/>
-                </a:solidFill>
-              </a:defRPr>
-            </a:pPr>
-            <a:r>
-              <a:rPr sz="2850" b="1">
-                <a:solidFill>
-                  <a:srgbClr val="9FE0C8"/>
-                </a:solidFill>
-              </a:rPr>
-              <a:t>$18,500 fixed fee</a:t>
-            </a:r>
-          </a:p>
-        </p:txBody>
-      </p:sp>
-      <p:sp>
-        <p:nvSpPr>
-          <p:cNvPr id="7" name="">
-            <a:extLst xmlns:a="http://schemas.openxmlformats.org/drawingml/2006/main">
-              <a:ext uri="{FF2B5EF4-FFF2-40B4-BE49-F238E27FC236}">
-                <a16:creationId xmlns:a16="http://schemas.microsoft.com/office/drawing/2014/main" id="{9D2C96C7-3844-4FE2-A69C-24394AEAB291}"/>
-              </a:ext>
-            </a:extLst>
-          </p:cNvPr>
-          <p:cNvSpPr>
-            <a:spLocks xmlns:a="http://schemas.openxmlformats.org/drawingml/2006/main" noGrp="1"/>
-          </p:cNvSpPr>
-          <p:nvPr/>
-        </p:nvSpPr>
-        <p:spPr>
-          <a:xfrm xmlns:a="http://schemas.openxmlformats.org/drawingml/2006/main">
-            <a:off x="1066800" y="4038600"/>
-            <a:ext cx="3905250" cy="628650"/>
-          </a:xfrm>
-          <a:prstGeom xmlns:a="http://schemas.openxmlformats.org/drawingml/2006/main" prst="rect">
-            <a:avLst/>
-          </a:prstGeom>
-          <a:ln xmlns:a="http://schemas.openxmlformats.org/drawingml/2006/main" w="0">
-            <a:solidFill>
-              <a:srgbClr val="FFFFFF"/>
-            </a:solidFill>
-            <a:prstDash val="solid"/>
-          </a:ln>
-        </p:spPr>
-        <p:txBody>
-          <a:bodyPr xmlns:a="http://schemas.openxmlformats.org/drawingml/2006/main" anchor="t"/>
-          <a:lstStyle xmlns:a="http://schemas.openxmlformats.org/drawingml/2006/main"/>
-          <a:p xmlns:a="http://schemas.openxmlformats.org/drawingml/2006/main">
-            <a:pPr algn="l">
-              <a:defRPr sz="1350" b="0">
-                <a:solidFill>
-                  <a:srgbClr val="D9EAF8"/>
-                </a:solidFill>
-              </a:defRPr>
-            </a:pPr>
-            <a:r>
-              <a:rPr sz="1350" b="0">
-                <a:solidFill>
-                  <a:srgbClr val="D9EAF8"/>
-                </a:solidFill>
-              </a:rPr>
-              <a:t>50% start / 50% closeout</a:t>
-            </a:r>
-          </a:p>
-          <a:p xmlns:a="http://schemas.openxmlformats.org/drawingml/2006/main">
-            <a:pPr algn="l">
-              <a:defRPr sz="1350" b="0">
-                <a:solidFill>
-                  <a:srgbClr val="D9EAF8"/>
-                </a:solidFill>
-              </a:defRPr>
-            </a:pPr>
-            <a:r>
-              <a:rPr sz="1350" b="0">
-                <a:solidFill>
-                  <a:srgbClr val="D9EAF8"/>
-                </a:solidFill>
-              </a:rPr>
-              <a:t>4-5 weeks from opening-balance readiness</a:t>
-            </a:r>
-          </a:p>
-        </p:txBody>
-      </p:sp>
-      <p:sp>
-        <p:nvSpPr>
-          <p:cNvPr id="8" name="">
-            <a:extLst xmlns:a="http://schemas.openxmlformats.org/drawingml/2006/main">
-              <a:ext uri="{FF2B5EF4-FFF2-40B4-BE49-F238E27FC236}">
-                <a16:creationId xmlns:a16="http://schemas.microsoft.com/office/drawing/2014/main" id="{F35CE544-00C7-4E2A-B5FB-9DD8E957128E}"/>
-              </a:ext>
-            </a:extLst>
-          </p:cNvPr>
-          <p:cNvSpPr>
-            <a:spLocks xmlns:a="http://schemas.openxmlformats.org/drawingml/2006/main" noGrp="1"/>
-          </p:cNvSpPr>
-          <p:nvPr/>
-        </p:nvSpPr>
-        <p:spPr>
-          <a:xfrm xmlns:a="http://schemas.openxmlformats.org/drawingml/2006/main">
-            <a:off x="6153150" y="2343150"/>
-            <a:ext cx="2381250" cy="1638300"/>
+                <a16:creationId xmlns:a16="http://schemas.microsoft.com/office/drawing/2014/main" id="{356EA5F2-5133-4A52-B854-B7124FF74889}"/>
+              </a:ext>
+            </a:extLst>
+          </p:cNvPr>
+          <p:cNvSpPr>
+            <a:spLocks xmlns:a="http://schemas.openxmlformats.org/drawingml/2006/main" noGrp="1"/>
+          </p:cNvSpPr>
+          <p:nvPr/>
+        </p:nvSpPr>
+        <p:spPr>
+          <a:xfrm xmlns:a="http://schemas.openxmlformats.org/drawingml/2006/main">
+            <a:off x="685800" y="2362200"/>
+            <a:ext cx="3162300" cy="1428750"/>
           </a:xfrm>
           <a:prstGeom xmlns:a="http://schemas.openxmlformats.org/drawingml/2006/main" prst="rect">
             <a:avLst/>
@@ -11038,22 +12511,526 @@
       </p:sp>
       <p:sp>
         <p:nvSpPr>
+          <p:cNvPr id="6" name="">
+            <a:extLst xmlns:a="http://schemas.openxmlformats.org/drawingml/2006/main">
+              <a:ext uri="{FF2B5EF4-FFF2-40B4-BE49-F238E27FC236}">
+                <a16:creationId xmlns:a16="http://schemas.microsoft.com/office/drawing/2014/main" id="{C7C9C6D9-1788-49C5-AD36-45A8E776C9D9}"/>
+              </a:ext>
+            </a:extLst>
+          </p:cNvPr>
+          <p:cNvSpPr>
+            <a:spLocks xmlns:a="http://schemas.openxmlformats.org/drawingml/2006/main" noGrp="1"/>
+          </p:cNvSpPr>
+          <p:nvPr/>
+        </p:nvSpPr>
+        <p:spPr>
+          <a:xfrm xmlns:a="http://schemas.openxmlformats.org/drawingml/2006/main">
+            <a:off x="685800" y="2362200"/>
+            <a:ext cx="57150" cy="1428750"/>
+          </a:xfrm>
+          <a:prstGeom xmlns:a="http://schemas.openxmlformats.org/drawingml/2006/main" prst="rect">
+            <a:avLst/>
+          </a:prstGeom>
+          <a:solidFill xmlns:a="http://schemas.openxmlformats.org/drawingml/2006/main">
+            <a:srgbClr val="1D7F5F"/>
+          </a:solidFill>
+          <a:ln xmlns:a="http://schemas.openxmlformats.org/drawingml/2006/main" w="0">
+            <a:solidFill>
+              <a:srgbClr val="1D7F5F"/>
+            </a:solidFill>
+            <a:prstDash val="solid"/>
+          </a:ln>
+        </p:spPr>
+      </p:sp>
+      <p:sp>
+        <p:nvSpPr>
+          <p:cNvPr id="7" name="">
+            <a:extLst xmlns:a="http://schemas.openxmlformats.org/drawingml/2006/main">
+              <a:ext uri="{FF2B5EF4-FFF2-40B4-BE49-F238E27FC236}">
+                <a16:creationId xmlns:a16="http://schemas.microsoft.com/office/drawing/2014/main" id="{CD014308-5418-4679-8F01-D75121CCA48A}"/>
+              </a:ext>
+            </a:extLst>
+          </p:cNvPr>
+          <p:cNvSpPr>
+            <a:spLocks xmlns:a="http://schemas.openxmlformats.org/drawingml/2006/main" noGrp="1"/>
+          </p:cNvSpPr>
+          <p:nvPr/>
+        </p:nvSpPr>
+        <p:spPr>
+          <a:xfrm xmlns:a="http://schemas.openxmlformats.org/drawingml/2006/main">
+            <a:off x="914400" y="2552700"/>
+            <a:ext cx="2781300" cy="285750"/>
+          </a:xfrm>
+          <a:prstGeom xmlns:a="http://schemas.openxmlformats.org/drawingml/2006/main" prst="rect">
+            <a:avLst/>
+          </a:prstGeom>
+          <a:ln xmlns:a="http://schemas.openxmlformats.org/drawingml/2006/main" w="0">
+            <a:solidFill>
+              <a:srgbClr val="FFFFFF"/>
+            </a:solidFill>
+            <a:prstDash val="solid"/>
+          </a:ln>
+        </p:spPr>
+        <p:txBody>
+          <a:bodyPr xmlns:a="http://schemas.openxmlformats.org/drawingml/2006/main" anchor="t"/>
+          <a:lstStyle xmlns:a="http://schemas.openxmlformats.org/drawingml/2006/main"/>
+          <a:p xmlns:a="http://schemas.openxmlformats.org/drawingml/2006/main">
+            <a:pPr algn="l">
+              <a:defRPr sz="1350" b="1">
+                <a:solidFill>
+                  <a:srgbClr val="172033"/>
+                </a:solidFill>
+              </a:defRPr>
+            </a:pPr>
+            <a:r>
+              <a:rPr sz="1350" b="1">
+                <a:solidFill>
+                  <a:srgbClr val="172033"/>
+                </a:solidFill>
+              </a:rPr>
+              <a:t>Account registers</a:t>
+            </a:r>
+          </a:p>
+        </p:txBody>
+      </p:sp>
+      <p:sp>
+        <p:nvSpPr>
+          <p:cNvPr id="8" name="">
+            <a:extLst xmlns:a="http://schemas.openxmlformats.org/drawingml/2006/main">
+              <a:ext uri="{FF2B5EF4-FFF2-40B4-BE49-F238E27FC236}">
+                <a16:creationId xmlns:a16="http://schemas.microsoft.com/office/drawing/2014/main" id="{26EEF1CA-67F7-4AB1-9869-E9ADE338DAC6}"/>
+              </a:ext>
+            </a:extLst>
+          </p:cNvPr>
+          <p:cNvSpPr>
+            <a:spLocks xmlns:a="http://schemas.openxmlformats.org/drawingml/2006/main" noGrp="1"/>
+          </p:cNvSpPr>
+          <p:nvPr/>
+        </p:nvSpPr>
+        <p:spPr>
+          <a:xfrm xmlns:a="http://schemas.openxmlformats.org/drawingml/2006/main">
+            <a:off x="914400" y="2914650"/>
+            <a:ext cx="2762250" cy="742950"/>
+          </a:xfrm>
+          <a:prstGeom xmlns:a="http://schemas.openxmlformats.org/drawingml/2006/main" prst="rect">
+            <a:avLst/>
+          </a:prstGeom>
+          <a:ln xmlns:a="http://schemas.openxmlformats.org/drawingml/2006/main" w="0">
+            <a:solidFill>
+              <a:srgbClr val="FFFFFF"/>
+            </a:solidFill>
+            <a:prstDash val="solid"/>
+          </a:ln>
+        </p:spPr>
+        <p:txBody>
+          <a:bodyPr xmlns:a="http://schemas.openxmlformats.org/drawingml/2006/main" anchor="t"/>
+          <a:lstStyle xmlns:a="http://schemas.openxmlformats.org/drawingml/2006/main"/>
+          <a:p xmlns:a="http://schemas.openxmlformats.org/drawingml/2006/main">
+            <a:pPr algn="l">
+              <a:defRPr sz="1050" b="0">
+                <a:solidFill>
+                  <a:srgbClr val="5F6F86"/>
+                </a:solidFill>
+              </a:defRPr>
+            </a:pPr>
+            <a:r>
+              <a:rPr sz="1050" b="0">
+                <a:solidFill>
+                  <a:srgbClr val="5F6F86"/>
+                </a:solidFill>
+              </a:rPr>
+              <a:t>Running-balance history for every account — a checkbook view per ledger line.</a:t>
+            </a:r>
+          </a:p>
+        </p:txBody>
+      </p:sp>
+      <p:sp>
+        <p:nvSpPr>
           <p:cNvPr id="9" name="">
             <a:extLst xmlns:a="http://schemas.openxmlformats.org/drawingml/2006/main">
               <a:ext uri="{FF2B5EF4-FFF2-40B4-BE49-F238E27FC236}">
-                <a16:creationId xmlns:a16="http://schemas.microsoft.com/office/drawing/2014/main" id="{E22CA8DB-225E-43BB-84AD-E1599F2C7EEB}"/>
-              </a:ext>
-            </a:extLst>
-          </p:cNvPr>
-          <p:cNvSpPr>
-            <a:spLocks xmlns:a="http://schemas.openxmlformats.org/drawingml/2006/main" noGrp="1"/>
-          </p:cNvSpPr>
-          <p:nvPr/>
-        </p:nvSpPr>
-        <p:spPr>
-          <a:xfrm xmlns:a="http://schemas.openxmlformats.org/drawingml/2006/main">
-            <a:off x="6153150" y="2343150"/>
-            <a:ext cx="57150" cy="1638300"/>
+                <a16:creationId xmlns:a16="http://schemas.microsoft.com/office/drawing/2014/main" id="{0B4CACE4-F4A5-4B16-8A2B-C00F509E5DEA}"/>
+              </a:ext>
+            </a:extLst>
+          </p:cNvPr>
+          <p:cNvSpPr>
+            <a:spLocks xmlns:a="http://schemas.openxmlformats.org/drawingml/2006/main" noGrp="1"/>
+          </p:cNvSpPr>
+          <p:nvPr/>
+        </p:nvSpPr>
+        <p:spPr>
+          <a:xfrm xmlns:a="http://schemas.openxmlformats.org/drawingml/2006/main">
+            <a:off x="4343400" y="2362200"/>
+            <a:ext cx="3162300" cy="1428750"/>
+          </a:xfrm>
+          <a:prstGeom xmlns:a="http://schemas.openxmlformats.org/drawingml/2006/main" prst="rect">
+            <a:avLst/>
+          </a:prstGeom>
+          <a:solidFill xmlns:a="http://schemas.openxmlformats.org/drawingml/2006/main">
+            <a:srgbClr val="FFFFFF"/>
+          </a:solidFill>
+          <a:ln xmlns:a="http://schemas.openxmlformats.org/drawingml/2006/main" w="0">
+            <a:solidFill>
+              <a:srgbClr val="D8E2ED"/>
+            </a:solidFill>
+            <a:prstDash val="solid"/>
+          </a:ln>
+        </p:spPr>
+      </p:sp>
+      <p:sp>
+        <p:nvSpPr>
+          <p:cNvPr id="10" name="">
+            <a:extLst xmlns:a="http://schemas.openxmlformats.org/drawingml/2006/main">
+              <a:ext uri="{FF2B5EF4-FFF2-40B4-BE49-F238E27FC236}">
+                <a16:creationId xmlns:a16="http://schemas.microsoft.com/office/drawing/2014/main" id="{9FD6A189-F935-4C1E-A396-98E3922D9282}"/>
+              </a:ext>
+            </a:extLst>
+          </p:cNvPr>
+          <p:cNvSpPr>
+            <a:spLocks xmlns:a="http://schemas.openxmlformats.org/drawingml/2006/main" noGrp="1"/>
+          </p:cNvSpPr>
+          <p:nvPr/>
+        </p:nvSpPr>
+        <p:spPr>
+          <a:xfrm xmlns:a="http://schemas.openxmlformats.org/drawingml/2006/main">
+            <a:off x="4343400" y="2362200"/>
+            <a:ext cx="57150" cy="1428750"/>
+          </a:xfrm>
+          <a:prstGeom xmlns:a="http://schemas.openxmlformats.org/drawingml/2006/main" prst="rect">
+            <a:avLst/>
+          </a:prstGeom>
+          <a:solidFill xmlns:a="http://schemas.openxmlformats.org/drawingml/2006/main">
+            <a:srgbClr val="23A6D5"/>
+          </a:solidFill>
+          <a:ln xmlns:a="http://schemas.openxmlformats.org/drawingml/2006/main" w="0">
+            <a:solidFill>
+              <a:srgbClr val="23A6D5"/>
+            </a:solidFill>
+            <a:prstDash val="solid"/>
+          </a:ln>
+        </p:spPr>
+      </p:sp>
+      <p:sp>
+        <p:nvSpPr>
+          <p:cNvPr id="11" name="">
+            <a:extLst xmlns:a="http://schemas.openxmlformats.org/drawingml/2006/main">
+              <a:ext uri="{FF2B5EF4-FFF2-40B4-BE49-F238E27FC236}">
+                <a16:creationId xmlns:a16="http://schemas.microsoft.com/office/drawing/2014/main" id="{2504C3F0-9F36-4B4B-8F18-E14B87DED964}"/>
+              </a:ext>
+            </a:extLst>
+          </p:cNvPr>
+          <p:cNvSpPr>
+            <a:spLocks xmlns:a="http://schemas.openxmlformats.org/drawingml/2006/main" noGrp="1"/>
+          </p:cNvSpPr>
+          <p:nvPr/>
+        </p:nvSpPr>
+        <p:spPr>
+          <a:xfrm xmlns:a="http://schemas.openxmlformats.org/drawingml/2006/main">
+            <a:off x="4572000" y="2552700"/>
+            <a:ext cx="2781300" cy="285750"/>
+          </a:xfrm>
+          <a:prstGeom xmlns:a="http://schemas.openxmlformats.org/drawingml/2006/main" prst="rect">
+            <a:avLst/>
+          </a:prstGeom>
+          <a:ln xmlns:a="http://schemas.openxmlformats.org/drawingml/2006/main" w="0">
+            <a:solidFill>
+              <a:srgbClr val="FFFFFF"/>
+            </a:solidFill>
+            <a:prstDash val="solid"/>
+          </a:ln>
+        </p:spPr>
+        <p:txBody>
+          <a:bodyPr xmlns:a="http://schemas.openxmlformats.org/drawingml/2006/main" anchor="t"/>
+          <a:lstStyle xmlns:a="http://schemas.openxmlformats.org/drawingml/2006/main"/>
+          <a:p xmlns:a="http://schemas.openxmlformats.org/drawingml/2006/main">
+            <a:pPr algn="l">
+              <a:defRPr sz="1350" b="1">
+                <a:solidFill>
+                  <a:srgbClr val="172033"/>
+                </a:solidFill>
+              </a:defRPr>
+            </a:pPr>
+            <a:r>
+              <a:rPr sz="1350" b="1">
+                <a:solidFill>
+                  <a:srgbClr val="172033"/>
+                </a:solidFill>
+              </a:rPr>
+              <a:t>Report pack</a:t>
+            </a:r>
+          </a:p>
+        </p:txBody>
+      </p:sp>
+      <p:sp>
+        <p:nvSpPr>
+          <p:cNvPr id="12" name="">
+            <a:extLst xmlns:a="http://schemas.openxmlformats.org/drawingml/2006/main">
+              <a:ext uri="{FF2B5EF4-FFF2-40B4-BE49-F238E27FC236}">
+                <a16:creationId xmlns:a16="http://schemas.microsoft.com/office/drawing/2014/main" id="{DE43D0F8-B1A4-4815-9FDD-A0B58CF04C30}"/>
+              </a:ext>
+            </a:extLst>
+          </p:cNvPr>
+          <p:cNvSpPr>
+            <a:spLocks xmlns:a="http://schemas.openxmlformats.org/drawingml/2006/main" noGrp="1"/>
+          </p:cNvSpPr>
+          <p:nvPr/>
+        </p:nvSpPr>
+        <p:spPr>
+          <a:xfrm xmlns:a="http://schemas.openxmlformats.org/drawingml/2006/main">
+            <a:off x="4572000" y="2914650"/>
+            <a:ext cx="2762250" cy="742950"/>
+          </a:xfrm>
+          <a:prstGeom xmlns:a="http://schemas.openxmlformats.org/drawingml/2006/main" prst="rect">
+            <a:avLst/>
+          </a:prstGeom>
+          <a:ln xmlns:a="http://schemas.openxmlformats.org/drawingml/2006/main" w="0">
+            <a:solidFill>
+              <a:srgbClr val="FFFFFF"/>
+            </a:solidFill>
+            <a:prstDash val="solid"/>
+          </a:ln>
+        </p:spPr>
+        <p:txBody>
+          <a:bodyPr xmlns:a="http://schemas.openxmlformats.org/drawingml/2006/main" anchor="t"/>
+          <a:lstStyle xmlns:a="http://schemas.openxmlformats.org/drawingml/2006/main"/>
+          <a:p xmlns:a="http://schemas.openxmlformats.org/drawingml/2006/main">
+            <a:pPr algn="l">
+              <a:defRPr sz="1050" b="0">
+                <a:solidFill>
+                  <a:srgbClr val="5F6F86"/>
+                </a:solidFill>
+              </a:defRPr>
+            </a:pPr>
+            <a:r>
+              <a:rPr sz="1050" b="0">
+                <a:solidFill>
+                  <a:srgbClr val="5F6F86"/>
+                </a:solidFill>
+              </a:rPr>
+              <a:t>General Ledger, Journal, and P&amp;L by month, alongside the three statements.</a:t>
+            </a:r>
+          </a:p>
+        </p:txBody>
+      </p:sp>
+      <p:sp>
+        <p:nvSpPr>
+          <p:cNvPr id="13" name="">
+            <a:extLst xmlns:a="http://schemas.openxmlformats.org/drawingml/2006/main">
+              <a:ext uri="{FF2B5EF4-FFF2-40B4-BE49-F238E27FC236}">
+                <a16:creationId xmlns:a16="http://schemas.microsoft.com/office/drawing/2014/main" id="{6E4EA5DC-D6A6-447E-95E1-FD30AD082F9A}"/>
+              </a:ext>
+            </a:extLst>
+          </p:cNvPr>
+          <p:cNvSpPr>
+            <a:spLocks xmlns:a="http://schemas.openxmlformats.org/drawingml/2006/main" noGrp="1"/>
+          </p:cNvSpPr>
+          <p:nvPr/>
+        </p:nvSpPr>
+        <p:spPr>
+          <a:xfrm xmlns:a="http://schemas.openxmlformats.org/drawingml/2006/main">
+            <a:off x="8001000" y="2362200"/>
+            <a:ext cx="3162300" cy="1428750"/>
+          </a:xfrm>
+          <a:prstGeom xmlns:a="http://schemas.openxmlformats.org/drawingml/2006/main" prst="rect">
+            <a:avLst/>
+          </a:prstGeom>
+          <a:solidFill xmlns:a="http://schemas.openxmlformats.org/drawingml/2006/main">
+            <a:srgbClr val="FFFFFF"/>
+          </a:solidFill>
+          <a:ln xmlns:a="http://schemas.openxmlformats.org/drawingml/2006/main" w="0">
+            <a:solidFill>
+              <a:srgbClr val="D8E2ED"/>
+            </a:solidFill>
+            <a:prstDash val="solid"/>
+          </a:ln>
+        </p:spPr>
+      </p:sp>
+      <p:sp>
+        <p:nvSpPr>
+          <p:cNvPr id="14" name="">
+            <a:extLst xmlns:a="http://schemas.openxmlformats.org/drawingml/2006/main">
+              <a:ext uri="{FF2B5EF4-FFF2-40B4-BE49-F238E27FC236}">
+                <a16:creationId xmlns:a16="http://schemas.microsoft.com/office/drawing/2014/main" id="{6ADF6671-7BD9-4D06-B782-D6362093B412}"/>
+              </a:ext>
+            </a:extLst>
+          </p:cNvPr>
+          <p:cNvSpPr>
+            <a:spLocks xmlns:a="http://schemas.openxmlformats.org/drawingml/2006/main" noGrp="1"/>
+          </p:cNvSpPr>
+          <p:nvPr/>
+        </p:nvSpPr>
+        <p:spPr>
+          <a:xfrm xmlns:a="http://schemas.openxmlformats.org/drawingml/2006/main">
+            <a:off x="8001000" y="2362200"/>
+            <a:ext cx="57150" cy="1428750"/>
+          </a:xfrm>
+          <a:prstGeom xmlns:a="http://schemas.openxmlformats.org/drawingml/2006/main" prst="rect">
+            <a:avLst/>
+          </a:prstGeom>
+          <a:solidFill xmlns:a="http://schemas.openxmlformats.org/drawingml/2006/main">
+            <a:srgbClr val="145DA0"/>
+          </a:solidFill>
+          <a:ln xmlns:a="http://schemas.openxmlformats.org/drawingml/2006/main" w="0">
+            <a:solidFill>
+              <a:srgbClr val="145DA0"/>
+            </a:solidFill>
+            <a:prstDash val="solid"/>
+          </a:ln>
+        </p:spPr>
+      </p:sp>
+      <p:sp>
+        <p:nvSpPr>
+          <p:cNvPr id="15" name="">
+            <a:extLst xmlns:a="http://schemas.openxmlformats.org/drawingml/2006/main">
+              <a:ext uri="{FF2B5EF4-FFF2-40B4-BE49-F238E27FC236}">
+                <a16:creationId xmlns:a16="http://schemas.microsoft.com/office/drawing/2014/main" id="{3579934E-4A1B-41B0-A374-3D035257678F}"/>
+              </a:ext>
+            </a:extLst>
+          </p:cNvPr>
+          <p:cNvSpPr>
+            <a:spLocks xmlns:a="http://schemas.openxmlformats.org/drawingml/2006/main" noGrp="1"/>
+          </p:cNvSpPr>
+          <p:nvPr/>
+        </p:nvSpPr>
+        <p:spPr>
+          <a:xfrm xmlns:a="http://schemas.openxmlformats.org/drawingml/2006/main">
+            <a:off x="8229600" y="2552700"/>
+            <a:ext cx="2781300" cy="285750"/>
+          </a:xfrm>
+          <a:prstGeom xmlns:a="http://schemas.openxmlformats.org/drawingml/2006/main" prst="rect">
+            <a:avLst/>
+          </a:prstGeom>
+          <a:ln xmlns:a="http://schemas.openxmlformats.org/drawingml/2006/main" w="0">
+            <a:solidFill>
+              <a:srgbClr val="FFFFFF"/>
+            </a:solidFill>
+            <a:prstDash val="solid"/>
+          </a:ln>
+        </p:spPr>
+        <p:txBody>
+          <a:bodyPr xmlns:a="http://schemas.openxmlformats.org/drawingml/2006/main" anchor="t"/>
+          <a:lstStyle xmlns:a="http://schemas.openxmlformats.org/drawingml/2006/main"/>
+          <a:p xmlns:a="http://schemas.openxmlformats.org/drawingml/2006/main">
+            <a:pPr algn="l">
+              <a:defRPr sz="1350" b="1">
+                <a:solidFill>
+                  <a:srgbClr val="172033"/>
+                </a:solidFill>
+              </a:defRPr>
+            </a:pPr>
+            <a:r>
+              <a:rPr sz="1350" b="1">
+                <a:solidFill>
+                  <a:srgbClr val="172033"/>
+                </a:solidFill>
+              </a:rPr>
+              <a:t>Job costing</a:t>
+            </a:r>
+          </a:p>
+        </p:txBody>
+      </p:sp>
+      <p:sp>
+        <p:nvSpPr>
+          <p:cNvPr id="16" name="">
+            <a:extLst xmlns:a="http://schemas.openxmlformats.org/drawingml/2006/main">
+              <a:ext uri="{FF2B5EF4-FFF2-40B4-BE49-F238E27FC236}">
+                <a16:creationId xmlns:a16="http://schemas.microsoft.com/office/drawing/2014/main" id="{1F415F0E-1507-4F1E-9126-962796D28B4C}"/>
+              </a:ext>
+            </a:extLst>
+          </p:cNvPr>
+          <p:cNvSpPr>
+            <a:spLocks xmlns:a="http://schemas.openxmlformats.org/drawingml/2006/main" noGrp="1"/>
+          </p:cNvSpPr>
+          <p:nvPr/>
+        </p:nvSpPr>
+        <p:spPr>
+          <a:xfrm xmlns:a="http://schemas.openxmlformats.org/drawingml/2006/main">
+            <a:off x="8229600" y="2914650"/>
+            <a:ext cx="2762250" cy="742950"/>
+          </a:xfrm>
+          <a:prstGeom xmlns:a="http://schemas.openxmlformats.org/drawingml/2006/main" prst="rect">
+            <a:avLst/>
+          </a:prstGeom>
+          <a:ln xmlns:a="http://schemas.openxmlformats.org/drawingml/2006/main" w="0">
+            <a:solidFill>
+              <a:srgbClr val="FFFFFF"/>
+            </a:solidFill>
+            <a:prstDash val="solid"/>
+          </a:ln>
+        </p:spPr>
+        <p:txBody>
+          <a:bodyPr xmlns:a="http://schemas.openxmlformats.org/drawingml/2006/main" anchor="t"/>
+          <a:lstStyle xmlns:a="http://schemas.openxmlformats.org/drawingml/2006/main"/>
+          <a:p xmlns:a="http://schemas.openxmlformats.org/drawingml/2006/main">
+            <a:pPr algn="l">
+              <a:defRPr sz="1050" b="0">
+                <a:solidFill>
+                  <a:srgbClr val="5F6F86"/>
+                </a:solidFill>
+              </a:defRPr>
+            </a:pPr>
+            <a:r>
+              <a:rPr sz="1050" b="0">
+                <a:solidFill>
+                  <a:srgbClr val="5F6F86"/>
+                </a:solidFill>
+              </a:rPr>
+              <a:t>Per-job profit and margin from invoices, bills, and expenses tagged with the job.</a:t>
+            </a:r>
+          </a:p>
+        </p:txBody>
+      </p:sp>
+      <p:sp>
+        <p:nvSpPr>
+          <p:cNvPr id="17" name="">
+            <a:extLst xmlns:a="http://schemas.openxmlformats.org/drawingml/2006/main">
+              <a:ext uri="{FF2B5EF4-FFF2-40B4-BE49-F238E27FC236}">
+                <a16:creationId xmlns:a16="http://schemas.microsoft.com/office/drawing/2014/main" id="{12DB4E91-CD6F-4B84-B438-46B19CBEF3ED}"/>
+              </a:ext>
+            </a:extLst>
+          </p:cNvPr>
+          <p:cNvSpPr>
+            <a:spLocks xmlns:a="http://schemas.openxmlformats.org/drawingml/2006/main" noGrp="1"/>
+          </p:cNvSpPr>
+          <p:nvPr/>
+        </p:nvSpPr>
+        <p:spPr>
+          <a:xfrm xmlns:a="http://schemas.openxmlformats.org/drawingml/2006/main">
+            <a:off x="685800" y="4305300"/>
+            <a:ext cx="3162300" cy="1428750"/>
+          </a:xfrm>
+          <a:prstGeom xmlns:a="http://schemas.openxmlformats.org/drawingml/2006/main" prst="rect">
+            <a:avLst/>
+          </a:prstGeom>
+          <a:solidFill xmlns:a="http://schemas.openxmlformats.org/drawingml/2006/main">
+            <a:srgbClr val="FFFFFF"/>
+          </a:solidFill>
+          <a:ln xmlns:a="http://schemas.openxmlformats.org/drawingml/2006/main" w="0">
+            <a:solidFill>
+              <a:srgbClr val="D8E2ED"/>
+            </a:solidFill>
+            <a:prstDash val="solid"/>
+          </a:ln>
+        </p:spPr>
+      </p:sp>
+      <p:sp>
+        <p:nvSpPr>
+          <p:cNvPr id="18" name="">
+            <a:extLst xmlns:a="http://schemas.openxmlformats.org/drawingml/2006/main">
+              <a:ext uri="{FF2B5EF4-FFF2-40B4-BE49-F238E27FC236}">
+                <a16:creationId xmlns:a16="http://schemas.microsoft.com/office/drawing/2014/main" id="{1D296103-7A8C-4D26-8B72-E7650CF0AFC7}"/>
+              </a:ext>
+            </a:extLst>
+          </p:cNvPr>
+          <p:cNvSpPr>
+            <a:spLocks xmlns:a="http://schemas.openxmlformats.org/drawingml/2006/main" noGrp="1"/>
+          </p:cNvSpPr>
+          <p:nvPr/>
+        </p:nvSpPr>
+        <p:spPr>
+          <a:xfrm xmlns:a="http://schemas.openxmlformats.org/drawingml/2006/main">
+            <a:off x="685800" y="4305300"/>
+            <a:ext cx="57150" cy="1428750"/>
           </a:xfrm>
           <a:prstGeom xmlns:a="http://schemas.openxmlformats.org/drawingml/2006/main" prst="rect">
             <a:avLst/>
@@ -11071,22 +13048,22 @@
       </p:sp>
       <p:sp>
         <p:nvSpPr>
-          <p:cNvPr id="10" name="">
-            <a:extLst xmlns:a="http://schemas.openxmlformats.org/drawingml/2006/main">
-              <a:ext uri="{FF2B5EF4-FFF2-40B4-BE49-F238E27FC236}">
-                <a16:creationId xmlns:a16="http://schemas.microsoft.com/office/drawing/2014/main" id="{541C56B5-4B89-45D7-B09A-77D0C5A0D6E0}"/>
-              </a:ext>
-            </a:extLst>
-          </p:cNvPr>
-          <p:cNvSpPr>
-            <a:spLocks xmlns:a="http://schemas.openxmlformats.org/drawingml/2006/main" noGrp="1"/>
-          </p:cNvSpPr>
-          <p:nvPr/>
-        </p:nvSpPr>
-        <p:spPr>
-          <a:xfrm xmlns:a="http://schemas.openxmlformats.org/drawingml/2006/main">
-            <a:off x="6381750" y="2533650"/>
-            <a:ext cx="2000250" cy="285750"/>
+          <p:cNvPr id="19" name="">
+            <a:extLst xmlns:a="http://schemas.openxmlformats.org/drawingml/2006/main">
+              <a:ext uri="{FF2B5EF4-FFF2-40B4-BE49-F238E27FC236}">
+                <a16:creationId xmlns:a16="http://schemas.microsoft.com/office/drawing/2014/main" id="{DE9403E6-4C2E-452B-9088-915B17C2359C}"/>
+              </a:ext>
+            </a:extLst>
+          </p:cNvPr>
+          <p:cNvSpPr>
+            <a:spLocks xmlns:a="http://schemas.openxmlformats.org/drawingml/2006/main" noGrp="1"/>
+          </p:cNvSpPr>
+          <p:nvPr/>
+        </p:nvSpPr>
+        <p:spPr>
+          <a:xfrm xmlns:a="http://schemas.openxmlformats.org/drawingml/2006/main">
+            <a:off x="914400" y="4495800"/>
+            <a:ext cx="2781300" cy="285750"/>
           </a:xfrm>
           <a:prstGeom xmlns:a="http://schemas.openxmlformats.org/drawingml/2006/main" prst="rect">
             <a:avLst/>
@@ -11115,29 +13092,29 @@
                   <a:srgbClr val="172033"/>
                 </a:solidFill>
               </a:rPr>
-              <a:t>Books Complete</a:t>
-            </a:r>
-          </a:p>
-        </p:txBody>
-      </p:sp>
-      <p:sp>
-        <p:nvSpPr>
-          <p:cNvPr id="11" name="">
-            <a:extLst xmlns:a="http://schemas.openxmlformats.org/drawingml/2006/main">
-              <a:ext uri="{FF2B5EF4-FFF2-40B4-BE49-F238E27FC236}">
-                <a16:creationId xmlns:a16="http://schemas.microsoft.com/office/drawing/2014/main" id="{4A45CBEC-168D-40B4-B42E-9F839B2BFF0F}"/>
-              </a:ext>
-            </a:extLst>
-          </p:cNvPr>
-          <p:cNvSpPr>
-            <a:spLocks xmlns:a="http://schemas.openxmlformats.org/drawingml/2006/main" noGrp="1"/>
-          </p:cNvSpPr>
-          <p:nvPr/>
-        </p:nvSpPr>
-        <p:spPr>
-          <a:xfrm xmlns:a="http://schemas.openxmlformats.org/drawingml/2006/main">
-            <a:off x="6381750" y="2895600"/>
-            <a:ext cx="1981200" cy="952500"/>
+              <a:t>Credits &amp; void</a:t>
+            </a:r>
+          </a:p>
+        </p:txBody>
+      </p:sp>
+      <p:sp>
+        <p:nvSpPr>
+          <p:cNvPr id="20" name="">
+            <a:extLst xmlns:a="http://schemas.openxmlformats.org/drawingml/2006/main">
+              <a:ext uri="{FF2B5EF4-FFF2-40B4-BE49-F238E27FC236}">
+                <a16:creationId xmlns:a16="http://schemas.microsoft.com/office/drawing/2014/main" id="{2DCAB117-C3FF-446E-8D07-054729B2B09D}"/>
+              </a:ext>
+            </a:extLst>
+          </p:cNvPr>
+          <p:cNvSpPr>
+            <a:spLocks xmlns:a="http://schemas.openxmlformats.org/drawingml/2006/main" noGrp="1"/>
+          </p:cNvSpPr>
+          <p:nvPr/>
+        </p:nvSpPr>
+        <p:spPr>
+          <a:xfrm xmlns:a="http://schemas.openxmlformats.org/drawingml/2006/main">
+            <a:off x="914400" y="4857750"/>
+            <a:ext cx="2762250" cy="742950"/>
           </a:xfrm>
           <a:prstGeom xmlns:a="http://schemas.openxmlformats.org/drawingml/2006/main" prst="rect">
             <a:avLst/>
@@ -11166,29 +13143,29 @@
                   <a:srgbClr val="5F6F86"/>
                 </a:solidFill>
               </a:rPr>
-              <a:t>$28,000 adds bank reconciliation, cash-flow statement, data migration from current books, and 30-day hypercare.</a:t>
-            </a:r>
-          </a:p>
-        </p:txBody>
-      </p:sp>
-      <p:sp>
-        <p:nvSpPr>
-          <p:cNvPr id="12" name="">
-            <a:extLst xmlns:a="http://schemas.openxmlformats.org/drawingml/2006/main">
-              <a:ext uri="{FF2B5EF4-FFF2-40B4-BE49-F238E27FC236}">
-                <a16:creationId xmlns:a16="http://schemas.microsoft.com/office/drawing/2014/main" id="{4A90BCDB-6464-4B82-AE39-5AEE4265E202}"/>
-              </a:ext>
-            </a:extLst>
-          </p:cNvPr>
-          <p:cNvSpPr>
-            <a:spLocks xmlns:a="http://schemas.openxmlformats.org/drawingml/2006/main" noGrp="1"/>
-          </p:cNvSpPr>
-          <p:nvPr/>
-        </p:nvSpPr>
-        <p:spPr>
-          <a:xfrm xmlns:a="http://schemas.openxmlformats.org/drawingml/2006/main">
-            <a:off x="8858250" y="2343150"/>
-            <a:ext cx="2381250" cy="1638300"/>
+              <a:t>Credit memos, vendor credits, and void — every correction an append-only reversal.</a:t>
+            </a:r>
+          </a:p>
+        </p:txBody>
+      </p:sp>
+      <p:sp>
+        <p:nvSpPr>
+          <p:cNvPr id="21" name="">
+            <a:extLst xmlns:a="http://schemas.openxmlformats.org/drawingml/2006/main">
+              <a:ext uri="{FF2B5EF4-FFF2-40B4-BE49-F238E27FC236}">
+                <a16:creationId xmlns:a16="http://schemas.microsoft.com/office/drawing/2014/main" id="{1CF8EBA0-3C9C-4D1D-AD27-C88672E12313}"/>
+              </a:ext>
+            </a:extLst>
+          </p:cNvPr>
+          <p:cNvSpPr>
+            <a:spLocks xmlns:a="http://schemas.openxmlformats.org/drawingml/2006/main" noGrp="1"/>
+          </p:cNvSpPr>
+          <p:nvPr/>
+        </p:nvSpPr>
+        <p:spPr>
+          <a:xfrm xmlns:a="http://schemas.openxmlformats.org/drawingml/2006/main">
+            <a:off x="4343400" y="4305300"/>
+            <a:ext cx="3162300" cy="1428750"/>
           </a:xfrm>
           <a:prstGeom xmlns:a="http://schemas.openxmlformats.org/drawingml/2006/main" prst="rect">
             <a:avLst/>
@@ -11206,22 +13183,22 @@
       </p:sp>
       <p:sp>
         <p:nvSpPr>
-          <p:cNvPr id="13" name="">
-            <a:extLst xmlns:a="http://schemas.openxmlformats.org/drawingml/2006/main">
-              <a:ext uri="{FF2B5EF4-FFF2-40B4-BE49-F238E27FC236}">
-                <a16:creationId xmlns:a16="http://schemas.microsoft.com/office/drawing/2014/main" id="{80A4E665-28C2-4F01-8547-4CF042D399BE}"/>
-              </a:ext>
-            </a:extLst>
-          </p:cNvPr>
-          <p:cNvSpPr>
-            <a:spLocks xmlns:a="http://schemas.openxmlformats.org/drawingml/2006/main" noGrp="1"/>
-          </p:cNvSpPr>
-          <p:nvPr/>
-        </p:nvSpPr>
-        <p:spPr>
-          <a:xfrm xmlns:a="http://schemas.openxmlformats.org/drawingml/2006/main">
-            <a:off x="8858250" y="2343150"/>
-            <a:ext cx="57150" cy="1638300"/>
+          <p:cNvPr id="22" name="">
+            <a:extLst xmlns:a="http://schemas.openxmlformats.org/drawingml/2006/main">
+              <a:ext uri="{FF2B5EF4-FFF2-40B4-BE49-F238E27FC236}">
+                <a16:creationId xmlns:a16="http://schemas.microsoft.com/office/drawing/2014/main" id="{678F4A76-1C87-49E5-840D-4CEA9B8F5973}"/>
+              </a:ext>
+            </a:extLst>
+          </p:cNvPr>
+          <p:cNvSpPr>
+            <a:spLocks xmlns:a="http://schemas.openxmlformats.org/drawingml/2006/main" noGrp="1"/>
+          </p:cNvSpPr>
+          <p:nvPr/>
+        </p:nvSpPr>
+        <p:spPr>
+          <a:xfrm xmlns:a="http://schemas.openxmlformats.org/drawingml/2006/main">
+            <a:off x="4343400" y="4305300"/>
+            <a:ext cx="57150" cy="1428750"/>
           </a:xfrm>
           <a:prstGeom xmlns:a="http://schemas.openxmlformats.org/drawingml/2006/main" prst="rect">
             <a:avLst/>
@@ -11239,22 +13216,22 @@
       </p:sp>
       <p:sp>
         <p:nvSpPr>
-          <p:cNvPr id="14" name="">
-            <a:extLst xmlns:a="http://schemas.openxmlformats.org/drawingml/2006/main">
-              <a:ext uri="{FF2B5EF4-FFF2-40B4-BE49-F238E27FC236}">
-                <a16:creationId xmlns:a16="http://schemas.microsoft.com/office/drawing/2014/main" id="{CFF9D4AE-D08C-40C3-83F2-356DB3E6372D}"/>
-              </a:ext>
-            </a:extLst>
-          </p:cNvPr>
-          <p:cNvSpPr>
-            <a:spLocks xmlns:a="http://schemas.openxmlformats.org/drawingml/2006/main" noGrp="1"/>
-          </p:cNvSpPr>
-          <p:nvPr/>
-        </p:nvSpPr>
-        <p:spPr>
-          <a:xfrm xmlns:a="http://schemas.openxmlformats.org/drawingml/2006/main">
-            <a:off x="9086850" y="2533650"/>
-            <a:ext cx="2000250" cy="285750"/>
+          <p:cNvPr id="23" name="">
+            <a:extLst xmlns:a="http://schemas.openxmlformats.org/drawingml/2006/main">
+              <a:ext uri="{FF2B5EF4-FFF2-40B4-BE49-F238E27FC236}">
+                <a16:creationId xmlns:a16="http://schemas.microsoft.com/office/drawing/2014/main" id="{035CC17D-7B7A-4558-A3FD-F998DA8723DE}"/>
+              </a:ext>
+            </a:extLst>
+          </p:cNvPr>
+          <p:cNvSpPr>
+            <a:spLocks xmlns:a="http://schemas.openxmlformats.org/drawingml/2006/main" noGrp="1"/>
+          </p:cNvSpPr>
+          <p:nvPr/>
+        </p:nvSpPr>
+        <p:spPr>
+          <a:xfrm xmlns:a="http://schemas.openxmlformats.org/drawingml/2006/main">
+            <a:off x="4572000" y="4495800"/>
+            <a:ext cx="2781300" cy="285750"/>
           </a:xfrm>
           <a:prstGeom xmlns:a="http://schemas.openxmlformats.org/drawingml/2006/main" prst="rect">
             <a:avLst/>
@@ -11283,29 +13260,29 @@
                   <a:srgbClr val="172033"/>
                 </a:solidFill>
               </a:rPr>
-              <a:t>Books Care</a:t>
-            </a:r>
-          </a:p>
-        </p:txBody>
-      </p:sp>
-      <p:sp>
-        <p:nvSpPr>
-          <p:cNvPr id="15" name="">
-            <a:extLst xmlns:a="http://schemas.openxmlformats.org/drawingml/2006/main">
-              <a:ext uri="{FF2B5EF4-FFF2-40B4-BE49-F238E27FC236}">
-                <a16:creationId xmlns:a16="http://schemas.microsoft.com/office/drawing/2014/main" id="{F126733A-EC19-4083-9ABA-705C27287DEC}"/>
-              </a:ext>
-            </a:extLst>
-          </p:cNvPr>
-          <p:cNvSpPr>
-            <a:spLocks xmlns:a="http://schemas.openxmlformats.org/drawingml/2006/main" noGrp="1"/>
-          </p:cNvSpPr>
-          <p:nvPr/>
-        </p:nvSpPr>
-        <p:spPr>
-          <a:xfrm xmlns:a="http://schemas.openxmlformats.org/drawingml/2006/main">
-            <a:off x="9086850" y="2895600"/>
-            <a:ext cx="1981200" cy="952500"/>
+              <a:t>Customer statements</a:t>
+            </a:r>
+          </a:p>
+        </p:txBody>
+      </p:sp>
+      <p:sp>
+        <p:nvSpPr>
+          <p:cNvPr id="24" name="">
+            <a:extLst xmlns:a="http://schemas.openxmlformats.org/drawingml/2006/main">
+              <a:ext uri="{FF2B5EF4-FFF2-40B4-BE49-F238E27FC236}">
+                <a16:creationId xmlns:a16="http://schemas.microsoft.com/office/drawing/2014/main" id="{FBEBDBA6-BA63-48EB-BC97-F72AE8A5771B}"/>
+              </a:ext>
+            </a:extLst>
+          </p:cNvPr>
+          <p:cNvSpPr>
+            <a:spLocks xmlns:a="http://schemas.openxmlformats.org/drawingml/2006/main" noGrp="1"/>
+          </p:cNvSpPr>
+          <p:nvPr/>
+        </p:nvSpPr>
+        <p:spPr>
+          <a:xfrm xmlns:a="http://schemas.openxmlformats.org/drawingml/2006/main">
+            <a:off x="4572000" y="4857750"/>
+            <a:ext cx="2762250" cy="742950"/>
           </a:xfrm>
           <a:prstGeom xmlns:a="http://schemas.openxmlformats.org/drawingml/2006/main" prst="rect">
             <a:avLst/>
@@ -11334,29 +13311,29 @@
                   <a:srgbClr val="5F6F86"/>
                 </a:solidFill>
               </a:rPr>
-              <a:t>Optional monthly lane for month-end review, reconciliation checks, and small accounting changes.</a:t>
-            </a:r>
-          </a:p>
-        </p:txBody>
-      </p:sp>
-      <p:sp>
-        <p:nvSpPr>
-          <p:cNvPr id="16" name="">
-            <a:extLst xmlns:a="http://schemas.openxmlformats.org/drawingml/2006/main">
-              <a:ext uri="{FF2B5EF4-FFF2-40B4-BE49-F238E27FC236}">
-                <a16:creationId xmlns:a16="http://schemas.microsoft.com/office/drawing/2014/main" id="{9D18E898-C0E7-4EFB-9D89-6D6905DFD093}"/>
-              </a:ext>
-            </a:extLst>
-          </p:cNvPr>
-          <p:cNvSpPr>
-            <a:spLocks xmlns:a="http://schemas.openxmlformats.org/drawingml/2006/main" noGrp="1"/>
-          </p:cNvSpPr>
-          <p:nvPr/>
-        </p:nvSpPr>
-        <p:spPr>
-          <a:xfrm xmlns:a="http://schemas.openxmlformats.org/drawingml/2006/main">
-            <a:off x="6153150" y="4343400"/>
-            <a:ext cx="5086350" cy="1143000"/>
+              <a:t>A PDF of a customer’s open invoices with ages and total due, collections-ready.</a:t>
+            </a:r>
+          </a:p>
+        </p:txBody>
+      </p:sp>
+      <p:sp>
+        <p:nvSpPr>
+          <p:cNvPr id="25" name="">
+            <a:extLst xmlns:a="http://schemas.openxmlformats.org/drawingml/2006/main">
+              <a:ext uri="{FF2B5EF4-FFF2-40B4-BE49-F238E27FC236}">
+                <a16:creationId xmlns:a16="http://schemas.microsoft.com/office/drawing/2014/main" id="{837D88B1-08E8-4AB9-9A37-140F85F33565}"/>
+              </a:ext>
+            </a:extLst>
+          </p:cNvPr>
+          <p:cNvSpPr>
+            <a:spLocks xmlns:a="http://schemas.openxmlformats.org/drawingml/2006/main" noGrp="1"/>
+          </p:cNvSpPr>
+          <p:nvPr/>
+        </p:nvSpPr>
+        <p:spPr>
+          <a:xfrm xmlns:a="http://schemas.openxmlformats.org/drawingml/2006/main">
+            <a:off x="8001000" y="4305300"/>
+            <a:ext cx="3162300" cy="1428750"/>
           </a:xfrm>
           <a:prstGeom xmlns:a="http://schemas.openxmlformats.org/drawingml/2006/main" prst="rect">
             <a:avLst/>
@@ -11374,55 +13351,55 @@
       </p:sp>
       <p:sp>
         <p:nvSpPr>
-          <p:cNvPr id="17" name="">
-            <a:extLst xmlns:a="http://schemas.openxmlformats.org/drawingml/2006/main">
-              <a:ext uri="{FF2B5EF4-FFF2-40B4-BE49-F238E27FC236}">
-                <a16:creationId xmlns:a16="http://schemas.microsoft.com/office/drawing/2014/main" id="{D1460619-F5FE-4A5A-8E2F-4A865EBDE4C4}"/>
-              </a:ext>
-            </a:extLst>
-          </p:cNvPr>
-          <p:cNvSpPr>
-            <a:spLocks xmlns:a="http://schemas.openxmlformats.org/drawingml/2006/main" noGrp="1"/>
-          </p:cNvSpPr>
-          <p:nvPr/>
-        </p:nvSpPr>
-        <p:spPr>
-          <a:xfrm xmlns:a="http://schemas.openxmlformats.org/drawingml/2006/main">
-            <a:off x="6153150" y="4343400"/>
-            <a:ext cx="57150" cy="1143000"/>
+          <p:cNvPr id="26" name="">
+            <a:extLst xmlns:a="http://schemas.openxmlformats.org/drawingml/2006/main">
+              <a:ext uri="{FF2B5EF4-FFF2-40B4-BE49-F238E27FC236}">
+                <a16:creationId xmlns:a16="http://schemas.microsoft.com/office/drawing/2014/main" id="{4B18D66C-C8AF-46B7-B958-FE616B46C750}"/>
+              </a:ext>
+            </a:extLst>
+          </p:cNvPr>
+          <p:cNvSpPr>
+            <a:spLocks xmlns:a="http://schemas.openxmlformats.org/drawingml/2006/main" noGrp="1"/>
+          </p:cNvSpPr>
+          <p:nvPr/>
+        </p:nvSpPr>
+        <p:spPr>
+          <a:xfrm xmlns:a="http://schemas.openxmlformats.org/drawingml/2006/main">
+            <a:off x="8001000" y="4305300"/>
+            <a:ext cx="57150" cy="1428750"/>
           </a:xfrm>
           <a:prstGeom xmlns:a="http://schemas.openxmlformats.org/drawingml/2006/main" prst="rect">
             <a:avLst/>
           </a:prstGeom>
           <a:solidFill xmlns:a="http://schemas.openxmlformats.org/drawingml/2006/main">
-            <a:srgbClr val="145DA0"/>
+            <a:srgbClr val="23A6D5"/>
           </a:solidFill>
           <a:ln xmlns:a="http://schemas.openxmlformats.org/drawingml/2006/main" w="0">
             <a:solidFill>
-              <a:srgbClr val="145DA0"/>
-            </a:solidFill>
-            <a:prstDash val="solid"/>
-          </a:ln>
-        </p:spPr>
-      </p:sp>
-      <p:sp>
-        <p:nvSpPr>
-          <p:cNvPr id="18" name="">
-            <a:extLst xmlns:a="http://schemas.openxmlformats.org/drawingml/2006/main">
-              <a:ext uri="{FF2B5EF4-FFF2-40B4-BE49-F238E27FC236}">
-                <a16:creationId xmlns:a16="http://schemas.microsoft.com/office/drawing/2014/main" id="{44DDC60E-270D-4213-8272-41A7E780F7C5}"/>
-              </a:ext>
-            </a:extLst>
-          </p:cNvPr>
-          <p:cNvSpPr>
-            <a:spLocks xmlns:a="http://schemas.openxmlformats.org/drawingml/2006/main" noGrp="1"/>
-          </p:cNvSpPr>
-          <p:nvPr/>
-        </p:nvSpPr>
-        <p:spPr>
-          <a:xfrm xmlns:a="http://schemas.openxmlformats.org/drawingml/2006/main">
-            <a:off x="6381750" y="4533900"/>
-            <a:ext cx="4705350" cy="285750"/>
+              <a:srgbClr val="23A6D5"/>
+            </a:solidFill>
+            <a:prstDash val="solid"/>
+          </a:ln>
+        </p:spPr>
+      </p:sp>
+      <p:sp>
+        <p:nvSpPr>
+          <p:cNvPr id="27" name="">
+            <a:extLst xmlns:a="http://schemas.openxmlformats.org/drawingml/2006/main">
+              <a:ext uri="{FF2B5EF4-FFF2-40B4-BE49-F238E27FC236}">
+                <a16:creationId xmlns:a16="http://schemas.microsoft.com/office/drawing/2014/main" id="{58FE21A8-024F-415C-875F-CBA4423C19EE}"/>
+              </a:ext>
+            </a:extLst>
+          </p:cNvPr>
+          <p:cNvSpPr>
+            <a:spLocks xmlns:a="http://schemas.openxmlformats.org/drawingml/2006/main" noGrp="1"/>
+          </p:cNvSpPr>
+          <p:nvPr/>
+        </p:nvSpPr>
+        <p:spPr>
+          <a:xfrm xmlns:a="http://schemas.openxmlformats.org/drawingml/2006/main">
+            <a:off x="8229600" y="4495800"/>
+            <a:ext cx="2781300" cy="285750"/>
           </a:xfrm>
           <a:prstGeom xmlns:a="http://schemas.openxmlformats.org/drawingml/2006/main" prst="rect">
             <a:avLst/>
@@ -11451,29 +13428,29 @@
                   <a:srgbClr val="172033"/>
                 </a:solidFill>
               </a:rPr>
-              <a:t>Builds on what is shipped</a:t>
-            </a:r>
-          </a:p>
-        </p:txBody>
-      </p:sp>
-      <p:sp>
-        <p:nvSpPr>
-          <p:cNvPr id="19" name="">
-            <a:extLst xmlns:a="http://schemas.openxmlformats.org/drawingml/2006/main">
-              <a:ext uri="{FF2B5EF4-FFF2-40B4-BE49-F238E27FC236}">
-                <a16:creationId xmlns:a16="http://schemas.microsoft.com/office/drawing/2014/main" id="{659BF877-1333-44F2-8DF6-B8EA6342D37C}"/>
-              </a:ext>
-            </a:extLst>
-          </p:cNvPr>
-          <p:cNvSpPr>
-            <a:spLocks xmlns:a="http://schemas.openxmlformats.org/drawingml/2006/main" noGrp="1"/>
-          </p:cNvSpPr>
-          <p:nvPr/>
-        </p:nvSpPr>
-        <p:spPr>
-          <a:xfrm xmlns:a="http://schemas.openxmlformats.org/drawingml/2006/main">
-            <a:off x="6381750" y="4895850"/>
-            <a:ext cx="4686300" cy="457200"/>
+              <a:t>Recurring &amp; expenses</a:t>
+            </a:r>
+          </a:p>
+        </p:txBody>
+      </p:sp>
+      <p:sp>
+        <p:nvSpPr>
+          <p:cNvPr id="28" name="">
+            <a:extLst xmlns:a="http://schemas.openxmlformats.org/drawingml/2006/main">
+              <a:ext uri="{FF2B5EF4-FFF2-40B4-BE49-F238E27FC236}">
+                <a16:creationId xmlns:a16="http://schemas.microsoft.com/office/drawing/2014/main" id="{31042DF2-CEEA-4525-A3D8-E3F1789184E3}"/>
+              </a:ext>
+            </a:extLst>
+          </p:cNvPr>
+          <p:cNvSpPr>
+            <a:spLocks xmlns:a="http://schemas.openxmlformats.org/drawingml/2006/main" noGrp="1"/>
+          </p:cNvSpPr>
+          <p:nvPr/>
+        </p:nvSpPr>
+        <p:spPr>
+          <a:xfrm xmlns:a="http://schemas.openxmlformats.org/drawingml/2006/main">
+            <a:off x="8229600" y="4857750"/>
+            <a:ext cx="2762250" cy="742950"/>
           </a:xfrm>
           <a:prstGeom xmlns:a="http://schemas.openxmlformats.org/drawingml/2006/main" prst="rect">
             <a:avLst/>
@@ -11502,17 +13479,17 @@
                   <a:srgbClr val="5F6F86"/>
                 </a:solidFill>
               </a:rPr>
-              <a:t>The ledger, A/R, A/P, statements, period close, and invoice/bill PDFs are already built. This phase tailors and rolls them out for Raves.</a:t>
-            </a:r>
-          </a:p>
-        </p:txBody>
-      </p:sp>
-      <p:sp>
-        <p:nvSpPr>
-          <p:cNvPr id="20" name="">
-            <a:extLst xmlns:a="http://schemas.openxmlformats.org/drawingml/2006/main">
-              <a:ext uri="{FF2B5EF4-FFF2-40B4-BE49-F238E27FC236}">
-                <a16:creationId xmlns:a16="http://schemas.microsoft.com/office/drawing/2014/main" id="{183FB585-6F48-48AE-8B55-C03543F5EA38}"/>
+              <a:t>Recurring invoices, bills, and journals that never double-post; one-click expenses.</a:t>
+            </a:r>
+          </a:p>
+        </p:txBody>
+      </p:sp>
+      <p:sp>
+        <p:nvSpPr>
+          <p:cNvPr id="29" name="">
+            <a:extLst xmlns:a="http://schemas.openxmlformats.org/drawingml/2006/main">
+              <a:ext uri="{FF2B5EF4-FFF2-40B4-BE49-F238E27FC236}">
+                <a16:creationId xmlns:a16="http://schemas.microsoft.com/office/drawing/2014/main" id="{306385B9-D538-47EF-AAC4-05F68E0496A5}"/>
               </a:ext>
             </a:extLst>
           </p:cNvPr>
@@ -11560,10 +13537,10 @@
       </p:sp>
       <p:sp>
         <p:nvSpPr>
-          <p:cNvPr id="21" name="">
-            <a:extLst xmlns:a="http://schemas.openxmlformats.org/drawingml/2006/main">
-              <a:ext uri="{FF2B5EF4-FFF2-40B4-BE49-F238E27FC236}">
-                <a16:creationId xmlns:a16="http://schemas.microsoft.com/office/drawing/2014/main" id="{6CFF6698-99F1-48D2-9F2C-DB6DB78B2483}"/>
+          <p:cNvPr id="30" name="">
+            <a:extLst xmlns:a="http://schemas.openxmlformats.org/drawingml/2006/main">
+              <a:ext uri="{FF2B5EF4-FFF2-40B4-BE49-F238E27FC236}">
+                <a16:creationId xmlns:a16="http://schemas.microsoft.com/office/drawing/2014/main" id="{C19E73E3-C09E-4512-8778-0D353C547FB0}"/>
               </a:ext>
             </a:extLst>
           </p:cNvPr>
@@ -11612,7 +13589,7 @@
     </p:spTree>
     <p:extLst>
       <p:ext uri="{BB962C8B-B14F-4D97-AF65-F5344CB8AC3E}">
-        <p14:creationId xmlns:p14="http://schemas.microsoft.com/office/powerpoint/2010/main" val="930396045"/>
+        <p14:creationId xmlns:p14="http://schemas.microsoft.com/office/powerpoint/2010/main" val="294305864"/>
       </p:ext>
     </p:extLst>
   </p:cSld>
@@ -11636,7 +13613,7 @@
           <p:cNvPr id="1" name="">
             <a:extLst xmlns:a="http://schemas.openxmlformats.org/drawingml/2006/main">
               <a:ext uri="{FF2B5EF4-FFF2-40B4-BE49-F238E27FC236}">
-                <a16:creationId xmlns:a16="http://schemas.microsoft.com/office/drawing/2014/main" id="{61B051F0-84F3-4EC1-8F81-AEEDA36CBFA9}"/>
+                <a16:creationId xmlns:a16="http://schemas.microsoft.com/office/drawing/2014/main" id="{3FBC0981-88EE-4F0B-ADC5-C3B697690E82}"/>
               </a:ext>
             </a:extLst>
           </p:cNvPr>
@@ -11669,7 +13646,7 @@
           <p:cNvPr id="2" name="">
             <a:extLst xmlns:a="http://schemas.openxmlformats.org/drawingml/2006/main">
               <a:ext uri="{FF2B5EF4-FFF2-40B4-BE49-F238E27FC236}">
-                <a16:creationId xmlns:a16="http://schemas.microsoft.com/office/drawing/2014/main" id="{0786228F-E109-4E84-A06A-BF505A1D6E03}"/>
+                <a16:creationId xmlns:a16="http://schemas.microsoft.com/office/drawing/2014/main" id="{5264E9FD-4F85-4FB6-9F24-A41C9F7899E9}"/>
               </a:ext>
             </a:extLst>
           </p:cNvPr>
@@ -11710,7 +13687,7 @@
                   <a:srgbClr val="5F6F86"/>
                 </a:solidFill>
               </a:rPr>
-              <a:t>MUTUAL ACTION PLAN</a:t>
+              <a:t>COMMERCIAL PATH</a:t>
             </a:r>
           </a:p>
         </p:txBody>
@@ -11720,7 +13697,7 @@
           <p:cNvPr id="3" name="">
             <a:extLst xmlns:a="http://schemas.openxmlformats.org/drawingml/2006/main">
               <a:ext uri="{FF2B5EF4-FFF2-40B4-BE49-F238E27FC236}">
-                <a16:creationId xmlns:a16="http://schemas.microsoft.com/office/drawing/2014/main" id="{2B57EFAE-7866-471C-9A33-78E06310B7D6}"/>
+                <a16:creationId xmlns:a16="http://schemas.microsoft.com/office/drawing/2014/main" id="{EC0E1055-754A-4CC7-B689-FE7C7CF3AEBF}"/>
               </a:ext>
             </a:extLst>
           </p:cNvPr>
@@ -11761,7 +13738,7 @@
                   <a:srgbClr val="172033"/>
                 </a:solidFill>
               </a:rPr>
-              <a:t>A simple path from decision to first clean month-end.</a:t>
+              <a:t>One clean foundation build, then an optional close-support lane.</a:t>
             </a:r>
           </a:p>
         </p:txBody>
@@ -11771,19 +13748,222 @@
           <p:cNvPr id="4" name="">
             <a:extLst xmlns:a="http://schemas.openxmlformats.org/drawingml/2006/main">
               <a:ext uri="{FF2B5EF4-FFF2-40B4-BE49-F238E27FC236}">
-                <a16:creationId xmlns:a16="http://schemas.microsoft.com/office/drawing/2014/main" id="{8A203550-88A3-44B9-B661-94F22AD63E28}"/>
-              </a:ext>
-            </a:extLst>
-          </p:cNvPr>
-          <p:cNvSpPr>
-            <a:spLocks xmlns:a="http://schemas.openxmlformats.org/drawingml/2006/main" noGrp="1"/>
-          </p:cNvSpPr>
-          <p:nvPr/>
-        </p:nvSpPr>
-        <p:spPr>
-          <a:xfrm xmlns:a="http://schemas.openxmlformats.org/drawingml/2006/main">
-            <a:off x="685800" y="2667000"/>
-            <a:ext cx="1676400" cy="1676400"/>
+                <a16:creationId xmlns:a16="http://schemas.microsoft.com/office/drawing/2014/main" id="{D90E2217-C256-422A-8FDD-909902F67798}"/>
+              </a:ext>
+            </a:extLst>
+          </p:cNvPr>
+          <p:cNvSpPr>
+            <a:spLocks xmlns:a="http://schemas.openxmlformats.org/drawingml/2006/main" noGrp="1"/>
+          </p:cNvSpPr>
+          <p:nvPr/>
+        </p:nvSpPr>
+        <p:spPr>
+          <a:xfrm xmlns:a="http://schemas.openxmlformats.org/drawingml/2006/main">
+            <a:off x="685800" y="2343150"/>
+            <a:ext cx="4876800" cy="2705100"/>
+          </a:xfrm>
+          <a:prstGeom xmlns:a="http://schemas.openxmlformats.org/drawingml/2006/main" prst="rect">
+            <a:avLst/>
+          </a:prstGeom>
+          <a:solidFill xmlns:a="http://schemas.openxmlformats.org/drawingml/2006/main">
+            <a:srgbClr val="0B1F33"/>
+          </a:solidFill>
+          <a:ln xmlns:a="http://schemas.openxmlformats.org/drawingml/2006/main" w="0">
+            <a:solidFill>
+              <a:srgbClr val="0B1F33"/>
+            </a:solidFill>
+            <a:prstDash val="solid"/>
+          </a:ln>
+        </p:spPr>
+      </p:sp>
+      <p:sp>
+        <p:nvSpPr>
+          <p:cNvPr id="5" name="">
+            <a:extLst xmlns:a="http://schemas.openxmlformats.org/drawingml/2006/main">
+              <a:ext uri="{FF2B5EF4-FFF2-40B4-BE49-F238E27FC236}">
+                <a16:creationId xmlns:a16="http://schemas.microsoft.com/office/drawing/2014/main" id="{4A6BB60A-18B6-4D2D-AF1E-B45F5B1E011F}"/>
+              </a:ext>
+            </a:extLst>
+          </p:cNvPr>
+          <p:cNvSpPr>
+            <a:spLocks xmlns:a="http://schemas.openxmlformats.org/drawingml/2006/main" noGrp="1"/>
+          </p:cNvSpPr>
+          <p:nvPr/>
+        </p:nvSpPr>
+        <p:spPr>
+          <a:xfrm xmlns:a="http://schemas.openxmlformats.org/drawingml/2006/main">
+            <a:off x="1047750" y="2724150"/>
+            <a:ext cx="4095750" cy="533400"/>
+          </a:xfrm>
+          <a:prstGeom xmlns:a="http://schemas.openxmlformats.org/drawingml/2006/main" prst="rect">
+            <a:avLst/>
+          </a:prstGeom>
+          <a:ln xmlns:a="http://schemas.openxmlformats.org/drawingml/2006/main" w="0">
+            <a:solidFill>
+              <a:srgbClr val="FFFFFF"/>
+            </a:solidFill>
+            <a:prstDash val="solid"/>
+          </a:ln>
+        </p:spPr>
+        <p:txBody>
+          <a:bodyPr xmlns:a="http://schemas.openxmlformats.org/drawingml/2006/main" anchor="t"/>
+          <a:lstStyle xmlns:a="http://schemas.openxmlformats.org/drawingml/2006/main"/>
+          <a:p xmlns:a="http://schemas.openxmlformats.org/drawingml/2006/main">
+            <a:pPr algn="l">
+              <a:defRPr sz="1800" b="1">
+                <a:solidFill>
+                  <a:srgbClr val="FFFFFF"/>
+                </a:solidFill>
+              </a:defRPr>
+            </a:pPr>
+            <a:r>
+              <a:rPr sz="1800" b="1">
+                <a:solidFill>
+                  <a:srgbClr val="FFFFFF"/>
+                </a:solidFill>
+              </a:rPr>
+              <a:t>Blueprint Books Foundation</a:t>
+            </a:r>
+          </a:p>
+        </p:txBody>
+      </p:sp>
+      <p:sp>
+        <p:nvSpPr>
+          <p:cNvPr id="6" name="">
+            <a:extLst xmlns:a="http://schemas.openxmlformats.org/drawingml/2006/main">
+              <a:ext uri="{FF2B5EF4-FFF2-40B4-BE49-F238E27FC236}">
+                <a16:creationId xmlns:a16="http://schemas.microsoft.com/office/drawing/2014/main" id="{5810F5C2-29D8-43FB-8B27-89F18C8EA569}"/>
+              </a:ext>
+            </a:extLst>
+          </p:cNvPr>
+          <p:cNvSpPr>
+            <a:spLocks xmlns:a="http://schemas.openxmlformats.org/drawingml/2006/main" noGrp="1"/>
+          </p:cNvSpPr>
+          <p:nvPr/>
+        </p:nvSpPr>
+        <p:spPr>
+          <a:xfrm xmlns:a="http://schemas.openxmlformats.org/drawingml/2006/main">
+            <a:off x="1047750" y="3390900"/>
+            <a:ext cx="4000500" cy="514350"/>
+          </a:xfrm>
+          <a:prstGeom xmlns:a="http://schemas.openxmlformats.org/drawingml/2006/main" prst="rect">
+            <a:avLst/>
+          </a:prstGeom>
+          <a:ln xmlns:a="http://schemas.openxmlformats.org/drawingml/2006/main" w="0">
+            <a:solidFill>
+              <a:srgbClr val="FFFFFF"/>
+            </a:solidFill>
+            <a:prstDash val="solid"/>
+          </a:ln>
+        </p:spPr>
+        <p:txBody>
+          <a:bodyPr xmlns:a="http://schemas.openxmlformats.org/drawingml/2006/main" anchor="t"/>
+          <a:lstStyle xmlns:a="http://schemas.openxmlformats.org/drawingml/2006/main"/>
+          <a:p xmlns:a="http://schemas.openxmlformats.org/drawingml/2006/main">
+            <a:pPr algn="l">
+              <a:defRPr sz="2850" b="1">
+                <a:solidFill>
+                  <a:srgbClr val="9FE0C8"/>
+                </a:solidFill>
+              </a:defRPr>
+            </a:pPr>
+            <a:r>
+              <a:rPr sz="2850" b="1">
+                <a:solidFill>
+                  <a:srgbClr val="9FE0C8"/>
+                </a:solidFill>
+              </a:rPr>
+              <a:t>$18,500 fixed fee</a:t>
+            </a:r>
+          </a:p>
+        </p:txBody>
+      </p:sp>
+      <p:sp>
+        <p:nvSpPr>
+          <p:cNvPr id="7" name="">
+            <a:extLst xmlns:a="http://schemas.openxmlformats.org/drawingml/2006/main">
+              <a:ext uri="{FF2B5EF4-FFF2-40B4-BE49-F238E27FC236}">
+                <a16:creationId xmlns:a16="http://schemas.microsoft.com/office/drawing/2014/main" id="{8492C475-DF23-4EB2-8E05-244968272D6B}"/>
+              </a:ext>
+            </a:extLst>
+          </p:cNvPr>
+          <p:cNvSpPr>
+            <a:spLocks xmlns:a="http://schemas.openxmlformats.org/drawingml/2006/main" noGrp="1"/>
+          </p:cNvSpPr>
+          <p:nvPr/>
+        </p:nvSpPr>
+        <p:spPr>
+          <a:xfrm xmlns:a="http://schemas.openxmlformats.org/drawingml/2006/main">
+            <a:off x="1066800" y="4038600"/>
+            <a:ext cx="3905250" cy="628650"/>
+          </a:xfrm>
+          <a:prstGeom xmlns:a="http://schemas.openxmlformats.org/drawingml/2006/main" prst="rect">
+            <a:avLst/>
+          </a:prstGeom>
+          <a:ln xmlns:a="http://schemas.openxmlformats.org/drawingml/2006/main" w="0">
+            <a:solidFill>
+              <a:srgbClr val="FFFFFF"/>
+            </a:solidFill>
+            <a:prstDash val="solid"/>
+          </a:ln>
+        </p:spPr>
+        <p:txBody>
+          <a:bodyPr xmlns:a="http://schemas.openxmlformats.org/drawingml/2006/main" anchor="t"/>
+          <a:lstStyle xmlns:a="http://schemas.openxmlformats.org/drawingml/2006/main"/>
+          <a:p xmlns:a="http://schemas.openxmlformats.org/drawingml/2006/main">
+            <a:pPr algn="l">
+              <a:defRPr sz="1350" b="0">
+                <a:solidFill>
+                  <a:srgbClr val="D9EAF8"/>
+                </a:solidFill>
+              </a:defRPr>
+            </a:pPr>
+            <a:r>
+              <a:rPr sz="1350" b="0">
+                <a:solidFill>
+                  <a:srgbClr val="D9EAF8"/>
+                </a:solidFill>
+              </a:rPr>
+              <a:t>50% start / 50% closeout</a:t>
+            </a:r>
+          </a:p>
+          <a:p xmlns:a="http://schemas.openxmlformats.org/drawingml/2006/main">
+            <a:pPr algn="l">
+              <a:defRPr sz="1350" b="0">
+                <a:solidFill>
+                  <a:srgbClr val="D9EAF8"/>
+                </a:solidFill>
+              </a:defRPr>
+            </a:pPr>
+            <a:r>
+              <a:rPr sz="1350" b="0">
+                <a:solidFill>
+                  <a:srgbClr val="D9EAF8"/>
+                </a:solidFill>
+              </a:rPr>
+              <a:t>4-5 weeks from opening-balance readiness</a:t>
+            </a:r>
+          </a:p>
+        </p:txBody>
+      </p:sp>
+      <p:sp>
+        <p:nvSpPr>
+          <p:cNvPr id="8" name="">
+            <a:extLst xmlns:a="http://schemas.openxmlformats.org/drawingml/2006/main">
+              <a:ext uri="{FF2B5EF4-FFF2-40B4-BE49-F238E27FC236}">
+                <a16:creationId xmlns:a16="http://schemas.microsoft.com/office/drawing/2014/main" id="{81106C79-E75E-4FC0-AFA6-34A8A0999329}"/>
+              </a:ext>
+            </a:extLst>
+          </p:cNvPr>
+          <p:cNvSpPr>
+            <a:spLocks xmlns:a="http://schemas.openxmlformats.org/drawingml/2006/main" noGrp="1"/>
+          </p:cNvSpPr>
+          <p:nvPr/>
+        </p:nvSpPr>
+        <p:spPr>
+          <a:xfrm xmlns:a="http://schemas.openxmlformats.org/drawingml/2006/main">
+            <a:off x="6153150" y="2343150"/>
+            <a:ext cx="2381250" cy="1638300"/>
           </a:xfrm>
           <a:prstGeom xmlns:a="http://schemas.openxmlformats.org/drawingml/2006/main" prst="rect">
             <a:avLst/>
@@ -11801,22 +13981,190 @@
       </p:sp>
       <p:sp>
         <p:nvSpPr>
-          <p:cNvPr id="5" name="">
-            <a:extLst xmlns:a="http://schemas.openxmlformats.org/drawingml/2006/main">
-              <a:ext uri="{FF2B5EF4-FFF2-40B4-BE49-F238E27FC236}">
-                <a16:creationId xmlns:a16="http://schemas.microsoft.com/office/drawing/2014/main" id="{18B00CC6-0139-4523-8E7A-A5466E058F99}"/>
-              </a:ext>
-            </a:extLst>
-          </p:cNvPr>
-          <p:cNvSpPr>
-            <a:spLocks xmlns:a="http://schemas.openxmlformats.org/drawingml/2006/main" noGrp="1"/>
-          </p:cNvSpPr>
-          <p:nvPr/>
-        </p:nvSpPr>
-        <p:spPr>
-          <a:xfrm xmlns:a="http://schemas.openxmlformats.org/drawingml/2006/main">
-            <a:off x="857250" y="2895600"/>
-            <a:ext cx="419100" cy="419100"/>
+          <p:cNvPr id="9" name="">
+            <a:extLst xmlns:a="http://schemas.openxmlformats.org/drawingml/2006/main">
+              <a:ext uri="{FF2B5EF4-FFF2-40B4-BE49-F238E27FC236}">
+                <a16:creationId xmlns:a16="http://schemas.microsoft.com/office/drawing/2014/main" id="{076508FB-C22C-438F-B4FE-F870FB2C4122}"/>
+              </a:ext>
+            </a:extLst>
+          </p:cNvPr>
+          <p:cNvSpPr>
+            <a:spLocks xmlns:a="http://schemas.openxmlformats.org/drawingml/2006/main" noGrp="1"/>
+          </p:cNvSpPr>
+          <p:nvPr/>
+        </p:nvSpPr>
+        <p:spPr>
+          <a:xfrm xmlns:a="http://schemas.openxmlformats.org/drawingml/2006/main">
+            <a:off x="6153150" y="2343150"/>
+            <a:ext cx="57150" cy="1638300"/>
+          </a:xfrm>
+          <a:prstGeom xmlns:a="http://schemas.openxmlformats.org/drawingml/2006/main" prst="rect">
+            <a:avLst/>
+          </a:prstGeom>
+          <a:solidFill xmlns:a="http://schemas.openxmlformats.org/drawingml/2006/main">
+            <a:srgbClr val="D98C16"/>
+          </a:solidFill>
+          <a:ln xmlns:a="http://schemas.openxmlformats.org/drawingml/2006/main" w="0">
+            <a:solidFill>
+              <a:srgbClr val="D98C16"/>
+            </a:solidFill>
+            <a:prstDash val="solid"/>
+          </a:ln>
+        </p:spPr>
+      </p:sp>
+      <p:sp>
+        <p:nvSpPr>
+          <p:cNvPr id="10" name="">
+            <a:extLst xmlns:a="http://schemas.openxmlformats.org/drawingml/2006/main">
+              <a:ext uri="{FF2B5EF4-FFF2-40B4-BE49-F238E27FC236}">
+                <a16:creationId xmlns:a16="http://schemas.microsoft.com/office/drawing/2014/main" id="{9A1CACE4-139F-4194-A375-8D5521BA424B}"/>
+              </a:ext>
+            </a:extLst>
+          </p:cNvPr>
+          <p:cNvSpPr>
+            <a:spLocks xmlns:a="http://schemas.openxmlformats.org/drawingml/2006/main" noGrp="1"/>
+          </p:cNvSpPr>
+          <p:nvPr/>
+        </p:nvSpPr>
+        <p:spPr>
+          <a:xfrm xmlns:a="http://schemas.openxmlformats.org/drawingml/2006/main">
+            <a:off x="6381750" y="2533650"/>
+            <a:ext cx="2000250" cy="285750"/>
+          </a:xfrm>
+          <a:prstGeom xmlns:a="http://schemas.openxmlformats.org/drawingml/2006/main" prst="rect">
+            <a:avLst/>
+          </a:prstGeom>
+          <a:ln xmlns:a="http://schemas.openxmlformats.org/drawingml/2006/main" w="0">
+            <a:solidFill>
+              <a:srgbClr val="FFFFFF"/>
+            </a:solidFill>
+            <a:prstDash val="solid"/>
+          </a:ln>
+        </p:spPr>
+        <p:txBody>
+          <a:bodyPr xmlns:a="http://schemas.openxmlformats.org/drawingml/2006/main" anchor="t"/>
+          <a:lstStyle xmlns:a="http://schemas.openxmlformats.org/drawingml/2006/main"/>
+          <a:p xmlns:a="http://schemas.openxmlformats.org/drawingml/2006/main">
+            <a:pPr algn="l">
+              <a:defRPr sz="1350" b="1">
+                <a:solidFill>
+                  <a:srgbClr val="172033"/>
+                </a:solidFill>
+              </a:defRPr>
+            </a:pPr>
+            <a:r>
+              <a:rPr sz="1350" b="1">
+                <a:solidFill>
+                  <a:srgbClr val="172033"/>
+                </a:solidFill>
+              </a:rPr>
+              <a:t>Books Complete</a:t>
+            </a:r>
+          </a:p>
+        </p:txBody>
+      </p:sp>
+      <p:sp>
+        <p:nvSpPr>
+          <p:cNvPr id="11" name="">
+            <a:extLst xmlns:a="http://schemas.openxmlformats.org/drawingml/2006/main">
+              <a:ext uri="{FF2B5EF4-FFF2-40B4-BE49-F238E27FC236}">
+                <a16:creationId xmlns:a16="http://schemas.microsoft.com/office/drawing/2014/main" id="{2A43D9C3-76AE-4F8E-BFFE-E472DD3E2EB6}"/>
+              </a:ext>
+            </a:extLst>
+          </p:cNvPr>
+          <p:cNvSpPr>
+            <a:spLocks xmlns:a="http://schemas.openxmlformats.org/drawingml/2006/main" noGrp="1"/>
+          </p:cNvSpPr>
+          <p:nvPr/>
+        </p:nvSpPr>
+        <p:spPr>
+          <a:xfrm xmlns:a="http://schemas.openxmlformats.org/drawingml/2006/main">
+            <a:off x="6381750" y="2895600"/>
+            <a:ext cx="1981200" cy="952500"/>
+          </a:xfrm>
+          <a:prstGeom xmlns:a="http://schemas.openxmlformats.org/drawingml/2006/main" prst="rect">
+            <a:avLst/>
+          </a:prstGeom>
+          <a:ln xmlns:a="http://schemas.openxmlformats.org/drawingml/2006/main" w="0">
+            <a:solidFill>
+              <a:srgbClr val="FFFFFF"/>
+            </a:solidFill>
+            <a:prstDash val="solid"/>
+          </a:ln>
+        </p:spPr>
+        <p:txBody>
+          <a:bodyPr xmlns:a="http://schemas.openxmlformats.org/drawingml/2006/main" anchor="t"/>
+          <a:lstStyle xmlns:a="http://schemas.openxmlformats.org/drawingml/2006/main"/>
+          <a:p xmlns:a="http://schemas.openxmlformats.org/drawingml/2006/main">
+            <a:pPr algn="l">
+              <a:defRPr sz="1050" b="0">
+                <a:solidFill>
+                  <a:srgbClr val="5F6F86"/>
+                </a:solidFill>
+              </a:defRPr>
+            </a:pPr>
+            <a:r>
+              <a:rPr sz="1050" b="0">
+                <a:solidFill>
+                  <a:srgbClr val="5F6F86"/>
+                </a:solidFill>
+              </a:rPr>
+              <a:t>$28,000 adds bank reconciliation, cash-flow statement, data migration from current books, and 30-day hypercare.</a:t>
+            </a:r>
+          </a:p>
+        </p:txBody>
+      </p:sp>
+      <p:sp>
+        <p:nvSpPr>
+          <p:cNvPr id="12" name="">
+            <a:extLst xmlns:a="http://schemas.openxmlformats.org/drawingml/2006/main">
+              <a:ext uri="{FF2B5EF4-FFF2-40B4-BE49-F238E27FC236}">
+                <a16:creationId xmlns:a16="http://schemas.microsoft.com/office/drawing/2014/main" id="{0ED22929-85AB-4FA3-B946-CB2E22329748}"/>
+              </a:ext>
+            </a:extLst>
+          </p:cNvPr>
+          <p:cNvSpPr>
+            <a:spLocks xmlns:a="http://schemas.openxmlformats.org/drawingml/2006/main" noGrp="1"/>
+          </p:cNvSpPr>
+          <p:nvPr/>
+        </p:nvSpPr>
+        <p:spPr>
+          <a:xfrm xmlns:a="http://schemas.openxmlformats.org/drawingml/2006/main">
+            <a:off x="8858250" y="2343150"/>
+            <a:ext cx="2381250" cy="1638300"/>
+          </a:xfrm>
+          <a:prstGeom xmlns:a="http://schemas.openxmlformats.org/drawingml/2006/main" prst="rect">
+            <a:avLst/>
+          </a:prstGeom>
+          <a:solidFill xmlns:a="http://schemas.openxmlformats.org/drawingml/2006/main">
+            <a:srgbClr val="FFFFFF"/>
+          </a:solidFill>
+          <a:ln xmlns:a="http://schemas.openxmlformats.org/drawingml/2006/main" w="0">
+            <a:solidFill>
+              <a:srgbClr val="D8E2ED"/>
+            </a:solidFill>
+            <a:prstDash val="solid"/>
+          </a:ln>
+        </p:spPr>
+      </p:sp>
+      <p:sp>
+        <p:nvSpPr>
+          <p:cNvPr id="13" name="">
+            <a:extLst xmlns:a="http://schemas.openxmlformats.org/drawingml/2006/main">
+              <a:ext uri="{FF2B5EF4-FFF2-40B4-BE49-F238E27FC236}">
+                <a16:creationId xmlns:a16="http://schemas.microsoft.com/office/drawing/2014/main" id="{B17A3EFF-2811-423A-87B3-B044D5203CCF}"/>
+              </a:ext>
+            </a:extLst>
+          </p:cNvPr>
+          <p:cNvSpPr>
+            <a:spLocks xmlns:a="http://schemas.openxmlformats.org/drawingml/2006/main" noGrp="1"/>
+          </p:cNvSpPr>
+          <p:nvPr/>
+        </p:nvSpPr>
+        <p:spPr>
+          <a:xfrm xmlns:a="http://schemas.openxmlformats.org/drawingml/2006/main">
+            <a:off x="8858250" y="2343150"/>
+            <a:ext cx="57150" cy="1638300"/>
           </a:xfrm>
           <a:prstGeom xmlns:a="http://schemas.openxmlformats.org/drawingml/2006/main" prst="rect">
             <a:avLst/>
@@ -11834,73 +14182,22 @@
       </p:sp>
       <p:sp>
         <p:nvSpPr>
-          <p:cNvPr id="6" name="">
-            <a:extLst xmlns:a="http://schemas.openxmlformats.org/drawingml/2006/main">
-              <a:ext uri="{FF2B5EF4-FFF2-40B4-BE49-F238E27FC236}">
-                <a16:creationId xmlns:a16="http://schemas.microsoft.com/office/drawing/2014/main" id="{5C044C1A-994F-4016-84DA-48878C3BEA1A}"/>
-              </a:ext>
-            </a:extLst>
-          </p:cNvPr>
-          <p:cNvSpPr>
-            <a:spLocks xmlns:a="http://schemas.openxmlformats.org/drawingml/2006/main" noGrp="1"/>
-          </p:cNvSpPr>
-          <p:nvPr/>
-        </p:nvSpPr>
-        <p:spPr>
-          <a:xfrm xmlns:a="http://schemas.openxmlformats.org/drawingml/2006/main">
-            <a:off x="857250" y="2962275"/>
-            <a:ext cx="419100" cy="285750"/>
-          </a:xfrm>
-          <a:prstGeom xmlns:a="http://schemas.openxmlformats.org/drawingml/2006/main" prst="rect">
-            <a:avLst/>
-          </a:prstGeom>
-          <a:ln xmlns:a="http://schemas.openxmlformats.org/drawingml/2006/main" w="0">
-            <a:solidFill>
-              <a:srgbClr val="FFFFFF"/>
-            </a:solidFill>
-            <a:prstDash val="solid"/>
-          </a:ln>
-        </p:spPr>
-        <p:txBody>
-          <a:bodyPr xmlns:a="http://schemas.openxmlformats.org/drawingml/2006/main" anchor="t"/>
-          <a:lstStyle xmlns:a="http://schemas.openxmlformats.org/drawingml/2006/main"/>
-          <a:p xmlns:a="http://schemas.openxmlformats.org/drawingml/2006/main">
-            <a:pPr algn="ctr">
-              <a:defRPr sz="1500" b="1">
-                <a:solidFill>
-                  <a:srgbClr val="FFFFFF"/>
-                </a:solidFill>
-              </a:defRPr>
-            </a:pPr>
-            <a:r>
-              <a:rPr sz="1500" b="1">
-                <a:solidFill>
-                  <a:srgbClr val="FFFFFF"/>
-                </a:solidFill>
-              </a:rPr>
-              <a:t>1</a:t>
-            </a:r>
-          </a:p>
-        </p:txBody>
-      </p:sp>
-      <p:sp>
-        <p:nvSpPr>
-          <p:cNvPr id="7" name="">
-            <a:extLst xmlns:a="http://schemas.openxmlformats.org/drawingml/2006/main">
-              <a:ext uri="{FF2B5EF4-FFF2-40B4-BE49-F238E27FC236}">
-                <a16:creationId xmlns:a16="http://schemas.microsoft.com/office/drawing/2014/main" id="{8BE8F063-52B9-4270-A47A-E235F9C87804}"/>
-              </a:ext>
-            </a:extLst>
-          </p:cNvPr>
-          <p:cNvSpPr>
-            <a:spLocks xmlns:a="http://schemas.openxmlformats.org/drawingml/2006/main" noGrp="1"/>
-          </p:cNvSpPr>
-          <p:nvPr/>
-        </p:nvSpPr>
-        <p:spPr>
-          <a:xfrm xmlns:a="http://schemas.openxmlformats.org/drawingml/2006/main">
-            <a:off x="857250" y="3524250"/>
-            <a:ext cx="1295400" cy="304800"/>
+          <p:cNvPr id="14" name="">
+            <a:extLst xmlns:a="http://schemas.openxmlformats.org/drawingml/2006/main">
+              <a:ext uri="{FF2B5EF4-FFF2-40B4-BE49-F238E27FC236}">
+                <a16:creationId xmlns:a16="http://schemas.microsoft.com/office/drawing/2014/main" id="{F4071771-CB63-41EB-999C-284261955807}"/>
+              </a:ext>
+            </a:extLst>
+          </p:cNvPr>
+          <p:cNvSpPr>
+            <a:spLocks xmlns:a="http://schemas.openxmlformats.org/drawingml/2006/main" noGrp="1"/>
+          </p:cNvSpPr>
+          <p:nvPr/>
+        </p:nvSpPr>
+        <p:spPr>
+          <a:xfrm xmlns:a="http://schemas.openxmlformats.org/drawingml/2006/main">
+            <a:off x="9086850" y="2533650"/>
+            <a:ext cx="2000250" cy="285750"/>
           </a:xfrm>
           <a:prstGeom xmlns:a="http://schemas.openxmlformats.org/drawingml/2006/main" prst="rect">
             <a:avLst/>
@@ -11917,41 +14214,41 @@
           <a:lstStyle xmlns:a="http://schemas.openxmlformats.org/drawingml/2006/main"/>
           <a:p xmlns:a="http://schemas.openxmlformats.org/drawingml/2006/main">
             <a:pPr algn="l">
-              <a:defRPr sz="1275" b="1">
+              <a:defRPr sz="1350" b="1">
                 <a:solidFill>
                   <a:srgbClr val="172033"/>
                 </a:solidFill>
               </a:defRPr>
             </a:pPr>
             <a:r>
-              <a:rPr sz="1275" b="1">
+              <a:rPr sz="1350" b="1">
                 <a:solidFill>
                   <a:srgbClr val="172033"/>
                 </a:solidFill>
               </a:rPr>
-              <a:t>Select package</a:t>
-            </a:r>
-          </a:p>
-        </p:txBody>
-      </p:sp>
-      <p:sp>
-        <p:nvSpPr>
-          <p:cNvPr id="8" name="">
-            <a:extLst xmlns:a="http://schemas.openxmlformats.org/drawingml/2006/main">
-              <a:ext uri="{FF2B5EF4-FFF2-40B4-BE49-F238E27FC236}">
-                <a16:creationId xmlns:a16="http://schemas.microsoft.com/office/drawing/2014/main" id="{8783B6A4-2C03-4917-ACAB-559F86BE765C}"/>
-              </a:ext>
-            </a:extLst>
-          </p:cNvPr>
-          <p:cNvSpPr>
-            <a:spLocks xmlns:a="http://schemas.openxmlformats.org/drawingml/2006/main" noGrp="1"/>
-          </p:cNvSpPr>
-          <p:nvPr/>
-        </p:nvSpPr>
-        <p:spPr>
-          <a:xfrm xmlns:a="http://schemas.openxmlformats.org/drawingml/2006/main">
-            <a:off x="857250" y="3905250"/>
-            <a:ext cx="1295400" cy="742950"/>
+              <a:t>Books Care</a:t>
+            </a:r>
+          </a:p>
+        </p:txBody>
+      </p:sp>
+      <p:sp>
+        <p:nvSpPr>
+          <p:cNvPr id="15" name="">
+            <a:extLst xmlns:a="http://schemas.openxmlformats.org/drawingml/2006/main">
+              <a:ext uri="{FF2B5EF4-FFF2-40B4-BE49-F238E27FC236}">
+                <a16:creationId xmlns:a16="http://schemas.microsoft.com/office/drawing/2014/main" id="{CA09BF96-1D70-4C07-BA55-F15B579007BB}"/>
+              </a:ext>
+            </a:extLst>
+          </p:cNvPr>
+          <p:cNvSpPr>
+            <a:spLocks xmlns:a="http://schemas.openxmlformats.org/drawingml/2006/main" noGrp="1"/>
+          </p:cNvSpPr>
+          <p:nvPr/>
+        </p:nvSpPr>
+        <p:spPr>
+          <a:xfrm xmlns:a="http://schemas.openxmlformats.org/drawingml/2006/main">
+            <a:off x="9086850" y="2895600"/>
+            <a:ext cx="1981200" cy="952500"/>
           </a:xfrm>
           <a:prstGeom xmlns:a="http://schemas.openxmlformats.org/drawingml/2006/main" prst="rect">
             <a:avLst/>
@@ -11968,92 +14265,41 @@
           <a:lstStyle xmlns:a="http://schemas.openxmlformats.org/drawingml/2006/main"/>
           <a:p xmlns:a="http://schemas.openxmlformats.org/drawingml/2006/main">
             <a:pPr algn="l">
-              <a:defRPr sz="900" b="0">
+              <a:defRPr sz="1050" b="0">
                 <a:solidFill>
                   <a:srgbClr val="5F6F86"/>
                 </a:solidFill>
               </a:defRPr>
             </a:pPr>
             <a:r>
-              <a:rPr sz="900" b="0">
+              <a:rPr sz="1050" b="0">
                 <a:solidFill>
                   <a:srgbClr val="5F6F86"/>
                 </a:solidFill>
               </a:rPr>
-              <a:t>Confirm Books Foundation or the expanded Books Complete scope.</a:t>
-            </a:r>
-          </a:p>
-        </p:txBody>
-      </p:sp>
-      <p:sp>
-        <p:nvSpPr>
-          <p:cNvPr id="9" name="">
-            <a:extLst xmlns:a="http://schemas.openxmlformats.org/drawingml/2006/main">
-              <a:ext uri="{FF2B5EF4-FFF2-40B4-BE49-F238E27FC236}">
-                <a16:creationId xmlns:a16="http://schemas.microsoft.com/office/drawing/2014/main" id="{8120AAFF-14BE-48C2-88E5-7770535EF968}"/>
-              </a:ext>
-            </a:extLst>
-          </p:cNvPr>
-          <p:cNvSpPr>
-            <a:spLocks xmlns:a="http://schemas.openxmlformats.org/drawingml/2006/main" noGrp="1"/>
-          </p:cNvSpPr>
-          <p:nvPr/>
-        </p:nvSpPr>
-        <p:spPr>
-          <a:xfrm xmlns:a="http://schemas.openxmlformats.org/drawingml/2006/main">
-            <a:off x="2438400" y="3314700"/>
-            <a:ext cx="323850" cy="323850"/>
-          </a:xfrm>
-          <a:prstGeom xmlns:a="http://schemas.openxmlformats.org/drawingml/2006/main" prst="rect">
-            <a:avLst/>
-          </a:prstGeom>
-          <a:ln xmlns:a="http://schemas.openxmlformats.org/drawingml/2006/main" w="0">
-            <a:solidFill>
-              <a:srgbClr val="FFFFFF"/>
-            </a:solidFill>
-            <a:prstDash val="solid"/>
-          </a:ln>
-        </p:spPr>
-        <p:txBody>
-          <a:bodyPr xmlns:a="http://schemas.openxmlformats.org/drawingml/2006/main" anchor="ctr"/>
-          <a:lstStyle xmlns:a="http://schemas.openxmlformats.org/drawingml/2006/main"/>
-          <a:p xmlns:a="http://schemas.openxmlformats.org/drawingml/2006/main">
-            <a:pPr algn="ctr">
-              <a:defRPr sz="1650" b="1">
-                <a:solidFill>
-                  <a:srgbClr val="145DA0"/>
-                </a:solidFill>
-              </a:defRPr>
-            </a:pPr>
-            <a:r>
-              <a:rPr sz="1650" b="1">
-                <a:solidFill>
-                  <a:srgbClr val="145DA0"/>
-                </a:solidFill>
-              </a:rPr>
-              <a:t>-&gt;</a:t>
-            </a:r>
-          </a:p>
-        </p:txBody>
-      </p:sp>
-      <p:sp>
-        <p:nvSpPr>
-          <p:cNvPr id="10" name="">
-            <a:extLst xmlns:a="http://schemas.openxmlformats.org/drawingml/2006/main">
-              <a:ext uri="{FF2B5EF4-FFF2-40B4-BE49-F238E27FC236}">
-                <a16:creationId xmlns:a16="http://schemas.microsoft.com/office/drawing/2014/main" id="{274E7210-6B4B-4DA5-90BA-0495887793C8}"/>
-              </a:ext>
-            </a:extLst>
-          </p:cNvPr>
-          <p:cNvSpPr>
-            <a:spLocks xmlns:a="http://schemas.openxmlformats.org/drawingml/2006/main" noGrp="1"/>
-          </p:cNvSpPr>
-          <p:nvPr/>
-        </p:nvSpPr>
-        <p:spPr>
-          <a:xfrm xmlns:a="http://schemas.openxmlformats.org/drawingml/2006/main">
-            <a:off x="2895600" y="2667000"/>
-            <a:ext cx="1676400" cy="1676400"/>
+              <a:t>Optional monthly lane for month-end review, reconciliation checks, and small accounting changes.</a:t>
+            </a:r>
+          </a:p>
+        </p:txBody>
+      </p:sp>
+      <p:sp>
+        <p:nvSpPr>
+          <p:cNvPr id="16" name="">
+            <a:extLst xmlns:a="http://schemas.openxmlformats.org/drawingml/2006/main">
+              <a:ext uri="{FF2B5EF4-FFF2-40B4-BE49-F238E27FC236}">
+                <a16:creationId xmlns:a16="http://schemas.microsoft.com/office/drawing/2014/main" id="{74A504FF-81D7-49B7-9C4C-A34F79999431}"/>
+              </a:ext>
+            </a:extLst>
+          </p:cNvPr>
+          <p:cNvSpPr>
+            <a:spLocks xmlns:a="http://schemas.openxmlformats.org/drawingml/2006/main" noGrp="1"/>
+          </p:cNvSpPr>
+          <p:nvPr/>
+        </p:nvSpPr>
+        <p:spPr>
+          <a:xfrm xmlns:a="http://schemas.openxmlformats.org/drawingml/2006/main">
+            <a:off x="6153150" y="4343400"/>
+            <a:ext cx="5086350" cy="1143000"/>
           </a:xfrm>
           <a:prstGeom xmlns:a="http://schemas.openxmlformats.org/drawingml/2006/main" prst="rect">
             <a:avLst/>
@@ -12071,22 +14317,22 @@
       </p:sp>
       <p:sp>
         <p:nvSpPr>
-          <p:cNvPr id="11" name="">
-            <a:extLst xmlns:a="http://schemas.openxmlformats.org/drawingml/2006/main">
-              <a:ext uri="{FF2B5EF4-FFF2-40B4-BE49-F238E27FC236}">
-                <a16:creationId xmlns:a16="http://schemas.microsoft.com/office/drawing/2014/main" id="{DC5259C2-C559-40ED-A8B4-6E5EECB8FD47}"/>
-              </a:ext>
-            </a:extLst>
-          </p:cNvPr>
-          <p:cNvSpPr>
-            <a:spLocks xmlns:a="http://schemas.openxmlformats.org/drawingml/2006/main" noGrp="1"/>
-          </p:cNvSpPr>
-          <p:nvPr/>
-        </p:nvSpPr>
-        <p:spPr>
-          <a:xfrm xmlns:a="http://schemas.openxmlformats.org/drawingml/2006/main">
-            <a:off x="3067050" y="2895600"/>
-            <a:ext cx="419100" cy="419100"/>
+          <p:cNvPr id="17" name="">
+            <a:extLst xmlns:a="http://schemas.openxmlformats.org/drawingml/2006/main">
+              <a:ext uri="{FF2B5EF4-FFF2-40B4-BE49-F238E27FC236}">
+                <a16:creationId xmlns:a16="http://schemas.microsoft.com/office/drawing/2014/main" id="{C2F535C8-4916-4672-97D8-FE9D86B46CC5}"/>
+              </a:ext>
+            </a:extLst>
+          </p:cNvPr>
+          <p:cNvSpPr>
+            <a:spLocks xmlns:a="http://schemas.openxmlformats.org/drawingml/2006/main" noGrp="1"/>
+          </p:cNvSpPr>
+          <p:nvPr/>
+        </p:nvSpPr>
+        <p:spPr>
+          <a:xfrm xmlns:a="http://schemas.openxmlformats.org/drawingml/2006/main">
+            <a:off x="6153150" y="4343400"/>
+            <a:ext cx="57150" cy="1143000"/>
           </a:xfrm>
           <a:prstGeom xmlns:a="http://schemas.openxmlformats.org/drawingml/2006/main" prst="rect">
             <a:avLst/>
@@ -12104,73 +14350,22 @@
       </p:sp>
       <p:sp>
         <p:nvSpPr>
-          <p:cNvPr id="12" name="">
-            <a:extLst xmlns:a="http://schemas.openxmlformats.org/drawingml/2006/main">
-              <a:ext uri="{FF2B5EF4-FFF2-40B4-BE49-F238E27FC236}">
-                <a16:creationId xmlns:a16="http://schemas.microsoft.com/office/drawing/2014/main" id="{F164FBFC-89C6-4D5A-8139-2C79CEAD1FA2}"/>
-              </a:ext>
-            </a:extLst>
-          </p:cNvPr>
-          <p:cNvSpPr>
-            <a:spLocks xmlns:a="http://schemas.openxmlformats.org/drawingml/2006/main" noGrp="1"/>
-          </p:cNvSpPr>
-          <p:nvPr/>
-        </p:nvSpPr>
-        <p:spPr>
-          <a:xfrm xmlns:a="http://schemas.openxmlformats.org/drawingml/2006/main">
-            <a:off x="3067050" y="2962275"/>
-            <a:ext cx="419100" cy="285750"/>
-          </a:xfrm>
-          <a:prstGeom xmlns:a="http://schemas.openxmlformats.org/drawingml/2006/main" prst="rect">
-            <a:avLst/>
-          </a:prstGeom>
-          <a:ln xmlns:a="http://schemas.openxmlformats.org/drawingml/2006/main" w="0">
-            <a:solidFill>
-              <a:srgbClr val="FFFFFF"/>
-            </a:solidFill>
-            <a:prstDash val="solid"/>
-          </a:ln>
-        </p:spPr>
-        <p:txBody>
-          <a:bodyPr xmlns:a="http://schemas.openxmlformats.org/drawingml/2006/main" anchor="t"/>
-          <a:lstStyle xmlns:a="http://schemas.openxmlformats.org/drawingml/2006/main"/>
-          <a:p xmlns:a="http://schemas.openxmlformats.org/drawingml/2006/main">
-            <a:pPr algn="ctr">
-              <a:defRPr sz="1500" b="1">
-                <a:solidFill>
-                  <a:srgbClr val="FFFFFF"/>
-                </a:solidFill>
-              </a:defRPr>
-            </a:pPr>
-            <a:r>
-              <a:rPr sz="1500" b="1">
-                <a:solidFill>
-                  <a:srgbClr val="FFFFFF"/>
-                </a:solidFill>
-              </a:rPr>
-              <a:t>2</a:t>
-            </a:r>
-          </a:p>
-        </p:txBody>
-      </p:sp>
-      <p:sp>
-        <p:nvSpPr>
-          <p:cNvPr id="13" name="">
-            <a:extLst xmlns:a="http://schemas.openxmlformats.org/drawingml/2006/main">
-              <a:ext uri="{FF2B5EF4-FFF2-40B4-BE49-F238E27FC236}">
-                <a16:creationId xmlns:a16="http://schemas.microsoft.com/office/drawing/2014/main" id="{9F7D7ADB-C31B-4266-BCFD-609101DDC9D7}"/>
-              </a:ext>
-            </a:extLst>
-          </p:cNvPr>
-          <p:cNvSpPr>
-            <a:spLocks xmlns:a="http://schemas.openxmlformats.org/drawingml/2006/main" noGrp="1"/>
-          </p:cNvSpPr>
-          <p:nvPr/>
-        </p:nvSpPr>
-        <p:spPr>
-          <a:xfrm xmlns:a="http://schemas.openxmlformats.org/drawingml/2006/main">
-            <a:off x="3067050" y="3524250"/>
-            <a:ext cx="1295400" cy="304800"/>
+          <p:cNvPr id="18" name="">
+            <a:extLst xmlns:a="http://schemas.openxmlformats.org/drawingml/2006/main">
+              <a:ext uri="{FF2B5EF4-FFF2-40B4-BE49-F238E27FC236}">
+                <a16:creationId xmlns:a16="http://schemas.microsoft.com/office/drawing/2014/main" id="{AE96DE3E-69EC-4F3D-8CD6-977C8AB833FD}"/>
+              </a:ext>
+            </a:extLst>
+          </p:cNvPr>
+          <p:cNvSpPr>
+            <a:spLocks xmlns:a="http://schemas.openxmlformats.org/drawingml/2006/main" noGrp="1"/>
+          </p:cNvSpPr>
+          <p:nvPr/>
+        </p:nvSpPr>
+        <p:spPr>
+          <a:xfrm xmlns:a="http://schemas.openxmlformats.org/drawingml/2006/main">
+            <a:off x="6381750" y="4533900"/>
+            <a:ext cx="4705350" cy="285750"/>
           </a:xfrm>
           <a:prstGeom xmlns:a="http://schemas.openxmlformats.org/drawingml/2006/main" prst="rect">
             <a:avLst/>
@@ -12187,41 +14382,92 @@
           <a:lstStyle xmlns:a="http://schemas.openxmlformats.org/drawingml/2006/main"/>
           <a:p xmlns:a="http://schemas.openxmlformats.org/drawingml/2006/main">
             <a:pPr algn="l">
-              <a:defRPr sz="1275" b="1">
+              <a:defRPr sz="1350" b="1">
                 <a:solidFill>
                   <a:srgbClr val="172033"/>
                 </a:solidFill>
               </a:defRPr>
             </a:pPr>
             <a:r>
-              <a:rPr sz="1275" b="1">
+              <a:rPr sz="1350" b="1">
                 <a:solidFill>
                   <a:srgbClr val="172033"/>
                 </a:solidFill>
               </a:rPr>
-              <a:t>Approve SOW</a:t>
-            </a:r>
-          </a:p>
-        </p:txBody>
-      </p:sp>
-      <p:sp>
-        <p:nvSpPr>
-          <p:cNvPr id="14" name="">
-            <a:extLst xmlns:a="http://schemas.openxmlformats.org/drawingml/2006/main">
-              <a:ext uri="{FF2B5EF4-FFF2-40B4-BE49-F238E27FC236}">
-                <a16:creationId xmlns:a16="http://schemas.microsoft.com/office/drawing/2014/main" id="{46C20AA3-1FCA-4662-ADEA-6BF68CD65279}"/>
-              </a:ext>
-            </a:extLst>
-          </p:cNvPr>
-          <p:cNvSpPr>
-            <a:spLocks xmlns:a="http://schemas.openxmlformats.org/drawingml/2006/main" noGrp="1"/>
-          </p:cNvSpPr>
-          <p:nvPr/>
-        </p:nvSpPr>
-        <p:spPr>
-          <a:xfrm xmlns:a="http://schemas.openxmlformats.org/drawingml/2006/main">
-            <a:off x="3067050" y="3905250"/>
-            <a:ext cx="1295400" cy="742950"/>
+              <a:t>Builds on what is shipped</a:t>
+            </a:r>
+          </a:p>
+        </p:txBody>
+      </p:sp>
+      <p:sp>
+        <p:nvSpPr>
+          <p:cNvPr id="19" name="">
+            <a:extLst xmlns:a="http://schemas.openxmlformats.org/drawingml/2006/main">
+              <a:ext uri="{FF2B5EF4-FFF2-40B4-BE49-F238E27FC236}">
+                <a16:creationId xmlns:a16="http://schemas.microsoft.com/office/drawing/2014/main" id="{02A2AD99-5B77-48EE-B6D7-D556288C0289}"/>
+              </a:ext>
+            </a:extLst>
+          </p:cNvPr>
+          <p:cNvSpPr>
+            <a:spLocks xmlns:a="http://schemas.openxmlformats.org/drawingml/2006/main" noGrp="1"/>
+          </p:cNvSpPr>
+          <p:nvPr/>
+        </p:nvSpPr>
+        <p:spPr>
+          <a:xfrm xmlns:a="http://schemas.openxmlformats.org/drawingml/2006/main">
+            <a:off x="6381750" y="4895850"/>
+            <a:ext cx="4686300" cy="457200"/>
+          </a:xfrm>
+          <a:prstGeom xmlns:a="http://schemas.openxmlformats.org/drawingml/2006/main" prst="rect">
+            <a:avLst/>
+          </a:prstGeom>
+          <a:ln xmlns:a="http://schemas.openxmlformats.org/drawingml/2006/main" w="0">
+            <a:solidFill>
+              <a:srgbClr val="FFFFFF"/>
+            </a:solidFill>
+            <a:prstDash val="solid"/>
+          </a:ln>
+        </p:spPr>
+        <p:txBody>
+          <a:bodyPr xmlns:a="http://schemas.openxmlformats.org/drawingml/2006/main" anchor="t"/>
+          <a:lstStyle xmlns:a="http://schemas.openxmlformats.org/drawingml/2006/main"/>
+          <a:p xmlns:a="http://schemas.openxmlformats.org/drawingml/2006/main">
+            <a:pPr algn="l">
+              <a:defRPr sz="1050" b="0">
+                <a:solidFill>
+                  <a:srgbClr val="5F6F86"/>
+                </a:solidFill>
+              </a:defRPr>
+            </a:pPr>
+            <a:r>
+              <a:rPr sz="1050" b="0">
+                <a:solidFill>
+                  <a:srgbClr val="5F6F86"/>
+                </a:solidFill>
+              </a:rPr>
+              <a:t>The ledger, A/R, A/P, registers, job costing, statements, recurring, period close, and invoice/bill/statement PDFs are already built. This phase tailors and rolls them out for Raves.</a:t>
+            </a:r>
+          </a:p>
+        </p:txBody>
+      </p:sp>
+      <p:sp>
+        <p:nvSpPr>
+          <p:cNvPr id="20" name="">
+            <a:extLst xmlns:a="http://schemas.openxmlformats.org/drawingml/2006/main">
+              <a:ext uri="{FF2B5EF4-FFF2-40B4-BE49-F238E27FC236}">
+                <a16:creationId xmlns:a16="http://schemas.microsoft.com/office/drawing/2014/main" id="{EC0BCDCF-63DA-43C1-86C0-05C77834E634}"/>
+              </a:ext>
+            </a:extLst>
+          </p:cNvPr>
+          <p:cNvSpPr>
+            <a:spLocks xmlns:a="http://schemas.openxmlformats.org/drawingml/2006/main" noGrp="1"/>
+          </p:cNvSpPr>
+          <p:nvPr/>
+        </p:nvSpPr>
+        <p:spPr>
+          <a:xfrm xmlns:a="http://schemas.openxmlformats.org/drawingml/2006/main">
+            <a:off x="685800" y="6400800"/>
+            <a:ext cx="4000500" cy="228600"/>
           </a:xfrm>
           <a:prstGeom xmlns:a="http://schemas.openxmlformats.org/drawingml/2006/main" prst="rect">
             <a:avLst/>
@@ -12240,287 +14486,17 @@
             <a:pPr algn="l">
               <a:defRPr sz="900" b="0">
                 <a:solidFill>
-                  <a:srgbClr val="5F6F86"/>
+                  <a:srgbClr val="7B8798"/>
                 </a:solidFill>
               </a:defRPr>
             </a:pPr>
             <a:r>
               <a:rPr sz="900" b="0">
                 <a:solidFill>
-                  <a:srgbClr val="5F6F86"/>
-                </a:solidFill>
-              </a:rPr>
-              <a:t>Name the approval owner and target decision date.</a:t>
-            </a:r>
-          </a:p>
-        </p:txBody>
-      </p:sp>
-      <p:sp>
-        <p:nvSpPr>
-          <p:cNvPr id="15" name="">
-            <a:extLst xmlns:a="http://schemas.openxmlformats.org/drawingml/2006/main">
-              <a:ext uri="{FF2B5EF4-FFF2-40B4-BE49-F238E27FC236}">
-                <a16:creationId xmlns:a16="http://schemas.microsoft.com/office/drawing/2014/main" id="{A8FAA5DB-2EC9-4C33-BA05-608F5D94B713}"/>
-              </a:ext>
-            </a:extLst>
-          </p:cNvPr>
-          <p:cNvSpPr>
-            <a:spLocks xmlns:a="http://schemas.openxmlformats.org/drawingml/2006/main" noGrp="1"/>
-          </p:cNvSpPr>
-          <p:nvPr/>
-        </p:nvSpPr>
-        <p:spPr>
-          <a:xfrm xmlns:a="http://schemas.openxmlformats.org/drawingml/2006/main">
-            <a:off x="4648200" y="3314700"/>
-            <a:ext cx="323850" cy="323850"/>
-          </a:xfrm>
-          <a:prstGeom xmlns:a="http://schemas.openxmlformats.org/drawingml/2006/main" prst="rect">
-            <a:avLst/>
-          </a:prstGeom>
-          <a:ln xmlns:a="http://schemas.openxmlformats.org/drawingml/2006/main" w="0">
-            <a:solidFill>
-              <a:srgbClr val="FFFFFF"/>
-            </a:solidFill>
-            <a:prstDash val="solid"/>
-          </a:ln>
-        </p:spPr>
-        <p:txBody>
-          <a:bodyPr xmlns:a="http://schemas.openxmlformats.org/drawingml/2006/main" anchor="ctr"/>
-          <a:lstStyle xmlns:a="http://schemas.openxmlformats.org/drawingml/2006/main"/>
-          <a:p xmlns:a="http://schemas.openxmlformats.org/drawingml/2006/main">
-            <a:pPr algn="ctr">
-              <a:defRPr sz="1650" b="1">
-                <a:solidFill>
-                  <a:srgbClr val="145DA0"/>
-                </a:solidFill>
-              </a:defRPr>
-            </a:pPr>
-            <a:r>
-              <a:rPr sz="1650" b="1">
-                <a:solidFill>
-                  <a:srgbClr val="145DA0"/>
-                </a:solidFill>
-              </a:rPr>
-              <a:t>-&gt;</a:t>
-            </a:r>
-          </a:p>
-        </p:txBody>
-      </p:sp>
-      <p:sp>
-        <p:nvSpPr>
-          <p:cNvPr id="16" name="">
-            <a:extLst xmlns:a="http://schemas.openxmlformats.org/drawingml/2006/main">
-              <a:ext uri="{FF2B5EF4-FFF2-40B4-BE49-F238E27FC236}">
-                <a16:creationId xmlns:a16="http://schemas.microsoft.com/office/drawing/2014/main" id="{B5FE538E-D5EE-46B3-8DAF-9661FA5FAD47}"/>
-              </a:ext>
-            </a:extLst>
-          </p:cNvPr>
-          <p:cNvSpPr>
-            <a:spLocks xmlns:a="http://schemas.openxmlformats.org/drawingml/2006/main" noGrp="1"/>
-          </p:cNvSpPr>
-          <p:nvPr/>
-        </p:nvSpPr>
-        <p:spPr>
-          <a:xfrm xmlns:a="http://schemas.openxmlformats.org/drawingml/2006/main">
-            <a:off x="5105400" y="2667000"/>
-            <a:ext cx="1676400" cy="1676400"/>
-          </a:xfrm>
-          <a:prstGeom xmlns:a="http://schemas.openxmlformats.org/drawingml/2006/main" prst="rect">
-            <a:avLst/>
-          </a:prstGeom>
-          <a:solidFill xmlns:a="http://schemas.openxmlformats.org/drawingml/2006/main">
-            <a:srgbClr val="FFFFFF"/>
-          </a:solidFill>
-          <a:ln xmlns:a="http://schemas.openxmlformats.org/drawingml/2006/main" w="0">
-            <a:solidFill>
-              <a:srgbClr val="D8E2ED"/>
-            </a:solidFill>
-            <a:prstDash val="solid"/>
-          </a:ln>
-        </p:spPr>
-      </p:sp>
-      <p:sp>
-        <p:nvSpPr>
-          <p:cNvPr id="17" name="">
-            <a:extLst xmlns:a="http://schemas.openxmlformats.org/drawingml/2006/main">
-              <a:ext uri="{FF2B5EF4-FFF2-40B4-BE49-F238E27FC236}">
-                <a16:creationId xmlns:a16="http://schemas.microsoft.com/office/drawing/2014/main" id="{F22D529D-C089-471B-BE90-AD1CE3CA8799}"/>
-              </a:ext>
-            </a:extLst>
-          </p:cNvPr>
-          <p:cNvSpPr>
-            <a:spLocks xmlns:a="http://schemas.openxmlformats.org/drawingml/2006/main" noGrp="1"/>
-          </p:cNvSpPr>
-          <p:nvPr/>
-        </p:nvSpPr>
-        <p:spPr>
-          <a:xfrm xmlns:a="http://schemas.openxmlformats.org/drawingml/2006/main">
-            <a:off x="5276850" y="2895600"/>
-            <a:ext cx="419100" cy="419100"/>
-          </a:xfrm>
-          <a:prstGeom xmlns:a="http://schemas.openxmlformats.org/drawingml/2006/main" prst="rect">
-            <a:avLst/>
-          </a:prstGeom>
-          <a:solidFill xmlns:a="http://schemas.openxmlformats.org/drawingml/2006/main">
-            <a:srgbClr val="D98C16"/>
-          </a:solidFill>
-          <a:ln xmlns:a="http://schemas.openxmlformats.org/drawingml/2006/main" w="0">
-            <a:solidFill>
-              <a:srgbClr val="D98C16"/>
-            </a:solidFill>
-            <a:prstDash val="solid"/>
-          </a:ln>
-        </p:spPr>
-      </p:sp>
-      <p:sp>
-        <p:nvSpPr>
-          <p:cNvPr id="18" name="">
-            <a:extLst xmlns:a="http://schemas.openxmlformats.org/drawingml/2006/main">
-              <a:ext uri="{FF2B5EF4-FFF2-40B4-BE49-F238E27FC236}">
-                <a16:creationId xmlns:a16="http://schemas.microsoft.com/office/drawing/2014/main" id="{2FBAAE6A-FF83-486E-BA65-371B7FB91995}"/>
-              </a:ext>
-            </a:extLst>
-          </p:cNvPr>
-          <p:cNvSpPr>
-            <a:spLocks xmlns:a="http://schemas.openxmlformats.org/drawingml/2006/main" noGrp="1"/>
-          </p:cNvSpPr>
-          <p:nvPr/>
-        </p:nvSpPr>
-        <p:spPr>
-          <a:xfrm xmlns:a="http://schemas.openxmlformats.org/drawingml/2006/main">
-            <a:off x="5276850" y="2962275"/>
-            <a:ext cx="419100" cy="285750"/>
-          </a:xfrm>
-          <a:prstGeom xmlns:a="http://schemas.openxmlformats.org/drawingml/2006/main" prst="rect">
-            <a:avLst/>
-          </a:prstGeom>
-          <a:ln xmlns:a="http://schemas.openxmlformats.org/drawingml/2006/main" w="0">
-            <a:solidFill>
-              <a:srgbClr val="FFFFFF"/>
-            </a:solidFill>
-            <a:prstDash val="solid"/>
-          </a:ln>
-        </p:spPr>
-        <p:txBody>
-          <a:bodyPr xmlns:a="http://schemas.openxmlformats.org/drawingml/2006/main" anchor="t"/>
-          <a:lstStyle xmlns:a="http://schemas.openxmlformats.org/drawingml/2006/main"/>
-          <a:p xmlns:a="http://schemas.openxmlformats.org/drawingml/2006/main">
-            <a:pPr algn="ctr">
-              <a:defRPr sz="1500" b="1">
-                <a:solidFill>
-                  <a:srgbClr val="FFFFFF"/>
-                </a:solidFill>
-              </a:defRPr>
-            </a:pPr>
-            <a:r>
-              <a:rPr sz="1500" b="1">
-                <a:solidFill>
-                  <a:srgbClr val="FFFFFF"/>
-                </a:solidFill>
-              </a:rPr>
-              <a:t>3</a:t>
-            </a:r>
-          </a:p>
-        </p:txBody>
-      </p:sp>
-      <p:sp>
-        <p:nvSpPr>
-          <p:cNvPr id="19" name="">
-            <a:extLst xmlns:a="http://schemas.openxmlformats.org/drawingml/2006/main">
-              <a:ext uri="{FF2B5EF4-FFF2-40B4-BE49-F238E27FC236}">
-                <a16:creationId xmlns:a16="http://schemas.microsoft.com/office/drawing/2014/main" id="{3AE1D533-126D-4FBF-817D-2E215533BB35}"/>
-              </a:ext>
-            </a:extLst>
-          </p:cNvPr>
-          <p:cNvSpPr>
-            <a:spLocks xmlns:a="http://schemas.openxmlformats.org/drawingml/2006/main" noGrp="1"/>
-          </p:cNvSpPr>
-          <p:nvPr/>
-        </p:nvSpPr>
-        <p:spPr>
-          <a:xfrm xmlns:a="http://schemas.openxmlformats.org/drawingml/2006/main">
-            <a:off x="5276850" y="3524250"/>
-            <a:ext cx="1295400" cy="304800"/>
-          </a:xfrm>
-          <a:prstGeom xmlns:a="http://schemas.openxmlformats.org/drawingml/2006/main" prst="rect">
-            <a:avLst/>
-          </a:prstGeom>
-          <a:ln xmlns:a="http://schemas.openxmlformats.org/drawingml/2006/main" w="0">
-            <a:solidFill>
-              <a:srgbClr val="FFFFFF"/>
-            </a:solidFill>
-            <a:prstDash val="solid"/>
-          </a:ln>
-        </p:spPr>
-        <p:txBody>
-          <a:bodyPr xmlns:a="http://schemas.openxmlformats.org/drawingml/2006/main" anchor="t"/>
-          <a:lstStyle xmlns:a="http://schemas.openxmlformats.org/drawingml/2006/main"/>
-          <a:p xmlns:a="http://schemas.openxmlformats.org/drawingml/2006/main">
-            <a:pPr algn="l">
-              <a:defRPr sz="1275" b="1">
-                <a:solidFill>
-                  <a:srgbClr val="172033"/>
-                </a:solidFill>
-              </a:defRPr>
-            </a:pPr>
-            <a:r>
-              <a:rPr sz="1275" b="1">
-                <a:solidFill>
-                  <a:srgbClr val="172033"/>
-                </a:solidFill>
-              </a:rPr>
-              <a:t>Confirm inputs</a:t>
-            </a:r>
-          </a:p>
-        </p:txBody>
-      </p:sp>
-      <p:sp>
-        <p:nvSpPr>
-          <p:cNvPr id="20" name="">
-            <a:extLst xmlns:a="http://schemas.openxmlformats.org/drawingml/2006/main">
-              <a:ext uri="{FF2B5EF4-FFF2-40B4-BE49-F238E27FC236}">
-                <a16:creationId xmlns:a16="http://schemas.microsoft.com/office/drawing/2014/main" id="{456A74A8-F3B6-443C-AE9B-246D2E94C97E}"/>
-              </a:ext>
-            </a:extLst>
-          </p:cNvPr>
-          <p:cNvSpPr>
-            <a:spLocks xmlns:a="http://schemas.openxmlformats.org/drawingml/2006/main" noGrp="1"/>
-          </p:cNvSpPr>
-          <p:nvPr/>
-        </p:nvSpPr>
-        <p:spPr>
-          <a:xfrm xmlns:a="http://schemas.openxmlformats.org/drawingml/2006/main">
-            <a:off x="5276850" y="3905250"/>
-            <a:ext cx="1295400" cy="742950"/>
-          </a:xfrm>
-          <a:prstGeom xmlns:a="http://schemas.openxmlformats.org/drawingml/2006/main" prst="rect">
-            <a:avLst/>
-          </a:prstGeom>
-          <a:ln xmlns:a="http://schemas.openxmlformats.org/drawingml/2006/main" w="0">
-            <a:solidFill>
-              <a:srgbClr val="FFFFFF"/>
-            </a:solidFill>
-            <a:prstDash val="solid"/>
-          </a:ln>
-        </p:spPr>
-        <p:txBody>
-          <a:bodyPr xmlns:a="http://schemas.openxmlformats.org/drawingml/2006/main" anchor="t"/>
-          <a:lstStyle xmlns:a="http://schemas.openxmlformats.org/drawingml/2006/main"/>
-          <a:p xmlns:a="http://schemas.openxmlformats.org/drawingml/2006/main">
-            <a:pPr algn="l">
-              <a:defRPr sz="900" b="0">
-                <a:solidFill>
-                  <a:srgbClr val="5F6F86"/>
-                </a:solidFill>
-              </a:defRPr>
-            </a:pPr>
-            <a:r>
-              <a:rPr sz="900" b="0">
-                <a:solidFill>
-                  <a:srgbClr val="5F6F86"/>
-                </a:solidFill>
-              </a:rPr>
-              <a:t>Accounting owner, opening balances, chart-of-accounts review, and tax/entity basics.</a:t>
+                  <a:srgbClr val="7B8798"/>
+                </a:solidFill>
+              </a:rPr>
+              <a:t>Blueprint Books for Raves</a:t>
             </a:r>
           </a:p>
         </p:txBody>
@@ -12530,598 +14506,7 @@
           <p:cNvPr id="21" name="">
             <a:extLst xmlns:a="http://schemas.openxmlformats.org/drawingml/2006/main">
               <a:ext uri="{FF2B5EF4-FFF2-40B4-BE49-F238E27FC236}">
-                <a16:creationId xmlns:a16="http://schemas.microsoft.com/office/drawing/2014/main" id="{3EFA2495-0A9E-4A92-8E14-1871DFBD6630}"/>
-              </a:ext>
-            </a:extLst>
-          </p:cNvPr>
-          <p:cNvSpPr>
-            <a:spLocks xmlns:a="http://schemas.openxmlformats.org/drawingml/2006/main" noGrp="1"/>
-          </p:cNvSpPr>
-          <p:nvPr/>
-        </p:nvSpPr>
-        <p:spPr>
-          <a:xfrm xmlns:a="http://schemas.openxmlformats.org/drawingml/2006/main">
-            <a:off x="6858000" y="3314700"/>
-            <a:ext cx="323850" cy="323850"/>
-          </a:xfrm>
-          <a:prstGeom xmlns:a="http://schemas.openxmlformats.org/drawingml/2006/main" prst="rect">
-            <a:avLst/>
-          </a:prstGeom>
-          <a:ln xmlns:a="http://schemas.openxmlformats.org/drawingml/2006/main" w="0">
-            <a:solidFill>
-              <a:srgbClr val="FFFFFF"/>
-            </a:solidFill>
-            <a:prstDash val="solid"/>
-          </a:ln>
-        </p:spPr>
-        <p:txBody>
-          <a:bodyPr xmlns:a="http://schemas.openxmlformats.org/drawingml/2006/main" anchor="ctr"/>
-          <a:lstStyle xmlns:a="http://schemas.openxmlformats.org/drawingml/2006/main"/>
-          <a:p xmlns:a="http://schemas.openxmlformats.org/drawingml/2006/main">
-            <a:pPr algn="ctr">
-              <a:defRPr sz="1650" b="1">
-                <a:solidFill>
-                  <a:srgbClr val="145DA0"/>
-                </a:solidFill>
-              </a:defRPr>
-            </a:pPr>
-            <a:r>
-              <a:rPr sz="1650" b="1">
-                <a:solidFill>
-                  <a:srgbClr val="145DA0"/>
-                </a:solidFill>
-              </a:rPr>
-              <a:t>-&gt;</a:t>
-            </a:r>
-          </a:p>
-        </p:txBody>
-      </p:sp>
-      <p:sp>
-        <p:nvSpPr>
-          <p:cNvPr id="22" name="">
-            <a:extLst xmlns:a="http://schemas.openxmlformats.org/drawingml/2006/main">
-              <a:ext uri="{FF2B5EF4-FFF2-40B4-BE49-F238E27FC236}">
-                <a16:creationId xmlns:a16="http://schemas.microsoft.com/office/drawing/2014/main" id="{9F2AF274-DE87-4797-8277-7DE067AA8C15}"/>
-              </a:ext>
-            </a:extLst>
-          </p:cNvPr>
-          <p:cNvSpPr>
-            <a:spLocks xmlns:a="http://schemas.openxmlformats.org/drawingml/2006/main" noGrp="1"/>
-          </p:cNvSpPr>
-          <p:nvPr/>
-        </p:nvSpPr>
-        <p:spPr>
-          <a:xfrm xmlns:a="http://schemas.openxmlformats.org/drawingml/2006/main">
-            <a:off x="7315200" y="2667000"/>
-            <a:ext cx="1676400" cy="1676400"/>
-          </a:xfrm>
-          <a:prstGeom xmlns:a="http://schemas.openxmlformats.org/drawingml/2006/main" prst="rect">
-            <a:avLst/>
-          </a:prstGeom>
-          <a:solidFill xmlns:a="http://schemas.openxmlformats.org/drawingml/2006/main">
-            <a:srgbClr val="FFFFFF"/>
-          </a:solidFill>
-          <a:ln xmlns:a="http://schemas.openxmlformats.org/drawingml/2006/main" w="0">
-            <a:solidFill>
-              <a:srgbClr val="D8E2ED"/>
-            </a:solidFill>
-            <a:prstDash val="solid"/>
-          </a:ln>
-        </p:spPr>
-      </p:sp>
-      <p:sp>
-        <p:nvSpPr>
-          <p:cNvPr id="23" name="">
-            <a:extLst xmlns:a="http://schemas.openxmlformats.org/drawingml/2006/main">
-              <a:ext uri="{FF2B5EF4-FFF2-40B4-BE49-F238E27FC236}">
-                <a16:creationId xmlns:a16="http://schemas.microsoft.com/office/drawing/2014/main" id="{C79E6734-E42A-4C1F-9F9E-9120B345E372}"/>
-              </a:ext>
-            </a:extLst>
-          </p:cNvPr>
-          <p:cNvSpPr>
-            <a:spLocks xmlns:a="http://schemas.openxmlformats.org/drawingml/2006/main" noGrp="1"/>
-          </p:cNvSpPr>
-          <p:nvPr/>
-        </p:nvSpPr>
-        <p:spPr>
-          <a:xfrm xmlns:a="http://schemas.openxmlformats.org/drawingml/2006/main">
-            <a:off x="7486650" y="2895600"/>
-            <a:ext cx="419100" cy="419100"/>
-          </a:xfrm>
-          <a:prstGeom xmlns:a="http://schemas.openxmlformats.org/drawingml/2006/main" prst="rect">
-            <a:avLst/>
-          </a:prstGeom>
-          <a:solidFill xmlns:a="http://schemas.openxmlformats.org/drawingml/2006/main">
-            <a:srgbClr val="23A6D5"/>
-          </a:solidFill>
-          <a:ln xmlns:a="http://schemas.openxmlformats.org/drawingml/2006/main" w="0">
-            <a:solidFill>
-              <a:srgbClr val="23A6D5"/>
-            </a:solidFill>
-            <a:prstDash val="solid"/>
-          </a:ln>
-        </p:spPr>
-      </p:sp>
-      <p:sp>
-        <p:nvSpPr>
-          <p:cNvPr id="24" name="">
-            <a:extLst xmlns:a="http://schemas.openxmlformats.org/drawingml/2006/main">
-              <a:ext uri="{FF2B5EF4-FFF2-40B4-BE49-F238E27FC236}">
-                <a16:creationId xmlns:a16="http://schemas.microsoft.com/office/drawing/2014/main" id="{582EC1AD-E27B-4276-8B8E-068361DCD578}"/>
-              </a:ext>
-            </a:extLst>
-          </p:cNvPr>
-          <p:cNvSpPr>
-            <a:spLocks xmlns:a="http://schemas.openxmlformats.org/drawingml/2006/main" noGrp="1"/>
-          </p:cNvSpPr>
-          <p:nvPr/>
-        </p:nvSpPr>
-        <p:spPr>
-          <a:xfrm xmlns:a="http://schemas.openxmlformats.org/drawingml/2006/main">
-            <a:off x="7486650" y="2962275"/>
-            <a:ext cx="419100" cy="285750"/>
-          </a:xfrm>
-          <a:prstGeom xmlns:a="http://schemas.openxmlformats.org/drawingml/2006/main" prst="rect">
-            <a:avLst/>
-          </a:prstGeom>
-          <a:ln xmlns:a="http://schemas.openxmlformats.org/drawingml/2006/main" w="0">
-            <a:solidFill>
-              <a:srgbClr val="FFFFFF"/>
-            </a:solidFill>
-            <a:prstDash val="solid"/>
-          </a:ln>
-        </p:spPr>
-        <p:txBody>
-          <a:bodyPr xmlns:a="http://schemas.openxmlformats.org/drawingml/2006/main" anchor="t"/>
-          <a:lstStyle xmlns:a="http://schemas.openxmlformats.org/drawingml/2006/main"/>
-          <a:p xmlns:a="http://schemas.openxmlformats.org/drawingml/2006/main">
-            <a:pPr algn="ctr">
-              <a:defRPr sz="1500" b="1">
-                <a:solidFill>
-                  <a:srgbClr val="FFFFFF"/>
-                </a:solidFill>
-              </a:defRPr>
-            </a:pPr>
-            <a:r>
-              <a:rPr sz="1500" b="1">
-                <a:solidFill>
-                  <a:srgbClr val="FFFFFF"/>
-                </a:solidFill>
-              </a:rPr>
-              <a:t>4</a:t>
-            </a:r>
-          </a:p>
-        </p:txBody>
-      </p:sp>
-      <p:sp>
-        <p:nvSpPr>
-          <p:cNvPr id="25" name="">
-            <a:extLst xmlns:a="http://schemas.openxmlformats.org/drawingml/2006/main">
-              <a:ext uri="{FF2B5EF4-FFF2-40B4-BE49-F238E27FC236}">
-                <a16:creationId xmlns:a16="http://schemas.microsoft.com/office/drawing/2014/main" id="{28AD6735-D7D9-4869-A20F-33DBEDB339D6}"/>
-              </a:ext>
-            </a:extLst>
-          </p:cNvPr>
-          <p:cNvSpPr>
-            <a:spLocks xmlns:a="http://schemas.openxmlformats.org/drawingml/2006/main" noGrp="1"/>
-          </p:cNvSpPr>
-          <p:nvPr/>
-        </p:nvSpPr>
-        <p:spPr>
-          <a:xfrm xmlns:a="http://schemas.openxmlformats.org/drawingml/2006/main">
-            <a:off x="7486650" y="3524250"/>
-            <a:ext cx="1295400" cy="304800"/>
-          </a:xfrm>
-          <a:prstGeom xmlns:a="http://schemas.openxmlformats.org/drawingml/2006/main" prst="rect">
-            <a:avLst/>
-          </a:prstGeom>
-          <a:ln xmlns:a="http://schemas.openxmlformats.org/drawingml/2006/main" w="0">
-            <a:solidFill>
-              <a:srgbClr val="FFFFFF"/>
-            </a:solidFill>
-            <a:prstDash val="solid"/>
-          </a:ln>
-        </p:spPr>
-        <p:txBody>
-          <a:bodyPr xmlns:a="http://schemas.openxmlformats.org/drawingml/2006/main" anchor="t"/>
-          <a:lstStyle xmlns:a="http://schemas.openxmlformats.org/drawingml/2006/main"/>
-          <a:p xmlns:a="http://schemas.openxmlformats.org/drawingml/2006/main">
-            <a:pPr algn="l">
-              <a:defRPr sz="1275" b="1">
-                <a:solidFill>
-                  <a:srgbClr val="172033"/>
-                </a:solidFill>
-              </a:defRPr>
-            </a:pPr>
-            <a:r>
-              <a:rPr sz="1275" b="1">
-                <a:solidFill>
-                  <a:srgbClr val="172033"/>
-                </a:solidFill>
-              </a:rPr>
-              <a:t>Implement</a:t>
-            </a:r>
-          </a:p>
-        </p:txBody>
-      </p:sp>
-      <p:sp>
-        <p:nvSpPr>
-          <p:cNvPr id="26" name="">
-            <a:extLst xmlns:a="http://schemas.openxmlformats.org/drawingml/2006/main">
-              <a:ext uri="{FF2B5EF4-FFF2-40B4-BE49-F238E27FC236}">
-                <a16:creationId xmlns:a16="http://schemas.microsoft.com/office/drawing/2014/main" id="{18517A23-D880-4628-8168-7F378D7624CF}"/>
-              </a:ext>
-            </a:extLst>
-          </p:cNvPr>
-          <p:cNvSpPr>
-            <a:spLocks xmlns:a="http://schemas.openxmlformats.org/drawingml/2006/main" noGrp="1"/>
-          </p:cNvSpPr>
-          <p:nvPr/>
-        </p:nvSpPr>
-        <p:spPr>
-          <a:xfrm xmlns:a="http://schemas.openxmlformats.org/drawingml/2006/main">
-            <a:off x="7486650" y="3905250"/>
-            <a:ext cx="1295400" cy="742950"/>
-          </a:xfrm>
-          <a:prstGeom xmlns:a="http://schemas.openxmlformats.org/drawingml/2006/main" prst="rect">
-            <a:avLst/>
-          </a:prstGeom>
-          <a:ln xmlns:a="http://schemas.openxmlformats.org/drawingml/2006/main" w="0">
-            <a:solidFill>
-              <a:srgbClr val="FFFFFF"/>
-            </a:solidFill>
-            <a:prstDash val="solid"/>
-          </a:ln>
-        </p:spPr>
-        <p:txBody>
-          <a:bodyPr xmlns:a="http://schemas.openxmlformats.org/drawingml/2006/main" anchor="t"/>
-          <a:lstStyle xmlns:a="http://schemas.openxmlformats.org/drawingml/2006/main"/>
-          <a:p xmlns:a="http://schemas.openxmlformats.org/drawingml/2006/main">
-            <a:pPr algn="l">
-              <a:defRPr sz="900" b="0">
-                <a:solidFill>
-                  <a:srgbClr val="5F6F86"/>
-                </a:solidFill>
-              </a:defRPr>
-            </a:pPr>
-            <a:r>
-              <a:rPr sz="900" b="0">
-                <a:solidFill>
-                  <a:srgbClr val="5F6F86"/>
-                </a:solidFill>
-              </a:rPr>
-              <a:t>Tailor the books, load opening balances, wire A/R and A/P, and train the team.</a:t>
-            </a:r>
-          </a:p>
-        </p:txBody>
-      </p:sp>
-      <p:sp>
-        <p:nvSpPr>
-          <p:cNvPr id="27" name="">
-            <a:extLst xmlns:a="http://schemas.openxmlformats.org/drawingml/2006/main">
-              <a:ext uri="{FF2B5EF4-FFF2-40B4-BE49-F238E27FC236}">
-                <a16:creationId xmlns:a16="http://schemas.microsoft.com/office/drawing/2014/main" id="{D94F156B-8BA1-4101-8DC3-7C12658FC1F1}"/>
-              </a:ext>
-            </a:extLst>
-          </p:cNvPr>
-          <p:cNvSpPr>
-            <a:spLocks xmlns:a="http://schemas.openxmlformats.org/drawingml/2006/main" noGrp="1"/>
-          </p:cNvSpPr>
-          <p:nvPr/>
-        </p:nvSpPr>
-        <p:spPr>
-          <a:xfrm xmlns:a="http://schemas.openxmlformats.org/drawingml/2006/main">
-            <a:off x="9067800" y="3314700"/>
-            <a:ext cx="323850" cy="323850"/>
-          </a:xfrm>
-          <a:prstGeom xmlns:a="http://schemas.openxmlformats.org/drawingml/2006/main" prst="rect">
-            <a:avLst/>
-          </a:prstGeom>
-          <a:ln xmlns:a="http://schemas.openxmlformats.org/drawingml/2006/main" w="0">
-            <a:solidFill>
-              <a:srgbClr val="FFFFFF"/>
-            </a:solidFill>
-            <a:prstDash val="solid"/>
-          </a:ln>
-        </p:spPr>
-        <p:txBody>
-          <a:bodyPr xmlns:a="http://schemas.openxmlformats.org/drawingml/2006/main" anchor="ctr"/>
-          <a:lstStyle xmlns:a="http://schemas.openxmlformats.org/drawingml/2006/main"/>
-          <a:p xmlns:a="http://schemas.openxmlformats.org/drawingml/2006/main">
-            <a:pPr algn="ctr">
-              <a:defRPr sz="1650" b="1">
-                <a:solidFill>
-                  <a:srgbClr val="145DA0"/>
-                </a:solidFill>
-              </a:defRPr>
-            </a:pPr>
-            <a:r>
-              <a:rPr sz="1650" b="1">
-                <a:solidFill>
-                  <a:srgbClr val="145DA0"/>
-                </a:solidFill>
-              </a:rPr>
-              <a:t>-&gt;</a:t>
-            </a:r>
-          </a:p>
-        </p:txBody>
-      </p:sp>
-      <p:sp>
-        <p:nvSpPr>
-          <p:cNvPr id="28" name="">
-            <a:extLst xmlns:a="http://schemas.openxmlformats.org/drawingml/2006/main">
-              <a:ext uri="{FF2B5EF4-FFF2-40B4-BE49-F238E27FC236}">
-                <a16:creationId xmlns:a16="http://schemas.microsoft.com/office/drawing/2014/main" id="{3AAC3618-0304-41E5-82C4-78258289B186}"/>
-              </a:ext>
-            </a:extLst>
-          </p:cNvPr>
-          <p:cNvSpPr>
-            <a:spLocks xmlns:a="http://schemas.openxmlformats.org/drawingml/2006/main" noGrp="1"/>
-          </p:cNvSpPr>
-          <p:nvPr/>
-        </p:nvSpPr>
-        <p:spPr>
-          <a:xfrm xmlns:a="http://schemas.openxmlformats.org/drawingml/2006/main">
-            <a:off x="9525000" y="2667000"/>
-            <a:ext cx="1676400" cy="1676400"/>
-          </a:xfrm>
-          <a:prstGeom xmlns:a="http://schemas.openxmlformats.org/drawingml/2006/main" prst="rect">
-            <a:avLst/>
-          </a:prstGeom>
-          <a:solidFill xmlns:a="http://schemas.openxmlformats.org/drawingml/2006/main">
-            <a:srgbClr val="FFFFFF"/>
-          </a:solidFill>
-          <a:ln xmlns:a="http://schemas.openxmlformats.org/drawingml/2006/main" w="0">
-            <a:solidFill>
-              <a:srgbClr val="D8E2ED"/>
-            </a:solidFill>
-            <a:prstDash val="solid"/>
-          </a:ln>
-        </p:spPr>
-      </p:sp>
-      <p:sp>
-        <p:nvSpPr>
-          <p:cNvPr id="29" name="">
-            <a:extLst xmlns:a="http://schemas.openxmlformats.org/drawingml/2006/main">
-              <a:ext uri="{FF2B5EF4-FFF2-40B4-BE49-F238E27FC236}">
-                <a16:creationId xmlns:a16="http://schemas.microsoft.com/office/drawing/2014/main" id="{87AD986F-D9AB-453B-B293-7A6F9E999C0C}"/>
-              </a:ext>
-            </a:extLst>
-          </p:cNvPr>
-          <p:cNvSpPr>
-            <a:spLocks xmlns:a="http://schemas.openxmlformats.org/drawingml/2006/main" noGrp="1"/>
-          </p:cNvSpPr>
-          <p:nvPr/>
-        </p:nvSpPr>
-        <p:spPr>
-          <a:xfrm xmlns:a="http://schemas.openxmlformats.org/drawingml/2006/main">
-            <a:off x="9696450" y="2895600"/>
-            <a:ext cx="419100" cy="419100"/>
-          </a:xfrm>
-          <a:prstGeom xmlns:a="http://schemas.openxmlformats.org/drawingml/2006/main" prst="rect">
-            <a:avLst/>
-          </a:prstGeom>
-          <a:solidFill xmlns:a="http://schemas.openxmlformats.org/drawingml/2006/main">
-            <a:srgbClr val="1D7F5F"/>
-          </a:solidFill>
-          <a:ln xmlns:a="http://schemas.openxmlformats.org/drawingml/2006/main" w="0">
-            <a:solidFill>
-              <a:srgbClr val="1D7F5F"/>
-            </a:solidFill>
-            <a:prstDash val="solid"/>
-          </a:ln>
-        </p:spPr>
-      </p:sp>
-      <p:sp>
-        <p:nvSpPr>
-          <p:cNvPr id="30" name="">
-            <a:extLst xmlns:a="http://schemas.openxmlformats.org/drawingml/2006/main">
-              <a:ext uri="{FF2B5EF4-FFF2-40B4-BE49-F238E27FC236}">
-                <a16:creationId xmlns:a16="http://schemas.microsoft.com/office/drawing/2014/main" id="{0C36B794-FE27-455E-88AE-74A6F932EE15}"/>
-              </a:ext>
-            </a:extLst>
-          </p:cNvPr>
-          <p:cNvSpPr>
-            <a:spLocks xmlns:a="http://schemas.openxmlformats.org/drawingml/2006/main" noGrp="1"/>
-          </p:cNvSpPr>
-          <p:nvPr/>
-        </p:nvSpPr>
-        <p:spPr>
-          <a:xfrm xmlns:a="http://schemas.openxmlformats.org/drawingml/2006/main">
-            <a:off x="9696450" y="2962275"/>
-            <a:ext cx="419100" cy="285750"/>
-          </a:xfrm>
-          <a:prstGeom xmlns:a="http://schemas.openxmlformats.org/drawingml/2006/main" prst="rect">
-            <a:avLst/>
-          </a:prstGeom>
-          <a:ln xmlns:a="http://schemas.openxmlformats.org/drawingml/2006/main" w="0">
-            <a:solidFill>
-              <a:srgbClr val="FFFFFF"/>
-            </a:solidFill>
-            <a:prstDash val="solid"/>
-          </a:ln>
-        </p:spPr>
-        <p:txBody>
-          <a:bodyPr xmlns:a="http://schemas.openxmlformats.org/drawingml/2006/main" anchor="t"/>
-          <a:lstStyle xmlns:a="http://schemas.openxmlformats.org/drawingml/2006/main"/>
-          <a:p xmlns:a="http://schemas.openxmlformats.org/drawingml/2006/main">
-            <a:pPr algn="ctr">
-              <a:defRPr sz="1500" b="1">
-                <a:solidFill>
-                  <a:srgbClr val="FFFFFF"/>
-                </a:solidFill>
-              </a:defRPr>
-            </a:pPr>
-            <a:r>
-              <a:rPr sz="1500" b="1">
-                <a:solidFill>
-                  <a:srgbClr val="FFFFFF"/>
-                </a:solidFill>
-              </a:rPr>
-              <a:t>5</a:t>
-            </a:r>
-          </a:p>
-        </p:txBody>
-      </p:sp>
-      <p:sp>
-        <p:nvSpPr>
-          <p:cNvPr id="31" name="">
-            <a:extLst xmlns:a="http://schemas.openxmlformats.org/drawingml/2006/main">
-              <a:ext uri="{FF2B5EF4-FFF2-40B4-BE49-F238E27FC236}">
-                <a16:creationId xmlns:a16="http://schemas.microsoft.com/office/drawing/2014/main" id="{894798DF-ECC1-4A18-98DC-C933DFE52E58}"/>
-              </a:ext>
-            </a:extLst>
-          </p:cNvPr>
-          <p:cNvSpPr>
-            <a:spLocks xmlns:a="http://schemas.openxmlformats.org/drawingml/2006/main" noGrp="1"/>
-          </p:cNvSpPr>
-          <p:nvPr/>
-        </p:nvSpPr>
-        <p:spPr>
-          <a:xfrm xmlns:a="http://schemas.openxmlformats.org/drawingml/2006/main">
-            <a:off x="9696450" y="3524250"/>
-            <a:ext cx="1295400" cy="304800"/>
-          </a:xfrm>
-          <a:prstGeom xmlns:a="http://schemas.openxmlformats.org/drawingml/2006/main" prst="rect">
-            <a:avLst/>
-          </a:prstGeom>
-          <a:ln xmlns:a="http://schemas.openxmlformats.org/drawingml/2006/main" w="0">
-            <a:solidFill>
-              <a:srgbClr val="FFFFFF"/>
-            </a:solidFill>
-            <a:prstDash val="solid"/>
-          </a:ln>
-        </p:spPr>
-        <p:txBody>
-          <a:bodyPr xmlns:a="http://schemas.openxmlformats.org/drawingml/2006/main" anchor="t"/>
-          <a:lstStyle xmlns:a="http://schemas.openxmlformats.org/drawingml/2006/main"/>
-          <a:p xmlns:a="http://schemas.openxmlformats.org/drawingml/2006/main">
-            <a:pPr algn="l">
-              <a:defRPr sz="1275" b="1">
-                <a:solidFill>
-                  <a:srgbClr val="172033"/>
-                </a:solidFill>
-              </a:defRPr>
-            </a:pPr>
-            <a:r>
-              <a:rPr sz="1275" b="1">
-                <a:solidFill>
-                  <a:srgbClr val="172033"/>
-                </a:solidFill>
-              </a:rPr>
-              <a:t>First close</a:t>
-            </a:r>
-          </a:p>
-        </p:txBody>
-      </p:sp>
-      <p:sp>
-        <p:nvSpPr>
-          <p:cNvPr id="32" name="">
-            <a:extLst xmlns:a="http://schemas.openxmlformats.org/drawingml/2006/main">
-              <a:ext uri="{FF2B5EF4-FFF2-40B4-BE49-F238E27FC236}">
-                <a16:creationId xmlns:a16="http://schemas.microsoft.com/office/drawing/2014/main" id="{077D18A1-D2E8-46E9-9F89-9277722FD629}"/>
-              </a:ext>
-            </a:extLst>
-          </p:cNvPr>
-          <p:cNvSpPr>
-            <a:spLocks xmlns:a="http://schemas.openxmlformats.org/drawingml/2006/main" noGrp="1"/>
-          </p:cNvSpPr>
-          <p:nvPr/>
-        </p:nvSpPr>
-        <p:spPr>
-          <a:xfrm xmlns:a="http://schemas.openxmlformats.org/drawingml/2006/main">
-            <a:off x="9696450" y="3905250"/>
-            <a:ext cx="1295400" cy="742950"/>
-          </a:xfrm>
-          <a:prstGeom xmlns:a="http://schemas.openxmlformats.org/drawingml/2006/main" prst="rect">
-            <a:avLst/>
-          </a:prstGeom>
-          <a:ln xmlns:a="http://schemas.openxmlformats.org/drawingml/2006/main" w="0">
-            <a:solidFill>
-              <a:srgbClr val="FFFFFF"/>
-            </a:solidFill>
-            <a:prstDash val="solid"/>
-          </a:ln>
-        </p:spPr>
-        <p:txBody>
-          <a:bodyPr xmlns:a="http://schemas.openxmlformats.org/drawingml/2006/main" anchor="t"/>
-          <a:lstStyle xmlns:a="http://schemas.openxmlformats.org/drawingml/2006/main"/>
-          <a:p xmlns:a="http://schemas.openxmlformats.org/drawingml/2006/main">
-            <a:pPr algn="l">
-              <a:defRPr sz="900" b="0">
-                <a:solidFill>
-                  <a:srgbClr val="5F6F86"/>
-                </a:solidFill>
-              </a:defRPr>
-            </a:pPr>
-            <a:r>
-              <a:rPr sz="900" b="0">
-                <a:solidFill>
-                  <a:srgbClr val="5F6F86"/>
-                </a:solidFill>
-              </a:rPr>
-              <a:t>Run the first month-end in Blueprint and lock the period.</a:t>
-            </a:r>
-          </a:p>
-        </p:txBody>
-      </p:sp>
-      <p:sp>
-        <p:nvSpPr>
-          <p:cNvPr id="33" name="">
-            <a:extLst xmlns:a="http://schemas.openxmlformats.org/drawingml/2006/main">
-              <a:ext uri="{FF2B5EF4-FFF2-40B4-BE49-F238E27FC236}">
-                <a16:creationId xmlns:a16="http://schemas.microsoft.com/office/drawing/2014/main" id="{2D093F45-CBC7-4FA7-8EEB-7F8ED7A84C78}"/>
-              </a:ext>
-            </a:extLst>
-          </p:cNvPr>
-          <p:cNvSpPr>
-            <a:spLocks xmlns:a="http://schemas.openxmlformats.org/drawingml/2006/main" noGrp="1"/>
-          </p:cNvSpPr>
-          <p:nvPr/>
-        </p:nvSpPr>
-        <p:spPr>
-          <a:xfrm xmlns:a="http://schemas.openxmlformats.org/drawingml/2006/main">
-            <a:off x="685800" y="6400800"/>
-            <a:ext cx="4000500" cy="228600"/>
-          </a:xfrm>
-          <a:prstGeom xmlns:a="http://schemas.openxmlformats.org/drawingml/2006/main" prst="rect">
-            <a:avLst/>
-          </a:prstGeom>
-          <a:ln xmlns:a="http://schemas.openxmlformats.org/drawingml/2006/main" w="0">
-            <a:solidFill>
-              <a:srgbClr val="FFFFFF"/>
-            </a:solidFill>
-            <a:prstDash val="solid"/>
-          </a:ln>
-        </p:spPr>
-        <p:txBody>
-          <a:bodyPr xmlns:a="http://schemas.openxmlformats.org/drawingml/2006/main" anchor="t"/>
-          <a:lstStyle xmlns:a="http://schemas.openxmlformats.org/drawingml/2006/main"/>
-          <a:p xmlns:a="http://schemas.openxmlformats.org/drawingml/2006/main">
-            <a:pPr algn="l">
-              <a:defRPr sz="900" b="0">
-                <a:solidFill>
-                  <a:srgbClr val="7B8798"/>
-                </a:solidFill>
-              </a:defRPr>
-            </a:pPr>
-            <a:r>
-              <a:rPr sz="900" b="0">
-                <a:solidFill>
-                  <a:srgbClr val="7B8798"/>
-                </a:solidFill>
-              </a:rPr>
-              <a:t>Blueprint Books for Raves</a:t>
-            </a:r>
-          </a:p>
-        </p:txBody>
-      </p:sp>
-      <p:sp>
-        <p:nvSpPr>
-          <p:cNvPr id="34" name="">
-            <a:extLst xmlns:a="http://schemas.openxmlformats.org/drawingml/2006/main">
-              <a:ext uri="{FF2B5EF4-FFF2-40B4-BE49-F238E27FC236}">
-                <a16:creationId xmlns:a16="http://schemas.microsoft.com/office/drawing/2014/main" id="{D79A4F9B-7A9F-4032-977C-35246F9E8B7A}"/>
+                <a16:creationId xmlns:a16="http://schemas.microsoft.com/office/drawing/2014/main" id="{42426524-1564-45A7-ADA2-FFC847C8ECD2}"/>
               </a:ext>
             </a:extLst>
           </p:cNvPr>
@@ -13170,7 +14555,7 @@
     </p:spTree>
     <p:extLst>
       <p:ext uri="{BB962C8B-B14F-4D97-AF65-F5344CB8AC3E}">
-        <p14:creationId xmlns:p14="http://schemas.microsoft.com/office/powerpoint/2010/main" val="1212255944"/>
+        <p14:creationId xmlns:p14="http://schemas.microsoft.com/office/powerpoint/2010/main" val="1826309866"/>
       </p:ext>
     </p:extLst>
   </p:cSld>
